--- a/LINEOA媒体最新情報_2026年10月トレンドレポート.pptx
+++ b/LINEOA媒体最新情報_2026年10月トレンドレポート.pptx
@@ -4693,7 +4693,7 @@
                 </a:solidFill>
                 <a:latin typeface="メイリオ"/>
               </a:rPr>
-              <a:t>2027年2月上旬予定。同日以降のお申し込みページアクセス分から新価格。</a:t>
+              <a:t>2027年2月上旬予定。改定日以降に購入した機材から新価格が適用される。</a:t>
             </a:r>
           </a:p>
         </p:txBody>
@@ -4845,7 +4845,7 @@
                 </a:solidFill>
                 <a:latin typeface="メイリオ"/>
               </a:rPr>
-              <a:t>新価格は代理店資料に掲載。</a:t>
+              <a:t>プリンター：37,000円→41,700円／キャッシュドロアー：16,000円→17,700円。</a:t>
             </a:r>
           </a:p>
         </p:txBody>
@@ -5726,7 +5726,7 @@
                 <a:cs typeface="Meiryo"/>
                 <a:sym typeface="Meiryo"/>
               </a:rPr>
-              <a:t>CRMオプションの利用企業で、新たな導入事例が共有された。</a:t>
+              <a:t>CRMオプションの導入事例（タオル美術館様）が、媒体資料Ver2.0に追加された。</a:t>
             </a:r>
             <a:endParaRPr sz="1200" b="1">
               <a:solidFill>
@@ -5758,7 +5758,7 @@
                 <a:cs typeface="Meiryo"/>
                 <a:sym typeface="Meiryo"/>
               </a:rPr>
-              <a:t>フォームを使ったアンケートで回答率が上がり、</a:t>
+              <a:t>誕生月を聞くフォームで回答数が約2.0倍、</a:t>
             </a:r>
             <a:endParaRPr/>
           </a:p>
@@ -5782,7 +5782,7 @@
                 <a:cs typeface="Meiryo"/>
                 <a:sym typeface="Meiryo"/>
               </a:rPr>
-              <a:t>回答内容に沿った配信でメッセージのCTRが改善した。</a:t>
+              <a:t>好きなキャラクターに合わせた出し分け配信でクリック率が約2.8倍に。</a:t>
             </a:r>
             <a:endParaRPr sz="1400" b="1">
               <a:solidFill>
@@ -6362,7 +6362,7 @@
                 </a:solidFill>
                 <a:latin typeface="メイリオ"/>
               </a:rPr>
-              <a:t>① アンケート回答率UP</a:t>
+              <a:t>① フォーム回答数 約2.0倍</a:t>
             </a:r>
           </a:p>
           <a:p>
@@ -6381,7 +6381,7 @@
                 </a:solidFill>
                 <a:latin typeface="メイリオ"/>
               </a:rPr>
-              <a:t>リサーチ機能ではなくフォームを使うことで、アンケートの回答率が上がった。</a:t>
+              <a:t>リサーチ機能から、誕生月を聞くフォーム（誕生月クーポン付き）に変更。店頭チラシ・リッチメニュー・あいさつメッセージで回答を促した。</a:t>
             </a:r>
           </a:p>
         </p:txBody>
@@ -6438,7 +6438,7 @@
                 </a:solidFill>
                 <a:latin typeface="メイリオ"/>
               </a:rPr>
-              <a:t>② 配信メッセージのCTR改善</a:t>
+              <a:t>② 配信のクリック率 約2.8倍</a:t>
             </a:r>
           </a:p>
           <a:p>
@@ -6457,7 +6457,7 @@
                 </a:solidFill>
                 <a:latin typeface="メイリオ"/>
               </a:rPr>
-              <a:t>ユーザーの回答内容に沿った配信を行い、メッセージのCTRが改善した。</a:t>
+              <a:t>好きなキャラクターをフォームで聞いてタグを付け、コラボ商品の配信を出し分け。従来の一斉配信と比べてクリック率が約2.8倍。</a:t>
             </a:r>
           </a:p>
         </p:txBody>
@@ -8003,7 +8003,7 @@
                 <a:cs typeface="Meiryo"/>
                 <a:sym typeface="Meiryo"/>
               </a:rPr>
-              <a:t>ベースプラン限定で、一定の条件を満たした場合に限り、</a:t>
+              <a:t>これまで一律禁止だった、LINE通知メッセージからネイティブアプリへの遷移が、</a:t>
             </a:r>
             <a:endParaRPr sz="1200" b="1">
               <a:solidFill>
@@ -8035,7 +8035,7 @@
                 <a:cs typeface="Meiryo"/>
                 <a:sym typeface="Meiryo"/>
               </a:rPr>
-              <a:t>通知メッセージのリンクからネイティブアプリへ遷移できるようガイドラインが緩和された。</a:t>
+              <a:t>LINEヤフーの審査で承認された場合に限り解禁された。</a:t>
             </a:r>
             <a:endParaRPr/>
           </a:p>
@@ -8059,7 +8059,7 @@
                 <a:cs typeface="Meiryo"/>
                 <a:sym typeface="Meiryo"/>
               </a:rPr>
-              <a:t>2026年9月9日（水）からLBPMでネイティブアプリ遷移の審査受付を開始。</a:t>
+              <a:t>2026年9月9日（水）からLBPMで審査受付を開始（審査費 10万円／1UX・税抜）。</a:t>
             </a:r>
             <a:endParaRPr sz="1400" b="1">
               <a:solidFill>
@@ -8694,7 +8694,7 @@
                 </a:solidFill>
                 <a:latin typeface="メイリオ"/>
               </a:rPr>
-              <a:t>通知メッセージのリンクからネイティブアプリへは遷移できない</a:t>
+              <a:t>一律でWebサイトへ遷移（ネイティブアプリへの遷移は禁止）</a:t>
             </a:r>
           </a:p>
         </p:txBody>
@@ -8841,7 +8841,7 @@
                 </a:solidFill>
                 <a:latin typeface="メイリオ"/>
               </a:rPr>
-              <a:t>ベースプラン限定・条件付きで遷移可能に</a:t>
+              <a:t>審査承認でネイティブアプリへ遷移可能に</a:t>
             </a:r>
           </a:p>
           <a:p>
@@ -8860,7 +8860,7 @@
                 </a:solidFill>
                 <a:latin typeface="メイリオ"/>
               </a:rPr>
-              <a:t>テンプレート／フレキシブルの両方が対象。審査は10万円／1UX</a:t>
+              <a:t>エッセンシャル／パフォーマンス／アンリミテッドプランが対象</a:t>
             </a:r>
           </a:p>
         </p:txBody>
@@ -8917,7 +8917,7 @@
                 </a:solidFill>
                 <a:latin typeface="メイリオ"/>
               </a:rPr>
-              <a:t>通知からアプリへ直接誘導できる</a:t>
+              <a:t>シームレスな導線でUXが向上</a:t>
             </a:r>
           </a:p>
           <a:p>
@@ -8936,7 +8936,7 @@
                 </a:solidFill>
                 <a:latin typeface="メイリオ"/>
               </a:rPr>
-              <a:t>通知メッセージのリンクからアプリを直接開けるため、Webを経由しない導線を設計できる。</a:t>
+              <a:t>アプリがインストール済みならアプリへ直接遷移、未インストールなら通知内容に関連するWebページへ遷移する。</a:t>
             </a:r>
           </a:p>
         </p:txBody>
@@ -8993,7 +8993,7 @@
                 </a:solidFill>
                 <a:latin typeface="メイリオ"/>
               </a:rPr>
-              <a:t>遷移には事前審査が必要</a:t>
+              <a:t>主な遷移条件</a:t>
             </a:r>
           </a:p>
           <a:p>
@@ -9012,7 +9012,7 @@
                 </a:solidFill>
                 <a:latin typeface="メイリオ"/>
               </a:rPr>
-              <a:t>LBPMでの審査（10万円／1UX）が前提。社外告知は2026年9月8日（火）、審査受付は9月9日（水）から。</a:t>
+              <a:t>Universal links／App Linksであること、送信元と同一ドメインであること、アプリとWebで表示内容が同じであること。ストアへの自動遷移は不可。</a:t>
             </a:r>
           </a:p>
         </p:txBody>
@@ -10731,7 +10731,7 @@
                 </a:solidFill>
                 <a:latin typeface="メイリオ"/>
               </a:rPr>
-              <a:t>発注画面・申請方法も変更</a:t>
+              <a:t>既存案件は再作成が必要</a:t>
             </a:r>
           </a:p>
           <a:p>
@@ -10750,7 +10750,7 @@
                 </a:solidFill>
                 <a:latin typeface="メイリオ"/>
               </a:rPr>
-              <a:t>LBPM上の「UX追加申請（LINE通知メッセージ）」の発注画面と申請方法が新しくなる。</a:t>
+              <a:t>過去に作成した申請を編集しても受領されない。既存案件をコピーして再作成し、LBPMから改めて発注・申請する。</a:t>
             </a:r>
           </a:p>
         </p:txBody>
@@ -10807,7 +10807,7 @@
                 </a:solidFill>
                 <a:latin typeface="メイリオ"/>
               </a:rPr>
-              <a:t>請求書の発行先が変わる</a:t>
+              <a:t>アプリ遷移審査は有償オプションで選択</a:t>
             </a:r>
           </a:p>
           <a:p>
@@ -10826,7 +10826,7 @@
                 </a:solidFill>
                 <a:latin typeface="メイリオ"/>
               </a:rPr>
-              <a:t>2026年10月月初発行分からは、LBPMから請求書を発行する。</a:t>
+              <a:t>2026年9月9日からの新しい発注画面では、申請フォームの入力後に金額計算画面が出る。ネイティブアプリ遷移は有償オプションから選ぶ。</a:t>
             </a:r>
           </a:p>
         </p:txBody>
@@ -12488,7 +12488,7 @@
                 </a:solidFill>
                 <a:latin typeface="メイリオ"/>
               </a:rPr>
-              <a:t>変更内容（参照期間を過去36カ月まで）は同じ</a:t>
+              <a:t>日程は決まり次第、管理画面のお知らせで案内（変更の場合あり）</a:t>
             </a:r>
           </a:p>
         </p:txBody>
@@ -12545,7 +12545,7 @@
                 </a:solidFill>
                 <a:latin typeface="メイリオ"/>
               </a:rPr>
-              <a:t>対象はWeb版・管理アプリの両方</a:t>
+              <a:t>影響は「分析」タブの実績値のみ</a:t>
             </a:r>
           </a:p>
           <a:p>
@@ -12564,7 +12564,7 @@
                 </a:solidFill>
                 <a:latin typeface="メイリオ"/>
               </a:rPr>
-              <a:t>Web版管理画面と管理アプリの「分析」タブで確認できる実績値が、過去36カ月までになる。</a:t>
+              <a:t>Web版管理画面・管理アプリの「分析」タブが対象。それ以外のデータや、作成済みのメッセージには影響しない。</a:t>
             </a:r>
           </a:p>
         </p:txBody>
@@ -12621,7 +12621,7 @@
                 </a:solidFill>
                 <a:latin typeface="メイリオ"/>
               </a:rPr>
-              <a:t>過去データの確認は変更前に</a:t>
+              <a:t>過去データは変更前にダウンロード</a:t>
             </a:r>
           </a:p>
           <a:p>
@@ -12640,7 +12640,7 @@
                 </a:solidFill>
                 <a:latin typeface="メイリオ"/>
               </a:rPr>
-              <a:t>36カ月より前の実績値が必要なクライアントには、リリース前の確認・保存を案内する。</a:t>
+              <a:t>36カ月より前の実績値が必要な場合は事前に確認する。「分析」タブの一部データはダウンロードできる。</a:t>
             </a:r>
           </a:p>
         </p:txBody>
@@ -13477,7 +13477,7 @@
                 <a:cs typeface="Meiryo"/>
                 <a:sym typeface="Meiryo"/>
               </a:rPr>
-              <a:t>媒体資料（更新版）と進行ガイドの2点が公開された。</a:t>
+              <a:t>媒体資料（更新版）と進行ガイド（2026年10月版）が公開された。</a:t>
             </a:r>
             <a:endParaRPr/>
           </a:p>
@@ -13501,7 +13501,7 @@
                 <a:cs typeface="Meiryo"/>
                 <a:sym typeface="Meiryo"/>
               </a:rPr>
-              <a:t>既存のプロモーションスタンプと体裁を揃え、スペックの一部も更新されている。</a:t>
+              <a:t>クリエイティブ基準の緩和と、独自のキャンペーン設計ルールがポイント。</a:t>
             </a:r>
             <a:endParaRPr sz="1400" b="1">
               <a:solidFill>
@@ -14081,7 +14081,7 @@
                 </a:solidFill>
                 <a:latin typeface="メイリオ"/>
               </a:rPr>
-              <a:t>媒体資料：体裁を統一</a:t>
+              <a:t>クリエイティブ基準を3点緩和</a:t>
             </a:r>
           </a:p>
           <a:p>
@@ -14100,7 +14100,7 @@
                 </a:solidFill>
                 <a:latin typeface="メイリオ"/>
               </a:rPr>
-              <a:t>既存のプロモーションスタンプの媒体資料と体裁を統一。</a:t>
+              <a:t>この商品に限り、飲酒表現（注記必須）・実写素材（CM・ポスターの転用可）・PR要素の個数（全体の1/4以内→制限なし）を緩和。</a:t>
             </a:r>
           </a:p>
         </p:txBody>
@@ -14157,7 +14157,7 @@
                 </a:solidFill>
                 <a:latin typeface="メイリオ"/>
               </a:rPr>
-              <a:t>媒体資料：スペックの一部更新</a:t>
+              <a:t>告知できる面・できない面</a:t>
             </a:r>
           </a:p>
           <a:p>
@@ -14176,7 +14176,7 @@
                 </a:solidFill>
                 <a:latin typeface="メイリオ"/>
               </a:rPr>
-              <a:t>期間の延長・短縮化など、スペックの一部を更新。</a:t>
+              <a:t>広告主のLINE公式アカウント・アプリ・SNS・Web・店頭はOK。スタンプショップなどLINEヤフー保有アプリからの告知はNG。</a:t>
             </a:r>
           </a:p>
         </p:txBody>
@@ -14233,7 +14233,7 @@
                 </a:solidFill>
                 <a:latin typeface="メイリオ"/>
               </a:rPr>
-              <a:t>進行ガイド：独自フロー</a:t>
+              <a:t>シリアルコードの付与条件</a:t>
             </a:r>
           </a:p>
           <a:p>
@@ -14252,7 +14252,7 @@
                 </a:solidFill>
                 <a:latin typeface="メイリオ"/>
               </a:rPr>
-              <a:t>シリアルコードスタンプ独自の進行フローを詳しく記載。</a:t>
+              <a:t>Web・オフライン（購入・来店など）での条件達成はOK。アプリ内での条件達成や、獲得までにアプリ遷移を含む導線はNG。</a:t>
             </a:r>
           </a:p>
         </p:txBody>
@@ -14309,7 +14309,7 @@
                 </a:solidFill>
                 <a:latin typeface="メイリオ"/>
               </a:rPr>
-              <a:t>進行ガイド：設計・制作ルール</a:t>
+              <a:t>コード発行は発注受領後</a:t>
             </a:r>
           </a:p>
           <a:p>
@@ -14328,7 +14328,7 @@
                 </a:solidFill>
                 <a:latin typeface="メイリオ"/>
               </a:rPr>
-              <a:t>キャンペーン設計ルールと制作ガイドを詳しく記載。</a:t>
+              <a:t>発注受領後にLBPMで申請し、3営業日を目途に納品。追加発注は不可。印刷・配荷がある場合はその日数も見込む。</a:t>
             </a:r>
           </a:p>
         </p:txBody>
@@ -15997,7 +15997,7 @@
                 </a:solidFill>
                 <a:latin typeface="メイリオ"/>
               </a:rPr>
-              <a:t>対応</a:t>
+              <a:t>利用中の機能は通常どおり</a:t>
             </a:r>
           </a:p>
           <a:p>
@@ -16016,7 +16016,7 @@
                 </a:solidFill>
                 <a:latin typeface="メイリオ"/>
               </a:rPr>
-              <a:t>メンテナンス終了後に、あらためて手続きを行う。</a:t>
+              <a:t>顧客管理・飲食注文・サロン予約など、利用中の機能はメンテナンス中も使える。チャットProオプションは影響なし。</a:t>
             </a:r>
           </a:p>
         </p:txBody>
@@ -16877,7 +16877,7 @@
                 <a:cs typeface="Meiryo"/>
                 <a:sym typeface="Meiryo"/>
               </a:rPr>
-              <a:t>ユニットごとに、開封数・URLタップ数などの統計情報を確認できる。</a:t>
+              <a:t>アンケートで要望の多かった機能。開封数・URLタップ数などをユニットごとに確認できる。</a:t>
             </a:r>
             <a:endParaRPr sz="1400" b="1">
               <a:solidFill>
@@ -17512,7 +17512,7 @@
                 </a:solidFill>
                 <a:latin typeface="メイリオ"/>
               </a:rPr>
-              <a:t>LINE通知メッセージではユニット単位の統計を取得できない</a:t>
+              <a:t>プライバシー保護のため、開封・タップの統計は取得できない</a:t>
             </a:r>
           </a:p>
         </p:txBody>
@@ -17678,7 +17678,7 @@
                 </a:solidFill>
                 <a:latin typeface="メイリオ"/>
               </a:rPr>
-              <a:t>開封数・URLタップ数などをユニットごとに確認できる</a:t>
+              <a:t>開封・URLタップ・動画再生の人数をユニットごとに確認</a:t>
             </a:r>
           </a:p>
         </p:txBody>
@@ -17735,7 +17735,7 @@
                 </a:solidFill>
                 <a:latin typeface="メイリオ"/>
               </a:rPr>
-              <a:t>要望の多かった機能</a:t>
+              <a:t>送信時にユニット名を付ける</a:t>
             </a:r>
           </a:p>
           <a:p>
@@ -17754,7 +17754,7 @@
                 </a:solidFill>
                 <a:latin typeface="メイリオ"/>
               </a:rPr>
-              <a:t>2025年10月・2026年6月の「LINE通知メッセージ」アンケートで、特に要望が多かった機能。</a:t>
+              <a:t>送信時にユニット名（1通に1つ）を指定して集計する。後から付けたり変えたりはできない。月1,000種類まで。</a:t>
             </a:r>
           </a:p>
         </p:txBody>
@@ -17811,7 +17811,7 @@
                 </a:solidFill>
                 <a:latin typeface="メイリオ"/>
               </a:rPr>
-              <a:t>通知ごとの反応を比較できる</a:t>
+              <a:t>少ない数は表示されない</a:t>
             </a:r>
           </a:p>
           <a:p>
@@ -17830,7 +17830,7 @@
                 </a:solidFill>
                 <a:latin typeface="メイリオ"/>
               </a:rPr>
-              <a:t>ユニットごとの開封数・URLタップ数を見て、通知の内容を見直せる。</a:t>
+              <a:t>値が20未満（実人数20人未満）の項目は表示されない。送信数は含まれないため、開封率の分母は別で持っておく。</a:t>
             </a:r>
           </a:p>
         </p:txBody>

--- a/LINEOA媒体最新情報_2026年10月トレンドレポート.pptx
+++ b/LINEOA媒体最新情報_2026年10月トレンドレポート.pptx
@@ -6388,13 +6388,13 @@
       </p:sp>
       <p:sp>
         <p:nvSpPr>
-          <p:cNvPr id="64" name="Rounded Rectangle 63"/>
+          <p:cNvPr id="65" name="Rounded Rectangle 62_add0"/>
           <p:cNvSpPr/>
           <p:nvPr/>
         </p:nvSpPr>
         <p:spPr>
           <a:xfrm>
-            <a:off x="5298988" y="3068960"/>
+            <a:off x="544108" y="4714880"/>
             <a:ext cx="4572000" cy="1463040"/>
           </a:xfrm>
           <a:prstGeom prst="roundRect">
@@ -6438,7 +6438,7 @@
                 </a:solidFill>
                 <a:latin typeface="メイリオ"/>
               </a:rPr>
-              <a:t>② 配信のクリック率 約2.8倍</a:t>
+              <a:t>月額5,000円（税別）</a:t>
             </a:r>
           </a:p>
           <a:p>
@@ -6457,7 +6457,159 @@
                 </a:solidFill>
                 <a:latin typeface="メイリオ"/>
               </a:rPr>
+              <a:t>チャットProオプションを含む。別途LINE公式アカウントのプラン料金がかかる。初期サポート（2万円・1回）も用意。</a:t>
+            </a:r>
+          </a:p>
+        </p:txBody>
+      </p:sp>
+      <p:sp>
+        <p:nvSpPr>
+          <p:cNvPr id="64" name="Rounded Rectangle 63"/>
+          <p:cNvSpPr/>
+          <p:nvPr/>
+        </p:nvSpPr>
+        <p:spPr>
+          <a:xfrm>
+            <a:off x="5298988" y="3068960"/>
+            <a:ext cx="4572000" cy="1463040"/>
+          </a:xfrm>
+          <a:prstGeom prst="roundRect">
+            <a:avLst>
+              <a:gd name="adj" fmla="val 6000"/>
+            </a:avLst>
+          </a:prstGeom>
+          <a:solidFill>
+            <a:srgbClr val="EAF0FA"/>
+          </a:solidFill>
+          <a:ln w="12700">
+            <a:solidFill>
+              <a:srgbClr val="3467B2"/>
+            </a:solidFill>
+          </a:ln>
+          <a:effectLst/>
+        </p:spPr>
+        <p:style>
+          <a:lnRef idx="1">
+            <a:schemeClr val="accent1"/>
+          </a:lnRef>
+          <a:fillRef idx="3">
+            <a:schemeClr val="accent1"/>
+          </a:fillRef>
+          <a:effectRef idx="2">
+            <a:schemeClr val="accent1"/>
+          </a:effectRef>
+          <a:fontRef idx="minor">
+            <a:schemeClr val="lt1"/>
+          </a:fontRef>
+        </p:style>
+        <p:txBody>
+          <a:bodyPr wrap="square" lIns="228600" rIns="182880" rtlCol="0" anchor="ctr"/>
+          <a:lstStyle/>
+          <a:p>
+            <a:pPr algn="l"/>
+            <a:r>
+              <a:rPr sz="1700" b="1">
+                <a:solidFill>
+                  <a:srgbClr val="15133D"/>
+                </a:solidFill>
+                <a:latin typeface="メイリオ"/>
+              </a:rPr>
+              <a:t>② 配信のクリック率 約2.8倍</a:t>
+            </a:r>
+          </a:p>
+          <a:p>
+            <a:pPr algn="l">
+              <a:lnSpc>
+                <a:spcPct val="115000"/>
+              </a:lnSpc>
+              <a:spcBef>
+                <a:spcPts val="600"/>
+              </a:spcBef>
+            </a:pPr>
+            <a:r>
+              <a:rPr sz="1100">
+                <a:solidFill>
+                  <a:srgbClr val="333333"/>
+                </a:solidFill>
+                <a:latin typeface="メイリオ"/>
+              </a:rPr>
               <a:t>好きなキャラクターをフォームで聞いてタグを付け、コラボ商品の配信を出し分け。従来の一斉配信と比べてクリック率が約2.8倍。</a:t>
+            </a:r>
+          </a:p>
+        </p:txBody>
+      </p:sp>
+      <p:sp>
+        <p:nvSpPr>
+          <p:cNvPr id="66" name="Rounded Rectangle 63_add1"/>
+          <p:cNvSpPr/>
+          <p:nvPr/>
+        </p:nvSpPr>
+        <p:spPr>
+          <a:xfrm>
+            <a:off x="5298988" y="4714880"/>
+            <a:ext cx="4572000" cy="1463040"/>
+          </a:xfrm>
+          <a:prstGeom prst="roundRect">
+            <a:avLst>
+              <a:gd name="adj" fmla="val 6000"/>
+            </a:avLst>
+          </a:prstGeom>
+          <a:solidFill>
+            <a:srgbClr val="EAF0FA"/>
+          </a:solidFill>
+          <a:ln w="12700">
+            <a:solidFill>
+              <a:srgbClr val="3467B2"/>
+            </a:solidFill>
+          </a:ln>
+          <a:effectLst/>
+        </p:spPr>
+        <p:style>
+          <a:lnRef idx="1">
+            <a:schemeClr val="accent1"/>
+          </a:lnRef>
+          <a:fillRef idx="3">
+            <a:schemeClr val="accent1"/>
+          </a:fillRef>
+          <a:effectRef idx="2">
+            <a:schemeClr val="accent1"/>
+          </a:effectRef>
+          <a:fontRef idx="minor">
+            <a:schemeClr val="lt1"/>
+          </a:fontRef>
+        </p:style>
+        <p:txBody>
+          <a:bodyPr wrap="square" lIns="228600" rIns="182880" rtlCol="0" anchor="ctr"/>
+          <a:lstStyle/>
+          <a:p>
+            <a:pPr algn="l"/>
+            <a:r>
+              <a:rPr sz="1700" b="1">
+                <a:solidFill>
+                  <a:srgbClr val="15133D"/>
+                </a:solidFill>
+                <a:latin typeface="メイリオ"/>
+              </a:rPr>
+              <a:t>利用条件</a:t>
+            </a:r>
+          </a:p>
+          <a:p>
+            <a:pPr algn="l">
+              <a:lnSpc>
+                <a:spcPct val="115000"/>
+              </a:lnSpc>
+              <a:spcBef>
+                <a:spcPts val="600"/>
+              </a:spcBef>
+            </a:pPr>
+            <a:r>
+              <a:rPr sz="1100">
+                <a:solidFill>
+                  <a:srgbClr val="333333"/>
+                </a:solidFill>
+                <a:latin typeface="メイリオ"/>
+              </a:rPr>
+              <a:t>認証済みアカウントとビジネスマネージャーの接続、友だち数10万人未満が条件。レストラン・Beauty・チャットProとは同時に契約できない。</a:t>
             </a:r>
           </a:p>
         </p:txBody>

--- a/LINEOA媒体最新情報_2026年10月トレンドレポート.pptx
+++ b/LINEOA媒体最新情報_2026年10月トレンドレポート.pptx
@@ -3527,7 +3527,30 @@
                 <a:cs typeface="Meiryo"/>
                 <a:sym typeface="Meiryo"/>
               </a:rPr>
-              <a:t>飲食業</a:t>
+              <a:t>飲食店（レストランオプションで</a:t>
+            </a:r>
+            <a:br>
+              <a:rPr lang="ja-JP" sz="1300" b="0" i="0" u="none" strike="noStrike" cap="none">
+                <a:solidFill>
+                  <a:schemeClr val="dk1"/>
+                </a:solidFill>
+                <a:latin typeface="メイリオ"/>
+                <a:ea typeface="Meiryo"/>
+                <a:cs typeface="Meiryo"/>
+                <a:sym typeface="Meiryo"/>
+              </a:rPr>
+            </a:br>
+            <a:r>
+              <a:rPr lang="ja-JP" sz="1300" b="0" i="0" u="none" strike="noStrike" cap="none">
+                <a:solidFill>
+                  <a:schemeClr val="dk1"/>
+                </a:solidFill>
+                <a:latin typeface="メイリオ"/>
+                <a:ea typeface="Meiryo"/>
+                <a:cs typeface="Meiryo"/>
+                <a:sym typeface="Meiryo"/>
+              </a:rPr>
+              <a:t>店内注文を導入予定）</a:t>
             </a:r>
             <a:endParaRPr/>
           </a:p>
@@ -5215,7 +5238,7 @@
                 <a:cs typeface="Meiryo"/>
                 <a:sym typeface="Meiryo"/>
               </a:rPr>
-              <a:t>全業種</a:t>
+              <a:t>小売・アパレル・教育・サービス業</a:t>
             </a:r>
             <a:endParaRPr/>
           </a:p>
@@ -7644,7 +7667,30 @@
                 <a:cs typeface="Meiryo"/>
                 <a:sym typeface="Meiryo"/>
               </a:rPr>
-              <a:t>アプリを運営している全業種</a:t>
+              <a:t>EC・通販・予約サービス</a:t>
+            </a:r>
+            <a:br>
+              <a:rPr lang="ja-JP" sz="1300" b="0" i="0" u="none" strike="noStrike" cap="none">
+                <a:solidFill>
+                  <a:schemeClr val="dk1"/>
+                </a:solidFill>
+                <a:latin typeface="メイリオ"/>
+                <a:ea typeface="Meiryo"/>
+                <a:cs typeface="Meiryo"/>
+                <a:sym typeface="Meiryo"/>
+              </a:rPr>
+            </a:br>
+            <a:r>
+              <a:rPr lang="ja-JP" sz="1300" b="0" i="0" u="none" strike="noStrike" cap="none">
+                <a:solidFill>
+                  <a:schemeClr val="dk1"/>
+                </a:solidFill>
+                <a:latin typeface="メイリオ"/>
+                <a:ea typeface="Meiryo"/>
+                <a:cs typeface="Meiryo"/>
+                <a:sym typeface="Meiryo"/>
+              </a:rPr>
+              <a:t>（自社アプリあり）</a:t>
             </a:r>
             <a:endParaRPr/>
           </a:p>
@@ -11272,7 +11318,30 @@
                 <a:cs typeface="Meiryo"/>
                 <a:sym typeface="Meiryo"/>
               </a:rPr>
-              <a:t>全業種</a:t>
+              <a:t>前年比較で振り返る</a:t>
+            </a:r>
+            <a:br>
+              <a:rPr lang="ja-JP" sz="1300" b="0" i="0" u="none" strike="noStrike" cap="none">
+                <a:solidFill>
+                  <a:schemeClr val="dk1"/>
+                </a:solidFill>
+                <a:latin typeface="メイリオ"/>
+                <a:ea typeface="Meiryo"/>
+                <a:cs typeface="Meiryo"/>
+                <a:sym typeface="Meiryo"/>
+              </a:rPr>
+            </a:br>
+            <a:r>
+              <a:rPr lang="ja-JP" sz="1300" b="0" i="0" u="none" strike="noStrike" cap="none">
+                <a:solidFill>
+                  <a:schemeClr val="dk1"/>
+                </a:solidFill>
+                <a:latin typeface="メイリオ"/>
+                <a:ea typeface="Meiryo"/>
+                <a:cs typeface="Meiryo"/>
+                <a:sym typeface="Meiryo"/>
+              </a:rPr>
+              <a:t>小売・EC・飲食</a:t>
             </a:r>
             <a:endParaRPr/>
           </a:p>
@@ -13086,7 +13155,30 @@
                 <a:cs typeface="Meiryo"/>
                 <a:sym typeface="Meiryo"/>
               </a:rPr>
-              <a:t>友だち獲得を強化したい全業種</a:t>
+              <a:t>食品・飲料メーカー、</a:t>
+            </a:r>
+            <a:br>
+              <a:rPr lang="ja-JP" sz="1300" b="0" i="0" u="none" strike="noStrike" cap="none">
+                <a:solidFill>
+                  <a:schemeClr val="dk1"/>
+                </a:solidFill>
+                <a:latin typeface="メイリオ"/>
+                <a:ea typeface="Meiryo"/>
+                <a:cs typeface="Meiryo"/>
+                <a:sym typeface="Meiryo"/>
+              </a:rPr>
+            </a:br>
+            <a:r>
+              <a:rPr lang="ja-JP" sz="1300" b="0" i="0" u="none" strike="noStrike" cap="none">
+                <a:solidFill>
+                  <a:schemeClr val="dk1"/>
+                </a:solidFill>
+                <a:latin typeface="メイリオ"/>
+                <a:ea typeface="Meiryo"/>
+                <a:cs typeface="Meiryo"/>
+                <a:sym typeface="Meiryo"/>
+              </a:rPr>
+              <a:t>小売・コンビニ</a:t>
             </a:r>
             <a:endParaRPr/>
           </a:p>
@@ -14774,7 +14866,30 @@
                 <a:cs typeface="Meiryo"/>
                 <a:sym typeface="Meiryo"/>
               </a:rPr>
-              <a:t>各種オプションをご利用中の全業種</a:t>
+              <a:t>飲食店・美容サロン・小売</a:t>
+            </a:r>
+            <a:br>
+              <a:rPr lang="ja-JP" sz="1300" b="0" i="0" u="none" strike="noStrike" cap="none">
+                <a:solidFill>
+                  <a:schemeClr val="dk1"/>
+                </a:solidFill>
+                <a:latin typeface="メイリオ"/>
+                <a:ea typeface="Meiryo"/>
+                <a:cs typeface="Meiryo"/>
+                <a:sym typeface="Meiryo"/>
+              </a:rPr>
+            </a:br>
+            <a:r>
+              <a:rPr lang="ja-JP" sz="1300" b="0" i="0" u="none" strike="noStrike" cap="none">
+                <a:solidFill>
+                  <a:schemeClr val="dk1"/>
+                </a:solidFill>
+                <a:latin typeface="メイリオ"/>
+                <a:ea typeface="Meiryo"/>
+                <a:cs typeface="Meiryo"/>
+                <a:sym typeface="Meiryo"/>
+              </a:rPr>
+              <a:t>（各オプション利用中）</a:t>
             </a:r>
             <a:endParaRPr/>
           </a:p>
@@ -16462,7 +16577,30 @@
                 <a:cs typeface="Meiryo"/>
                 <a:sym typeface="Meiryo"/>
               </a:rPr>
-              <a:t>通知メッセージをご利用中の全業種</a:t>
+              <a:t>EC・物流・金融など</a:t>
+            </a:r>
+            <a:br>
+              <a:rPr lang="ja-JP" sz="1300" b="0" i="0" u="none" strike="noStrike" cap="none">
+                <a:solidFill>
+                  <a:schemeClr val="dk1"/>
+                </a:solidFill>
+                <a:latin typeface="メイリオ"/>
+                <a:ea typeface="Meiryo"/>
+                <a:cs typeface="Meiryo"/>
+                <a:sym typeface="Meiryo"/>
+              </a:rPr>
+            </a:br>
+            <a:r>
+              <a:rPr lang="ja-JP" sz="1300" b="0" i="0" u="none" strike="noStrike" cap="none">
+                <a:solidFill>
+                  <a:schemeClr val="dk1"/>
+                </a:solidFill>
+                <a:latin typeface="メイリオ"/>
+                <a:ea typeface="Meiryo"/>
+                <a:cs typeface="Meiryo"/>
+                <a:sym typeface="Meiryo"/>
+              </a:rPr>
+              <a:t>通知メッセージ導入企業</a:t>
             </a:r>
             <a:endParaRPr/>
           </a:p>
@@ -18276,7 +18414,30 @@
                 <a:cs typeface="Meiryo"/>
                 <a:sym typeface="Meiryo"/>
               </a:rPr>
-              <a:t>友だち獲得を強化したい全業種</a:t>
+              <a:t>小売・食品・通信など</a:t>
+            </a:r>
+            <a:br>
+              <a:rPr lang="ja-JP" sz="1300" b="0" i="0" u="none" strike="noStrike" cap="none">
+                <a:solidFill>
+                  <a:schemeClr val="dk1"/>
+                </a:solidFill>
+                <a:latin typeface="メイリオ"/>
+                <a:ea typeface="Meiryo"/>
+                <a:cs typeface="Meiryo"/>
+                <a:sym typeface="Meiryo"/>
+              </a:rPr>
+            </a:br>
+            <a:r>
+              <a:rPr lang="ja-JP" sz="1300" b="0" i="0" u="none" strike="noStrike" cap="none">
+                <a:solidFill>
+                  <a:schemeClr val="dk1"/>
+                </a:solidFill>
+                <a:latin typeface="メイリオ"/>
+                <a:ea typeface="Meiryo"/>
+                <a:cs typeface="Meiryo"/>
+                <a:sym typeface="Meiryo"/>
+              </a:rPr>
+              <a:t>大規模に友だちを集めたい企業</a:t>
             </a:r>
             <a:endParaRPr/>
           </a:p>

--- a/LINEOA媒体最新情報_2026年10月トレンドレポート.pptx
+++ b/LINEOA媒体最新情報_2026年10月トレンドレポート.pptx
@@ -4654,7 +4654,7 @@
         <p:spPr>
           <a:xfrm>
             <a:off x="544108" y="3068960"/>
-            <a:ext cx="4572000" cy="1463040"/>
+            <a:ext cx="4322443" cy="1463040"/>
           </a:xfrm>
           <a:prstGeom prst="roundRect">
             <a:avLst>
@@ -4691,7 +4691,7 @@
           <a:p>
             <a:pPr algn="l"/>
             <a:r>
-              <a:rPr sz="1700" b="1">
+              <a:rPr sz="1900" b="1">
                 <a:solidFill>
                   <a:srgbClr val="15133D"/>
                 </a:solidFill>
@@ -4710,7 +4710,7 @@
               </a:spcBef>
             </a:pPr>
             <a:r>
-              <a:rPr sz="1100">
+              <a:rPr sz="1300">
                 <a:solidFill>
                   <a:srgbClr val="333333"/>
                 </a:solidFill>
@@ -4729,8 +4729,8 @@
         </p:nvSpPr>
         <p:spPr>
           <a:xfrm>
-            <a:off x="5298988" y="3068960"/>
-            <a:ext cx="4572000" cy="1463040"/>
+            <a:off x="5039448" y="3068960"/>
+            <a:ext cx="4322443" cy="1463040"/>
           </a:xfrm>
           <a:prstGeom prst="roundRect">
             <a:avLst>
@@ -4767,7 +4767,7 @@
           <a:p>
             <a:pPr algn="l"/>
             <a:r>
-              <a:rPr sz="1700" b="1">
+              <a:rPr sz="1900" b="1">
                 <a:solidFill>
                   <a:srgbClr val="15133D"/>
                 </a:solidFill>
@@ -4786,7 +4786,7 @@
               </a:spcBef>
             </a:pPr>
             <a:r>
-              <a:rPr sz="1100">
+              <a:rPr sz="1300">
                 <a:solidFill>
                   <a:srgbClr val="333333"/>
                 </a:solidFill>
@@ -4806,7 +4806,7 @@
         <p:spPr>
           <a:xfrm>
             <a:off x="544108" y="4714880"/>
-            <a:ext cx="4572000" cy="1463040"/>
+            <a:ext cx="4322443" cy="1463040"/>
           </a:xfrm>
           <a:prstGeom prst="roundRect">
             <a:avLst>
@@ -4843,7 +4843,7 @@
           <a:p>
             <a:pPr algn="l"/>
             <a:r>
-              <a:rPr sz="1700" b="1">
+              <a:rPr sz="1900" b="1">
                 <a:solidFill>
                   <a:srgbClr val="15133D"/>
                 </a:solidFill>
@@ -4862,7 +4862,7 @@
               </a:spcBef>
             </a:pPr>
             <a:r>
-              <a:rPr sz="1100">
+              <a:rPr sz="1300">
                 <a:solidFill>
                   <a:srgbClr val="333333"/>
                 </a:solidFill>
@@ -4881,8 +4881,8 @@
         </p:nvSpPr>
         <p:spPr>
           <a:xfrm>
-            <a:off x="5298988" y="4714880"/>
-            <a:ext cx="4572000" cy="1463040"/>
+            <a:off x="5039448" y="4714880"/>
+            <a:ext cx="4322443" cy="1463040"/>
           </a:xfrm>
           <a:prstGeom prst="roundRect">
             <a:avLst>
@@ -4919,7 +4919,7 @@
           <a:p>
             <a:pPr algn="l"/>
             <a:r>
-              <a:rPr sz="1700" b="1">
+              <a:rPr sz="1900" b="1">
                 <a:solidFill>
                   <a:srgbClr val="15133D"/>
                 </a:solidFill>
@@ -4938,7 +4938,7 @@
               </a:spcBef>
             </a:pPr>
             <a:r>
-              <a:rPr sz="1100">
+              <a:rPr sz="1300">
                 <a:solidFill>
                   <a:srgbClr val="333333"/>
                 </a:solidFill>
@@ -6342,7 +6342,7 @@
         <p:spPr>
           <a:xfrm>
             <a:off x="544108" y="3068960"/>
-            <a:ext cx="4572000" cy="1463040"/>
+            <a:ext cx="4322443" cy="1463040"/>
           </a:xfrm>
           <a:prstGeom prst="roundRect">
             <a:avLst>
@@ -6379,7 +6379,7 @@
           <a:p>
             <a:pPr algn="l"/>
             <a:r>
-              <a:rPr sz="1700" b="1">
+              <a:rPr sz="1900" b="1">
                 <a:solidFill>
                   <a:srgbClr val="15133D"/>
                 </a:solidFill>
@@ -6398,7 +6398,7 @@
               </a:spcBef>
             </a:pPr>
             <a:r>
-              <a:rPr sz="1100">
+              <a:rPr sz="1300">
                 <a:solidFill>
                   <a:srgbClr val="333333"/>
                 </a:solidFill>
@@ -6418,7 +6418,7 @@
         <p:spPr>
           <a:xfrm>
             <a:off x="544108" y="4714880"/>
-            <a:ext cx="4572000" cy="1463040"/>
+            <a:ext cx="4322443" cy="1463040"/>
           </a:xfrm>
           <a:prstGeom prst="roundRect">
             <a:avLst>
@@ -6455,7 +6455,7 @@
           <a:p>
             <a:pPr algn="l"/>
             <a:r>
-              <a:rPr sz="1700" b="1">
+              <a:rPr sz="1900" b="1">
                 <a:solidFill>
                   <a:srgbClr val="15133D"/>
                 </a:solidFill>
@@ -6474,7 +6474,7 @@
               </a:spcBef>
             </a:pPr>
             <a:r>
-              <a:rPr sz="1100">
+              <a:rPr sz="1300">
                 <a:solidFill>
                   <a:srgbClr val="333333"/>
                 </a:solidFill>
@@ -6493,8 +6493,8 @@
         </p:nvSpPr>
         <p:spPr>
           <a:xfrm>
-            <a:off x="5298988" y="3068960"/>
-            <a:ext cx="4572000" cy="1463040"/>
+            <a:off x="5039448" y="3068960"/>
+            <a:ext cx="4322443" cy="1463040"/>
           </a:xfrm>
           <a:prstGeom prst="roundRect">
             <a:avLst>
@@ -6531,7 +6531,7 @@
           <a:p>
             <a:pPr algn="l"/>
             <a:r>
-              <a:rPr sz="1700" b="1">
+              <a:rPr sz="1900" b="1">
                 <a:solidFill>
                   <a:srgbClr val="15133D"/>
                 </a:solidFill>
@@ -6550,7 +6550,7 @@
               </a:spcBef>
             </a:pPr>
             <a:r>
-              <a:rPr sz="1100">
+              <a:rPr sz="1300">
                 <a:solidFill>
                   <a:srgbClr val="333333"/>
                 </a:solidFill>
@@ -6569,8 +6569,8 @@
         </p:nvSpPr>
         <p:spPr>
           <a:xfrm>
-            <a:off x="5298988" y="4714880"/>
-            <a:ext cx="4572000" cy="1463040"/>
+            <a:off x="5039448" y="4714880"/>
+            <a:ext cx="4322443" cy="1463040"/>
           </a:xfrm>
           <a:prstGeom prst="roundRect">
             <a:avLst>
@@ -6607,7 +6607,7 @@
           <a:p>
             <a:pPr algn="l"/>
             <a:r>
-              <a:rPr sz="1700" b="1">
+              <a:rPr sz="1900" b="1">
                 <a:solidFill>
                   <a:srgbClr val="15133D"/>
                 </a:solidFill>
@@ -6626,7 +6626,7 @@
               </a:spcBef>
             </a:pPr>
             <a:r>
-              <a:rPr sz="1100">
+              <a:rPr sz="1300">
                 <a:solidFill>
                   <a:srgbClr val="333333"/>
                 </a:solidFill>
@@ -8794,7 +8794,7 @@
         <p:spPr>
           <a:xfrm>
             <a:off x="544108" y="3068960"/>
-            <a:ext cx="3547872" cy="274320"/>
+            <a:ext cx="3354215" cy="274320"/>
           </a:xfrm>
           <a:prstGeom prst="rect">
             <a:avLst/>
@@ -8847,7 +8847,7 @@
         <p:spPr>
           <a:xfrm>
             <a:off x="544108" y="3343280"/>
-            <a:ext cx="3547872" cy="640080"/>
+            <a:ext cx="3354215" cy="640080"/>
           </a:xfrm>
           <a:prstGeom prst="rect">
             <a:avLst/>
@@ -8905,8 +8905,8 @@
         </p:nvSpPr>
         <p:spPr>
           <a:xfrm>
-            <a:off x="4091980" y="3068960"/>
-            <a:ext cx="457200" cy="914400"/>
+            <a:off x="3898323" y="3068960"/>
+            <a:ext cx="432244" cy="914400"/>
           </a:xfrm>
           <a:prstGeom prst="rect">
             <a:avLst/>
@@ -8940,8 +8940,8 @@
         </p:nvSpPr>
         <p:spPr>
           <a:xfrm>
-            <a:off x="4549180" y="3068960"/>
-            <a:ext cx="5321808" cy="274320"/>
+            <a:off x="4330568" y="3068960"/>
+            <a:ext cx="5031323" cy="274320"/>
           </a:xfrm>
           <a:prstGeom prst="rect">
             <a:avLst/>
@@ -8993,8 +8993,8 @@
         </p:nvSpPr>
         <p:spPr>
           <a:xfrm>
-            <a:off x="4549180" y="3343280"/>
-            <a:ext cx="5321808" cy="640080"/>
+            <a:off x="4330568" y="3343280"/>
+            <a:ext cx="5031323" cy="640080"/>
           </a:xfrm>
           <a:prstGeom prst="rect">
             <a:avLst/>
@@ -9072,7 +9072,7 @@
         <p:spPr>
           <a:xfrm>
             <a:off x="544108" y="4211960"/>
-            <a:ext cx="4572000" cy="1371600"/>
+            <a:ext cx="4322443" cy="1371600"/>
           </a:xfrm>
           <a:prstGeom prst="roundRect">
             <a:avLst>
@@ -9109,7 +9109,7 @@
           <a:p>
             <a:pPr algn="l"/>
             <a:r>
-              <a:rPr sz="1700" b="1">
+              <a:rPr sz="1900" b="1">
                 <a:solidFill>
                   <a:srgbClr val="15133D"/>
                 </a:solidFill>
@@ -9128,7 +9128,7 @@
               </a:spcBef>
             </a:pPr>
             <a:r>
-              <a:rPr sz="1100">
+              <a:rPr sz="1300">
                 <a:solidFill>
                   <a:srgbClr val="333333"/>
                 </a:solidFill>
@@ -9147,8 +9147,8 @@
         </p:nvSpPr>
         <p:spPr>
           <a:xfrm>
-            <a:off x="5298988" y="4211960"/>
-            <a:ext cx="4572000" cy="1371600"/>
+            <a:off x="5039448" y="4211960"/>
+            <a:ext cx="4322443" cy="1371600"/>
           </a:xfrm>
           <a:prstGeom prst="roundRect">
             <a:avLst>
@@ -9185,7 +9185,7 @@
           <a:p>
             <a:pPr algn="l"/>
             <a:r>
-              <a:rPr sz="1700" b="1">
+              <a:rPr sz="1900" b="1">
                 <a:solidFill>
                   <a:srgbClr val="15133D"/>
                 </a:solidFill>
@@ -9204,7 +9204,7 @@
               </a:spcBef>
             </a:pPr>
             <a:r>
-              <a:rPr sz="1100">
+              <a:rPr sz="1300">
                 <a:solidFill>
                   <a:srgbClr val="333333"/>
                 </a:solidFill>
@@ -10608,7 +10608,7 @@
         <p:spPr>
           <a:xfrm>
             <a:off x="544108" y="3068960"/>
-            <a:ext cx="3547872" cy="274320"/>
+            <a:ext cx="3354215" cy="274320"/>
           </a:xfrm>
           <a:prstGeom prst="rect">
             <a:avLst/>
@@ -10661,7 +10661,7 @@
         <p:spPr>
           <a:xfrm>
             <a:off x="544108" y="3343280"/>
-            <a:ext cx="3547872" cy="640080"/>
+            <a:ext cx="3354215" cy="640080"/>
           </a:xfrm>
           <a:prstGeom prst="rect">
             <a:avLst/>
@@ -10719,8 +10719,8 @@
         </p:nvSpPr>
         <p:spPr>
           <a:xfrm>
-            <a:off x="4091980" y="3068960"/>
-            <a:ext cx="457200" cy="914400"/>
+            <a:off x="3898323" y="3068960"/>
+            <a:ext cx="432244" cy="914400"/>
           </a:xfrm>
           <a:prstGeom prst="rect">
             <a:avLst/>
@@ -10754,8 +10754,8 @@
         </p:nvSpPr>
         <p:spPr>
           <a:xfrm>
-            <a:off x="4549180" y="3068960"/>
-            <a:ext cx="5321808" cy="274320"/>
+            <a:off x="4330568" y="3068960"/>
+            <a:ext cx="5031323" cy="274320"/>
           </a:xfrm>
           <a:prstGeom prst="rect">
             <a:avLst/>
@@ -10807,8 +10807,8 @@
         </p:nvSpPr>
         <p:spPr>
           <a:xfrm>
-            <a:off x="4549180" y="3343280"/>
-            <a:ext cx="5321808" cy="640080"/>
+            <a:off x="4330568" y="3343280"/>
+            <a:ext cx="5031323" cy="640080"/>
           </a:xfrm>
           <a:prstGeom prst="rect">
             <a:avLst/>
@@ -10886,7 +10886,7 @@
         <p:spPr>
           <a:xfrm>
             <a:off x="544108" y="4211960"/>
-            <a:ext cx="4572000" cy="1371600"/>
+            <a:ext cx="4322443" cy="1371600"/>
           </a:xfrm>
           <a:prstGeom prst="roundRect">
             <a:avLst>
@@ -10923,7 +10923,7 @@
           <a:p>
             <a:pPr algn="l"/>
             <a:r>
-              <a:rPr sz="1700" b="1">
+              <a:rPr sz="1900" b="1">
                 <a:solidFill>
                   <a:srgbClr val="15133D"/>
                 </a:solidFill>
@@ -10942,7 +10942,7 @@
               </a:spcBef>
             </a:pPr>
             <a:r>
-              <a:rPr sz="1100">
+              <a:rPr sz="1300">
                 <a:solidFill>
                   <a:srgbClr val="333333"/>
                 </a:solidFill>
@@ -10961,8 +10961,8 @@
         </p:nvSpPr>
         <p:spPr>
           <a:xfrm>
-            <a:off x="5298988" y="4211960"/>
-            <a:ext cx="4572000" cy="1371600"/>
+            <a:off x="5039448" y="4211960"/>
+            <a:ext cx="4322443" cy="1371600"/>
           </a:xfrm>
           <a:prstGeom prst="roundRect">
             <a:avLst>
@@ -10999,13 +10999,13 @@
           <a:p>
             <a:pPr algn="l"/>
             <a:r>
-              <a:rPr sz="1700" b="1">
+              <a:rPr sz="1900" b="1">
                 <a:solidFill>
                   <a:srgbClr val="15133D"/>
                 </a:solidFill>
                 <a:latin typeface="メイリオ"/>
               </a:rPr>
-              <a:t>アプリ遷移審査は有償オプションで選択</a:t>
+              <a:t>アプリ遷移は有償オプション</a:t>
             </a:r>
           </a:p>
           <a:p>
@@ -11018,13 +11018,13 @@
               </a:spcBef>
             </a:pPr>
             <a:r>
-              <a:rPr sz="1100">
+              <a:rPr sz="1300">
                 <a:solidFill>
                   <a:srgbClr val="333333"/>
                 </a:solidFill>
                 <a:latin typeface="メイリオ"/>
               </a:rPr>
-              <a:t>2026年9月9日からの新しい発注画面では、申請フォームの入力後に金額計算画面が出る。ネイティブアプリ遷移は有償オプションから選ぶ。</a:t>
+              <a:t>9月9日からの新しい発注画面で、ネイティブアプリ遷移の審査を有償オプションとして選ぶ。</a:t>
             </a:r>
           </a:p>
         </p:txBody>
@@ -12445,7 +12445,7 @@
         <p:spPr>
           <a:xfrm>
             <a:off x="544108" y="3068960"/>
-            <a:ext cx="3547872" cy="274320"/>
+            <a:ext cx="3354215" cy="274320"/>
           </a:xfrm>
           <a:prstGeom prst="rect">
             <a:avLst/>
@@ -12498,7 +12498,7 @@
         <p:spPr>
           <a:xfrm>
             <a:off x="544108" y="3343280"/>
-            <a:ext cx="3547872" cy="640080"/>
+            <a:ext cx="3354215" cy="640080"/>
           </a:xfrm>
           <a:prstGeom prst="rect">
             <a:avLst/>
@@ -12556,8 +12556,8 @@
         </p:nvSpPr>
         <p:spPr>
           <a:xfrm>
-            <a:off x="4091980" y="3068960"/>
-            <a:ext cx="457200" cy="914400"/>
+            <a:off x="3898323" y="3068960"/>
+            <a:ext cx="432244" cy="914400"/>
           </a:xfrm>
           <a:prstGeom prst="rect">
             <a:avLst/>
@@ -12591,8 +12591,8 @@
         </p:nvSpPr>
         <p:spPr>
           <a:xfrm>
-            <a:off x="4549180" y="3068960"/>
-            <a:ext cx="5321808" cy="274320"/>
+            <a:off x="4330568" y="3068960"/>
+            <a:ext cx="5031323" cy="274320"/>
           </a:xfrm>
           <a:prstGeom prst="rect">
             <a:avLst/>
@@ -12644,8 +12644,8 @@
         </p:nvSpPr>
         <p:spPr>
           <a:xfrm>
-            <a:off x="4549180" y="3343280"/>
-            <a:ext cx="5321808" cy="640080"/>
+            <a:off x="4330568" y="3343280"/>
+            <a:ext cx="5031323" cy="640080"/>
           </a:xfrm>
           <a:prstGeom prst="rect">
             <a:avLst/>
@@ -12723,7 +12723,7 @@
         <p:spPr>
           <a:xfrm>
             <a:off x="544108" y="4211960"/>
-            <a:ext cx="4572000" cy="1371600"/>
+            <a:ext cx="4322443" cy="1371600"/>
           </a:xfrm>
           <a:prstGeom prst="roundRect">
             <a:avLst>
@@ -12760,7 +12760,7 @@
           <a:p>
             <a:pPr algn="l"/>
             <a:r>
-              <a:rPr sz="1700" b="1">
+              <a:rPr sz="1900" b="1">
                 <a:solidFill>
                   <a:srgbClr val="15133D"/>
                 </a:solidFill>
@@ -12779,7 +12779,7 @@
               </a:spcBef>
             </a:pPr>
             <a:r>
-              <a:rPr sz="1100">
+              <a:rPr sz="1300">
                 <a:solidFill>
                   <a:srgbClr val="333333"/>
                 </a:solidFill>
@@ -12798,8 +12798,8 @@
         </p:nvSpPr>
         <p:spPr>
           <a:xfrm>
-            <a:off x="5298988" y="4211960"/>
-            <a:ext cx="4572000" cy="1371600"/>
+            <a:off x="5039448" y="4211960"/>
+            <a:ext cx="4322443" cy="1371600"/>
           </a:xfrm>
           <a:prstGeom prst="roundRect">
             <a:avLst>
@@ -12836,13 +12836,13 @@
           <a:p>
             <a:pPr algn="l"/>
             <a:r>
-              <a:rPr sz="1700" b="1">
+              <a:rPr sz="1900" b="1">
                 <a:solidFill>
                   <a:srgbClr val="15133D"/>
                 </a:solidFill>
                 <a:latin typeface="メイリオ"/>
               </a:rPr>
-              <a:t>過去データは変更前にダウンロード</a:t>
+              <a:t>過去データは事前に保存</a:t>
             </a:r>
           </a:p>
           <a:p>
@@ -12855,7 +12855,7 @@
               </a:spcBef>
             </a:pPr>
             <a:r>
-              <a:rPr sz="1100">
+              <a:rPr sz="1300">
                 <a:solidFill>
                   <a:srgbClr val="333333"/>
                 </a:solidFill>
@@ -14282,7 +14282,7 @@
         <p:spPr>
           <a:xfrm>
             <a:off x="544108" y="3068960"/>
-            <a:ext cx="4572000" cy="1463040"/>
+            <a:ext cx="4322443" cy="1463040"/>
           </a:xfrm>
           <a:prstGeom prst="roundRect">
             <a:avLst>
@@ -14319,7 +14319,7 @@
           <a:p>
             <a:pPr algn="l"/>
             <a:r>
-              <a:rPr sz="1700" b="1">
+              <a:rPr sz="1900" b="1">
                 <a:solidFill>
                   <a:srgbClr val="15133D"/>
                 </a:solidFill>
@@ -14338,7 +14338,7 @@
               </a:spcBef>
             </a:pPr>
             <a:r>
-              <a:rPr sz="1100">
+              <a:rPr sz="1300">
                 <a:solidFill>
                   <a:srgbClr val="333333"/>
                 </a:solidFill>
@@ -14357,8 +14357,8 @@
         </p:nvSpPr>
         <p:spPr>
           <a:xfrm>
-            <a:off x="5298988" y="3068960"/>
-            <a:ext cx="4572000" cy="1463040"/>
+            <a:off x="5039448" y="3068960"/>
+            <a:ext cx="4322443" cy="1463040"/>
           </a:xfrm>
           <a:prstGeom prst="roundRect">
             <a:avLst>
@@ -14395,7 +14395,7 @@
           <a:p>
             <a:pPr algn="l"/>
             <a:r>
-              <a:rPr sz="1700" b="1">
+              <a:rPr sz="1900" b="1">
                 <a:solidFill>
                   <a:srgbClr val="15133D"/>
                 </a:solidFill>
@@ -14414,7 +14414,7 @@
               </a:spcBef>
             </a:pPr>
             <a:r>
-              <a:rPr sz="1100">
+              <a:rPr sz="1300">
                 <a:solidFill>
                   <a:srgbClr val="333333"/>
                 </a:solidFill>
@@ -14434,7 +14434,7 @@
         <p:spPr>
           <a:xfrm>
             <a:off x="544108" y="4714880"/>
-            <a:ext cx="4572000" cy="1463040"/>
+            <a:ext cx="4322443" cy="1463040"/>
           </a:xfrm>
           <a:prstGeom prst="roundRect">
             <a:avLst>
@@ -14471,7 +14471,7 @@
           <a:p>
             <a:pPr algn="l"/>
             <a:r>
-              <a:rPr sz="1700" b="1">
+              <a:rPr sz="1900" b="1">
                 <a:solidFill>
                   <a:srgbClr val="15133D"/>
                 </a:solidFill>
@@ -14490,7 +14490,7 @@
               </a:spcBef>
             </a:pPr>
             <a:r>
-              <a:rPr sz="1100">
+              <a:rPr sz="1300">
                 <a:solidFill>
                   <a:srgbClr val="333333"/>
                 </a:solidFill>
@@ -14509,8 +14509,8 @@
         </p:nvSpPr>
         <p:spPr>
           <a:xfrm>
-            <a:off x="5298988" y="4714880"/>
-            <a:ext cx="4572000" cy="1463040"/>
+            <a:off x="5039448" y="4714880"/>
+            <a:ext cx="4322443" cy="1463040"/>
           </a:xfrm>
           <a:prstGeom prst="roundRect">
             <a:avLst>
@@ -14547,7 +14547,7 @@
           <a:p>
             <a:pPr algn="l"/>
             <a:r>
-              <a:rPr sz="1700" b="1">
+              <a:rPr sz="1900" b="1">
                 <a:solidFill>
                   <a:srgbClr val="15133D"/>
                 </a:solidFill>
@@ -14566,7 +14566,7 @@
               </a:spcBef>
             </a:pPr>
             <a:r>
-              <a:rPr sz="1100">
+              <a:rPr sz="1300">
                 <a:solidFill>
                   <a:srgbClr val="333333"/>
                 </a:solidFill>
@@ -15993,7 +15993,7 @@
         <p:spPr>
           <a:xfrm>
             <a:off x="544108" y="3068960"/>
-            <a:ext cx="4572000" cy="1463040"/>
+            <a:ext cx="4322443" cy="1463040"/>
           </a:xfrm>
           <a:prstGeom prst="roundRect">
             <a:avLst>
@@ -16030,7 +16030,7 @@
           <a:p>
             <a:pPr algn="l"/>
             <a:r>
-              <a:rPr sz="1700" b="1">
+              <a:rPr sz="1900" b="1">
                 <a:solidFill>
                   <a:srgbClr val="15133D"/>
                 </a:solidFill>
@@ -16049,7 +16049,7 @@
               </a:spcBef>
             </a:pPr>
             <a:r>
-              <a:rPr sz="1100">
+              <a:rPr sz="1300">
                 <a:solidFill>
                   <a:srgbClr val="333333"/>
                 </a:solidFill>
@@ -16068,8 +16068,8 @@
         </p:nvSpPr>
         <p:spPr>
           <a:xfrm>
-            <a:off x="5298988" y="3068960"/>
-            <a:ext cx="4572000" cy="1463040"/>
+            <a:off x="5039448" y="3068960"/>
+            <a:ext cx="4322443" cy="1463040"/>
           </a:xfrm>
           <a:prstGeom prst="roundRect">
             <a:avLst>
@@ -16106,7 +16106,7 @@
           <a:p>
             <a:pPr algn="l"/>
             <a:r>
-              <a:rPr sz="1700" b="1">
+              <a:rPr sz="1900" b="1">
                 <a:solidFill>
                   <a:srgbClr val="15133D"/>
                 </a:solidFill>
@@ -16125,7 +16125,7 @@
               </a:spcBef>
             </a:pPr>
             <a:r>
-              <a:rPr sz="1100">
+              <a:rPr sz="1300">
                 <a:solidFill>
                   <a:srgbClr val="333333"/>
                 </a:solidFill>
@@ -16145,7 +16145,7 @@
         <p:spPr>
           <a:xfrm>
             <a:off x="544108" y="4714880"/>
-            <a:ext cx="4572000" cy="1463040"/>
+            <a:ext cx="4322443" cy="1463040"/>
           </a:xfrm>
           <a:prstGeom prst="roundRect">
             <a:avLst>
@@ -16182,7 +16182,7 @@
           <a:p>
             <a:pPr algn="l"/>
             <a:r>
-              <a:rPr sz="1700" b="1">
+              <a:rPr sz="1900" b="1">
                 <a:solidFill>
                   <a:srgbClr val="15133D"/>
                 </a:solidFill>
@@ -16201,7 +16201,7 @@
               </a:spcBef>
             </a:pPr>
             <a:r>
-              <a:rPr sz="1100">
+              <a:rPr sz="1300">
                 <a:solidFill>
                   <a:srgbClr val="333333"/>
                 </a:solidFill>
@@ -16220,8 +16220,8 @@
         </p:nvSpPr>
         <p:spPr>
           <a:xfrm>
-            <a:off x="5298988" y="4714880"/>
-            <a:ext cx="4572000" cy="1463040"/>
+            <a:off x="5039448" y="4714880"/>
+            <a:ext cx="4322443" cy="1463040"/>
           </a:xfrm>
           <a:prstGeom prst="roundRect">
             <a:avLst>
@@ -16258,7 +16258,7 @@
           <a:p>
             <a:pPr algn="l"/>
             <a:r>
-              <a:rPr sz="1700" b="1">
+              <a:rPr sz="1900" b="1">
                 <a:solidFill>
                   <a:srgbClr val="15133D"/>
                 </a:solidFill>
@@ -16277,7 +16277,7 @@
               </a:spcBef>
             </a:pPr>
             <a:r>
-              <a:rPr sz="1100">
+              <a:rPr sz="1300">
                 <a:solidFill>
                   <a:srgbClr val="333333"/>
                 </a:solidFill>
@@ -17704,7 +17704,7 @@
         <p:spPr>
           <a:xfrm>
             <a:off x="544108" y="3068960"/>
-            <a:ext cx="3547872" cy="274320"/>
+            <a:ext cx="3354215" cy="274320"/>
           </a:xfrm>
           <a:prstGeom prst="rect">
             <a:avLst/>
@@ -17757,7 +17757,7 @@
         <p:spPr>
           <a:xfrm>
             <a:off x="544108" y="3343280"/>
-            <a:ext cx="3547872" cy="640080"/>
+            <a:ext cx="3354215" cy="640080"/>
           </a:xfrm>
           <a:prstGeom prst="rect">
             <a:avLst/>
@@ -17815,8 +17815,8 @@
         </p:nvSpPr>
         <p:spPr>
           <a:xfrm>
-            <a:off x="4091980" y="3068960"/>
-            <a:ext cx="457200" cy="914400"/>
+            <a:off x="3898323" y="3068960"/>
+            <a:ext cx="432244" cy="914400"/>
           </a:xfrm>
           <a:prstGeom prst="rect">
             <a:avLst/>
@@ -17850,8 +17850,8 @@
         </p:nvSpPr>
         <p:spPr>
           <a:xfrm>
-            <a:off x="4549180" y="3068960"/>
-            <a:ext cx="5321808" cy="274320"/>
+            <a:off x="4330568" y="3068960"/>
+            <a:ext cx="5031323" cy="274320"/>
           </a:xfrm>
           <a:prstGeom prst="rect">
             <a:avLst/>
@@ -17903,8 +17903,8 @@
         </p:nvSpPr>
         <p:spPr>
           <a:xfrm>
-            <a:off x="4549180" y="3343280"/>
-            <a:ext cx="5321808" cy="640080"/>
+            <a:off x="4330568" y="3343280"/>
+            <a:ext cx="5031323" cy="640080"/>
           </a:xfrm>
           <a:prstGeom prst="rect">
             <a:avLst/>
@@ -17982,7 +17982,7 @@
         <p:spPr>
           <a:xfrm>
             <a:off x="544108" y="4211960"/>
-            <a:ext cx="4572000" cy="1371600"/>
+            <a:ext cx="4322443" cy="1371600"/>
           </a:xfrm>
           <a:prstGeom prst="roundRect">
             <a:avLst>
@@ -18019,7 +18019,7 @@
           <a:p>
             <a:pPr algn="l"/>
             <a:r>
-              <a:rPr sz="1700" b="1">
+              <a:rPr sz="1900" b="1">
                 <a:solidFill>
                   <a:srgbClr val="15133D"/>
                 </a:solidFill>
@@ -18038,7 +18038,7 @@
               </a:spcBef>
             </a:pPr>
             <a:r>
-              <a:rPr sz="1100">
+              <a:rPr sz="1300">
                 <a:solidFill>
                   <a:srgbClr val="333333"/>
                 </a:solidFill>
@@ -18057,8 +18057,8 @@
         </p:nvSpPr>
         <p:spPr>
           <a:xfrm>
-            <a:off x="5298988" y="4211960"/>
-            <a:ext cx="4572000" cy="1371600"/>
+            <a:off x="5039448" y="4211960"/>
+            <a:ext cx="4322443" cy="1371600"/>
           </a:xfrm>
           <a:prstGeom prst="roundRect">
             <a:avLst>
@@ -18095,7 +18095,7 @@
           <a:p>
             <a:pPr algn="l"/>
             <a:r>
-              <a:rPr sz="1700" b="1">
+              <a:rPr sz="1900" b="1">
                 <a:solidFill>
                   <a:srgbClr val="15133D"/>
                 </a:solidFill>
@@ -18114,7 +18114,7 @@
               </a:spcBef>
             </a:pPr>
             <a:r>
-              <a:rPr sz="1100">
+              <a:rPr sz="1300">
                 <a:solidFill>
                   <a:srgbClr val="333333"/>
                 </a:solidFill>
@@ -19541,7 +19541,7 @@
         <p:spPr>
           <a:xfrm>
             <a:off x="544108" y="3068960"/>
-            <a:ext cx="2228850" cy="1371600"/>
+            <a:ext cx="2107191" cy="1371600"/>
           </a:xfrm>
           <a:prstGeom prst="roundRect">
             <a:avLst>
@@ -19629,8 +19629,8 @@
         </p:nvSpPr>
         <p:spPr>
           <a:xfrm>
-            <a:off x="2910118" y="3068960"/>
-            <a:ext cx="2228850" cy="1371600"/>
+            <a:off x="2780972" y="3068960"/>
+            <a:ext cx="2107191" cy="1371600"/>
           </a:xfrm>
           <a:prstGeom prst="roundRect">
             <a:avLst>
@@ -19718,8 +19718,8 @@
         </p:nvSpPr>
         <p:spPr>
           <a:xfrm>
-            <a:off x="5276128" y="3068960"/>
-            <a:ext cx="2228850" cy="1371600"/>
+            <a:off x="5017836" y="3068960"/>
+            <a:ext cx="2107191" cy="1371600"/>
           </a:xfrm>
           <a:prstGeom prst="roundRect">
             <a:avLst>
@@ -19807,8 +19807,8 @@
         </p:nvSpPr>
         <p:spPr>
           <a:xfrm>
-            <a:off x="7642138" y="3068960"/>
-            <a:ext cx="2228850" cy="1371600"/>
+            <a:off x="7254700" y="3068960"/>
+            <a:ext cx="2107191" cy="1371600"/>
           </a:xfrm>
           <a:prstGeom prst="roundRect">
             <a:avLst>
@@ -19898,7 +19898,7 @@
         </p:nvGraphicFramePr>
         <p:xfrm>
           <a:off x="544108" y="4623440"/>
-          <a:ext cx="9326880" cy="822960"/>
+          <a:ext cx="9078296" cy="822960"/>
         </p:xfrm>
         <a:graphic>
           <a:graphicData uri="http://schemas.openxmlformats.org/drawingml/2006/table">
@@ -19907,28 +19907,28 @@
                 <a:tableStyleId>{5C22544A-7EE6-4342-B048-85BDC9FD1C3A}</a:tableStyleId>
               </a:tblPr>
               <a:tblGrid>
-                <a:gridCol w="2331720">
+                <a:gridCol w="2204446">
                   <a:extLst>
                     <a:ext uri="{9D8B030D-6E8A-4147-A177-3AD203B41FA5}">
                       <a16:colId xmlns:a16="http://schemas.microsoft.com/office/drawing/2014/main" val="20000"/>
                     </a:ext>
                   </a:extLst>
                 </a:gridCol>
-                <a:gridCol w="2331720">
+                <a:gridCol w="2299901">
                   <a:extLst>
                     <a:ext uri="{9D8B030D-6E8A-4147-A177-3AD203B41FA5}">
                       <a16:colId xmlns:a16="http://schemas.microsoft.com/office/drawing/2014/main" val="20001"/>
                     </a:ext>
                   </a:extLst>
                 </a:gridCol>
-                <a:gridCol w="2331720">
+                <a:gridCol w="2291946">
                   <a:extLst>
                     <a:ext uri="{9D8B030D-6E8A-4147-A177-3AD203B41FA5}">
                       <a16:colId xmlns:a16="http://schemas.microsoft.com/office/drawing/2014/main" val="20002"/>
                     </a:ext>
                   </a:extLst>
                 </a:gridCol>
-                <a:gridCol w="2331720">
+                <a:gridCol w="2282003">
                   <a:extLst>
                     <a:ext uri="{9D8B030D-6E8A-4147-A177-3AD203B41FA5}">
                       <a16:colId xmlns:a16="http://schemas.microsoft.com/office/drawing/2014/main" val="20003"/>
@@ -20147,7 +20147,7 @@
         <p:spPr>
           <a:xfrm>
             <a:off x="544108" y="5629280"/>
-            <a:ext cx="9326880" cy="777240"/>
+            <a:ext cx="8817784" cy="777240"/>
           </a:xfrm>
           <a:prstGeom prst="roundRect">
             <a:avLst>
@@ -20184,7 +20184,7 @@
           <a:p>
             <a:pPr algn="l"/>
             <a:r>
-              <a:rPr sz="1700" b="1">
+              <a:rPr sz="1800" b="1">
                 <a:solidFill>
                   <a:srgbClr val="15133D"/>
                 </a:solidFill>

--- a/LINEOA媒体最新情報_2026年10月トレンドレポート.pptx
+++ b/LINEOA媒体最新情報_2026年10月トレンドレポート.pptx
@@ -4654,7 +4654,7 @@
         <p:spPr>
           <a:xfrm>
             <a:off x="544108" y="3068960"/>
-            <a:ext cx="4322443" cy="1463040"/>
+            <a:ext cx="4322443" cy="1120584"/>
           </a:xfrm>
           <a:prstGeom prst="roundRect">
             <a:avLst>
@@ -4730,7 +4730,7 @@
         <p:spPr>
           <a:xfrm>
             <a:off x="5039448" y="3068960"/>
-            <a:ext cx="4322443" cy="1463040"/>
+            <a:ext cx="4322443" cy="1120584"/>
           </a:xfrm>
           <a:prstGeom prst="roundRect">
             <a:avLst>
@@ -4805,8 +4805,8 @@
         </p:nvSpPr>
         <p:spPr>
           <a:xfrm>
-            <a:off x="544108" y="4714880"/>
-            <a:ext cx="4322443" cy="1463040"/>
+            <a:off x="544108" y="4372424"/>
+            <a:ext cx="4322443" cy="1120584"/>
           </a:xfrm>
           <a:prstGeom prst="roundRect">
             <a:avLst>
@@ -4881,8 +4881,8 @@
         </p:nvSpPr>
         <p:spPr>
           <a:xfrm>
-            <a:off x="5039448" y="4714880"/>
-            <a:ext cx="4322443" cy="1463040"/>
+            <a:off x="5039448" y="4372424"/>
+            <a:ext cx="4322443" cy="1120584"/>
           </a:xfrm>
           <a:prstGeom prst="roundRect">
             <a:avLst>
@@ -6342,7 +6342,7 @@
         <p:spPr>
           <a:xfrm>
             <a:off x="544108" y="3068960"/>
-            <a:ext cx="4322443" cy="1463040"/>
+            <a:ext cx="4322443" cy="1357915"/>
           </a:xfrm>
           <a:prstGeom prst="roundRect">
             <a:avLst>
@@ -6417,8 +6417,8 @@
         </p:nvSpPr>
         <p:spPr>
           <a:xfrm>
-            <a:off x="544108" y="4714880"/>
-            <a:ext cx="4322443" cy="1463040"/>
+            <a:off x="544108" y="4609755"/>
+            <a:ext cx="4322443" cy="1357915"/>
           </a:xfrm>
           <a:prstGeom prst="roundRect">
             <a:avLst>
@@ -6494,7 +6494,7 @@
         <p:spPr>
           <a:xfrm>
             <a:off x="5039448" y="3068960"/>
-            <a:ext cx="4322443" cy="1463040"/>
+            <a:ext cx="4322443" cy="1357915"/>
           </a:xfrm>
           <a:prstGeom prst="roundRect">
             <a:avLst>
@@ -6569,8 +6569,8 @@
         </p:nvSpPr>
         <p:spPr>
           <a:xfrm>
-            <a:off x="5039448" y="4714880"/>
-            <a:ext cx="4322443" cy="1463040"/>
+            <a:off x="5039448" y="4609755"/>
+            <a:ext cx="4322443" cy="1357915"/>
           </a:xfrm>
           <a:prstGeom prst="roundRect">
             <a:avLst>
@@ -9072,7 +9072,7 @@
         <p:spPr>
           <a:xfrm>
             <a:off x="544108" y="4211960"/>
-            <a:ext cx="4322443" cy="1371600"/>
+            <a:ext cx="4322443" cy="1357915"/>
           </a:xfrm>
           <a:prstGeom prst="roundRect">
             <a:avLst>
@@ -9148,7 +9148,7 @@
         <p:spPr>
           <a:xfrm>
             <a:off x="5039448" y="4211960"/>
-            <a:ext cx="4322443" cy="1371600"/>
+            <a:ext cx="4322443" cy="1357915"/>
           </a:xfrm>
           <a:prstGeom prst="roundRect">
             <a:avLst>
@@ -10886,7 +10886,7 @@
         <p:spPr>
           <a:xfrm>
             <a:off x="544108" y="4211960"/>
-            <a:ext cx="4322443" cy="1371600"/>
+            <a:ext cx="4322443" cy="1357915"/>
           </a:xfrm>
           <a:prstGeom prst="roundRect">
             <a:avLst>
@@ -10962,7 +10962,7 @@
         <p:spPr>
           <a:xfrm>
             <a:off x="5039448" y="4211960"/>
-            <a:ext cx="4322443" cy="1371600"/>
+            <a:ext cx="4322443" cy="1357915"/>
           </a:xfrm>
           <a:prstGeom prst="roundRect">
             <a:avLst>
@@ -12723,7 +12723,7 @@
         <p:spPr>
           <a:xfrm>
             <a:off x="544108" y="4211960"/>
-            <a:ext cx="4322443" cy="1371600"/>
+            <a:ext cx="4322443" cy="1357915"/>
           </a:xfrm>
           <a:prstGeom prst="roundRect">
             <a:avLst>
@@ -12799,7 +12799,7 @@
         <p:spPr>
           <a:xfrm>
             <a:off x="5039448" y="4211960"/>
-            <a:ext cx="4322443" cy="1371600"/>
+            <a:ext cx="4322443" cy="1357915"/>
           </a:xfrm>
           <a:prstGeom prst="roundRect">
             <a:avLst>
@@ -14282,7 +14282,7 @@
         <p:spPr>
           <a:xfrm>
             <a:off x="544108" y="3068960"/>
-            <a:ext cx="4322443" cy="1463040"/>
+            <a:ext cx="4322443" cy="1357915"/>
           </a:xfrm>
           <a:prstGeom prst="roundRect">
             <a:avLst>
@@ -14358,7 +14358,7 @@
         <p:spPr>
           <a:xfrm>
             <a:off x="5039448" y="3068960"/>
-            <a:ext cx="4322443" cy="1463040"/>
+            <a:ext cx="4322443" cy="1357915"/>
           </a:xfrm>
           <a:prstGeom prst="roundRect">
             <a:avLst>
@@ -14433,8 +14433,8 @@
         </p:nvSpPr>
         <p:spPr>
           <a:xfrm>
-            <a:off x="544108" y="4714880"/>
-            <a:ext cx="4322443" cy="1463040"/>
+            <a:off x="544108" y="4609755"/>
+            <a:ext cx="4322443" cy="1357915"/>
           </a:xfrm>
           <a:prstGeom prst="roundRect">
             <a:avLst>
@@ -14509,8 +14509,8 @@
         </p:nvSpPr>
         <p:spPr>
           <a:xfrm>
-            <a:off x="5039448" y="4714880"/>
-            <a:ext cx="4322443" cy="1463040"/>
+            <a:off x="5039448" y="4609755"/>
+            <a:ext cx="4322443" cy="1357915"/>
           </a:xfrm>
           <a:prstGeom prst="roundRect">
             <a:avLst>
@@ -15993,7 +15993,7 @@
         <p:spPr>
           <a:xfrm>
             <a:off x="544108" y="3068960"/>
-            <a:ext cx="4322443" cy="1463040"/>
+            <a:ext cx="4322443" cy="1120584"/>
           </a:xfrm>
           <a:prstGeom prst="roundRect">
             <a:avLst>
@@ -16069,7 +16069,7 @@
         <p:spPr>
           <a:xfrm>
             <a:off x="5039448" y="3068960"/>
-            <a:ext cx="4322443" cy="1463040"/>
+            <a:ext cx="4322443" cy="1120584"/>
           </a:xfrm>
           <a:prstGeom prst="roundRect">
             <a:avLst>
@@ -16144,8 +16144,8 @@
         </p:nvSpPr>
         <p:spPr>
           <a:xfrm>
-            <a:off x="544108" y="4714880"/>
-            <a:ext cx="4322443" cy="1463040"/>
+            <a:off x="544108" y="4372424"/>
+            <a:ext cx="4322443" cy="1357915"/>
           </a:xfrm>
           <a:prstGeom prst="roundRect">
             <a:avLst>
@@ -16220,8 +16220,8 @@
         </p:nvSpPr>
         <p:spPr>
           <a:xfrm>
-            <a:off x="5039448" y="4714880"/>
-            <a:ext cx="4322443" cy="1463040"/>
+            <a:off x="5039448" y="4372424"/>
+            <a:ext cx="4322443" cy="1357915"/>
           </a:xfrm>
           <a:prstGeom prst="roundRect">
             <a:avLst>
@@ -17982,7 +17982,7 @@
         <p:spPr>
           <a:xfrm>
             <a:off x="544108" y="4211960"/>
-            <a:ext cx="4322443" cy="1371600"/>
+            <a:ext cx="4322443" cy="1357915"/>
           </a:xfrm>
           <a:prstGeom prst="roundRect">
             <a:avLst>
@@ -18058,7 +18058,7 @@
         <p:spPr>
           <a:xfrm>
             <a:off x="5039448" y="4211960"/>
-            <a:ext cx="4322443" cy="1371600"/>
+            <a:ext cx="4322443" cy="1357915"/>
           </a:xfrm>
           <a:prstGeom prst="roundRect">
             <a:avLst>

--- a/LINEOA媒体最新情報_2026年10月トレンドレポート.pptx
+++ b/LINEOA媒体最新情報_2026年10月トレンドレポート.pptx
@@ -277,7 +277,7 @@
       <p15:sldGuideLst xmlns:p15="http://schemas.microsoft.com/office/powerpoint/2012/main"/>
     </p:ext>
     <p:ext uri="GoogleSlidesCustomDataVersion2">
-      <go:slidesCustomData xmlns="" xmlns:mc="http://schemas.openxmlformats.org/markup-compatibility/2006" xmlns:mv="urn:schemas-microsoft-com:mac:vml" xmlns:c="http://schemas.openxmlformats.org/drawingml/2006/chart" xmlns:dgm="http://schemas.openxmlformats.org/drawingml/2006/diagram" xmlns:o="urn:schemas-microsoft-com:office:office" xmlns:v="urn:schemas-microsoft-com:vml" xmlns:pvml="urn:schemas-microsoft-com:office:powerpoint" xmlns:com="http://schemas.openxmlformats.org/drawingml/2006/compatibility" xmlns:p14="http://schemas.microsoft.com/office/powerpoint/2010/main" xmlns:p15="http://schemas.microsoft.com/office/powerpoint/2012/main" xmlns:ahyp="http://schemas.microsoft.com/office/drawing/2018/hyperlinkcolor" xmlns:go="http://customooxmlschemas.google.com/" r:id="rId22" roundtripDataSignature="AMtx7mgQCoaVnfxROPv51WSWo8GFar7+Gw=="/>
+      <go:slidesCustomData xmlns:go="http://customooxmlschemas.google.com/" xmlns:ahyp="http://schemas.microsoft.com/office/drawing/2018/hyperlinkcolor" xmlns:p15="http://schemas.microsoft.com/office/powerpoint/2012/main" xmlns:p14="http://schemas.microsoft.com/office/powerpoint/2010/main" xmlns:com="http://schemas.openxmlformats.org/drawingml/2006/compatibility" xmlns:pvml="urn:schemas-microsoft-com:office:powerpoint" xmlns:v="urn:schemas-microsoft-com:vml" xmlns:o="urn:schemas-microsoft-com:office:office" xmlns:dgm="http://schemas.openxmlformats.org/drawingml/2006/diagram" xmlns:c="http://schemas.openxmlformats.org/drawingml/2006/chart" xmlns:mv="urn:schemas-microsoft-com:mac:vml" xmlns:mc="http://schemas.openxmlformats.org/markup-compatibility/2006" xmlns="" r:id="rId22" roundtripDataSignature="AMtx7mgQCoaVnfxROPv51WSWo8GFar7+Gw=="/>
     </p:ext>
   </p:extLst>
 </p:presentation>
@@ -1877,7 +1877,7 @@
               </a:spcAft>
               <a:buNone/>
             </a:pPr>
-            <a:endParaRPr/>
+            <a:endParaRPr dirty="0"/>
           </a:p>
         </p:txBody>
       </p:sp>
@@ -4663,7 +4663,7 @@
                 <a:cs typeface="Meiryo"/>
                 <a:sym typeface="Meiryo"/>
               </a:rPr>
-              <a:t>これまで一律禁止だった、LINE通知メッセージからネイティブアプリへの遷移が、</a:t>
+              <a:t>LINE通知メッセージのボタンから、自社のネイティブアプリを直接開けるようになった。</a:t>
             </a:r>
             <a:endParaRPr sz="1200" b="1">
               <a:solidFill>
@@ -4695,7 +4695,7 @@
                 <a:cs typeface="Meiryo"/>
                 <a:sym typeface="Meiryo"/>
               </a:rPr>
-              <a:t>LINEヤフーの審査で承認された場合に限り解禁された。</a:t>
+              <a:t>LINEヤフーの審査に通ることが条件で、アプリが入っていない場合はWebページへ遷移する。</a:t>
             </a:r>
             <a:endParaRPr/>
           </a:p>
@@ -4719,7 +4719,7 @@
                 <a:cs typeface="Meiryo"/>
                 <a:sym typeface="Meiryo"/>
               </a:rPr>
-              <a:t>2026年9月9日（水）からLBPMで審査受付を開始（審査費 10万円／1UX・税抜）。</a:t>
+              <a:t>2026年9月9日（水）からLBPMで審査受付を開始。</a:t>
             </a:r>
             <a:endParaRPr sz="1400" b="1">
               <a:solidFill>
@@ -5249,292 +5249,14 @@
       </p:pic>
       <p:sp>
         <p:nvSpPr>
-          <p:cNvPr id="63" name="Rectangle 62"/>
-          <p:cNvSpPr/>
-          <p:nvPr/>
-        </p:nvSpPr>
-        <p:spPr>
-          <a:xfrm>
-            <a:off x="544108" y="3068960"/>
-            <a:ext cx="3354215" cy="274320"/>
-          </a:xfrm>
-          <a:prstGeom prst="rect">
-            <a:avLst/>
-          </a:prstGeom>
-          <a:solidFill>
-            <a:srgbClr val="F2F2F2"/>
-          </a:solidFill>
-          <a:ln>
-            <a:noFill/>
-          </a:ln>
-          <a:effectLst/>
-        </p:spPr>
-        <p:style>
-          <a:lnRef idx="1">
-            <a:schemeClr val="accent1"/>
-          </a:lnRef>
-          <a:fillRef idx="3">
-            <a:schemeClr val="accent1"/>
-          </a:fillRef>
-          <a:effectRef idx="2">
-            <a:schemeClr val="accent1"/>
-          </a:effectRef>
-          <a:fontRef idx="minor">
-            <a:schemeClr val="lt1"/>
-          </a:fontRef>
-        </p:style>
-        <p:txBody>
-          <a:bodyPr wrap="square" rIns="45720" rtlCol="0" anchor="ctr"/>
-          <a:lstStyle/>
-          <a:p>
-            <a:pPr algn="ctr"/>
-            <a:r>
-              <a:rPr sz="1300" b="1">
-                <a:solidFill>
-                  <a:srgbClr val="333333"/>
-                </a:solidFill>
-                <a:latin typeface="メイリオ"/>
-              </a:rPr>
-              <a:t>AS-IS</a:t>
-            </a:r>
-          </a:p>
-        </p:txBody>
-      </p:sp>
-      <p:sp>
-        <p:nvSpPr>
-          <p:cNvPr id="64" name="Rectangle 63"/>
-          <p:cNvSpPr/>
-          <p:nvPr/>
-        </p:nvSpPr>
-        <p:spPr>
-          <a:xfrm>
-            <a:off x="544108" y="3343280"/>
-            <a:ext cx="3354215" cy="640080"/>
-          </a:xfrm>
-          <a:prstGeom prst="rect">
-            <a:avLst/>
-          </a:prstGeom>
-          <a:solidFill>
-            <a:srgbClr val="F2F2F2"/>
-          </a:solidFill>
-          <a:ln w="12700">
-            <a:solidFill>
-              <a:srgbClr val="D9D9D9"/>
-            </a:solidFill>
-          </a:ln>
-          <a:effectLst/>
-        </p:spPr>
-        <p:style>
-          <a:lnRef idx="1">
-            <a:schemeClr val="accent1"/>
-          </a:lnRef>
-          <a:fillRef idx="3">
-            <a:schemeClr val="accent1"/>
-          </a:fillRef>
-          <a:effectRef idx="2">
-            <a:schemeClr val="accent1"/>
-          </a:effectRef>
-          <a:fontRef idx="minor">
-            <a:schemeClr val="lt1"/>
-          </a:fontRef>
-        </p:style>
-        <p:txBody>
-          <a:bodyPr wrap="square" lIns="182880" tIns="54864" rIns="137160" bIns="54864" rtlCol="0" anchor="ctr"/>
-          <a:lstStyle/>
-          <a:p>
-            <a:pPr algn="ctr">
-              <a:lnSpc>
-                <a:spcPct val="110000"/>
-              </a:lnSpc>
-            </a:pPr>
-            <a:r>
-              <a:rPr sz="1300" b="1">
-                <a:solidFill>
-                  <a:srgbClr val="15133D"/>
-                </a:solidFill>
-                <a:latin typeface="メイリオ"/>
-              </a:rPr>
-              <a:t>一律でWebサイトへ遷移（ネイティブアプリへの遷移は禁止）</a:t>
-            </a:r>
-          </a:p>
-        </p:txBody>
-      </p:sp>
-      <p:sp>
-        <p:nvSpPr>
-          <p:cNvPr id="65" name="TextBox 64"/>
-          <p:cNvSpPr txBox="1"/>
-          <p:nvPr/>
-        </p:nvSpPr>
-        <p:spPr>
-          <a:xfrm>
-            <a:off x="3898323" y="3068960"/>
-            <a:ext cx="432244" cy="914400"/>
-          </a:xfrm>
-          <a:prstGeom prst="rect">
-            <a:avLst/>
-          </a:prstGeom>
-          <a:noFill/>
-        </p:spPr>
-        <p:txBody>
-          <a:bodyPr wrap="none" anchor="ctr">
-            <a:spAutoFit/>
-          </a:bodyPr>
-          <a:lstStyle/>
-          <a:p>
-            <a:pPr algn="ctr"/>
-            <a:r>
-              <a:rPr sz="1800" b="1">
-                <a:solidFill>
-                  <a:srgbClr val="3467B2"/>
-                </a:solidFill>
-                <a:latin typeface="メイリオ"/>
-              </a:rPr>
-              <a:t>▶</a:t>
-            </a:r>
-          </a:p>
-        </p:txBody>
-      </p:sp>
-      <p:sp>
-        <p:nvSpPr>
-          <p:cNvPr id="66" name="Rectangle 65"/>
-          <p:cNvSpPr/>
-          <p:nvPr/>
-        </p:nvSpPr>
-        <p:spPr>
-          <a:xfrm>
-            <a:off x="4330568" y="3068960"/>
-            <a:ext cx="5031323" cy="274320"/>
-          </a:xfrm>
-          <a:prstGeom prst="rect">
-            <a:avLst/>
-          </a:prstGeom>
-          <a:solidFill>
-            <a:srgbClr val="15133D"/>
-          </a:solidFill>
-          <a:ln>
-            <a:noFill/>
-          </a:ln>
-          <a:effectLst/>
-        </p:spPr>
-        <p:style>
-          <a:lnRef idx="1">
-            <a:schemeClr val="accent1"/>
-          </a:lnRef>
-          <a:fillRef idx="3">
-            <a:schemeClr val="accent1"/>
-          </a:fillRef>
-          <a:effectRef idx="2">
-            <a:schemeClr val="accent1"/>
-          </a:effectRef>
-          <a:fontRef idx="minor">
-            <a:schemeClr val="lt1"/>
-          </a:fontRef>
-        </p:style>
-        <p:txBody>
-          <a:bodyPr wrap="square" rIns="45720" rtlCol="0" anchor="ctr"/>
-          <a:lstStyle/>
-          <a:p>
-            <a:pPr algn="ctr"/>
-            <a:r>
-              <a:rPr sz="1300" b="1">
-                <a:solidFill>
-                  <a:srgbClr val="FFFFFF"/>
-                </a:solidFill>
-                <a:latin typeface="メイリオ"/>
-              </a:rPr>
-              <a:t>TO-BE</a:t>
-            </a:r>
-          </a:p>
-        </p:txBody>
-      </p:sp>
-      <p:sp>
-        <p:nvSpPr>
-          <p:cNvPr id="67" name="Rectangle 66"/>
-          <p:cNvSpPr/>
-          <p:nvPr/>
-        </p:nvSpPr>
-        <p:spPr>
-          <a:xfrm>
-            <a:off x="4330568" y="3343280"/>
-            <a:ext cx="5031323" cy="640080"/>
-          </a:xfrm>
-          <a:prstGeom prst="rect">
-            <a:avLst/>
-          </a:prstGeom>
-          <a:solidFill>
-            <a:srgbClr val="EAF0FA"/>
-          </a:solidFill>
-          <a:ln w="12700">
-            <a:solidFill>
-              <a:srgbClr val="3467B2"/>
-            </a:solidFill>
-          </a:ln>
-          <a:effectLst/>
-        </p:spPr>
-        <p:style>
-          <a:lnRef idx="1">
-            <a:schemeClr val="accent1"/>
-          </a:lnRef>
-          <a:fillRef idx="3">
-            <a:schemeClr val="accent1"/>
-          </a:fillRef>
-          <a:effectRef idx="2">
-            <a:schemeClr val="accent1"/>
-          </a:effectRef>
-          <a:fontRef idx="minor">
-            <a:schemeClr val="lt1"/>
-          </a:fontRef>
-        </p:style>
-        <p:txBody>
-          <a:bodyPr wrap="square" lIns="182880" tIns="54864" rIns="137160" bIns="54864" rtlCol="0" anchor="ctr"/>
-          <a:lstStyle/>
-          <a:p>
-            <a:pPr algn="ctr">
-              <a:lnSpc>
-                <a:spcPct val="110000"/>
-              </a:lnSpc>
-            </a:pPr>
-            <a:r>
-              <a:rPr sz="1800" b="1">
-                <a:solidFill>
-                  <a:srgbClr val="15133D"/>
-                </a:solidFill>
-                <a:latin typeface="メイリオ"/>
-              </a:rPr>
-              <a:t>審査承認でネイティブアプリへ遷移可能に</a:t>
-            </a:r>
-          </a:p>
-          <a:p>
-            <a:pPr>
-              <a:lnSpc>
-                <a:spcPct val="110000"/>
-              </a:lnSpc>
-              <a:spcBef>
-                <a:spcPts val="500"/>
-              </a:spcBef>
-            </a:pPr>
-            <a:r>
-              <a:rPr sz="1050">
-                <a:solidFill>
-                  <a:srgbClr val="333333"/>
-                </a:solidFill>
-                <a:latin typeface="メイリオ"/>
-              </a:rPr>
-              <a:t>エッセンシャル／パフォーマンス／アンリミテッドプランが対象</a:t>
-            </a:r>
-          </a:p>
-        </p:txBody>
-      </p:sp>
-      <p:sp>
-        <p:nvSpPr>
           <p:cNvPr id="68" name="Rounded Rectangle 67"/>
           <p:cNvSpPr/>
           <p:nvPr/>
         </p:nvSpPr>
         <p:spPr>
           <a:xfrm>
-            <a:off x="544108" y="4211960"/>
-            <a:ext cx="4322443" cy="1357915"/>
+            <a:off x="548640" y="3108960"/>
+            <a:ext cx="4315968" cy="1280160"/>
           </a:xfrm>
           <a:prstGeom prst="roundRect">
             <a:avLst>
@@ -5571,13 +5293,13 @@
           <a:p>
             <a:pPr algn="l"/>
             <a:r>
-              <a:rPr sz="1900" b="1">
+              <a:rPr sz="1800" b="1">
                 <a:solidFill>
                   <a:srgbClr val="15133D"/>
                 </a:solidFill>
                 <a:latin typeface="メイリオ"/>
               </a:rPr>
-              <a:t>シームレスな導線でUXが向上</a:t>
+              <a:t>できるようになったこと</a:t>
             </a:r>
           </a:p>
           <a:p>
@@ -5590,13 +5312,13 @@
               </a:spcBef>
             </a:pPr>
             <a:r>
-              <a:rPr sz="1300">
+              <a:rPr sz="1200">
                 <a:solidFill>
                   <a:srgbClr val="333333"/>
                 </a:solidFill>
                 <a:latin typeface="メイリオ"/>
               </a:rPr>
-              <a:t>アプリがインストール済みならアプリへ直接遷移、未インストールなら通知内容に関連するWebページへ遷移する。</a:t>
+              <a:t>通知のボタンからアプリを直接開ける。アプリが入っていない場合は、通知内容に関連するWebページへ遷移。シームレスな導線でユーザー体験が向上する。</a:t>
             </a:r>
           </a:p>
         </p:txBody>
@@ -5609,8 +5331,8 @@
         </p:nvSpPr>
         <p:spPr>
           <a:xfrm>
-            <a:off x="5039448" y="4211960"/>
-            <a:ext cx="4322443" cy="1357915"/>
+            <a:off x="5047488" y="3108960"/>
+            <a:ext cx="4315968" cy="1280160"/>
           </a:xfrm>
           <a:prstGeom prst="roundRect">
             <a:avLst>
@@ -5647,13 +5369,13 @@
           <a:p>
             <a:pPr algn="l"/>
             <a:r>
-              <a:rPr sz="1900" b="1">
+              <a:rPr sz="1800" b="1">
                 <a:solidFill>
                   <a:srgbClr val="15133D"/>
                 </a:solidFill>
                 <a:latin typeface="メイリオ"/>
               </a:rPr>
-              <a:t>主な遷移条件</a:t>
+              <a:t>お金と手続き</a:t>
             </a:r>
           </a:p>
           <a:p>
@@ -5666,13 +5388,165 @@
               </a:spcBef>
             </a:pPr>
             <a:r>
-              <a:rPr sz="1300">
+              <a:rPr sz="1200">
                 <a:solidFill>
                   <a:srgbClr val="333333"/>
                 </a:solidFill>
                 <a:latin typeface="メイリオ"/>
               </a:rPr>
-              <a:t>Universal links／App Linksであること、送信元と同一ドメインであること、アプリとWebで表示内容が同じであること。ストアへの自動遷移は不可。</a:t>
+              <a:t>審査費は10万円（税抜）／1UX。承認時のみ発生し、否認の場合はかからない。申し込みはLBPMで、2026年9月9日から受付中。</a:t>
+            </a:r>
+          </a:p>
+        </p:txBody>
+      </p:sp>
+      <p:sp>
+        <p:nvSpPr>
+          <p:cNvPr id="70" name="Rounded Rectangle 67_c"/>
+          <p:cNvSpPr/>
+          <p:nvPr/>
+        </p:nvSpPr>
+        <p:spPr>
+          <a:xfrm>
+            <a:off x="548640" y="4572000"/>
+            <a:ext cx="8814816" cy="1600200"/>
+          </a:xfrm>
+          <a:prstGeom prst="roundRect">
+            <a:avLst>
+              <a:gd name="adj" fmla="val 6000"/>
+            </a:avLst>
+          </a:prstGeom>
+          <a:solidFill>
+            <a:srgbClr val="EAF0FA"/>
+          </a:solidFill>
+          <a:ln w="12700">
+            <a:solidFill>
+              <a:srgbClr val="3467B2"/>
+            </a:solidFill>
+          </a:ln>
+          <a:effectLst/>
+        </p:spPr>
+        <p:style>
+          <a:lnRef idx="1">
+            <a:schemeClr val="accent1"/>
+          </a:lnRef>
+          <a:fillRef idx="3">
+            <a:schemeClr val="accent1"/>
+          </a:fillRef>
+          <a:effectRef idx="2">
+            <a:schemeClr val="accent1"/>
+          </a:effectRef>
+          <a:fontRef idx="minor">
+            <a:schemeClr val="lt1"/>
+          </a:fontRef>
+        </p:style>
+        <p:txBody>
+          <a:bodyPr wrap="square" lIns="228600" rIns="182880" rtlCol="0" anchor="ctr"/>
+          <a:lstStyle/>
+          <a:p>
+            <a:pPr algn="l"/>
+            <a:r>
+              <a:rPr sz="1800" b="1">
+                <a:solidFill>
+                  <a:srgbClr val="15133D"/>
+                </a:solidFill>
+                <a:latin typeface="メイリオ"/>
+              </a:rPr>
+              <a:t>条件（審査で確認される主な項目）</a:t>
+            </a:r>
+          </a:p>
+          <a:p>
+            <a:pPr algn="l">
+              <a:lnSpc>
+                <a:spcPct val="115000"/>
+              </a:lnSpc>
+              <a:spcBef>
+                <a:spcPts val="200"/>
+              </a:spcBef>
+            </a:pPr>
+            <a:r>
+              <a:rPr sz="1200">
+                <a:solidFill>
+                  <a:srgbClr val="333333"/>
+                </a:solidFill>
+                <a:latin typeface="メイリオ"/>
+              </a:rPr>
+              <a:t>・iPhone／Androidの標準の仕組み（Universal links／App Links）でアプリを開く</a:t>
+            </a:r>
+          </a:p>
+          <a:p>
+            <a:pPr algn="l">
+              <a:lnSpc>
+                <a:spcPct val="115000"/>
+              </a:lnSpc>
+              <a:spcBef>
+                <a:spcPts val="200"/>
+              </a:spcBef>
+            </a:pPr>
+            <a:r>
+              <a:rPr sz="1200">
+                <a:solidFill>
+                  <a:srgbClr val="333333"/>
+                </a:solidFill>
+                <a:latin typeface="メイリオ"/>
+              </a:rPr>
+              <a:t>・送信元の公式ドメインと、遷移先URLのドメインが同じ</a:t>
+            </a:r>
+          </a:p>
+          <a:p>
+            <a:pPr algn="l">
+              <a:lnSpc>
+                <a:spcPct val="115000"/>
+              </a:lnSpc>
+              <a:spcBef>
+                <a:spcPts val="200"/>
+              </a:spcBef>
+            </a:pPr>
+            <a:r>
+              <a:rPr sz="1200">
+                <a:solidFill>
+                  <a:srgbClr val="333333"/>
+                </a:solidFill>
+                <a:latin typeface="メイリオ"/>
+              </a:rPr>
+              <a:t>・アプリ未インストール時は、通知内容に関連するWebページを表示（ストアへの自動遷移は不可）</a:t>
+            </a:r>
+          </a:p>
+          <a:p>
+            <a:pPr algn="l">
+              <a:lnSpc>
+                <a:spcPct val="115000"/>
+              </a:lnSpc>
+              <a:spcBef>
+                <a:spcPts val="200"/>
+              </a:spcBef>
+            </a:pPr>
+            <a:r>
+              <a:rPr sz="1200">
+                <a:solidFill>
+                  <a:srgbClr val="333333"/>
+                </a:solidFill>
+                <a:latin typeface="メイリオ"/>
+              </a:rPr>
+              <a:t>・アプリとWebで表示する内容が同じ</a:t>
+            </a:r>
+          </a:p>
+          <a:p>
+            <a:pPr algn="l">
+              <a:lnSpc>
+                <a:spcPct val="115000"/>
+              </a:lnSpc>
+              <a:spcBef>
+                <a:spcPts val="500"/>
+              </a:spcBef>
+            </a:pPr>
+            <a:r>
+              <a:rPr sz="1000">
+                <a:solidFill>
+                  <a:srgbClr val="333333"/>
+                </a:solidFill>
+                <a:latin typeface="メイリオ"/>
+              </a:rPr>
+              <a:t>対象プラン：エッセンシャル／パフォーマンス／アンリミテッド</a:t>
             </a:r>
           </a:p>
         </p:txBody>

--- a/LINEOA媒体最新情報_2026年10月トレンドレポート.pptx
+++ b/LINEOA媒体最新情報_2026年10月トレンドレポート.pptx
@@ -11,6 +11,7 @@
     <p:sldId id="256" r:id="rId2"/>
     <p:sldId id="257" r:id="rId3"/>
     <p:sldId id="258" r:id="rId4"/>
+    <p:sldId id="267" r:id="rId21"/>
     <p:sldId id="259" r:id="rId5"/>
     <p:sldId id="261" r:id="rId6"/>
     <p:sldId id="263" r:id="rId7"/>
@@ -3247,6 +3248,1710 @@
 </p:sld>
 </file>
 
+<file path=ppt/slides/slide10.xml><?xml version="1.0" encoding="utf-8"?>
+<p:sld xmlns:a="http://schemas.openxmlformats.org/drawingml/2006/main" xmlns:p="http://schemas.openxmlformats.org/presentationml/2006/main" xmlns:r="http://schemas.openxmlformats.org/officeDocument/2006/relationships">
+  <p:cSld>
+    <p:spTree>
+      <p:nvGrpSpPr>
+        <p:cNvPr id="1" name=""/>
+        <p:cNvGrpSpPr/>
+        <p:nvPr/>
+      </p:nvGrpSpPr>
+      <p:grpSpPr/>
+      <p:sp>
+        <p:nvSpPr>
+          <p:cNvPr id="40" name="Google Shape;40;p3"/>
+          <p:cNvSpPr/>
+          <p:nvPr/>
+        </p:nvSpPr>
+        <p:spPr>
+          <a:xfrm>
+            <a:off x="292801" y="730955"/>
+            <a:ext cx="1296144" cy="435690"/>
+          </a:xfrm>
+          <a:prstGeom prst="rect">
+            <a:avLst/>
+          </a:prstGeom>
+          <a:solidFill>
+            <a:schemeClr val="dk2"/>
+          </a:solidFill>
+          <a:ln w="9525" cap="flat" cmpd="sng">
+            <a:solidFill>
+              <a:srgbClr val="4A7DBA"/>
+            </a:solidFill>
+            <a:prstDash val="solid"/>
+            <a:round/>
+            <a:headEnd type="none" w="sm" len="sm"/>
+            <a:tailEnd type="none" w="sm" len="sm"/>
+          </a:ln>
+        </p:spPr>
+        <p:txBody>
+          <a:bodyPr spcFirstLastPara="1" wrap="square" lIns="91425" tIns="45700" rIns="91425" bIns="45700" anchor="ctr" anchorCtr="0">
+            <a:noAutofit/>
+          </a:bodyPr>
+          <a:lstStyle/>
+          <a:p>
+            <a:pPr marL="0" marR="0" lvl="0" indent="0" algn="ctr" rtl="0">
+              <a:spcBef>
+                <a:spcPts val="0"/>
+              </a:spcBef>
+              <a:spcAft>
+                <a:spcPts val="0"/>
+              </a:spcAft>
+              <a:buNone/>
+            </a:pPr>
+            <a:r>
+              <a:rPr lang="ja-JP" sz="1800" b="0" i="0" u="none" strike="noStrike" cap="none">
+                <a:solidFill>
+                  <a:schemeClr val="lt1"/>
+                </a:solidFill>
+                <a:latin typeface="メイリオ"/>
+                <a:ea typeface="Meiryo"/>
+                <a:cs typeface="Meiryo"/>
+                <a:sym typeface="Meiryo"/>
+              </a:rPr>
+              <a:t>対象業界</a:t>
+            </a:r>
+            <a:endParaRPr/>
+          </a:p>
+        </p:txBody>
+      </p:sp>
+      <p:sp>
+        <p:nvSpPr>
+          <p:cNvPr id="41" name="Google Shape;41;p3"/>
+          <p:cNvSpPr/>
+          <p:nvPr/>
+        </p:nvSpPr>
+        <p:spPr>
+          <a:xfrm>
+            <a:off x="7560840" y="730955"/>
+            <a:ext cx="829618" cy="435690"/>
+          </a:xfrm>
+          <a:prstGeom prst="rect">
+            <a:avLst/>
+          </a:prstGeom>
+          <a:solidFill>
+            <a:schemeClr val="bg1"/>
+          </a:solidFill>
+          <a:ln w="9525" cap="flat" cmpd="sng">
+            <a:solidFill>
+              <a:srgbClr val="4F81BD"/>
+            </a:solidFill>
+            <a:prstDash val="sysDash"/>
+            <a:round/>
+            <a:headEnd type="none" w="sm" len="sm"/>
+            <a:tailEnd type="none" w="sm" len="sm"/>
+          </a:ln>
+        </p:spPr>
+        <p:txBody>
+          <a:bodyPr spcFirstLastPara="1" wrap="square" lIns="91425" tIns="45700" rIns="91425" bIns="45700" anchor="ctr" anchorCtr="0">
+            <a:noAutofit/>
+          </a:bodyPr>
+          <a:lstStyle/>
+          <a:p>
+            <a:pPr marL="0" marR="0" lvl="0" indent="0" algn="ctr" rtl="0">
+              <a:spcBef>
+                <a:spcPts val="0"/>
+              </a:spcBef>
+              <a:spcAft>
+                <a:spcPts val="0"/>
+              </a:spcAft>
+              <a:buNone/>
+            </a:pPr>
+            <a:r>
+              <a:rPr lang="ja-JP" sz="1200" b="0" i="0" u="none" strike="noStrike" cap="none">
+                <a:solidFill>
+                  <a:schemeClr val="dk1"/>
+                </a:solidFill>
+                <a:latin typeface="メイリオ"/>
+                <a:ea typeface="Meiryo"/>
+                <a:cs typeface="Meiryo"/>
+                <a:sym typeface="Meiryo"/>
+              </a:rPr>
+              <a:t>その他</a:t>
+            </a:r>
+            <a:endParaRPr sz="1200" b="0" i="0" u="none" strike="noStrike" cap="none">
+              <a:solidFill>
+                <a:schemeClr val="dk1"/>
+              </a:solidFill>
+              <a:latin typeface="Meiryo"/>
+              <a:ea typeface="Meiryo"/>
+              <a:cs typeface="Meiryo"/>
+              <a:sym typeface="Meiryo"/>
+            </a:endParaRPr>
+          </a:p>
+        </p:txBody>
+      </p:sp>
+      <p:sp>
+        <p:nvSpPr>
+          <p:cNvPr id="42" name="Google Shape;42;p3"/>
+          <p:cNvSpPr/>
+          <p:nvPr/>
+        </p:nvSpPr>
+        <p:spPr>
+          <a:xfrm>
+            <a:off x="6679050" y="730955"/>
+            <a:ext cx="829618" cy="435690"/>
+          </a:xfrm>
+          <a:prstGeom prst="rect">
+            <a:avLst/>
+          </a:prstGeom>
+          <a:solidFill>
+            <a:schemeClr val="bg1"/>
+          </a:solidFill>
+          <a:ln w="9525" cap="flat" cmpd="sng">
+            <a:solidFill>
+              <a:srgbClr val="4F81BD"/>
+            </a:solidFill>
+            <a:prstDash val="sysDash"/>
+            <a:round/>
+            <a:headEnd type="none" w="sm" len="sm"/>
+            <a:tailEnd type="none" w="sm" len="sm"/>
+          </a:ln>
+        </p:spPr>
+        <p:txBody>
+          <a:bodyPr spcFirstLastPara="1" wrap="square" lIns="91425" tIns="45700" rIns="91425" bIns="45700" anchor="ctr" anchorCtr="0">
+            <a:noAutofit/>
+          </a:bodyPr>
+          <a:lstStyle/>
+          <a:p>
+            <a:pPr marL="0" marR="0" lvl="0" indent="0" algn="ctr" rtl="0">
+              <a:spcBef>
+                <a:spcPts val="0"/>
+              </a:spcBef>
+              <a:spcAft>
+                <a:spcPts val="0"/>
+              </a:spcAft>
+              <a:buNone/>
+            </a:pPr>
+            <a:r>
+              <a:rPr lang="ja-JP" sz="1000" b="0" i="0" u="none" strike="noStrike" cap="none">
+                <a:solidFill>
+                  <a:schemeClr val="dk1"/>
+                </a:solidFill>
+                <a:latin typeface="メイリオ"/>
+                <a:ea typeface="Meiryo"/>
+                <a:cs typeface="Meiryo"/>
+                <a:sym typeface="Meiryo"/>
+              </a:rPr>
+              <a:t>オプション</a:t>
+            </a:r>
+            <a:endParaRPr sz="1000" b="0" i="0" u="none" strike="noStrike" cap="none">
+              <a:solidFill>
+                <a:schemeClr val="dk1"/>
+              </a:solidFill>
+              <a:latin typeface="Meiryo"/>
+              <a:ea typeface="Meiryo"/>
+              <a:cs typeface="Meiryo"/>
+              <a:sym typeface="Meiryo"/>
+            </a:endParaRPr>
+          </a:p>
+          <a:p>
+            <a:pPr marL="0" marR="0" lvl="0" indent="0" algn="ctr" rtl="0">
+              <a:spcBef>
+                <a:spcPts val="0"/>
+              </a:spcBef>
+              <a:spcAft>
+                <a:spcPts val="0"/>
+              </a:spcAft>
+              <a:buNone/>
+            </a:pPr>
+            <a:r>
+              <a:rPr lang="ja-JP" sz="1000" b="0" i="0" u="none" strike="noStrike" cap="none">
+                <a:solidFill>
+                  <a:schemeClr val="dk1"/>
+                </a:solidFill>
+                <a:latin typeface="メイリオ"/>
+                <a:ea typeface="Meiryo"/>
+                <a:cs typeface="Meiryo"/>
+                <a:sym typeface="Meiryo"/>
+              </a:rPr>
+              <a:t>商材</a:t>
+            </a:r>
+            <a:endParaRPr/>
+          </a:p>
+        </p:txBody>
+      </p:sp>
+      <p:sp>
+        <p:nvSpPr>
+          <p:cNvPr id="43" name="Google Shape;43;p3"/>
+          <p:cNvSpPr/>
+          <p:nvPr/>
+        </p:nvSpPr>
+        <p:spPr>
+          <a:xfrm>
+            <a:off x="1594068" y="730955"/>
+            <a:ext cx="2926883" cy="435690"/>
+          </a:xfrm>
+          <a:prstGeom prst="rect">
+            <a:avLst/>
+          </a:prstGeom>
+          <a:noFill/>
+          <a:ln w="9525" cap="flat" cmpd="sng">
+            <a:solidFill>
+              <a:srgbClr val="4A7DBA"/>
+            </a:solidFill>
+            <a:prstDash val="solid"/>
+            <a:round/>
+            <a:headEnd type="none" w="sm" len="sm"/>
+            <a:tailEnd type="none" w="sm" len="sm"/>
+          </a:ln>
+        </p:spPr>
+        <p:txBody>
+          <a:bodyPr spcFirstLastPara="1" wrap="square" lIns="91425" tIns="45700" rIns="91425" bIns="45700" anchor="ctr" anchorCtr="0">
+            <a:noAutofit/>
+          </a:bodyPr>
+          <a:lstStyle/>
+          <a:p>
+            <a:pPr marL="0" marR="0" lvl="0" indent="0" algn="ctr" rtl="0">
+              <a:spcBef>
+                <a:spcPts val="0"/>
+              </a:spcBef>
+              <a:spcAft>
+                <a:spcPts val="0"/>
+              </a:spcAft>
+              <a:buNone/>
+            </a:pPr>
+            <a:r>
+              <a:rPr lang="ja-JP" sz="1300" b="0" i="0" u="none" strike="noStrike" cap="none">
+                <a:solidFill>
+                  <a:schemeClr val="dk1"/>
+                </a:solidFill>
+                <a:latin typeface="メイリオ"/>
+                <a:ea typeface="Meiryo"/>
+                <a:cs typeface="Meiryo"/>
+                <a:sym typeface="Meiryo"/>
+              </a:rPr>
+              <a:t>EC・通販・予約サービス</a:t>
+            </a:r>
+            <a:br>
+              <a:rPr lang="ja-JP" sz="1300" b="0" i="0" u="none" strike="noStrike" cap="none">
+                <a:solidFill>
+                  <a:schemeClr val="dk1"/>
+                </a:solidFill>
+                <a:latin typeface="メイリオ"/>
+                <a:ea typeface="Meiryo"/>
+                <a:cs typeface="Meiryo"/>
+                <a:sym typeface="Meiryo"/>
+              </a:rPr>
+            </a:br>
+            <a:r>
+              <a:rPr lang="ja-JP" sz="1300" b="0" i="0" u="none" strike="noStrike" cap="none">
+                <a:solidFill>
+                  <a:schemeClr val="dk1"/>
+                </a:solidFill>
+                <a:latin typeface="メイリオ"/>
+                <a:ea typeface="Meiryo"/>
+                <a:cs typeface="Meiryo"/>
+                <a:sym typeface="Meiryo"/>
+              </a:rPr>
+              <a:t>（自社アプリあり）</a:t>
+            </a:r>
+            <a:endParaRPr/>
+          </a:p>
+        </p:txBody>
+      </p:sp>
+      <p:sp>
+        <p:nvSpPr>
+          <p:cNvPr id="44" name="Google Shape;44;p3"/>
+          <p:cNvSpPr txBox="1"/>
+          <p:nvPr/>
+        </p:nvSpPr>
+        <p:spPr>
+          <a:xfrm>
+            <a:off x="3296816" y="6597352"/>
+            <a:ext cx="6209091" cy="215444"/>
+          </a:xfrm>
+          <a:prstGeom prst="rect">
+            <a:avLst/>
+          </a:prstGeom>
+          <a:noFill/>
+          <a:ln>
+            <a:noFill/>
+          </a:ln>
+        </p:spPr>
+        <p:txBody>
+          <a:bodyPr spcFirstLastPara="1" wrap="square" lIns="91425" tIns="45700" rIns="91425" bIns="45700" anchor="t" anchorCtr="0">
+            <a:spAutoFit/>
+          </a:bodyPr>
+          <a:lstStyle/>
+          <a:p>
+            <a:pPr marL="0" marR="0" lvl="0" indent="0" algn="l" rtl="0">
+              <a:spcBef>
+                <a:spcPts val="0"/>
+              </a:spcBef>
+              <a:spcAft>
+                <a:spcPts val="0"/>
+              </a:spcAft>
+              <a:buNone/>
+            </a:pPr>
+            <a:r>
+              <a:rPr lang="ja-JP" sz="800" b="0" i="0" u="none" strike="noStrike" cap="none">
+                <a:solidFill>
+                  <a:schemeClr val="lt1"/>
+                </a:solidFill>
+                <a:latin typeface="メイリオ"/>
+                <a:ea typeface="Meiryo"/>
+                <a:cs typeface="Meiryo"/>
+                <a:sym typeface="Meiryo"/>
+              </a:rPr>
+              <a:t>出典：代理店情報</a:t>
+            </a:r>
+            <a:endParaRPr sz="800">
+              <a:solidFill>
+                <a:schemeClr val="lt1"/>
+              </a:solidFill>
+              <a:latin typeface="Meiryo"/>
+              <a:ea typeface="Meiryo"/>
+              <a:cs typeface="Meiryo"/>
+              <a:sym typeface="Meiryo"/>
+            </a:endParaRPr>
+          </a:p>
+        </p:txBody>
+      </p:sp>
+      <p:sp>
+        <p:nvSpPr>
+          <p:cNvPr id="45" name="Google Shape;45;p3"/>
+          <p:cNvSpPr/>
+          <p:nvPr/>
+        </p:nvSpPr>
+        <p:spPr>
+          <a:xfrm>
+            <a:off x="0" y="1234746"/>
+            <a:ext cx="9906000" cy="672259"/>
+          </a:xfrm>
+          <a:prstGeom prst="rect">
+            <a:avLst/>
+          </a:prstGeom>
+          <a:solidFill>
+            <a:srgbClr val="C5D8F1"/>
+          </a:solidFill>
+          <a:ln>
+            <a:noFill/>
+          </a:ln>
+        </p:spPr>
+        <p:txBody>
+          <a:bodyPr spcFirstLastPara="1" wrap="square" lIns="91425" tIns="45700" rIns="91425" bIns="45700" anchor="ctr" anchorCtr="0">
+            <a:noAutofit/>
+          </a:bodyPr>
+          <a:lstStyle/>
+          <a:p>
+            <a:pPr marL="0" marR="0" lvl="0" indent="0" algn="ctr" rtl="0">
+              <a:spcBef>
+                <a:spcPts val="0"/>
+              </a:spcBef>
+              <a:spcAft>
+                <a:spcPts val="0"/>
+              </a:spcAft>
+              <a:buNone/>
+            </a:pPr>
+            <a:r>
+              <a:rPr lang="ja-JP" sz="1600" b="1">
+                <a:solidFill>
+                  <a:srgbClr val="004DE6"/>
+                </a:solidFill>
+                <a:latin typeface="メイリオ"/>
+                <a:ea typeface="Meiryo"/>
+                <a:cs typeface="Meiryo"/>
+                <a:sym typeface="Meiryo"/>
+              </a:rPr>
+              <a:t>　　　　　　</a:t>
+            </a:r>
+            <a:endParaRPr sz="1800" b="1">
+              <a:solidFill>
+                <a:srgbClr val="004DE6"/>
+              </a:solidFill>
+              <a:latin typeface="Meiryo"/>
+              <a:ea typeface="Meiryo"/>
+              <a:cs typeface="Meiryo"/>
+              <a:sym typeface="Meiryo"/>
+            </a:endParaRPr>
+          </a:p>
+        </p:txBody>
+      </p:sp>
+      <p:sp>
+        <p:nvSpPr>
+          <p:cNvPr id="46" name="Google Shape;46;p3"/>
+          <p:cNvSpPr/>
+          <p:nvPr/>
+        </p:nvSpPr>
+        <p:spPr>
+          <a:xfrm>
+            <a:off x="1089832" y="1437370"/>
+            <a:ext cx="7031520" cy="338554"/>
+          </a:xfrm>
+          <a:prstGeom prst="rect">
+            <a:avLst/>
+          </a:prstGeom>
+          <a:noFill/>
+          <a:ln>
+            <a:noFill/>
+          </a:ln>
+        </p:spPr>
+        <p:txBody>
+          <a:bodyPr spcFirstLastPara="1" wrap="square" lIns="91425" tIns="45700" rIns="91425" bIns="45700" anchor="t" anchorCtr="0">
+            <a:spAutoFit/>
+          </a:bodyPr>
+          <a:lstStyle/>
+          <a:p>
+            <a:pPr marL="0" marR="0" lvl="0" indent="0" algn="l" rtl="0">
+              <a:spcBef>
+                <a:spcPts val="0"/>
+              </a:spcBef>
+              <a:spcAft>
+                <a:spcPts val="0"/>
+              </a:spcAft>
+              <a:buNone/>
+            </a:pPr>
+            <a:r>
+              <a:rPr lang="ja-JP" sz="1600" b="1">
+                <a:solidFill>
+                  <a:srgbClr val="004DE6"/>
+                </a:solidFill>
+                <a:latin typeface="メイリオ"/>
+                <a:ea typeface="Meiryo"/>
+                <a:cs typeface="Meiryo"/>
+                <a:sym typeface="Meiryo"/>
+              </a:rPr>
+              <a:t>【LINE通知メッセージ】ネイティブアプリ遷移の条件</a:t>
+            </a:r>
+            <a:endParaRPr sz="1600" b="1">
+              <a:solidFill>
+                <a:srgbClr val="004DE6"/>
+              </a:solidFill>
+              <a:latin typeface="Meiryo"/>
+              <a:ea typeface="Meiryo"/>
+              <a:cs typeface="Meiryo"/>
+              <a:sym typeface="Meiryo"/>
+            </a:endParaRPr>
+          </a:p>
+        </p:txBody>
+      </p:sp>
+      <p:sp>
+        <p:nvSpPr>
+          <p:cNvPr id="47" name="Google Shape;47;p3"/>
+          <p:cNvSpPr txBox="1"/>
+          <p:nvPr/>
+        </p:nvSpPr>
+        <p:spPr>
+          <a:xfrm>
+            <a:off x="182880" y="88175"/>
+            <a:ext cx="7512385" cy="365091"/>
+          </a:xfrm>
+          <a:prstGeom prst="rect">
+            <a:avLst/>
+          </a:prstGeom>
+          <a:noFill/>
+          <a:ln>
+            <a:noFill/>
+          </a:ln>
+        </p:spPr>
+        <p:txBody>
+          <a:bodyPr spcFirstLastPara="1" wrap="square" lIns="91425" tIns="72000" rIns="91425" bIns="45700" anchor="t" anchorCtr="0">
+            <a:spAutoFit/>
+          </a:bodyPr>
+          <a:lstStyle/>
+          <a:p>
+            <a:pPr marL="0" marR="0" lvl="0" indent="0" algn="l" rtl="0">
+              <a:spcBef>
+                <a:spcPts val="0"/>
+              </a:spcBef>
+              <a:spcAft>
+                <a:spcPts val="0"/>
+              </a:spcAft>
+              <a:buClr>
+                <a:schemeClr val="dk1"/>
+              </a:buClr>
+              <a:buSzPts val="1600"/>
+              <a:buFont typeface="Arial"/>
+              <a:buNone/>
+            </a:pPr>
+            <a:r>
+              <a:rPr lang="ja-JP" sz="1600" b="0" u="none">
+                <a:solidFill>
+                  <a:schemeClr val="dk1"/>
+                </a:solidFill>
+                <a:latin typeface="メイリオ"/>
+                <a:ea typeface="Meiryo"/>
+                <a:cs typeface="Meiryo"/>
+                <a:sym typeface="Meiryo"/>
+              </a:rPr>
+              <a:t>    今後のアップデート情報</a:t>
+            </a:r>
+            <a:endParaRPr sz="1600" b="0" u="none">
+              <a:solidFill>
+                <a:schemeClr val="dk1"/>
+              </a:solidFill>
+              <a:latin typeface="Meiryo"/>
+              <a:ea typeface="Meiryo"/>
+              <a:cs typeface="Meiryo"/>
+              <a:sym typeface="Meiryo"/>
+            </a:endParaRPr>
+          </a:p>
+        </p:txBody>
+      </p:sp>
+      <p:sp>
+        <p:nvSpPr>
+          <p:cNvPr id="48" name="Google Shape;48;p3"/>
+          <p:cNvSpPr/>
+          <p:nvPr/>
+        </p:nvSpPr>
+        <p:spPr>
+          <a:xfrm>
+            <a:off x="5797260" y="730955"/>
+            <a:ext cx="829618" cy="435690"/>
+          </a:xfrm>
+          <a:prstGeom prst="rect">
+            <a:avLst/>
+          </a:prstGeom>
+          <a:solidFill>
+            <a:schemeClr val="tx2"/>
+          </a:solidFill>
+          <a:ln w="9525" cap="flat" cmpd="sng">
+            <a:solidFill>
+              <a:srgbClr val="4F81BD"/>
+            </a:solidFill>
+            <a:prstDash val="solid"/>
+            <a:round/>
+            <a:headEnd type="none" w="sm" len="sm"/>
+            <a:tailEnd type="none" w="sm" len="sm"/>
+          </a:ln>
+        </p:spPr>
+        <p:txBody>
+          <a:bodyPr spcFirstLastPara="1" wrap="square" lIns="91425" tIns="45700" rIns="91425" bIns="45700" anchor="ctr" anchorCtr="0">
+            <a:noAutofit/>
+          </a:bodyPr>
+          <a:lstStyle/>
+          <a:p>
+            <a:pPr marL="0" marR="0" lvl="0" indent="0" algn="ctr" rtl="0">
+              <a:spcBef>
+                <a:spcPts val="0"/>
+              </a:spcBef>
+              <a:spcAft>
+                <a:spcPts val="0"/>
+              </a:spcAft>
+              <a:buClr>
+                <a:schemeClr val="dk1"/>
+              </a:buClr>
+              <a:buSzPts val="1000"/>
+              <a:buFont typeface="Meiryo"/>
+              <a:buNone/>
+            </a:pPr>
+            <a:r>
+              <a:rPr lang="ja-JP" sz="1000">
+                <a:solidFill>
+                  <a:schemeClr val="dk1"/>
+                </a:solidFill>
+                <a:latin typeface="メイリオ"/>
+                <a:ea typeface="Meiryo"/>
+                <a:cs typeface="Meiryo"/>
+                <a:sym typeface="Meiryo"/>
+              </a:rPr>
+              <a:t>開発</a:t>
+            </a:r>
+            <a:endParaRPr sz="1000">
+              <a:solidFill>
+                <a:schemeClr val="dk1"/>
+              </a:solidFill>
+              <a:latin typeface="Meiryo"/>
+              <a:ea typeface="Meiryo"/>
+              <a:cs typeface="Meiryo"/>
+              <a:sym typeface="Meiryo"/>
+            </a:endParaRPr>
+          </a:p>
+          <a:p>
+            <a:pPr marL="0" marR="0" lvl="0" indent="0" algn="ctr" rtl="0">
+              <a:spcBef>
+                <a:spcPts val="0"/>
+              </a:spcBef>
+              <a:spcAft>
+                <a:spcPts val="0"/>
+              </a:spcAft>
+              <a:buClr>
+                <a:schemeClr val="dk1"/>
+              </a:buClr>
+              <a:buSzPts val="1000"/>
+              <a:buFont typeface="Meiryo"/>
+              <a:buNone/>
+            </a:pPr>
+            <a:r>
+              <a:rPr lang="ja-JP" sz="1000">
+                <a:solidFill>
+                  <a:schemeClr val="dk1"/>
+                </a:solidFill>
+                <a:latin typeface="メイリオ"/>
+                <a:ea typeface="Meiryo"/>
+                <a:cs typeface="Meiryo"/>
+                <a:sym typeface="Meiryo"/>
+              </a:rPr>
+              <a:t>LINE API</a:t>
+            </a:r>
+            <a:endParaRPr sz="1000">
+              <a:solidFill>
+                <a:schemeClr val="dk1"/>
+              </a:solidFill>
+              <a:latin typeface="Meiryo"/>
+              <a:ea typeface="Meiryo"/>
+              <a:cs typeface="Meiryo"/>
+              <a:sym typeface="Meiryo"/>
+            </a:endParaRPr>
+          </a:p>
+        </p:txBody>
+      </p:sp>
+      <p:sp>
+        <p:nvSpPr>
+          <p:cNvPr id="49" name="Google Shape;49;p3"/>
+          <p:cNvSpPr/>
+          <p:nvPr/>
+        </p:nvSpPr>
+        <p:spPr>
+          <a:xfrm>
+            <a:off x="4915470" y="730955"/>
+            <a:ext cx="829618" cy="435690"/>
+          </a:xfrm>
+          <a:prstGeom prst="rect">
+            <a:avLst/>
+          </a:prstGeom>
+          <a:solidFill>
+            <a:schemeClr val="bg1"/>
+          </a:solidFill>
+          <a:ln w="9525" cap="flat" cmpd="sng">
+            <a:solidFill>
+              <a:srgbClr val="4F81BD"/>
+            </a:solidFill>
+            <a:prstDash val="sysDash"/>
+            <a:round/>
+            <a:headEnd type="none" w="sm" len="sm"/>
+            <a:tailEnd type="none" w="sm" len="sm"/>
+          </a:ln>
+        </p:spPr>
+        <p:txBody>
+          <a:bodyPr spcFirstLastPara="1" wrap="square" lIns="91425" tIns="45700" rIns="91425" bIns="45700" anchor="ctr" anchorCtr="0">
+            <a:noAutofit/>
+          </a:bodyPr>
+          <a:lstStyle/>
+          <a:p>
+            <a:pPr marL="0" marR="0" lvl="0" indent="0" algn="ctr" rtl="0">
+              <a:spcBef>
+                <a:spcPts val="0"/>
+              </a:spcBef>
+              <a:spcAft>
+                <a:spcPts val="0"/>
+              </a:spcAft>
+              <a:buNone/>
+            </a:pPr>
+            <a:r>
+              <a:rPr lang="ja-JP" sz="1000">
+                <a:solidFill>
+                  <a:schemeClr val="dk1"/>
+                </a:solidFill>
+                <a:latin typeface="メイリオ"/>
+                <a:ea typeface="Meiryo"/>
+                <a:cs typeface="Meiryo"/>
+                <a:sym typeface="Meiryo"/>
+              </a:rPr>
+              <a:t>LINE公式アカウント</a:t>
+            </a:r>
+            <a:endParaRPr sz="1000">
+              <a:solidFill>
+                <a:schemeClr val="dk1"/>
+              </a:solidFill>
+              <a:latin typeface="Meiryo"/>
+              <a:ea typeface="Meiryo"/>
+              <a:cs typeface="Meiryo"/>
+              <a:sym typeface="Meiryo"/>
+            </a:endParaRPr>
+          </a:p>
+        </p:txBody>
+      </p:sp>
+      <p:sp>
+        <p:nvSpPr>
+          <p:cNvPr id="50" name="Google Shape;50;p3"/>
+          <p:cNvSpPr/>
+          <p:nvPr/>
+        </p:nvSpPr>
+        <p:spPr>
+          <a:xfrm>
+            <a:off x="0" y="1890267"/>
+            <a:ext cx="9906000" cy="733579"/>
+          </a:xfrm>
+          <a:prstGeom prst="rect">
+            <a:avLst/>
+          </a:prstGeom>
+          <a:solidFill>
+            <a:srgbClr val="F2F2F2"/>
+          </a:solidFill>
+          <a:ln>
+            <a:noFill/>
+          </a:ln>
+        </p:spPr>
+        <p:txBody>
+          <a:bodyPr spcFirstLastPara="1" wrap="square" lIns="91425" tIns="45700" rIns="91425" bIns="45700" anchor="ctr" anchorCtr="0">
+            <a:noAutofit/>
+          </a:bodyPr>
+          <a:lstStyle/>
+          <a:p>
+            <a:pPr marL="0" marR="0" lvl="0" indent="0" algn="ctr" rtl="0">
+              <a:spcBef>
+                <a:spcPts val="0"/>
+              </a:spcBef>
+              <a:spcAft>
+                <a:spcPts val="0"/>
+              </a:spcAft>
+              <a:buNone/>
+            </a:pPr>
+            <a:endParaRPr sz="1200">
+              <a:solidFill>
+                <a:schemeClr val="dk1"/>
+              </a:solidFill>
+              <a:latin typeface="Meiryo"/>
+              <a:ea typeface="Meiryo"/>
+              <a:cs typeface="Meiryo"/>
+              <a:sym typeface="Meiryo"/>
+            </a:endParaRPr>
+          </a:p>
+        </p:txBody>
+      </p:sp>
+      <p:sp>
+        <p:nvSpPr>
+          <p:cNvPr id="51" name="Google Shape;51;p3"/>
+          <p:cNvSpPr/>
+          <p:nvPr/>
+        </p:nvSpPr>
+        <p:spPr>
+          <a:xfrm>
+            <a:off x="544108" y="1961282"/>
+            <a:ext cx="8817783" cy="646331"/>
+          </a:xfrm>
+          <a:prstGeom prst="rect">
+            <a:avLst/>
+          </a:prstGeom>
+          <a:noFill/>
+          <a:ln>
+            <a:noFill/>
+          </a:ln>
+        </p:spPr>
+        <p:txBody>
+          <a:bodyPr spcFirstLastPara="1" wrap="square" lIns="91425" tIns="45700" rIns="91425" bIns="45700" anchor="t" anchorCtr="0">
+            <a:spAutoFit/>
+          </a:bodyPr>
+          <a:lstStyle/>
+          <a:p>
+            <a:pPr marL="0" marR="0" lvl="0" indent="0" algn="ctr" rtl="0">
+              <a:spcBef>
+                <a:spcPts val="0"/>
+              </a:spcBef>
+              <a:spcAft>
+                <a:spcPts val="0"/>
+              </a:spcAft>
+              <a:buNone/>
+            </a:pPr>
+            <a:r>
+              <a:rPr lang="ja-JP" sz="1200" b="1">
+                <a:solidFill>
+                  <a:schemeClr val="dk1"/>
+                </a:solidFill>
+                <a:latin typeface="メイリオ"/>
+                <a:ea typeface="Meiryo"/>
+                <a:cs typeface="Meiryo"/>
+                <a:sym typeface="Meiryo"/>
+              </a:rPr>
+              <a:t>ネイティブアプリへ遷移させるには、LINEヤフーの審査で次の4つを満たす必要がある。</a:t>
+            </a:r>
+            <a:endParaRPr sz="1200" b="1">
+              <a:solidFill>
+                <a:schemeClr val="dk1"/>
+              </a:solidFill>
+              <a:latin typeface="Meiryo"/>
+              <a:ea typeface="Meiryo"/>
+              <a:cs typeface="Meiryo"/>
+              <a:sym typeface="Meiryo"/>
+            </a:endParaRPr>
+          </a:p>
+          <a:p>
+            <a:pPr marL="0" marR="0" lvl="0" indent="0" algn="ctr" rtl="0">
+              <a:spcBef>
+                <a:spcPts val="0"/>
+              </a:spcBef>
+              <a:spcAft>
+                <a:spcPts val="0"/>
+              </a:spcAft>
+              <a:buNone/>
+            </a:pPr>
+            <a:r>
+              <a:rPr lang="ja-JP" sz="1200" b="1">
+                <a:solidFill>
+                  <a:schemeClr val="dk1"/>
+                </a:solidFill>
+                <a:latin typeface="メイリオ"/>
+                <a:ea typeface="Meiryo"/>
+                <a:cs typeface="Meiryo"/>
+                <a:sym typeface="Meiryo"/>
+              </a:rPr>
+              <a:t>条件はLINE通知メッセージ（フレキシブル／テンプレート）のUXガイドラインに記載。</a:t>
+            </a:r>
+            <a:endParaRPr/>
+          </a:p>
+          <a:p>
+            <a:pPr marL="0" marR="0" lvl="0" indent="0" algn="ctr" rtl="0">
+              <a:spcBef>
+                <a:spcPts val="0"/>
+              </a:spcBef>
+              <a:spcAft>
+                <a:spcPts val="0"/>
+              </a:spcAft>
+              <a:buNone/>
+            </a:pPr>
+            <a:r>
+              <a:rPr lang="ja-JP" sz="1200" b="1">
+                <a:solidFill>
+                  <a:schemeClr val="dk1"/>
+                </a:solidFill>
+                <a:latin typeface="メイリオ"/>
+                <a:ea typeface="Meiryo"/>
+                <a:cs typeface="Meiryo"/>
+                <a:sym typeface="Meiryo"/>
+              </a:rPr>
+              <a:t>対象プラン：エッセンシャル／パフォーマンス／アンリミテッド</a:t>
+            </a:r>
+            <a:endParaRPr sz="1400" b="1">
+              <a:solidFill>
+                <a:schemeClr val="dk1"/>
+              </a:solidFill>
+              <a:latin typeface="Meiryo"/>
+              <a:ea typeface="Meiryo"/>
+              <a:cs typeface="Meiryo"/>
+              <a:sym typeface="Meiryo"/>
+            </a:endParaRPr>
+          </a:p>
+        </p:txBody>
+      </p:sp>
+      <p:sp>
+        <p:nvSpPr>
+          <p:cNvPr id="52" name="Google Shape;52;p3"/>
+          <p:cNvSpPr/>
+          <p:nvPr/>
+        </p:nvSpPr>
+        <p:spPr>
+          <a:xfrm>
+            <a:off x="351381" y="2714173"/>
+            <a:ext cx="5200000" cy="338554"/>
+          </a:xfrm>
+          <a:prstGeom prst="rect">
+            <a:avLst/>
+          </a:prstGeom>
+          <a:noFill/>
+          <a:ln>
+            <a:noFill/>
+          </a:ln>
+        </p:spPr>
+        <p:txBody>
+          <a:bodyPr spcFirstLastPara="1" wrap="square" lIns="91425" tIns="45700" rIns="91425" bIns="45700" anchor="t" anchorCtr="0">
+            <a:noAutofit/>
+          </a:bodyPr>
+          <a:lstStyle/>
+          <a:p>
+            <a:pPr marL="0" marR="0" lvl="0" indent="0" algn="l" rtl="0">
+              <a:spcBef>
+                <a:spcPts val="0"/>
+              </a:spcBef>
+              <a:spcAft>
+                <a:spcPts val="0"/>
+              </a:spcAft>
+              <a:buNone/>
+            </a:pPr>
+            <a:r>
+              <a:rPr lang="ja-JP" sz="1400" b="1">
+                <a:solidFill>
+                  <a:srgbClr val="15133D"/>
+                </a:solidFill>
+                <a:latin typeface="メイリオ"/>
+                <a:ea typeface="Meiryo"/>
+                <a:cs typeface="Meiryo"/>
+                <a:sym typeface="Meiryo"/>
+              </a:rPr>
+              <a:t>■ 詳細</a:t>
+            </a:r>
+            <a:endParaRPr/>
+          </a:p>
+        </p:txBody>
+      </p:sp>
+      <p:grpSp>
+        <p:nvGrpSpPr>
+          <p:cNvPr id="53" name="Google Shape;53;p3"/>
+          <p:cNvGrpSpPr/>
+          <p:nvPr/>
+        </p:nvGrpSpPr>
+        <p:grpSpPr>
+          <a:xfrm>
+            <a:off x="8473303" y="730955"/>
+            <a:ext cx="1376241" cy="1131930"/>
+            <a:chOff x="0" y="0"/>
+            <a:chExt cx="1376241" cy="1131930"/>
+          </a:xfrm>
+        </p:grpSpPr>
+        <p:sp>
+          <p:nvSpPr>
+            <p:cNvPr id="54" name="Google Shape;54;p3"/>
+            <p:cNvSpPr/>
+            <p:nvPr/>
+          </p:nvSpPr>
+          <p:spPr>
+            <a:xfrm rot="10800000">
+              <a:off x="0" y="0"/>
+              <a:ext cx="1376241" cy="282982"/>
+            </a:xfrm>
+            <a:prstGeom prst="trapezoid">
+              <a:avLst>
+                <a:gd name="adj" fmla="val 60792"/>
+              </a:avLst>
+            </a:prstGeom>
+            <a:solidFill>
+              <a:srgbClr val="EAEDF5"/>
+            </a:solidFill>
+            <a:ln w="25400" cap="flat" cmpd="sng">
+              <a:solidFill>
+                <a:schemeClr val="dk2"/>
+              </a:solidFill>
+              <a:prstDash val="solid"/>
+              <a:round/>
+              <a:headEnd type="none" w="sm" len="sm"/>
+              <a:tailEnd type="none" w="sm" len="sm"/>
+            </a:ln>
+          </p:spPr>
+          <p:txBody>
+            <a:bodyPr spcFirstLastPara="1" wrap="square" lIns="91425" tIns="91425" rIns="91425" bIns="91425" anchor="ctr" anchorCtr="0">
+              <a:noAutofit/>
+            </a:bodyPr>
+            <a:lstStyle/>
+            <a:p>
+              <a:pPr marL="0" lvl="0" indent="0" algn="l" rtl="0">
+                <a:spcBef>
+                  <a:spcPts val="0"/>
+                </a:spcBef>
+                <a:spcAft>
+                  <a:spcPts val="0"/>
+                </a:spcAft>
+                <a:buNone/>
+              </a:pPr>
+              <a:endParaRPr/>
+            </a:p>
+          </p:txBody>
+        </p:sp>
+        <p:sp>
+          <p:nvSpPr>
+            <p:cNvPr id="55" name="Google Shape;55;p3"/>
+            <p:cNvSpPr txBox="1"/>
+            <p:nvPr/>
+          </p:nvSpPr>
+          <p:spPr>
+            <a:xfrm>
+              <a:off x="240842" y="0"/>
+              <a:ext cx="894556" cy="282982"/>
+            </a:xfrm>
+            <a:prstGeom prst="rect">
+              <a:avLst/>
+            </a:prstGeom>
+            <a:noFill/>
+            <a:ln>
+              <a:noFill/>
+            </a:ln>
+          </p:spPr>
+          <p:txBody>
+            <a:bodyPr spcFirstLastPara="1" wrap="square" lIns="10150" tIns="10150" rIns="10150" bIns="10150" anchor="ctr" anchorCtr="0">
+              <a:noAutofit/>
+            </a:bodyPr>
+            <a:lstStyle/>
+            <a:p>
+              <a:pPr marL="0" marR="0" lvl="0" indent="0" algn="ctr" rtl="0">
+                <a:lnSpc>
+                  <a:spcPct val="90000"/>
+                </a:lnSpc>
+                <a:spcBef>
+                  <a:spcPts val="0"/>
+                </a:spcBef>
+                <a:spcAft>
+                  <a:spcPts val="0"/>
+                </a:spcAft>
+                <a:buClr>
+                  <a:srgbClr val="262626"/>
+                </a:buClr>
+                <a:buSzPts val="800"/>
+                <a:buFont typeface="Arial"/>
+                <a:buNone/>
+              </a:pPr>
+              <a:r>
+                <a:rPr lang="ja-JP" sz="800" b="1">
+                  <a:solidFill>
+                    <a:srgbClr val="262626"/>
+                  </a:solidFill>
+                  <a:latin typeface="Arial"/>
+                  <a:ea typeface="Arial"/>
+                  <a:cs typeface="Arial"/>
+                  <a:sym typeface="Arial"/>
+                </a:rPr>
+                <a:t>認知</a:t>
+              </a:r>
+              <a:endParaRPr/>
+            </a:p>
+          </p:txBody>
+        </p:sp>
+        <p:sp>
+          <p:nvSpPr>
+            <p:cNvPr id="56" name="Google Shape;56;p3"/>
+            <p:cNvSpPr/>
+            <p:nvPr/>
+          </p:nvSpPr>
+          <p:spPr>
+            <a:xfrm rot="10800000">
+              <a:off x="172030" y="282982"/>
+              <a:ext cx="1032180" cy="282982"/>
+            </a:xfrm>
+            <a:prstGeom prst="trapezoid">
+              <a:avLst>
+                <a:gd name="adj" fmla="val 60792"/>
+              </a:avLst>
+            </a:prstGeom>
+            <a:solidFill>
+              <a:schemeClr val="lt1"/>
+            </a:solidFill>
+            <a:ln w="25400" cap="flat" cmpd="sng">
+              <a:solidFill>
+                <a:schemeClr val="dk2"/>
+              </a:solidFill>
+              <a:prstDash val="solid"/>
+              <a:round/>
+              <a:headEnd type="none" w="sm" len="sm"/>
+              <a:tailEnd type="none" w="sm" len="sm"/>
+            </a:ln>
+          </p:spPr>
+          <p:txBody>
+            <a:bodyPr spcFirstLastPara="1" wrap="square" lIns="91425" tIns="91425" rIns="91425" bIns="91425" anchor="ctr" anchorCtr="0">
+              <a:noAutofit/>
+            </a:bodyPr>
+            <a:lstStyle/>
+            <a:p>
+              <a:pPr marL="0" lvl="0" indent="0" algn="l" rtl="0">
+                <a:spcBef>
+                  <a:spcPts val="0"/>
+                </a:spcBef>
+                <a:spcAft>
+                  <a:spcPts val="0"/>
+                </a:spcAft>
+                <a:buNone/>
+              </a:pPr>
+              <a:endParaRPr/>
+            </a:p>
+          </p:txBody>
+        </p:sp>
+        <p:sp>
+          <p:nvSpPr>
+            <p:cNvPr id="57" name="Google Shape;57;p3"/>
+            <p:cNvSpPr txBox="1"/>
+            <p:nvPr/>
+          </p:nvSpPr>
+          <p:spPr>
+            <a:xfrm>
+              <a:off x="352661" y="282982"/>
+              <a:ext cx="670917" cy="282982"/>
+            </a:xfrm>
+            <a:prstGeom prst="rect">
+              <a:avLst/>
+            </a:prstGeom>
+            <a:noFill/>
+            <a:ln>
+              <a:noFill/>
+            </a:ln>
+          </p:spPr>
+          <p:txBody>
+            <a:bodyPr spcFirstLastPara="1" wrap="square" lIns="10150" tIns="10150" rIns="10150" bIns="10150" anchor="ctr" anchorCtr="0">
+              <a:noAutofit/>
+            </a:bodyPr>
+            <a:lstStyle/>
+            <a:p>
+              <a:pPr marL="0" marR="0" lvl="0" indent="0" algn="ctr" rtl="0">
+                <a:lnSpc>
+                  <a:spcPct val="90000"/>
+                </a:lnSpc>
+                <a:spcBef>
+                  <a:spcPts val="0"/>
+                </a:spcBef>
+                <a:spcAft>
+                  <a:spcPts val="0"/>
+                </a:spcAft>
+                <a:buClr>
+                  <a:srgbClr val="262626"/>
+                </a:buClr>
+                <a:buSzPts val="800"/>
+                <a:buFont typeface="Arial"/>
+                <a:buNone/>
+              </a:pPr>
+              <a:r>
+                <a:rPr lang="ja-JP" sz="800" b="1">
+                  <a:solidFill>
+                    <a:srgbClr val="262626"/>
+                  </a:solidFill>
+                  <a:latin typeface="Arial"/>
+                  <a:ea typeface="Arial"/>
+                  <a:cs typeface="Arial"/>
+                  <a:sym typeface="Arial"/>
+                </a:rPr>
+                <a:t>検討</a:t>
+              </a:r>
+              <a:endParaRPr/>
+            </a:p>
+          </p:txBody>
+        </p:sp>
+        <p:sp>
+          <p:nvSpPr>
+            <p:cNvPr id="58" name="Google Shape;58;p3"/>
+            <p:cNvSpPr/>
+            <p:nvPr/>
+          </p:nvSpPr>
+          <p:spPr>
+            <a:xfrm rot="10800000">
+              <a:off x="344060" y="565965"/>
+              <a:ext cx="688120" cy="282982"/>
+            </a:xfrm>
+            <a:prstGeom prst="trapezoid">
+              <a:avLst>
+                <a:gd name="adj" fmla="val 60792"/>
+              </a:avLst>
+            </a:prstGeom>
+            <a:solidFill>
+              <a:schemeClr val="lt1"/>
+            </a:solidFill>
+            <a:ln w="25400" cap="flat" cmpd="sng">
+              <a:solidFill>
+                <a:schemeClr val="dk2"/>
+              </a:solidFill>
+              <a:prstDash val="solid"/>
+              <a:round/>
+              <a:headEnd type="none" w="sm" len="sm"/>
+              <a:tailEnd type="none" w="sm" len="sm"/>
+            </a:ln>
+          </p:spPr>
+          <p:txBody>
+            <a:bodyPr spcFirstLastPara="1" wrap="square" lIns="91425" tIns="91425" rIns="91425" bIns="91425" anchor="ctr" anchorCtr="0">
+              <a:noAutofit/>
+            </a:bodyPr>
+            <a:lstStyle/>
+            <a:p>
+              <a:pPr marL="0" lvl="0" indent="0" algn="l" rtl="0">
+                <a:spcBef>
+                  <a:spcPts val="0"/>
+                </a:spcBef>
+                <a:spcAft>
+                  <a:spcPts val="0"/>
+                </a:spcAft>
+                <a:buNone/>
+              </a:pPr>
+              <a:endParaRPr/>
+            </a:p>
+          </p:txBody>
+        </p:sp>
+        <p:sp>
+          <p:nvSpPr>
+            <p:cNvPr id="59" name="Google Shape;59;p3"/>
+            <p:cNvSpPr txBox="1"/>
+            <p:nvPr/>
+          </p:nvSpPr>
+          <p:spPr>
+            <a:xfrm>
+              <a:off x="464481" y="565965"/>
+              <a:ext cx="447278" cy="282982"/>
+            </a:xfrm>
+            <a:prstGeom prst="rect">
+              <a:avLst/>
+            </a:prstGeom>
+            <a:noFill/>
+            <a:ln>
+              <a:noFill/>
+            </a:ln>
+          </p:spPr>
+          <p:txBody>
+            <a:bodyPr spcFirstLastPara="1" wrap="square" lIns="10150" tIns="10150" rIns="10150" bIns="10150" anchor="ctr" anchorCtr="0">
+              <a:noAutofit/>
+            </a:bodyPr>
+            <a:lstStyle/>
+            <a:p>
+              <a:pPr marL="0" marR="0" lvl="0" indent="0" algn="ctr" rtl="0">
+                <a:lnSpc>
+                  <a:spcPct val="90000"/>
+                </a:lnSpc>
+                <a:spcBef>
+                  <a:spcPts val="0"/>
+                </a:spcBef>
+                <a:spcAft>
+                  <a:spcPts val="0"/>
+                </a:spcAft>
+                <a:buClr>
+                  <a:srgbClr val="262626"/>
+                </a:buClr>
+                <a:buSzPts val="800"/>
+                <a:buFont typeface="Arial"/>
+                <a:buNone/>
+              </a:pPr>
+              <a:r>
+                <a:rPr lang="ja-JP" sz="800" b="1">
+                  <a:solidFill>
+                    <a:srgbClr val="262626"/>
+                  </a:solidFill>
+                  <a:latin typeface="Arial"/>
+                  <a:ea typeface="Arial"/>
+                  <a:cs typeface="Arial"/>
+                  <a:sym typeface="Arial"/>
+                </a:rPr>
+                <a:t>獲得</a:t>
+              </a:r>
+              <a:endParaRPr/>
+            </a:p>
+          </p:txBody>
+        </p:sp>
+        <p:sp>
+          <p:nvSpPr>
+            <p:cNvPr id="60" name="Google Shape;60;p3"/>
+            <p:cNvSpPr/>
+            <p:nvPr/>
+          </p:nvSpPr>
+          <p:spPr>
+            <a:xfrm rot="10800000">
+              <a:off x="516090" y="848948"/>
+              <a:ext cx="344060" cy="282982"/>
+            </a:xfrm>
+            <a:prstGeom prst="trapezoid">
+              <a:avLst>
+                <a:gd name="adj" fmla="val 60792"/>
+              </a:avLst>
+            </a:prstGeom>
+            <a:noFill/>
+            <a:ln w="25400" cap="flat" cmpd="sng">
+              <a:solidFill>
+                <a:schemeClr val="dk2"/>
+              </a:solidFill>
+              <a:prstDash val="solid"/>
+              <a:round/>
+              <a:headEnd type="none" w="sm" len="sm"/>
+              <a:tailEnd type="none" w="sm" len="sm"/>
+            </a:ln>
+          </p:spPr>
+          <p:txBody>
+            <a:bodyPr spcFirstLastPara="1" wrap="square" lIns="91425" tIns="91425" rIns="91425" bIns="91425" anchor="ctr" anchorCtr="0">
+              <a:noAutofit/>
+            </a:bodyPr>
+            <a:lstStyle/>
+            <a:p>
+              <a:pPr marL="0" lvl="0" indent="0" algn="l" rtl="0">
+                <a:spcBef>
+                  <a:spcPts val="0"/>
+                </a:spcBef>
+                <a:spcAft>
+                  <a:spcPts val="0"/>
+                </a:spcAft>
+                <a:buNone/>
+              </a:pPr>
+              <a:endParaRPr/>
+            </a:p>
+          </p:txBody>
+        </p:sp>
+        <p:sp>
+          <p:nvSpPr>
+            <p:cNvPr id="61" name="Google Shape;61;p3"/>
+            <p:cNvSpPr txBox="1"/>
+            <p:nvPr/>
+          </p:nvSpPr>
+          <p:spPr>
+            <a:xfrm>
+              <a:off x="516090" y="848948"/>
+              <a:ext cx="344060" cy="282982"/>
+            </a:xfrm>
+            <a:prstGeom prst="rect">
+              <a:avLst/>
+            </a:prstGeom>
+            <a:noFill/>
+            <a:ln>
+              <a:noFill/>
+            </a:ln>
+          </p:spPr>
+          <p:txBody>
+            <a:bodyPr spcFirstLastPara="1" wrap="square" lIns="10150" tIns="10150" rIns="10150" bIns="10150" anchor="ctr" anchorCtr="0">
+              <a:noAutofit/>
+            </a:bodyPr>
+            <a:lstStyle/>
+            <a:p>
+              <a:pPr marL="0" marR="0" lvl="0" indent="0" algn="ctr" rtl="0">
+                <a:lnSpc>
+                  <a:spcPct val="90000"/>
+                </a:lnSpc>
+                <a:spcBef>
+                  <a:spcPts val="0"/>
+                </a:spcBef>
+                <a:spcAft>
+                  <a:spcPts val="0"/>
+                </a:spcAft>
+                <a:buClr>
+                  <a:srgbClr val="262626"/>
+                </a:buClr>
+                <a:buSzPts val="800"/>
+                <a:buFont typeface="Arial"/>
+                <a:buNone/>
+              </a:pPr>
+              <a:r>
+                <a:rPr lang="ja-JP" sz="800" b="1">
+                  <a:solidFill>
+                    <a:srgbClr val="262626"/>
+                  </a:solidFill>
+                  <a:latin typeface="Arial"/>
+                  <a:ea typeface="Arial"/>
+                  <a:cs typeface="Arial"/>
+                  <a:sym typeface="Arial"/>
+                </a:rPr>
+                <a:t>伸長</a:t>
+              </a:r>
+              <a:endParaRPr/>
+            </a:p>
+          </p:txBody>
+        </p:sp>
+      </p:grpSp>
+      <p:pic>
+        <p:nvPicPr>
+          <p:cNvPr id="62" name="Google Shape;62;p3" descr="LINE公式アカウントのロゴの使用方法とは？種類やダウンロード方法、利用時の注意点を紹介 | Mico（ミコ）"/>
+          <p:cNvPicPr preferRelativeResize="0"/>
+          <p:nvPr/>
+        </p:nvPicPr>
+        <p:blipFill rotWithShape="1">
+          <a:blip r:embed="rId2">
+            <a:alphaModFix/>
+          </a:blip>
+          <a:srcRect/>
+          <a:stretch/>
+        </p:blipFill>
+        <p:spPr>
+          <a:xfrm>
+            <a:off x="351381" y="1234746"/>
+            <a:ext cx="656177" cy="655521"/>
+          </a:xfrm>
+          <a:prstGeom prst="rect">
+            <a:avLst/>
+          </a:prstGeom>
+          <a:noFill/>
+          <a:ln>
+            <a:noFill/>
+          </a:ln>
+        </p:spPr>
+      </p:pic>
+      <p:sp>
+        <p:nvSpPr>
+          <p:cNvPr id="68" name="Rounded Rectangle 67"/>
+          <p:cNvSpPr/>
+          <p:nvPr/>
+        </p:nvSpPr>
+        <p:spPr>
+          <a:xfrm>
+            <a:off x="548640" y="3154680"/>
+            <a:ext cx="4315968" cy="1417320"/>
+          </a:xfrm>
+          <a:prstGeom prst="roundRect">
+            <a:avLst>
+              <a:gd name="adj" fmla="val 6000"/>
+            </a:avLst>
+          </a:prstGeom>
+          <a:solidFill>
+            <a:srgbClr val="EAF0FA"/>
+          </a:solidFill>
+          <a:ln w="12700">
+            <a:solidFill>
+              <a:srgbClr val="3467B2"/>
+            </a:solidFill>
+          </a:ln>
+          <a:effectLst/>
+        </p:spPr>
+        <p:style>
+          <a:lnRef idx="1">
+            <a:schemeClr val="accent1"/>
+          </a:lnRef>
+          <a:fillRef idx="3">
+            <a:schemeClr val="accent1"/>
+          </a:fillRef>
+          <a:effectRef idx="2">
+            <a:schemeClr val="accent1"/>
+          </a:effectRef>
+          <a:fontRef idx="minor">
+            <a:schemeClr val="lt1"/>
+          </a:fontRef>
+        </p:style>
+        <p:txBody>
+          <a:bodyPr wrap="square" lIns="228600" rIns="182880" rtlCol="0" anchor="ctr"/>
+          <a:lstStyle/>
+          <a:p>
+            <a:pPr algn="l"/>
+            <a:r>
+              <a:rPr sz="1900" b="1">
+                <a:solidFill>
+                  <a:srgbClr val="15133D"/>
+                </a:solidFill>
+                <a:latin typeface="メイリオ"/>
+              </a:rPr>
+              <a:t>遷移の方式</a:t>
+            </a:r>
+          </a:p>
+          <a:p>
+            <a:pPr algn="l">
+              <a:lnSpc>
+                <a:spcPct val="115000"/>
+              </a:lnSpc>
+              <a:spcBef>
+                <a:spcPts val="600"/>
+              </a:spcBef>
+            </a:pPr>
+            <a:r>
+              <a:rPr sz="1300">
+                <a:solidFill>
+                  <a:srgbClr val="333333"/>
+                </a:solidFill>
+                <a:latin typeface="メイリオ"/>
+              </a:rPr>
+              <a:t>iPhone／Androidの標準の仕組み（Universal links／App Links）でアプリを開くこと。</a:t>
+            </a:r>
+          </a:p>
+        </p:txBody>
+      </p:sp>
+      <p:sp>
+        <p:nvSpPr>
+          <p:cNvPr id="69" name="Rounded Rectangle 68"/>
+          <p:cNvSpPr/>
+          <p:nvPr/>
+        </p:nvSpPr>
+        <p:spPr>
+          <a:xfrm>
+            <a:off x="5047488" y="3154680"/>
+            <a:ext cx="4315968" cy="1417320"/>
+          </a:xfrm>
+          <a:prstGeom prst="roundRect">
+            <a:avLst>
+              <a:gd name="adj" fmla="val 6000"/>
+            </a:avLst>
+          </a:prstGeom>
+          <a:solidFill>
+            <a:srgbClr val="EAF0FA"/>
+          </a:solidFill>
+          <a:ln w="12700">
+            <a:solidFill>
+              <a:srgbClr val="3467B2"/>
+            </a:solidFill>
+          </a:ln>
+          <a:effectLst/>
+        </p:spPr>
+        <p:style>
+          <a:lnRef idx="1">
+            <a:schemeClr val="accent1"/>
+          </a:lnRef>
+          <a:fillRef idx="3">
+            <a:schemeClr val="accent1"/>
+          </a:fillRef>
+          <a:effectRef idx="2">
+            <a:schemeClr val="accent1"/>
+          </a:effectRef>
+          <a:fontRef idx="minor">
+            <a:schemeClr val="lt1"/>
+          </a:fontRef>
+        </p:style>
+        <p:txBody>
+          <a:bodyPr wrap="square" lIns="228600" rIns="182880" rtlCol="0" anchor="ctr"/>
+          <a:lstStyle/>
+          <a:p>
+            <a:pPr algn="l"/>
+            <a:r>
+              <a:rPr sz="1900" b="1">
+                <a:solidFill>
+                  <a:srgbClr val="15133D"/>
+                </a:solidFill>
+                <a:latin typeface="メイリオ"/>
+              </a:rPr>
+              <a:t>ドメインの一致</a:t>
+            </a:r>
+          </a:p>
+          <a:p>
+            <a:pPr algn="l">
+              <a:lnSpc>
+                <a:spcPct val="115000"/>
+              </a:lnSpc>
+              <a:spcBef>
+                <a:spcPts val="600"/>
+              </a:spcBef>
+            </a:pPr>
+            <a:r>
+              <a:rPr sz="1300">
+                <a:solidFill>
+                  <a:srgbClr val="333333"/>
+                </a:solidFill>
+                <a:latin typeface="メイリオ"/>
+              </a:rPr>
+              <a:t>送信元の公式ドメインと、遷移先URLのドメインが同じであること。</a:t>
+            </a:r>
+          </a:p>
+        </p:txBody>
+      </p:sp>
+      <p:sp>
+        <p:nvSpPr>
+          <p:cNvPr id="71" name="Rounded Rectangle 67_g1"/>
+          <p:cNvSpPr/>
+          <p:nvPr/>
+        </p:nvSpPr>
+        <p:spPr>
+          <a:xfrm>
+            <a:off x="5047488" y="4754880"/>
+            <a:ext cx="4315968" cy="1417320"/>
+          </a:xfrm>
+          <a:prstGeom prst="roundRect">
+            <a:avLst>
+              <a:gd name="adj" fmla="val 6000"/>
+            </a:avLst>
+          </a:prstGeom>
+          <a:solidFill>
+            <a:srgbClr val="EAF0FA"/>
+          </a:solidFill>
+          <a:ln w="12700">
+            <a:solidFill>
+              <a:srgbClr val="3467B2"/>
+            </a:solidFill>
+          </a:ln>
+          <a:effectLst/>
+        </p:spPr>
+        <p:style>
+          <a:lnRef idx="1">
+            <a:schemeClr val="accent1"/>
+          </a:lnRef>
+          <a:fillRef idx="3">
+            <a:schemeClr val="accent1"/>
+          </a:fillRef>
+          <a:effectRef idx="2">
+            <a:schemeClr val="accent1"/>
+          </a:effectRef>
+          <a:fontRef idx="minor">
+            <a:schemeClr val="lt1"/>
+          </a:fontRef>
+        </p:style>
+        <p:txBody>
+          <a:bodyPr wrap="square" lIns="228600" rIns="182880" rtlCol="0" anchor="ctr"/>
+          <a:lstStyle/>
+          <a:p>
+            <a:pPr algn="l"/>
+            <a:r>
+              <a:rPr sz="1900" b="1">
+                <a:solidFill>
+                  <a:srgbClr val="15133D"/>
+                </a:solidFill>
+                <a:latin typeface="メイリオ"/>
+              </a:rPr>
+              <a:t>表示内容の一致</a:t>
+            </a:r>
+          </a:p>
+          <a:p>
+            <a:pPr algn="l">
+              <a:lnSpc>
+                <a:spcPct val="115000"/>
+              </a:lnSpc>
+              <a:spcBef>
+                <a:spcPts val="600"/>
+              </a:spcBef>
+            </a:pPr>
+            <a:r>
+              <a:rPr sz="1300">
+                <a:solidFill>
+                  <a:srgbClr val="333333"/>
+                </a:solidFill>
+                <a:latin typeface="メイリオ"/>
+              </a:rPr>
+              <a:t>アプリとWebで同じ内容を表示すること。アプリはマイページ・Webはトップページ、のような構成は不可。</a:t>
+            </a:r>
+          </a:p>
+        </p:txBody>
+      </p:sp>
+      <p:sp>
+        <p:nvSpPr>
+          <p:cNvPr id="70" name="Rounded Rectangle 67_g0"/>
+          <p:cNvSpPr/>
+          <p:nvPr/>
+        </p:nvSpPr>
+        <p:spPr>
+          <a:xfrm>
+            <a:off x="548640" y="4754880"/>
+            <a:ext cx="4315968" cy="1417320"/>
+          </a:xfrm>
+          <a:prstGeom prst="roundRect">
+            <a:avLst>
+              <a:gd name="adj" fmla="val 6000"/>
+            </a:avLst>
+          </a:prstGeom>
+          <a:solidFill>
+            <a:srgbClr val="EAF0FA"/>
+          </a:solidFill>
+          <a:ln w="12700">
+            <a:solidFill>
+              <a:srgbClr val="3467B2"/>
+            </a:solidFill>
+          </a:ln>
+          <a:effectLst/>
+        </p:spPr>
+        <p:style>
+          <a:lnRef idx="1">
+            <a:schemeClr val="accent1"/>
+          </a:lnRef>
+          <a:fillRef idx="3">
+            <a:schemeClr val="accent1"/>
+          </a:fillRef>
+          <a:effectRef idx="2">
+            <a:schemeClr val="accent1"/>
+          </a:effectRef>
+          <a:fontRef idx="minor">
+            <a:schemeClr val="lt1"/>
+          </a:fontRef>
+        </p:style>
+        <p:txBody>
+          <a:bodyPr wrap="square" lIns="228600" rIns="182880" rtlCol="0" anchor="ctr"/>
+          <a:lstStyle/>
+          <a:p>
+            <a:pPr algn="l"/>
+            <a:r>
+              <a:rPr sz="1900" b="1">
+                <a:solidFill>
+                  <a:srgbClr val="15133D"/>
+                </a:solidFill>
+                <a:latin typeface="メイリオ"/>
+              </a:rPr>
+              <a:t>アプリ未インストール時</a:t>
+            </a:r>
+          </a:p>
+          <a:p>
+            <a:pPr algn="l">
+              <a:lnSpc>
+                <a:spcPct val="115000"/>
+              </a:lnSpc>
+              <a:spcBef>
+                <a:spcPts val="600"/>
+              </a:spcBef>
+            </a:pPr>
+            <a:r>
+              <a:rPr sz="1300">
+                <a:solidFill>
+                  <a:srgbClr val="333333"/>
+                </a:solidFill>
+                <a:latin typeface="メイリオ"/>
+              </a:rPr>
+              <a:t>通知内容に関連するWebページを表示すること。App Store／Google Playへの自動遷移は不可。</a:t>
+            </a:r>
+          </a:p>
+        </p:txBody>
+      </p:sp>
+    </p:spTree>
+  </p:cSld>
+  <p:clrMapOvr>
+    <a:masterClrMapping/>
+  </p:clrMapOvr>
+</p:sld>
+</file>
+
 <file path=ppt/slides/slide2.xml><?xml version="1.0" encoding="utf-8"?>
 <p:sld xmlns:a="http://schemas.openxmlformats.org/drawingml/2006/main" xmlns:r="http://schemas.openxmlformats.org/officeDocument/2006/relationships" xmlns:p="http://schemas.openxmlformats.org/presentationml/2006/main">
   <p:cSld>
@@ -3311,7 +5016,7 @@
                 <a:cs typeface="Meiryo"/>
                 <a:sym typeface="Meiryo"/>
               </a:rPr>
-              <a:t>P.3</a:t>
+              <a:t>P.3-4</a:t>
             </a:r>
             <a:endParaRPr/>
           </a:p>
@@ -3338,7 +5043,7 @@
                 <a:cs typeface="Meiryo"/>
                 <a:sym typeface="Meiryo"/>
               </a:rPr>
-              <a:t>P.4</a:t>
+              <a:t>P.5</a:t>
             </a:r>
             <a:endParaRPr/>
           </a:p>
@@ -3365,7 +5070,7 @@
                 <a:cs typeface="Meiryo"/>
                 <a:sym typeface="Meiryo"/>
               </a:rPr>
-              <a:t>P.5</a:t>
+              <a:t>P.6</a:t>
             </a:r>
             <a:endParaRPr sz="1500" b="1" i="0" u="none" strike="noStrike" cap="none">
               <a:solidFill>
@@ -3400,7 +5105,7 @@
                 <a:cs typeface="Meiryo"/>
                 <a:sym typeface="Meiryo"/>
               </a:rPr>
-              <a:t>P.6</a:t>
+              <a:t>P.7</a:t>
             </a:r>
             <a:endParaRPr sz="1500" b="1" i="0" u="none" strike="noStrike" cap="none">
               <a:solidFill>
@@ -3435,7 +5140,7 @@
                 <a:cs typeface="Meiryo"/>
                 <a:sym typeface="Meiryo"/>
               </a:rPr>
-              <a:t>P.7</a:t>
+              <a:t>P.8</a:t>
             </a:r>
             <a:endParaRPr sz="1500" b="1" i="0" u="none" strike="noStrike" cap="none">
               <a:solidFill>
@@ -3470,7 +5175,7 @@
                 <a:cs typeface="Meiryo"/>
                 <a:sym typeface="Meiryo"/>
               </a:rPr>
-              <a:t>P.8</a:t>
+              <a:t>P.9</a:t>
             </a:r>
             <a:endParaRPr sz="1500" b="1" i="0" u="none" strike="noStrike" cap="none">
               <a:solidFill>
@@ -3505,7 +5210,7 @@
                 <a:cs typeface="Meiryo"/>
                 <a:sym typeface="Meiryo"/>
               </a:rPr>
-              <a:t>P.9</a:t>
+              <a:t>P.10</a:t>
             </a:r>
             <a:endParaRPr sz="1500" b="1" i="0" u="none" strike="noStrike" cap="none">
               <a:solidFill>
@@ -5255,8 +6960,8 @@
         </p:nvSpPr>
         <p:spPr>
           <a:xfrm>
-            <a:off x="548640" y="3108960"/>
-            <a:ext cx="4315968" cy="1280160"/>
+            <a:off x="548640" y="3154680"/>
+            <a:ext cx="8814816" cy="1417320"/>
           </a:xfrm>
           <a:prstGeom prst="roundRect">
             <a:avLst>
@@ -5293,13 +6998,13 @@
           <a:p>
             <a:pPr algn="l"/>
             <a:r>
-              <a:rPr sz="1800" b="1">
+              <a:rPr sz="2000" b="1">
                 <a:solidFill>
                   <a:srgbClr val="15133D"/>
                 </a:solidFill>
                 <a:latin typeface="メイリオ"/>
               </a:rPr>
-              <a:t>できるようになったこと</a:t>
+              <a:t>変更点</a:t>
             </a:r>
           </a:p>
           <a:p>
@@ -5312,13 +7017,13 @@
               </a:spcBef>
             </a:pPr>
             <a:r>
-              <a:rPr sz="1200">
+              <a:rPr sz="1400">
                 <a:solidFill>
                   <a:srgbClr val="333333"/>
                 </a:solidFill>
                 <a:latin typeface="メイリオ"/>
               </a:rPr>
-              <a:t>通知のボタンからアプリを直接開ける。アプリが入っていない場合は、通知内容に関連するWebページへ遷移。シームレスな導線でユーザー体験が向上する。</a:t>
+              <a:t>LINE通知メッセージのボタンから、自社のネイティブアプリを直接開けるようになった。アプリが入っていない場合は、通知内容に関連するWebページへ遷移する。シームレスな導線で、ユーザー体験が向上する。</a:t>
             </a:r>
           </a:p>
         </p:txBody>
@@ -5331,8 +7036,8 @@
         </p:nvSpPr>
         <p:spPr>
           <a:xfrm>
-            <a:off x="5047488" y="3108960"/>
-            <a:ext cx="4315968" cy="1280160"/>
+            <a:off x="548640" y="4754880"/>
+            <a:ext cx="8814816" cy="1417320"/>
           </a:xfrm>
           <a:prstGeom prst="roundRect">
             <a:avLst>
@@ -5369,13 +7074,13 @@
           <a:p>
             <a:pPr algn="l"/>
             <a:r>
-              <a:rPr sz="1800" b="1">
+              <a:rPr sz="2000" b="1">
                 <a:solidFill>
                   <a:srgbClr val="15133D"/>
                 </a:solidFill>
                 <a:latin typeface="メイリオ"/>
               </a:rPr>
-              <a:t>お金と手続き</a:t>
+              <a:t>費用と必要な手続き</a:t>
             </a:r>
           </a:p>
           <a:p>
@@ -5388,165 +7093,13 @@
               </a:spcBef>
             </a:pPr>
             <a:r>
-              <a:rPr sz="1200">
+              <a:rPr sz="1400">
                 <a:solidFill>
                   <a:srgbClr val="333333"/>
                 </a:solidFill>
                 <a:latin typeface="メイリオ"/>
               </a:rPr>
-              <a:t>審査費は10万円（税抜）／1UX。承認時のみ発生し、否認の場合はかからない。申し込みはLBPMで、2026年9月9日から受付中。</a:t>
-            </a:r>
-          </a:p>
-        </p:txBody>
-      </p:sp>
-      <p:sp>
-        <p:nvSpPr>
-          <p:cNvPr id="70" name="Rounded Rectangle 67_c"/>
-          <p:cNvSpPr/>
-          <p:nvPr/>
-        </p:nvSpPr>
-        <p:spPr>
-          <a:xfrm>
-            <a:off x="548640" y="4572000"/>
-            <a:ext cx="8814816" cy="1600200"/>
-          </a:xfrm>
-          <a:prstGeom prst="roundRect">
-            <a:avLst>
-              <a:gd name="adj" fmla="val 6000"/>
-            </a:avLst>
-          </a:prstGeom>
-          <a:solidFill>
-            <a:srgbClr val="EAF0FA"/>
-          </a:solidFill>
-          <a:ln w="12700">
-            <a:solidFill>
-              <a:srgbClr val="3467B2"/>
-            </a:solidFill>
-          </a:ln>
-          <a:effectLst/>
-        </p:spPr>
-        <p:style>
-          <a:lnRef idx="1">
-            <a:schemeClr val="accent1"/>
-          </a:lnRef>
-          <a:fillRef idx="3">
-            <a:schemeClr val="accent1"/>
-          </a:fillRef>
-          <a:effectRef idx="2">
-            <a:schemeClr val="accent1"/>
-          </a:effectRef>
-          <a:fontRef idx="minor">
-            <a:schemeClr val="lt1"/>
-          </a:fontRef>
-        </p:style>
-        <p:txBody>
-          <a:bodyPr wrap="square" lIns="228600" rIns="182880" rtlCol="0" anchor="ctr"/>
-          <a:lstStyle/>
-          <a:p>
-            <a:pPr algn="l"/>
-            <a:r>
-              <a:rPr sz="1800" b="1">
-                <a:solidFill>
-                  <a:srgbClr val="15133D"/>
-                </a:solidFill>
-                <a:latin typeface="メイリオ"/>
-              </a:rPr>
-              <a:t>条件（審査で確認される主な項目）</a:t>
-            </a:r>
-          </a:p>
-          <a:p>
-            <a:pPr algn="l">
-              <a:lnSpc>
-                <a:spcPct val="115000"/>
-              </a:lnSpc>
-              <a:spcBef>
-                <a:spcPts val="200"/>
-              </a:spcBef>
-            </a:pPr>
-            <a:r>
-              <a:rPr sz="1200">
-                <a:solidFill>
-                  <a:srgbClr val="333333"/>
-                </a:solidFill>
-                <a:latin typeface="メイリオ"/>
-              </a:rPr>
-              <a:t>・iPhone／Androidの標準の仕組み（Universal links／App Links）でアプリを開く</a:t>
-            </a:r>
-          </a:p>
-          <a:p>
-            <a:pPr algn="l">
-              <a:lnSpc>
-                <a:spcPct val="115000"/>
-              </a:lnSpc>
-              <a:spcBef>
-                <a:spcPts val="200"/>
-              </a:spcBef>
-            </a:pPr>
-            <a:r>
-              <a:rPr sz="1200">
-                <a:solidFill>
-                  <a:srgbClr val="333333"/>
-                </a:solidFill>
-                <a:latin typeface="メイリオ"/>
-              </a:rPr>
-              <a:t>・送信元の公式ドメインと、遷移先URLのドメインが同じ</a:t>
-            </a:r>
-          </a:p>
-          <a:p>
-            <a:pPr algn="l">
-              <a:lnSpc>
-                <a:spcPct val="115000"/>
-              </a:lnSpc>
-              <a:spcBef>
-                <a:spcPts val="200"/>
-              </a:spcBef>
-            </a:pPr>
-            <a:r>
-              <a:rPr sz="1200">
-                <a:solidFill>
-                  <a:srgbClr val="333333"/>
-                </a:solidFill>
-                <a:latin typeface="メイリオ"/>
-              </a:rPr>
-              <a:t>・アプリ未インストール時は、通知内容に関連するWebページを表示（ストアへの自動遷移は不可）</a:t>
-            </a:r>
-          </a:p>
-          <a:p>
-            <a:pPr algn="l">
-              <a:lnSpc>
-                <a:spcPct val="115000"/>
-              </a:lnSpc>
-              <a:spcBef>
-                <a:spcPts val="200"/>
-              </a:spcBef>
-            </a:pPr>
-            <a:r>
-              <a:rPr sz="1200">
-                <a:solidFill>
-                  <a:srgbClr val="333333"/>
-                </a:solidFill>
-                <a:latin typeface="メイリオ"/>
-              </a:rPr>
-              <a:t>・アプリとWebで表示する内容が同じ</a:t>
-            </a:r>
-          </a:p>
-          <a:p>
-            <a:pPr algn="l">
-              <a:lnSpc>
-                <a:spcPct val="115000"/>
-              </a:lnSpc>
-              <a:spcBef>
-                <a:spcPts val="500"/>
-              </a:spcBef>
-            </a:pPr>
-            <a:r>
-              <a:rPr sz="1000">
-                <a:solidFill>
-                  <a:srgbClr val="333333"/>
-                </a:solidFill>
-                <a:latin typeface="メイリオ"/>
-              </a:rPr>
-              <a:t>対象プラン：エッセンシャル／パフォーマンス／アンリミテッド</a:t>
+              <a:t>審査費は10万円（税抜）／1UX。承認時のみ発生し、否認の場合はかからない。申し込みはLBPMのUX追加申請から行い、2026年9月9日（水）から受付中。</a:t>
             </a:r>
           </a:p>
         </p:txBody>

--- a/LINEOA媒体最新情報_2026年10月トレンドレポート.pptx
+++ b/LINEOA媒体最新情報_2026年10月トレンドレポート.pptx
@@ -3249,7 +3249,7 @@
 </file>
 
 <file path=ppt/slides/slide10.xml><?xml version="1.0" encoding="utf-8"?>
-<p:sld xmlns:a="http://schemas.openxmlformats.org/drawingml/2006/main" xmlns:p="http://schemas.openxmlformats.org/presentationml/2006/main" xmlns:r="http://schemas.openxmlformats.org/officeDocument/2006/relationships">
+<p:sld xmlns:a="http://schemas.openxmlformats.org/drawingml/2006/main" xmlns:r="http://schemas.openxmlformats.org/officeDocument/2006/relationships" xmlns:p="http://schemas.openxmlformats.org/presentationml/2006/main">
   <p:cSld>
     <p:spTree>
       <p:nvGrpSpPr>
@@ -3257,7 +3257,14 @@
         <p:cNvGrpSpPr/>
         <p:nvPr/>
       </p:nvGrpSpPr>
-      <p:grpSpPr/>
+      <p:grpSpPr>
+        <a:xfrm>
+          <a:off x="0" y="0"/>
+          <a:ext cx="0" cy="0"/>
+          <a:chOff x="0" y="0"/>
+          <a:chExt cx="0" cy="0"/>
+        </a:xfrm>
+      </p:grpSpPr>
       <p:sp>
         <p:nvSpPr>
           <p:cNvPr id="40" name="Google Shape;40;p3"/>
@@ -3397,13 +3404,13 @@
             <a:avLst/>
           </a:prstGeom>
           <a:solidFill>
-            <a:schemeClr val="bg1"/>
+            <a:schemeClr val="tx2"/>
           </a:solidFill>
           <a:ln w="9525" cap="flat" cmpd="sng">
             <a:solidFill>
               <a:srgbClr val="4F81BD"/>
             </a:solidFill>
-            <a:prstDash val="sysDash"/>
+            <a:prstDash val="solid"/>
             <a:round/>
             <a:headEnd type="none" w="sm" len="sm"/>
             <a:tailEnd type="none" w="sm" len="sm"/>
@@ -3522,30 +3529,7 @@
                 <a:cs typeface="Meiryo"/>
                 <a:sym typeface="Meiryo"/>
               </a:rPr>
-              <a:t>EC・通販・予約サービス</a:t>
-            </a:r>
-            <a:br>
-              <a:rPr lang="ja-JP" sz="1300" b="0" i="0" u="none" strike="noStrike" cap="none">
-                <a:solidFill>
-                  <a:schemeClr val="dk1"/>
-                </a:solidFill>
-                <a:latin typeface="メイリオ"/>
-                <a:ea typeface="Meiryo"/>
-                <a:cs typeface="Meiryo"/>
-                <a:sym typeface="Meiryo"/>
-              </a:rPr>
-            </a:br>
-            <a:r>
-              <a:rPr lang="ja-JP" sz="1300" b="0" i="0" u="none" strike="noStrike" cap="none">
-                <a:solidFill>
-                  <a:schemeClr val="dk1"/>
-                </a:solidFill>
-                <a:latin typeface="メイリオ"/>
-                <a:ea typeface="Meiryo"/>
-                <a:cs typeface="Meiryo"/>
-                <a:sym typeface="Meiryo"/>
-              </a:rPr>
-              <a:t>（自社アプリあり）</a:t>
+              <a:t>小売・アパレル・教育・サービス業</a:t>
             </a:r>
             <a:endParaRPr/>
           </a:p>
@@ -3713,7 +3697,7 @@
                 <a:cs typeface="Meiryo"/>
                 <a:sym typeface="Meiryo"/>
               </a:rPr>
-              <a:t>【LINE通知メッセージ】ネイティブアプリ遷移の条件</a:t>
+              <a:t>【CRMオプション】導入事例の追加</a:t>
             </a:r>
             <a:endParaRPr sz="1600" b="1">
               <a:solidFill>
@@ -3805,13 +3789,13 @@
             <a:avLst/>
           </a:prstGeom>
           <a:solidFill>
-            <a:schemeClr val="tx2"/>
+            <a:schemeClr val="bg1"/>
           </a:solidFill>
           <a:ln w="9525" cap="flat" cmpd="sng">
             <a:solidFill>
               <a:srgbClr val="4F81BD"/>
             </a:solidFill>
-            <a:prstDash val="solid"/>
+            <a:prstDash val="sysDash"/>
             <a:round/>
             <a:headEnd type="none" w="sm" len="sm"/>
             <a:tailEnd type="none" w="sm" len="sm"/>
@@ -4056,7 +4040,7 @@
                 <a:cs typeface="Meiryo"/>
                 <a:sym typeface="Meiryo"/>
               </a:rPr>
-              <a:t>ネイティブアプリへ遷移させるには、LINEヤフーの審査で次の4つを満たす必要がある。</a:t>
+              <a:t>CRMオプションの導入事例（タオル美術館様）が、媒体資料Ver2.0に追加された。</a:t>
             </a:r>
             <a:endParaRPr sz="1200" b="1">
               <a:solidFill>
@@ -4088,7 +4072,7 @@
                 <a:cs typeface="Meiryo"/>
                 <a:sym typeface="Meiryo"/>
               </a:rPr>
-              <a:t>条件はLINE通知メッセージ（フレキシブル／テンプレート）のUXガイドラインに記載。</a:t>
+              <a:t>誕生月を聞くフォームで回答数が約2.0倍、</a:t>
             </a:r>
             <a:endParaRPr/>
           </a:p>
@@ -4112,7 +4096,7 @@
                 <a:cs typeface="Meiryo"/>
                 <a:sym typeface="Meiryo"/>
               </a:rPr>
-              <a:t>対象プラン：エッセンシャル／パフォーマンス／アンリミテッド</a:t>
+              <a:t>好きなキャラクターに合わせた出し分け配信でクリック率が約2.8倍に。</a:t>
             </a:r>
             <a:endParaRPr sz="1400" b="1">
               <a:solidFill>
@@ -4642,14 +4626,14 @@
       </p:pic>
       <p:sp>
         <p:nvSpPr>
-          <p:cNvPr id="68" name="Rounded Rectangle 67"/>
+          <p:cNvPr id="63" name="Rounded Rectangle 62"/>
           <p:cNvSpPr/>
           <p:nvPr/>
         </p:nvSpPr>
         <p:spPr>
           <a:xfrm>
-            <a:off x="548640" y="3154680"/>
-            <a:ext cx="4315968" cy="1417320"/>
+            <a:off x="544108" y="3068960"/>
+            <a:ext cx="4322443" cy="1357915"/>
           </a:xfrm>
           <a:prstGeom prst="roundRect">
             <a:avLst>
@@ -4692,7 +4676,7 @@
                 </a:solidFill>
                 <a:latin typeface="メイリオ"/>
               </a:rPr>
-              <a:t>遷移の方式</a:t>
+              <a:t>① フォーム回答数 約2.0倍</a:t>
             </a:r>
           </a:p>
           <a:p>
@@ -4711,21 +4695,21 @@
                 </a:solidFill>
                 <a:latin typeface="メイリオ"/>
               </a:rPr>
-              <a:t>iPhone／Androidの標準の仕組み（Universal links／App Links）でアプリを開くこと。</a:t>
+              <a:t>リサーチ機能から、誕生月を聞くフォーム（誕生月クーポン付き）に変更。店頭チラシ・リッチメニュー・あいさつメッセージで回答を促した。</a:t>
             </a:r>
           </a:p>
         </p:txBody>
       </p:sp>
       <p:sp>
         <p:nvSpPr>
-          <p:cNvPr id="69" name="Rounded Rectangle 68"/>
+          <p:cNvPr id="65" name="Rounded Rectangle 62_add0"/>
           <p:cNvSpPr/>
           <p:nvPr/>
         </p:nvSpPr>
         <p:spPr>
           <a:xfrm>
-            <a:off x="5047488" y="3154680"/>
-            <a:ext cx="4315968" cy="1417320"/>
+            <a:off x="544108" y="4609755"/>
+            <a:ext cx="4322443" cy="1357915"/>
           </a:xfrm>
           <a:prstGeom prst="roundRect">
             <a:avLst>
@@ -4768,7 +4752,7 @@
                 </a:solidFill>
                 <a:latin typeface="メイリオ"/>
               </a:rPr>
-              <a:t>ドメインの一致</a:t>
+              <a:t>月額5,000円（税別）</a:t>
             </a:r>
           </a:p>
           <a:p>
@@ -4787,21 +4771,21 @@
                 </a:solidFill>
                 <a:latin typeface="メイリオ"/>
               </a:rPr>
-              <a:t>送信元の公式ドメインと、遷移先URLのドメインが同じであること。</a:t>
+              <a:t>チャットProオプションを含む。別途LINE公式アカウントのプラン料金がかかる。初期サポート（2万円・1回）も用意。</a:t>
             </a:r>
           </a:p>
         </p:txBody>
       </p:sp>
       <p:sp>
         <p:nvSpPr>
-          <p:cNvPr id="71" name="Rounded Rectangle 67_g1"/>
+          <p:cNvPr id="64" name="Rounded Rectangle 63"/>
           <p:cNvSpPr/>
           <p:nvPr/>
         </p:nvSpPr>
         <p:spPr>
           <a:xfrm>
-            <a:off x="5047488" y="4754880"/>
-            <a:ext cx="4315968" cy="1417320"/>
+            <a:off x="5039448" y="3068960"/>
+            <a:ext cx="4322443" cy="1357915"/>
           </a:xfrm>
           <a:prstGeom prst="roundRect">
             <a:avLst>
@@ -4844,7 +4828,7 @@
                 </a:solidFill>
                 <a:latin typeface="メイリオ"/>
               </a:rPr>
-              <a:t>表示内容の一致</a:t>
+              <a:t>② 配信のクリック率 約2.8倍</a:t>
             </a:r>
           </a:p>
           <a:p>
@@ -4863,21 +4847,21 @@
                 </a:solidFill>
                 <a:latin typeface="メイリオ"/>
               </a:rPr>
-              <a:t>アプリとWebで同じ内容を表示すること。アプリはマイページ・Webはトップページ、のような構成は不可。</a:t>
+              <a:t>好きなキャラクターをフォームで聞いてタグを付け、コラボ商品の配信を出し分け。従来の一斉配信と比べてクリック率が約2.8倍。</a:t>
             </a:r>
           </a:p>
         </p:txBody>
       </p:sp>
       <p:sp>
         <p:nvSpPr>
-          <p:cNvPr id="70" name="Rounded Rectangle 67_g0"/>
+          <p:cNvPr id="66" name="Rounded Rectangle 63_add1"/>
           <p:cNvSpPr/>
           <p:nvPr/>
         </p:nvSpPr>
         <p:spPr>
           <a:xfrm>
-            <a:off x="548640" y="4754880"/>
-            <a:ext cx="4315968" cy="1417320"/>
+            <a:off x="5039448" y="4609755"/>
+            <a:ext cx="4322443" cy="1357915"/>
           </a:xfrm>
           <a:prstGeom prst="roundRect">
             <a:avLst>
@@ -4920,7 +4904,7 @@
                 </a:solidFill>
                 <a:latin typeface="メイリオ"/>
               </a:rPr>
-              <a:t>アプリ未インストール時</a:t>
+              <a:t>利用条件</a:t>
             </a:r>
           </a:p>
           <a:p>
@@ -4939,7 +4923,7 @@
                 </a:solidFill>
                 <a:latin typeface="メイリオ"/>
               </a:rPr>
-              <a:t>通知内容に関連するWebページを表示すること。App Store／Google Playへの自動遷移は不可。</a:t>
+              <a:t>認証済みアカウントとビジネスマネージャーの接続、友だち数10万人未満が条件。レストラン・Beauty・チャットProとは同時に契約できない。</a:t>
             </a:r>
           </a:p>
         </p:txBody>
@@ -7113,6 +7097,1575 @@
 </file>
 
 <file path=ppt/slides/slide4.xml><?xml version="1.0" encoding="utf-8"?>
+<p:sld xmlns:a="http://schemas.openxmlformats.org/drawingml/2006/main" xmlns:p="http://schemas.openxmlformats.org/presentationml/2006/main" xmlns:r="http://schemas.openxmlformats.org/officeDocument/2006/relationships">
+  <p:cSld>
+    <p:spTree>
+      <p:nvGrpSpPr>
+        <p:cNvPr id="1" name=""/>
+        <p:cNvGrpSpPr/>
+        <p:nvPr/>
+      </p:nvGrpSpPr>
+      <p:grpSpPr/>
+      <p:sp>
+        <p:nvSpPr>
+          <p:cNvPr id="40" name="Google Shape;40;p3"/>
+          <p:cNvSpPr/>
+          <p:nvPr/>
+        </p:nvSpPr>
+        <p:spPr>
+          <a:xfrm>
+            <a:off x="292801" y="730955"/>
+            <a:ext cx="1296144" cy="435690"/>
+          </a:xfrm>
+          <a:prstGeom prst="rect">
+            <a:avLst/>
+          </a:prstGeom>
+          <a:solidFill>
+            <a:schemeClr val="dk2"/>
+          </a:solidFill>
+          <a:ln w="9525" cap="flat" cmpd="sng">
+            <a:solidFill>
+              <a:srgbClr val="4A7DBA"/>
+            </a:solidFill>
+            <a:prstDash val="solid"/>
+            <a:round/>
+            <a:headEnd type="none" w="sm" len="sm"/>
+            <a:tailEnd type="none" w="sm" len="sm"/>
+          </a:ln>
+        </p:spPr>
+        <p:txBody>
+          <a:bodyPr spcFirstLastPara="1" wrap="square" lIns="91425" tIns="45700" rIns="91425" bIns="45700" anchor="ctr" anchorCtr="0">
+            <a:noAutofit/>
+          </a:bodyPr>
+          <a:lstStyle/>
+          <a:p>
+            <a:pPr marL="0" marR="0" lvl="0" indent="0" algn="ctr" rtl="0">
+              <a:spcBef>
+                <a:spcPts val="0"/>
+              </a:spcBef>
+              <a:spcAft>
+                <a:spcPts val="0"/>
+              </a:spcAft>
+              <a:buNone/>
+            </a:pPr>
+            <a:r>
+              <a:rPr lang="ja-JP" sz="1800" b="0" i="0" u="none" strike="noStrike" cap="none">
+                <a:solidFill>
+                  <a:schemeClr val="lt1"/>
+                </a:solidFill>
+                <a:latin typeface="メイリオ"/>
+                <a:ea typeface="Meiryo"/>
+                <a:cs typeface="Meiryo"/>
+                <a:sym typeface="Meiryo"/>
+              </a:rPr>
+              <a:t>対象業界</a:t>
+            </a:r>
+            <a:endParaRPr/>
+          </a:p>
+        </p:txBody>
+      </p:sp>
+      <p:sp>
+        <p:nvSpPr>
+          <p:cNvPr id="41" name="Google Shape;41;p3"/>
+          <p:cNvSpPr/>
+          <p:nvPr/>
+        </p:nvSpPr>
+        <p:spPr>
+          <a:xfrm>
+            <a:off x="7560840" y="730955"/>
+            <a:ext cx="829618" cy="435690"/>
+          </a:xfrm>
+          <a:prstGeom prst="rect">
+            <a:avLst/>
+          </a:prstGeom>
+          <a:solidFill>
+            <a:schemeClr val="bg1"/>
+          </a:solidFill>
+          <a:ln w="9525" cap="flat" cmpd="sng">
+            <a:solidFill>
+              <a:srgbClr val="4F81BD"/>
+            </a:solidFill>
+            <a:prstDash val="sysDash"/>
+            <a:round/>
+            <a:headEnd type="none" w="sm" len="sm"/>
+            <a:tailEnd type="none" w="sm" len="sm"/>
+          </a:ln>
+        </p:spPr>
+        <p:txBody>
+          <a:bodyPr spcFirstLastPara="1" wrap="square" lIns="91425" tIns="45700" rIns="91425" bIns="45700" anchor="ctr" anchorCtr="0">
+            <a:noAutofit/>
+          </a:bodyPr>
+          <a:lstStyle/>
+          <a:p>
+            <a:pPr marL="0" marR="0" lvl="0" indent="0" algn="ctr" rtl="0">
+              <a:spcBef>
+                <a:spcPts val="0"/>
+              </a:spcBef>
+              <a:spcAft>
+                <a:spcPts val="0"/>
+              </a:spcAft>
+              <a:buNone/>
+            </a:pPr>
+            <a:r>
+              <a:rPr lang="ja-JP" sz="1200" b="0" i="0" u="none" strike="noStrike" cap="none">
+                <a:solidFill>
+                  <a:schemeClr val="dk1"/>
+                </a:solidFill>
+                <a:latin typeface="メイリオ"/>
+                <a:ea typeface="Meiryo"/>
+                <a:cs typeface="Meiryo"/>
+                <a:sym typeface="Meiryo"/>
+              </a:rPr>
+              <a:t>その他</a:t>
+            </a:r>
+            <a:endParaRPr sz="1200" b="0" i="0" u="none" strike="noStrike" cap="none">
+              <a:solidFill>
+                <a:schemeClr val="dk1"/>
+              </a:solidFill>
+              <a:latin typeface="Meiryo"/>
+              <a:ea typeface="Meiryo"/>
+              <a:cs typeface="Meiryo"/>
+              <a:sym typeface="Meiryo"/>
+            </a:endParaRPr>
+          </a:p>
+        </p:txBody>
+      </p:sp>
+      <p:sp>
+        <p:nvSpPr>
+          <p:cNvPr id="42" name="Google Shape;42;p3"/>
+          <p:cNvSpPr/>
+          <p:nvPr/>
+        </p:nvSpPr>
+        <p:spPr>
+          <a:xfrm>
+            <a:off x="6679050" y="730955"/>
+            <a:ext cx="829618" cy="435690"/>
+          </a:xfrm>
+          <a:prstGeom prst="rect">
+            <a:avLst/>
+          </a:prstGeom>
+          <a:solidFill>
+            <a:schemeClr val="bg1"/>
+          </a:solidFill>
+          <a:ln w="9525" cap="flat" cmpd="sng">
+            <a:solidFill>
+              <a:srgbClr val="4F81BD"/>
+            </a:solidFill>
+            <a:prstDash val="sysDash"/>
+            <a:round/>
+            <a:headEnd type="none" w="sm" len="sm"/>
+            <a:tailEnd type="none" w="sm" len="sm"/>
+          </a:ln>
+        </p:spPr>
+        <p:txBody>
+          <a:bodyPr spcFirstLastPara="1" wrap="square" lIns="91425" tIns="45700" rIns="91425" bIns="45700" anchor="ctr" anchorCtr="0">
+            <a:noAutofit/>
+          </a:bodyPr>
+          <a:lstStyle/>
+          <a:p>
+            <a:pPr marL="0" marR="0" lvl="0" indent="0" algn="ctr" rtl="0">
+              <a:spcBef>
+                <a:spcPts val="0"/>
+              </a:spcBef>
+              <a:spcAft>
+                <a:spcPts val="0"/>
+              </a:spcAft>
+              <a:buNone/>
+            </a:pPr>
+            <a:r>
+              <a:rPr lang="ja-JP" sz="1000" b="0" i="0" u="none" strike="noStrike" cap="none">
+                <a:solidFill>
+                  <a:schemeClr val="dk1"/>
+                </a:solidFill>
+                <a:latin typeface="メイリオ"/>
+                <a:ea typeface="Meiryo"/>
+                <a:cs typeface="Meiryo"/>
+                <a:sym typeface="Meiryo"/>
+              </a:rPr>
+              <a:t>オプション</a:t>
+            </a:r>
+            <a:endParaRPr sz="1000" b="0" i="0" u="none" strike="noStrike" cap="none">
+              <a:solidFill>
+                <a:schemeClr val="dk1"/>
+              </a:solidFill>
+              <a:latin typeface="Meiryo"/>
+              <a:ea typeface="Meiryo"/>
+              <a:cs typeface="Meiryo"/>
+              <a:sym typeface="Meiryo"/>
+            </a:endParaRPr>
+          </a:p>
+          <a:p>
+            <a:pPr marL="0" marR="0" lvl="0" indent="0" algn="ctr" rtl="0">
+              <a:spcBef>
+                <a:spcPts val="0"/>
+              </a:spcBef>
+              <a:spcAft>
+                <a:spcPts val="0"/>
+              </a:spcAft>
+              <a:buNone/>
+            </a:pPr>
+            <a:r>
+              <a:rPr lang="ja-JP" sz="1000" b="0" i="0" u="none" strike="noStrike" cap="none">
+                <a:solidFill>
+                  <a:schemeClr val="dk1"/>
+                </a:solidFill>
+                <a:latin typeface="メイリオ"/>
+                <a:ea typeface="Meiryo"/>
+                <a:cs typeface="Meiryo"/>
+                <a:sym typeface="Meiryo"/>
+              </a:rPr>
+              <a:t>商材</a:t>
+            </a:r>
+            <a:endParaRPr/>
+          </a:p>
+        </p:txBody>
+      </p:sp>
+      <p:sp>
+        <p:nvSpPr>
+          <p:cNvPr id="43" name="Google Shape;43;p3"/>
+          <p:cNvSpPr/>
+          <p:nvPr/>
+        </p:nvSpPr>
+        <p:spPr>
+          <a:xfrm>
+            <a:off x="1594068" y="730955"/>
+            <a:ext cx="2926883" cy="435690"/>
+          </a:xfrm>
+          <a:prstGeom prst="rect">
+            <a:avLst/>
+          </a:prstGeom>
+          <a:noFill/>
+          <a:ln w="9525" cap="flat" cmpd="sng">
+            <a:solidFill>
+              <a:srgbClr val="4A7DBA"/>
+            </a:solidFill>
+            <a:prstDash val="solid"/>
+            <a:round/>
+            <a:headEnd type="none" w="sm" len="sm"/>
+            <a:tailEnd type="none" w="sm" len="sm"/>
+          </a:ln>
+        </p:spPr>
+        <p:txBody>
+          <a:bodyPr spcFirstLastPara="1" wrap="square" lIns="91425" tIns="45700" rIns="91425" bIns="45700" anchor="ctr" anchorCtr="0">
+            <a:noAutofit/>
+          </a:bodyPr>
+          <a:lstStyle/>
+          <a:p>
+            <a:pPr marL="0" marR="0" lvl="0" indent="0" algn="ctr" rtl="0">
+              <a:spcBef>
+                <a:spcPts val="0"/>
+              </a:spcBef>
+              <a:spcAft>
+                <a:spcPts val="0"/>
+              </a:spcAft>
+              <a:buNone/>
+            </a:pPr>
+            <a:r>
+              <a:rPr lang="ja-JP" sz="1300" b="0" i="0" u="none" strike="noStrike" cap="none">
+                <a:solidFill>
+                  <a:schemeClr val="dk1"/>
+                </a:solidFill>
+                <a:latin typeface="メイリオ"/>
+                <a:ea typeface="Meiryo"/>
+                <a:cs typeface="Meiryo"/>
+                <a:sym typeface="Meiryo"/>
+              </a:rPr>
+              <a:t>EC・通販・予約サービス</a:t>
+            </a:r>
+            <a:br>
+              <a:rPr lang="ja-JP" sz="1300" b="0" i="0" u="none" strike="noStrike" cap="none">
+                <a:solidFill>
+                  <a:schemeClr val="dk1"/>
+                </a:solidFill>
+                <a:latin typeface="メイリオ"/>
+                <a:ea typeface="Meiryo"/>
+                <a:cs typeface="Meiryo"/>
+                <a:sym typeface="Meiryo"/>
+              </a:rPr>
+            </a:br>
+            <a:r>
+              <a:rPr lang="ja-JP" sz="1300" b="0" i="0" u="none" strike="noStrike" cap="none">
+                <a:solidFill>
+                  <a:schemeClr val="dk1"/>
+                </a:solidFill>
+                <a:latin typeface="メイリオ"/>
+                <a:ea typeface="Meiryo"/>
+                <a:cs typeface="Meiryo"/>
+                <a:sym typeface="Meiryo"/>
+              </a:rPr>
+              <a:t>（自社アプリあり）</a:t>
+            </a:r>
+            <a:endParaRPr/>
+          </a:p>
+        </p:txBody>
+      </p:sp>
+      <p:sp>
+        <p:nvSpPr>
+          <p:cNvPr id="44" name="Google Shape;44;p3"/>
+          <p:cNvSpPr txBox="1"/>
+          <p:nvPr/>
+        </p:nvSpPr>
+        <p:spPr>
+          <a:xfrm>
+            <a:off x="3296816" y="6597352"/>
+            <a:ext cx="6209091" cy="215444"/>
+          </a:xfrm>
+          <a:prstGeom prst="rect">
+            <a:avLst/>
+          </a:prstGeom>
+          <a:noFill/>
+          <a:ln>
+            <a:noFill/>
+          </a:ln>
+        </p:spPr>
+        <p:txBody>
+          <a:bodyPr spcFirstLastPara="1" wrap="square" lIns="91425" tIns="45700" rIns="91425" bIns="45700" anchor="t" anchorCtr="0">
+            <a:spAutoFit/>
+          </a:bodyPr>
+          <a:lstStyle/>
+          <a:p>
+            <a:pPr marL="0" marR="0" lvl="0" indent="0" algn="l" rtl="0">
+              <a:spcBef>
+                <a:spcPts val="0"/>
+              </a:spcBef>
+              <a:spcAft>
+                <a:spcPts val="0"/>
+              </a:spcAft>
+              <a:buNone/>
+            </a:pPr>
+            <a:r>
+              <a:rPr lang="ja-JP" sz="800" b="0" i="0" u="none" strike="noStrike" cap="none">
+                <a:solidFill>
+                  <a:schemeClr val="lt1"/>
+                </a:solidFill>
+                <a:latin typeface="メイリオ"/>
+                <a:ea typeface="Meiryo"/>
+                <a:cs typeface="Meiryo"/>
+                <a:sym typeface="Meiryo"/>
+              </a:rPr>
+              <a:t>出典：代理店情報</a:t>
+            </a:r>
+            <a:endParaRPr sz="800">
+              <a:solidFill>
+                <a:schemeClr val="lt1"/>
+              </a:solidFill>
+              <a:latin typeface="Meiryo"/>
+              <a:ea typeface="Meiryo"/>
+              <a:cs typeface="Meiryo"/>
+              <a:sym typeface="Meiryo"/>
+            </a:endParaRPr>
+          </a:p>
+        </p:txBody>
+      </p:sp>
+      <p:sp>
+        <p:nvSpPr>
+          <p:cNvPr id="45" name="Google Shape;45;p3"/>
+          <p:cNvSpPr/>
+          <p:nvPr/>
+        </p:nvSpPr>
+        <p:spPr>
+          <a:xfrm>
+            <a:off x="0" y="1234746"/>
+            <a:ext cx="9906000" cy="672259"/>
+          </a:xfrm>
+          <a:prstGeom prst="rect">
+            <a:avLst/>
+          </a:prstGeom>
+          <a:solidFill>
+            <a:srgbClr val="C5D8F1"/>
+          </a:solidFill>
+          <a:ln>
+            <a:noFill/>
+          </a:ln>
+        </p:spPr>
+        <p:txBody>
+          <a:bodyPr spcFirstLastPara="1" wrap="square" lIns="91425" tIns="45700" rIns="91425" bIns="45700" anchor="ctr" anchorCtr="0">
+            <a:noAutofit/>
+          </a:bodyPr>
+          <a:lstStyle/>
+          <a:p>
+            <a:pPr marL="0" marR="0" lvl="0" indent="0" algn="ctr" rtl="0">
+              <a:spcBef>
+                <a:spcPts val="0"/>
+              </a:spcBef>
+              <a:spcAft>
+                <a:spcPts val="0"/>
+              </a:spcAft>
+              <a:buNone/>
+            </a:pPr>
+            <a:r>
+              <a:rPr lang="ja-JP" sz="1600" b="1">
+                <a:solidFill>
+                  <a:srgbClr val="004DE6"/>
+                </a:solidFill>
+                <a:latin typeface="メイリオ"/>
+                <a:ea typeface="Meiryo"/>
+                <a:cs typeface="Meiryo"/>
+                <a:sym typeface="Meiryo"/>
+              </a:rPr>
+              <a:t>　　　　　　</a:t>
+            </a:r>
+            <a:endParaRPr sz="1800" b="1">
+              <a:solidFill>
+                <a:srgbClr val="004DE6"/>
+              </a:solidFill>
+              <a:latin typeface="Meiryo"/>
+              <a:ea typeface="Meiryo"/>
+              <a:cs typeface="Meiryo"/>
+              <a:sym typeface="Meiryo"/>
+            </a:endParaRPr>
+          </a:p>
+        </p:txBody>
+      </p:sp>
+      <p:sp>
+        <p:nvSpPr>
+          <p:cNvPr id="46" name="Google Shape;46;p3"/>
+          <p:cNvSpPr/>
+          <p:nvPr/>
+        </p:nvSpPr>
+        <p:spPr>
+          <a:xfrm>
+            <a:off x="1089832" y="1437370"/>
+            <a:ext cx="7031520" cy="338554"/>
+          </a:xfrm>
+          <a:prstGeom prst="rect">
+            <a:avLst/>
+          </a:prstGeom>
+          <a:noFill/>
+          <a:ln>
+            <a:noFill/>
+          </a:ln>
+        </p:spPr>
+        <p:txBody>
+          <a:bodyPr spcFirstLastPara="1" wrap="square" lIns="91425" tIns="45700" rIns="91425" bIns="45700" anchor="t" anchorCtr="0">
+            <a:spAutoFit/>
+          </a:bodyPr>
+          <a:lstStyle/>
+          <a:p>
+            <a:pPr marL="0" marR="0" lvl="0" indent="0" algn="l" rtl="0">
+              <a:spcBef>
+                <a:spcPts val="0"/>
+              </a:spcBef>
+              <a:spcAft>
+                <a:spcPts val="0"/>
+              </a:spcAft>
+              <a:buNone/>
+            </a:pPr>
+            <a:r>
+              <a:rPr lang="ja-JP" sz="1600" b="1">
+                <a:solidFill>
+                  <a:srgbClr val="004DE6"/>
+                </a:solidFill>
+                <a:latin typeface="メイリオ"/>
+                <a:ea typeface="Meiryo"/>
+                <a:cs typeface="Meiryo"/>
+                <a:sym typeface="Meiryo"/>
+              </a:rPr>
+              <a:t>【LINE通知メッセージ】ネイティブアプリ遷移の条件</a:t>
+            </a:r>
+            <a:endParaRPr sz="1600" b="1">
+              <a:solidFill>
+                <a:srgbClr val="004DE6"/>
+              </a:solidFill>
+              <a:latin typeface="Meiryo"/>
+              <a:ea typeface="Meiryo"/>
+              <a:cs typeface="Meiryo"/>
+              <a:sym typeface="Meiryo"/>
+            </a:endParaRPr>
+          </a:p>
+        </p:txBody>
+      </p:sp>
+      <p:sp>
+        <p:nvSpPr>
+          <p:cNvPr id="47" name="Google Shape;47;p3"/>
+          <p:cNvSpPr txBox="1"/>
+          <p:nvPr/>
+        </p:nvSpPr>
+        <p:spPr>
+          <a:xfrm>
+            <a:off x="182880" y="88175"/>
+            <a:ext cx="7512385" cy="365091"/>
+          </a:xfrm>
+          <a:prstGeom prst="rect">
+            <a:avLst/>
+          </a:prstGeom>
+          <a:noFill/>
+          <a:ln>
+            <a:noFill/>
+          </a:ln>
+        </p:spPr>
+        <p:txBody>
+          <a:bodyPr spcFirstLastPara="1" wrap="square" lIns="91425" tIns="72000" rIns="91425" bIns="45700" anchor="t" anchorCtr="0">
+            <a:spAutoFit/>
+          </a:bodyPr>
+          <a:lstStyle/>
+          <a:p>
+            <a:pPr marL="0" marR="0" lvl="0" indent="0" algn="l" rtl="0">
+              <a:spcBef>
+                <a:spcPts val="0"/>
+              </a:spcBef>
+              <a:spcAft>
+                <a:spcPts val="0"/>
+              </a:spcAft>
+              <a:buClr>
+                <a:schemeClr val="dk1"/>
+              </a:buClr>
+              <a:buSzPts val="1600"/>
+              <a:buFont typeface="Arial"/>
+              <a:buNone/>
+            </a:pPr>
+            <a:r>
+              <a:rPr lang="ja-JP" sz="1600" b="0" u="none">
+                <a:solidFill>
+                  <a:schemeClr val="dk1"/>
+                </a:solidFill>
+                <a:latin typeface="メイリオ"/>
+                <a:ea typeface="Meiryo"/>
+                <a:cs typeface="Meiryo"/>
+                <a:sym typeface="Meiryo"/>
+              </a:rPr>
+              <a:t>    今後のアップデート情報</a:t>
+            </a:r>
+            <a:endParaRPr sz="1600" b="0" u="none">
+              <a:solidFill>
+                <a:schemeClr val="dk1"/>
+              </a:solidFill>
+              <a:latin typeface="Meiryo"/>
+              <a:ea typeface="Meiryo"/>
+              <a:cs typeface="Meiryo"/>
+              <a:sym typeface="Meiryo"/>
+            </a:endParaRPr>
+          </a:p>
+        </p:txBody>
+      </p:sp>
+      <p:sp>
+        <p:nvSpPr>
+          <p:cNvPr id="48" name="Google Shape;48;p3"/>
+          <p:cNvSpPr/>
+          <p:nvPr/>
+        </p:nvSpPr>
+        <p:spPr>
+          <a:xfrm>
+            <a:off x="5797260" y="730955"/>
+            <a:ext cx="829618" cy="435690"/>
+          </a:xfrm>
+          <a:prstGeom prst="rect">
+            <a:avLst/>
+          </a:prstGeom>
+          <a:solidFill>
+            <a:schemeClr val="tx2"/>
+          </a:solidFill>
+          <a:ln w="9525" cap="flat" cmpd="sng">
+            <a:solidFill>
+              <a:srgbClr val="4F81BD"/>
+            </a:solidFill>
+            <a:prstDash val="solid"/>
+            <a:round/>
+            <a:headEnd type="none" w="sm" len="sm"/>
+            <a:tailEnd type="none" w="sm" len="sm"/>
+          </a:ln>
+        </p:spPr>
+        <p:txBody>
+          <a:bodyPr spcFirstLastPara="1" wrap="square" lIns="91425" tIns="45700" rIns="91425" bIns="45700" anchor="ctr" anchorCtr="0">
+            <a:noAutofit/>
+          </a:bodyPr>
+          <a:lstStyle/>
+          <a:p>
+            <a:pPr marL="0" marR="0" lvl="0" indent="0" algn="ctr" rtl="0">
+              <a:spcBef>
+                <a:spcPts val="0"/>
+              </a:spcBef>
+              <a:spcAft>
+                <a:spcPts val="0"/>
+              </a:spcAft>
+              <a:buClr>
+                <a:schemeClr val="dk1"/>
+              </a:buClr>
+              <a:buSzPts val="1000"/>
+              <a:buFont typeface="Meiryo"/>
+              <a:buNone/>
+            </a:pPr>
+            <a:r>
+              <a:rPr lang="ja-JP" sz="1000">
+                <a:solidFill>
+                  <a:schemeClr val="dk1"/>
+                </a:solidFill>
+                <a:latin typeface="メイリオ"/>
+                <a:ea typeface="Meiryo"/>
+                <a:cs typeface="Meiryo"/>
+                <a:sym typeface="Meiryo"/>
+              </a:rPr>
+              <a:t>開発</a:t>
+            </a:r>
+            <a:endParaRPr sz="1000">
+              <a:solidFill>
+                <a:schemeClr val="dk1"/>
+              </a:solidFill>
+              <a:latin typeface="Meiryo"/>
+              <a:ea typeface="Meiryo"/>
+              <a:cs typeface="Meiryo"/>
+              <a:sym typeface="Meiryo"/>
+            </a:endParaRPr>
+          </a:p>
+          <a:p>
+            <a:pPr marL="0" marR="0" lvl="0" indent="0" algn="ctr" rtl="0">
+              <a:spcBef>
+                <a:spcPts val="0"/>
+              </a:spcBef>
+              <a:spcAft>
+                <a:spcPts val="0"/>
+              </a:spcAft>
+              <a:buClr>
+                <a:schemeClr val="dk1"/>
+              </a:buClr>
+              <a:buSzPts val="1000"/>
+              <a:buFont typeface="Meiryo"/>
+              <a:buNone/>
+            </a:pPr>
+            <a:r>
+              <a:rPr lang="ja-JP" sz="1000">
+                <a:solidFill>
+                  <a:schemeClr val="dk1"/>
+                </a:solidFill>
+                <a:latin typeface="メイリオ"/>
+                <a:ea typeface="Meiryo"/>
+                <a:cs typeface="Meiryo"/>
+                <a:sym typeface="Meiryo"/>
+              </a:rPr>
+              <a:t>LINE API</a:t>
+            </a:r>
+            <a:endParaRPr sz="1000">
+              <a:solidFill>
+                <a:schemeClr val="dk1"/>
+              </a:solidFill>
+              <a:latin typeface="Meiryo"/>
+              <a:ea typeface="Meiryo"/>
+              <a:cs typeface="Meiryo"/>
+              <a:sym typeface="Meiryo"/>
+            </a:endParaRPr>
+          </a:p>
+        </p:txBody>
+      </p:sp>
+      <p:sp>
+        <p:nvSpPr>
+          <p:cNvPr id="49" name="Google Shape;49;p3"/>
+          <p:cNvSpPr/>
+          <p:nvPr/>
+        </p:nvSpPr>
+        <p:spPr>
+          <a:xfrm>
+            <a:off x="4915470" y="730955"/>
+            <a:ext cx="829618" cy="435690"/>
+          </a:xfrm>
+          <a:prstGeom prst="rect">
+            <a:avLst/>
+          </a:prstGeom>
+          <a:solidFill>
+            <a:schemeClr val="bg1"/>
+          </a:solidFill>
+          <a:ln w="9525" cap="flat" cmpd="sng">
+            <a:solidFill>
+              <a:srgbClr val="4F81BD"/>
+            </a:solidFill>
+            <a:prstDash val="sysDash"/>
+            <a:round/>
+            <a:headEnd type="none" w="sm" len="sm"/>
+            <a:tailEnd type="none" w="sm" len="sm"/>
+          </a:ln>
+        </p:spPr>
+        <p:txBody>
+          <a:bodyPr spcFirstLastPara="1" wrap="square" lIns="91425" tIns="45700" rIns="91425" bIns="45700" anchor="ctr" anchorCtr="0">
+            <a:noAutofit/>
+          </a:bodyPr>
+          <a:lstStyle/>
+          <a:p>
+            <a:pPr marL="0" marR="0" lvl="0" indent="0" algn="ctr" rtl="0">
+              <a:spcBef>
+                <a:spcPts val="0"/>
+              </a:spcBef>
+              <a:spcAft>
+                <a:spcPts val="0"/>
+              </a:spcAft>
+              <a:buNone/>
+            </a:pPr>
+            <a:r>
+              <a:rPr lang="ja-JP" sz="1000">
+                <a:solidFill>
+                  <a:schemeClr val="dk1"/>
+                </a:solidFill>
+                <a:latin typeface="メイリオ"/>
+                <a:ea typeface="Meiryo"/>
+                <a:cs typeface="Meiryo"/>
+                <a:sym typeface="Meiryo"/>
+              </a:rPr>
+              <a:t>LINE公式アカウント</a:t>
+            </a:r>
+            <a:endParaRPr sz="1000">
+              <a:solidFill>
+                <a:schemeClr val="dk1"/>
+              </a:solidFill>
+              <a:latin typeface="Meiryo"/>
+              <a:ea typeface="Meiryo"/>
+              <a:cs typeface="Meiryo"/>
+              <a:sym typeface="Meiryo"/>
+            </a:endParaRPr>
+          </a:p>
+        </p:txBody>
+      </p:sp>
+      <p:sp>
+        <p:nvSpPr>
+          <p:cNvPr id="50" name="Google Shape;50;p3"/>
+          <p:cNvSpPr/>
+          <p:nvPr/>
+        </p:nvSpPr>
+        <p:spPr>
+          <a:xfrm>
+            <a:off x="0" y="1890267"/>
+            <a:ext cx="9906000" cy="733579"/>
+          </a:xfrm>
+          <a:prstGeom prst="rect">
+            <a:avLst/>
+          </a:prstGeom>
+          <a:solidFill>
+            <a:srgbClr val="F2F2F2"/>
+          </a:solidFill>
+          <a:ln>
+            <a:noFill/>
+          </a:ln>
+        </p:spPr>
+        <p:txBody>
+          <a:bodyPr spcFirstLastPara="1" wrap="square" lIns="91425" tIns="45700" rIns="91425" bIns="45700" anchor="ctr" anchorCtr="0">
+            <a:noAutofit/>
+          </a:bodyPr>
+          <a:lstStyle/>
+          <a:p>
+            <a:pPr marL="0" marR="0" lvl="0" indent="0" algn="ctr" rtl="0">
+              <a:spcBef>
+                <a:spcPts val="0"/>
+              </a:spcBef>
+              <a:spcAft>
+                <a:spcPts val="0"/>
+              </a:spcAft>
+              <a:buNone/>
+            </a:pPr>
+            <a:endParaRPr sz="1200">
+              <a:solidFill>
+                <a:schemeClr val="dk1"/>
+              </a:solidFill>
+              <a:latin typeface="Meiryo"/>
+              <a:ea typeface="Meiryo"/>
+              <a:cs typeface="Meiryo"/>
+              <a:sym typeface="Meiryo"/>
+            </a:endParaRPr>
+          </a:p>
+        </p:txBody>
+      </p:sp>
+      <p:sp>
+        <p:nvSpPr>
+          <p:cNvPr id="51" name="Google Shape;51;p3"/>
+          <p:cNvSpPr/>
+          <p:nvPr/>
+        </p:nvSpPr>
+        <p:spPr>
+          <a:xfrm>
+            <a:off x="544108" y="1961282"/>
+            <a:ext cx="8817783" cy="646331"/>
+          </a:xfrm>
+          <a:prstGeom prst="rect">
+            <a:avLst/>
+          </a:prstGeom>
+          <a:noFill/>
+          <a:ln>
+            <a:noFill/>
+          </a:ln>
+        </p:spPr>
+        <p:txBody>
+          <a:bodyPr spcFirstLastPara="1" wrap="square" lIns="91425" tIns="45700" rIns="91425" bIns="45700" anchor="t" anchorCtr="0">
+            <a:spAutoFit/>
+          </a:bodyPr>
+          <a:lstStyle/>
+          <a:p>
+            <a:pPr marL="0" marR="0" lvl="0" indent="0" algn="ctr" rtl="0">
+              <a:spcBef>
+                <a:spcPts val="0"/>
+              </a:spcBef>
+              <a:spcAft>
+                <a:spcPts val="0"/>
+              </a:spcAft>
+              <a:buNone/>
+            </a:pPr>
+            <a:r>
+              <a:rPr lang="ja-JP" sz="1200" b="1">
+                <a:solidFill>
+                  <a:schemeClr val="dk1"/>
+                </a:solidFill>
+                <a:latin typeface="メイリオ"/>
+                <a:ea typeface="Meiryo"/>
+                <a:cs typeface="Meiryo"/>
+                <a:sym typeface="Meiryo"/>
+              </a:rPr>
+              <a:t>ネイティブアプリへ遷移させるには、LINEヤフーの審査で次の4つを満たす必要がある。</a:t>
+            </a:r>
+            <a:endParaRPr sz="1200" b="1">
+              <a:solidFill>
+                <a:schemeClr val="dk1"/>
+              </a:solidFill>
+              <a:latin typeface="Meiryo"/>
+              <a:ea typeface="Meiryo"/>
+              <a:cs typeface="Meiryo"/>
+              <a:sym typeface="Meiryo"/>
+            </a:endParaRPr>
+          </a:p>
+          <a:p>
+            <a:pPr marL="0" marR="0" lvl="0" indent="0" algn="ctr" rtl="0">
+              <a:spcBef>
+                <a:spcPts val="0"/>
+              </a:spcBef>
+              <a:spcAft>
+                <a:spcPts val="0"/>
+              </a:spcAft>
+              <a:buNone/>
+            </a:pPr>
+            <a:r>
+              <a:rPr lang="ja-JP" sz="1200" b="1">
+                <a:solidFill>
+                  <a:schemeClr val="dk1"/>
+                </a:solidFill>
+                <a:latin typeface="メイリオ"/>
+                <a:ea typeface="Meiryo"/>
+                <a:cs typeface="Meiryo"/>
+                <a:sym typeface="Meiryo"/>
+              </a:rPr>
+              <a:t>条件はLINE通知メッセージ（フレキシブル／テンプレート）のUXガイドラインに記載。</a:t>
+            </a:r>
+            <a:endParaRPr/>
+          </a:p>
+          <a:p>
+            <a:pPr marL="0" marR="0" lvl="0" indent="0" algn="ctr" rtl="0">
+              <a:spcBef>
+                <a:spcPts val="0"/>
+              </a:spcBef>
+              <a:spcAft>
+                <a:spcPts val="0"/>
+              </a:spcAft>
+              <a:buNone/>
+            </a:pPr>
+            <a:r>
+              <a:rPr lang="ja-JP" sz="1200" b="1">
+                <a:solidFill>
+                  <a:schemeClr val="dk1"/>
+                </a:solidFill>
+                <a:latin typeface="メイリオ"/>
+                <a:ea typeface="Meiryo"/>
+                <a:cs typeface="Meiryo"/>
+                <a:sym typeface="Meiryo"/>
+              </a:rPr>
+              <a:t>対象プラン：エッセンシャル／パフォーマンス／アンリミテッド</a:t>
+            </a:r>
+            <a:endParaRPr sz="1400" b="1">
+              <a:solidFill>
+                <a:schemeClr val="dk1"/>
+              </a:solidFill>
+              <a:latin typeface="Meiryo"/>
+              <a:ea typeface="Meiryo"/>
+              <a:cs typeface="Meiryo"/>
+              <a:sym typeface="Meiryo"/>
+            </a:endParaRPr>
+          </a:p>
+        </p:txBody>
+      </p:sp>
+      <p:sp>
+        <p:nvSpPr>
+          <p:cNvPr id="52" name="Google Shape;52;p3"/>
+          <p:cNvSpPr/>
+          <p:nvPr/>
+        </p:nvSpPr>
+        <p:spPr>
+          <a:xfrm>
+            <a:off x="351381" y="2714173"/>
+            <a:ext cx="5200000" cy="338554"/>
+          </a:xfrm>
+          <a:prstGeom prst="rect">
+            <a:avLst/>
+          </a:prstGeom>
+          <a:noFill/>
+          <a:ln>
+            <a:noFill/>
+          </a:ln>
+        </p:spPr>
+        <p:txBody>
+          <a:bodyPr spcFirstLastPara="1" wrap="square" lIns="91425" tIns="45700" rIns="91425" bIns="45700" anchor="t" anchorCtr="0">
+            <a:noAutofit/>
+          </a:bodyPr>
+          <a:lstStyle/>
+          <a:p>
+            <a:pPr marL="0" marR="0" lvl="0" indent="0" algn="l" rtl="0">
+              <a:spcBef>
+                <a:spcPts val="0"/>
+              </a:spcBef>
+              <a:spcAft>
+                <a:spcPts val="0"/>
+              </a:spcAft>
+              <a:buNone/>
+            </a:pPr>
+            <a:r>
+              <a:rPr lang="ja-JP" sz="1400" b="1">
+                <a:solidFill>
+                  <a:srgbClr val="15133D"/>
+                </a:solidFill>
+                <a:latin typeface="メイリオ"/>
+                <a:ea typeface="Meiryo"/>
+                <a:cs typeface="Meiryo"/>
+                <a:sym typeface="Meiryo"/>
+              </a:rPr>
+              <a:t>■ 詳細</a:t>
+            </a:r>
+            <a:endParaRPr/>
+          </a:p>
+        </p:txBody>
+      </p:sp>
+      <p:grpSp>
+        <p:nvGrpSpPr>
+          <p:cNvPr id="53" name="Google Shape;53;p3"/>
+          <p:cNvGrpSpPr/>
+          <p:nvPr/>
+        </p:nvGrpSpPr>
+        <p:grpSpPr>
+          <a:xfrm>
+            <a:off x="8473303" y="730955"/>
+            <a:ext cx="1376241" cy="1131930"/>
+            <a:chOff x="0" y="0"/>
+            <a:chExt cx="1376241" cy="1131930"/>
+          </a:xfrm>
+        </p:grpSpPr>
+        <p:sp>
+          <p:nvSpPr>
+            <p:cNvPr id="54" name="Google Shape;54;p3"/>
+            <p:cNvSpPr/>
+            <p:nvPr/>
+          </p:nvSpPr>
+          <p:spPr>
+            <a:xfrm rot="10800000">
+              <a:off x="0" y="0"/>
+              <a:ext cx="1376241" cy="282982"/>
+            </a:xfrm>
+            <a:prstGeom prst="trapezoid">
+              <a:avLst>
+                <a:gd name="adj" fmla="val 60792"/>
+              </a:avLst>
+            </a:prstGeom>
+            <a:solidFill>
+              <a:srgbClr val="EAEDF5"/>
+            </a:solidFill>
+            <a:ln w="25400" cap="flat" cmpd="sng">
+              <a:solidFill>
+                <a:schemeClr val="dk2"/>
+              </a:solidFill>
+              <a:prstDash val="solid"/>
+              <a:round/>
+              <a:headEnd type="none" w="sm" len="sm"/>
+              <a:tailEnd type="none" w="sm" len="sm"/>
+            </a:ln>
+          </p:spPr>
+          <p:txBody>
+            <a:bodyPr spcFirstLastPara="1" wrap="square" lIns="91425" tIns="91425" rIns="91425" bIns="91425" anchor="ctr" anchorCtr="0">
+              <a:noAutofit/>
+            </a:bodyPr>
+            <a:lstStyle/>
+            <a:p>
+              <a:pPr marL="0" lvl="0" indent="0" algn="l" rtl="0">
+                <a:spcBef>
+                  <a:spcPts val="0"/>
+                </a:spcBef>
+                <a:spcAft>
+                  <a:spcPts val="0"/>
+                </a:spcAft>
+                <a:buNone/>
+              </a:pPr>
+              <a:endParaRPr/>
+            </a:p>
+          </p:txBody>
+        </p:sp>
+        <p:sp>
+          <p:nvSpPr>
+            <p:cNvPr id="55" name="Google Shape;55;p3"/>
+            <p:cNvSpPr txBox="1"/>
+            <p:nvPr/>
+          </p:nvSpPr>
+          <p:spPr>
+            <a:xfrm>
+              <a:off x="240842" y="0"/>
+              <a:ext cx="894556" cy="282982"/>
+            </a:xfrm>
+            <a:prstGeom prst="rect">
+              <a:avLst/>
+            </a:prstGeom>
+            <a:noFill/>
+            <a:ln>
+              <a:noFill/>
+            </a:ln>
+          </p:spPr>
+          <p:txBody>
+            <a:bodyPr spcFirstLastPara="1" wrap="square" lIns="10150" tIns="10150" rIns="10150" bIns="10150" anchor="ctr" anchorCtr="0">
+              <a:noAutofit/>
+            </a:bodyPr>
+            <a:lstStyle/>
+            <a:p>
+              <a:pPr marL="0" marR="0" lvl="0" indent="0" algn="ctr" rtl="0">
+                <a:lnSpc>
+                  <a:spcPct val="90000"/>
+                </a:lnSpc>
+                <a:spcBef>
+                  <a:spcPts val="0"/>
+                </a:spcBef>
+                <a:spcAft>
+                  <a:spcPts val="0"/>
+                </a:spcAft>
+                <a:buClr>
+                  <a:srgbClr val="262626"/>
+                </a:buClr>
+                <a:buSzPts val="800"/>
+                <a:buFont typeface="Arial"/>
+                <a:buNone/>
+              </a:pPr>
+              <a:r>
+                <a:rPr lang="ja-JP" sz="800" b="1">
+                  <a:solidFill>
+                    <a:srgbClr val="262626"/>
+                  </a:solidFill>
+                  <a:latin typeface="Arial"/>
+                  <a:ea typeface="Arial"/>
+                  <a:cs typeface="Arial"/>
+                  <a:sym typeface="Arial"/>
+                </a:rPr>
+                <a:t>認知</a:t>
+              </a:r>
+              <a:endParaRPr/>
+            </a:p>
+          </p:txBody>
+        </p:sp>
+        <p:sp>
+          <p:nvSpPr>
+            <p:cNvPr id="56" name="Google Shape;56;p3"/>
+            <p:cNvSpPr/>
+            <p:nvPr/>
+          </p:nvSpPr>
+          <p:spPr>
+            <a:xfrm rot="10800000">
+              <a:off x="172030" y="282982"/>
+              <a:ext cx="1032180" cy="282982"/>
+            </a:xfrm>
+            <a:prstGeom prst="trapezoid">
+              <a:avLst>
+                <a:gd name="adj" fmla="val 60792"/>
+              </a:avLst>
+            </a:prstGeom>
+            <a:solidFill>
+              <a:schemeClr val="lt1"/>
+            </a:solidFill>
+            <a:ln w="25400" cap="flat" cmpd="sng">
+              <a:solidFill>
+                <a:schemeClr val="dk2"/>
+              </a:solidFill>
+              <a:prstDash val="solid"/>
+              <a:round/>
+              <a:headEnd type="none" w="sm" len="sm"/>
+              <a:tailEnd type="none" w="sm" len="sm"/>
+            </a:ln>
+          </p:spPr>
+          <p:txBody>
+            <a:bodyPr spcFirstLastPara="1" wrap="square" lIns="91425" tIns="91425" rIns="91425" bIns="91425" anchor="ctr" anchorCtr="0">
+              <a:noAutofit/>
+            </a:bodyPr>
+            <a:lstStyle/>
+            <a:p>
+              <a:pPr marL="0" lvl="0" indent="0" algn="l" rtl="0">
+                <a:spcBef>
+                  <a:spcPts val="0"/>
+                </a:spcBef>
+                <a:spcAft>
+                  <a:spcPts val="0"/>
+                </a:spcAft>
+                <a:buNone/>
+              </a:pPr>
+              <a:endParaRPr/>
+            </a:p>
+          </p:txBody>
+        </p:sp>
+        <p:sp>
+          <p:nvSpPr>
+            <p:cNvPr id="57" name="Google Shape;57;p3"/>
+            <p:cNvSpPr txBox="1"/>
+            <p:nvPr/>
+          </p:nvSpPr>
+          <p:spPr>
+            <a:xfrm>
+              <a:off x="352661" y="282982"/>
+              <a:ext cx="670917" cy="282982"/>
+            </a:xfrm>
+            <a:prstGeom prst="rect">
+              <a:avLst/>
+            </a:prstGeom>
+            <a:noFill/>
+            <a:ln>
+              <a:noFill/>
+            </a:ln>
+          </p:spPr>
+          <p:txBody>
+            <a:bodyPr spcFirstLastPara="1" wrap="square" lIns="10150" tIns="10150" rIns="10150" bIns="10150" anchor="ctr" anchorCtr="0">
+              <a:noAutofit/>
+            </a:bodyPr>
+            <a:lstStyle/>
+            <a:p>
+              <a:pPr marL="0" marR="0" lvl="0" indent="0" algn="ctr" rtl="0">
+                <a:lnSpc>
+                  <a:spcPct val="90000"/>
+                </a:lnSpc>
+                <a:spcBef>
+                  <a:spcPts val="0"/>
+                </a:spcBef>
+                <a:spcAft>
+                  <a:spcPts val="0"/>
+                </a:spcAft>
+                <a:buClr>
+                  <a:srgbClr val="262626"/>
+                </a:buClr>
+                <a:buSzPts val="800"/>
+                <a:buFont typeface="Arial"/>
+                <a:buNone/>
+              </a:pPr>
+              <a:r>
+                <a:rPr lang="ja-JP" sz="800" b="1">
+                  <a:solidFill>
+                    <a:srgbClr val="262626"/>
+                  </a:solidFill>
+                  <a:latin typeface="Arial"/>
+                  <a:ea typeface="Arial"/>
+                  <a:cs typeface="Arial"/>
+                  <a:sym typeface="Arial"/>
+                </a:rPr>
+                <a:t>検討</a:t>
+              </a:r>
+              <a:endParaRPr/>
+            </a:p>
+          </p:txBody>
+        </p:sp>
+        <p:sp>
+          <p:nvSpPr>
+            <p:cNvPr id="58" name="Google Shape;58;p3"/>
+            <p:cNvSpPr/>
+            <p:nvPr/>
+          </p:nvSpPr>
+          <p:spPr>
+            <a:xfrm rot="10800000">
+              <a:off x="344060" y="565965"/>
+              <a:ext cx="688120" cy="282982"/>
+            </a:xfrm>
+            <a:prstGeom prst="trapezoid">
+              <a:avLst>
+                <a:gd name="adj" fmla="val 60792"/>
+              </a:avLst>
+            </a:prstGeom>
+            <a:solidFill>
+              <a:schemeClr val="lt1"/>
+            </a:solidFill>
+            <a:ln w="25400" cap="flat" cmpd="sng">
+              <a:solidFill>
+                <a:schemeClr val="dk2"/>
+              </a:solidFill>
+              <a:prstDash val="solid"/>
+              <a:round/>
+              <a:headEnd type="none" w="sm" len="sm"/>
+              <a:tailEnd type="none" w="sm" len="sm"/>
+            </a:ln>
+          </p:spPr>
+          <p:txBody>
+            <a:bodyPr spcFirstLastPara="1" wrap="square" lIns="91425" tIns="91425" rIns="91425" bIns="91425" anchor="ctr" anchorCtr="0">
+              <a:noAutofit/>
+            </a:bodyPr>
+            <a:lstStyle/>
+            <a:p>
+              <a:pPr marL="0" lvl="0" indent="0" algn="l" rtl="0">
+                <a:spcBef>
+                  <a:spcPts val="0"/>
+                </a:spcBef>
+                <a:spcAft>
+                  <a:spcPts val="0"/>
+                </a:spcAft>
+                <a:buNone/>
+              </a:pPr>
+              <a:endParaRPr/>
+            </a:p>
+          </p:txBody>
+        </p:sp>
+        <p:sp>
+          <p:nvSpPr>
+            <p:cNvPr id="59" name="Google Shape;59;p3"/>
+            <p:cNvSpPr txBox="1"/>
+            <p:nvPr/>
+          </p:nvSpPr>
+          <p:spPr>
+            <a:xfrm>
+              <a:off x="464481" y="565965"/>
+              <a:ext cx="447278" cy="282982"/>
+            </a:xfrm>
+            <a:prstGeom prst="rect">
+              <a:avLst/>
+            </a:prstGeom>
+            <a:noFill/>
+            <a:ln>
+              <a:noFill/>
+            </a:ln>
+          </p:spPr>
+          <p:txBody>
+            <a:bodyPr spcFirstLastPara="1" wrap="square" lIns="10150" tIns="10150" rIns="10150" bIns="10150" anchor="ctr" anchorCtr="0">
+              <a:noAutofit/>
+            </a:bodyPr>
+            <a:lstStyle/>
+            <a:p>
+              <a:pPr marL="0" marR="0" lvl="0" indent="0" algn="ctr" rtl="0">
+                <a:lnSpc>
+                  <a:spcPct val="90000"/>
+                </a:lnSpc>
+                <a:spcBef>
+                  <a:spcPts val="0"/>
+                </a:spcBef>
+                <a:spcAft>
+                  <a:spcPts val="0"/>
+                </a:spcAft>
+                <a:buClr>
+                  <a:srgbClr val="262626"/>
+                </a:buClr>
+                <a:buSzPts val="800"/>
+                <a:buFont typeface="Arial"/>
+                <a:buNone/>
+              </a:pPr>
+              <a:r>
+                <a:rPr lang="ja-JP" sz="800" b="1">
+                  <a:solidFill>
+                    <a:srgbClr val="262626"/>
+                  </a:solidFill>
+                  <a:latin typeface="Arial"/>
+                  <a:ea typeface="Arial"/>
+                  <a:cs typeface="Arial"/>
+                  <a:sym typeface="Arial"/>
+                </a:rPr>
+                <a:t>獲得</a:t>
+              </a:r>
+              <a:endParaRPr/>
+            </a:p>
+          </p:txBody>
+        </p:sp>
+        <p:sp>
+          <p:nvSpPr>
+            <p:cNvPr id="60" name="Google Shape;60;p3"/>
+            <p:cNvSpPr/>
+            <p:nvPr/>
+          </p:nvSpPr>
+          <p:spPr>
+            <a:xfrm rot="10800000">
+              <a:off x="516090" y="848948"/>
+              <a:ext cx="344060" cy="282982"/>
+            </a:xfrm>
+            <a:prstGeom prst="trapezoid">
+              <a:avLst>
+                <a:gd name="adj" fmla="val 60792"/>
+              </a:avLst>
+            </a:prstGeom>
+            <a:noFill/>
+            <a:ln w="25400" cap="flat" cmpd="sng">
+              <a:solidFill>
+                <a:schemeClr val="dk2"/>
+              </a:solidFill>
+              <a:prstDash val="solid"/>
+              <a:round/>
+              <a:headEnd type="none" w="sm" len="sm"/>
+              <a:tailEnd type="none" w="sm" len="sm"/>
+            </a:ln>
+          </p:spPr>
+          <p:txBody>
+            <a:bodyPr spcFirstLastPara="1" wrap="square" lIns="91425" tIns="91425" rIns="91425" bIns="91425" anchor="ctr" anchorCtr="0">
+              <a:noAutofit/>
+            </a:bodyPr>
+            <a:lstStyle/>
+            <a:p>
+              <a:pPr marL="0" lvl="0" indent="0" algn="l" rtl="0">
+                <a:spcBef>
+                  <a:spcPts val="0"/>
+                </a:spcBef>
+                <a:spcAft>
+                  <a:spcPts val="0"/>
+                </a:spcAft>
+                <a:buNone/>
+              </a:pPr>
+              <a:endParaRPr/>
+            </a:p>
+          </p:txBody>
+        </p:sp>
+        <p:sp>
+          <p:nvSpPr>
+            <p:cNvPr id="61" name="Google Shape;61;p3"/>
+            <p:cNvSpPr txBox="1"/>
+            <p:nvPr/>
+          </p:nvSpPr>
+          <p:spPr>
+            <a:xfrm>
+              <a:off x="516090" y="848948"/>
+              <a:ext cx="344060" cy="282982"/>
+            </a:xfrm>
+            <a:prstGeom prst="rect">
+              <a:avLst/>
+            </a:prstGeom>
+            <a:noFill/>
+            <a:ln>
+              <a:noFill/>
+            </a:ln>
+          </p:spPr>
+          <p:txBody>
+            <a:bodyPr spcFirstLastPara="1" wrap="square" lIns="10150" tIns="10150" rIns="10150" bIns="10150" anchor="ctr" anchorCtr="0">
+              <a:noAutofit/>
+            </a:bodyPr>
+            <a:lstStyle/>
+            <a:p>
+              <a:pPr marL="0" marR="0" lvl="0" indent="0" algn="ctr" rtl="0">
+                <a:lnSpc>
+                  <a:spcPct val="90000"/>
+                </a:lnSpc>
+                <a:spcBef>
+                  <a:spcPts val="0"/>
+                </a:spcBef>
+                <a:spcAft>
+                  <a:spcPts val="0"/>
+                </a:spcAft>
+                <a:buClr>
+                  <a:srgbClr val="262626"/>
+                </a:buClr>
+                <a:buSzPts val="800"/>
+                <a:buFont typeface="Arial"/>
+                <a:buNone/>
+              </a:pPr>
+              <a:r>
+                <a:rPr lang="ja-JP" sz="800" b="1">
+                  <a:solidFill>
+                    <a:srgbClr val="262626"/>
+                  </a:solidFill>
+                  <a:latin typeface="Arial"/>
+                  <a:ea typeface="Arial"/>
+                  <a:cs typeface="Arial"/>
+                  <a:sym typeface="Arial"/>
+                </a:rPr>
+                <a:t>伸長</a:t>
+              </a:r>
+              <a:endParaRPr/>
+            </a:p>
+          </p:txBody>
+        </p:sp>
+      </p:grpSp>
+      <p:pic>
+        <p:nvPicPr>
+          <p:cNvPr id="62" name="Google Shape;62;p3" descr="LINE公式アカウントのロゴの使用方法とは？種類やダウンロード方法、利用時の注意点を紹介 | Mico（ミコ）"/>
+          <p:cNvPicPr preferRelativeResize="0"/>
+          <p:nvPr/>
+        </p:nvPicPr>
+        <p:blipFill rotWithShape="1">
+          <a:blip r:embed="rId2">
+            <a:alphaModFix/>
+          </a:blip>
+          <a:srcRect/>
+          <a:stretch/>
+        </p:blipFill>
+        <p:spPr>
+          <a:xfrm>
+            <a:off x="351381" y="1234746"/>
+            <a:ext cx="656177" cy="655521"/>
+          </a:xfrm>
+          <a:prstGeom prst="rect">
+            <a:avLst/>
+          </a:prstGeom>
+          <a:noFill/>
+          <a:ln>
+            <a:noFill/>
+          </a:ln>
+        </p:spPr>
+      </p:pic>
+      <p:sp>
+        <p:nvSpPr>
+          <p:cNvPr id="68" name="Rounded Rectangle 67"/>
+          <p:cNvSpPr/>
+          <p:nvPr/>
+        </p:nvSpPr>
+        <p:spPr>
+          <a:xfrm>
+            <a:off x="548640" y="3154680"/>
+            <a:ext cx="8814816" cy="3108960"/>
+          </a:xfrm>
+          <a:prstGeom prst="roundRect">
+            <a:avLst>
+              <a:gd name="adj" fmla="val 6000"/>
+            </a:avLst>
+          </a:prstGeom>
+          <a:solidFill>
+            <a:srgbClr val="EAF0FA"/>
+          </a:solidFill>
+          <a:ln w="12700">
+            <a:solidFill>
+              <a:srgbClr val="3467B2"/>
+            </a:solidFill>
+          </a:ln>
+          <a:effectLst/>
+        </p:spPr>
+        <p:style>
+          <a:lnRef idx="1">
+            <a:schemeClr val="accent1"/>
+          </a:lnRef>
+          <a:fillRef idx="3">
+            <a:schemeClr val="accent1"/>
+          </a:fillRef>
+          <a:effectRef idx="2">
+            <a:schemeClr val="accent1"/>
+          </a:effectRef>
+          <a:fontRef idx="minor">
+            <a:schemeClr val="lt1"/>
+          </a:fontRef>
+        </p:style>
+        <p:txBody>
+          <a:bodyPr wrap="square" lIns="228600" rIns="182880" rtlCol="0" anchor="ctr"/>
+          <a:lstStyle/>
+          <a:p>
+            <a:pPr algn="l"/>
+            <a:r>
+              <a:rPr sz="1900" b="1">
+                <a:solidFill>
+                  <a:srgbClr val="15133D"/>
+                </a:solidFill>
+                <a:latin typeface="メイリオ"/>
+              </a:rPr>
+              <a:t>審査で確認される4つの条件</a:t>
+            </a:r>
+          </a:p>
+          <a:p>
+            <a:pPr algn="l">
+              <a:lnSpc>
+                <a:spcPct val="115000"/>
+              </a:lnSpc>
+              <a:spcBef>
+                <a:spcPts val="1000"/>
+              </a:spcBef>
+            </a:pPr>
+            <a:r>
+              <a:rPr sz="1400" b="1">
+                <a:solidFill>
+                  <a:srgbClr val="15133D"/>
+                </a:solidFill>
+                <a:latin typeface="メイリオ"/>
+              </a:rPr>
+              <a:t>■ 遷移の方式：</a:t>
+            </a:r>
+            <a:r>
+              <a:rPr sz="1400">
+                <a:solidFill>
+                  <a:srgbClr val="333333"/>
+                </a:solidFill>
+                <a:latin typeface="メイリオ"/>
+              </a:rPr>
+              <a:t>iPhone／Androidの標準の仕組み（Universal links／App Links）でアプリを開くこと</a:t>
+            </a:r>
+          </a:p>
+          <a:p>
+            <a:pPr algn="l">
+              <a:lnSpc>
+                <a:spcPct val="115000"/>
+              </a:lnSpc>
+              <a:spcBef>
+                <a:spcPts val="1000"/>
+              </a:spcBef>
+            </a:pPr>
+            <a:r>
+              <a:rPr sz="1400" b="1">
+                <a:solidFill>
+                  <a:srgbClr val="15133D"/>
+                </a:solidFill>
+                <a:latin typeface="メイリオ"/>
+              </a:rPr>
+              <a:t>■ ドメインの一致：</a:t>
+            </a:r>
+            <a:r>
+              <a:rPr sz="1400">
+                <a:solidFill>
+                  <a:srgbClr val="333333"/>
+                </a:solidFill>
+                <a:latin typeface="メイリオ"/>
+              </a:rPr>
+              <a:t>送信元の公式ドメインと、遷移先URLのドメインが同じであること</a:t>
+            </a:r>
+          </a:p>
+          <a:p>
+            <a:pPr algn="l">
+              <a:lnSpc>
+                <a:spcPct val="115000"/>
+              </a:lnSpc>
+              <a:spcBef>
+                <a:spcPts val="1000"/>
+              </a:spcBef>
+            </a:pPr>
+            <a:r>
+              <a:rPr sz="1400" b="1">
+                <a:solidFill>
+                  <a:srgbClr val="15133D"/>
+                </a:solidFill>
+                <a:latin typeface="メイリオ"/>
+              </a:rPr>
+              <a:t>■ アプリ未インストール時：</a:t>
+            </a:r>
+            <a:r>
+              <a:rPr sz="1400">
+                <a:solidFill>
+                  <a:srgbClr val="333333"/>
+                </a:solidFill>
+                <a:latin typeface="メイリオ"/>
+              </a:rPr>
+              <a:t>通知内容に関連するWebページを表示すること（App Store／Google Playへの自動遷移は不可）</a:t>
+            </a:r>
+          </a:p>
+          <a:p>
+            <a:pPr algn="l">
+              <a:lnSpc>
+                <a:spcPct val="115000"/>
+              </a:lnSpc>
+              <a:spcBef>
+                <a:spcPts val="1000"/>
+              </a:spcBef>
+            </a:pPr>
+            <a:r>
+              <a:rPr sz="1400" b="1">
+                <a:solidFill>
+                  <a:srgbClr val="15133D"/>
+                </a:solidFill>
+                <a:latin typeface="メイリオ"/>
+              </a:rPr>
+              <a:t>■ 表示内容の一致：</a:t>
+            </a:r>
+            <a:r>
+              <a:rPr sz="1400">
+                <a:solidFill>
+                  <a:srgbClr val="333333"/>
+                </a:solidFill>
+                <a:latin typeface="メイリオ"/>
+              </a:rPr>
+              <a:t>アプリとWebで同じ内容を表示すること（アプリはマイページ・Webはトップページ、のような構成は不可）</a:t>
+            </a:r>
+          </a:p>
+        </p:txBody>
+      </p:sp>
+    </p:spTree>
+  </p:cSld>
+  <p:clrMapOvr>
+    <a:masterClrMapping/>
+  </p:clrMapOvr>
+</p:sld>
+</file>
+
+<file path=ppt/slides/slide5.xml><?xml version="1.0" encoding="utf-8"?>
 <p:sld xmlns:a="http://schemas.openxmlformats.org/drawingml/2006/main" xmlns:r="http://schemas.openxmlformats.org/officeDocument/2006/relationships" xmlns:p="http://schemas.openxmlformats.org/presentationml/2006/main">
   <p:cSld>
     <p:spTree>
@@ -8926,7 +10479,7 @@
 </p:sld>
 </file>
 
-<file path=ppt/slides/slide5.xml><?xml version="1.0" encoding="utf-8"?>
+<file path=ppt/slides/slide6.xml><?xml version="1.0" encoding="utf-8"?>
 <p:sld xmlns:a="http://schemas.openxmlformats.org/drawingml/2006/main" xmlns:r="http://schemas.openxmlformats.org/officeDocument/2006/relationships" xmlns:p="http://schemas.openxmlformats.org/presentationml/2006/main">
   <p:cSld>
     <p:spTree>
@@ -10637,7 +12190,7 @@
 </p:sld>
 </file>
 
-<file path=ppt/slides/slide6.xml><?xml version="1.0" encoding="utf-8"?>
+<file path=ppt/slides/slide7.xml><?xml version="1.0" encoding="utf-8"?>
 <p:sld xmlns:a="http://schemas.openxmlformats.org/drawingml/2006/main" xmlns:r="http://schemas.openxmlformats.org/officeDocument/2006/relationships" xmlns:p="http://schemas.openxmlformats.org/presentationml/2006/main">
   <p:cSld>
     <p:spTree>
@@ -12474,7 +14027,7 @@
 </p:sld>
 </file>
 
-<file path=ppt/slides/slide7.xml><?xml version="1.0" encoding="utf-8"?>
+<file path=ppt/slides/slide8.xml><?xml version="1.0" encoding="utf-8"?>
 <p:sld xmlns:a="http://schemas.openxmlformats.org/drawingml/2006/main" xmlns:r="http://schemas.openxmlformats.org/officeDocument/2006/relationships" xmlns:p="http://schemas.openxmlformats.org/presentationml/2006/main">
   <p:cSld>
     <p:spTree>
@@ -14563,7 +16116,7 @@
 </p:sld>
 </file>
 
-<file path=ppt/slides/slide8.xml><?xml version="1.0" encoding="utf-8"?>
+<file path=ppt/slides/slide9.xml><?xml version="1.0" encoding="utf-8"?>
 <p:sld xmlns:a="http://schemas.openxmlformats.org/drawingml/2006/main" xmlns:r="http://schemas.openxmlformats.org/officeDocument/2006/relationships" xmlns:p="http://schemas.openxmlformats.org/presentationml/2006/main">
   <p:cSld>
     <p:spTree>
@@ -16262,1694 +17815,6 @@
                 <a:latin typeface="メイリオ"/>
               </a:rPr>
               <a:t>OAMの申し込み導線・AGPお知らせ・飲食CMSお知らせにも掲載予定。</a:t>
-            </a:r>
-          </a:p>
-        </p:txBody>
-      </p:sp>
-    </p:spTree>
-  </p:cSld>
-  <p:clrMapOvr>
-    <a:masterClrMapping/>
-  </p:clrMapOvr>
-</p:sld>
-</file>
-
-<file path=ppt/slides/slide9.xml><?xml version="1.0" encoding="utf-8"?>
-<p:sld xmlns:a="http://schemas.openxmlformats.org/drawingml/2006/main" xmlns:r="http://schemas.openxmlformats.org/officeDocument/2006/relationships" xmlns:p="http://schemas.openxmlformats.org/presentationml/2006/main">
-  <p:cSld>
-    <p:spTree>
-      <p:nvGrpSpPr>
-        <p:cNvPr id="1" name=""/>
-        <p:cNvGrpSpPr/>
-        <p:nvPr/>
-      </p:nvGrpSpPr>
-      <p:grpSpPr>
-        <a:xfrm>
-          <a:off x="0" y="0"/>
-          <a:ext cx="0" cy="0"/>
-          <a:chOff x="0" y="0"/>
-          <a:chExt cx="0" cy="0"/>
-        </a:xfrm>
-      </p:grpSpPr>
-      <p:sp>
-        <p:nvSpPr>
-          <p:cNvPr id="40" name="Google Shape;40;p3"/>
-          <p:cNvSpPr/>
-          <p:nvPr/>
-        </p:nvSpPr>
-        <p:spPr>
-          <a:xfrm>
-            <a:off x="292801" y="730955"/>
-            <a:ext cx="1296144" cy="435690"/>
-          </a:xfrm>
-          <a:prstGeom prst="rect">
-            <a:avLst/>
-          </a:prstGeom>
-          <a:solidFill>
-            <a:schemeClr val="dk2"/>
-          </a:solidFill>
-          <a:ln w="9525" cap="flat" cmpd="sng">
-            <a:solidFill>
-              <a:srgbClr val="4A7DBA"/>
-            </a:solidFill>
-            <a:prstDash val="solid"/>
-            <a:round/>
-            <a:headEnd type="none" w="sm" len="sm"/>
-            <a:tailEnd type="none" w="sm" len="sm"/>
-          </a:ln>
-        </p:spPr>
-        <p:txBody>
-          <a:bodyPr spcFirstLastPara="1" wrap="square" lIns="91425" tIns="45700" rIns="91425" bIns="45700" anchor="ctr" anchorCtr="0">
-            <a:noAutofit/>
-          </a:bodyPr>
-          <a:lstStyle/>
-          <a:p>
-            <a:pPr marL="0" marR="0" lvl="0" indent="0" algn="ctr" rtl="0">
-              <a:spcBef>
-                <a:spcPts val="0"/>
-              </a:spcBef>
-              <a:spcAft>
-                <a:spcPts val="0"/>
-              </a:spcAft>
-              <a:buNone/>
-            </a:pPr>
-            <a:r>
-              <a:rPr lang="ja-JP" sz="1800" b="0" i="0" u="none" strike="noStrike" cap="none">
-                <a:solidFill>
-                  <a:schemeClr val="lt1"/>
-                </a:solidFill>
-                <a:latin typeface="メイリオ"/>
-                <a:ea typeface="Meiryo"/>
-                <a:cs typeface="Meiryo"/>
-                <a:sym typeface="Meiryo"/>
-              </a:rPr>
-              <a:t>対象業界</a:t>
-            </a:r>
-            <a:endParaRPr/>
-          </a:p>
-        </p:txBody>
-      </p:sp>
-      <p:sp>
-        <p:nvSpPr>
-          <p:cNvPr id="41" name="Google Shape;41;p3"/>
-          <p:cNvSpPr/>
-          <p:nvPr/>
-        </p:nvSpPr>
-        <p:spPr>
-          <a:xfrm>
-            <a:off x="7560840" y="730955"/>
-            <a:ext cx="829618" cy="435690"/>
-          </a:xfrm>
-          <a:prstGeom prst="rect">
-            <a:avLst/>
-          </a:prstGeom>
-          <a:solidFill>
-            <a:schemeClr val="bg1"/>
-          </a:solidFill>
-          <a:ln w="9525" cap="flat" cmpd="sng">
-            <a:solidFill>
-              <a:srgbClr val="4F81BD"/>
-            </a:solidFill>
-            <a:prstDash val="sysDash"/>
-            <a:round/>
-            <a:headEnd type="none" w="sm" len="sm"/>
-            <a:tailEnd type="none" w="sm" len="sm"/>
-          </a:ln>
-        </p:spPr>
-        <p:txBody>
-          <a:bodyPr spcFirstLastPara="1" wrap="square" lIns="91425" tIns="45700" rIns="91425" bIns="45700" anchor="ctr" anchorCtr="0">
-            <a:noAutofit/>
-          </a:bodyPr>
-          <a:lstStyle/>
-          <a:p>
-            <a:pPr marL="0" marR="0" lvl="0" indent="0" algn="ctr" rtl="0">
-              <a:spcBef>
-                <a:spcPts val="0"/>
-              </a:spcBef>
-              <a:spcAft>
-                <a:spcPts val="0"/>
-              </a:spcAft>
-              <a:buNone/>
-            </a:pPr>
-            <a:r>
-              <a:rPr lang="ja-JP" sz="1200" b="0" i="0" u="none" strike="noStrike" cap="none">
-                <a:solidFill>
-                  <a:schemeClr val="dk1"/>
-                </a:solidFill>
-                <a:latin typeface="メイリオ"/>
-                <a:ea typeface="Meiryo"/>
-                <a:cs typeface="Meiryo"/>
-                <a:sym typeface="Meiryo"/>
-              </a:rPr>
-              <a:t>その他</a:t>
-            </a:r>
-            <a:endParaRPr sz="1200" b="0" i="0" u="none" strike="noStrike" cap="none">
-              <a:solidFill>
-                <a:schemeClr val="dk1"/>
-              </a:solidFill>
-              <a:latin typeface="Meiryo"/>
-              <a:ea typeface="Meiryo"/>
-              <a:cs typeface="Meiryo"/>
-              <a:sym typeface="Meiryo"/>
-            </a:endParaRPr>
-          </a:p>
-        </p:txBody>
-      </p:sp>
-      <p:sp>
-        <p:nvSpPr>
-          <p:cNvPr id="42" name="Google Shape;42;p3"/>
-          <p:cNvSpPr/>
-          <p:nvPr/>
-        </p:nvSpPr>
-        <p:spPr>
-          <a:xfrm>
-            <a:off x="6679050" y="730955"/>
-            <a:ext cx="829618" cy="435690"/>
-          </a:xfrm>
-          <a:prstGeom prst="rect">
-            <a:avLst/>
-          </a:prstGeom>
-          <a:solidFill>
-            <a:schemeClr val="tx2"/>
-          </a:solidFill>
-          <a:ln w="9525" cap="flat" cmpd="sng">
-            <a:solidFill>
-              <a:srgbClr val="4F81BD"/>
-            </a:solidFill>
-            <a:prstDash val="solid"/>
-            <a:round/>
-            <a:headEnd type="none" w="sm" len="sm"/>
-            <a:tailEnd type="none" w="sm" len="sm"/>
-          </a:ln>
-        </p:spPr>
-        <p:txBody>
-          <a:bodyPr spcFirstLastPara="1" wrap="square" lIns="91425" tIns="45700" rIns="91425" bIns="45700" anchor="ctr" anchorCtr="0">
-            <a:noAutofit/>
-          </a:bodyPr>
-          <a:lstStyle/>
-          <a:p>
-            <a:pPr marL="0" marR="0" lvl="0" indent="0" algn="ctr" rtl="0">
-              <a:spcBef>
-                <a:spcPts val="0"/>
-              </a:spcBef>
-              <a:spcAft>
-                <a:spcPts val="0"/>
-              </a:spcAft>
-              <a:buNone/>
-            </a:pPr>
-            <a:r>
-              <a:rPr lang="ja-JP" sz="1000" b="0" i="0" u="none" strike="noStrike" cap="none">
-                <a:solidFill>
-                  <a:schemeClr val="dk1"/>
-                </a:solidFill>
-                <a:latin typeface="メイリオ"/>
-                <a:ea typeface="Meiryo"/>
-                <a:cs typeface="Meiryo"/>
-                <a:sym typeface="Meiryo"/>
-              </a:rPr>
-              <a:t>オプション</a:t>
-            </a:r>
-            <a:endParaRPr sz="1000" b="0" i="0" u="none" strike="noStrike" cap="none">
-              <a:solidFill>
-                <a:schemeClr val="dk1"/>
-              </a:solidFill>
-              <a:latin typeface="Meiryo"/>
-              <a:ea typeface="Meiryo"/>
-              <a:cs typeface="Meiryo"/>
-              <a:sym typeface="Meiryo"/>
-            </a:endParaRPr>
-          </a:p>
-          <a:p>
-            <a:pPr marL="0" marR="0" lvl="0" indent="0" algn="ctr" rtl="0">
-              <a:spcBef>
-                <a:spcPts val="0"/>
-              </a:spcBef>
-              <a:spcAft>
-                <a:spcPts val="0"/>
-              </a:spcAft>
-              <a:buNone/>
-            </a:pPr>
-            <a:r>
-              <a:rPr lang="ja-JP" sz="1000" b="0" i="0" u="none" strike="noStrike" cap="none">
-                <a:solidFill>
-                  <a:schemeClr val="dk1"/>
-                </a:solidFill>
-                <a:latin typeface="メイリオ"/>
-                <a:ea typeface="Meiryo"/>
-                <a:cs typeface="Meiryo"/>
-                <a:sym typeface="Meiryo"/>
-              </a:rPr>
-              <a:t>商材</a:t>
-            </a:r>
-            <a:endParaRPr/>
-          </a:p>
-        </p:txBody>
-      </p:sp>
-      <p:sp>
-        <p:nvSpPr>
-          <p:cNvPr id="43" name="Google Shape;43;p3"/>
-          <p:cNvSpPr/>
-          <p:nvPr/>
-        </p:nvSpPr>
-        <p:spPr>
-          <a:xfrm>
-            <a:off x="1594068" y="730955"/>
-            <a:ext cx="2926883" cy="435690"/>
-          </a:xfrm>
-          <a:prstGeom prst="rect">
-            <a:avLst/>
-          </a:prstGeom>
-          <a:noFill/>
-          <a:ln w="9525" cap="flat" cmpd="sng">
-            <a:solidFill>
-              <a:srgbClr val="4A7DBA"/>
-            </a:solidFill>
-            <a:prstDash val="solid"/>
-            <a:round/>
-            <a:headEnd type="none" w="sm" len="sm"/>
-            <a:tailEnd type="none" w="sm" len="sm"/>
-          </a:ln>
-        </p:spPr>
-        <p:txBody>
-          <a:bodyPr spcFirstLastPara="1" wrap="square" lIns="91425" tIns="45700" rIns="91425" bIns="45700" anchor="ctr" anchorCtr="0">
-            <a:noAutofit/>
-          </a:bodyPr>
-          <a:lstStyle/>
-          <a:p>
-            <a:pPr marL="0" marR="0" lvl="0" indent="0" algn="ctr" rtl="0">
-              <a:spcBef>
-                <a:spcPts val="0"/>
-              </a:spcBef>
-              <a:spcAft>
-                <a:spcPts val="0"/>
-              </a:spcAft>
-              <a:buNone/>
-            </a:pPr>
-            <a:r>
-              <a:rPr lang="ja-JP" sz="1300" b="0" i="0" u="none" strike="noStrike" cap="none">
-                <a:solidFill>
-                  <a:schemeClr val="dk1"/>
-                </a:solidFill>
-                <a:latin typeface="メイリオ"/>
-                <a:ea typeface="Meiryo"/>
-                <a:cs typeface="Meiryo"/>
-                <a:sym typeface="Meiryo"/>
-              </a:rPr>
-              <a:t>小売・アパレル・教育・サービス業</a:t>
-            </a:r>
-            <a:endParaRPr/>
-          </a:p>
-        </p:txBody>
-      </p:sp>
-      <p:sp>
-        <p:nvSpPr>
-          <p:cNvPr id="44" name="Google Shape;44;p3"/>
-          <p:cNvSpPr txBox="1"/>
-          <p:nvPr/>
-        </p:nvSpPr>
-        <p:spPr>
-          <a:xfrm>
-            <a:off x="3296816" y="6597352"/>
-            <a:ext cx="6209091" cy="215444"/>
-          </a:xfrm>
-          <a:prstGeom prst="rect">
-            <a:avLst/>
-          </a:prstGeom>
-          <a:noFill/>
-          <a:ln>
-            <a:noFill/>
-          </a:ln>
-        </p:spPr>
-        <p:txBody>
-          <a:bodyPr spcFirstLastPara="1" wrap="square" lIns="91425" tIns="45700" rIns="91425" bIns="45700" anchor="t" anchorCtr="0">
-            <a:spAutoFit/>
-          </a:bodyPr>
-          <a:lstStyle/>
-          <a:p>
-            <a:pPr marL="0" marR="0" lvl="0" indent="0" algn="l" rtl="0">
-              <a:spcBef>
-                <a:spcPts val="0"/>
-              </a:spcBef>
-              <a:spcAft>
-                <a:spcPts val="0"/>
-              </a:spcAft>
-              <a:buNone/>
-            </a:pPr>
-            <a:r>
-              <a:rPr lang="ja-JP" sz="800" b="0" i="0" u="none" strike="noStrike" cap="none">
-                <a:solidFill>
-                  <a:schemeClr val="lt1"/>
-                </a:solidFill>
-                <a:latin typeface="メイリオ"/>
-                <a:ea typeface="Meiryo"/>
-                <a:cs typeface="Meiryo"/>
-                <a:sym typeface="Meiryo"/>
-              </a:rPr>
-              <a:t>出典：代理店情報</a:t>
-            </a:r>
-            <a:endParaRPr sz="800">
-              <a:solidFill>
-                <a:schemeClr val="lt1"/>
-              </a:solidFill>
-              <a:latin typeface="Meiryo"/>
-              <a:ea typeface="Meiryo"/>
-              <a:cs typeface="Meiryo"/>
-              <a:sym typeface="Meiryo"/>
-            </a:endParaRPr>
-          </a:p>
-        </p:txBody>
-      </p:sp>
-      <p:sp>
-        <p:nvSpPr>
-          <p:cNvPr id="45" name="Google Shape;45;p3"/>
-          <p:cNvSpPr/>
-          <p:nvPr/>
-        </p:nvSpPr>
-        <p:spPr>
-          <a:xfrm>
-            <a:off x="0" y="1234746"/>
-            <a:ext cx="9906000" cy="672259"/>
-          </a:xfrm>
-          <a:prstGeom prst="rect">
-            <a:avLst/>
-          </a:prstGeom>
-          <a:solidFill>
-            <a:srgbClr val="C5D8F1"/>
-          </a:solidFill>
-          <a:ln>
-            <a:noFill/>
-          </a:ln>
-        </p:spPr>
-        <p:txBody>
-          <a:bodyPr spcFirstLastPara="1" wrap="square" lIns="91425" tIns="45700" rIns="91425" bIns="45700" anchor="ctr" anchorCtr="0">
-            <a:noAutofit/>
-          </a:bodyPr>
-          <a:lstStyle/>
-          <a:p>
-            <a:pPr marL="0" marR="0" lvl="0" indent="0" algn="ctr" rtl="0">
-              <a:spcBef>
-                <a:spcPts val="0"/>
-              </a:spcBef>
-              <a:spcAft>
-                <a:spcPts val="0"/>
-              </a:spcAft>
-              <a:buNone/>
-            </a:pPr>
-            <a:r>
-              <a:rPr lang="ja-JP" sz="1600" b="1">
-                <a:solidFill>
-                  <a:srgbClr val="004DE6"/>
-                </a:solidFill>
-                <a:latin typeface="メイリオ"/>
-                <a:ea typeface="Meiryo"/>
-                <a:cs typeface="Meiryo"/>
-                <a:sym typeface="Meiryo"/>
-              </a:rPr>
-              <a:t>　　　　　　</a:t>
-            </a:r>
-            <a:endParaRPr sz="1800" b="1">
-              <a:solidFill>
-                <a:srgbClr val="004DE6"/>
-              </a:solidFill>
-              <a:latin typeface="Meiryo"/>
-              <a:ea typeface="Meiryo"/>
-              <a:cs typeface="Meiryo"/>
-              <a:sym typeface="Meiryo"/>
-            </a:endParaRPr>
-          </a:p>
-        </p:txBody>
-      </p:sp>
-      <p:sp>
-        <p:nvSpPr>
-          <p:cNvPr id="46" name="Google Shape;46;p3"/>
-          <p:cNvSpPr/>
-          <p:nvPr/>
-        </p:nvSpPr>
-        <p:spPr>
-          <a:xfrm>
-            <a:off x="1089832" y="1437370"/>
-            <a:ext cx="7031520" cy="338554"/>
-          </a:xfrm>
-          <a:prstGeom prst="rect">
-            <a:avLst/>
-          </a:prstGeom>
-          <a:noFill/>
-          <a:ln>
-            <a:noFill/>
-          </a:ln>
-        </p:spPr>
-        <p:txBody>
-          <a:bodyPr spcFirstLastPara="1" wrap="square" lIns="91425" tIns="45700" rIns="91425" bIns="45700" anchor="t" anchorCtr="0">
-            <a:spAutoFit/>
-          </a:bodyPr>
-          <a:lstStyle/>
-          <a:p>
-            <a:pPr marL="0" marR="0" lvl="0" indent="0" algn="l" rtl="0">
-              <a:spcBef>
-                <a:spcPts val="0"/>
-              </a:spcBef>
-              <a:spcAft>
-                <a:spcPts val="0"/>
-              </a:spcAft>
-              <a:buNone/>
-            </a:pPr>
-            <a:r>
-              <a:rPr lang="ja-JP" sz="1600" b="1">
-                <a:solidFill>
-                  <a:srgbClr val="004DE6"/>
-                </a:solidFill>
-                <a:latin typeface="メイリオ"/>
-                <a:ea typeface="Meiryo"/>
-                <a:cs typeface="Meiryo"/>
-                <a:sym typeface="Meiryo"/>
-              </a:rPr>
-              <a:t>【CRMオプション】導入事例の追加</a:t>
-            </a:r>
-            <a:endParaRPr sz="1600" b="1">
-              <a:solidFill>
-                <a:srgbClr val="004DE6"/>
-              </a:solidFill>
-              <a:latin typeface="Meiryo"/>
-              <a:ea typeface="Meiryo"/>
-              <a:cs typeface="Meiryo"/>
-              <a:sym typeface="Meiryo"/>
-            </a:endParaRPr>
-          </a:p>
-        </p:txBody>
-      </p:sp>
-      <p:sp>
-        <p:nvSpPr>
-          <p:cNvPr id="47" name="Google Shape;47;p3"/>
-          <p:cNvSpPr txBox="1"/>
-          <p:nvPr/>
-        </p:nvSpPr>
-        <p:spPr>
-          <a:xfrm>
-            <a:off x="182880" y="88175"/>
-            <a:ext cx="7512385" cy="365091"/>
-          </a:xfrm>
-          <a:prstGeom prst="rect">
-            <a:avLst/>
-          </a:prstGeom>
-          <a:noFill/>
-          <a:ln>
-            <a:noFill/>
-          </a:ln>
-        </p:spPr>
-        <p:txBody>
-          <a:bodyPr spcFirstLastPara="1" wrap="square" lIns="91425" tIns="72000" rIns="91425" bIns="45700" anchor="t" anchorCtr="0">
-            <a:spAutoFit/>
-          </a:bodyPr>
-          <a:lstStyle/>
-          <a:p>
-            <a:pPr marL="0" marR="0" lvl="0" indent="0" algn="l" rtl="0">
-              <a:spcBef>
-                <a:spcPts val="0"/>
-              </a:spcBef>
-              <a:spcAft>
-                <a:spcPts val="0"/>
-              </a:spcAft>
-              <a:buClr>
-                <a:schemeClr val="dk1"/>
-              </a:buClr>
-              <a:buSzPts val="1600"/>
-              <a:buFont typeface="Arial"/>
-              <a:buNone/>
-            </a:pPr>
-            <a:r>
-              <a:rPr lang="ja-JP" sz="1600" b="0" u="none">
-                <a:solidFill>
-                  <a:schemeClr val="dk1"/>
-                </a:solidFill>
-                <a:latin typeface="メイリオ"/>
-                <a:ea typeface="Meiryo"/>
-                <a:cs typeface="Meiryo"/>
-                <a:sym typeface="Meiryo"/>
-              </a:rPr>
-              <a:t>    今後のアップデート情報</a:t>
-            </a:r>
-            <a:endParaRPr sz="1600" b="0" u="none">
-              <a:solidFill>
-                <a:schemeClr val="dk1"/>
-              </a:solidFill>
-              <a:latin typeface="Meiryo"/>
-              <a:ea typeface="Meiryo"/>
-              <a:cs typeface="Meiryo"/>
-              <a:sym typeface="Meiryo"/>
-            </a:endParaRPr>
-          </a:p>
-        </p:txBody>
-      </p:sp>
-      <p:sp>
-        <p:nvSpPr>
-          <p:cNvPr id="48" name="Google Shape;48;p3"/>
-          <p:cNvSpPr/>
-          <p:nvPr/>
-        </p:nvSpPr>
-        <p:spPr>
-          <a:xfrm>
-            <a:off x="5797260" y="730955"/>
-            <a:ext cx="829618" cy="435690"/>
-          </a:xfrm>
-          <a:prstGeom prst="rect">
-            <a:avLst/>
-          </a:prstGeom>
-          <a:solidFill>
-            <a:schemeClr val="bg1"/>
-          </a:solidFill>
-          <a:ln w="9525" cap="flat" cmpd="sng">
-            <a:solidFill>
-              <a:srgbClr val="4F81BD"/>
-            </a:solidFill>
-            <a:prstDash val="sysDash"/>
-            <a:round/>
-            <a:headEnd type="none" w="sm" len="sm"/>
-            <a:tailEnd type="none" w="sm" len="sm"/>
-          </a:ln>
-        </p:spPr>
-        <p:txBody>
-          <a:bodyPr spcFirstLastPara="1" wrap="square" lIns="91425" tIns="45700" rIns="91425" bIns="45700" anchor="ctr" anchorCtr="0">
-            <a:noAutofit/>
-          </a:bodyPr>
-          <a:lstStyle/>
-          <a:p>
-            <a:pPr marL="0" marR="0" lvl="0" indent="0" algn="ctr" rtl="0">
-              <a:spcBef>
-                <a:spcPts val="0"/>
-              </a:spcBef>
-              <a:spcAft>
-                <a:spcPts val="0"/>
-              </a:spcAft>
-              <a:buClr>
-                <a:schemeClr val="dk1"/>
-              </a:buClr>
-              <a:buSzPts val="1000"/>
-              <a:buFont typeface="Meiryo"/>
-              <a:buNone/>
-            </a:pPr>
-            <a:r>
-              <a:rPr lang="ja-JP" sz="1000">
-                <a:solidFill>
-                  <a:schemeClr val="dk1"/>
-                </a:solidFill>
-                <a:latin typeface="メイリオ"/>
-                <a:ea typeface="Meiryo"/>
-                <a:cs typeface="Meiryo"/>
-                <a:sym typeface="Meiryo"/>
-              </a:rPr>
-              <a:t>開発</a:t>
-            </a:r>
-            <a:endParaRPr sz="1000">
-              <a:solidFill>
-                <a:schemeClr val="dk1"/>
-              </a:solidFill>
-              <a:latin typeface="Meiryo"/>
-              <a:ea typeface="Meiryo"/>
-              <a:cs typeface="Meiryo"/>
-              <a:sym typeface="Meiryo"/>
-            </a:endParaRPr>
-          </a:p>
-          <a:p>
-            <a:pPr marL="0" marR="0" lvl="0" indent="0" algn="ctr" rtl="0">
-              <a:spcBef>
-                <a:spcPts val="0"/>
-              </a:spcBef>
-              <a:spcAft>
-                <a:spcPts val="0"/>
-              </a:spcAft>
-              <a:buClr>
-                <a:schemeClr val="dk1"/>
-              </a:buClr>
-              <a:buSzPts val="1000"/>
-              <a:buFont typeface="Meiryo"/>
-              <a:buNone/>
-            </a:pPr>
-            <a:r>
-              <a:rPr lang="ja-JP" sz="1000">
-                <a:solidFill>
-                  <a:schemeClr val="dk1"/>
-                </a:solidFill>
-                <a:latin typeface="メイリオ"/>
-                <a:ea typeface="Meiryo"/>
-                <a:cs typeface="Meiryo"/>
-                <a:sym typeface="Meiryo"/>
-              </a:rPr>
-              <a:t>LINE API</a:t>
-            </a:r>
-            <a:endParaRPr sz="1000">
-              <a:solidFill>
-                <a:schemeClr val="dk1"/>
-              </a:solidFill>
-              <a:latin typeface="Meiryo"/>
-              <a:ea typeface="Meiryo"/>
-              <a:cs typeface="Meiryo"/>
-              <a:sym typeface="Meiryo"/>
-            </a:endParaRPr>
-          </a:p>
-        </p:txBody>
-      </p:sp>
-      <p:sp>
-        <p:nvSpPr>
-          <p:cNvPr id="49" name="Google Shape;49;p3"/>
-          <p:cNvSpPr/>
-          <p:nvPr/>
-        </p:nvSpPr>
-        <p:spPr>
-          <a:xfrm>
-            <a:off x="4915470" y="730955"/>
-            <a:ext cx="829618" cy="435690"/>
-          </a:xfrm>
-          <a:prstGeom prst="rect">
-            <a:avLst/>
-          </a:prstGeom>
-          <a:solidFill>
-            <a:schemeClr val="bg1"/>
-          </a:solidFill>
-          <a:ln w="9525" cap="flat" cmpd="sng">
-            <a:solidFill>
-              <a:srgbClr val="4F81BD"/>
-            </a:solidFill>
-            <a:prstDash val="sysDash"/>
-            <a:round/>
-            <a:headEnd type="none" w="sm" len="sm"/>
-            <a:tailEnd type="none" w="sm" len="sm"/>
-          </a:ln>
-        </p:spPr>
-        <p:txBody>
-          <a:bodyPr spcFirstLastPara="1" wrap="square" lIns="91425" tIns="45700" rIns="91425" bIns="45700" anchor="ctr" anchorCtr="0">
-            <a:noAutofit/>
-          </a:bodyPr>
-          <a:lstStyle/>
-          <a:p>
-            <a:pPr marL="0" marR="0" lvl="0" indent="0" algn="ctr" rtl="0">
-              <a:spcBef>
-                <a:spcPts val="0"/>
-              </a:spcBef>
-              <a:spcAft>
-                <a:spcPts val="0"/>
-              </a:spcAft>
-              <a:buNone/>
-            </a:pPr>
-            <a:r>
-              <a:rPr lang="ja-JP" sz="1000">
-                <a:solidFill>
-                  <a:schemeClr val="dk1"/>
-                </a:solidFill>
-                <a:latin typeface="メイリオ"/>
-                <a:ea typeface="Meiryo"/>
-                <a:cs typeface="Meiryo"/>
-                <a:sym typeface="Meiryo"/>
-              </a:rPr>
-              <a:t>LINE公式アカウント</a:t>
-            </a:r>
-            <a:endParaRPr sz="1000">
-              <a:solidFill>
-                <a:schemeClr val="dk1"/>
-              </a:solidFill>
-              <a:latin typeface="Meiryo"/>
-              <a:ea typeface="Meiryo"/>
-              <a:cs typeface="Meiryo"/>
-              <a:sym typeface="Meiryo"/>
-            </a:endParaRPr>
-          </a:p>
-        </p:txBody>
-      </p:sp>
-      <p:sp>
-        <p:nvSpPr>
-          <p:cNvPr id="50" name="Google Shape;50;p3"/>
-          <p:cNvSpPr/>
-          <p:nvPr/>
-        </p:nvSpPr>
-        <p:spPr>
-          <a:xfrm>
-            <a:off x="0" y="1890267"/>
-            <a:ext cx="9906000" cy="733579"/>
-          </a:xfrm>
-          <a:prstGeom prst="rect">
-            <a:avLst/>
-          </a:prstGeom>
-          <a:solidFill>
-            <a:srgbClr val="F2F2F2"/>
-          </a:solidFill>
-          <a:ln>
-            <a:noFill/>
-          </a:ln>
-        </p:spPr>
-        <p:txBody>
-          <a:bodyPr spcFirstLastPara="1" wrap="square" lIns="91425" tIns="45700" rIns="91425" bIns="45700" anchor="ctr" anchorCtr="0">
-            <a:noAutofit/>
-          </a:bodyPr>
-          <a:lstStyle/>
-          <a:p>
-            <a:pPr marL="0" marR="0" lvl="0" indent="0" algn="ctr" rtl="0">
-              <a:spcBef>
-                <a:spcPts val="0"/>
-              </a:spcBef>
-              <a:spcAft>
-                <a:spcPts val="0"/>
-              </a:spcAft>
-              <a:buNone/>
-            </a:pPr>
-            <a:endParaRPr sz="1200">
-              <a:solidFill>
-                <a:schemeClr val="dk1"/>
-              </a:solidFill>
-              <a:latin typeface="Meiryo"/>
-              <a:ea typeface="Meiryo"/>
-              <a:cs typeface="Meiryo"/>
-              <a:sym typeface="Meiryo"/>
-            </a:endParaRPr>
-          </a:p>
-        </p:txBody>
-      </p:sp>
-      <p:sp>
-        <p:nvSpPr>
-          <p:cNvPr id="51" name="Google Shape;51;p3"/>
-          <p:cNvSpPr/>
-          <p:nvPr/>
-        </p:nvSpPr>
-        <p:spPr>
-          <a:xfrm>
-            <a:off x="544108" y="1961282"/>
-            <a:ext cx="8817783" cy="646331"/>
-          </a:xfrm>
-          <a:prstGeom prst="rect">
-            <a:avLst/>
-          </a:prstGeom>
-          <a:noFill/>
-          <a:ln>
-            <a:noFill/>
-          </a:ln>
-        </p:spPr>
-        <p:txBody>
-          <a:bodyPr spcFirstLastPara="1" wrap="square" lIns="91425" tIns="45700" rIns="91425" bIns="45700" anchor="t" anchorCtr="0">
-            <a:spAutoFit/>
-          </a:bodyPr>
-          <a:lstStyle/>
-          <a:p>
-            <a:pPr marL="0" marR="0" lvl="0" indent="0" algn="ctr" rtl="0">
-              <a:spcBef>
-                <a:spcPts val="0"/>
-              </a:spcBef>
-              <a:spcAft>
-                <a:spcPts val="0"/>
-              </a:spcAft>
-              <a:buNone/>
-            </a:pPr>
-            <a:r>
-              <a:rPr lang="ja-JP" sz="1200" b="1">
-                <a:solidFill>
-                  <a:schemeClr val="dk1"/>
-                </a:solidFill>
-                <a:latin typeface="メイリオ"/>
-                <a:ea typeface="Meiryo"/>
-                <a:cs typeface="Meiryo"/>
-                <a:sym typeface="Meiryo"/>
-              </a:rPr>
-              <a:t>CRMオプションの導入事例（タオル美術館様）が、媒体資料Ver2.0に追加された。</a:t>
-            </a:r>
-            <a:endParaRPr sz="1200" b="1">
-              <a:solidFill>
-                <a:schemeClr val="dk1"/>
-              </a:solidFill>
-              <a:latin typeface="Meiryo"/>
-              <a:ea typeface="Meiryo"/>
-              <a:cs typeface="Meiryo"/>
-              <a:sym typeface="Meiryo"/>
-            </a:endParaRPr>
-          </a:p>
-          <a:p>
-            <a:pPr marL="0" marR="0" lvl="0" indent="0" algn="ctr" rtl="0">
-              <a:spcBef>
-                <a:spcPts val="0"/>
-              </a:spcBef>
-              <a:spcAft>
-                <a:spcPts val="0"/>
-              </a:spcAft>
-              <a:buNone/>
-            </a:pPr>
-            <a:r>
-              <a:rPr lang="ja-JP" sz="1200" b="1">
-                <a:solidFill>
-                  <a:schemeClr val="dk1"/>
-                </a:solidFill>
-                <a:latin typeface="メイリオ"/>
-                <a:ea typeface="Meiryo"/>
-                <a:cs typeface="Meiryo"/>
-                <a:sym typeface="Meiryo"/>
-              </a:rPr>
-              <a:t>誕生月を聞くフォームで回答数が約2.0倍、</a:t>
-            </a:r>
-            <a:endParaRPr/>
-          </a:p>
-          <a:p>
-            <a:pPr marL="0" marR="0" lvl="0" indent="0" algn="ctr" rtl="0">
-              <a:spcBef>
-                <a:spcPts val="0"/>
-              </a:spcBef>
-              <a:spcAft>
-                <a:spcPts val="0"/>
-              </a:spcAft>
-              <a:buNone/>
-            </a:pPr>
-            <a:r>
-              <a:rPr lang="ja-JP" sz="1200" b="1">
-                <a:solidFill>
-                  <a:schemeClr val="dk1"/>
-                </a:solidFill>
-                <a:latin typeface="メイリオ"/>
-                <a:ea typeface="Meiryo"/>
-                <a:cs typeface="Meiryo"/>
-                <a:sym typeface="Meiryo"/>
-              </a:rPr>
-              <a:t>好きなキャラクターに合わせた出し分け配信でクリック率が約2.8倍に。</a:t>
-            </a:r>
-            <a:endParaRPr sz="1400" b="1">
-              <a:solidFill>
-                <a:schemeClr val="dk1"/>
-              </a:solidFill>
-              <a:latin typeface="Meiryo"/>
-              <a:ea typeface="Meiryo"/>
-              <a:cs typeface="Meiryo"/>
-              <a:sym typeface="Meiryo"/>
-            </a:endParaRPr>
-          </a:p>
-        </p:txBody>
-      </p:sp>
-      <p:sp>
-        <p:nvSpPr>
-          <p:cNvPr id="52" name="Google Shape;52;p3"/>
-          <p:cNvSpPr/>
-          <p:nvPr/>
-        </p:nvSpPr>
-        <p:spPr>
-          <a:xfrm>
-            <a:off x="351381" y="2714173"/>
-            <a:ext cx="5200000" cy="338554"/>
-          </a:xfrm>
-          <a:prstGeom prst="rect">
-            <a:avLst/>
-          </a:prstGeom>
-          <a:noFill/>
-          <a:ln>
-            <a:noFill/>
-          </a:ln>
-        </p:spPr>
-        <p:txBody>
-          <a:bodyPr spcFirstLastPara="1" wrap="square" lIns="91425" tIns="45700" rIns="91425" bIns="45700" anchor="t" anchorCtr="0">
-            <a:noAutofit/>
-          </a:bodyPr>
-          <a:lstStyle/>
-          <a:p>
-            <a:pPr marL="0" marR="0" lvl="0" indent="0" algn="l" rtl="0">
-              <a:spcBef>
-                <a:spcPts val="0"/>
-              </a:spcBef>
-              <a:spcAft>
-                <a:spcPts val="0"/>
-              </a:spcAft>
-              <a:buNone/>
-            </a:pPr>
-            <a:r>
-              <a:rPr lang="ja-JP" sz="1400" b="1">
-                <a:solidFill>
-                  <a:srgbClr val="15133D"/>
-                </a:solidFill>
-                <a:latin typeface="メイリオ"/>
-                <a:ea typeface="Meiryo"/>
-                <a:cs typeface="Meiryo"/>
-                <a:sym typeface="Meiryo"/>
-              </a:rPr>
-              <a:t>■ 詳細</a:t>
-            </a:r>
-            <a:endParaRPr/>
-          </a:p>
-        </p:txBody>
-      </p:sp>
-      <p:grpSp>
-        <p:nvGrpSpPr>
-          <p:cNvPr id="53" name="Google Shape;53;p3"/>
-          <p:cNvGrpSpPr/>
-          <p:nvPr/>
-        </p:nvGrpSpPr>
-        <p:grpSpPr>
-          <a:xfrm>
-            <a:off x="8473303" y="730955"/>
-            <a:ext cx="1376241" cy="1131930"/>
-            <a:chOff x="0" y="0"/>
-            <a:chExt cx="1376241" cy="1131930"/>
-          </a:xfrm>
-        </p:grpSpPr>
-        <p:sp>
-          <p:nvSpPr>
-            <p:cNvPr id="54" name="Google Shape;54;p3"/>
-            <p:cNvSpPr/>
-            <p:nvPr/>
-          </p:nvSpPr>
-          <p:spPr>
-            <a:xfrm rot="10800000">
-              <a:off x="0" y="0"/>
-              <a:ext cx="1376241" cy="282982"/>
-            </a:xfrm>
-            <a:prstGeom prst="trapezoid">
-              <a:avLst>
-                <a:gd name="adj" fmla="val 60792"/>
-              </a:avLst>
-            </a:prstGeom>
-            <a:solidFill>
-              <a:srgbClr val="EAEDF5"/>
-            </a:solidFill>
-            <a:ln w="25400" cap="flat" cmpd="sng">
-              <a:solidFill>
-                <a:schemeClr val="dk2"/>
-              </a:solidFill>
-              <a:prstDash val="solid"/>
-              <a:round/>
-              <a:headEnd type="none" w="sm" len="sm"/>
-              <a:tailEnd type="none" w="sm" len="sm"/>
-            </a:ln>
-          </p:spPr>
-          <p:txBody>
-            <a:bodyPr spcFirstLastPara="1" wrap="square" lIns="91425" tIns="91425" rIns="91425" bIns="91425" anchor="ctr" anchorCtr="0">
-              <a:noAutofit/>
-            </a:bodyPr>
-            <a:lstStyle/>
-            <a:p>
-              <a:pPr marL="0" lvl="0" indent="0" algn="l" rtl="0">
-                <a:spcBef>
-                  <a:spcPts val="0"/>
-                </a:spcBef>
-                <a:spcAft>
-                  <a:spcPts val="0"/>
-                </a:spcAft>
-                <a:buNone/>
-              </a:pPr>
-              <a:endParaRPr/>
-            </a:p>
-          </p:txBody>
-        </p:sp>
-        <p:sp>
-          <p:nvSpPr>
-            <p:cNvPr id="55" name="Google Shape;55;p3"/>
-            <p:cNvSpPr txBox="1"/>
-            <p:nvPr/>
-          </p:nvSpPr>
-          <p:spPr>
-            <a:xfrm>
-              <a:off x="240842" y="0"/>
-              <a:ext cx="894556" cy="282982"/>
-            </a:xfrm>
-            <a:prstGeom prst="rect">
-              <a:avLst/>
-            </a:prstGeom>
-            <a:noFill/>
-            <a:ln>
-              <a:noFill/>
-            </a:ln>
-          </p:spPr>
-          <p:txBody>
-            <a:bodyPr spcFirstLastPara="1" wrap="square" lIns="10150" tIns="10150" rIns="10150" bIns="10150" anchor="ctr" anchorCtr="0">
-              <a:noAutofit/>
-            </a:bodyPr>
-            <a:lstStyle/>
-            <a:p>
-              <a:pPr marL="0" marR="0" lvl="0" indent="0" algn="ctr" rtl="0">
-                <a:lnSpc>
-                  <a:spcPct val="90000"/>
-                </a:lnSpc>
-                <a:spcBef>
-                  <a:spcPts val="0"/>
-                </a:spcBef>
-                <a:spcAft>
-                  <a:spcPts val="0"/>
-                </a:spcAft>
-                <a:buClr>
-                  <a:srgbClr val="262626"/>
-                </a:buClr>
-                <a:buSzPts val="800"/>
-                <a:buFont typeface="Arial"/>
-                <a:buNone/>
-              </a:pPr>
-              <a:r>
-                <a:rPr lang="ja-JP" sz="800" b="1">
-                  <a:solidFill>
-                    <a:srgbClr val="262626"/>
-                  </a:solidFill>
-                  <a:latin typeface="Arial"/>
-                  <a:ea typeface="Arial"/>
-                  <a:cs typeface="Arial"/>
-                  <a:sym typeface="Arial"/>
-                </a:rPr>
-                <a:t>認知</a:t>
-              </a:r>
-              <a:endParaRPr/>
-            </a:p>
-          </p:txBody>
-        </p:sp>
-        <p:sp>
-          <p:nvSpPr>
-            <p:cNvPr id="56" name="Google Shape;56;p3"/>
-            <p:cNvSpPr/>
-            <p:nvPr/>
-          </p:nvSpPr>
-          <p:spPr>
-            <a:xfrm rot="10800000">
-              <a:off x="172030" y="282982"/>
-              <a:ext cx="1032180" cy="282982"/>
-            </a:xfrm>
-            <a:prstGeom prst="trapezoid">
-              <a:avLst>
-                <a:gd name="adj" fmla="val 60792"/>
-              </a:avLst>
-            </a:prstGeom>
-            <a:solidFill>
-              <a:schemeClr val="lt1"/>
-            </a:solidFill>
-            <a:ln w="25400" cap="flat" cmpd="sng">
-              <a:solidFill>
-                <a:schemeClr val="dk2"/>
-              </a:solidFill>
-              <a:prstDash val="solid"/>
-              <a:round/>
-              <a:headEnd type="none" w="sm" len="sm"/>
-              <a:tailEnd type="none" w="sm" len="sm"/>
-            </a:ln>
-          </p:spPr>
-          <p:txBody>
-            <a:bodyPr spcFirstLastPara="1" wrap="square" lIns="91425" tIns="91425" rIns="91425" bIns="91425" anchor="ctr" anchorCtr="0">
-              <a:noAutofit/>
-            </a:bodyPr>
-            <a:lstStyle/>
-            <a:p>
-              <a:pPr marL="0" lvl="0" indent="0" algn="l" rtl="0">
-                <a:spcBef>
-                  <a:spcPts val="0"/>
-                </a:spcBef>
-                <a:spcAft>
-                  <a:spcPts val="0"/>
-                </a:spcAft>
-                <a:buNone/>
-              </a:pPr>
-              <a:endParaRPr/>
-            </a:p>
-          </p:txBody>
-        </p:sp>
-        <p:sp>
-          <p:nvSpPr>
-            <p:cNvPr id="57" name="Google Shape;57;p3"/>
-            <p:cNvSpPr txBox="1"/>
-            <p:nvPr/>
-          </p:nvSpPr>
-          <p:spPr>
-            <a:xfrm>
-              <a:off x="352661" y="282982"/>
-              <a:ext cx="670917" cy="282982"/>
-            </a:xfrm>
-            <a:prstGeom prst="rect">
-              <a:avLst/>
-            </a:prstGeom>
-            <a:noFill/>
-            <a:ln>
-              <a:noFill/>
-            </a:ln>
-          </p:spPr>
-          <p:txBody>
-            <a:bodyPr spcFirstLastPara="1" wrap="square" lIns="10150" tIns="10150" rIns="10150" bIns="10150" anchor="ctr" anchorCtr="0">
-              <a:noAutofit/>
-            </a:bodyPr>
-            <a:lstStyle/>
-            <a:p>
-              <a:pPr marL="0" marR="0" lvl="0" indent="0" algn="ctr" rtl="0">
-                <a:lnSpc>
-                  <a:spcPct val="90000"/>
-                </a:lnSpc>
-                <a:spcBef>
-                  <a:spcPts val="0"/>
-                </a:spcBef>
-                <a:spcAft>
-                  <a:spcPts val="0"/>
-                </a:spcAft>
-                <a:buClr>
-                  <a:srgbClr val="262626"/>
-                </a:buClr>
-                <a:buSzPts val="800"/>
-                <a:buFont typeface="Arial"/>
-                <a:buNone/>
-              </a:pPr>
-              <a:r>
-                <a:rPr lang="ja-JP" sz="800" b="1">
-                  <a:solidFill>
-                    <a:srgbClr val="262626"/>
-                  </a:solidFill>
-                  <a:latin typeface="Arial"/>
-                  <a:ea typeface="Arial"/>
-                  <a:cs typeface="Arial"/>
-                  <a:sym typeface="Arial"/>
-                </a:rPr>
-                <a:t>検討</a:t>
-              </a:r>
-              <a:endParaRPr/>
-            </a:p>
-          </p:txBody>
-        </p:sp>
-        <p:sp>
-          <p:nvSpPr>
-            <p:cNvPr id="58" name="Google Shape;58;p3"/>
-            <p:cNvSpPr/>
-            <p:nvPr/>
-          </p:nvSpPr>
-          <p:spPr>
-            <a:xfrm rot="10800000">
-              <a:off x="344060" y="565965"/>
-              <a:ext cx="688120" cy="282982"/>
-            </a:xfrm>
-            <a:prstGeom prst="trapezoid">
-              <a:avLst>
-                <a:gd name="adj" fmla="val 60792"/>
-              </a:avLst>
-            </a:prstGeom>
-            <a:solidFill>
-              <a:schemeClr val="lt1"/>
-            </a:solidFill>
-            <a:ln w="25400" cap="flat" cmpd="sng">
-              <a:solidFill>
-                <a:schemeClr val="dk2"/>
-              </a:solidFill>
-              <a:prstDash val="solid"/>
-              <a:round/>
-              <a:headEnd type="none" w="sm" len="sm"/>
-              <a:tailEnd type="none" w="sm" len="sm"/>
-            </a:ln>
-          </p:spPr>
-          <p:txBody>
-            <a:bodyPr spcFirstLastPara="1" wrap="square" lIns="91425" tIns="91425" rIns="91425" bIns="91425" anchor="ctr" anchorCtr="0">
-              <a:noAutofit/>
-            </a:bodyPr>
-            <a:lstStyle/>
-            <a:p>
-              <a:pPr marL="0" lvl="0" indent="0" algn="l" rtl="0">
-                <a:spcBef>
-                  <a:spcPts val="0"/>
-                </a:spcBef>
-                <a:spcAft>
-                  <a:spcPts val="0"/>
-                </a:spcAft>
-                <a:buNone/>
-              </a:pPr>
-              <a:endParaRPr/>
-            </a:p>
-          </p:txBody>
-        </p:sp>
-        <p:sp>
-          <p:nvSpPr>
-            <p:cNvPr id="59" name="Google Shape;59;p3"/>
-            <p:cNvSpPr txBox="1"/>
-            <p:nvPr/>
-          </p:nvSpPr>
-          <p:spPr>
-            <a:xfrm>
-              <a:off x="464481" y="565965"/>
-              <a:ext cx="447278" cy="282982"/>
-            </a:xfrm>
-            <a:prstGeom prst="rect">
-              <a:avLst/>
-            </a:prstGeom>
-            <a:noFill/>
-            <a:ln>
-              <a:noFill/>
-            </a:ln>
-          </p:spPr>
-          <p:txBody>
-            <a:bodyPr spcFirstLastPara="1" wrap="square" lIns="10150" tIns="10150" rIns="10150" bIns="10150" anchor="ctr" anchorCtr="0">
-              <a:noAutofit/>
-            </a:bodyPr>
-            <a:lstStyle/>
-            <a:p>
-              <a:pPr marL="0" marR="0" lvl="0" indent="0" algn="ctr" rtl="0">
-                <a:lnSpc>
-                  <a:spcPct val="90000"/>
-                </a:lnSpc>
-                <a:spcBef>
-                  <a:spcPts val="0"/>
-                </a:spcBef>
-                <a:spcAft>
-                  <a:spcPts val="0"/>
-                </a:spcAft>
-                <a:buClr>
-                  <a:srgbClr val="262626"/>
-                </a:buClr>
-                <a:buSzPts val="800"/>
-                <a:buFont typeface="Arial"/>
-                <a:buNone/>
-              </a:pPr>
-              <a:r>
-                <a:rPr lang="ja-JP" sz="800" b="1">
-                  <a:solidFill>
-                    <a:srgbClr val="262626"/>
-                  </a:solidFill>
-                  <a:latin typeface="Arial"/>
-                  <a:ea typeface="Arial"/>
-                  <a:cs typeface="Arial"/>
-                  <a:sym typeface="Arial"/>
-                </a:rPr>
-                <a:t>獲得</a:t>
-              </a:r>
-              <a:endParaRPr/>
-            </a:p>
-          </p:txBody>
-        </p:sp>
-        <p:sp>
-          <p:nvSpPr>
-            <p:cNvPr id="60" name="Google Shape;60;p3"/>
-            <p:cNvSpPr/>
-            <p:nvPr/>
-          </p:nvSpPr>
-          <p:spPr>
-            <a:xfrm rot="10800000">
-              <a:off x="516090" y="848948"/>
-              <a:ext cx="344060" cy="282982"/>
-            </a:xfrm>
-            <a:prstGeom prst="trapezoid">
-              <a:avLst>
-                <a:gd name="adj" fmla="val 60792"/>
-              </a:avLst>
-            </a:prstGeom>
-            <a:noFill/>
-            <a:ln w="25400" cap="flat" cmpd="sng">
-              <a:solidFill>
-                <a:schemeClr val="dk2"/>
-              </a:solidFill>
-              <a:prstDash val="solid"/>
-              <a:round/>
-              <a:headEnd type="none" w="sm" len="sm"/>
-              <a:tailEnd type="none" w="sm" len="sm"/>
-            </a:ln>
-          </p:spPr>
-          <p:txBody>
-            <a:bodyPr spcFirstLastPara="1" wrap="square" lIns="91425" tIns="91425" rIns="91425" bIns="91425" anchor="ctr" anchorCtr="0">
-              <a:noAutofit/>
-            </a:bodyPr>
-            <a:lstStyle/>
-            <a:p>
-              <a:pPr marL="0" lvl="0" indent="0" algn="l" rtl="0">
-                <a:spcBef>
-                  <a:spcPts val="0"/>
-                </a:spcBef>
-                <a:spcAft>
-                  <a:spcPts val="0"/>
-                </a:spcAft>
-                <a:buNone/>
-              </a:pPr>
-              <a:endParaRPr/>
-            </a:p>
-          </p:txBody>
-        </p:sp>
-        <p:sp>
-          <p:nvSpPr>
-            <p:cNvPr id="61" name="Google Shape;61;p3"/>
-            <p:cNvSpPr txBox="1"/>
-            <p:nvPr/>
-          </p:nvSpPr>
-          <p:spPr>
-            <a:xfrm>
-              <a:off x="516090" y="848948"/>
-              <a:ext cx="344060" cy="282982"/>
-            </a:xfrm>
-            <a:prstGeom prst="rect">
-              <a:avLst/>
-            </a:prstGeom>
-            <a:noFill/>
-            <a:ln>
-              <a:noFill/>
-            </a:ln>
-          </p:spPr>
-          <p:txBody>
-            <a:bodyPr spcFirstLastPara="1" wrap="square" lIns="10150" tIns="10150" rIns="10150" bIns="10150" anchor="ctr" anchorCtr="0">
-              <a:noAutofit/>
-            </a:bodyPr>
-            <a:lstStyle/>
-            <a:p>
-              <a:pPr marL="0" marR="0" lvl="0" indent="0" algn="ctr" rtl="0">
-                <a:lnSpc>
-                  <a:spcPct val="90000"/>
-                </a:lnSpc>
-                <a:spcBef>
-                  <a:spcPts val="0"/>
-                </a:spcBef>
-                <a:spcAft>
-                  <a:spcPts val="0"/>
-                </a:spcAft>
-                <a:buClr>
-                  <a:srgbClr val="262626"/>
-                </a:buClr>
-                <a:buSzPts val="800"/>
-                <a:buFont typeface="Arial"/>
-                <a:buNone/>
-              </a:pPr>
-              <a:r>
-                <a:rPr lang="ja-JP" sz="800" b="1">
-                  <a:solidFill>
-                    <a:srgbClr val="262626"/>
-                  </a:solidFill>
-                  <a:latin typeface="Arial"/>
-                  <a:ea typeface="Arial"/>
-                  <a:cs typeface="Arial"/>
-                  <a:sym typeface="Arial"/>
-                </a:rPr>
-                <a:t>伸長</a:t>
-              </a:r>
-              <a:endParaRPr/>
-            </a:p>
-          </p:txBody>
-        </p:sp>
-      </p:grpSp>
-      <p:pic>
-        <p:nvPicPr>
-          <p:cNvPr id="62" name="Google Shape;62;p3" descr="LINE公式アカウントのロゴの使用方法とは？種類やダウンロード方法、利用時の注意点を紹介 | Mico（ミコ）"/>
-          <p:cNvPicPr preferRelativeResize="0"/>
-          <p:nvPr/>
-        </p:nvPicPr>
-        <p:blipFill rotWithShape="1">
-          <a:blip r:embed="rId2">
-            <a:alphaModFix/>
-          </a:blip>
-          <a:srcRect/>
-          <a:stretch/>
-        </p:blipFill>
-        <p:spPr>
-          <a:xfrm>
-            <a:off x="351381" y="1234746"/>
-            <a:ext cx="656177" cy="655521"/>
-          </a:xfrm>
-          <a:prstGeom prst="rect">
-            <a:avLst/>
-          </a:prstGeom>
-          <a:noFill/>
-          <a:ln>
-            <a:noFill/>
-          </a:ln>
-        </p:spPr>
-      </p:pic>
-      <p:sp>
-        <p:nvSpPr>
-          <p:cNvPr id="63" name="Rounded Rectangle 62"/>
-          <p:cNvSpPr/>
-          <p:nvPr/>
-        </p:nvSpPr>
-        <p:spPr>
-          <a:xfrm>
-            <a:off x="544108" y="3068960"/>
-            <a:ext cx="4322443" cy="1357915"/>
-          </a:xfrm>
-          <a:prstGeom prst="roundRect">
-            <a:avLst>
-              <a:gd name="adj" fmla="val 6000"/>
-            </a:avLst>
-          </a:prstGeom>
-          <a:solidFill>
-            <a:srgbClr val="EAF0FA"/>
-          </a:solidFill>
-          <a:ln w="12700">
-            <a:solidFill>
-              <a:srgbClr val="3467B2"/>
-            </a:solidFill>
-          </a:ln>
-          <a:effectLst/>
-        </p:spPr>
-        <p:style>
-          <a:lnRef idx="1">
-            <a:schemeClr val="accent1"/>
-          </a:lnRef>
-          <a:fillRef idx="3">
-            <a:schemeClr val="accent1"/>
-          </a:fillRef>
-          <a:effectRef idx="2">
-            <a:schemeClr val="accent1"/>
-          </a:effectRef>
-          <a:fontRef idx="minor">
-            <a:schemeClr val="lt1"/>
-          </a:fontRef>
-        </p:style>
-        <p:txBody>
-          <a:bodyPr wrap="square" lIns="228600" rIns="182880" rtlCol="0" anchor="ctr"/>
-          <a:lstStyle/>
-          <a:p>
-            <a:pPr algn="l"/>
-            <a:r>
-              <a:rPr sz="1900" b="1">
-                <a:solidFill>
-                  <a:srgbClr val="15133D"/>
-                </a:solidFill>
-                <a:latin typeface="メイリオ"/>
-              </a:rPr>
-              <a:t>① フォーム回答数 約2.0倍</a:t>
-            </a:r>
-          </a:p>
-          <a:p>
-            <a:pPr algn="l">
-              <a:lnSpc>
-                <a:spcPct val="115000"/>
-              </a:lnSpc>
-              <a:spcBef>
-                <a:spcPts val="600"/>
-              </a:spcBef>
-            </a:pPr>
-            <a:r>
-              <a:rPr sz="1300">
-                <a:solidFill>
-                  <a:srgbClr val="333333"/>
-                </a:solidFill>
-                <a:latin typeface="メイリオ"/>
-              </a:rPr>
-              <a:t>リサーチ機能から、誕生月を聞くフォーム（誕生月クーポン付き）に変更。店頭チラシ・リッチメニュー・あいさつメッセージで回答を促した。</a:t>
-            </a:r>
-          </a:p>
-        </p:txBody>
-      </p:sp>
-      <p:sp>
-        <p:nvSpPr>
-          <p:cNvPr id="65" name="Rounded Rectangle 62_add0"/>
-          <p:cNvSpPr/>
-          <p:nvPr/>
-        </p:nvSpPr>
-        <p:spPr>
-          <a:xfrm>
-            <a:off x="544108" y="4609755"/>
-            <a:ext cx="4322443" cy="1357915"/>
-          </a:xfrm>
-          <a:prstGeom prst="roundRect">
-            <a:avLst>
-              <a:gd name="adj" fmla="val 6000"/>
-            </a:avLst>
-          </a:prstGeom>
-          <a:solidFill>
-            <a:srgbClr val="EAF0FA"/>
-          </a:solidFill>
-          <a:ln w="12700">
-            <a:solidFill>
-              <a:srgbClr val="3467B2"/>
-            </a:solidFill>
-          </a:ln>
-          <a:effectLst/>
-        </p:spPr>
-        <p:style>
-          <a:lnRef idx="1">
-            <a:schemeClr val="accent1"/>
-          </a:lnRef>
-          <a:fillRef idx="3">
-            <a:schemeClr val="accent1"/>
-          </a:fillRef>
-          <a:effectRef idx="2">
-            <a:schemeClr val="accent1"/>
-          </a:effectRef>
-          <a:fontRef idx="minor">
-            <a:schemeClr val="lt1"/>
-          </a:fontRef>
-        </p:style>
-        <p:txBody>
-          <a:bodyPr wrap="square" lIns="228600" rIns="182880" rtlCol="0" anchor="ctr"/>
-          <a:lstStyle/>
-          <a:p>
-            <a:pPr algn="l"/>
-            <a:r>
-              <a:rPr sz="1900" b="1">
-                <a:solidFill>
-                  <a:srgbClr val="15133D"/>
-                </a:solidFill>
-                <a:latin typeface="メイリオ"/>
-              </a:rPr>
-              <a:t>月額5,000円（税別）</a:t>
-            </a:r>
-          </a:p>
-          <a:p>
-            <a:pPr algn="l">
-              <a:lnSpc>
-                <a:spcPct val="115000"/>
-              </a:lnSpc>
-              <a:spcBef>
-                <a:spcPts val="600"/>
-              </a:spcBef>
-            </a:pPr>
-            <a:r>
-              <a:rPr sz="1300">
-                <a:solidFill>
-                  <a:srgbClr val="333333"/>
-                </a:solidFill>
-                <a:latin typeface="メイリオ"/>
-              </a:rPr>
-              <a:t>チャットProオプションを含む。別途LINE公式アカウントのプラン料金がかかる。初期サポート（2万円・1回）も用意。</a:t>
-            </a:r>
-          </a:p>
-        </p:txBody>
-      </p:sp>
-      <p:sp>
-        <p:nvSpPr>
-          <p:cNvPr id="64" name="Rounded Rectangle 63"/>
-          <p:cNvSpPr/>
-          <p:nvPr/>
-        </p:nvSpPr>
-        <p:spPr>
-          <a:xfrm>
-            <a:off x="5039448" y="3068960"/>
-            <a:ext cx="4322443" cy="1357915"/>
-          </a:xfrm>
-          <a:prstGeom prst="roundRect">
-            <a:avLst>
-              <a:gd name="adj" fmla="val 6000"/>
-            </a:avLst>
-          </a:prstGeom>
-          <a:solidFill>
-            <a:srgbClr val="EAF0FA"/>
-          </a:solidFill>
-          <a:ln w="12700">
-            <a:solidFill>
-              <a:srgbClr val="3467B2"/>
-            </a:solidFill>
-          </a:ln>
-          <a:effectLst/>
-        </p:spPr>
-        <p:style>
-          <a:lnRef idx="1">
-            <a:schemeClr val="accent1"/>
-          </a:lnRef>
-          <a:fillRef idx="3">
-            <a:schemeClr val="accent1"/>
-          </a:fillRef>
-          <a:effectRef idx="2">
-            <a:schemeClr val="accent1"/>
-          </a:effectRef>
-          <a:fontRef idx="minor">
-            <a:schemeClr val="lt1"/>
-          </a:fontRef>
-        </p:style>
-        <p:txBody>
-          <a:bodyPr wrap="square" lIns="228600" rIns="182880" rtlCol="0" anchor="ctr"/>
-          <a:lstStyle/>
-          <a:p>
-            <a:pPr algn="l"/>
-            <a:r>
-              <a:rPr sz="1900" b="1">
-                <a:solidFill>
-                  <a:srgbClr val="15133D"/>
-                </a:solidFill>
-                <a:latin typeface="メイリオ"/>
-              </a:rPr>
-              <a:t>② 配信のクリック率 約2.8倍</a:t>
-            </a:r>
-          </a:p>
-          <a:p>
-            <a:pPr algn="l">
-              <a:lnSpc>
-                <a:spcPct val="115000"/>
-              </a:lnSpc>
-              <a:spcBef>
-                <a:spcPts val="600"/>
-              </a:spcBef>
-            </a:pPr>
-            <a:r>
-              <a:rPr sz="1300">
-                <a:solidFill>
-                  <a:srgbClr val="333333"/>
-                </a:solidFill>
-                <a:latin typeface="メイリオ"/>
-              </a:rPr>
-              <a:t>好きなキャラクターをフォームで聞いてタグを付け、コラボ商品の配信を出し分け。従来の一斉配信と比べてクリック率が約2.8倍。</a:t>
-            </a:r>
-          </a:p>
-        </p:txBody>
-      </p:sp>
-      <p:sp>
-        <p:nvSpPr>
-          <p:cNvPr id="66" name="Rounded Rectangle 63_add1"/>
-          <p:cNvSpPr/>
-          <p:nvPr/>
-        </p:nvSpPr>
-        <p:spPr>
-          <a:xfrm>
-            <a:off x="5039448" y="4609755"/>
-            <a:ext cx="4322443" cy="1357915"/>
-          </a:xfrm>
-          <a:prstGeom prst="roundRect">
-            <a:avLst>
-              <a:gd name="adj" fmla="val 6000"/>
-            </a:avLst>
-          </a:prstGeom>
-          <a:solidFill>
-            <a:srgbClr val="EAF0FA"/>
-          </a:solidFill>
-          <a:ln w="12700">
-            <a:solidFill>
-              <a:srgbClr val="3467B2"/>
-            </a:solidFill>
-          </a:ln>
-          <a:effectLst/>
-        </p:spPr>
-        <p:style>
-          <a:lnRef idx="1">
-            <a:schemeClr val="accent1"/>
-          </a:lnRef>
-          <a:fillRef idx="3">
-            <a:schemeClr val="accent1"/>
-          </a:fillRef>
-          <a:effectRef idx="2">
-            <a:schemeClr val="accent1"/>
-          </a:effectRef>
-          <a:fontRef idx="minor">
-            <a:schemeClr val="lt1"/>
-          </a:fontRef>
-        </p:style>
-        <p:txBody>
-          <a:bodyPr wrap="square" lIns="228600" rIns="182880" rtlCol="0" anchor="ctr"/>
-          <a:lstStyle/>
-          <a:p>
-            <a:pPr algn="l"/>
-            <a:r>
-              <a:rPr sz="1900" b="1">
-                <a:solidFill>
-                  <a:srgbClr val="15133D"/>
-                </a:solidFill>
-                <a:latin typeface="メイリオ"/>
-              </a:rPr>
-              <a:t>利用条件</a:t>
-            </a:r>
-          </a:p>
-          <a:p>
-            <a:pPr algn="l">
-              <a:lnSpc>
-                <a:spcPct val="115000"/>
-              </a:lnSpc>
-              <a:spcBef>
-                <a:spcPts val="600"/>
-              </a:spcBef>
-            </a:pPr>
-            <a:r>
-              <a:rPr sz="1300">
-                <a:solidFill>
-                  <a:srgbClr val="333333"/>
-                </a:solidFill>
-                <a:latin typeface="メイリオ"/>
-              </a:rPr>
-              <a:t>認証済みアカウントとビジネスマネージャーの接続、友だち数10万人未満が条件。レストラン・Beauty・チャットProとは同時に契約できない。</a:t>
             </a:r>
           </a:p>
         </p:txBody>

--- a/LINEOA媒体最新情報_2026年10月トレンドレポート.pptx
+++ b/LINEOA媒体最新情報_2026年10月トレンドレポート.pptx
@@ -9457,7 +9457,7 @@
                 <a:cs typeface="Meiryo"/>
                 <a:sym typeface="Meiryo"/>
               </a:rPr>
-              <a:t>「UX追加申請（LINE通知メッセージ）」の請求書の発行元が、</a:t>
+              <a:t>LINE通知メッセージの「UX追加申請」は、新しい通知の型を使うときに出す申請。</a:t>
             </a:r>
             <a:endParaRPr sz="1200" b="1">
               <a:solidFill>
@@ -9489,7 +9489,7 @@
                 <a:cs typeface="Meiryo"/>
                 <a:sym typeface="Meiryo"/>
               </a:rPr>
-              <a:t>これまでのAGPからLBPMに変更される。発注画面・申請方法も合わせて変更。</a:t>
+              <a:t>2026年9月9日（水）から、LBPM上の発注画面と、請求書の発行元が変わった。</a:t>
             </a:r>
             <a:endParaRPr/>
           </a:p>
@@ -9513,7 +9513,7 @@
                 <a:cs typeface="Meiryo"/>
                 <a:sym typeface="Meiryo"/>
               </a:rPr>
-              <a:t>2026年9月受領分（2026年10月月初の請求書発行分）から適用。</a:t>
+              <a:t>過去に作った申請は編集しても受領されないため、既存の案件をコピーして作り直す必要がある。</a:t>
             </a:r>
             <a:endParaRPr sz="1400" b="1">
               <a:solidFill>
@@ -10043,292 +10043,14 @@
       </p:pic>
       <p:sp>
         <p:nvSpPr>
-          <p:cNvPr id="63" name="Rectangle 62"/>
-          <p:cNvSpPr/>
-          <p:nvPr/>
-        </p:nvSpPr>
-        <p:spPr>
-          <a:xfrm>
-            <a:off x="544108" y="3068960"/>
-            <a:ext cx="3354215" cy="274320"/>
-          </a:xfrm>
-          <a:prstGeom prst="rect">
-            <a:avLst/>
-          </a:prstGeom>
-          <a:solidFill>
-            <a:srgbClr val="F2F2F2"/>
-          </a:solidFill>
-          <a:ln>
-            <a:noFill/>
-          </a:ln>
-          <a:effectLst/>
-        </p:spPr>
-        <p:style>
-          <a:lnRef idx="1">
-            <a:schemeClr val="accent1"/>
-          </a:lnRef>
-          <a:fillRef idx="3">
-            <a:schemeClr val="accent1"/>
-          </a:fillRef>
-          <a:effectRef idx="2">
-            <a:schemeClr val="accent1"/>
-          </a:effectRef>
-          <a:fontRef idx="minor">
-            <a:schemeClr val="lt1"/>
-          </a:fontRef>
-        </p:style>
-        <p:txBody>
-          <a:bodyPr wrap="square" rIns="45720" rtlCol="0" anchor="ctr"/>
-          <a:lstStyle/>
-          <a:p>
-            <a:pPr algn="ctr"/>
-            <a:r>
-              <a:rPr sz="1300" b="1">
-                <a:solidFill>
-                  <a:srgbClr val="333333"/>
-                </a:solidFill>
-                <a:latin typeface="メイリオ"/>
-              </a:rPr>
-              <a:t>AS-IS</a:t>
-            </a:r>
-          </a:p>
-        </p:txBody>
-      </p:sp>
-      <p:sp>
-        <p:nvSpPr>
-          <p:cNvPr id="64" name="Rectangle 63"/>
-          <p:cNvSpPr/>
-          <p:nvPr/>
-        </p:nvSpPr>
-        <p:spPr>
-          <a:xfrm>
-            <a:off x="544108" y="3343280"/>
-            <a:ext cx="3354215" cy="640080"/>
-          </a:xfrm>
-          <a:prstGeom prst="rect">
-            <a:avLst/>
-          </a:prstGeom>
-          <a:solidFill>
-            <a:srgbClr val="F2F2F2"/>
-          </a:solidFill>
-          <a:ln w="12700">
-            <a:solidFill>
-              <a:srgbClr val="D9D9D9"/>
-            </a:solidFill>
-          </a:ln>
-          <a:effectLst/>
-        </p:spPr>
-        <p:style>
-          <a:lnRef idx="1">
-            <a:schemeClr val="accent1"/>
-          </a:lnRef>
-          <a:fillRef idx="3">
-            <a:schemeClr val="accent1"/>
-          </a:fillRef>
-          <a:effectRef idx="2">
-            <a:schemeClr val="accent1"/>
-          </a:effectRef>
-          <a:fontRef idx="minor">
-            <a:schemeClr val="lt1"/>
-          </a:fontRef>
-        </p:style>
-        <p:txBody>
-          <a:bodyPr wrap="square" lIns="182880" tIns="54864" rIns="137160" bIns="54864" rtlCol="0" anchor="ctr"/>
-          <a:lstStyle/>
-          <a:p>
-            <a:pPr algn="ctr">
-              <a:lnSpc>
-                <a:spcPct val="110000"/>
-              </a:lnSpc>
-            </a:pPr>
-            <a:r>
-              <a:rPr sz="1400" b="1">
-                <a:solidFill>
-                  <a:srgbClr val="15133D"/>
-                </a:solidFill>
-                <a:latin typeface="メイリオ"/>
-              </a:rPr>
-              <a:t>請求書はAGPから発行</a:t>
-            </a:r>
-          </a:p>
-        </p:txBody>
-      </p:sp>
-      <p:sp>
-        <p:nvSpPr>
-          <p:cNvPr id="65" name="TextBox 64"/>
-          <p:cNvSpPr txBox="1"/>
-          <p:nvPr/>
-        </p:nvSpPr>
-        <p:spPr>
-          <a:xfrm>
-            <a:off x="3898323" y="3068960"/>
-            <a:ext cx="432244" cy="914400"/>
-          </a:xfrm>
-          <a:prstGeom prst="rect">
-            <a:avLst/>
-          </a:prstGeom>
-          <a:noFill/>
-        </p:spPr>
-        <p:txBody>
-          <a:bodyPr wrap="none" anchor="ctr">
-            <a:spAutoFit/>
-          </a:bodyPr>
-          <a:lstStyle/>
-          <a:p>
-            <a:pPr algn="ctr"/>
-            <a:r>
-              <a:rPr sz="1800" b="1">
-                <a:solidFill>
-                  <a:srgbClr val="3467B2"/>
-                </a:solidFill>
-                <a:latin typeface="メイリオ"/>
-              </a:rPr>
-              <a:t>▶</a:t>
-            </a:r>
-          </a:p>
-        </p:txBody>
-      </p:sp>
-      <p:sp>
-        <p:nvSpPr>
-          <p:cNvPr id="66" name="Rectangle 65"/>
-          <p:cNvSpPr/>
-          <p:nvPr/>
-        </p:nvSpPr>
-        <p:spPr>
-          <a:xfrm>
-            <a:off x="4330568" y="3068960"/>
-            <a:ext cx="5031323" cy="274320"/>
-          </a:xfrm>
-          <a:prstGeom prst="rect">
-            <a:avLst/>
-          </a:prstGeom>
-          <a:solidFill>
-            <a:srgbClr val="15133D"/>
-          </a:solidFill>
-          <a:ln>
-            <a:noFill/>
-          </a:ln>
-          <a:effectLst/>
-        </p:spPr>
-        <p:style>
-          <a:lnRef idx="1">
-            <a:schemeClr val="accent1"/>
-          </a:lnRef>
-          <a:fillRef idx="3">
-            <a:schemeClr val="accent1"/>
-          </a:fillRef>
-          <a:effectRef idx="2">
-            <a:schemeClr val="accent1"/>
-          </a:effectRef>
-          <a:fontRef idx="minor">
-            <a:schemeClr val="lt1"/>
-          </a:fontRef>
-        </p:style>
-        <p:txBody>
-          <a:bodyPr wrap="square" rIns="45720" rtlCol="0" anchor="ctr"/>
-          <a:lstStyle/>
-          <a:p>
-            <a:pPr algn="ctr"/>
-            <a:r>
-              <a:rPr sz="1300" b="1">
-                <a:solidFill>
-                  <a:srgbClr val="FFFFFF"/>
-                </a:solidFill>
-                <a:latin typeface="メイリオ"/>
-              </a:rPr>
-              <a:t>TO-BE</a:t>
-            </a:r>
-          </a:p>
-        </p:txBody>
-      </p:sp>
-      <p:sp>
-        <p:nvSpPr>
-          <p:cNvPr id="67" name="Rectangle 66"/>
-          <p:cNvSpPr/>
-          <p:nvPr/>
-        </p:nvSpPr>
-        <p:spPr>
-          <a:xfrm>
-            <a:off x="4330568" y="3343280"/>
-            <a:ext cx="5031323" cy="640080"/>
-          </a:xfrm>
-          <a:prstGeom prst="rect">
-            <a:avLst/>
-          </a:prstGeom>
-          <a:solidFill>
-            <a:srgbClr val="EAF0FA"/>
-          </a:solidFill>
-          <a:ln w="12700">
-            <a:solidFill>
-              <a:srgbClr val="3467B2"/>
-            </a:solidFill>
-          </a:ln>
-          <a:effectLst/>
-        </p:spPr>
-        <p:style>
-          <a:lnRef idx="1">
-            <a:schemeClr val="accent1"/>
-          </a:lnRef>
-          <a:fillRef idx="3">
-            <a:schemeClr val="accent1"/>
-          </a:fillRef>
-          <a:effectRef idx="2">
-            <a:schemeClr val="accent1"/>
-          </a:effectRef>
-          <a:fontRef idx="minor">
-            <a:schemeClr val="lt1"/>
-          </a:fontRef>
-        </p:style>
-        <p:txBody>
-          <a:bodyPr wrap="square" lIns="182880" tIns="54864" rIns="137160" bIns="54864" rtlCol="0" anchor="ctr"/>
-          <a:lstStyle/>
-          <a:p>
-            <a:pPr algn="ctr">
-              <a:lnSpc>
-                <a:spcPct val="110000"/>
-              </a:lnSpc>
-            </a:pPr>
-            <a:r>
-              <a:rPr sz="2000" b="1">
-                <a:solidFill>
-                  <a:srgbClr val="15133D"/>
-                </a:solidFill>
-                <a:latin typeface="メイリオ"/>
-              </a:rPr>
-              <a:t>請求書はLBPMから発行</a:t>
-            </a:r>
-          </a:p>
-          <a:p>
-            <a:pPr>
-              <a:lnSpc>
-                <a:spcPct val="110000"/>
-              </a:lnSpc>
-              <a:spcBef>
-                <a:spcPts val="500"/>
-              </a:spcBef>
-            </a:pPr>
-            <a:r>
-              <a:rPr sz="1050">
-                <a:solidFill>
-                  <a:srgbClr val="333333"/>
-                </a:solidFill>
-                <a:latin typeface="メイリオ"/>
-              </a:rPr>
-              <a:t>2026年9月受領分（10月月初発行分）から</a:t>
-            </a:r>
-          </a:p>
-        </p:txBody>
-      </p:sp>
-      <p:sp>
-        <p:nvSpPr>
           <p:cNvPr id="68" name="Rounded Rectangle 67"/>
           <p:cNvSpPr/>
           <p:nvPr/>
         </p:nvSpPr>
         <p:spPr>
           <a:xfrm>
-            <a:off x="544108" y="4211960"/>
-            <a:ext cx="4322443" cy="1357915"/>
+            <a:off x="548640" y="3154680"/>
+            <a:ext cx="8814816" cy="1600200"/>
           </a:xfrm>
           <a:prstGeom prst="roundRect">
             <a:avLst>
@@ -10365,13 +10087,13 @@
           <a:p>
             <a:pPr algn="l"/>
             <a:r>
-              <a:rPr sz="1900" b="1">
+              <a:rPr sz="2000" b="1">
                 <a:solidFill>
                   <a:srgbClr val="15133D"/>
                 </a:solidFill>
                 <a:latin typeface="メイリオ"/>
               </a:rPr>
-              <a:t>既存案件は再作成が必要</a:t>
+              <a:t>変わったこと</a:t>
             </a:r>
           </a:p>
           <a:p>
@@ -10384,13 +10106,32 @@
               </a:spcBef>
             </a:pPr>
             <a:r>
-              <a:rPr sz="1300">
+              <a:rPr sz="1400">
                 <a:solidFill>
                   <a:srgbClr val="333333"/>
                 </a:solidFill>
                 <a:latin typeface="メイリオ"/>
               </a:rPr>
-              <a:t>過去に作成した申請を編集しても受領されない。既存案件をコピーして再作成し、LBPMから改めて発注・申請する。</a:t>
+              <a:t>・請求書の発行元が、AGPからLBPMに変わった（2026年9月受領分＝10月初めに発行される請求書から）。</a:t>
+            </a:r>
+          </a:p>
+          <a:p>
+            <a:pPr algn="l">
+              <a:lnSpc>
+                <a:spcPct val="115000"/>
+              </a:lnSpc>
+              <a:spcBef>
+                <a:spcPts val="600"/>
+              </a:spcBef>
+            </a:pPr>
+            <a:r>
+              <a:rPr sz="1400">
+                <a:solidFill>
+                  <a:srgbClr val="333333"/>
+                </a:solidFill>
+                <a:latin typeface="メイリオ"/>
+              </a:rPr>
+              <a:t>・LBPM上の発注画面と申請方法が新しくなった。</a:t>
             </a:r>
           </a:p>
         </p:txBody>
@@ -10403,8 +10144,8 @@
         </p:nvSpPr>
         <p:spPr>
           <a:xfrm>
-            <a:off x="5039448" y="4211960"/>
-            <a:ext cx="4322443" cy="1357915"/>
+            <a:off x="548640" y="4919472"/>
+            <a:ext cx="8814816" cy="1371600"/>
           </a:xfrm>
           <a:prstGeom prst="roundRect">
             <a:avLst>
@@ -10441,13 +10182,13 @@
           <a:p>
             <a:pPr algn="l"/>
             <a:r>
-              <a:rPr sz="1900" b="1">
+              <a:rPr sz="2000" b="1">
                 <a:solidFill>
                   <a:srgbClr val="15133D"/>
                 </a:solidFill>
                 <a:latin typeface="メイリオ"/>
               </a:rPr>
-              <a:t>アプリ遷移は有償オプション</a:t>
+              <a:t>新しい発注画面</a:t>
             </a:r>
           </a:p>
           <a:p>
@@ -10460,13 +10201,32 @@
               </a:spcBef>
             </a:pPr>
             <a:r>
-              <a:rPr sz="1300">
+              <a:rPr sz="1400">
                 <a:solidFill>
                   <a:srgbClr val="333333"/>
                 </a:solidFill>
                 <a:latin typeface="メイリオ"/>
               </a:rPr>
-              <a:t>9月9日からの新しい発注画面で、ネイティブアプリ遷移の審査を有償オプションとして選ぶ。</a:t>
+              <a:t>・申請フォームを入力すると、そのあとに金額の計算画面が出る。</a:t>
+            </a:r>
+          </a:p>
+          <a:p>
+            <a:pPr algn="l">
+              <a:lnSpc>
+                <a:spcPct val="115000"/>
+              </a:lnSpc>
+              <a:spcBef>
+                <a:spcPts val="600"/>
+              </a:spcBef>
+            </a:pPr>
+            <a:r>
+              <a:rPr sz="1400">
+                <a:solidFill>
+                  <a:srgbClr val="333333"/>
+                </a:solidFill>
+                <a:latin typeface="メイリオ"/>
+              </a:rPr>
+              <a:t>・請求書は、LBPMのメニューの「請求書DL」からダウンロードする。</a:t>
             </a:r>
           </a:p>
         </p:txBody>

--- a/LINEOA媒体最新情報_2026年10月トレンドレポート.pptx
+++ b/LINEOA媒体最新情報_2026年10月トレンドレポート.pptx
@@ -10093,7 +10093,7 @@
                 </a:solidFill>
                 <a:latin typeface="メイリオ"/>
               </a:rPr>
-              <a:t>変わったこと</a:t>
+              <a:t>変更点</a:t>
             </a:r>
           </a:p>
           <a:p>

--- a/LINEOA媒体最新情報_2026年10月トレンドレポート.pptx
+++ b/LINEOA媒体最新情報_2026年10月トレンドレポート.pptx
@@ -5,43 +5,43 @@
     <p:sldMasterId id="2147483648" r:id="rId1"/>
   </p:sldMasterIdLst>
   <p:notesMasterIdLst>
-    <p:notesMasterId r:id="rId11"/>
+    <p:notesMasterId r:id="rId12"/>
   </p:notesMasterIdLst>
   <p:sldIdLst>
     <p:sldId id="256" r:id="rId2"/>
     <p:sldId id="257" r:id="rId3"/>
     <p:sldId id="258" r:id="rId4"/>
-    <p:sldId id="267" r:id="rId21"/>
-    <p:sldId id="259" r:id="rId5"/>
-    <p:sldId id="261" r:id="rId6"/>
-    <p:sldId id="263" r:id="rId7"/>
-    <p:sldId id="264" r:id="rId8"/>
-    <p:sldId id="265" r:id="rId9"/>
-    <p:sldId id="266" r:id="rId10"/>
+    <p:sldId id="267" r:id="rId5"/>
+    <p:sldId id="268" r:id="rId6"/>
+    <p:sldId id="261" r:id="rId7"/>
+    <p:sldId id="263" r:id="rId8"/>
+    <p:sldId id="264" r:id="rId9"/>
+    <p:sldId id="265" r:id="rId10"/>
+    <p:sldId id="266" r:id="rId11"/>
   </p:sldIdLst>
   <p:sldSz cx="9906000" cy="6858000" type="A4"/>
   <p:notesSz cx="6799263" cy="9929813"/>
   <p:embeddedFontLst>
     <p:embeddedFont>
       <p:font typeface="Meiryo" panose="020B0604030504040204" pitchFamily="50" charset="-128"/>
-      <p:regular r:id="rId12"/>
-      <p:bold r:id="rId13"/>
-      <p:italic r:id="rId14"/>
-      <p:boldItalic r:id="rId15"/>
+      <p:regular r:id="rId13"/>
+      <p:bold r:id="rId14"/>
+      <p:italic r:id="rId15"/>
+      <p:boldItalic r:id="rId16"/>
     </p:embeddedFont>
     <p:embeddedFont>
       <p:font typeface="Meiryo" panose="020B0604030504040204" pitchFamily="50" charset="-128"/>
-      <p:regular r:id="rId12"/>
-      <p:bold r:id="rId13"/>
-      <p:italic r:id="rId14"/>
-      <p:boldItalic r:id="rId15"/>
+      <p:regular r:id="rId13"/>
+      <p:bold r:id="rId14"/>
+      <p:italic r:id="rId15"/>
+      <p:boldItalic r:id="rId16"/>
     </p:embeddedFont>
     <p:embeddedFont>
       <p:font typeface="Century Gothic" panose="020B0502020202020204" pitchFamily="34" charset="0"/>
-      <p:regular r:id="rId16"/>
-      <p:bold r:id="rId17"/>
-      <p:italic r:id="rId18"/>
-      <p:boldItalic r:id="rId19"/>
+      <p:regular r:id="rId17"/>
+      <p:bold r:id="rId18"/>
+      <p:italic r:id="rId19"/>
+      <p:boldItalic r:id="rId20"/>
     </p:embeddedFont>
   </p:embeddedFontLst>
   <p:defaultTextStyle>
@@ -278,7 +278,7 @@
       <p15:sldGuideLst xmlns:p15="http://schemas.microsoft.com/office/powerpoint/2012/main"/>
     </p:ext>
     <p:ext uri="GoogleSlidesCustomDataVersion2">
-      <go:slidesCustomData xmlns:go="http://customooxmlschemas.google.com/" xmlns:ahyp="http://schemas.microsoft.com/office/drawing/2018/hyperlinkcolor" xmlns:p15="http://schemas.microsoft.com/office/powerpoint/2012/main" xmlns:p14="http://schemas.microsoft.com/office/powerpoint/2010/main" xmlns:com="http://schemas.openxmlformats.org/drawingml/2006/compatibility" xmlns:pvml="urn:schemas-microsoft-com:office:powerpoint" xmlns:v="urn:schemas-microsoft-com:vml" xmlns:o="urn:schemas-microsoft-com:office:office" xmlns:dgm="http://schemas.openxmlformats.org/drawingml/2006/diagram" xmlns:c="http://schemas.openxmlformats.org/drawingml/2006/chart" xmlns:mv="urn:schemas-microsoft-com:mac:vml" xmlns:mc="http://schemas.openxmlformats.org/markup-compatibility/2006" xmlns="" r:id="rId22" roundtripDataSignature="AMtx7mgQCoaVnfxROPv51WSWo8GFar7+Gw=="/>
+      <go:slidesCustomData xmlns="" xmlns:mc="http://schemas.openxmlformats.org/markup-compatibility/2006" xmlns:mv="urn:schemas-microsoft-com:mac:vml" xmlns:c="http://schemas.openxmlformats.org/drawingml/2006/chart" xmlns:dgm="http://schemas.openxmlformats.org/drawingml/2006/diagram" xmlns:o="urn:schemas-microsoft-com:office:office" xmlns:v="urn:schemas-microsoft-com:vml" xmlns:pvml="urn:schemas-microsoft-com:office:powerpoint" xmlns:com="http://schemas.openxmlformats.org/drawingml/2006/compatibility" xmlns:p14="http://schemas.microsoft.com/office/powerpoint/2010/main" xmlns:p15="http://schemas.microsoft.com/office/powerpoint/2012/main" xmlns:ahyp="http://schemas.microsoft.com/office/drawing/2018/hyperlinkcolor" xmlns:go="http://customooxmlschemas.google.com/" r:id="rId22" roundtripDataSignature="AMtx7mgQCoaVnfxROPv51WSWo8GFar7+Gw=="/>
     </p:ext>
   </p:extLst>
 </p:presentation>
@@ -6982,7 +6982,7 @@
           <a:p>
             <a:pPr algn="l"/>
             <a:r>
-              <a:rPr sz="2000" b="1">
+              <a:rPr sz="2000" b="1" dirty="0" err="1">
                 <a:solidFill>
                   <a:srgbClr val="15133D"/>
                 </a:solidFill>
@@ -6990,6 +6990,12 @@
               </a:rPr>
               <a:t>変更点</a:t>
             </a:r>
+            <a:endParaRPr sz="2000" b="1" dirty="0">
+              <a:solidFill>
+                <a:srgbClr val="15133D"/>
+              </a:solidFill>
+              <a:latin typeface="メイリオ"/>
+            </a:endParaRPr>
           </a:p>
           <a:p>
             <a:pPr algn="l">
@@ -7001,13 +7007,82 @@
               </a:spcBef>
             </a:pPr>
             <a:r>
-              <a:rPr sz="1400">
+              <a:rPr sz="1400" dirty="0" err="1">
                 <a:solidFill>
                   <a:srgbClr val="333333"/>
                 </a:solidFill>
                 <a:latin typeface="メイリオ"/>
               </a:rPr>
-              <a:t>LINE通知メッセージのボタンから、自社のネイティブアプリを直接開けるようになった。アプリが入っていない場合は、通知内容に関連するWebページへ遷移する。シームレスな導線で、ユーザー体験が向上する。</a:t>
+              <a:t>LINE通知メッセージのボタンから、自社のネイティブアプリを直接開けるようになった</a:t>
+            </a:r>
+            <a:r>
+              <a:rPr sz="1400" dirty="0">
+                <a:solidFill>
+                  <a:srgbClr val="333333"/>
+                </a:solidFill>
+                <a:latin typeface="メイリオ"/>
+              </a:rPr>
+              <a:t>。</a:t>
+            </a:r>
+            <a:endParaRPr lang="en-US" sz="1400" dirty="0">
+              <a:solidFill>
+                <a:srgbClr val="333333"/>
+              </a:solidFill>
+              <a:latin typeface="メイリオ"/>
+            </a:endParaRPr>
+          </a:p>
+          <a:p>
+            <a:pPr algn="l">
+              <a:lnSpc>
+                <a:spcPct val="115000"/>
+              </a:lnSpc>
+              <a:spcBef>
+                <a:spcPts val="600"/>
+              </a:spcBef>
+            </a:pPr>
+            <a:r>
+              <a:rPr sz="1400" dirty="0" err="1">
+                <a:solidFill>
+                  <a:srgbClr val="333333"/>
+                </a:solidFill>
+                <a:latin typeface="メイリオ"/>
+              </a:rPr>
+              <a:t>アプリが入っていない場合は、通知内容に関連するWebページへ遷移する</a:t>
+            </a:r>
+            <a:r>
+              <a:rPr sz="1400" dirty="0">
+                <a:solidFill>
+                  <a:srgbClr val="333333"/>
+                </a:solidFill>
+                <a:latin typeface="メイリオ"/>
+              </a:rPr>
+              <a:t>。</a:t>
+            </a:r>
+            <a:br>
+              <a:rPr lang="en-US" sz="1400" dirty="0">
+                <a:solidFill>
+                  <a:srgbClr val="333333"/>
+                </a:solidFill>
+                <a:latin typeface="メイリオ"/>
+              </a:rPr>
+            </a:br>
+            <a:r>
+              <a:rPr sz="1400" dirty="0" err="1">
+                <a:solidFill>
+                  <a:srgbClr val="333333"/>
+                </a:solidFill>
+                <a:latin typeface="メイリオ"/>
+              </a:rPr>
+              <a:t>シームレスな導線で、ユーザー体験が向上する</a:t>
+            </a:r>
+            <a:r>
+              <a:rPr sz="1400" dirty="0">
+                <a:solidFill>
+                  <a:srgbClr val="333333"/>
+                </a:solidFill>
+                <a:latin typeface="メイリオ"/>
+              </a:rPr>
+              <a:t>。</a:t>
             </a:r>
           </a:p>
         </p:txBody>
@@ -7058,7 +7133,7 @@
           <a:p>
             <a:pPr algn="l"/>
             <a:r>
-              <a:rPr sz="2000" b="1">
+              <a:rPr sz="2000" b="1" dirty="0" err="1">
                 <a:solidFill>
                   <a:srgbClr val="15133D"/>
                 </a:solidFill>
@@ -7066,6 +7141,12 @@
               </a:rPr>
               <a:t>費用と必要な手続き</a:t>
             </a:r>
+            <a:endParaRPr sz="2000" b="1" dirty="0">
+              <a:solidFill>
+                <a:srgbClr val="15133D"/>
+              </a:solidFill>
+              <a:latin typeface="メイリオ"/>
+            </a:endParaRPr>
           </a:p>
           <a:p>
             <a:pPr algn="l">
@@ -7077,13 +7158,49 @@
               </a:spcBef>
             </a:pPr>
             <a:r>
-              <a:rPr sz="1400">
+              <a:rPr sz="1400" dirty="0">
                 <a:solidFill>
                   <a:srgbClr val="333333"/>
                 </a:solidFill>
                 <a:latin typeface="メイリオ"/>
               </a:rPr>
-              <a:t>審査費は10万円（税抜）／1UX。承認時のみ発生し、否認の場合はかからない。申し込みはLBPMのUX追加申請から行い、2026年9月9日（水）から受付中。</a:t>
+              <a:t>審査費は10万円（税抜）／1UX。承認時のみ発生し、否認の場合はかからない。</a:t>
+            </a:r>
+            <a:br>
+              <a:rPr lang="en-US" sz="1400" dirty="0">
+                <a:solidFill>
+                  <a:srgbClr val="333333"/>
+                </a:solidFill>
+                <a:latin typeface="メイリオ"/>
+              </a:rPr>
+            </a:br>
+            <a:r>
+              <a:rPr sz="1400" dirty="0" err="1">
+                <a:solidFill>
+                  <a:srgbClr val="333333"/>
+                </a:solidFill>
+                <a:latin typeface="メイリオ"/>
+              </a:rPr>
+              <a:t>申し込みはLBPMのUX追加申請から</a:t>
+            </a:r>
+            <a:r>
+              <a:rPr lang="ja-JP" altLang="en-US" sz="1400" dirty="0">
+                <a:solidFill>
+                  <a:srgbClr val="333333"/>
+                </a:solidFill>
+                <a:latin typeface="メイリオ" panose="020B0604030504040204" pitchFamily="50" charset="-128"/>
+                <a:ea typeface="メイリオ" panose="020B0604030504040204" pitchFamily="50" charset="-128"/>
+              </a:rPr>
+              <a:t>行う</a:t>
+            </a:r>
+            <a:r>
+              <a:rPr sz="1400" dirty="0">
+                <a:solidFill>
+                  <a:srgbClr val="333333"/>
+                </a:solidFill>
+                <a:latin typeface="メイリオ"/>
+              </a:rPr>
+              <a:t>。</a:t>
             </a:r>
           </a:p>
         </p:txBody>
@@ -7097,7 +7214,7 @@
 </file>
 
 <file path=ppt/slides/slide4.xml><?xml version="1.0" encoding="utf-8"?>
-<p:sld xmlns:a="http://schemas.openxmlformats.org/drawingml/2006/main" xmlns:p="http://schemas.openxmlformats.org/presentationml/2006/main" xmlns:r="http://schemas.openxmlformats.org/officeDocument/2006/relationships">
+<p:sld xmlns:a="http://schemas.openxmlformats.org/drawingml/2006/main" xmlns:r="http://schemas.openxmlformats.org/officeDocument/2006/relationships" xmlns:p="http://schemas.openxmlformats.org/presentationml/2006/main">
   <p:cSld>
     <p:spTree>
       <p:nvGrpSpPr>
@@ -7105,7 +7222,14 @@
         <p:cNvGrpSpPr/>
         <p:nvPr/>
       </p:nvGrpSpPr>
-      <p:grpSpPr/>
+      <p:grpSpPr>
+        <a:xfrm>
+          <a:off x="0" y="0"/>
+          <a:ext cx="0" cy="0"/>
+          <a:chOff x="0" y="0"/>
+          <a:chExt cx="0" cy="0"/>
+        </a:xfrm>
+      </p:grpSpPr>
       <p:sp>
         <p:nvSpPr>
           <p:cNvPr id="40" name="Google Shape;40;p3"/>
@@ -8534,7 +8658,7 @@
           <a:p>
             <a:pPr algn="l"/>
             <a:r>
-              <a:rPr sz="1900" b="1">
+              <a:rPr sz="1900" b="1" dirty="0">
                 <a:solidFill>
                   <a:srgbClr val="15133D"/>
                 </a:solidFill>
@@ -8553,23 +8677,74 @@
               </a:spcBef>
             </a:pPr>
             <a:r>
-              <a:rPr sz="1400" b="1">
+              <a:rPr sz="1400" b="1" dirty="0">
                 <a:solidFill>
                   <a:srgbClr val="15133D"/>
                 </a:solidFill>
                 <a:latin typeface="メイリオ"/>
               </a:rPr>
-              <a:t>■ 遷移の方式：</a:t>
-            </a:r>
-            <a:r>
-              <a:rPr sz="1400">
+              <a:t>■ </a:t>
+            </a:r>
+            <a:r>
+              <a:rPr sz="1400" b="1" dirty="0" err="1">
+                <a:solidFill>
+                  <a:srgbClr val="15133D"/>
+                </a:solidFill>
+                <a:latin typeface="メイリオ"/>
+              </a:rPr>
+              <a:t>遷移の方式：</a:t>
+            </a:r>
+            <a:r>
+              <a:rPr sz="1400" dirty="0" err="1">
                 <a:solidFill>
                   <a:srgbClr val="333333"/>
                 </a:solidFill>
                 <a:latin typeface="メイリオ"/>
               </a:rPr>
-              <a:t>iPhone／Androidの標準の仕組み（Universal links／App Links）でアプリを開くこと</a:t>
-            </a:r>
+              <a:t>iPhone／Androidの標準の仕組み（Universal</a:t>
+            </a:r>
+            <a:r>
+              <a:rPr sz="1400" dirty="0">
+                <a:solidFill>
+                  <a:srgbClr val="333333"/>
+                </a:solidFill>
+                <a:latin typeface="メイリオ"/>
+              </a:rPr>
+              <a:t> </a:t>
+            </a:r>
+            <a:r>
+              <a:rPr sz="1400" dirty="0" err="1">
+                <a:solidFill>
+                  <a:srgbClr val="333333"/>
+                </a:solidFill>
+                <a:latin typeface="メイリオ"/>
+              </a:rPr>
+              <a:t>links／App</a:t>
+            </a:r>
+            <a:r>
+              <a:rPr sz="1400" dirty="0">
+                <a:solidFill>
+                  <a:srgbClr val="333333"/>
+                </a:solidFill>
+                <a:latin typeface="メイリオ"/>
+              </a:rPr>
+              <a:t> </a:t>
+            </a:r>
+            <a:r>
+              <a:rPr sz="1400" dirty="0" err="1">
+                <a:solidFill>
+                  <a:srgbClr val="333333"/>
+                </a:solidFill>
+                <a:latin typeface="メイリオ"/>
+              </a:rPr>
+              <a:t>Links）でアプリを開くこと</a:t>
+            </a:r>
+            <a:endParaRPr sz="1400" dirty="0">
+              <a:solidFill>
+                <a:srgbClr val="333333"/>
+              </a:solidFill>
+              <a:latin typeface="メイリオ"/>
+            </a:endParaRPr>
           </a:p>
           <a:p>
             <a:pPr algn="l">
@@ -8581,16 +8756,25 @@
               </a:spcBef>
             </a:pPr>
             <a:r>
-              <a:rPr sz="1400" b="1">
+              <a:rPr sz="1400" b="1" dirty="0">
                 <a:solidFill>
                   <a:srgbClr val="15133D"/>
                 </a:solidFill>
                 <a:latin typeface="メイリオ"/>
               </a:rPr>
-              <a:t>■ ドメインの一致：</a:t>
-            </a:r>
-            <a:r>
-              <a:rPr sz="1400">
+              <a:t>■ </a:t>
+            </a:r>
+            <a:r>
+              <a:rPr sz="1400" b="1" dirty="0" err="1">
+                <a:solidFill>
+                  <a:srgbClr val="15133D"/>
+                </a:solidFill>
+                <a:latin typeface="メイリオ"/>
+              </a:rPr>
+              <a:t>ドメインの一致：</a:t>
+            </a:r>
+            <a:r>
+              <a:rPr sz="1400" dirty="0" err="1">
                 <a:solidFill>
                   <a:srgbClr val="333333"/>
                 </a:solidFill>
@@ -8598,6 +8782,12 @@
               </a:rPr>
               <a:t>送信元の公式ドメインと、遷移先URLのドメインが同じであること</a:t>
             </a:r>
+            <a:endParaRPr sz="1400" dirty="0">
+              <a:solidFill>
+                <a:srgbClr val="333333"/>
+              </a:solidFill>
+              <a:latin typeface="メイリオ"/>
+            </a:endParaRPr>
           </a:p>
           <a:p>
             <a:pPr algn="l">
@@ -8609,23 +8799,38 @@
               </a:spcBef>
             </a:pPr>
             <a:r>
-              <a:rPr sz="1400" b="1">
+              <a:rPr sz="1400" b="1" dirty="0">
                 <a:solidFill>
                   <a:srgbClr val="15133D"/>
                 </a:solidFill>
                 <a:latin typeface="メイリオ"/>
               </a:rPr>
-              <a:t>■ アプリ未インストール時：</a:t>
-            </a:r>
-            <a:r>
-              <a:rPr sz="1400">
+              <a:t>■ </a:t>
+            </a:r>
+            <a:r>
+              <a:rPr sz="1400" b="1" dirty="0" err="1">
+                <a:solidFill>
+                  <a:srgbClr val="15133D"/>
+                </a:solidFill>
+                <a:latin typeface="メイリオ"/>
+              </a:rPr>
+              <a:t>アプリ未インストール時：</a:t>
+            </a:r>
+            <a:r>
+              <a:rPr sz="1400" dirty="0" err="1">
                 <a:solidFill>
                   <a:srgbClr val="333333"/>
                 </a:solidFill>
                 <a:latin typeface="メイリオ"/>
               </a:rPr>
-              <a:t>通知内容に関連するWebページを表示すること（App Store／Google Playへの自動遷移は不可）</a:t>
-            </a:r>
+              <a:t>通知内容に関連するWebページを表示すること</a:t>
+            </a:r>
+            <a:endParaRPr lang="en-US" sz="1400" dirty="0">
+              <a:solidFill>
+                <a:srgbClr val="333333"/>
+              </a:solidFill>
+              <a:latin typeface="メイリオ"/>
+            </a:endParaRPr>
           </a:p>
           <a:p>
             <a:pPr algn="l">
@@ -8637,22 +8842,129 @@
               </a:spcBef>
             </a:pPr>
             <a:r>
-              <a:rPr sz="1400" b="1">
+              <a:rPr sz="1400" dirty="0">
+                <a:solidFill>
+                  <a:srgbClr val="333333"/>
+                </a:solidFill>
+                <a:latin typeface="メイリオ"/>
+              </a:rPr>
+              <a:t>（App </a:t>
+            </a:r>
+            <a:r>
+              <a:rPr sz="1400" dirty="0" err="1">
+                <a:solidFill>
+                  <a:srgbClr val="333333"/>
+                </a:solidFill>
+                <a:latin typeface="メイリオ"/>
+              </a:rPr>
+              <a:t>Store／Google</a:t>
+            </a:r>
+            <a:r>
+              <a:rPr sz="1400" dirty="0">
+                <a:solidFill>
+                  <a:srgbClr val="333333"/>
+                </a:solidFill>
+                <a:latin typeface="メイリオ"/>
+              </a:rPr>
+              <a:t> </a:t>
+            </a:r>
+            <a:r>
+              <a:rPr sz="1400" dirty="0" err="1">
+                <a:solidFill>
+                  <a:srgbClr val="333333"/>
+                </a:solidFill>
+                <a:latin typeface="メイリオ"/>
+              </a:rPr>
+              <a:t>Playへの自動遷移は不可</a:t>
+            </a:r>
+            <a:r>
+              <a:rPr sz="1400" dirty="0">
+                <a:solidFill>
+                  <a:srgbClr val="333333"/>
+                </a:solidFill>
+                <a:latin typeface="メイリオ"/>
+              </a:rPr>
+              <a:t>）</a:t>
+            </a:r>
+          </a:p>
+          <a:p>
+            <a:pPr algn="l">
+              <a:lnSpc>
+                <a:spcPct val="115000"/>
+              </a:lnSpc>
+              <a:spcBef>
+                <a:spcPts val="1000"/>
+              </a:spcBef>
+            </a:pPr>
+            <a:r>
+              <a:rPr sz="1400" b="1" dirty="0">
                 <a:solidFill>
                   <a:srgbClr val="15133D"/>
                 </a:solidFill>
                 <a:latin typeface="メイリオ"/>
               </a:rPr>
-              <a:t>■ 表示内容の一致：</a:t>
-            </a:r>
-            <a:r>
-              <a:rPr sz="1400">
+              <a:t>■ </a:t>
+            </a:r>
+            <a:r>
+              <a:rPr sz="1400" b="1" dirty="0" err="1">
+                <a:solidFill>
+                  <a:srgbClr val="15133D"/>
+                </a:solidFill>
+                <a:latin typeface="メイリオ"/>
+              </a:rPr>
+              <a:t>表示内容の一致：</a:t>
+            </a:r>
+            <a:r>
+              <a:rPr sz="1400" dirty="0" err="1">
                 <a:solidFill>
                   <a:srgbClr val="333333"/>
                 </a:solidFill>
                 <a:latin typeface="メイリオ"/>
               </a:rPr>
-              <a:t>アプリとWebで同じ内容を表示すること（アプリはマイページ・Webはトップページ、のような構成は不可）</a:t>
+              <a:t>アプリとWebで同じ内容を表示すること</a:t>
+            </a:r>
+            <a:endParaRPr lang="en-US" sz="1400" dirty="0">
+              <a:solidFill>
+                <a:srgbClr val="333333"/>
+              </a:solidFill>
+              <a:latin typeface="メイリオ"/>
+            </a:endParaRPr>
+          </a:p>
+          <a:p>
+            <a:pPr algn="l">
+              <a:lnSpc>
+                <a:spcPct val="115000"/>
+              </a:lnSpc>
+              <a:spcBef>
+                <a:spcPts val="1000"/>
+              </a:spcBef>
+            </a:pPr>
+            <a:r>
+              <a:rPr sz="1400" dirty="0">
+                <a:solidFill>
+                  <a:srgbClr val="333333"/>
+                </a:solidFill>
+                <a:latin typeface="メイリオ"/>
+              </a:rPr>
+              <a:t>（</a:t>
+            </a:r>
+            <a:r>
+              <a:rPr sz="1400" dirty="0" err="1">
+                <a:solidFill>
+                  <a:srgbClr val="333333"/>
+                </a:solidFill>
+                <a:latin typeface="メイリオ"/>
+              </a:rPr>
+              <a:t>アプリはマイページ・Webはトップページ、のような構成は不可</a:t>
+            </a:r>
+            <a:r>
+              <a:rPr sz="1400" dirty="0">
+                <a:solidFill>
+                  <a:srgbClr val="333333"/>
+                </a:solidFill>
+                <a:latin typeface="メイリオ"/>
+              </a:rPr>
+              <a:t>）</a:t>
             </a:r>
           </a:p>
         </p:txBody>
@@ -10087,7 +10399,7 @@
           <a:p>
             <a:pPr algn="l"/>
             <a:r>
-              <a:rPr sz="2000" b="1">
+              <a:rPr lang="ja-JP" altLang="en-US" sz="2000" b="1" dirty="0">
                 <a:solidFill>
                   <a:srgbClr val="15133D"/>
                 </a:solidFill>
@@ -10095,6 +10407,12 @@
               </a:rPr>
               <a:t>変更点</a:t>
             </a:r>
+            <a:endParaRPr sz="2000" b="1" dirty="0">
+              <a:solidFill>
+                <a:srgbClr val="15133D"/>
+              </a:solidFill>
+              <a:latin typeface="メイリオ"/>
+            </a:endParaRPr>
           </a:p>
           <a:p>
             <a:pPr algn="l">
@@ -10106,13 +10424,41 @@
               </a:spcBef>
             </a:pPr>
             <a:r>
-              <a:rPr sz="1400">
+              <a:rPr sz="1400" dirty="0">
                 <a:solidFill>
                   <a:srgbClr val="333333"/>
                 </a:solidFill>
                 <a:latin typeface="メイリオ"/>
               </a:rPr>
-              <a:t>・請求書の発行元が、AGPからLBPMに変わった（2026年9月受領分＝10月初めに発行される請求書から）。</a:t>
+              <a:t>・</a:t>
+            </a:r>
+            <a:r>
+              <a:rPr sz="1400" dirty="0" err="1">
+                <a:solidFill>
+                  <a:srgbClr val="333333"/>
+                </a:solidFill>
+                <a:latin typeface="メイリオ"/>
+              </a:rPr>
+              <a:t>請求書の発行元が、AGPからLBPM</a:t>
+            </a:r>
+            <a:r>
+              <a:rPr lang="ja-JP" altLang="en-US" dirty="0">
+                <a:solidFill>
+                  <a:srgbClr val="333333"/>
+                </a:solidFill>
+                <a:latin typeface="メイリオ" panose="020B0604030504040204" pitchFamily="50" charset="-128"/>
+                <a:ea typeface="メイリオ" panose="020B0604030504040204" pitchFamily="50" charset="-128"/>
+              </a:rPr>
+              <a:t>へ</a:t>
+            </a:r>
+            <a:r>
+              <a:rPr sz="1400" dirty="0">
+                <a:solidFill>
+                  <a:srgbClr val="333333"/>
+                </a:solidFill>
+                <a:latin typeface="メイリオ"/>
+              </a:rPr>
+              <a:t>（2026年9月受領分＝10月初めに発行される請求書から）。</a:t>
             </a:r>
           </a:p>
           <a:p>
@@ -10125,14 +10471,29 @@
               </a:spcBef>
             </a:pPr>
             <a:r>
-              <a:rPr sz="1400">
+              <a:rPr sz="1400" dirty="0">
                 <a:solidFill>
                   <a:srgbClr val="333333"/>
                 </a:solidFill>
                 <a:latin typeface="メイリオ"/>
               </a:rPr>
-              <a:t>・LBPM上の発注画面と申請方法が新しくなった。</a:t>
-            </a:r>
+              <a:t>・</a:t>
+            </a:r>
+            <a:r>
+              <a:rPr sz="1400" dirty="0" err="1">
+                <a:solidFill>
+                  <a:srgbClr val="333333"/>
+                </a:solidFill>
+                <a:latin typeface="メイリオ"/>
+              </a:rPr>
+              <a:t>LBPM上の発注画面と申請方法</a:t>
+            </a:r>
+            <a:endParaRPr sz="1400" dirty="0">
+              <a:solidFill>
+                <a:srgbClr val="333333"/>
+              </a:solidFill>
+              <a:latin typeface="メイリオ"/>
+            </a:endParaRPr>
           </a:p>
         </p:txBody>
       </p:sp>

--- a/LINEOA媒体最新情報_2026年10月トレンドレポート.pptx
+++ b/LINEOA媒体最新情報_2026年10月トレンドレポート.pptx
@@ -14,6 +14,7 @@
     <p:sldId id="267" r:id="rId5"/>
     <p:sldId id="268" r:id="rId6"/>
     <p:sldId id="261" r:id="rId7"/>
+    <p:sldId id="269" r:id="rId21"/>
     <p:sldId id="263" r:id="rId8"/>
     <p:sldId id="264" r:id="rId9"/>
     <p:sldId id="265" r:id="rId10"/>
@@ -3529,6 +3530,1717 @@
                 <a:cs typeface="Meiryo"/>
                 <a:sym typeface="Meiryo"/>
               </a:rPr>
+              <a:t>飲食店（レストランオプションで</a:t>
+            </a:r>
+            <a:br>
+              <a:rPr lang="ja-JP" sz="1300" b="0" i="0" u="none" strike="noStrike" cap="none">
+                <a:solidFill>
+                  <a:schemeClr val="dk1"/>
+                </a:solidFill>
+                <a:latin typeface="メイリオ"/>
+                <a:ea typeface="Meiryo"/>
+                <a:cs typeface="Meiryo"/>
+                <a:sym typeface="Meiryo"/>
+              </a:rPr>
+            </a:br>
+            <a:r>
+              <a:rPr lang="ja-JP" sz="1300" b="0" i="0" u="none" strike="noStrike" cap="none">
+                <a:solidFill>
+                  <a:schemeClr val="dk1"/>
+                </a:solidFill>
+                <a:latin typeface="メイリオ"/>
+                <a:ea typeface="Meiryo"/>
+                <a:cs typeface="Meiryo"/>
+                <a:sym typeface="Meiryo"/>
+              </a:rPr>
+              <a:t>店内注文を導入予定）</a:t>
+            </a:r>
+            <a:endParaRPr/>
+          </a:p>
+        </p:txBody>
+      </p:sp>
+      <p:sp>
+        <p:nvSpPr>
+          <p:cNvPr id="44" name="Google Shape;44;p3"/>
+          <p:cNvSpPr txBox="1"/>
+          <p:nvPr/>
+        </p:nvSpPr>
+        <p:spPr>
+          <a:xfrm>
+            <a:off x="3296816" y="6597352"/>
+            <a:ext cx="6209091" cy="215444"/>
+          </a:xfrm>
+          <a:prstGeom prst="rect">
+            <a:avLst/>
+          </a:prstGeom>
+          <a:noFill/>
+          <a:ln>
+            <a:noFill/>
+          </a:ln>
+        </p:spPr>
+        <p:txBody>
+          <a:bodyPr spcFirstLastPara="1" wrap="square" lIns="91425" tIns="45700" rIns="91425" bIns="45700" anchor="t" anchorCtr="0">
+            <a:spAutoFit/>
+          </a:bodyPr>
+          <a:lstStyle/>
+          <a:p>
+            <a:pPr marL="0" marR="0" lvl="0" indent="0" algn="l" rtl="0">
+              <a:spcBef>
+                <a:spcPts val="0"/>
+              </a:spcBef>
+              <a:spcAft>
+                <a:spcPts val="0"/>
+              </a:spcAft>
+              <a:buNone/>
+            </a:pPr>
+            <a:r>
+              <a:rPr lang="ja-JP" sz="800" b="0" i="0" u="none" strike="noStrike" cap="none">
+                <a:solidFill>
+                  <a:schemeClr val="lt1"/>
+                </a:solidFill>
+                <a:latin typeface="メイリオ"/>
+                <a:ea typeface="Meiryo"/>
+                <a:cs typeface="Meiryo"/>
+                <a:sym typeface="Meiryo"/>
+              </a:rPr>
+              <a:t>出典：代理店情報</a:t>
+            </a:r>
+            <a:endParaRPr sz="800">
+              <a:solidFill>
+                <a:schemeClr val="lt1"/>
+              </a:solidFill>
+              <a:latin typeface="Meiryo"/>
+              <a:ea typeface="Meiryo"/>
+              <a:cs typeface="Meiryo"/>
+              <a:sym typeface="Meiryo"/>
+            </a:endParaRPr>
+          </a:p>
+        </p:txBody>
+      </p:sp>
+      <p:sp>
+        <p:nvSpPr>
+          <p:cNvPr id="45" name="Google Shape;45;p3"/>
+          <p:cNvSpPr/>
+          <p:nvPr/>
+        </p:nvSpPr>
+        <p:spPr>
+          <a:xfrm>
+            <a:off x="0" y="1234746"/>
+            <a:ext cx="9906000" cy="672259"/>
+          </a:xfrm>
+          <a:prstGeom prst="rect">
+            <a:avLst/>
+          </a:prstGeom>
+          <a:solidFill>
+            <a:srgbClr val="C5D8F1"/>
+          </a:solidFill>
+          <a:ln>
+            <a:noFill/>
+          </a:ln>
+        </p:spPr>
+        <p:txBody>
+          <a:bodyPr spcFirstLastPara="1" wrap="square" lIns="91425" tIns="45700" rIns="91425" bIns="45700" anchor="ctr" anchorCtr="0">
+            <a:noAutofit/>
+          </a:bodyPr>
+          <a:lstStyle/>
+          <a:p>
+            <a:pPr marL="0" marR="0" lvl="0" indent="0" algn="ctr" rtl="0">
+              <a:spcBef>
+                <a:spcPts val="0"/>
+              </a:spcBef>
+              <a:spcAft>
+                <a:spcPts val="0"/>
+              </a:spcAft>
+              <a:buNone/>
+            </a:pPr>
+            <a:r>
+              <a:rPr lang="ja-JP" sz="1600" b="1">
+                <a:solidFill>
+                  <a:srgbClr val="004DE6"/>
+                </a:solidFill>
+                <a:latin typeface="メイリオ"/>
+                <a:ea typeface="Meiryo"/>
+                <a:cs typeface="Meiryo"/>
+                <a:sym typeface="Meiryo"/>
+              </a:rPr>
+              <a:t>　　　　　　</a:t>
+            </a:r>
+            <a:endParaRPr sz="1800" b="1">
+              <a:solidFill>
+                <a:srgbClr val="004DE6"/>
+              </a:solidFill>
+              <a:latin typeface="Meiryo"/>
+              <a:ea typeface="Meiryo"/>
+              <a:cs typeface="Meiryo"/>
+              <a:sym typeface="Meiryo"/>
+            </a:endParaRPr>
+          </a:p>
+        </p:txBody>
+      </p:sp>
+      <p:sp>
+        <p:nvSpPr>
+          <p:cNvPr id="46" name="Google Shape;46;p3"/>
+          <p:cNvSpPr/>
+          <p:nvPr/>
+        </p:nvSpPr>
+        <p:spPr>
+          <a:xfrm>
+            <a:off x="1089832" y="1437370"/>
+            <a:ext cx="7031520" cy="338554"/>
+          </a:xfrm>
+          <a:prstGeom prst="rect">
+            <a:avLst/>
+          </a:prstGeom>
+          <a:noFill/>
+          <a:ln>
+            <a:noFill/>
+          </a:ln>
+        </p:spPr>
+        <p:txBody>
+          <a:bodyPr spcFirstLastPara="1" wrap="square" lIns="91425" tIns="45700" rIns="91425" bIns="45700" anchor="t" anchorCtr="0">
+            <a:spAutoFit/>
+          </a:bodyPr>
+          <a:lstStyle/>
+          <a:p>
+            <a:pPr marL="0" marR="0" lvl="0" indent="0" algn="l" rtl="0">
+              <a:spcBef>
+                <a:spcPts val="0"/>
+              </a:spcBef>
+              <a:spcAft>
+                <a:spcPts val="0"/>
+              </a:spcAft>
+              <a:buNone/>
+            </a:pPr>
+            <a:r>
+              <a:rPr lang="ja-JP" sz="1600" b="1">
+                <a:solidFill>
+                  <a:srgbClr val="004DE6"/>
+                </a:solidFill>
+                <a:latin typeface="メイリオ"/>
+                <a:ea typeface="Meiryo"/>
+                <a:cs typeface="Meiryo"/>
+                <a:sym typeface="Meiryo"/>
+              </a:rPr>
+              <a:t>【レストランオプション】一部機材の価格改定</a:t>
+            </a:r>
+            <a:endParaRPr sz="1600" b="1">
+              <a:solidFill>
+                <a:srgbClr val="004DE6"/>
+              </a:solidFill>
+              <a:latin typeface="Meiryo"/>
+              <a:ea typeface="Meiryo"/>
+              <a:cs typeface="Meiryo"/>
+              <a:sym typeface="Meiryo"/>
+            </a:endParaRPr>
+          </a:p>
+        </p:txBody>
+      </p:sp>
+      <p:sp>
+        <p:nvSpPr>
+          <p:cNvPr id="47" name="Google Shape;47;p3"/>
+          <p:cNvSpPr txBox="1"/>
+          <p:nvPr/>
+        </p:nvSpPr>
+        <p:spPr>
+          <a:xfrm>
+            <a:off x="182880" y="88175"/>
+            <a:ext cx="7512385" cy="365091"/>
+          </a:xfrm>
+          <a:prstGeom prst="rect">
+            <a:avLst/>
+          </a:prstGeom>
+          <a:noFill/>
+          <a:ln>
+            <a:noFill/>
+          </a:ln>
+        </p:spPr>
+        <p:txBody>
+          <a:bodyPr spcFirstLastPara="1" wrap="square" lIns="91425" tIns="72000" rIns="91425" bIns="45700" anchor="t" anchorCtr="0">
+            <a:spAutoFit/>
+          </a:bodyPr>
+          <a:lstStyle/>
+          <a:p>
+            <a:pPr marL="0" marR="0" lvl="0" indent="0" algn="l" rtl="0">
+              <a:spcBef>
+                <a:spcPts val="0"/>
+              </a:spcBef>
+              <a:spcAft>
+                <a:spcPts val="0"/>
+              </a:spcAft>
+              <a:buClr>
+                <a:schemeClr val="dk1"/>
+              </a:buClr>
+              <a:buSzPts val="1600"/>
+              <a:buFont typeface="Arial"/>
+              <a:buNone/>
+            </a:pPr>
+            <a:r>
+              <a:rPr lang="ja-JP" sz="1600" b="0" u="none">
+                <a:solidFill>
+                  <a:schemeClr val="dk1"/>
+                </a:solidFill>
+                <a:latin typeface="メイリオ"/>
+                <a:ea typeface="Meiryo"/>
+                <a:cs typeface="Meiryo"/>
+                <a:sym typeface="Meiryo"/>
+              </a:rPr>
+              <a:t>    今後のアップデート情報</a:t>
+            </a:r>
+            <a:endParaRPr sz="1600" b="0" u="none">
+              <a:solidFill>
+                <a:schemeClr val="dk1"/>
+              </a:solidFill>
+              <a:latin typeface="Meiryo"/>
+              <a:ea typeface="Meiryo"/>
+              <a:cs typeface="Meiryo"/>
+              <a:sym typeface="Meiryo"/>
+            </a:endParaRPr>
+          </a:p>
+        </p:txBody>
+      </p:sp>
+      <p:sp>
+        <p:nvSpPr>
+          <p:cNvPr id="48" name="Google Shape;48;p3"/>
+          <p:cNvSpPr/>
+          <p:nvPr/>
+        </p:nvSpPr>
+        <p:spPr>
+          <a:xfrm>
+            <a:off x="5797260" y="730955"/>
+            <a:ext cx="829618" cy="435690"/>
+          </a:xfrm>
+          <a:prstGeom prst="rect">
+            <a:avLst/>
+          </a:prstGeom>
+          <a:solidFill>
+            <a:schemeClr val="bg1"/>
+          </a:solidFill>
+          <a:ln w="9525" cap="flat" cmpd="sng">
+            <a:solidFill>
+              <a:srgbClr val="4F81BD"/>
+            </a:solidFill>
+            <a:prstDash val="sysDash"/>
+            <a:round/>
+            <a:headEnd type="none" w="sm" len="sm"/>
+            <a:tailEnd type="none" w="sm" len="sm"/>
+          </a:ln>
+        </p:spPr>
+        <p:txBody>
+          <a:bodyPr spcFirstLastPara="1" wrap="square" lIns="91425" tIns="45700" rIns="91425" bIns="45700" anchor="ctr" anchorCtr="0">
+            <a:noAutofit/>
+          </a:bodyPr>
+          <a:lstStyle/>
+          <a:p>
+            <a:pPr marL="0" marR="0" lvl="0" indent="0" algn="ctr" rtl="0">
+              <a:spcBef>
+                <a:spcPts val="0"/>
+              </a:spcBef>
+              <a:spcAft>
+                <a:spcPts val="0"/>
+              </a:spcAft>
+              <a:buClr>
+                <a:schemeClr val="dk1"/>
+              </a:buClr>
+              <a:buSzPts val="1000"/>
+              <a:buFont typeface="Meiryo"/>
+              <a:buNone/>
+            </a:pPr>
+            <a:r>
+              <a:rPr lang="ja-JP" sz="1000">
+                <a:solidFill>
+                  <a:schemeClr val="dk1"/>
+                </a:solidFill>
+                <a:latin typeface="メイリオ"/>
+                <a:ea typeface="Meiryo"/>
+                <a:cs typeface="Meiryo"/>
+                <a:sym typeface="Meiryo"/>
+              </a:rPr>
+              <a:t>開発</a:t>
+            </a:r>
+            <a:endParaRPr sz="1000">
+              <a:solidFill>
+                <a:schemeClr val="dk1"/>
+              </a:solidFill>
+              <a:latin typeface="Meiryo"/>
+              <a:ea typeface="Meiryo"/>
+              <a:cs typeface="Meiryo"/>
+              <a:sym typeface="Meiryo"/>
+            </a:endParaRPr>
+          </a:p>
+          <a:p>
+            <a:pPr marL="0" marR="0" lvl="0" indent="0" algn="ctr" rtl="0">
+              <a:spcBef>
+                <a:spcPts val="0"/>
+              </a:spcBef>
+              <a:spcAft>
+                <a:spcPts val="0"/>
+              </a:spcAft>
+              <a:buClr>
+                <a:schemeClr val="dk1"/>
+              </a:buClr>
+              <a:buSzPts val="1000"/>
+              <a:buFont typeface="Meiryo"/>
+              <a:buNone/>
+            </a:pPr>
+            <a:r>
+              <a:rPr lang="ja-JP" sz="1000">
+                <a:solidFill>
+                  <a:schemeClr val="dk1"/>
+                </a:solidFill>
+                <a:latin typeface="メイリオ"/>
+                <a:ea typeface="Meiryo"/>
+                <a:cs typeface="Meiryo"/>
+                <a:sym typeface="Meiryo"/>
+              </a:rPr>
+              <a:t>LINE API</a:t>
+            </a:r>
+            <a:endParaRPr sz="1000">
+              <a:solidFill>
+                <a:schemeClr val="dk1"/>
+              </a:solidFill>
+              <a:latin typeface="Meiryo"/>
+              <a:ea typeface="Meiryo"/>
+              <a:cs typeface="Meiryo"/>
+              <a:sym typeface="Meiryo"/>
+            </a:endParaRPr>
+          </a:p>
+        </p:txBody>
+      </p:sp>
+      <p:sp>
+        <p:nvSpPr>
+          <p:cNvPr id="49" name="Google Shape;49;p3"/>
+          <p:cNvSpPr/>
+          <p:nvPr/>
+        </p:nvSpPr>
+        <p:spPr>
+          <a:xfrm>
+            <a:off x="4915470" y="730955"/>
+            <a:ext cx="829618" cy="435690"/>
+          </a:xfrm>
+          <a:prstGeom prst="rect">
+            <a:avLst/>
+          </a:prstGeom>
+          <a:solidFill>
+            <a:schemeClr val="bg1"/>
+          </a:solidFill>
+          <a:ln w="9525" cap="flat" cmpd="sng">
+            <a:solidFill>
+              <a:srgbClr val="4F81BD"/>
+            </a:solidFill>
+            <a:prstDash val="sysDash"/>
+            <a:round/>
+            <a:headEnd type="none" w="sm" len="sm"/>
+            <a:tailEnd type="none" w="sm" len="sm"/>
+          </a:ln>
+        </p:spPr>
+        <p:txBody>
+          <a:bodyPr spcFirstLastPara="1" wrap="square" lIns="91425" tIns="45700" rIns="91425" bIns="45700" anchor="ctr" anchorCtr="0">
+            <a:noAutofit/>
+          </a:bodyPr>
+          <a:lstStyle/>
+          <a:p>
+            <a:pPr marL="0" marR="0" lvl="0" indent="0" algn="ctr" rtl="0">
+              <a:spcBef>
+                <a:spcPts val="0"/>
+              </a:spcBef>
+              <a:spcAft>
+                <a:spcPts val="0"/>
+              </a:spcAft>
+              <a:buNone/>
+            </a:pPr>
+            <a:r>
+              <a:rPr lang="ja-JP" sz="1000">
+                <a:solidFill>
+                  <a:schemeClr val="dk1"/>
+                </a:solidFill>
+                <a:latin typeface="メイリオ"/>
+                <a:ea typeface="Meiryo"/>
+                <a:cs typeface="Meiryo"/>
+                <a:sym typeface="Meiryo"/>
+              </a:rPr>
+              <a:t>LINE公式アカウント</a:t>
+            </a:r>
+            <a:endParaRPr sz="1000">
+              <a:solidFill>
+                <a:schemeClr val="dk1"/>
+              </a:solidFill>
+              <a:latin typeface="Meiryo"/>
+              <a:ea typeface="Meiryo"/>
+              <a:cs typeface="Meiryo"/>
+              <a:sym typeface="Meiryo"/>
+            </a:endParaRPr>
+          </a:p>
+        </p:txBody>
+      </p:sp>
+      <p:sp>
+        <p:nvSpPr>
+          <p:cNvPr id="50" name="Google Shape;50;p3"/>
+          <p:cNvSpPr/>
+          <p:nvPr/>
+        </p:nvSpPr>
+        <p:spPr>
+          <a:xfrm>
+            <a:off x="0" y="1890267"/>
+            <a:ext cx="9906000" cy="733579"/>
+          </a:xfrm>
+          <a:prstGeom prst="rect">
+            <a:avLst/>
+          </a:prstGeom>
+          <a:solidFill>
+            <a:srgbClr val="F2F2F2"/>
+          </a:solidFill>
+          <a:ln>
+            <a:noFill/>
+          </a:ln>
+        </p:spPr>
+        <p:txBody>
+          <a:bodyPr spcFirstLastPara="1" wrap="square" lIns="91425" tIns="45700" rIns="91425" bIns="45700" anchor="ctr" anchorCtr="0">
+            <a:noAutofit/>
+          </a:bodyPr>
+          <a:lstStyle/>
+          <a:p>
+            <a:pPr marL="0" marR="0" lvl="0" indent="0" algn="ctr" rtl="0">
+              <a:spcBef>
+                <a:spcPts val="0"/>
+              </a:spcBef>
+              <a:spcAft>
+                <a:spcPts val="0"/>
+              </a:spcAft>
+              <a:buNone/>
+            </a:pPr>
+            <a:endParaRPr sz="1200">
+              <a:solidFill>
+                <a:schemeClr val="dk1"/>
+              </a:solidFill>
+              <a:latin typeface="Meiryo"/>
+              <a:ea typeface="Meiryo"/>
+              <a:cs typeface="Meiryo"/>
+              <a:sym typeface="Meiryo"/>
+            </a:endParaRPr>
+          </a:p>
+        </p:txBody>
+      </p:sp>
+      <p:sp>
+        <p:nvSpPr>
+          <p:cNvPr id="51" name="Google Shape;51;p3"/>
+          <p:cNvSpPr/>
+          <p:nvPr/>
+        </p:nvSpPr>
+        <p:spPr>
+          <a:xfrm>
+            <a:off x="544108" y="1961282"/>
+            <a:ext cx="8817783" cy="646331"/>
+          </a:xfrm>
+          <a:prstGeom prst="rect">
+            <a:avLst/>
+          </a:prstGeom>
+          <a:noFill/>
+          <a:ln>
+            <a:noFill/>
+          </a:ln>
+        </p:spPr>
+        <p:txBody>
+          <a:bodyPr spcFirstLastPara="1" wrap="square" lIns="91425" tIns="45700" rIns="91425" bIns="45700" anchor="t" anchorCtr="0">
+            <a:spAutoFit/>
+          </a:bodyPr>
+          <a:lstStyle/>
+          <a:p>
+            <a:pPr marL="0" marR="0" lvl="0" indent="0" algn="ctr" rtl="0">
+              <a:spcBef>
+                <a:spcPts val="0"/>
+              </a:spcBef>
+              <a:spcAft>
+                <a:spcPts val="0"/>
+              </a:spcAft>
+              <a:buNone/>
+            </a:pPr>
+            <a:r>
+              <a:rPr lang="ja-JP" sz="1200" b="1">
+                <a:solidFill>
+                  <a:schemeClr val="dk1"/>
+                </a:solidFill>
+                <a:latin typeface="メイリオ"/>
+                <a:ea typeface="Meiryo"/>
+                <a:cs typeface="Meiryo"/>
+                <a:sym typeface="Meiryo"/>
+              </a:rPr>
+              <a:t>仕入れ先であるエプソン販売株式会社の価格改定に伴い、</a:t>
+            </a:r>
+            <a:endParaRPr sz="1200" b="1">
+              <a:solidFill>
+                <a:schemeClr val="dk1"/>
+              </a:solidFill>
+              <a:latin typeface="Meiryo"/>
+              <a:ea typeface="Meiryo"/>
+              <a:cs typeface="Meiryo"/>
+              <a:sym typeface="Meiryo"/>
+            </a:endParaRPr>
+          </a:p>
+          <a:p>
+            <a:pPr marL="0" marR="0" lvl="0" indent="0" algn="ctr" rtl="0">
+              <a:spcBef>
+                <a:spcPts val="0"/>
+              </a:spcBef>
+              <a:spcAft>
+                <a:spcPts val="0"/>
+              </a:spcAft>
+              <a:buNone/>
+            </a:pPr>
+            <a:r>
+              <a:rPr lang="ja-JP" sz="1200" b="1">
+                <a:solidFill>
+                  <a:schemeClr val="dk1"/>
+                </a:solidFill>
+                <a:latin typeface="メイリオ"/>
+                <a:ea typeface="Meiryo"/>
+                <a:cs typeface="Meiryo"/>
+                <a:sym typeface="Meiryo"/>
+              </a:rPr>
+              <a:t>レストランオプションで提供している一部機材の販売価格が改定（値上げ）される。</a:t>
+            </a:r>
+            <a:endParaRPr/>
+          </a:p>
+          <a:p>
+            <a:pPr marL="0" marR="0" lvl="0" indent="0" algn="ctr" rtl="0">
+              <a:spcBef>
+                <a:spcPts val="0"/>
+              </a:spcBef>
+              <a:spcAft>
+                <a:spcPts val="0"/>
+              </a:spcAft>
+              <a:buNone/>
+            </a:pPr>
+            <a:r>
+              <a:rPr lang="ja-JP" sz="1200" b="1">
+                <a:solidFill>
+                  <a:schemeClr val="dk1"/>
+                </a:solidFill>
+                <a:latin typeface="メイリオ"/>
+                <a:ea typeface="Meiryo"/>
+                <a:cs typeface="Meiryo"/>
+                <a:sym typeface="Meiryo"/>
+              </a:rPr>
+              <a:t>2027年2月上旬以降のお申し込み分から新価格を適用。</a:t>
+            </a:r>
+            <a:endParaRPr sz="1400" b="1">
+              <a:solidFill>
+                <a:schemeClr val="dk1"/>
+              </a:solidFill>
+              <a:latin typeface="Meiryo"/>
+              <a:ea typeface="Meiryo"/>
+              <a:cs typeface="Meiryo"/>
+              <a:sym typeface="Meiryo"/>
+            </a:endParaRPr>
+          </a:p>
+        </p:txBody>
+      </p:sp>
+      <p:sp>
+        <p:nvSpPr>
+          <p:cNvPr id="52" name="Google Shape;52;p3"/>
+          <p:cNvSpPr/>
+          <p:nvPr/>
+        </p:nvSpPr>
+        <p:spPr>
+          <a:xfrm>
+            <a:off x="351381" y="2714173"/>
+            <a:ext cx="5200000" cy="338554"/>
+          </a:xfrm>
+          <a:prstGeom prst="rect">
+            <a:avLst/>
+          </a:prstGeom>
+          <a:noFill/>
+          <a:ln>
+            <a:noFill/>
+          </a:ln>
+        </p:spPr>
+        <p:txBody>
+          <a:bodyPr spcFirstLastPara="1" wrap="square" lIns="91425" tIns="45700" rIns="91425" bIns="45700" anchor="t" anchorCtr="0">
+            <a:noAutofit/>
+          </a:bodyPr>
+          <a:lstStyle/>
+          <a:p>
+            <a:pPr marL="0" marR="0" lvl="0" indent="0" algn="l" rtl="0">
+              <a:spcBef>
+                <a:spcPts val="0"/>
+              </a:spcBef>
+              <a:spcAft>
+                <a:spcPts val="0"/>
+              </a:spcAft>
+              <a:buNone/>
+            </a:pPr>
+            <a:r>
+              <a:rPr lang="ja-JP" sz="1400" b="1">
+                <a:solidFill>
+                  <a:srgbClr val="15133D"/>
+                </a:solidFill>
+                <a:latin typeface="メイリオ"/>
+                <a:ea typeface="Meiryo"/>
+                <a:cs typeface="Meiryo"/>
+                <a:sym typeface="Meiryo"/>
+              </a:rPr>
+              <a:t>■ 詳細</a:t>
+            </a:r>
+            <a:endParaRPr/>
+          </a:p>
+        </p:txBody>
+      </p:sp>
+      <p:grpSp>
+        <p:nvGrpSpPr>
+          <p:cNvPr id="53" name="Google Shape;53;p3"/>
+          <p:cNvGrpSpPr/>
+          <p:nvPr/>
+        </p:nvGrpSpPr>
+        <p:grpSpPr>
+          <a:xfrm>
+            <a:off x="8473303" y="730955"/>
+            <a:ext cx="1376241" cy="1131930"/>
+            <a:chOff x="0" y="0"/>
+            <a:chExt cx="1376241" cy="1131930"/>
+          </a:xfrm>
+        </p:grpSpPr>
+        <p:sp>
+          <p:nvSpPr>
+            <p:cNvPr id="54" name="Google Shape;54;p3"/>
+            <p:cNvSpPr/>
+            <p:nvPr/>
+          </p:nvSpPr>
+          <p:spPr>
+            <a:xfrm rot="10800000">
+              <a:off x="0" y="0"/>
+              <a:ext cx="1376241" cy="282982"/>
+            </a:xfrm>
+            <a:prstGeom prst="trapezoid">
+              <a:avLst>
+                <a:gd name="adj" fmla="val 60792"/>
+              </a:avLst>
+            </a:prstGeom>
+            <a:solidFill>
+              <a:srgbClr val="EAEDF5"/>
+            </a:solidFill>
+            <a:ln w="25400" cap="flat" cmpd="sng">
+              <a:solidFill>
+                <a:schemeClr val="dk2"/>
+              </a:solidFill>
+              <a:prstDash val="solid"/>
+              <a:round/>
+              <a:headEnd type="none" w="sm" len="sm"/>
+              <a:tailEnd type="none" w="sm" len="sm"/>
+            </a:ln>
+          </p:spPr>
+          <p:txBody>
+            <a:bodyPr spcFirstLastPara="1" wrap="square" lIns="91425" tIns="91425" rIns="91425" bIns="91425" anchor="ctr" anchorCtr="0">
+              <a:noAutofit/>
+            </a:bodyPr>
+            <a:lstStyle/>
+            <a:p>
+              <a:pPr marL="0" lvl="0" indent="0" algn="l" rtl="0">
+                <a:spcBef>
+                  <a:spcPts val="0"/>
+                </a:spcBef>
+                <a:spcAft>
+                  <a:spcPts val="0"/>
+                </a:spcAft>
+                <a:buNone/>
+              </a:pPr>
+              <a:endParaRPr/>
+            </a:p>
+          </p:txBody>
+        </p:sp>
+        <p:sp>
+          <p:nvSpPr>
+            <p:cNvPr id="55" name="Google Shape;55;p3"/>
+            <p:cNvSpPr txBox="1"/>
+            <p:nvPr/>
+          </p:nvSpPr>
+          <p:spPr>
+            <a:xfrm>
+              <a:off x="240842" y="0"/>
+              <a:ext cx="894556" cy="282982"/>
+            </a:xfrm>
+            <a:prstGeom prst="rect">
+              <a:avLst/>
+            </a:prstGeom>
+            <a:noFill/>
+            <a:ln>
+              <a:noFill/>
+            </a:ln>
+          </p:spPr>
+          <p:txBody>
+            <a:bodyPr spcFirstLastPara="1" wrap="square" lIns="10150" tIns="10150" rIns="10150" bIns="10150" anchor="ctr" anchorCtr="0">
+              <a:noAutofit/>
+            </a:bodyPr>
+            <a:lstStyle/>
+            <a:p>
+              <a:pPr marL="0" marR="0" lvl="0" indent="0" algn="ctr" rtl="0">
+                <a:lnSpc>
+                  <a:spcPct val="90000"/>
+                </a:lnSpc>
+                <a:spcBef>
+                  <a:spcPts val="0"/>
+                </a:spcBef>
+                <a:spcAft>
+                  <a:spcPts val="0"/>
+                </a:spcAft>
+                <a:buClr>
+                  <a:srgbClr val="262626"/>
+                </a:buClr>
+                <a:buSzPts val="800"/>
+                <a:buFont typeface="Arial"/>
+                <a:buNone/>
+              </a:pPr>
+              <a:r>
+                <a:rPr lang="ja-JP" sz="800" b="1">
+                  <a:solidFill>
+                    <a:srgbClr val="262626"/>
+                  </a:solidFill>
+                  <a:latin typeface="Arial"/>
+                  <a:ea typeface="Arial"/>
+                  <a:cs typeface="Arial"/>
+                  <a:sym typeface="Arial"/>
+                </a:rPr>
+                <a:t>認知</a:t>
+              </a:r>
+              <a:endParaRPr/>
+            </a:p>
+          </p:txBody>
+        </p:sp>
+        <p:sp>
+          <p:nvSpPr>
+            <p:cNvPr id="56" name="Google Shape;56;p3"/>
+            <p:cNvSpPr/>
+            <p:nvPr/>
+          </p:nvSpPr>
+          <p:spPr>
+            <a:xfrm rot="10800000">
+              <a:off x="172030" y="282982"/>
+              <a:ext cx="1032180" cy="282982"/>
+            </a:xfrm>
+            <a:prstGeom prst="trapezoid">
+              <a:avLst>
+                <a:gd name="adj" fmla="val 60792"/>
+              </a:avLst>
+            </a:prstGeom>
+            <a:solidFill>
+              <a:schemeClr val="lt1"/>
+            </a:solidFill>
+            <a:ln w="25400" cap="flat" cmpd="sng">
+              <a:solidFill>
+                <a:schemeClr val="dk2"/>
+              </a:solidFill>
+              <a:prstDash val="solid"/>
+              <a:round/>
+              <a:headEnd type="none" w="sm" len="sm"/>
+              <a:tailEnd type="none" w="sm" len="sm"/>
+            </a:ln>
+          </p:spPr>
+          <p:txBody>
+            <a:bodyPr spcFirstLastPara="1" wrap="square" lIns="91425" tIns="91425" rIns="91425" bIns="91425" anchor="ctr" anchorCtr="0">
+              <a:noAutofit/>
+            </a:bodyPr>
+            <a:lstStyle/>
+            <a:p>
+              <a:pPr marL="0" lvl="0" indent="0" algn="l" rtl="0">
+                <a:spcBef>
+                  <a:spcPts val="0"/>
+                </a:spcBef>
+                <a:spcAft>
+                  <a:spcPts val="0"/>
+                </a:spcAft>
+                <a:buNone/>
+              </a:pPr>
+              <a:endParaRPr/>
+            </a:p>
+          </p:txBody>
+        </p:sp>
+        <p:sp>
+          <p:nvSpPr>
+            <p:cNvPr id="57" name="Google Shape;57;p3"/>
+            <p:cNvSpPr txBox="1"/>
+            <p:nvPr/>
+          </p:nvSpPr>
+          <p:spPr>
+            <a:xfrm>
+              <a:off x="352661" y="282982"/>
+              <a:ext cx="670917" cy="282982"/>
+            </a:xfrm>
+            <a:prstGeom prst="rect">
+              <a:avLst/>
+            </a:prstGeom>
+            <a:noFill/>
+            <a:ln>
+              <a:noFill/>
+            </a:ln>
+          </p:spPr>
+          <p:txBody>
+            <a:bodyPr spcFirstLastPara="1" wrap="square" lIns="10150" tIns="10150" rIns="10150" bIns="10150" anchor="ctr" anchorCtr="0">
+              <a:noAutofit/>
+            </a:bodyPr>
+            <a:lstStyle/>
+            <a:p>
+              <a:pPr marL="0" marR="0" lvl="0" indent="0" algn="ctr" rtl="0">
+                <a:lnSpc>
+                  <a:spcPct val="90000"/>
+                </a:lnSpc>
+                <a:spcBef>
+                  <a:spcPts val="0"/>
+                </a:spcBef>
+                <a:spcAft>
+                  <a:spcPts val="0"/>
+                </a:spcAft>
+                <a:buClr>
+                  <a:srgbClr val="262626"/>
+                </a:buClr>
+                <a:buSzPts val="800"/>
+                <a:buFont typeface="Arial"/>
+                <a:buNone/>
+              </a:pPr>
+              <a:r>
+                <a:rPr lang="ja-JP" sz="800" b="1">
+                  <a:solidFill>
+                    <a:srgbClr val="262626"/>
+                  </a:solidFill>
+                  <a:latin typeface="Arial"/>
+                  <a:ea typeface="Arial"/>
+                  <a:cs typeface="Arial"/>
+                  <a:sym typeface="Arial"/>
+                </a:rPr>
+                <a:t>検討</a:t>
+              </a:r>
+              <a:endParaRPr/>
+            </a:p>
+          </p:txBody>
+        </p:sp>
+        <p:sp>
+          <p:nvSpPr>
+            <p:cNvPr id="58" name="Google Shape;58;p3"/>
+            <p:cNvSpPr/>
+            <p:nvPr/>
+          </p:nvSpPr>
+          <p:spPr>
+            <a:xfrm rot="10800000">
+              <a:off x="344060" y="565965"/>
+              <a:ext cx="688120" cy="282982"/>
+            </a:xfrm>
+            <a:prstGeom prst="trapezoid">
+              <a:avLst>
+                <a:gd name="adj" fmla="val 60792"/>
+              </a:avLst>
+            </a:prstGeom>
+            <a:solidFill>
+              <a:schemeClr val="lt1"/>
+            </a:solidFill>
+            <a:ln w="25400" cap="flat" cmpd="sng">
+              <a:solidFill>
+                <a:schemeClr val="dk2"/>
+              </a:solidFill>
+              <a:prstDash val="solid"/>
+              <a:round/>
+              <a:headEnd type="none" w="sm" len="sm"/>
+              <a:tailEnd type="none" w="sm" len="sm"/>
+            </a:ln>
+          </p:spPr>
+          <p:txBody>
+            <a:bodyPr spcFirstLastPara="1" wrap="square" lIns="91425" tIns="91425" rIns="91425" bIns="91425" anchor="ctr" anchorCtr="0">
+              <a:noAutofit/>
+            </a:bodyPr>
+            <a:lstStyle/>
+            <a:p>
+              <a:pPr marL="0" lvl="0" indent="0" algn="l" rtl="0">
+                <a:spcBef>
+                  <a:spcPts val="0"/>
+                </a:spcBef>
+                <a:spcAft>
+                  <a:spcPts val="0"/>
+                </a:spcAft>
+                <a:buNone/>
+              </a:pPr>
+              <a:endParaRPr/>
+            </a:p>
+          </p:txBody>
+        </p:sp>
+        <p:sp>
+          <p:nvSpPr>
+            <p:cNvPr id="59" name="Google Shape;59;p3"/>
+            <p:cNvSpPr txBox="1"/>
+            <p:nvPr/>
+          </p:nvSpPr>
+          <p:spPr>
+            <a:xfrm>
+              <a:off x="464481" y="565965"/>
+              <a:ext cx="447278" cy="282982"/>
+            </a:xfrm>
+            <a:prstGeom prst="rect">
+              <a:avLst/>
+            </a:prstGeom>
+            <a:noFill/>
+            <a:ln>
+              <a:noFill/>
+            </a:ln>
+          </p:spPr>
+          <p:txBody>
+            <a:bodyPr spcFirstLastPara="1" wrap="square" lIns="10150" tIns="10150" rIns="10150" bIns="10150" anchor="ctr" anchorCtr="0">
+              <a:noAutofit/>
+            </a:bodyPr>
+            <a:lstStyle/>
+            <a:p>
+              <a:pPr marL="0" marR="0" lvl="0" indent="0" algn="ctr" rtl="0">
+                <a:lnSpc>
+                  <a:spcPct val="90000"/>
+                </a:lnSpc>
+                <a:spcBef>
+                  <a:spcPts val="0"/>
+                </a:spcBef>
+                <a:spcAft>
+                  <a:spcPts val="0"/>
+                </a:spcAft>
+                <a:buClr>
+                  <a:srgbClr val="262626"/>
+                </a:buClr>
+                <a:buSzPts val="800"/>
+                <a:buFont typeface="Arial"/>
+                <a:buNone/>
+              </a:pPr>
+              <a:r>
+                <a:rPr lang="ja-JP" sz="800" b="1">
+                  <a:solidFill>
+                    <a:srgbClr val="262626"/>
+                  </a:solidFill>
+                  <a:latin typeface="Arial"/>
+                  <a:ea typeface="Arial"/>
+                  <a:cs typeface="Arial"/>
+                  <a:sym typeface="Arial"/>
+                </a:rPr>
+                <a:t>獲得</a:t>
+              </a:r>
+              <a:endParaRPr/>
+            </a:p>
+          </p:txBody>
+        </p:sp>
+        <p:sp>
+          <p:nvSpPr>
+            <p:cNvPr id="60" name="Google Shape;60;p3"/>
+            <p:cNvSpPr/>
+            <p:nvPr/>
+          </p:nvSpPr>
+          <p:spPr>
+            <a:xfrm rot="10800000">
+              <a:off x="516090" y="848948"/>
+              <a:ext cx="344060" cy="282982"/>
+            </a:xfrm>
+            <a:prstGeom prst="trapezoid">
+              <a:avLst>
+                <a:gd name="adj" fmla="val 60792"/>
+              </a:avLst>
+            </a:prstGeom>
+            <a:noFill/>
+            <a:ln w="25400" cap="flat" cmpd="sng">
+              <a:solidFill>
+                <a:schemeClr val="dk2"/>
+              </a:solidFill>
+              <a:prstDash val="solid"/>
+              <a:round/>
+              <a:headEnd type="none" w="sm" len="sm"/>
+              <a:tailEnd type="none" w="sm" len="sm"/>
+            </a:ln>
+          </p:spPr>
+          <p:txBody>
+            <a:bodyPr spcFirstLastPara="1" wrap="square" lIns="91425" tIns="91425" rIns="91425" bIns="91425" anchor="ctr" anchorCtr="0">
+              <a:noAutofit/>
+            </a:bodyPr>
+            <a:lstStyle/>
+            <a:p>
+              <a:pPr marL="0" lvl="0" indent="0" algn="l" rtl="0">
+                <a:spcBef>
+                  <a:spcPts val="0"/>
+                </a:spcBef>
+                <a:spcAft>
+                  <a:spcPts val="0"/>
+                </a:spcAft>
+                <a:buNone/>
+              </a:pPr>
+              <a:endParaRPr/>
+            </a:p>
+          </p:txBody>
+        </p:sp>
+        <p:sp>
+          <p:nvSpPr>
+            <p:cNvPr id="61" name="Google Shape;61;p3"/>
+            <p:cNvSpPr txBox="1"/>
+            <p:nvPr/>
+          </p:nvSpPr>
+          <p:spPr>
+            <a:xfrm>
+              <a:off x="516090" y="848948"/>
+              <a:ext cx="344060" cy="282982"/>
+            </a:xfrm>
+            <a:prstGeom prst="rect">
+              <a:avLst/>
+            </a:prstGeom>
+            <a:noFill/>
+            <a:ln>
+              <a:noFill/>
+            </a:ln>
+          </p:spPr>
+          <p:txBody>
+            <a:bodyPr spcFirstLastPara="1" wrap="square" lIns="10150" tIns="10150" rIns="10150" bIns="10150" anchor="ctr" anchorCtr="0">
+              <a:noAutofit/>
+            </a:bodyPr>
+            <a:lstStyle/>
+            <a:p>
+              <a:pPr marL="0" marR="0" lvl="0" indent="0" algn="ctr" rtl="0">
+                <a:lnSpc>
+                  <a:spcPct val="90000"/>
+                </a:lnSpc>
+                <a:spcBef>
+                  <a:spcPts val="0"/>
+                </a:spcBef>
+                <a:spcAft>
+                  <a:spcPts val="0"/>
+                </a:spcAft>
+                <a:buClr>
+                  <a:srgbClr val="262626"/>
+                </a:buClr>
+                <a:buSzPts val="800"/>
+                <a:buFont typeface="Arial"/>
+                <a:buNone/>
+              </a:pPr>
+              <a:r>
+                <a:rPr lang="ja-JP" sz="800" b="1">
+                  <a:solidFill>
+                    <a:srgbClr val="262626"/>
+                  </a:solidFill>
+                  <a:latin typeface="Arial"/>
+                  <a:ea typeface="Arial"/>
+                  <a:cs typeface="Arial"/>
+                  <a:sym typeface="Arial"/>
+                </a:rPr>
+                <a:t>伸長</a:t>
+              </a:r>
+              <a:endParaRPr/>
+            </a:p>
+          </p:txBody>
+        </p:sp>
+      </p:grpSp>
+      <p:pic>
+        <p:nvPicPr>
+          <p:cNvPr id="62" name="Google Shape;62;p3" descr="LINE公式アカウントのロゴの使用方法とは？種類やダウンロード方法、利用時の注意点を紹介 | Mico（ミコ）"/>
+          <p:cNvPicPr preferRelativeResize="0"/>
+          <p:nvPr/>
+        </p:nvPicPr>
+        <p:blipFill rotWithShape="1">
+          <a:blip r:embed="rId2">
+            <a:alphaModFix/>
+          </a:blip>
+          <a:srcRect/>
+          <a:stretch/>
+        </p:blipFill>
+        <p:spPr>
+          <a:xfrm>
+            <a:off x="351381" y="1234746"/>
+            <a:ext cx="656177" cy="655521"/>
+          </a:xfrm>
+          <a:prstGeom prst="rect">
+            <a:avLst/>
+          </a:prstGeom>
+          <a:noFill/>
+          <a:ln>
+            <a:noFill/>
+          </a:ln>
+        </p:spPr>
+      </p:pic>
+      <p:sp>
+        <p:nvSpPr>
+          <p:cNvPr id="63" name="Rounded Rectangle 62"/>
+          <p:cNvSpPr/>
+          <p:nvPr/>
+        </p:nvSpPr>
+        <p:spPr>
+          <a:xfrm>
+            <a:off x="544108" y="3068960"/>
+            <a:ext cx="4322443" cy="1120584"/>
+          </a:xfrm>
+          <a:prstGeom prst="roundRect">
+            <a:avLst>
+              <a:gd name="adj" fmla="val 6000"/>
+            </a:avLst>
+          </a:prstGeom>
+          <a:solidFill>
+            <a:srgbClr val="EAF0FA"/>
+          </a:solidFill>
+          <a:ln w="12700">
+            <a:solidFill>
+              <a:srgbClr val="3467B2"/>
+            </a:solidFill>
+          </a:ln>
+          <a:effectLst/>
+        </p:spPr>
+        <p:style>
+          <a:lnRef idx="1">
+            <a:schemeClr val="accent1"/>
+          </a:lnRef>
+          <a:fillRef idx="3">
+            <a:schemeClr val="accent1"/>
+          </a:fillRef>
+          <a:effectRef idx="2">
+            <a:schemeClr val="accent1"/>
+          </a:effectRef>
+          <a:fontRef idx="minor">
+            <a:schemeClr val="lt1"/>
+          </a:fontRef>
+        </p:style>
+        <p:txBody>
+          <a:bodyPr wrap="square" lIns="228600" rIns="182880" rtlCol="0" anchor="ctr"/>
+          <a:lstStyle/>
+          <a:p>
+            <a:pPr algn="l"/>
+            <a:r>
+              <a:rPr sz="1900" b="1">
+                <a:solidFill>
+                  <a:srgbClr val="15133D"/>
+                </a:solidFill>
+                <a:latin typeface="メイリオ"/>
+              </a:rPr>
+              <a:t>改定時期</a:t>
+            </a:r>
+          </a:p>
+          <a:p>
+            <a:pPr algn="l">
+              <a:lnSpc>
+                <a:spcPct val="115000"/>
+              </a:lnSpc>
+              <a:spcBef>
+                <a:spcPts val="600"/>
+              </a:spcBef>
+            </a:pPr>
+            <a:r>
+              <a:rPr sz="1300">
+                <a:solidFill>
+                  <a:srgbClr val="333333"/>
+                </a:solidFill>
+                <a:latin typeface="メイリオ"/>
+              </a:rPr>
+              <a:t>2027年2月上旬予定。改定日以降に購入した機材から新価格が適用される。</a:t>
+            </a:r>
+          </a:p>
+        </p:txBody>
+      </p:sp>
+      <p:sp>
+        <p:nvSpPr>
+          <p:cNvPr id="64" name="Rounded Rectangle 63"/>
+          <p:cNvSpPr/>
+          <p:nvPr/>
+        </p:nvSpPr>
+        <p:spPr>
+          <a:xfrm>
+            <a:off x="5039448" y="3068960"/>
+            <a:ext cx="4322443" cy="1120584"/>
+          </a:xfrm>
+          <a:prstGeom prst="roundRect">
+            <a:avLst>
+              <a:gd name="adj" fmla="val 6000"/>
+            </a:avLst>
+          </a:prstGeom>
+          <a:solidFill>
+            <a:srgbClr val="EAF0FA"/>
+          </a:solidFill>
+          <a:ln w="12700">
+            <a:solidFill>
+              <a:srgbClr val="3467B2"/>
+            </a:solidFill>
+          </a:ln>
+          <a:effectLst/>
+        </p:spPr>
+        <p:style>
+          <a:lnRef idx="1">
+            <a:schemeClr val="accent1"/>
+          </a:lnRef>
+          <a:fillRef idx="3">
+            <a:schemeClr val="accent1"/>
+          </a:fillRef>
+          <a:effectRef idx="2">
+            <a:schemeClr val="accent1"/>
+          </a:effectRef>
+          <a:fontRef idx="minor">
+            <a:schemeClr val="lt1"/>
+          </a:fontRef>
+        </p:style>
+        <p:txBody>
+          <a:bodyPr wrap="square" lIns="228600" rIns="182880" rtlCol="0" anchor="ctr"/>
+          <a:lstStyle/>
+          <a:p>
+            <a:pPr algn="l"/>
+            <a:r>
+              <a:rPr sz="1900" b="1">
+                <a:solidFill>
+                  <a:srgbClr val="15133D"/>
+                </a:solidFill>
+                <a:latin typeface="メイリオ"/>
+              </a:rPr>
+              <a:t>対象機材</a:t>
+            </a:r>
+          </a:p>
+          <a:p>
+            <a:pPr algn="l">
+              <a:lnSpc>
+                <a:spcPct val="115000"/>
+              </a:lnSpc>
+              <a:spcBef>
+                <a:spcPts val="600"/>
+              </a:spcBef>
+            </a:pPr>
+            <a:r>
+              <a:rPr sz="1300">
+                <a:solidFill>
+                  <a:srgbClr val="333333"/>
+                </a:solidFill>
+                <a:latin typeface="メイリオ"/>
+              </a:rPr>
+              <a:t>EPSON製のプリンター・キャッシュドロアー。</a:t>
+            </a:r>
+          </a:p>
+        </p:txBody>
+      </p:sp>
+      <p:sp>
+        <p:nvSpPr>
+          <p:cNvPr id="65" name="Rounded Rectangle 64"/>
+          <p:cNvSpPr/>
+          <p:nvPr/>
+        </p:nvSpPr>
+        <p:spPr>
+          <a:xfrm>
+            <a:off x="544108" y="4372424"/>
+            <a:ext cx="4322443" cy="1120584"/>
+          </a:xfrm>
+          <a:prstGeom prst="roundRect">
+            <a:avLst>
+              <a:gd name="adj" fmla="val 6000"/>
+            </a:avLst>
+          </a:prstGeom>
+          <a:solidFill>
+            <a:srgbClr val="EAF0FA"/>
+          </a:solidFill>
+          <a:ln w="12700">
+            <a:solidFill>
+              <a:srgbClr val="3467B2"/>
+            </a:solidFill>
+          </a:ln>
+          <a:effectLst/>
+        </p:spPr>
+        <p:style>
+          <a:lnRef idx="1">
+            <a:schemeClr val="accent1"/>
+          </a:lnRef>
+          <a:fillRef idx="3">
+            <a:schemeClr val="accent1"/>
+          </a:fillRef>
+          <a:effectRef idx="2">
+            <a:schemeClr val="accent1"/>
+          </a:effectRef>
+          <a:fontRef idx="minor">
+            <a:schemeClr val="lt1"/>
+          </a:fontRef>
+        </p:style>
+        <p:txBody>
+          <a:bodyPr wrap="square" lIns="228600" rIns="182880" rtlCol="0" anchor="ctr"/>
+          <a:lstStyle/>
+          <a:p>
+            <a:pPr algn="l"/>
+            <a:r>
+              <a:rPr sz="1900" b="1">
+                <a:solidFill>
+                  <a:srgbClr val="15133D"/>
+                </a:solidFill>
+                <a:latin typeface="メイリオ"/>
+              </a:rPr>
+              <a:t>価格</a:t>
+            </a:r>
+          </a:p>
+          <a:p>
+            <a:pPr algn="l">
+              <a:lnSpc>
+                <a:spcPct val="115000"/>
+              </a:lnSpc>
+              <a:spcBef>
+                <a:spcPts val="600"/>
+              </a:spcBef>
+            </a:pPr>
+            <a:r>
+              <a:rPr sz="1300">
+                <a:solidFill>
+                  <a:srgbClr val="333333"/>
+                </a:solidFill>
+                <a:latin typeface="メイリオ"/>
+              </a:rPr>
+              <a:t>プリンター：37,000円→41,700円／キャッシュドロアー：16,000円→17,700円。</a:t>
+            </a:r>
+          </a:p>
+        </p:txBody>
+      </p:sp>
+      <p:sp>
+        <p:nvSpPr>
+          <p:cNvPr id="66" name="Rounded Rectangle 65"/>
+          <p:cNvSpPr/>
+          <p:nvPr/>
+        </p:nvSpPr>
+        <p:spPr>
+          <a:xfrm>
+            <a:off x="5039448" y="4372424"/>
+            <a:ext cx="4322443" cy="1120584"/>
+          </a:xfrm>
+          <a:prstGeom prst="roundRect">
+            <a:avLst>
+              <a:gd name="adj" fmla="val 6000"/>
+            </a:avLst>
+          </a:prstGeom>
+          <a:solidFill>
+            <a:srgbClr val="EAF0FA"/>
+          </a:solidFill>
+          <a:ln w="12700">
+            <a:solidFill>
+              <a:srgbClr val="3467B2"/>
+            </a:solidFill>
+          </a:ln>
+          <a:effectLst/>
+        </p:spPr>
+        <p:style>
+          <a:lnRef idx="1">
+            <a:schemeClr val="accent1"/>
+          </a:lnRef>
+          <a:fillRef idx="3">
+            <a:schemeClr val="accent1"/>
+          </a:fillRef>
+          <a:effectRef idx="2">
+            <a:schemeClr val="accent1"/>
+          </a:effectRef>
+          <a:fontRef idx="minor">
+            <a:schemeClr val="lt1"/>
+          </a:fontRef>
+        </p:style>
+        <p:txBody>
+          <a:bodyPr wrap="square" lIns="228600" rIns="182880" rtlCol="0" anchor="ctr"/>
+          <a:lstStyle/>
+          <a:p>
+            <a:pPr algn="l"/>
+            <a:r>
+              <a:rPr sz="1900" b="1">
+                <a:solidFill>
+                  <a:srgbClr val="15133D"/>
+                </a:solidFill>
+                <a:latin typeface="メイリオ"/>
+              </a:rPr>
+              <a:t>告知</a:t>
+            </a:r>
+          </a:p>
+          <a:p>
+            <a:pPr algn="l">
+              <a:lnSpc>
+                <a:spcPct val="115000"/>
+              </a:lnSpc>
+              <a:spcBef>
+                <a:spcPts val="600"/>
+              </a:spcBef>
+            </a:pPr>
+            <a:r>
+              <a:rPr sz="1300">
+                <a:solidFill>
+                  <a:srgbClr val="333333"/>
+                </a:solidFill>
+                <a:latin typeface="メイリオ"/>
+              </a:rPr>
+              <a:t>OAMの申し込み導線・AGPお知らせ・飲食CMSお知らせにも掲載予定。</a:t>
+            </a:r>
+          </a:p>
+        </p:txBody>
+      </p:sp>
+    </p:spTree>
+  </p:cSld>
+  <p:clrMapOvr>
+    <a:masterClrMapping/>
+  </p:clrMapOvr>
+</p:sld>
+</file>
+
+<file path=ppt/slides/slide11.xml><?xml version="1.0" encoding="utf-8"?>
+<p:sld xmlns:a="http://schemas.openxmlformats.org/drawingml/2006/main" xmlns:r="http://schemas.openxmlformats.org/officeDocument/2006/relationships" xmlns:p="http://schemas.openxmlformats.org/presentationml/2006/main">
+  <p:cSld>
+    <p:spTree>
+      <p:nvGrpSpPr>
+        <p:cNvPr id="1" name=""/>
+        <p:cNvGrpSpPr/>
+        <p:nvPr/>
+      </p:nvGrpSpPr>
+      <p:grpSpPr>
+        <a:xfrm>
+          <a:off x="0" y="0"/>
+          <a:ext cx="0" cy="0"/>
+          <a:chOff x="0" y="0"/>
+          <a:chExt cx="0" cy="0"/>
+        </a:xfrm>
+      </p:grpSpPr>
+      <p:sp>
+        <p:nvSpPr>
+          <p:cNvPr id="40" name="Google Shape;40;p3"/>
+          <p:cNvSpPr/>
+          <p:nvPr/>
+        </p:nvSpPr>
+        <p:spPr>
+          <a:xfrm>
+            <a:off x="292801" y="730955"/>
+            <a:ext cx="1296144" cy="435690"/>
+          </a:xfrm>
+          <a:prstGeom prst="rect">
+            <a:avLst/>
+          </a:prstGeom>
+          <a:solidFill>
+            <a:schemeClr val="dk2"/>
+          </a:solidFill>
+          <a:ln w="9525" cap="flat" cmpd="sng">
+            <a:solidFill>
+              <a:srgbClr val="4A7DBA"/>
+            </a:solidFill>
+            <a:prstDash val="solid"/>
+            <a:round/>
+            <a:headEnd type="none" w="sm" len="sm"/>
+            <a:tailEnd type="none" w="sm" len="sm"/>
+          </a:ln>
+        </p:spPr>
+        <p:txBody>
+          <a:bodyPr spcFirstLastPara="1" wrap="square" lIns="91425" tIns="45700" rIns="91425" bIns="45700" anchor="ctr" anchorCtr="0">
+            <a:noAutofit/>
+          </a:bodyPr>
+          <a:lstStyle/>
+          <a:p>
+            <a:pPr marL="0" marR="0" lvl="0" indent="0" algn="ctr" rtl="0">
+              <a:spcBef>
+                <a:spcPts val="0"/>
+              </a:spcBef>
+              <a:spcAft>
+                <a:spcPts val="0"/>
+              </a:spcAft>
+              <a:buNone/>
+            </a:pPr>
+            <a:r>
+              <a:rPr lang="ja-JP" sz="1800" b="0" i="0" u="none" strike="noStrike" cap="none">
+                <a:solidFill>
+                  <a:schemeClr val="lt1"/>
+                </a:solidFill>
+                <a:latin typeface="メイリオ"/>
+                <a:ea typeface="Meiryo"/>
+                <a:cs typeface="Meiryo"/>
+                <a:sym typeface="Meiryo"/>
+              </a:rPr>
+              <a:t>対象業界</a:t>
+            </a:r>
+            <a:endParaRPr/>
+          </a:p>
+        </p:txBody>
+      </p:sp>
+      <p:sp>
+        <p:nvSpPr>
+          <p:cNvPr id="41" name="Google Shape;41;p3"/>
+          <p:cNvSpPr/>
+          <p:nvPr/>
+        </p:nvSpPr>
+        <p:spPr>
+          <a:xfrm>
+            <a:off x="7560840" y="730955"/>
+            <a:ext cx="829618" cy="435690"/>
+          </a:xfrm>
+          <a:prstGeom prst="rect">
+            <a:avLst/>
+          </a:prstGeom>
+          <a:solidFill>
+            <a:schemeClr val="bg1"/>
+          </a:solidFill>
+          <a:ln w="9525" cap="flat" cmpd="sng">
+            <a:solidFill>
+              <a:srgbClr val="4F81BD"/>
+            </a:solidFill>
+            <a:prstDash val="sysDash"/>
+            <a:round/>
+            <a:headEnd type="none" w="sm" len="sm"/>
+            <a:tailEnd type="none" w="sm" len="sm"/>
+          </a:ln>
+        </p:spPr>
+        <p:txBody>
+          <a:bodyPr spcFirstLastPara="1" wrap="square" lIns="91425" tIns="45700" rIns="91425" bIns="45700" anchor="ctr" anchorCtr="0">
+            <a:noAutofit/>
+          </a:bodyPr>
+          <a:lstStyle/>
+          <a:p>
+            <a:pPr marL="0" marR="0" lvl="0" indent="0" algn="ctr" rtl="0">
+              <a:spcBef>
+                <a:spcPts val="0"/>
+              </a:spcBef>
+              <a:spcAft>
+                <a:spcPts val="0"/>
+              </a:spcAft>
+              <a:buNone/>
+            </a:pPr>
+            <a:r>
+              <a:rPr lang="ja-JP" sz="1200" b="0" i="0" u="none" strike="noStrike" cap="none">
+                <a:solidFill>
+                  <a:schemeClr val="dk1"/>
+                </a:solidFill>
+                <a:latin typeface="メイリオ"/>
+                <a:ea typeface="Meiryo"/>
+                <a:cs typeface="Meiryo"/>
+                <a:sym typeface="Meiryo"/>
+              </a:rPr>
+              <a:t>その他</a:t>
+            </a:r>
+            <a:endParaRPr sz="1200" b="0" i="0" u="none" strike="noStrike" cap="none">
+              <a:solidFill>
+                <a:schemeClr val="dk1"/>
+              </a:solidFill>
+              <a:latin typeface="Meiryo"/>
+              <a:ea typeface="Meiryo"/>
+              <a:cs typeface="Meiryo"/>
+              <a:sym typeface="Meiryo"/>
+            </a:endParaRPr>
+          </a:p>
+        </p:txBody>
+      </p:sp>
+      <p:sp>
+        <p:nvSpPr>
+          <p:cNvPr id="42" name="Google Shape;42;p3"/>
+          <p:cNvSpPr/>
+          <p:nvPr/>
+        </p:nvSpPr>
+        <p:spPr>
+          <a:xfrm>
+            <a:off x="6679050" y="730955"/>
+            <a:ext cx="829618" cy="435690"/>
+          </a:xfrm>
+          <a:prstGeom prst="rect">
+            <a:avLst/>
+          </a:prstGeom>
+          <a:solidFill>
+            <a:schemeClr val="tx2"/>
+          </a:solidFill>
+          <a:ln w="9525" cap="flat" cmpd="sng">
+            <a:solidFill>
+              <a:srgbClr val="4F81BD"/>
+            </a:solidFill>
+            <a:prstDash val="solid"/>
+            <a:round/>
+            <a:headEnd type="none" w="sm" len="sm"/>
+            <a:tailEnd type="none" w="sm" len="sm"/>
+          </a:ln>
+        </p:spPr>
+        <p:txBody>
+          <a:bodyPr spcFirstLastPara="1" wrap="square" lIns="91425" tIns="45700" rIns="91425" bIns="45700" anchor="ctr" anchorCtr="0">
+            <a:noAutofit/>
+          </a:bodyPr>
+          <a:lstStyle/>
+          <a:p>
+            <a:pPr marL="0" marR="0" lvl="0" indent="0" algn="ctr" rtl="0">
+              <a:spcBef>
+                <a:spcPts val="0"/>
+              </a:spcBef>
+              <a:spcAft>
+                <a:spcPts val="0"/>
+              </a:spcAft>
+              <a:buNone/>
+            </a:pPr>
+            <a:r>
+              <a:rPr lang="ja-JP" sz="1000" b="0" i="0" u="none" strike="noStrike" cap="none">
+                <a:solidFill>
+                  <a:schemeClr val="dk1"/>
+                </a:solidFill>
+                <a:latin typeface="メイリオ"/>
+                <a:ea typeface="Meiryo"/>
+                <a:cs typeface="Meiryo"/>
+                <a:sym typeface="Meiryo"/>
+              </a:rPr>
+              <a:t>オプション</a:t>
+            </a:r>
+            <a:endParaRPr sz="1000" b="0" i="0" u="none" strike="noStrike" cap="none">
+              <a:solidFill>
+                <a:schemeClr val="dk1"/>
+              </a:solidFill>
+              <a:latin typeface="Meiryo"/>
+              <a:ea typeface="Meiryo"/>
+              <a:cs typeface="Meiryo"/>
+              <a:sym typeface="Meiryo"/>
+            </a:endParaRPr>
+          </a:p>
+          <a:p>
+            <a:pPr marL="0" marR="0" lvl="0" indent="0" algn="ctr" rtl="0">
+              <a:spcBef>
+                <a:spcPts val="0"/>
+              </a:spcBef>
+              <a:spcAft>
+                <a:spcPts val="0"/>
+              </a:spcAft>
+              <a:buNone/>
+            </a:pPr>
+            <a:r>
+              <a:rPr lang="ja-JP" sz="1000" b="0" i="0" u="none" strike="noStrike" cap="none">
+                <a:solidFill>
+                  <a:schemeClr val="dk1"/>
+                </a:solidFill>
+                <a:latin typeface="メイリオ"/>
+                <a:ea typeface="Meiryo"/>
+                <a:cs typeface="Meiryo"/>
+                <a:sym typeface="Meiryo"/>
+              </a:rPr>
+              <a:t>商材</a:t>
+            </a:r>
+            <a:endParaRPr/>
+          </a:p>
+        </p:txBody>
+      </p:sp>
+      <p:sp>
+        <p:nvSpPr>
+          <p:cNvPr id="43" name="Google Shape;43;p3"/>
+          <p:cNvSpPr/>
+          <p:nvPr/>
+        </p:nvSpPr>
+        <p:spPr>
+          <a:xfrm>
+            <a:off x="1594068" y="730955"/>
+            <a:ext cx="2926883" cy="435690"/>
+          </a:xfrm>
+          <a:prstGeom prst="rect">
+            <a:avLst/>
+          </a:prstGeom>
+          <a:noFill/>
+          <a:ln w="9525" cap="flat" cmpd="sng">
+            <a:solidFill>
+              <a:srgbClr val="4A7DBA"/>
+            </a:solidFill>
+            <a:prstDash val="solid"/>
+            <a:round/>
+            <a:headEnd type="none" w="sm" len="sm"/>
+            <a:tailEnd type="none" w="sm" len="sm"/>
+          </a:ln>
+        </p:spPr>
+        <p:txBody>
+          <a:bodyPr spcFirstLastPara="1" wrap="square" lIns="91425" tIns="45700" rIns="91425" bIns="45700" anchor="ctr" anchorCtr="0">
+            <a:noAutofit/>
+          </a:bodyPr>
+          <a:lstStyle/>
+          <a:p>
+            <a:pPr marL="0" marR="0" lvl="0" indent="0" algn="ctr" rtl="0">
+              <a:spcBef>
+                <a:spcPts val="0"/>
+              </a:spcBef>
+              <a:spcAft>
+                <a:spcPts val="0"/>
+              </a:spcAft>
+              <a:buNone/>
+            </a:pPr>
+            <a:r>
+              <a:rPr lang="ja-JP" sz="1300" b="0" i="0" u="none" strike="noStrike" cap="none">
+                <a:solidFill>
+                  <a:schemeClr val="dk1"/>
+                </a:solidFill>
+                <a:latin typeface="メイリオ"/>
+                <a:ea typeface="Meiryo"/>
+                <a:cs typeface="Meiryo"/>
+                <a:sym typeface="Meiryo"/>
+              </a:rPr>
               <a:t>小売・アパレル・教育・サービス業</a:t>
             </a:r>
             <a:endParaRPr/>
@@ -5054,7 +6766,7 @@
                 <a:cs typeface="Meiryo"/>
                 <a:sym typeface="Meiryo"/>
               </a:rPr>
-              <a:t>P.6</a:t>
+              <a:t>P.6-7</a:t>
             </a:r>
             <a:endParaRPr sz="1500" b="1" i="0" u="none" strike="noStrike" cap="none">
               <a:solidFill>
@@ -5089,7 +6801,7 @@
                 <a:cs typeface="Meiryo"/>
                 <a:sym typeface="Meiryo"/>
               </a:rPr>
-              <a:t>P.7</a:t>
+              <a:t>P.8</a:t>
             </a:r>
             <a:endParaRPr sz="1500" b="1" i="0" u="none" strike="noStrike" cap="none">
               <a:solidFill>
@@ -5124,7 +6836,7 @@
                 <a:cs typeface="Meiryo"/>
                 <a:sym typeface="Meiryo"/>
               </a:rPr>
-              <a:t>P.8</a:t>
+              <a:t>P.9</a:t>
             </a:r>
             <a:endParaRPr sz="1500" b="1" i="0" u="none" strike="noStrike" cap="none">
               <a:solidFill>
@@ -5159,7 +6871,7 @@
                 <a:cs typeface="Meiryo"/>
                 <a:sym typeface="Meiryo"/>
               </a:rPr>
-              <a:t>P.9</a:t>
+              <a:t>P.10</a:t>
             </a:r>
             <a:endParaRPr sz="1500" b="1" i="0" u="none" strike="noStrike" cap="none">
               <a:solidFill>
@@ -5194,7 +6906,7 @@
                 <a:cs typeface="Meiryo"/>
                 <a:sym typeface="Meiryo"/>
               </a:rPr>
-              <a:t>P.10</a:t>
+              <a:t>P.11</a:t>
             </a:r>
             <a:endParaRPr sz="1500" b="1" i="0" u="none" strike="noStrike" cap="none">
               <a:solidFill>
@@ -5309,7 +7021,7 @@
                 <a:cs typeface="Meiryo"/>
                 <a:sym typeface="Meiryo"/>
               </a:rPr>
-              <a:t>【LINEシリアルコードスタンプ】媒体資料の更新・進行ガイドのご案内</a:t>
+              <a:t>【LINEシリアルコードスタンプ】新商品のご案内</a:t>
             </a:r>
             <a:endParaRPr sz="1500" b="1" i="0" u="none" strike="noStrike" cap="none">
               <a:solidFill>
@@ -11072,7 +12784,7 @@
                 <a:cs typeface="Meiryo"/>
                 <a:sym typeface="Meiryo"/>
               </a:rPr>
-              <a:t>【LINEシリアルコードスタンプ】媒体資料の更新・進行ガイドのご案内</a:t>
+              <a:t>【LINEシリアルコードスタンプ】新商品のご案内</a:t>
             </a:r>
             <a:endParaRPr sz="1600" b="1">
               <a:solidFill>
@@ -11415,7 +13127,7 @@
                 <a:cs typeface="Meiryo"/>
                 <a:sym typeface="Meiryo"/>
               </a:rPr>
-              <a:t>2026年10月1日（木）リリースの新商品「LINEシリアルコードスタンプ」について、</a:t>
+              <a:t>2026年10月1日リリースの新商材。シリアルコードを入力した人だけが無料スタンプをもらえる。</a:t>
             </a:r>
             <a:endParaRPr sz="1200" b="1">
               <a:solidFill>
@@ -11447,7 +13159,7 @@
                 <a:cs typeface="Meiryo"/>
                 <a:sym typeface="Meiryo"/>
               </a:rPr>
-              <a:t>媒体資料（更新版）と進行ガイド（2026年10月版）が公開された。</a:t>
+              <a:t>コードの発行は発注を受けた後。印刷・配布がある場合は、その日数も見込んでスケジュールを組む。</a:t>
             </a:r>
             <a:endParaRPr/>
           </a:p>
@@ -11471,7 +13183,7 @@
                 <a:cs typeface="Meiryo"/>
                 <a:sym typeface="Meiryo"/>
               </a:rPr>
-              <a:t>クリエイティブ基準の緩和と、独自のキャンペーン設計ルールがポイント。</a:t>
+              <a:t>告知やコード配布のルールに違反すると、Apple・Googleの指摘でキャンペーン停止になる場合も。</a:t>
             </a:r>
             <a:endParaRPr sz="1400" b="1">
               <a:solidFill>
@@ -12007,8 +13719,8 @@
         </p:nvSpPr>
         <p:spPr>
           <a:xfrm>
-            <a:off x="544108" y="3068960"/>
-            <a:ext cx="4322443" cy="1357915"/>
+            <a:off x="548640" y="3127248"/>
+            <a:ext cx="8814816" cy="1481328"/>
           </a:xfrm>
           <a:prstGeom prst="roundRect">
             <a:avLst>
@@ -12051,7 +13763,7 @@
                 </a:solidFill>
                 <a:latin typeface="メイリオ"/>
               </a:rPr>
-              <a:t>クリエイティブ基準を3点緩和</a:t>
+              <a:t>告知してよい場所</a:t>
             </a:r>
           </a:p>
           <a:p>
@@ -12060,7 +13772,7 @@
                 <a:spcPct val="115000"/>
               </a:lnSpc>
               <a:spcBef>
-                <a:spcPts val="600"/>
+                <a:spcPts val="400"/>
               </a:spcBef>
             </a:pPr>
             <a:r>
@@ -12070,7 +13782,26 @@
                 </a:solidFill>
                 <a:latin typeface="メイリオ"/>
               </a:rPr>
-              <a:t>この商品に限り、飲酒表現（注記必須）・実写素材（CM・ポスターの転用可）・PR要素の個数（全体の1/4以内→制限なし）を緩和。</a:t>
+              <a:t>○ OK：広告主のLINE公式アカウント、広告主のアプリ、SNS、Web全般（LINEヤフー広告も可）、店頭POP・屋外広告</a:t>
+            </a:r>
+          </a:p>
+          <a:p>
+            <a:pPr algn="l">
+              <a:lnSpc>
+                <a:spcPct val="115000"/>
+              </a:lnSpc>
+              <a:spcBef>
+                <a:spcPts val="400"/>
+              </a:spcBef>
+            </a:pPr>
+            <a:r>
+              <a:rPr sz="1300">
+                <a:solidFill>
+                  <a:srgbClr val="333333"/>
+                </a:solidFill>
+                <a:latin typeface="メイリオ"/>
+              </a:rPr>
+              <a:t>× NG：LINEヤフーが持つアプリでの告知（スタンプショップ、LINEミニアプリ、LINEヤフーの公式アカウントなど）</a:t>
             </a:r>
           </a:p>
         </p:txBody>
@@ -12083,8 +13814,8 @@
         </p:nvSpPr>
         <p:spPr>
           <a:xfrm>
-            <a:off x="5039448" y="3068960"/>
-            <a:ext cx="4322443" cy="1357915"/>
+            <a:off x="548640" y="4754880"/>
+            <a:ext cx="8814816" cy="1618488"/>
           </a:xfrm>
           <a:prstGeom prst="roundRect">
             <a:avLst>
@@ -12127,7 +13858,7 @@
                 </a:solidFill>
                 <a:latin typeface="メイリオ"/>
               </a:rPr>
-              <a:t>告知できる面・できない面</a:t>
+              <a:t>コードを渡す条件</a:t>
             </a:r>
           </a:p>
           <a:p>
@@ -12136,7 +13867,7 @@
                 <a:spcPct val="115000"/>
               </a:lnSpc>
               <a:spcBef>
-                <a:spcPts val="600"/>
+                <a:spcPts val="400"/>
               </a:spcBef>
             </a:pPr>
             <a:r>
@@ -12146,21 +13877,1459 @@
                 </a:solidFill>
                 <a:latin typeface="メイリオ"/>
               </a:rPr>
-              <a:t>広告主のLINE公式アカウント・アプリ・SNS・Web・店頭はOK。スタンプショップなどLINEヤフー保有アプリからの告知はNG。</a:t>
+              <a:t>○ OK：Webでの行動（商品購入など）、店頭での行動（来店・購入）</a:t>
+            </a:r>
+          </a:p>
+          <a:p>
+            <a:pPr algn="l">
+              <a:lnSpc>
+                <a:spcPct val="115000"/>
+              </a:lnSpc>
+              <a:spcBef>
+                <a:spcPts val="400"/>
+              </a:spcBef>
+            </a:pPr>
+            <a:r>
+              <a:rPr sz="1300">
+                <a:solidFill>
+                  <a:srgbClr val="333333"/>
+                </a:solidFill>
+                <a:latin typeface="メイリオ"/>
+              </a:rPr>
+              <a:t>× NG：LINEアプリ内での行動（LINE公式アカウントの友だち追加・アンケート回答、LINEミニアプリ内の行動）、広告主アプリ内の行動（会員登録など）、アプリのダウンロードが必須になるもの</a:t>
+            </a:r>
+          </a:p>
+          <a:p>
+            <a:pPr algn="l">
+              <a:lnSpc>
+                <a:spcPct val="115000"/>
+              </a:lnSpc>
+              <a:spcBef>
+                <a:spcPts val="400"/>
+              </a:spcBef>
+            </a:pPr>
+            <a:r>
+              <a:rPr sz="1300">
+                <a:solidFill>
+                  <a:srgbClr val="333333"/>
+                </a:solidFill>
+                <a:latin typeface="メイリオ"/>
+              </a:rPr>
+              <a:t>※ スタンプをもらうまでの流れに、アプリへの遷移が少しでも入るとNG</a:t>
             </a:r>
           </a:p>
         </p:txBody>
       </p:sp>
+    </p:spTree>
+  </p:cSld>
+  <p:clrMapOvr>
+    <a:masterClrMapping/>
+  </p:clrMapOvr>
+</p:sld>
+</file>
+
+<file path=ppt/slides/slide7.xml><?xml version="1.0" encoding="utf-8"?>
+<p:sld xmlns:a="http://schemas.openxmlformats.org/drawingml/2006/main" xmlns:p="http://schemas.openxmlformats.org/presentationml/2006/main" xmlns:r="http://schemas.openxmlformats.org/officeDocument/2006/relationships">
+  <p:cSld>
+    <p:spTree>
+      <p:nvGrpSpPr>
+        <p:cNvPr id="1" name=""/>
+        <p:cNvGrpSpPr/>
+        <p:nvPr/>
+      </p:nvGrpSpPr>
+      <p:grpSpPr/>
       <p:sp>
         <p:nvSpPr>
-          <p:cNvPr id="65" name="Rounded Rectangle 64"/>
+          <p:cNvPr id="40" name="Google Shape;40;p3"/>
           <p:cNvSpPr/>
           <p:nvPr/>
         </p:nvSpPr>
         <p:spPr>
           <a:xfrm>
-            <a:off x="544108" y="4609755"/>
-            <a:ext cx="4322443" cy="1357915"/>
+            <a:off x="292801" y="730955"/>
+            <a:ext cx="1296144" cy="435690"/>
+          </a:xfrm>
+          <a:prstGeom prst="rect">
+            <a:avLst/>
+          </a:prstGeom>
+          <a:solidFill>
+            <a:schemeClr val="dk2"/>
+          </a:solidFill>
+          <a:ln w="9525" cap="flat" cmpd="sng">
+            <a:solidFill>
+              <a:srgbClr val="4A7DBA"/>
+            </a:solidFill>
+            <a:prstDash val="solid"/>
+            <a:round/>
+            <a:headEnd type="none" w="sm" len="sm"/>
+            <a:tailEnd type="none" w="sm" len="sm"/>
+          </a:ln>
+        </p:spPr>
+        <p:txBody>
+          <a:bodyPr spcFirstLastPara="1" wrap="square" lIns="91425" tIns="45700" rIns="91425" bIns="45700" anchor="ctr" anchorCtr="0">
+            <a:noAutofit/>
+          </a:bodyPr>
+          <a:lstStyle/>
+          <a:p>
+            <a:pPr marL="0" marR="0" lvl="0" indent="0" algn="ctr" rtl="0">
+              <a:spcBef>
+                <a:spcPts val="0"/>
+              </a:spcBef>
+              <a:spcAft>
+                <a:spcPts val="0"/>
+              </a:spcAft>
+              <a:buNone/>
+            </a:pPr>
+            <a:r>
+              <a:rPr lang="ja-JP" sz="1800" b="0" i="0" u="none" strike="noStrike" cap="none">
+                <a:solidFill>
+                  <a:schemeClr val="lt1"/>
+                </a:solidFill>
+                <a:latin typeface="メイリオ"/>
+                <a:ea typeface="Meiryo"/>
+                <a:cs typeface="Meiryo"/>
+                <a:sym typeface="Meiryo"/>
+              </a:rPr>
+              <a:t>対象業界</a:t>
+            </a:r>
+            <a:endParaRPr/>
+          </a:p>
+        </p:txBody>
+      </p:sp>
+      <p:sp>
+        <p:nvSpPr>
+          <p:cNvPr id="41" name="Google Shape;41;p3"/>
+          <p:cNvSpPr/>
+          <p:nvPr/>
+        </p:nvSpPr>
+        <p:spPr>
+          <a:xfrm>
+            <a:off x="7560840" y="730955"/>
+            <a:ext cx="829618" cy="435690"/>
+          </a:xfrm>
+          <a:prstGeom prst="rect">
+            <a:avLst/>
+          </a:prstGeom>
+          <a:solidFill>
+            <a:schemeClr val="bg1"/>
+          </a:solidFill>
+          <a:ln w="9525" cap="flat" cmpd="sng">
+            <a:solidFill>
+              <a:srgbClr val="4F81BD"/>
+            </a:solidFill>
+            <a:prstDash val="sysDash"/>
+            <a:round/>
+            <a:headEnd type="none" w="sm" len="sm"/>
+            <a:tailEnd type="none" w="sm" len="sm"/>
+          </a:ln>
+        </p:spPr>
+        <p:txBody>
+          <a:bodyPr spcFirstLastPara="1" wrap="square" lIns="91425" tIns="45700" rIns="91425" bIns="45700" anchor="ctr" anchorCtr="0">
+            <a:noAutofit/>
+          </a:bodyPr>
+          <a:lstStyle/>
+          <a:p>
+            <a:pPr marL="0" marR="0" lvl="0" indent="0" algn="ctr" rtl="0">
+              <a:spcBef>
+                <a:spcPts val="0"/>
+              </a:spcBef>
+              <a:spcAft>
+                <a:spcPts val="0"/>
+              </a:spcAft>
+              <a:buNone/>
+            </a:pPr>
+            <a:r>
+              <a:rPr lang="ja-JP" sz="1200" b="0" i="0" u="none" strike="noStrike" cap="none">
+                <a:solidFill>
+                  <a:schemeClr val="dk1"/>
+                </a:solidFill>
+                <a:latin typeface="メイリオ"/>
+                <a:ea typeface="Meiryo"/>
+                <a:cs typeface="Meiryo"/>
+                <a:sym typeface="Meiryo"/>
+              </a:rPr>
+              <a:t>その他</a:t>
+            </a:r>
+            <a:endParaRPr sz="1200" b="0" i="0" u="none" strike="noStrike" cap="none">
+              <a:solidFill>
+                <a:schemeClr val="dk1"/>
+              </a:solidFill>
+              <a:latin typeface="Meiryo"/>
+              <a:ea typeface="Meiryo"/>
+              <a:cs typeface="Meiryo"/>
+              <a:sym typeface="Meiryo"/>
+            </a:endParaRPr>
+          </a:p>
+        </p:txBody>
+      </p:sp>
+      <p:sp>
+        <p:nvSpPr>
+          <p:cNvPr id="42" name="Google Shape;42;p3"/>
+          <p:cNvSpPr/>
+          <p:nvPr/>
+        </p:nvSpPr>
+        <p:spPr>
+          <a:xfrm>
+            <a:off x="6679050" y="730955"/>
+            <a:ext cx="829618" cy="435690"/>
+          </a:xfrm>
+          <a:prstGeom prst="rect">
+            <a:avLst/>
+          </a:prstGeom>
+          <a:solidFill>
+            <a:schemeClr val="tx2"/>
+          </a:solidFill>
+          <a:ln w="9525" cap="flat" cmpd="sng">
+            <a:solidFill>
+              <a:srgbClr val="4F81BD"/>
+            </a:solidFill>
+            <a:prstDash val="solid"/>
+            <a:round/>
+            <a:headEnd type="none" w="sm" len="sm"/>
+            <a:tailEnd type="none" w="sm" len="sm"/>
+          </a:ln>
+        </p:spPr>
+        <p:txBody>
+          <a:bodyPr spcFirstLastPara="1" wrap="square" lIns="91425" tIns="45700" rIns="91425" bIns="45700" anchor="ctr" anchorCtr="0">
+            <a:noAutofit/>
+          </a:bodyPr>
+          <a:lstStyle/>
+          <a:p>
+            <a:pPr marL="0" marR="0" lvl="0" indent="0" algn="ctr" rtl="0">
+              <a:spcBef>
+                <a:spcPts val="0"/>
+              </a:spcBef>
+              <a:spcAft>
+                <a:spcPts val="0"/>
+              </a:spcAft>
+              <a:buNone/>
+            </a:pPr>
+            <a:r>
+              <a:rPr lang="ja-JP" sz="1000" b="0" i="0" u="none" strike="noStrike" cap="none">
+                <a:solidFill>
+                  <a:schemeClr val="dk1"/>
+                </a:solidFill>
+                <a:latin typeface="メイリオ"/>
+                <a:ea typeface="Meiryo"/>
+                <a:cs typeface="Meiryo"/>
+                <a:sym typeface="Meiryo"/>
+              </a:rPr>
+              <a:t>オプション</a:t>
+            </a:r>
+            <a:endParaRPr sz="1000" b="0" i="0" u="none" strike="noStrike" cap="none">
+              <a:solidFill>
+                <a:schemeClr val="dk1"/>
+              </a:solidFill>
+              <a:latin typeface="Meiryo"/>
+              <a:ea typeface="Meiryo"/>
+              <a:cs typeface="Meiryo"/>
+              <a:sym typeface="Meiryo"/>
+            </a:endParaRPr>
+          </a:p>
+          <a:p>
+            <a:pPr marL="0" marR="0" lvl="0" indent="0" algn="ctr" rtl="0">
+              <a:spcBef>
+                <a:spcPts val="0"/>
+              </a:spcBef>
+              <a:spcAft>
+                <a:spcPts val="0"/>
+              </a:spcAft>
+              <a:buNone/>
+            </a:pPr>
+            <a:r>
+              <a:rPr lang="ja-JP" sz="1000" b="0" i="0" u="none" strike="noStrike" cap="none">
+                <a:solidFill>
+                  <a:schemeClr val="dk1"/>
+                </a:solidFill>
+                <a:latin typeface="メイリオ"/>
+                <a:ea typeface="Meiryo"/>
+                <a:cs typeface="Meiryo"/>
+                <a:sym typeface="Meiryo"/>
+              </a:rPr>
+              <a:t>商材</a:t>
+            </a:r>
+            <a:endParaRPr/>
+          </a:p>
+        </p:txBody>
+      </p:sp>
+      <p:sp>
+        <p:nvSpPr>
+          <p:cNvPr id="43" name="Google Shape;43;p3"/>
+          <p:cNvSpPr/>
+          <p:nvPr/>
+        </p:nvSpPr>
+        <p:spPr>
+          <a:xfrm>
+            <a:off x="1594068" y="730955"/>
+            <a:ext cx="2926883" cy="435690"/>
+          </a:xfrm>
+          <a:prstGeom prst="rect">
+            <a:avLst/>
+          </a:prstGeom>
+          <a:noFill/>
+          <a:ln w="9525" cap="flat" cmpd="sng">
+            <a:solidFill>
+              <a:srgbClr val="4A7DBA"/>
+            </a:solidFill>
+            <a:prstDash val="solid"/>
+            <a:round/>
+            <a:headEnd type="none" w="sm" len="sm"/>
+            <a:tailEnd type="none" w="sm" len="sm"/>
+          </a:ln>
+        </p:spPr>
+        <p:txBody>
+          <a:bodyPr spcFirstLastPara="1" wrap="square" lIns="91425" tIns="45700" rIns="91425" bIns="45700" anchor="ctr" anchorCtr="0">
+            <a:noAutofit/>
+          </a:bodyPr>
+          <a:lstStyle/>
+          <a:p>
+            <a:pPr marL="0" marR="0" lvl="0" indent="0" algn="ctr" rtl="0">
+              <a:spcBef>
+                <a:spcPts val="0"/>
+              </a:spcBef>
+              <a:spcAft>
+                <a:spcPts val="0"/>
+              </a:spcAft>
+              <a:buNone/>
+            </a:pPr>
+            <a:r>
+              <a:rPr lang="ja-JP" sz="1300" b="0" i="0" u="none" strike="noStrike" cap="none">
+                <a:solidFill>
+                  <a:schemeClr val="dk1"/>
+                </a:solidFill>
+                <a:latin typeface="メイリオ"/>
+                <a:ea typeface="Meiryo"/>
+                <a:cs typeface="Meiryo"/>
+                <a:sym typeface="Meiryo"/>
+              </a:rPr>
+              <a:t>食品・飲料メーカー、</a:t>
+            </a:r>
+            <a:br>
+              <a:rPr lang="ja-JP" sz="1300" b="0" i="0" u="none" strike="noStrike" cap="none">
+                <a:solidFill>
+                  <a:schemeClr val="dk1"/>
+                </a:solidFill>
+                <a:latin typeface="メイリオ"/>
+                <a:ea typeface="Meiryo"/>
+                <a:cs typeface="Meiryo"/>
+                <a:sym typeface="Meiryo"/>
+              </a:rPr>
+            </a:br>
+            <a:r>
+              <a:rPr lang="ja-JP" sz="1300" b="0" i="0" u="none" strike="noStrike" cap="none">
+                <a:solidFill>
+                  <a:schemeClr val="dk1"/>
+                </a:solidFill>
+                <a:latin typeface="メイリオ"/>
+                <a:ea typeface="Meiryo"/>
+                <a:cs typeface="Meiryo"/>
+                <a:sym typeface="Meiryo"/>
+              </a:rPr>
+              <a:t>小売・コンビニ</a:t>
+            </a:r>
+            <a:endParaRPr/>
+          </a:p>
+        </p:txBody>
+      </p:sp>
+      <p:sp>
+        <p:nvSpPr>
+          <p:cNvPr id="44" name="Google Shape;44;p3"/>
+          <p:cNvSpPr txBox="1"/>
+          <p:nvPr/>
+        </p:nvSpPr>
+        <p:spPr>
+          <a:xfrm>
+            <a:off x="3296816" y="6597352"/>
+            <a:ext cx="6209091" cy="215444"/>
+          </a:xfrm>
+          <a:prstGeom prst="rect">
+            <a:avLst/>
+          </a:prstGeom>
+          <a:noFill/>
+          <a:ln>
+            <a:noFill/>
+          </a:ln>
+        </p:spPr>
+        <p:txBody>
+          <a:bodyPr spcFirstLastPara="1" wrap="square" lIns="91425" tIns="45700" rIns="91425" bIns="45700" anchor="t" anchorCtr="0">
+            <a:spAutoFit/>
+          </a:bodyPr>
+          <a:lstStyle/>
+          <a:p>
+            <a:pPr marL="0" marR="0" lvl="0" indent="0" algn="l" rtl="0">
+              <a:spcBef>
+                <a:spcPts val="0"/>
+              </a:spcBef>
+              <a:spcAft>
+                <a:spcPts val="0"/>
+              </a:spcAft>
+              <a:buNone/>
+            </a:pPr>
+            <a:r>
+              <a:rPr lang="ja-JP" sz="800" b="0" i="0" u="none" strike="noStrike" cap="none">
+                <a:solidFill>
+                  <a:schemeClr val="lt1"/>
+                </a:solidFill>
+                <a:latin typeface="メイリオ"/>
+                <a:ea typeface="Meiryo"/>
+                <a:cs typeface="Meiryo"/>
+                <a:sym typeface="Meiryo"/>
+              </a:rPr>
+              <a:t>出典：代理店情報</a:t>
+            </a:r>
+            <a:endParaRPr sz="800">
+              <a:solidFill>
+                <a:schemeClr val="lt1"/>
+              </a:solidFill>
+              <a:latin typeface="Meiryo"/>
+              <a:ea typeface="Meiryo"/>
+              <a:cs typeface="Meiryo"/>
+              <a:sym typeface="Meiryo"/>
+            </a:endParaRPr>
+          </a:p>
+        </p:txBody>
+      </p:sp>
+      <p:sp>
+        <p:nvSpPr>
+          <p:cNvPr id="45" name="Google Shape;45;p3"/>
+          <p:cNvSpPr/>
+          <p:nvPr/>
+        </p:nvSpPr>
+        <p:spPr>
+          <a:xfrm>
+            <a:off x="0" y="1234746"/>
+            <a:ext cx="9906000" cy="672259"/>
+          </a:xfrm>
+          <a:prstGeom prst="rect">
+            <a:avLst/>
+          </a:prstGeom>
+          <a:solidFill>
+            <a:srgbClr val="C5D8F1"/>
+          </a:solidFill>
+          <a:ln>
+            <a:noFill/>
+          </a:ln>
+        </p:spPr>
+        <p:txBody>
+          <a:bodyPr spcFirstLastPara="1" wrap="square" lIns="91425" tIns="45700" rIns="91425" bIns="45700" anchor="ctr" anchorCtr="0">
+            <a:noAutofit/>
+          </a:bodyPr>
+          <a:lstStyle/>
+          <a:p>
+            <a:pPr marL="0" marR="0" lvl="0" indent="0" algn="ctr" rtl="0">
+              <a:spcBef>
+                <a:spcPts val="0"/>
+              </a:spcBef>
+              <a:spcAft>
+                <a:spcPts val="0"/>
+              </a:spcAft>
+              <a:buNone/>
+            </a:pPr>
+            <a:r>
+              <a:rPr lang="ja-JP" sz="1600" b="1">
+                <a:solidFill>
+                  <a:srgbClr val="004DE6"/>
+                </a:solidFill>
+                <a:latin typeface="メイリオ"/>
+                <a:ea typeface="Meiryo"/>
+                <a:cs typeface="Meiryo"/>
+                <a:sym typeface="Meiryo"/>
+              </a:rPr>
+              <a:t>　　　　　　</a:t>
+            </a:r>
+            <a:endParaRPr sz="1800" b="1">
+              <a:solidFill>
+                <a:srgbClr val="004DE6"/>
+              </a:solidFill>
+              <a:latin typeface="Meiryo"/>
+              <a:ea typeface="Meiryo"/>
+              <a:cs typeface="Meiryo"/>
+              <a:sym typeface="Meiryo"/>
+            </a:endParaRPr>
+          </a:p>
+        </p:txBody>
+      </p:sp>
+      <p:sp>
+        <p:nvSpPr>
+          <p:cNvPr id="46" name="Google Shape;46;p3"/>
+          <p:cNvSpPr/>
+          <p:nvPr/>
+        </p:nvSpPr>
+        <p:spPr>
+          <a:xfrm>
+            <a:off x="1089832" y="1437370"/>
+            <a:ext cx="7031520" cy="338554"/>
+          </a:xfrm>
+          <a:prstGeom prst="rect">
+            <a:avLst/>
+          </a:prstGeom>
+          <a:noFill/>
+          <a:ln>
+            <a:noFill/>
+          </a:ln>
+        </p:spPr>
+        <p:txBody>
+          <a:bodyPr spcFirstLastPara="1" wrap="square" lIns="91425" tIns="45700" rIns="91425" bIns="45700" anchor="t" anchorCtr="0">
+            <a:spAutoFit/>
+          </a:bodyPr>
+          <a:lstStyle/>
+          <a:p>
+            <a:pPr marL="0" marR="0" lvl="0" indent="0" algn="l" rtl="0">
+              <a:spcBef>
+                <a:spcPts val="0"/>
+              </a:spcBef>
+              <a:spcAft>
+                <a:spcPts val="0"/>
+              </a:spcAft>
+              <a:buNone/>
+            </a:pPr>
+            <a:r>
+              <a:rPr lang="ja-JP" sz="1600" b="1">
+                <a:solidFill>
+                  <a:srgbClr val="004DE6"/>
+                </a:solidFill>
+                <a:latin typeface="メイリオ"/>
+                <a:ea typeface="Meiryo"/>
+                <a:cs typeface="Meiryo"/>
+                <a:sym typeface="Meiryo"/>
+              </a:rPr>
+              <a:t>【LINEシリアルコードスタンプ】クリエイティブ基準の緩和と進め方</a:t>
+            </a:r>
+            <a:endParaRPr sz="1600" b="1">
+              <a:solidFill>
+                <a:srgbClr val="004DE6"/>
+              </a:solidFill>
+              <a:latin typeface="Meiryo"/>
+              <a:ea typeface="Meiryo"/>
+              <a:cs typeface="Meiryo"/>
+              <a:sym typeface="Meiryo"/>
+            </a:endParaRPr>
+          </a:p>
+        </p:txBody>
+      </p:sp>
+      <p:sp>
+        <p:nvSpPr>
+          <p:cNvPr id="47" name="Google Shape;47;p3"/>
+          <p:cNvSpPr txBox="1"/>
+          <p:nvPr/>
+        </p:nvSpPr>
+        <p:spPr>
+          <a:xfrm>
+            <a:off x="182880" y="88175"/>
+            <a:ext cx="7512385" cy="365091"/>
+          </a:xfrm>
+          <a:prstGeom prst="rect">
+            <a:avLst/>
+          </a:prstGeom>
+          <a:noFill/>
+          <a:ln>
+            <a:noFill/>
+          </a:ln>
+        </p:spPr>
+        <p:txBody>
+          <a:bodyPr spcFirstLastPara="1" wrap="square" lIns="91425" tIns="72000" rIns="91425" bIns="45700" anchor="t" anchorCtr="0">
+            <a:spAutoFit/>
+          </a:bodyPr>
+          <a:lstStyle/>
+          <a:p>
+            <a:pPr marL="0" marR="0" lvl="0" indent="0" algn="l" rtl="0">
+              <a:spcBef>
+                <a:spcPts val="0"/>
+              </a:spcBef>
+              <a:spcAft>
+                <a:spcPts val="0"/>
+              </a:spcAft>
+              <a:buClr>
+                <a:schemeClr val="dk1"/>
+              </a:buClr>
+              <a:buSzPts val="1600"/>
+              <a:buFont typeface="Arial"/>
+              <a:buNone/>
+            </a:pPr>
+            <a:r>
+              <a:rPr lang="ja-JP" sz="1600" b="0" u="none">
+                <a:solidFill>
+                  <a:schemeClr val="dk1"/>
+                </a:solidFill>
+                <a:latin typeface="メイリオ"/>
+                <a:ea typeface="Meiryo"/>
+                <a:cs typeface="Meiryo"/>
+                <a:sym typeface="Meiryo"/>
+              </a:rPr>
+              <a:t>    今後のアップデート情報</a:t>
+            </a:r>
+            <a:endParaRPr sz="1600" b="0" u="none">
+              <a:solidFill>
+                <a:schemeClr val="dk1"/>
+              </a:solidFill>
+              <a:latin typeface="Meiryo"/>
+              <a:ea typeface="Meiryo"/>
+              <a:cs typeface="Meiryo"/>
+              <a:sym typeface="Meiryo"/>
+            </a:endParaRPr>
+          </a:p>
+        </p:txBody>
+      </p:sp>
+      <p:sp>
+        <p:nvSpPr>
+          <p:cNvPr id="48" name="Google Shape;48;p3"/>
+          <p:cNvSpPr/>
+          <p:nvPr/>
+        </p:nvSpPr>
+        <p:spPr>
+          <a:xfrm>
+            <a:off x="5797260" y="730955"/>
+            <a:ext cx="829618" cy="435690"/>
+          </a:xfrm>
+          <a:prstGeom prst="rect">
+            <a:avLst/>
+          </a:prstGeom>
+          <a:solidFill>
+            <a:schemeClr val="bg1"/>
+          </a:solidFill>
+          <a:ln w="9525" cap="flat" cmpd="sng">
+            <a:solidFill>
+              <a:srgbClr val="4F81BD"/>
+            </a:solidFill>
+            <a:prstDash val="sysDash"/>
+            <a:round/>
+            <a:headEnd type="none" w="sm" len="sm"/>
+            <a:tailEnd type="none" w="sm" len="sm"/>
+          </a:ln>
+        </p:spPr>
+        <p:txBody>
+          <a:bodyPr spcFirstLastPara="1" wrap="square" lIns="91425" tIns="45700" rIns="91425" bIns="45700" anchor="ctr" anchorCtr="0">
+            <a:noAutofit/>
+          </a:bodyPr>
+          <a:lstStyle/>
+          <a:p>
+            <a:pPr marL="0" marR="0" lvl="0" indent="0" algn="ctr" rtl="0">
+              <a:spcBef>
+                <a:spcPts val="0"/>
+              </a:spcBef>
+              <a:spcAft>
+                <a:spcPts val="0"/>
+              </a:spcAft>
+              <a:buClr>
+                <a:schemeClr val="dk1"/>
+              </a:buClr>
+              <a:buSzPts val="1000"/>
+              <a:buFont typeface="Meiryo"/>
+              <a:buNone/>
+            </a:pPr>
+            <a:r>
+              <a:rPr lang="ja-JP" sz="1000">
+                <a:solidFill>
+                  <a:schemeClr val="dk1"/>
+                </a:solidFill>
+                <a:latin typeface="メイリオ"/>
+                <a:ea typeface="Meiryo"/>
+                <a:cs typeface="Meiryo"/>
+                <a:sym typeface="Meiryo"/>
+              </a:rPr>
+              <a:t>開発</a:t>
+            </a:r>
+            <a:endParaRPr sz="1000">
+              <a:solidFill>
+                <a:schemeClr val="dk1"/>
+              </a:solidFill>
+              <a:latin typeface="Meiryo"/>
+              <a:ea typeface="Meiryo"/>
+              <a:cs typeface="Meiryo"/>
+              <a:sym typeface="Meiryo"/>
+            </a:endParaRPr>
+          </a:p>
+          <a:p>
+            <a:pPr marL="0" marR="0" lvl="0" indent="0" algn="ctr" rtl="0">
+              <a:spcBef>
+                <a:spcPts val="0"/>
+              </a:spcBef>
+              <a:spcAft>
+                <a:spcPts val="0"/>
+              </a:spcAft>
+              <a:buClr>
+                <a:schemeClr val="dk1"/>
+              </a:buClr>
+              <a:buSzPts val="1000"/>
+              <a:buFont typeface="Meiryo"/>
+              <a:buNone/>
+            </a:pPr>
+            <a:r>
+              <a:rPr lang="ja-JP" sz="1000">
+                <a:solidFill>
+                  <a:schemeClr val="dk1"/>
+                </a:solidFill>
+                <a:latin typeface="メイリオ"/>
+                <a:ea typeface="Meiryo"/>
+                <a:cs typeface="Meiryo"/>
+                <a:sym typeface="Meiryo"/>
+              </a:rPr>
+              <a:t>LINE API</a:t>
+            </a:r>
+            <a:endParaRPr sz="1000">
+              <a:solidFill>
+                <a:schemeClr val="dk1"/>
+              </a:solidFill>
+              <a:latin typeface="Meiryo"/>
+              <a:ea typeface="Meiryo"/>
+              <a:cs typeface="Meiryo"/>
+              <a:sym typeface="Meiryo"/>
+            </a:endParaRPr>
+          </a:p>
+        </p:txBody>
+      </p:sp>
+      <p:sp>
+        <p:nvSpPr>
+          <p:cNvPr id="49" name="Google Shape;49;p3"/>
+          <p:cNvSpPr/>
+          <p:nvPr/>
+        </p:nvSpPr>
+        <p:spPr>
+          <a:xfrm>
+            <a:off x="4915470" y="730955"/>
+            <a:ext cx="829618" cy="435690"/>
+          </a:xfrm>
+          <a:prstGeom prst="rect">
+            <a:avLst/>
+          </a:prstGeom>
+          <a:solidFill>
+            <a:schemeClr val="bg1"/>
+          </a:solidFill>
+          <a:ln w="9525" cap="flat" cmpd="sng">
+            <a:solidFill>
+              <a:srgbClr val="4F81BD"/>
+            </a:solidFill>
+            <a:prstDash val="sysDash"/>
+            <a:round/>
+            <a:headEnd type="none" w="sm" len="sm"/>
+            <a:tailEnd type="none" w="sm" len="sm"/>
+          </a:ln>
+        </p:spPr>
+        <p:txBody>
+          <a:bodyPr spcFirstLastPara="1" wrap="square" lIns="91425" tIns="45700" rIns="91425" bIns="45700" anchor="ctr" anchorCtr="0">
+            <a:noAutofit/>
+          </a:bodyPr>
+          <a:lstStyle/>
+          <a:p>
+            <a:pPr marL="0" marR="0" lvl="0" indent="0" algn="ctr" rtl="0">
+              <a:spcBef>
+                <a:spcPts val="0"/>
+              </a:spcBef>
+              <a:spcAft>
+                <a:spcPts val="0"/>
+              </a:spcAft>
+              <a:buNone/>
+            </a:pPr>
+            <a:r>
+              <a:rPr lang="ja-JP" sz="1000">
+                <a:solidFill>
+                  <a:schemeClr val="dk1"/>
+                </a:solidFill>
+                <a:latin typeface="メイリオ"/>
+                <a:ea typeface="Meiryo"/>
+                <a:cs typeface="Meiryo"/>
+                <a:sym typeface="Meiryo"/>
+              </a:rPr>
+              <a:t>LINE公式アカウント</a:t>
+            </a:r>
+            <a:endParaRPr sz="1000">
+              <a:solidFill>
+                <a:schemeClr val="dk1"/>
+              </a:solidFill>
+              <a:latin typeface="Meiryo"/>
+              <a:ea typeface="Meiryo"/>
+              <a:cs typeface="Meiryo"/>
+              <a:sym typeface="Meiryo"/>
+            </a:endParaRPr>
+          </a:p>
+        </p:txBody>
+      </p:sp>
+      <p:sp>
+        <p:nvSpPr>
+          <p:cNvPr id="50" name="Google Shape;50;p3"/>
+          <p:cNvSpPr/>
+          <p:nvPr/>
+        </p:nvSpPr>
+        <p:spPr>
+          <a:xfrm>
+            <a:off x="0" y="1890267"/>
+            <a:ext cx="9906000" cy="733579"/>
+          </a:xfrm>
+          <a:prstGeom prst="rect">
+            <a:avLst/>
+          </a:prstGeom>
+          <a:solidFill>
+            <a:srgbClr val="F2F2F2"/>
+          </a:solidFill>
+          <a:ln>
+            <a:noFill/>
+          </a:ln>
+        </p:spPr>
+        <p:txBody>
+          <a:bodyPr spcFirstLastPara="1" wrap="square" lIns="91425" tIns="45700" rIns="91425" bIns="45700" anchor="ctr" anchorCtr="0">
+            <a:noAutofit/>
+          </a:bodyPr>
+          <a:lstStyle/>
+          <a:p>
+            <a:pPr marL="0" marR="0" lvl="0" indent="0" algn="ctr" rtl="0">
+              <a:spcBef>
+                <a:spcPts val="0"/>
+              </a:spcBef>
+              <a:spcAft>
+                <a:spcPts val="0"/>
+              </a:spcAft>
+              <a:buNone/>
+            </a:pPr>
+            <a:endParaRPr sz="1200">
+              <a:solidFill>
+                <a:schemeClr val="dk1"/>
+              </a:solidFill>
+              <a:latin typeface="Meiryo"/>
+              <a:ea typeface="Meiryo"/>
+              <a:cs typeface="Meiryo"/>
+              <a:sym typeface="Meiryo"/>
+            </a:endParaRPr>
+          </a:p>
+        </p:txBody>
+      </p:sp>
+      <p:sp>
+        <p:nvSpPr>
+          <p:cNvPr id="51" name="Google Shape;51;p3"/>
+          <p:cNvSpPr/>
+          <p:nvPr/>
+        </p:nvSpPr>
+        <p:spPr>
+          <a:xfrm>
+            <a:off x="544108" y="1961282"/>
+            <a:ext cx="8817783" cy="646331"/>
+          </a:xfrm>
+          <a:prstGeom prst="rect">
+            <a:avLst/>
+          </a:prstGeom>
+          <a:noFill/>
+          <a:ln>
+            <a:noFill/>
+          </a:ln>
+        </p:spPr>
+        <p:txBody>
+          <a:bodyPr spcFirstLastPara="1" wrap="square" lIns="91425" tIns="45700" rIns="91425" bIns="45700" anchor="t" anchorCtr="0">
+            <a:spAutoFit/>
+          </a:bodyPr>
+          <a:lstStyle/>
+          <a:p>
+            <a:pPr marL="0" marR="0" lvl="0" indent="0" algn="ctr" rtl="0">
+              <a:spcBef>
+                <a:spcPts val="0"/>
+              </a:spcBef>
+              <a:spcAft>
+                <a:spcPts val="0"/>
+              </a:spcAft>
+              <a:buNone/>
+            </a:pPr>
+            <a:r>
+              <a:rPr lang="ja-JP" sz="1200" b="1">
+                <a:solidFill>
+                  <a:schemeClr val="dk1"/>
+                </a:solidFill>
+                <a:latin typeface="メイリオ"/>
+                <a:ea typeface="Meiryo"/>
+                <a:cs typeface="Meiryo"/>
+                <a:sym typeface="Meiryo"/>
+              </a:rPr>
+              <a:t>LINEシリアルコードスタンプに限り、クリエイティブの基準が3点緩和されている。</a:t>
+            </a:r>
+            <a:endParaRPr sz="1200" b="1">
+              <a:solidFill>
+                <a:schemeClr val="dk1"/>
+              </a:solidFill>
+              <a:latin typeface="Meiryo"/>
+              <a:ea typeface="Meiryo"/>
+              <a:cs typeface="Meiryo"/>
+              <a:sym typeface="Meiryo"/>
+            </a:endParaRPr>
+          </a:p>
+          <a:p>
+            <a:pPr marL="0" marR="0" lvl="0" indent="0" algn="ctr" rtl="0">
+              <a:spcBef>
+                <a:spcPts val="0"/>
+              </a:spcBef>
+              <a:spcAft>
+                <a:spcPts val="0"/>
+              </a:spcAft>
+              <a:buNone/>
+            </a:pPr>
+            <a:r>
+              <a:rPr lang="ja-JP" sz="1200" b="1">
+                <a:solidFill>
+                  <a:schemeClr val="dk1"/>
+                </a:solidFill>
+                <a:latin typeface="メイリオ"/>
+                <a:ea typeface="Meiryo"/>
+                <a:cs typeface="Meiryo"/>
+                <a:sym typeface="Meiryo"/>
+              </a:rPr>
+              <a:t>審査から開始までの流れと、コード発行・入稿の締切を押さえておく。</a:t>
+            </a:r>
+            <a:endParaRPr/>
+          </a:p>
+          <a:p>
+            <a:pPr marL="0" marR="0" lvl="0" indent="0" algn="ctr" rtl="0">
+              <a:spcBef>
+                <a:spcPts val="0"/>
+              </a:spcBef>
+              <a:spcAft>
+                <a:spcPts val="0"/>
+              </a:spcAft>
+              <a:buNone/>
+            </a:pPr>
+            <a:r>
+              <a:rPr lang="ja-JP" sz="1200" b="1">
+                <a:solidFill>
+                  <a:schemeClr val="dk1"/>
+                </a:solidFill>
+                <a:latin typeface="メイリオ"/>
+                <a:ea typeface="Meiryo"/>
+                <a:cs typeface="Meiryo"/>
+                <a:sym typeface="Meiryo"/>
+              </a:rPr>
+              <a:t>詳細は「LINEシリアルコードスタンプ 進行ガイド（2026年10月版）」に記載。</a:t>
+            </a:r>
+            <a:endParaRPr sz="1400" b="1">
+              <a:solidFill>
+                <a:schemeClr val="dk1"/>
+              </a:solidFill>
+              <a:latin typeface="Meiryo"/>
+              <a:ea typeface="Meiryo"/>
+              <a:cs typeface="Meiryo"/>
+              <a:sym typeface="Meiryo"/>
+            </a:endParaRPr>
+          </a:p>
+        </p:txBody>
+      </p:sp>
+      <p:sp>
+        <p:nvSpPr>
+          <p:cNvPr id="52" name="Google Shape;52;p3"/>
+          <p:cNvSpPr/>
+          <p:nvPr/>
+        </p:nvSpPr>
+        <p:spPr>
+          <a:xfrm>
+            <a:off x="351381" y="2714173"/>
+            <a:ext cx="5200000" cy="338554"/>
+          </a:xfrm>
+          <a:prstGeom prst="rect">
+            <a:avLst/>
+          </a:prstGeom>
+          <a:noFill/>
+          <a:ln>
+            <a:noFill/>
+          </a:ln>
+        </p:spPr>
+        <p:txBody>
+          <a:bodyPr spcFirstLastPara="1" wrap="square" lIns="91425" tIns="45700" rIns="91425" bIns="45700" anchor="t" anchorCtr="0">
+            <a:noAutofit/>
+          </a:bodyPr>
+          <a:lstStyle/>
+          <a:p>
+            <a:pPr marL="0" marR="0" lvl="0" indent="0" algn="l" rtl="0">
+              <a:spcBef>
+                <a:spcPts val="0"/>
+              </a:spcBef>
+              <a:spcAft>
+                <a:spcPts val="0"/>
+              </a:spcAft>
+              <a:buNone/>
+            </a:pPr>
+            <a:r>
+              <a:rPr lang="ja-JP" sz="1400" b="1">
+                <a:solidFill>
+                  <a:srgbClr val="15133D"/>
+                </a:solidFill>
+                <a:latin typeface="メイリオ"/>
+                <a:ea typeface="Meiryo"/>
+                <a:cs typeface="Meiryo"/>
+                <a:sym typeface="Meiryo"/>
+              </a:rPr>
+              <a:t>■ 詳細</a:t>
+            </a:r>
+            <a:endParaRPr/>
+          </a:p>
+        </p:txBody>
+      </p:sp>
+      <p:grpSp>
+        <p:nvGrpSpPr>
+          <p:cNvPr id="53" name="Google Shape;53;p3"/>
+          <p:cNvGrpSpPr/>
+          <p:nvPr/>
+        </p:nvGrpSpPr>
+        <p:grpSpPr>
+          <a:xfrm>
+            <a:off x="8473303" y="730955"/>
+            <a:ext cx="1376241" cy="1131930"/>
+            <a:chOff x="0" y="0"/>
+            <a:chExt cx="1376241" cy="1131930"/>
+          </a:xfrm>
+        </p:grpSpPr>
+        <p:sp>
+          <p:nvSpPr>
+            <p:cNvPr id="54" name="Google Shape;54;p3"/>
+            <p:cNvSpPr/>
+            <p:nvPr/>
+          </p:nvSpPr>
+          <p:spPr>
+            <a:xfrm rot="10800000">
+              <a:off x="0" y="0"/>
+              <a:ext cx="1376241" cy="282982"/>
+            </a:xfrm>
+            <a:prstGeom prst="trapezoid">
+              <a:avLst>
+                <a:gd name="adj" fmla="val 60792"/>
+              </a:avLst>
+            </a:prstGeom>
+            <a:solidFill>
+              <a:srgbClr val="EAEDF5"/>
+            </a:solidFill>
+            <a:ln w="25400" cap="flat" cmpd="sng">
+              <a:solidFill>
+                <a:schemeClr val="dk2"/>
+              </a:solidFill>
+              <a:prstDash val="solid"/>
+              <a:round/>
+              <a:headEnd type="none" w="sm" len="sm"/>
+              <a:tailEnd type="none" w="sm" len="sm"/>
+            </a:ln>
+          </p:spPr>
+          <p:txBody>
+            <a:bodyPr spcFirstLastPara="1" wrap="square" lIns="91425" tIns="91425" rIns="91425" bIns="91425" anchor="ctr" anchorCtr="0">
+              <a:noAutofit/>
+            </a:bodyPr>
+            <a:lstStyle/>
+            <a:p>
+              <a:pPr marL="0" lvl="0" indent="0" algn="l" rtl="0">
+                <a:spcBef>
+                  <a:spcPts val="0"/>
+                </a:spcBef>
+                <a:spcAft>
+                  <a:spcPts val="0"/>
+                </a:spcAft>
+                <a:buNone/>
+              </a:pPr>
+              <a:endParaRPr/>
+            </a:p>
+          </p:txBody>
+        </p:sp>
+        <p:sp>
+          <p:nvSpPr>
+            <p:cNvPr id="55" name="Google Shape;55;p3"/>
+            <p:cNvSpPr txBox="1"/>
+            <p:nvPr/>
+          </p:nvSpPr>
+          <p:spPr>
+            <a:xfrm>
+              <a:off x="240842" y="0"/>
+              <a:ext cx="894556" cy="282982"/>
+            </a:xfrm>
+            <a:prstGeom prst="rect">
+              <a:avLst/>
+            </a:prstGeom>
+            <a:noFill/>
+            <a:ln>
+              <a:noFill/>
+            </a:ln>
+          </p:spPr>
+          <p:txBody>
+            <a:bodyPr spcFirstLastPara="1" wrap="square" lIns="10150" tIns="10150" rIns="10150" bIns="10150" anchor="ctr" anchorCtr="0">
+              <a:noAutofit/>
+            </a:bodyPr>
+            <a:lstStyle/>
+            <a:p>
+              <a:pPr marL="0" marR="0" lvl="0" indent="0" algn="ctr" rtl="0">
+                <a:lnSpc>
+                  <a:spcPct val="90000"/>
+                </a:lnSpc>
+                <a:spcBef>
+                  <a:spcPts val="0"/>
+                </a:spcBef>
+                <a:spcAft>
+                  <a:spcPts val="0"/>
+                </a:spcAft>
+                <a:buClr>
+                  <a:srgbClr val="262626"/>
+                </a:buClr>
+                <a:buSzPts val="800"/>
+                <a:buFont typeface="Arial"/>
+                <a:buNone/>
+              </a:pPr>
+              <a:r>
+                <a:rPr lang="ja-JP" sz="800" b="1">
+                  <a:solidFill>
+                    <a:srgbClr val="262626"/>
+                  </a:solidFill>
+                  <a:latin typeface="Arial"/>
+                  <a:ea typeface="Arial"/>
+                  <a:cs typeface="Arial"/>
+                  <a:sym typeface="Arial"/>
+                </a:rPr>
+                <a:t>認知</a:t>
+              </a:r>
+              <a:endParaRPr/>
+            </a:p>
+          </p:txBody>
+        </p:sp>
+        <p:sp>
+          <p:nvSpPr>
+            <p:cNvPr id="56" name="Google Shape;56;p3"/>
+            <p:cNvSpPr/>
+            <p:nvPr/>
+          </p:nvSpPr>
+          <p:spPr>
+            <a:xfrm rot="10800000">
+              <a:off x="172030" y="282982"/>
+              <a:ext cx="1032180" cy="282982"/>
+            </a:xfrm>
+            <a:prstGeom prst="trapezoid">
+              <a:avLst>
+                <a:gd name="adj" fmla="val 60792"/>
+              </a:avLst>
+            </a:prstGeom>
+            <a:solidFill>
+              <a:schemeClr val="lt1"/>
+            </a:solidFill>
+            <a:ln w="25400" cap="flat" cmpd="sng">
+              <a:solidFill>
+                <a:schemeClr val="dk2"/>
+              </a:solidFill>
+              <a:prstDash val="solid"/>
+              <a:round/>
+              <a:headEnd type="none" w="sm" len="sm"/>
+              <a:tailEnd type="none" w="sm" len="sm"/>
+            </a:ln>
+          </p:spPr>
+          <p:txBody>
+            <a:bodyPr spcFirstLastPara="1" wrap="square" lIns="91425" tIns="91425" rIns="91425" bIns="91425" anchor="ctr" anchorCtr="0">
+              <a:noAutofit/>
+            </a:bodyPr>
+            <a:lstStyle/>
+            <a:p>
+              <a:pPr marL="0" lvl="0" indent="0" algn="l" rtl="0">
+                <a:spcBef>
+                  <a:spcPts val="0"/>
+                </a:spcBef>
+                <a:spcAft>
+                  <a:spcPts val="0"/>
+                </a:spcAft>
+                <a:buNone/>
+              </a:pPr>
+              <a:endParaRPr/>
+            </a:p>
+          </p:txBody>
+        </p:sp>
+        <p:sp>
+          <p:nvSpPr>
+            <p:cNvPr id="57" name="Google Shape;57;p3"/>
+            <p:cNvSpPr txBox="1"/>
+            <p:nvPr/>
+          </p:nvSpPr>
+          <p:spPr>
+            <a:xfrm>
+              <a:off x="352661" y="282982"/>
+              <a:ext cx="670917" cy="282982"/>
+            </a:xfrm>
+            <a:prstGeom prst="rect">
+              <a:avLst/>
+            </a:prstGeom>
+            <a:noFill/>
+            <a:ln>
+              <a:noFill/>
+            </a:ln>
+          </p:spPr>
+          <p:txBody>
+            <a:bodyPr spcFirstLastPara="1" wrap="square" lIns="10150" tIns="10150" rIns="10150" bIns="10150" anchor="ctr" anchorCtr="0">
+              <a:noAutofit/>
+            </a:bodyPr>
+            <a:lstStyle/>
+            <a:p>
+              <a:pPr marL="0" marR="0" lvl="0" indent="0" algn="ctr" rtl="0">
+                <a:lnSpc>
+                  <a:spcPct val="90000"/>
+                </a:lnSpc>
+                <a:spcBef>
+                  <a:spcPts val="0"/>
+                </a:spcBef>
+                <a:spcAft>
+                  <a:spcPts val="0"/>
+                </a:spcAft>
+                <a:buClr>
+                  <a:srgbClr val="262626"/>
+                </a:buClr>
+                <a:buSzPts val="800"/>
+                <a:buFont typeface="Arial"/>
+                <a:buNone/>
+              </a:pPr>
+              <a:r>
+                <a:rPr lang="ja-JP" sz="800" b="1">
+                  <a:solidFill>
+                    <a:srgbClr val="262626"/>
+                  </a:solidFill>
+                  <a:latin typeface="Arial"/>
+                  <a:ea typeface="Arial"/>
+                  <a:cs typeface="Arial"/>
+                  <a:sym typeface="Arial"/>
+                </a:rPr>
+                <a:t>検討</a:t>
+              </a:r>
+              <a:endParaRPr/>
+            </a:p>
+          </p:txBody>
+        </p:sp>
+        <p:sp>
+          <p:nvSpPr>
+            <p:cNvPr id="58" name="Google Shape;58;p3"/>
+            <p:cNvSpPr/>
+            <p:nvPr/>
+          </p:nvSpPr>
+          <p:spPr>
+            <a:xfrm rot="10800000">
+              <a:off x="344060" y="565965"/>
+              <a:ext cx="688120" cy="282982"/>
+            </a:xfrm>
+            <a:prstGeom prst="trapezoid">
+              <a:avLst>
+                <a:gd name="adj" fmla="val 60792"/>
+              </a:avLst>
+            </a:prstGeom>
+            <a:solidFill>
+              <a:schemeClr val="lt1"/>
+            </a:solidFill>
+            <a:ln w="25400" cap="flat" cmpd="sng">
+              <a:solidFill>
+                <a:schemeClr val="dk2"/>
+              </a:solidFill>
+              <a:prstDash val="solid"/>
+              <a:round/>
+              <a:headEnd type="none" w="sm" len="sm"/>
+              <a:tailEnd type="none" w="sm" len="sm"/>
+            </a:ln>
+          </p:spPr>
+          <p:txBody>
+            <a:bodyPr spcFirstLastPara="1" wrap="square" lIns="91425" tIns="91425" rIns="91425" bIns="91425" anchor="ctr" anchorCtr="0">
+              <a:noAutofit/>
+            </a:bodyPr>
+            <a:lstStyle/>
+            <a:p>
+              <a:pPr marL="0" lvl="0" indent="0" algn="l" rtl="0">
+                <a:spcBef>
+                  <a:spcPts val="0"/>
+                </a:spcBef>
+                <a:spcAft>
+                  <a:spcPts val="0"/>
+                </a:spcAft>
+                <a:buNone/>
+              </a:pPr>
+              <a:endParaRPr/>
+            </a:p>
+          </p:txBody>
+        </p:sp>
+        <p:sp>
+          <p:nvSpPr>
+            <p:cNvPr id="59" name="Google Shape;59;p3"/>
+            <p:cNvSpPr txBox="1"/>
+            <p:nvPr/>
+          </p:nvSpPr>
+          <p:spPr>
+            <a:xfrm>
+              <a:off x="464481" y="565965"/>
+              <a:ext cx="447278" cy="282982"/>
+            </a:xfrm>
+            <a:prstGeom prst="rect">
+              <a:avLst/>
+            </a:prstGeom>
+            <a:noFill/>
+            <a:ln>
+              <a:noFill/>
+            </a:ln>
+          </p:spPr>
+          <p:txBody>
+            <a:bodyPr spcFirstLastPara="1" wrap="square" lIns="10150" tIns="10150" rIns="10150" bIns="10150" anchor="ctr" anchorCtr="0">
+              <a:noAutofit/>
+            </a:bodyPr>
+            <a:lstStyle/>
+            <a:p>
+              <a:pPr marL="0" marR="0" lvl="0" indent="0" algn="ctr" rtl="0">
+                <a:lnSpc>
+                  <a:spcPct val="90000"/>
+                </a:lnSpc>
+                <a:spcBef>
+                  <a:spcPts val="0"/>
+                </a:spcBef>
+                <a:spcAft>
+                  <a:spcPts val="0"/>
+                </a:spcAft>
+                <a:buClr>
+                  <a:srgbClr val="262626"/>
+                </a:buClr>
+                <a:buSzPts val="800"/>
+                <a:buFont typeface="Arial"/>
+                <a:buNone/>
+              </a:pPr>
+              <a:r>
+                <a:rPr lang="ja-JP" sz="800" b="1">
+                  <a:solidFill>
+                    <a:srgbClr val="262626"/>
+                  </a:solidFill>
+                  <a:latin typeface="Arial"/>
+                  <a:ea typeface="Arial"/>
+                  <a:cs typeface="Arial"/>
+                  <a:sym typeface="Arial"/>
+                </a:rPr>
+                <a:t>獲得</a:t>
+              </a:r>
+              <a:endParaRPr/>
+            </a:p>
+          </p:txBody>
+        </p:sp>
+        <p:sp>
+          <p:nvSpPr>
+            <p:cNvPr id="60" name="Google Shape;60;p3"/>
+            <p:cNvSpPr/>
+            <p:nvPr/>
+          </p:nvSpPr>
+          <p:spPr>
+            <a:xfrm rot="10800000">
+              <a:off x="516090" y="848948"/>
+              <a:ext cx="344060" cy="282982"/>
+            </a:xfrm>
+            <a:prstGeom prst="trapezoid">
+              <a:avLst>
+                <a:gd name="adj" fmla="val 60792"/>
+              </a:avLst>
+            </a:prstGeom>
+            <a:noFill/>
+            <a:ln w="25400" cap="flat" cmpd="sng">
+              <a:solidFill>
+                <a:schemeClr val="dk2"/>
+              </a:solidFill>
+              <a:prstDash val="solid"/>
+              <a:round/>
+              <a:headEnd type="none" w="sm" len="sm"/>
+              <a:tailEnd type="none" w="sm" len="sm"/>
+            </a:ln>
+          </p:spPr>
+          <p:txBody>
+            <a:bodyPr spcFirstLastPara="1" wrap="square" lIns="91425" tIns="91425" rIns="91425" bIns="91425" anchor="ctr" anchorCtr="0">
+              <a:noAutofit/>
+            </a:bodyPr>
+            <a:lstStyle/>
+            <a:p>
+              <a:pPr marL="0" lvl="0" indent="0" algn="l" rtl="0">
+                <a:spcBef>
+                  <a:spcPts val="0"/>
+                </a:spcBef>
+                <a:spcAft>
+                  <a:spcPts val="0"/>
+                </a:spcAft>
+                <a:buNone/>
+              </a:pPr>
+              <a:endParaRPr/>
+            </a:p>
+          </p:txBody>
+        </p:sp>
+        <p:sp>
+          <p:nvSpPr>
+            <p:cNvPr id="61" name="Google Shape;61;p3"/>
+            <p:cNvSpPr txBox="1"/>
+            <p:nvPr/>
+          </p:nvSpPr>
+          <p:spPr>
+            <a:xfrm>
+              <a:off x="516090" y="848948"/>
+              <a:ext cx="344060" cy="282982"/>
+            </a:xfrm>
+            <a:prstGeom prst="rect">
+              <a:avLst/>
+            </a:prstGeom>
+            <a:noFill/>
+            <a:ln>
+              <a:noFill/>
+            </a:ln>
+          </p:spPr>
+          <p:txBody>
+            <a:bodyPr spcFirstLastPara="1" wrap="square" lIns="10150" tIns="10150" rIns="10150" bIns="10150" anchor="ctr" anchorCtr="0">
+              <a:noAutofit/>
+            </a:bodyPr>
+            <a:lstStyle/>
+            <a:p>
+              <a:pPr marL="0" marR="0" lvl="0" indent="0" algn="ctr" rtl="0">
+                <a:lnSpc>
+                  <a:spcPct val="90000"/>
+                </a:lnSpc>
+                <a:spcBef>
+                  <a:spcPts val="0"/>
+                </a:spcBef>
+                <a:spcAft>
+                  <a:spcPts val="0"/>
+                </a:spcAft>
+                <a:buClr>
+                  <a:srgbClr val="262626"/>
+                </a:buClr>
+                <a:buSzPts val="800"/>
+                <a:buFont typeface="Arial"/>
+                <a:buNone/>
+              </a:pPr>
+              <a:r>
+                <a:rPr lang="ja-JP" sz="800" b="1">
+                  <a:solidFill>
+                    <a:srgbClr val="262626"/>
+                  </a:solidFill>
+                  <a:latin typeface="Arial"/>
+                  <a:ea typeface="Arial"/>
+                  <a:cs typeface="Arial"/>
+                  <a:sym typeface="Arial"/>
+                </a:rPr>
+                <a:t>伸長</a:t>
+              </a:r>
+              <a:endParaRPr/>
+            </a:p>
+          </p:txBody>
+        </p:sp>
+      </p:grpSp>
+      <p:pic>
+        <p:nvPicPr>
+          <p:cNvPr id="62" name="Google Shape;62;p3" descr="LINE公式アカウントのロゴの使用方法とは？種類やダウンロード方法、利用時の注意点を紹介 | Mico（ミコ）"/>
+          <p:cNvPicPr preferRelativeResize="0"/>
+          <p:nvPr/>
+        </p:nvPicPr>
+        <p:blipFill rotWithShape="1">
+          <a:blip r:embed="rId2">
+            <a:alphaModFix/>
+          </a:blip>
+          <a:srcRect/>
+          <a:stretch/>
+        </p:blipFill>
+        <p:spPr>
+          <a:xfrm>
+            <a:off x="351381" y="1234746"/>
+            <a:ext cx="656177" cy="655521"/>
+          </a:xfrm>
+          <a:prstGeom prst="rect">
+            <a:avLst/>
+          </a:prstGeom>
+          <a:noFill/>
+          <a:ln>
+            <a:noFill/>
+          </a:ln>
+        </p:spPr>
+      </p:pic>
+      <p:sp>
+        <p:nvSpPr>
+          <p:cNvPr id="63" name="Rounded Rectangle 62"/>
+          <p:cNvSpPr/>
+          <p:nvPr/>
+        </p:nvSpPr>
+        <p:spPr>
+          <a:xfrm>
+            <a:off x="548640" y="3127248"/>
+            <a:ext cx="8814816" cy="1527048"/>
           </a:xfrm>
           <a:prstGeom prst="roundRect">
             <a:avLst>
@@ -12203,7 +15372,7 @@
                 </a:solidFill>
                 <a:latin typeface="メイリオ"/>
               </a:rPr>
-              <a:t>シリアルコードの付与条件</a:t>
+              <a:t>クリエイティブの基準緩和（この商品だけ）</a:t>
             </a:r>
           </a:p>
           <a:p>
@@ -12212,7 +15381,7 @@
                 <a:spcPct val="115000"/>
               </a:lnSpc>
               <a:spcBef>
-                <a:spcPts val="600"/>
+                <a:spcPts val="400"/>
               </a:spcBef>
             </a:pPr>
             <a:r>
@@ -12222,21 +15391,59 @@
                 </a:solidFill>
                 <a:latin typeface="メイリオ"/>
               </a:rPr>
-              <a:t>Web・オフライン（購入・来店など）での条件達成はOK。アプリ内での条件達成や、獲得までにアプリ遷移を含む導線はNG。</a:t>
+              <a:t>・飲酒表現：可（「お酒は20歳になってから」の注記が必須）</a:t>
+            </a:r>
+          </a:p>
+          <a:p>
+            <a:pPr algn="l">
+              <a:lnSpc>
+                <a:spcPct val="115000"/>
+              </a:lnSpc>
+              <a:spcBef>
+                <a:spcPts val="400"/>
+              </a:spcBef>
+            </a:pPr>
+            <a:r>
+              <a:rPr sz="1300">
+                <a:solidFill>
+                  <a:srgbClr val="333333"/>
+                </a:solidFill>
+                <a:latin typeface="メイリオ"/>
+              </a:rPr>
+              <a:t>・実写素材：タレントの写真や、CM・ポスター素材の転用が可（品質基準あり。肖像権の処理は広告主側）</a:t>
+            </a:r>
+          </a:p>
+          <a:p>
+            <a:pPr algn="l">
+              <a:lnSpc>
+                <a:spcPct val="115000"/>
+              </a:lnSpc>
+              <a:spcBef>
+                <a:spcPts val="400"/>
+              </a:spcBef>
+            </a:pPr>
+            <a:r>
+              <a:rPr sz="1300">
+                <a:solidFill>
+                  <a:srgbClr val="333333"/>
+                </a:solidFill>
+                <a:latin typeface="メイリオ"/>
+              </a:rPr>
+              <a:t>・PR要素（ロゴ・商品パッケージ）：通常は全体の1/4までのところ、個数の制限なし</a:t>
             </a:r>
           </a:p>
         </p:txBody>
       </p:sp>
       <p:sp>
         <p:nvSpPr>
-          <p:cNvPr id="66" name="Rounded Rectangle 65"/>
+          <p:cNvPr id="64" name="Rounded Rectangle 63"/>
           <p:cNvSpPr/>
           <p:nvPr/>
         </p:nvSpPr>
         <p:spPr>
           <a:xfrm>
-            <a:off x="5039448" y="4609755"/>
-            <a:ext cx="4322443" cy="1357915"/>
+            <a:off x="548640" y="4818888"/>
+            <a:ext cx="8814816" cy="1527048"/>
           </a:xfrm>
           <a:prstGeom prst="roundRect">
             <a:avLst>
@@ -12279,7 +15486,7 @@
                 </a:solidFill>
                 <a:latin typeface="メイリオ"/>
               </a:rPr>
-              <a:t>コード発行は発注受領後</a:t>
+              <a:t>進め方の要点</a:t>
             </a:r>
           </a:p>
           <a:p>
@@ -12288,7 +15495,7 @@
                 <a:spcPct val="115000"/>
               </a:lnSpc>
               <a:spcBef>
-                <a:spcPts val="600"/>
+                <a:spcPts val="400"/>
               </a:spcBef>
             </a:pPr>
             <a:r>
@@ -12298,7 +15505,45 @@
                 </a:solidFill>
                 <a:latin typeface="メイリオ"/>
               </a:rPr>
-              <a:t>発注受領後にLBPMで申請し、3営業日を目途に納品。追加発注は不可。印刷・配荷がある場合はその日数も見込む。</a:t>
+              <a:t>・流れ：審査（広告主・キャンペーン内容）→ 発注 → シリアルコード発行 → 入稿 → 開始</a:t>
+            </a:r>
+          </a:p>
+          <a:p>
+            <a:pPr algn="l">
+              <a:lnSpc>
+                <a:spcPct val="115000"/>
+              </a:lnSpc>
+              <a:spcBef>
+                <a:spcPts val="400"/>
+              </a:spcBef>
+            </a:pPr>
+            <a:r>
+              <a:rPr sz="1300">
+                <a:solidFill>
+                  <a:srgbClr val="333333"/>
+                </a:solidFill>
+                <a:latin typeface="メイリオ"/>
+              </a:rPr>
+              <a:t>・コードは申請から3営業日を目安にCSVで納品（テスト用1,000件付き）。追加発注は不可</a:t>
+            </a:r>
+          </a:p>
+          <a:p>
+            <a:pPr algn="l">
+              <a:lnSpc>
+                <a:spcPct val="115000"/>
+              </a:lnSpc>
+              <a:spcBef>
+                <a:spcPts val="400"/>
+              </a:spcBef>
+            </a:pPr>
+            <a:r>
+              <a:rPr sz="1300">
+                <a:solidFill>
+                  <a:srgbClr val="333333"/>
+                </a:solidFill>
+                <a:latin typeface="メイリオ"/>
+              </a:rPr>
+              <a:t>・入稿の締切は、静止画で開始の6営業日前から</a:t>
             </a:r>
           </a:p>
         </p:txBody>
@@ -12311,7 +15556,7 @@
 </p:sld>
 </file>
 
-<file path=ppt/slides/slide7.xml><?xml version="1.0" encoding="utf-8"?>
+<file path=ppt/slides/slide8.xml><?xml version="1.0" encoding="utf-8"?>
 <p:sld xmlns:a="http://schemas.openxmlformats.org/drawingml/2006/main" xmlns:r="http://schemas.openxmlformats.org/officeDocument/2006/relationships" xmlns:p="http://schemas.openxmlformats.org/presentationml/2006/main">
   <p:cSld>
     <p:spTree>
@@ -14148,7 +17393,7 @@
 </p:sld>
 </file>
 
-<file path=ppt/slides/slide8.xml><?xml version="1.0" encoding="utf-8"?>
+<file path=ppt/slides/slide9.xml><?xml version="1.0" encoding="utf-8"?>
 <p:sld xmlns:a="http://schemas.openxmlformats.org/drawingml/2006/main" xmlns:r="http://schemas.openxmlformats.org/officeDocument/2006/relationships" xmlns:p="http://schemas.openxmlformats.org/presentationml/2006/main">
   <p:cSld>
     <p:spTree>
@@ -16225,1717 +19470,6 @@
                 <a:latin typeface="メイリオ"/>
               </a:rPr>
               <a:t>備考欄に「FY26 Winter Campaign適用」と記載。配信中・発注受領済みの案件、他割引との併用、デリタゲ配信は対象外。</a:t>
-            </a:r>
-          </a:p>
-        </p:txBody>
-      </p:sp>
-    </p:spTree>
-  </p:cSld>
-  <p:clrMapOvr>
-    <a:masterClrMapping/>
-  </p:clrMapOvr>
-</p:sld>
-</file>
-
-<file path=ppt/slides/slide9.xml><?xml version="1.0" encoding="utf-8"?>
-<p:sld xmlns:a="http://schemas.openxmlformats.org/drawingml/2006/main" xmlns:r="http://schemas.openxmlformats.org/officeDocument/2006/relationships" xmlns:p="http://schemas.openxmlformats.org/presentationml/2006/main">
-  <p:cSld>
-    <p:spTree>
-      <p:nvGrpSpPr>
-        <p:cNvPr id="1" name=""/>
-        <p:cNvGrpSpPr/>
-        <p:nvPr/>
-      </p:nvGrpSpPr>
-      <p:grpSpPr>
-        <a:xfrm>
-          <a:off x="0" y="0"/>
-          <a:ext cx="0" cy="0"/>
-          <a:chOff x="0" y="0"/>
-          <a:chExt cx="0" cy="0"/>
-        </a:xfrm>
-      </p:grpSpPr>
-      <p:sp>
-        <p:nvSpPr>
-          <p:cNvPr id="40" name="Google Shape;40;p3"/>
-          <p:cNvSpPr/>
-          <p:nvPr/>
-        </p:nvSpPr>
-        <p:spPr>
-          <a:xfrm>
-            <a:off x="292801" y="730955"/>
-            <a:ext cx="1296144" cy="435690"/>
-          </a:xfrm>
-          <a:prstGeom prst="rect">
-            <a:avLst/>
-          </a:prstGeom>
-          <a:solidFill>
-            <a:schemeClr val="dk2"/>
-          </a:solidFill>
-          <a:ln w="9525" cap="flat" cmpd="sng">
-            <a:solidFill>
-              <a:srgbClr val="4A7DBA"/>
-            </a:solidFill>
-            <a:prstDash val="solid"/>
-            <a:round/>
-            <a:headEnd type="none" w="sm" len="sm"/>
-            <a:tailEnd type="none" w="sm" len="sm"/>
-          </a:ln>
-        </p:spPr>
-        <p:txBody>
-          <a:bodyPr spcFirstLastPara="1" wrap="square" lIns="91425" tIns="45700" rIns="91425" bIns="45700" anchor="ctr" anchorCtr="0">
-            <a:noAutofit/>
-          </a:bodyPr>
-          <a:lstStyle/>
-          <a:p>
-            <a:pPr marL="0" marR="0" lvl="0" indent="0" algn="ctr" rtl="0">
-              <a:spcBef>
-                <a:spcPts val="0"/>
-              </a:spcBef>
-              <a:spcAft>
-                <a:spcPts val="0"/>
-              </a:spcAft>
-              <a:buNone/>
-            </a:pPr>
-            <a:r>
-              <a:rPr lang="ja-JP" sz="1800" b="0" i="0" u="none" strike="noStrike" cap="none">
-                <a:solidFill>
-                  <a:schemeClr val="lt1"/>
-                </a:solidFill>
-                <a:latin typeface="メイリオ"/>
-                <a:ea typeface="Meiryo"/>
-                <a:cs typeface="Meiryo"/>
-                <a:sym typeface="Meiryo"/>
-              </a:rPr>
-              <a:t>対象業界</a:t>
-            </a:r>
-            <a:endParaRPr/>
-          </a:p>
-        </p:txBody>
-      </p:sp>
-      <p:sp>
-        <p:nvSpPr>
-          <p:cNvPr id="41" name="Google Shape;41;p3"/>
-          <p:cNvSpPr/>
-          <p:nvPr/>
-        </p:nvSpPr>
-        <p:spPr>
-          <a:xfrm>
-            <a:off x="7560840" y="730955"/>
-            <a:ext cx="829618" cy="435690"/>
-          </a:xfrm>
-          <a:prstGeom prst="rect">
-            <a:avLst/>
-          </a:prstGeom>
-          <a:solidFill>
-            <a:schemeClr val="bg1"/>
-          </a:solidFill>
-          <a:ln w="9525" cap="flat" cmpd="sng">
-            <a:solidFill>
-              <a:srgbClr val="4F81BD"/>
-            </a:solidFill>
-            <a:prstDash val="sysDash"/>
-            <a:round/>
-            <a:headEnd type="none" w="sm" len="sm"/>
-            <a:tailEnd type="none" w="sm" len="sm"/>
-          </a:ln>
-        </p:spPr>
-        <p:txBody>
-          <a:bodyPr spcFirstLastPara="1" wrap="square" lIns="91425" tIns="45700" rIns="91425" bIns="45700" anchor="ctr" anchorCtr="0">
-            <a:noAutofit/>
-          </a:bodyPr>
-          <a:lstStyle/>
-          <a:p>
-            <a:pPr marL="0" marR="0" lvl="0" indent="0" algn="ctr" rtl="0">
-              <a:spcBef>
-                <a:spcPts val="0"/>
-              </a:spcBef>
-              <a:spcAft>
-                <a:spcPts val="0"/>
-              </a:spcAft>
-              <a:buNone/>
-            </a:pPr>
-            <a:r>
-              <a:rPr lang="ja-JP" sz="1200" b="0" i="0" u="none" strike="noStrike" cap="none">
-                <a:solidFill>
-                  <a:schemeClr val="dk1"/>
-                </a:solidFill>
-                <a:latin typeface="メイリオ"/>
-                <a:ea typeface="Meiryo"/>
-                <a:cs typeface="Meiryo"/>
-                <a:sym typeface="Meiryo"/>
-              </a:rPr>
-              <a:t>その他</a:t>
-            </a:r>
-            <a:endParaRPr sz="1200" b="0" i="0" u="none" strike="noStrike" cap="none">
-              <a:solidFill>
-                <a:schemeClr val="dk1"/>
-              </a:solidFill>
-              <a:latin typeface="Meiryo"/>
-              <a:ea typeface="Meiryo"/>
-              <a:cs typeface="Meiryo"/>
-              <a:sym typeface="Meiryo"/>
-            </a:endParaRPr>
-          </a:p>
-        </p:txBody>
-      </p:sp>
-      <p:sp>
-        <p:nvSpPr>
-          <p:cNvPr id="42" name="Google Shape;42;p3"/>
-          <p:cNvSpPr/>
-          <p:nvPr/>
-        </p:nvSpPr>
-        <p:spPr>
-          <a:xfrm>
-            <a:off x="6679050" y="730955"/>
-            <a:ext cx="829618" cy="435690"/>
-          </a:xfrm>
-          <a:prstGeom prst="rect">
-            <a:avLst/>
-          </a:prstGeom>
-          <a:solidFill>
-            <a:schemeClr val="tx2"/>
-          </a:solidFill>
-          <a:ln w="9525" cap="flat" cmpd="sng">
-            <a:solidFill>
-              <a:srgbClr val="4F81BD"/>
-            </a:solidFill>
-            <a:prstDash val="solid"/>
-            <a:round/>
-            <a:headEnd type="none" w="sm" len="sm"/>
-            <a:tailEnd type="none" w="sm" len="sm"/>
-          </a:ln>
-        </p:spPr>
-        <p:txBody>
-          <a:bodyPr spcFirstLastPara="1" wrap="square" lIns="91425" tIns="45700" rIns="91425" bIns="45700" anchor="ctr" anchorCtr="0">
-            <a:noAutofit/>
-          </a:bodyPr>
-          <a:lstStyle/>
-          <a:p>
-            <a:pPr marL="0" marR="0" lvl="0" indent="0" algn="ctr" rtl="0">
-              <a:spcBef>
-                <a:spcPts val="0"/>
-              </a:spcBef>
-              <a:spcAft>
-                <a:spcPts val="0"/>
-              </a:spcAft>
-              <a:buNone/>
-            </a:pPr>
-            <a:r>
-              <a:rPr lang="ja-JP" sz="1000" b="0" i="0" u="none" strike="noStrike" cap="none">
-                <a:solidFill>
-                  <a:schemeClr val="dk1"/>
-                </a:solidFill>
-                <a:latin typeface="メイリオ"/>
-                <a:ea typeface="Meiryo"/>
-                <a:cs typeface="Meiryo"/>
-                <a:sym typeface="Meiryo"/>
-              </a:rPr>
-              <a:t>オプション</a:t>
-            </a:r>
-            <a:endParaRPr sz="1000" b="0" i="0" u="none" strike="noStrike" cap="none">
-              <a:solidFill>
-                <a:schemeClr val="dk1"/>
-              </a:solidFill>
-              <a:latin typeface="Meiryo"/>
-              <a:ea typeface="Meiryo"/>
-              <a:cs typeface="Meiryo"/>
-              <a:sym typeface="Meiryo"/>
-            </a:endParaRPr>
-          </a:p>
-          <a:p>
-            <a:pPr marL="0" marR="0" lvl="0" indent="0" algn="ctr" rtl="0">
-              <a:spcBef>
-                <a:spcPts val="0"/>
-              </a:spcBef>
-              <a:spcAft>
-                <a:spcPts val="0"/>
-              </a:spcAft>
-              <a:buNone/>
-            </a:pPr>
-            <a:r>
-              <a:rPr lang="ja-JP" sz="1000" b="0" i="0" u="none" strike="noStrike" cap="none">
-                <a:solidFill>
-                  <a:schemeClr val="dk1"/>
-                </a:solidFill>
-                <a:latin typeface="メイリオ"/>
-                <a:ea typeface="Meiryo"/>
-                <a:cs typeface="Meiryo"/>
-                <a:sym typeface="Meiryo"/>
-              </a:rPr>
-              <a:t>商材</a:t>
-            </a:r>
-            <a:endParaRPr/>
-          </a:p>
-        </p:txBody>
-      </p:sp>
-      <p:sp>
-        <p:nvSpPr>
-          <p:cNvPr id="43" name="Google Shape;43;p3"/>
-          <p:cNvSpPr/>
-          <p:nvPr/>
-        </p:nvSpPr>
-        <p:spPr>
-          <a:xfrm>
-            <a:off x="1594068" y="730955"/>
-            <a:ext cx="2926883" cy="435690"/>
-          </a:xfrm>
-          <a:prstGeom prst="rect">
-            <a:avLst/>
-          </a:prstGeom>
-          <a:noFill/>
-          <a:ln w="9525" cap="flat" cmpd="sng">
-            <a:solidFill>
-              <a:srgbClr val="4A7DBA"/>
-            </a:solidFill>
-            <a:prstDash val="solid"/>
-            <a:round/>
-            <a:headEnd type="none" w="sm" len="sm"/>
-            <a:tailEnd type="none" w="sm" len="sm"/>
-          </a:ln>
-        </p:spPr>
-        <p:txBody>
-          <a:bodyPr spcFirstLastPara="1" wrap="square" lIns="91425" tIns="45700" rIns="91425" bIns="45700" anchor="ctr" anchorCtr="0">
-            <a:noAutofit/>
-          </a:bodyPr>
-          <a:lstStyle/>
-          <a:p>
-            <a:pPr marL="0" marR="0" lvl="0" indent="0" algn="ctr" rtl="0">
-              <a:spcBef>
-                <a:spcPts val="0"/>
-              </a:spcBef>
-              <a:spcAft>
-                <a:spcPts val="0"/>
-              </a:spcAft>
-              <a:buNone/>
-            </a:pPr>
-            <a:r>
-              <a:rPr lang="ja-JP" sz="1300" b="0" i="0" u="none" strike="noStrike" cap="none">
-                <a:solidFill>
-                  <a:schemeClr val="dk1"/>
-                </a:solidFill>
-                <a:latin typeface="メイリオ"/>
-                <a:ea typeface="Meiryo"/>
-                <a:cs typeface="Meiryo"/>
-                <a:sym typeface="Meiryo"/>
-              </a:rPr>
-              <a:t>飲食店（レストランオプションで</a:t>
-            </a:r>
-            <a:br>
-              <a:rPr lang="ja-JP" sz="1300" b="0" i="0" u="none" strike="noStrike" cap="none">
-                <a:solidFill>
-                  <a:schemeClr val="dk1"/>
-                </a:solidFill>
-                <a:latin typeface="メイリオ"/>
-                <a:ea typeface="Meiryo"/>
-                <a:cs typeface="Meiryo"/>
-                <a:sym typeface="Meiryo"/>
-              </a:rPr>
-            </a:br>
-            <a:r>
-              <a:rPr lang="ja-JP" sz="1300" b="0" i="0" u="none" strike="noStrike" cap="none">
-                <a:solidFill>
-                  <a:schemeClr val="dk1"/>
-                </a:solidFill>
-                <a:latin typeface="メイリオ"/>
-                <a:ea typeface="Meiryo"/>
-                <a:cs typeface="Meiryo"/>
-                <a:sym typeface="Meiryo"/>
-              </a:rPr>
-              <a:t>店内注文を導入予定）</a:t>
-            </a:r>
-            <a:endParaRPr/>
-          </a:p>
-        </p:txBody>
-      </p:sp>
-      <p:sp>
-        <p:nvSpPr>
-          <p:cNvPr id="44" name="Google Shape;44;p3"/>
-          <p:cNvSpPr txBox="1"/>
-          <p:nvPr/>
-        </p:nvSpPr>
-        <p:spPr>
-          <a:xfrm>
-            <a:off x="3296816" y="6597352"/>
-            <a:ext cx="6209091" cy="215444"/>
-          </a:xfrm>
-          <a:prstGeom prst="rect">
-            <a:avLst/>
-          </a:prstGeom>
-          <a:noFill/>
-          <a:ln>
-            <a:noFill/>
-          </a:ln>
-        </p:spPr>
-        <p:txBody>
-          <a:bodyPr spcFirstLastPara="1" wrap="square" lIns="91425" tIns="45700" rIns="91425" bIns="45700" anchor="t" anchorCtr="0">
-            <a:spAutoFit/>
-          </a:bodyPr>
-          <a:lstStyle/>
-          <a:p>
-            <a:pPr marL="0" marR="0" lvl="0" indent="0" algn="l" rtl="0">
-              <a:spcBef>
-                <a:spcPts val="0"/>
-              </a:spcBef>
-              <a:spcAft>
-                <a:spcPts val="0"/>
-              </a:spcAft>
-              <a:buNone/>
-            </a:pPr>
-            <a:r>
-              <a:rPr lang="ja-JP" sz="800" b="0" i="0" u="none" strike="noStrike" cap="none">
-                <a:solidFill>
-                  <a:schemeClr val="lt1"/>
-                </a:solidFill>
-                <a:latin typeface="メイリオ"/>
-                <a:ea typeface="Meiryo"/>
-                <a:cs typeface="Meiryo"/>
-                <a:sym typeface="Meiryo"/>
-              </a:rPr>
-              <a:t>出典：代理店情報</a:t>
-            </a:r>
-            <a:endParaRPr sz="800">
-              <a:solidFill>
-                <a:schemeClr val="lt1"/>
-              </a:solidFill>
-              <a:latin typeface="Meiryo"/>
-              <a:ea typeface="Meiryo"/>
-              <a:cs typeface="Meiryo"/>
-              <a:sym typeface="Meiryo"/>
-            </a:endParaRPr>
-          </a:p>
-        </p:txBody>
-      </p:sp>
-      <p:sp>
-        <p:nvSpPr>
-          <p:cNvPr id="45" name="Google Shape;45;p3"/>
-          <p:cNvSpPr/>
-          <p:nvPr/>
-        </p:nvSpPr>
-        <p:spPr>
-          <a:xfrm>
-            <a:off x="0" y="1234746"/>
-            <a:ext cx="9906000" cy="672259"/>
-          </a:xfrm>
-          <a:prstGeom prst="rect">
-            <a:avLst/>
-          </a:prstGeom>
-          <a:solidFill>
-            <a:srgbClr val="C5D8F1"/>
-          </a:solidFill>
-          <a:ln>
-            <a:noFill/>
-          </a:ln>
-        </p:spPr>
-        <p:txBody>
-          <a:bodyPr spcFirstLastPara="1" wrap="square" lIns="91425" tIns="45700" rIns="91425" bIns="45700" anchor="ctr" anchorCtr="0">
-            <a:noAutofit/>
-          </a:bodyPr>
-          <a:lstStyle/>
-          <a:p>
-            <a:pPr marL="0" marR="0" lvl="0" indent="0" algn="ctr" rtl="0">
-              <a:spcBef>
-                <a:spcPts val="0"/>
-              </a:spcBef>
-              <a:spcAft>
-                <a:spcPts val="0"/>
-              </a:spcAft>
-              <a:buNone/>
-            </a:pPr>
-            <a:r>
-              <a:rPr lang="ja-JP" sz="1600" b="1">
-                <a:solidFill>
-                  <a:srgbClr val="004DE6"/>
-                </a:solidFill>
-                <a:latin typeface="メイリオ"/>
-                <a:ea typeface="Meiryo"/>
-                <a:cs typeface="Meiryo"/>
-                <a:sym typeface="Meiryo"/>
-              </a:rPr>
-              <a:t>　　　　　　</a:t>
-            </a:r>
-            <a:endParaRPr sz="1800" b="1">
-              <a:solidFill>
-                <a:srgbClr val="004DE6"/>
-              </a:solidFill>
-              <a:latin typeface="Meiryo"/>
-              <a:ea typeface="Meiryo"/>
-              <a:cs typeface="Meiryo"/>
-              <a:sym typeface="Meiryo"/>
-            </a:endParaRPr>
-          </a:p>
-        </p:txBody>
-      </p:sp>
-      <p:sp>
-        <p:nvSpPr>
-          <p:cNvPr id="46" name="Google Shape;46;p3"/>
-          <p:cNvSpPr/>
-          <p:nvPr/>
-        </p:nvSpPr>
-        <p:spPr>
-          <a:xfrm>
-            <a:off x="1089832" y="1437370"/>
-            <a:ext cx="7031520" cy="338554"/>
-          </a:xfrm>
-          <a:prstGeom prst="rect">
-            <a:avLst/>
-          </a:prstGeom>
-          <a:noFill/>
-          <a:ln>
-            <a:noFill/>
-          </a:ln>
-        </p:spPr>
-        <p:txBody>
-          <a:bodyPr spcFirstLastPara="1" wrap="square" lIns="91425" tIns="45700" rIns="91425" bIns="45700" anchor="t" anchorCtr="0">
-            <a:spAutoFit/>
-          </a:bodyPr>
-          <a:lstStyle/>
-          <a:p>
-            <a:pPr marL="0" marR="0" lvl="0" indent="0" algn="l" rtl="0">
-              <a:spcBef>
-                <a:spcPts val="0"/>
-              </a:spcBef>
-              <a:spcAft>
-                <a:spcPts val="0"/>
-              </a:spcAft>
-              <a:buNone/>
-            </a:pPr>
-            <a:r>
-              <a:rPr lang="ja-JP" sz="1600" b="1">
-                <a:solidFill>
-                  <a:srgbClr val="004DE6"/>
-                </a:solidFill>
-                <a:latin typeface="メイリオ"/>
-                <a:ea typeface="Meiryo"/>
-                <a:cs typeface="Meiryo"/>
-                <a:sym typeface="Meiryo"/>
-              </a:rPr>
-              <a:t>【レストランオプション】一部機材の価格改定</a:t>
-            </a:r>
-            <a:endParaRPr sz="1600" b="1">
-              <a:solidFill>
-                <a:srgbClr val="004DE6"/>
-              </a:solidFill>
-              <a:latin typeface="Meiryo"/>
-              <a:ea typeface="Meiryo"/>
-              <a:cs typeface="Meiryo"/>
-              <a:sym typeface="Meiryo"/>
-            </a:endParaRPr>
-          </a:p>
-        </p:txBody>
-      </p:sp>
-      <p:sp>
-        <p:nvSpPr>
-          <p:cNvPr id="47" name="Google Shape;47;p3"/>
-          <p:cNvSpPr txBox="1"/>
-          <p:nvPr/>
-        </p:nvSpPr>
-        <p:spPr>
-          <a:xfrm>
-            <a:off x="182880" y="88175"/>
-            <a:ext cx="7512385" cy="365091"/>
-          </a:xfrm>
-          <a:prstGeom prst="rect">
-            <a:avLst/>
-          </a:prstGeom>
-          <a:noFill/>
-          <a:ln>
-            <a:noFill/>
-          </a:ln>
-        </p:spPr>
-        <p:txBody>
-          <a:bodyPr spcFirstLastPara="1" wrap="square" lIns="91425" tIns="72000" rIns="91425" bIns="45700" anchor="t" anchorCtr="0">
-            <a:spAutoFit/>
-          </a:bodyPr>
-          <a:lstStyle/>
-          <a:p>
-            <a:pPr marL="0" marR="0" lvl="0" indent="0" algn="l" rtl="0">
-              <a:spcBef>
-                <a:spcPts val="0"/>
-              </a:spcBef>
-              <a:spcAft>
-                <a:spcPts val="0"/>
-              </a:spcAft>
-              <a:buClr>
-                <a:schemeClr val="dk1"/>
-              </a:buClr>
-              <a:buSzPts val="1600"/>
-              <a:buFont typeface="Arial"/>
-              <a:buNone/>
-            </a:pPr>
-            <a:r>
-              <a:rPr lang="ja-JP" sz="1600" b="0" u="none">
-                <a:solidFill>
-                  <a:schemeClr val="dk1"/>
-                </a:solidFill>
-                <a:latin typeface="メイリオ"/>
-                <a:ea typeface="Meiryo"/>
-                <a:cs typeface="Meiryo"/>
-                <a:sym typeface="Meiryo"/>
-              </a:rPr>
-              <a:t>    今後のアップデート情報</a:t>
-            </a:r>
-            <a:endParaRPr sz="1600" b="0" u="none">
-              <a:solidFill>
-                <a:schemeClr val="dk1"/>
-              </a:solidFill>
-              <a:latin typeface="Meiryo"/>
-              <a:ea typeface="Meiryo"/>
-              <a:cs typeface="Meiryo"/>
-              <a:sym typeface="Meiryo"/>
-            </a:endParaRPr>
-          </a:p>
-        </p:txBody>
-      </p:sp>
-      <p:sp>
-        <p:nvSpPr>
-          <p:cNvPr id="48" name="Google Shape;48;p3"/>
-          <p:cNvSpPr/>
-          <p:nvPr/>
-        </p:nvSpPr>
-        <p:spPr>
-          <a:xfrm>
-            <a:off x="5797260" y="730955"/>
-            <a:ext cx="829618" cy="435690"/>
-          </a:xfrm>
-          <a:prstGeom prst="rect">
-            <a:avLst/>
-          </a:prstGeom>
-          <a:solidFill>
-            <a:schemeClr val="bg1"/>
-          </a:solidFill>
-          <a:ln w="9525" cap="flat" cmpd="sng">
-            <a:solidFill>
-              <a:srgbClr val="4F81BD"/>
-            </a:solidFill>
-            <a:prstDash val="sysDash"/>
-            <a:round/>
-            <a:headEnd type="none" w="sm" len="sm"/>
-            <a:tailEnd type="none" w="sm" len="sm"/>
-          </a:ln>
-        </p:spPr>
-        <p:txBody>
-          <a:bodyPr spcFirstLastPara="1" wrap="square" lIns="91425" tIns="45700" rIns="91425" bIns="45700" anchor="ctr" anchorCtr="0">
-            <a:noAutofit/>
-          </a:bodyPr>
-          <a:lstStyle/>
-          <a:p>
-            <a:pPr marL="0" marR="0" lvl="0" indent="0" algn="ctr" rtl="0">
-              <a:spcBef>
-                <a:spcPts val="0"/>
-              </a:spcBef>
-              <a:spcAft>
-                <a:spcPts val="0"/>
-              </a:spcAft>
-              <a:buClr>
-                <a:schemeClr val="dk1"/>
-              </a:buClr>
-              <a:buSzPts val="1000"/>
-              <a:buFont typeface="Meiryo"/>
-              <a:buNone/>
-            </a:pPr>
-            <a:r>
-              <a:rPr lang="ja-JP" sz="1000">
-                <a:solidFill>
-                  <a:schemeClr val="dk1"/>
-                </a:solidFill>
-                <a:latin typeface="メイリオ"/>
-                <a:ea typeface="Meiryo"/>
-                <a:cs typeface="Meiryo"/>
-                <a:sym typeface="Meiryo"/>
-              </a:rPr>
-              <a:t>開発</a:t>
-            </a:r>
-            <a:endParaRPr sz="1000">
-              <a:solidFill>
-                <a:schemeClr val="dk1"/>
-              </a:solidFill>
-              <a:latin typeface="Meiryo"/>
-              <a:ea typeface="Meiryo"/>
-              <a:cs typeface="Meiryo"/>
-              <a:sym typeface="Meiryo"/>
-            </a:endParaRPr>
-          </a:p>
-          <a:p>
-            <a:pPr marL="0" marR="0" lvl="0" indent="0" algn="ctr" rtl="0">
-              <a:spcBef>
-                <a:spcPts val="0"/>
-              </a:spcBef>
-              <a:spcAft>
-                <a:spcPts val="0"/>
-              </a:spcAft>
-              <a:buClr>
-                <a:schemeClr val="dk1"/>
-              </a:buClr>
-              <a:buSzPts val="1000"/>
-              <a:buFont typeface="Meiryo"/>
-              <a:buNone/>
-            </a:pPr>
-            <a:r>
-              <a:rPr lang="ja-JP" sz="1000">
-                <a:solidFill>
-                  <a:schemeClr val="dk1"/>
-                </a:solidFill>
-                <a:latin typeface="メイリオ"/>
-                <a:ea typeface="Meiryo"/>
-                <a:cs typeface="Meiryo"/>
-                <a:sym typeface="Meiryo"/>
-              </a:rPr>
-              <a:t>LINE API</a:t>
-            </a:r>
-            <a:endParaRPr sz="1000">
-              <a:solidFill>
-                <a:schemeClr val="dk1"/>
-              </a:solidFill>
-              <a:latin typeface="Meiryo"/>
-              <a:ea typeface="Meiryo"/>
-              <a:cs typeface="Meiryo"/>
-              <a:sym typeface="Meiryo"/>
-            </a:endParaRPr>
-          </a:p>
-        </p:txBody>
-      </p:sp>
-      <p:sp>
-        <p:nvSpPr>
-          <p:cNvPr id="49" name="Google Shape;49;p3"/>
-          <p:cNvSpPr/>
-          <p:nvPr/>
-        </p:nvSpPr>
-        <p:spPr>
-          <a:xfrm>
-            <a:off x="4915470" y="730955"/>
-            <a:ext cx="829618" cy="435690"/>
-          </a:xfrm>
-          <a:prstGeom prst="rect">
-            <a:avLst/>
-          </a:prstGeom>
-          <a:solidFill>
-            <a:schemeClr val="bg1"/>
-          </a:solidFill>
-          <a:ln w="9525" cap="flat" cmpd="sng">
-            <a:solidFill>
-              <a:srgbClr val="4F81BD"/>
-            </a:solidFill>
-            <a:prstDash val="sysDash"/>
-            <a:round/>
-            <a:headEnd type="none" w="sm" len="sm"/>
-            <a:tailEnd type="none" w="sm" len="sm"/>
-          </a:ln>
-        </p:spPr>
-        <p:txBody>
-          <a:bodyPr spcFirstLastPara="1" wrap="square" lIns="91425" tIns="45700" rIns="91425" bIns="45700" anchor="ctr" anchorCtr="0">
-            <a:noAutofit/>
-          </a:bodyPr>
-          <a:lstStyle/>
-          <a:p>
-            <a:pPr marL="0" marR="0" lvl="0" indent="0" algn="ctr" rtl="0">
-              <a:spcBef>
-                <a:spcPts val="0"/>
-              </a:spcBef>
-              <a:spcAft>
-                <a:spcPts val="0"/>
-              </a:spcAft>
-              <a:buNone/>
-            </a:pPr>
-            <a:r>
-              <a:rPr lang="ja-JP" sz="1000">
-                <a:solidFill>
-                  <a:schemeClr val="dk1"/>
-                </a:solidFill>
-                <a:latin typeface="メイリオ"/>
-                <a:ea typeface="Meiryo"/>
-                <a:cs typeface="Meiryo"/>
-                <a:sym typeface="Meiryo"/>
-              </a:rPr>
-              <a:t>LINE公式アカウント</a:t>
-            </a:r>
-            <a:endParaRPr sz="1000">
-              <a:solidFill>
-                <a:schemeClr val="dk1"/>
-              </a:solidFill>
-              <a:latin typeface="Meiryo"/>
-              <a:ea typeface="Meiryo"/>
-              <a:cs typeface="Meiryo"/>
-              <a:sym typeface="Meiryo"/>
-            </a:endParaRPr>
-          </a:p>
-        </p:txBody>
-      </p:sp>
-      <p:sp>
-        <p:nvSpPr>
-          <p:cNvPr id="50" name="Google Shape;50;p3"/>
-          <p:cNvSpPr/>
-          <p:nvPr/>
-        </p:nvSpPr>
-        <p:spPr>
-          <a:xfrm>
-            <a:off x="0" y="1890267"/>
-            <a:ext cx="9906000" cy="733579"/>
-          </a:xfrm>
-          <a:prstGeom prst="rect">
-            <a:avLst/>
-          </a:prstGeom>
-          <a:solidFill>
-            <a:srgbClr val="F2F2F2"/>
-          </a:solidFill>
-          <a:ln>
-            <a:noFill/>
-          </a:ln>
-        </p:spPr>
-        <p:txBody>
-          <a:bodyPr spcFirstLastPara="1" wrap="square" lIns="91425" tIns="45700" rIns="91425" bIns="45700" anchor="ctr" anchorCtr="0">
-            <a:noAutofit/>
-          </a:bodyPr>
-          <a:lstStyle/>
-          <a:p>
-            <a:pPr marL="0" marR="0" lvl="0" indent="0" algn="ctr" rtl="0">
-              <a:spcBef>
-                <a:spcPts val="0"/>
-              </a:spcBef>
-              <a:spcAft>
-                <a:spcPts val="0"/>
-              </a:spcAft>
-              <a:buNone/>
-            </a:pPr>
-            <a:endParaRPr sz="1200">
-              <a:solidFill>
-                <a:schemeClr val="dk1"/>
-              </a:solidFill>
-              <a:latin typeface="Meiryo"/>
-              <a:ea typeface="Meiryo"/>
-              <a:cs typeface="Meiryo"/>
-              <a:sym typeface="Meiryo"/>
-            </a:endParaRPr>
-          </a:p>
-        </p:txBody>
-      </p:sp>
-      <p:sp>
-        <p:nvSpPr>
-          <p:cNvPr id="51" name="Google Shape;51;p3"/>
-          <p:cNvSpPr/>
-          <p:nvPr/>
-        </p:nvSpPr>
-        <p:spPr>
-          <a:xfrm>
-            <a:off x="544108" y="1961282"/>
-            <a:ext cx="8817783" cy="646331"/>
-          </a:xfrm>
-          <a:prstGeom prst="rect">
-            <a:avLst/>
-          </a:prstGeom>
-          <a:noFill/>
-          <a:ln>
-            <a:noFill/>
-          </a:ln>
-        </p:spPr>
-        <p:txBody>
-          <a:bodyPr spcFirstLastPara="1" wrap="square" lIns="91425" tIns="45700" rIns="91425" bIns="45700" anchor="t" anchorCtr="0">
-            <a:spAutoFit/>
-          </a:bodyPr>
-          <a:lstStyle/>
-          <a:p>
-            <a:pPr marL="0" marR="0" lvl="0" indent="0" algn="ctr" rtl="0">
-              <a:spcBef>
-                <a:spcPts val="0"/>
-              </a:spcBef>
-              <a:spcAft>
-                <a:spcPts val="0"/>
-              </a:spcAft>
-              <a:buNone/>
-            </a:pPr>
-            <a:r>
-              <a:rPr lang="ja-JP" sz="1200" b="1">
-                <a:solidFill>
-                  <a:schemeClr val="dk1"/>
-                </a:solidFill>
-                <a:latin typeface="メイリオ"/>
-                <a:ea typeface="Meiryo"/>
-                <a:cs typeface="Meiryo"/>
-                <a:sym typeface="Meiryo"/>
-              </a:rPr>
-              <a:t>仕入れ先であるエプソン販売株式会社の価格改定に伴い、</a:t>
-            </a:r>
-            <a:endParaRPr sz="1200" b="1">
-              <a:solidFill>
-                <a:schemeClr val="dk1"/>
-              </a:solidFill>
-              <a:latin typeface="Meiryo"/>
-              <a:ea typeface="Meiryo"/>
-              <a:cs typeface="Meiryo"/>
-              <a:sym typeface="Meiryo"/>
-            </a:endParaRPr>
-          </a:p>
-          <a:p>
-            <a:pPr marL="0" marR="0" lvl="0" indent="0" algn="ctr" rtl="0">
-              <a:spcBef>
-                <a:spcPts val="0"/>
-              </a:spcBef>
-              <a:spcAft>
-                <a:spcPts val="0"/>
-              </a:spcAft>
-              <a:buNone/>
-            </a:pPr>
-            <a:r>
-              <a:rPr lang="ja-JP" sz="1200" b="1">
-                <a:solidFill>
-                  <a:schemeClr val="dk1"/>
-                </a:solidFill>
-                <a:latin typeface="メイリオ"/>
-                <a:ea typeface="Meiryo"/>
-                <a:cs typeface="Meiryo"/>
-                <a:sym typeface="Meiryo"/>
-              </a:rPr>
-              <a:t>レストランオプションで提供している一部機材の販売価格が改定（値上げ）される。</a:t>
-            </a:r>
-            <a:endParaRPr/>
-          </a:p>
-          <a:p>
-            <a:pPr marL="0" marR="0" lvl="0" indent="0" algn="ctr" rtl="0">
-              <a:spcBef>
-                <a:spcPts val="0"/>
-              </a:spcBef>
-              <a:spcAft>
-                <a:spcPts val="0"/>
-              </a:spcAft>
-              <a:buNone/>
-            </a:pPr>
-            <a:r>
-              <a:rPr lang="ja-JP" sz="1200" b="1">
-                <a:solidFill>
-                  <a:schemeClr val="dk1"/>
-                </a:solidFill>
-                <a:latin typeface="メイリオ"/>
-                <a:ea typeface="Meiryo"/>
-                <a:cs typeface="Meiryo"/>
-                <a:sym typeface="Meiryo"/>
-              </a:rPr>
-              <a:t>2027年2月上旬以降のお申し込み分から新価格を適用。</a:t>
-            </a:r>
-            <a:endParaRPr sz="1400" b="1">
-              <a:solidFill>
-                <a:schemeClr val="dk1"/>
-              </a:solidFill>
-              <a:latin typeface="Meiryo"/>
-              <a:ea typeface="Meiryo"/>
-              <a:cs typeface="Meiryo"/>
-              <a:sym typeface="Meiryo"/>
-            </a:endParaRPr>
-          </a:p>
-        </p:txBody>
-      </p:sp>
-      <p:sp>
-        <p:nvSpPr>
-          <p:cNvPr id="52" name="Google Shape;52;p3"/>
-          <p:cNvSpPr/>
-          <p:nvPr/>
-        </p:nvSpPr>
-        <p:spPr>
-          <a:xfrm>
-            <a:off x="351381" y="2714173"/>
-            <a:ext cx="5200000" cy="338554"/>
-          </a:xfrm>
-          <a:prstGeom prst="rect">
-            <a:avLst/>
-          </a:prstGeom>
-          <a:noFill/>
-          <a:ln>
-            <a:noFill/>
-          </a:ln>
-        </p:spPr>
-        <p:txBody>
-          <a:bodyPr spcFirstLastPara="1" wrap="square" lIns="91425" tIns="45700" rIns="91425" bIns="45700" anchor="t" anchorCtr="0">
-            <a:noAutofit/>
-          </a:bodyPr>
-          <a:lstStyle/>
-          <a:p>
-            <a:pPr marL="0" marR="0" lvl="0" indent="0" algn="l" rtl="0">
-              <a:spcBef>
-                <a:spcPts val="0"/>
-              </a:spcBef>
-              <a:spcAft>
-                <a:spcPts val="0"/>
-              </a:spcAft>
-              <a:buNone/>
-            </a:pPr>
-            <a:r>
-              <a:rPr lang="ja-JP" sz="1400" b="1">
-                <a:solidFill>
-                  <a:srgbClr val="15133D"/>
-                </a:solidFill>
-                <a:latin typeface="メイリオ"/>
-                <a:ea typeface="Meiryo"/>
-                <a:cs typeface="Meiryo"/>
-                <a:sym typeface="Meiryo"/>
-              </a:rPr>
-              <a:t>■ 詳細</a:t>
-            </a:r>
-            <a:endParaRPr/>
-          </a:p>
-        </p:txBody>
-      </p:sp>
-      <p:grpSp>
-        <p:nvGrpSpPr>
-          <p:cNvPr id="53" name="Google Shape;53;p3"/>
-          <p:cNvGrpSpPr/>
-          <p:nvPr/>
-        </p:nvGrpSpPr>
-        <p:grpSpPr>
-          <a:xfrm>
-            <a:off x="8473303" y="730955"/>
-            <a:ext cx="1376241" cy="1131930"/>
-            <a:chOff x="0" y="0"/>
-            <a:chExt cx="1376241" cy="1131930"/>
-          </a:xfrm>
-        </p:grpSpPr>
-        <p:sp>
-          <p:nvSpPr>
-            <p:cNvPr id="54" name="Google Shape;54;p3"/>
-            <p:cNvSpPr/>
-            <p:nvPr/>
-          </p:nvSpPr>
-          <p:spPr>
-            <a:xfrm rot="10800000">
-              <a:off x="0" y="0"/>
-              <a:ext cx="1376241" cy="282982"/>
-            </a:xfrm>
-            <a:prstGeom prst="trapezoid">
-              <a:avLst>
-                <a:gd name="adj" fmla="val 60792"/>
-              </a:avLst>
-            </a:prstGeom>
-            <a:solidFill>
-              <a:srgbClr val="EAEDF5"/>
-            </a:solidFill>
-            <a:ln w="25400" cap="flat" cmpd="sng">
-              <a:solidFill>
-                <a:schemeClr val="dk2"/>
-              </a:solidFill>
-              <a:prstDash val="solid"/>
-              <a:round/>
-              <a:headEnd type="none" w="sm" len="sm"/>
-              <a:tailEnd type="none" w="sm" len="sm"/>
-            </a:ln>
-          </p:spPr>
-          <p:txBody>
-            <a:bodyPr spcFirstLastPara="1" wrap="square" lIns="91425" tIns="91425" rIns="91425" bIns="91425" anchor="ctr" anchorCtr="0">
-              <a:noAutofit/>
-            </a:bodyPr>
-            <a:lstStyle/>
-            <a:p>
-              <a:pPr marL="0" lvl="0" indent="0" algn="l" rtl="0">
-                <a:spcBef>
-                  <a:spcPts val="0"/>
-                </a:spcBef>
-                <a:spcAft>
-                  <a:spcPts val="0"/>
-                </a:spcAft>
-                <a:buNone/>
-              </a:pPr>
-              <a:endParaRPr/>
-            </a:p>
-          </p:txBody>
-        </p:sp>
-        <p:sp>
-          <p:nvSpPr>
-            <p:cNvPr id="55" name="Google Shape;55;p3"/>
-            <p:cNvSpPr txBox="1"/>
-            <p:nvPr/>
-          </p:nvSpPr>
-          <p:spPr>
-            <a:xfrm>
-              <a:off x="240842" y="0"/>
-              <a:ext cx="894556" cy="282982"/>
-            </a:xfrm>
-            <a:prstGeom prst="rect">
-              <a:avLst/>
-            </a:prstGeom>
-            <a:noFill/>
-            <a:ln>
-              <a:noFill/>
-            </a:ln>
-          </p:spPr>
-          <p:txBody>
-            <a:bodyPr spcFirstLastPara="1" wrap="square" lIns="10150" tIns="10150" rIns="10150" bIns="10150" anchor="ctr" anchorCtr="0">
-              <a:noAutofit/>
-            </a:bodyPr>
-            <a:lstStyle/>
-            <a:p>
-              <a:pPr marL="0" marR="0" lvl="0" indent="0" algn="ctr" rtl="0">
-                <a:lnSpc>
-                  <a:spcPct val="90000"/>
-                </a:lnSpc>
-                <a:spcBef>
-                  <a:spcPts val="0"/>
-                </a:spcBef>
-                <a:spcAft>
-                  <a:spcPts val="0"/>
-                </a:spcAft>
-                <a:buClr>
-                  <a:srgbClr val="262626"/>
-                </a:buClr>
-                <a:buSzPts val="800"/>
-                <a:buFont typeface="Arial"/>
-                <a:buNone/>
-              </a:pPr>
-              <a:r>
-                <a:rPr lang="ja-JP" sz="800" b="1">
-                  <a:solidFill>
-                    <a:srgbClr val="262626"/>
-                  </a:solidFill>
-                  <a:latin typeface="Arial"/>
-                  <a:ea typeface="Arial"/>
-                  <a:cs typeface="Arial"/>
-                  <a:sym typeface="Arial"/>
-                </a:rPr>
-                <a:t>認知</a:t>
-              </a:r>
-              <a:endParaRPr/>
-            </a:p>
-          </p:txBody>
-        </p:sp>
-        <p:sp>
-          <p:nvSpPr>
-            <p:cNvPr id="56" name="Google Shape;56;p3"/>
-            <p:cNvSpPr/>
-            <p:nvPr/>
-          </p:nvSpPr>
-          <p:spPr>
-            <a:xfrm rot="10800000">
-              <a:off x="172030" y="282982"/>
-              <a:ext cx="1032180" cy="282982"/>
-            </a:xfrm>
-            <a:prstGeom prst="trapezoid">
-              <a:avLst>
-                <a:gd name="adj" fmla="val 60792"/>
-              </a:avLst>
-            </a:prstGeom>
-            <a:solidFill>
-              <a:schemeClr val="lt1"/>
-            </a:solidFill>
-            <a:ln w="25400" cap="flat" cmpd="sng">
-              <a:solidFill>
-                <a:schemeClr val="dk2"/>
-              </a:solidFill>
-              <a:prstDash val="solid"/>
-              <a:round/>
-              <a:headEnd type="none" w="sm" len="sm"/>
-              <a:tailEnd type="none" w="sm" len="sm"/>
-            </a:ln>
-          </p:spPr>
-          <p:txBody>
-            <a:bodyPr spcFirstLastPara="1" wrap="square" lIns="91425" tIns="91425" rIns="91425" bIns="91425" anchor="ctr" anchorCtr="0">
-              <a:noAutofit/>
-            </a:bodyPr>
-            <a:lstStyle/>
-            <a:p>
-              <a:pPr marL="0" lvl="0" indent="0" algn="l" rtl="0">
-                <a:spcBef>
-                  <a:spcPts val="0"/>
-                </a:spcBef>
-                <a:spcAft>
-                  <a:spcPts val="0"/>
-                </a:spcAft>
-                <a:buNone/>
-              </a:pPr>
-              <a:endParaRPr/>
-            </a:p>
-          </p:txBody>
-        </p:sp>
-        <p:sp>
-          <p:nvSpPr>
-            <p:cNvPr id="57" name="Google Shape;57;p3"/>
-            <p:cNvSpPr txBox="1"/>
-            <p:nvPr/>
-          </p:nvSpPr>
-          <p:spPr>
-            <a:xfrm>
-              <a:off x="352661" y="282982"/>
-              <a:ext cx="670917" cy="282982"/>
-            </a:xfrm>
-            <a:prstGeom prst="rect">
-              <a:avLst/>
-            </a:prstGeom>
-            <a:noFill/>
-            <a:ln>
-              <a:noFill/>
-            </a:ln>
-          </p:spPr>
-          <p:txBody>
-            <a:bodyPr spcFirstLastPara="1" wrap="square" lIns="10150" tIns="10150" rIns="10150" bIns="10150" anchor="ctr" anchorCtr="0">
-              <a:noAutofit/>
-            </a:bodyPr>
-            <a:lstStyle/>
-            <a:p>
-              <a:pPr marL="0" marR="0" lvl="0" indent="0" algn="ctr" rtl="0">
-                <a:lnSpc>
-                  <a:spcPct val="90000"/>
-                </a:lnSpc>
-                <a:spcBef>
-                  <a:spcPts val="0"/>
-                </a:spcBef>
-                <a:spcAft>
-                  <a:spcPts val="0"/>
-                </a:spcAft>
-                <a:buClr>
-                  <a:srgbClr val="262626"/>
-                </a:buClr>
-                <a:buSzPts val="800"/>
-                <a:buFont typeface="Arial"/>
-                <a:buNone/>
-              </a:pPr>
-              <a:r>
-                <a:rPr lang="ja-JP" sz="800" b="1">
-                  <a:solidFill>
-                    <a:srgbClr val="262626"/>
-                  </a:solidFill>
-                  <a:latin typeface="Arial"/>
-                  <a:ea typeface="Arial"/>
-                  <a:cs typeface="Arial"/>
-                  <a:sym typeface="Arial"/>
-                </a:rPr>
-                <a:t>検討</a:t>
-              </a:r>
-              <a:endParaRPr/>
-            </a:p>
-          </p:txBody>
-        </p:sp>
-        <p:sp>
-          <p:nvSpPr>
-            <p:cNvPr id="58" name="Google Shape;58;p3"/>
-            <p:cNvSpPr/>
-            <p:nvPr/>
-          </p:nvSpPr>
-          <p:spPr>
-            <a:xfrm rot="10800000">
-              <a:off x="344060" y="565965"/>
-              <a:ext cx="688120" cy="282982"/>
-            </a:xfrm>
-            <a:prstGeom prst="trapezoid">
-              <a:avLst>
-                <a:gd name="adj" fmla="val 60792"/>
-              </a:avLst>
-            </a:prstGeom>
-            <a:solidFill>
-              <a:schemeClr val="lt1"/>
-            </a:solidFill>
-            <a:ln w="25400" cap="flat" cmpd="sng">
-              <a:solidFill>
-                <a:schemeClr val="dk2"/>
-              </a:solidFill>
-              <a:prstDash val="solid"/>
-              <a:round/>
-              <a:headEnd type="none" w="sm" len="sm"/>
-              <a:tailEnd type="none" w="sm" len="sm"/>
-            </a:ln>
-          </p:spPr>
-          <p:txBody>
-            <a:bodyPr spcFirstLastPara="1" wrap="square" lIns="91425" tIns="91425" rIns="91425" bIns="91425" anchor="ctr" anchorCtr="0">
-              <a:noAutofit/>
-            </a:bodyPr>
-            <a:lstStyle/>
-            <a:p>
-              <a:pPr marL="0" lvl="0" indent="0" algn="l" rtl="0">
-                <a:spcBef>
-                  <a:spcPts val="0"/>
-                </a:spcBef>
-                <a:spcAft>
-                  <a:spcPts val="0"/>
-                </a:spcAft>
-                <a:buNone/>
-              </a:pPr>
-              <a:endParaRPr/>
-            </a:p>
-          </p:txBody>
-        </p:sp>
-        <p:sp>
-          <p:nvSpPr>
-            <p:cNvPr id="59" name="Google Shape;59;p3"/>
-            <p:cNvSpPr txBox="1"/>
-            <p:nvPr/>
-          </p:nvSpPr>
-          <p:spPr>
-            <a:xfrm>
-              <a:off x="464481" y="565965"/>
-              <a:ext cx="447278" cy="282982"/>
-            </a:xfrm>
-            <a:prstGeom prst="rect">
-              <a:avLst/>
-            </a:prstGeom>
-            <a:noFill/>
-            <a:ln>
-              <a:noFill/>
-            </a:ln>
-          </p:spPr>
-          <p:txBody>
-            <a:bodyPr spcFirstLastPara="1" wrap="square" lIns="10150" tIns="10150" rIns="10150" bIns="10150" anchor="ctr" anchorCtr="0">
-              <a:noAutofit/>
-            </a:bodyPr>
-            <a:lstStyle/>
-            <a:p>
-              <a:pPr marL="0" marR="0" lvl="0" indent="0" algn="ctr" rtl="0">
-                <a:lnSpc>
-                  <a:spcPct val="90000"/>
-                </a:lnSpc>
-                <a:spcBef>
-                  <a:spcPts val="0"/>
-                </a:spcBef>
-                <a:spcAft>
-                  <a:spcPts val="0"/>
-                </a:spcAft>
-                <a:buClr>
-                  <a:srgbClr val="262626"/>
-                </a:buClr>
-                <a:buSzPts val="800"/>
-                <a:buFont typeface="Arial"/>
-                <a:buNone/>
-              </a:pPr>
-              <a:r>
-                <a:rPr lang="ja-JP" sz="800" b="1">
-                  <a:solidFill>
-                    <a:srgbClr val="262626"/>
-                  </a:solidFill>
-                  <a:latin typeface="Arial"/>
-                  <a:ea typeface="Arial"/>
-                  <a:cs typeface="Arial"/>
-                  <a:sym typeface="Arial"/>
-                </a:rPr>
-                <a:t>獲得</a:t>
-              </a:r>
-              <a:endParaRPr/>
-            </a:p>
-          </p:txBody>
-        </p:sp>
-        <p:sp>
-          <p:nvSpPr>
-            <p:cNvPr id="60" name="Google Shape;60;p3"/>
-            <p:cNvSpPr/>
-            <p:nvPr/>
-          </p:nvSpPr>
-          <p:spPr>
-            <a:xfrm rot="10800000">
-              <a:off x="516090" y="848948"/>
-              <a:ext cx="344060" cy="282982"/>
-            </a:xfrm>
-            <a:prstGeom prst="trapezoid">
-              <a:avLst>
-                <a:gd name="adj" fmla="val 60792"/>
-              </a:avLst>
-            </a:prstGeom>
-            <a:noFill/>
-            <a:ln w="25400" cap="flat" cmpd="sng">
-              <a:solidFill>
-                <a:schemeClr val="dk2"/>
-              </a:solidFill>
-              <a:prstDash val="solid"/>
-              <a:round/>
-              <a:headEnd type="none" w="sm" len="sm"/>
-              <a:tailEnd type="none" w="sm" len="sm"/>
-            </a:ln>
-          </p:spPr>
-          <p:txBody>
-            <a:bodyPr spcFirstLastPara="1" wrap="square" lIns="91425" tIns="91425" rIns="91425" bIns="91425" anchor="ctr" anchorCtr="0">
-              <a:noAutofit/>
-            </a:bodyPr>
-            <a:lstStyle/>
-            <a:p>
-              <a:pPr marL="0" lvl="0" indent="0" algn="l" rtl="0">
-                <a:spcBef>
-                  <a:spcPts val="0"/>
-                </a:spcBef>
-                <a:spcAft>
-                  <a:spcPts val="0"/>
-                </a:spcAft>
-                <a:buNone/>
-              </a:pPr>
-              <a:endParaRPr/>
-            </a:p>
-          </p:txBody>
-        </p:sp>
-        <p:sp>
-          <p:nvSpPr>
-            <p:cNvPr id="61" name="Google Shape;61;p3"/>
-            <p:cNvSpPr txBox="1"/>
-            <p:nvPr/>
-          </p:nvSpPr>
-          <p:spPr>
-            <a:xfrm>
-              <a:off x="516090" y="848948"/>
-              <a:ext cx="344060" cy="282982"/>
-            </a:xfrm>
-            <a:prstGeom prst="rect">
-              <a:avLst/>
-            </a:prstGeom>
-            <a:noFill/>
-            <a:ln>
-              <a:noFill/>
-            </a:ln>
-          </p:spPr>
-          <p:txBody>
-            <a:bodyPr spcFirstLastPara="1" wrap="square" lIns="10150" tIns="10150" rIns="10150" bIns="10150" anchor="ctr" anchorCtr="0">
-              <a:noAutofit/>
-            </a:bodyPr>
-            <a:lstStyle/>
-            <a:p>
-              <a:pPr marL="0" marR="0" lvl="0" indent="0" algn="ctr" rtl="0">
-                <a:lnSpc>
-                  <a:spcPct val="90000"/>
-                </a:lnSpc>
-                <a:spcBef>
-                  <a:spcPts val="0"/>
-                </a:spcBef>
-                <a:spcAft>
-                  <a:spcPts val="0"/>
-                </a:spcAft>
-                <a:buClr>
-                  <a:srgbClr val="262626"/>
-                </a:buClr>
-                <a:buSzPts val="800"/>
-                <a:buFont typeface="Arial"/>
-                <a:buNone/>
-              </a:pPr>
-              <a:r>
-                <a:rPr lang="ja-JP" sz="800" b="1">
-                  <a:solidFill>
-                    <a:srgbClr val="262626"/>
-                  </a:solidFill>
-                  <a:latin typeface="Arial"/>
-                  <a:ea typeface="Arial"/>
-                  <a:cs typeface="Arial"/>
-                  <a:sym typeface="Arial"/>
-                </a:rPr>
-                <a:t>伸長</a:t>
-              </a:r>
-              <a:endParaRPr/>
-            </a:p>
-          </p:txBody>
-        </p:sp>
-      </p:grpSp>
-      <p:pic>
-        <p:nvPicPr>
-          <p:cNvPr id="62" name="Google Shape;62;p3" descr="LINE公式アカウントのロゴの使用方法とは？種類やダウンロード方法、利用時の注意点を紹介 | Mico（ミコ）"/>
-          <p:cNvPicPr preferRelativeResize="0"/>
-          <p:nvPr/>
-        </p:nvPicPr>
-        <p:blipFill rotWithShape="1">
-          <a:blip r:embed="rId2">
-            <a:alphaModFix/>
-          </a:blip>
-          <a:srcRect/>
-          <a:stretch/>
-        </p:blipFill>
-        <p:spPr>
-          <a:xfrm>
-            <a:off x="351381" y="1234746"/>
-            <a:ext cx="656177" cy="655521"/>
-          </a:xfrm>
-          <a:prstGeom prst="rect">
-            <a:avLst/>
-          </a:prstGeom>
-          <a:noFill/>
-          <a:ln>
-            <a:noFill/>
-          </a:ln>
-        </p:spPr>
-      </p:pic>
-      <p:sp>
-        <p:nvSpPr>
-          <p:cNvPr id="63" name="Rounded Rectangle 62"/>
-          <p:cNvSpPr/>
-          <p:nvPr/>
-        </p:nvSpPr>
-        <p:spPr>
-          <a:xfrm>
-            <a:off x="544108" y="3068960"/>
-            <a:ext cx="4322443" cy="1120584"/>
-          </a:xfrm>
-          <a:prstGeom prst="roundRect">
-            <a:avLst>
-              <a:gd name="adj" fmla="val 6000"/>
-            </a:avLst>
-          </a:prstGeom>
-          <a:solidFill>
-            <a:srgbClr val="EAF0FA"/>
-          </a:solidFill>
-          <a:ln w="12700">
-            <a:solidFill>
-              <a:srgbClr val="3467B2"/>
-            </a:solidFill>
-          </a:ln>
-          <a:effectLst/>
-        </p:spPr>
-        <p:style>
-          <a:lnRef idx="1">
-            <a:schemeClr val="accent1"/>
-          </a:lnRef>
-          <a:fillRef idx="3">
-            <a:schemeClr val="accent1"/>
-          </a:fillRef>
-          <a:effectRef idx="2">
-            <a:schemeClr val="accent1"/>
-          </a:effectRef>
-          <a:fontRef idx="minor">
-            <a:schemeClr val="lt1"/>
-          </a:fontRef>
-        </p:style>
-        <p:txBody>
-          <a:bodyPr wrap="square" lIns="228600" rIns="182880" rtlCol="0" anchor="ctr"/>
-          <a:lstStyle/>
-          <a:p>
-            <a:pPr algn="l"/>
-            <a:r>
-              <a:rPr sz="1900" b="1">
-                <a:solidFill>
-                  <a:srgbClr val="15133D"/>
-                </a:solidFill>
-                <a:latin typeface="メイリオ"/>
-              </a:rPr>
-              <a:t>改定時期</a:t>
-            </a:r>
-          </a:p>
-          <a:p>
-            <a:pPr algn="l">
-              <a:lnSpc>
-                <a:spcPct val="115000"/>
-              </a:lnSpc>
-              <a:spcBef>
-                <a:spcPts val="600"/>
-              </a:spcBef>
-            </a:pPr>
-            <a:r>
-              <a:rPr sz="1300">
-                <a:solidFill>
-                  <a:srgbClr val="333333"/>
-                </a:solidFill>
-                <a:latin typeface="メイリオ"/>
-              </a:rPr>
-              <a:t>2027年2月上旬予定。改定日以降に購入した機材から新価格が適用される。</a:t>
-            </a:r>
-          </a:p>
-        </p:txBody>
-      </p:sp>
-      <p:sp>
-        <p:nvSpPr>
-          <p:cNvPr id="64" name="Rounded Rectangle 63"/>
-          <p:cNvSpPr/>
-          <p:nvPr/>
-        </p:nvSpPr>
-        <p:spPr>
-          <a:xfrm>
-            <a:off x="5039448" y="3068960"/>
-            <a:ext cx="4322443" cy="1120584"/>
-          </a:xfrm>
-          <a:prstGeom prst="roundRect">
-            <a:avLst>
-              <a:gd name="adj" fmla="val 6000"/>
-            </a:avLst>
-          </a:prstGeom>
-          <a:solidFill>
-            <a:srgbClr val="EAF0FA"/>
-          </a:solidFill>
-          <a:ln w="12700">
-            <a:solidFill>
-              <a:srgbClr val="3467B2"/>
-            </a:solidFill>
-          </a:ln>
-          <a:effectLst/>
-        </p:spPr>
-        <p:style>
-          <a:lnRef idx="1">
-            <a:schemeClr val="accent1"/>
-          </a:lnRef>
-          <a:fillRef idx="3">
-            <a:schemeClr val="accent1"/>
-          </a:fillRef>
-          <a:effectRef idx="2">
-            <a:schemeClr val="accent1"/>
-          </a:effectRef>
-          <a:fontRef idx="minor">
-            <a:schemeClr val="lt1"/>
-          </a:fontRef>
-        </p:style>
-        <p:txBody>
-          <a:bodyPr wrap="square" lIns="228600" rIns="182880" rtlCol="0" anchor="ctr"/>
-          <a:lstStyle/>
-          <a:p>
-            <a:pPr algn="l"/>
-            <a:r>
-              <a:rPr sz="1900" b="1">
-                <a:solidFill>
-                  <a:srgbClr val="15133D"/>
-                </a:solidFill>
-                <a:latin typeface="メイリオ"/>
-              </a:rPr>
-              <a:t>対象機材</a:t>
-            </a:r>
-          </a:p>
-          <a:p>
-            <a:pPr algn="l">
-              <a:lnSpc>
-                <a:spcPct val="115000"/>
-              </a:lnSpc>
-              <a:spcBef>
-                <a:spcPts val="600"/>
-              </a:spcBef>
-            </a:pPr>
-            <a:r>
-              <a:rPr sz="1300">
-                <a:solidFill>
-                  <a:srgbClr val="333333"/>
-                </a:solidFill>
-                <a:latin typeface="メイリオ"/>
-              </a:rPr>
-              <a:t>EPSON製のプリンター・キャッシュドロアー。</a:t>
-            </a:r>
-          </a:p>
-        </p:txBody>
-      </p:sp>
-      <p:sp>
-        <p:nvSpPr>
-          <p:cNvPr id="65" name="Rounded Rectangle 64"/>
-          <p:cNvSpPr/>
-          <p:nvPr/>
-        </p:nvSpPr>
-        <p:spPr>
-          <a:xfrm>
-            <a:off x="544108" y="4372424"/>
-            <a:ext cx="4322443" cy="1120584"/>
-          </a:xfrm>
-          <a:prstGeom prst="roundRect">
-            <a:avLst>
-              <a:gd name="adj" fmla="val 6000"/>
-            </a:avLst>
-          </a:prstGeom>
-          <a:solidFill>
-            <a:srgbClr val="EAF0FA"/>
-          </a:solidFill>
-          <a:ln w="12700">
-            <a:solidFill>
-              <a:srgbClr val="3467B2"/>
-            </a:solidFill>
-          </a:ln>
-          <a:effectLst/>
-        </p:spPr>
-        <p:style>
-          <a:lnRef idx="1">
-            <a:schemeClr val="accent1"/>
-          </a:lnRef>
-          <a:fillRef idx="3">
-            <a:schemeClr val="accent1"/>
-          </a:fillRef>
-          <a:effectRef idx="2">
-            <a:schemeClr val="accent1"/>
-          </a:effectRef>
-          <a:fontRef idx="minor">
-            <a:schemeClr val="lt1"/>
-          </a:fontRef>
-        </p:style>
-        <p:txBody>
-          <a:bodyPr wrap="square" lIns="228600" rIns="182880" rtlCol="0" anchor="ctr"/>
-          <a:lstStyle/>
-          <a:p>
-            <a:pPr algn="l"/>
-            <a:r>
-              <a:rPr sz="1900" b="1">
-                <a:solidFill>
-                  <a:srgbClr val="15133D"/>
-                </a:solidFill>
-                <a:latin typeface="メイリオ"/>
-              </a:rPr>
-              <a:t>価格</a:t>
-            </a:r>
-          </a:p>
-          <a:p>
-            <a:pPr algn="l">
-              <a:lnSpc>
-                <a:spcPct val="115000"/>
-              </a:lnSpc>
-              <a:spcBef>
-                <a:spcPts val="600"/>
-              </a:spcBef>
-            </a:pPr>
-            <a:r>
-              <a:rPr sz="1300">
-                <a:solidFill>
-                  <a:srgbClr val="333333"/>
-                </a:solidFill>
-                <a:latin typeface="メイリオ"/>
-              </a:rPr>
-              <a:t>プリンター：37,000円→41,700円／キャッシュドロアー：16,000円→17,700円。</a:t>
-            </a:r>
-          </a:p>
-        </p:txBody>
-      </p:sp>
-      <p:sp>
-        <p:nvSpPr>
-          <p:cNvPr id="66" name="Rounded Rectangle 65"/>
-          <p:cNvSpPr/>
-          <p:nvPr/>
-        </p:nvSpPr>
-        <p:spPr>
-          <a:xfrm>
-            <a:off x="5039448" y="4372424"/>
-            <a:ext cx="4322443" cy="1120584"/>
-          </a:xfrm>
-          <a:prstGeom prst="roundRect">
-            <a:avLst>
-              <a:gd name="adj" fmla="val 6000"/>
-            </a:avLst>
-          </a:prstGeom>
-          <a:solidFill>
-            <a:srgbClr val="EAF0FA"/>
-          </a:solidFill>
-          <a:ln w="12700">
-            <a:solidFill>
-              <a:srgbClr val="3467B2"/>
-            </a:solidFill>
-          </a:ln>
-          <a:effectLst/>
-        </p:spPr>
-        <p:style>
-          <a:lnRef idx="1">
-            <a:schemeClr val="accent1"/>
-          </a:lnRef>
-          <a:fillRef idx="3">
-            <a:schemeClr val="accent1"/>
-          </a:fillRef>
-          <a:effectRef idx="2">
-            <a:schemeClr val="accent1"/>
-          </a:effectRef>
-          <a:fontRef idx="minor">
-            <a:schemeClr val="lt1"/>
-          </a:fontRef>
-        </p:style>
-        <p:txBody>
-          <a:bodyPr wrap="square" lIns="228600" rIns="182880" rtlCol="0" anchor="ctr"/>
-          <a:lstStyle/>
-          <a:p>
-            <a:pPr algn="l"/>
-            <a:r>
-              <a:rPr sz="1900" b="1">
-                <a:solidFill>
-                  <a:srgbClr val="15133D"/>
-                </a:solidFill>
-                <a:latin typeface="メイリオ"/>
-              </a:rPr>
-              <a:t>告知</a:t>
-            </a:r>
-          </a:p>
-          <a:p>
-            <a:pPr algn="l">
-              <a:lnSpc>
-                <a:spcPct val="115000"/>
-              </a:lnSpc>
-              <a:spcBef>
-                <a:spcPts val="600"/>
-              </a:spcBef>
-            </a:pPr>
-            <a:r>
-              <a:rPr sz="1300">
-                <a:solidFill>
-                  <a:srgbClr val="333333"/>
-                </a:solidFill>
-                <a:latin typeface="メイリオ"/>
-              </a:rPr>
-              <a:t>OAMの申し込み導線・AGPお知らせ・飲食CMSお知らせにも掲載予定。</a:t>
             </a:r>
           </a:p>
         </p:txBody>

--- a/LINEOA媒体最新情報_2026年10月トレンドレポート.pptx
+++ b/LINEOA媒体最新情報_2026年10月トレンドレポート.pptx
@@ -8656,8 +8656,8 @@
         </p:nvSpPr>
         <p:spPr>
           <a:xfrm>
-            <a:off x="548640" y="3154680"/>
-            <a:ext cx="8814816" cy="1417320"/>
+            <a:off x="548640" y="3313126"/>
+            <a:ext cx="8814816" cy="1548638"/>
           </a:xfrm>
           <a:prstGeom prst="roundRect">
             <a:avLst>
@@ -8807,8 +8807,8 @@
         </p:nvSpPr>
         <p:spPr>
           <a:xfrm>
-            <a:off x="548640" y="4754880"/>
-            <a:ext cx="8814816" cy="1417320"/>
+            <a:off x="548640" y="5044644"/>
+            <a:ext cx="8814816" cy="1214628"/>
           </a:xfrm>
           <a:prstGeom prst="roundRect">
             <a:avLst>
@@ -10332,8 +10332,8 @@
         </p:nvSpPr>
         <p:spPr>
           <a:xfrm>
-            <a:off x="548640" y="3154680"/>
-            <a:ext cx="8814816" cy="3108960"/>
+            <a:off x="548640" y="3199715"/>
+            <a:ext cx="8814816" cy="3172968"/>
           </a:xfrm>
           <a:prstGeom prst="roundRect">
             <a:avLst>
@@ -12073,8 +12073,8 @@
         </p:nvSpPr>
         <p:spPr>
           <a:xfrm>
-            <a:off x="548640" y="3154680"/>
-            <a:ext cx="8814816" cy="1600200"/>
+            <a:off x="548640" y="3403931"/>
+            <a:ext cx="8814816" cy="1290828"/>
           </a:xfrm>
           <a:prstGeom prst="roundRect">
             <a:avLst>
@@ -12217,8 +12217,8 @@
         </p:nvSpPr>
         <p:spPr>
           <a:xfrm>
-            <a:off x="548640" y="4919472"/>
-            <a:ext cx="8814816" cy="1371600"/>
+            <a:off x="548640" y="4877639"/>
+            <a:ext cx="8814816" cy="1290828"/>
           </a:xfrm>
           <a:prstGeom prst="roundRect">
             <a:avLst>
@@ -13184,6 +13184,1680 @@
                 <a:sym typeface="Meiryo"/>
               </a:rPr>
               <a:t>告知やコード配布のルールに違反すると、Apple・Googleの指摘でキャンペーン停止になる場合も。</a:t>
+            </a:r>
+            <a:endParaRPr sz="1400" b="1">
+              <a:solidFill>
+                <a:schemeClr val="dk1"/>
+              </a:solidFill>
+              <a:latin typeface="Meiryo"/>
+              <a:ea typeface="Meiryo"/>
+              <a:cs typeface="Meiryo"/>
+              <a:sym typeface="Meiryo"/>
+            </a:endParaRPr>
+          </a:p>
+        </p:txBody>
+      </p:sp>
+      <p:sp>
+        <p:nvSpPr>
+          <p:cNvPr id="52" name="Google Shape;52;p3"/>
+          <p:cNvSpPr/>
+          <p:nvPr/>
+        </p:nvSpPr>
+        <p:spPr>
+          <a:xfrm>
+            <a:off x="351381" y="2714173"/>
+            <a:ext cx="5200000" cy="338554"/>
+          </a:xfrm>
+          <a:prstGeom prst="rect">
+            <a:avLst/>
+          </a:prstGeom>
+          <a:noFill/>
+          <a:ln>
+            <a:noFill/>
+          </a:ln>
+        </p:spPr>
+        <p:txBody>
+          <a:bodyPr spcFirstLastPara="1" wrap="square" lIns="91425" tIns="45700" rIns="91425" bIns="45700" anchor="t" anchorCtr="0">
+            <a:noAutofit/>
+          </a:bodyPr>
+          <a:lstStyle/>
+          <a:p>
+            <a:pPr marL="0" marR="0" lvl="0" indent="0" algn="l" rtl="0">
+              <a:spcBef>
+                <a:spcPts val="0"/>
+              </a:spcBef>
+              <a:spcAft>
+                <a:spcPts val="0"/>
+              </a:spcAft>
+              <a:buNone/>
+            </a:pPr>
+            <a:r>
+              <a:rPr lang="ja-JP" sz="1400" b="1">
+                <a:solidFill>
+                  <a:srgbClr val="15133D"/>
+                </a:solidFill>
+                <a:latin typeface="メイリオ"/>
+                <a:ea typeface="Meiryo"/>
+                <a:cs typeface="Meiryo"/>
+                <a:sym typeface="Meiryo"/>
+              </a:rPr>
+              <a:t>■ 詳細</a:t>
+            </a:r>
+            <a:endParaRPr/>
+          </a:p>
+        </p:txBody>
+      </p:sp>
+      <p:grpSp>
+        <p:nvGrpSpPr>
+          <p:cNvPr id="53" name="Google Shape;53;p3"/>
+          <p:cNvGrpSpPr/>
+          <p:nvPr/>
+        </p:nvGrpSpPr>
+        <p:grpSpPr>
+          <a:xfrm>
+            <a:off x="8473303" y="730955"/>
+            <a:ext cx="1376241" cy="1131930"/>
+            <a:chOff x="0" y="0"/>
+            <a:chExt cx="1376241" cy="1131930"/>
+          </a:xfrm>
+        </p:grpSpPr>
+        <p:sp>
+          <p:nvSpPr>
+            <p:cNvPr id="54" name="Google Shape;54;p3"/>
+            <p:cNvSpPr/>
+            <p:nvPr/>
+          </p:nvSpPr>
+          <p:spPr>
+            <a:xfrm rot="10800000">
+              <a:off x="0" y="0"/>
+              <a:ext cx="1376241" cy="282982"/>
+            </a:xfrm>
+            <a:prstGeom prst="trapezoid">
+              <a:avLst>
+                <a:gd name="adj" fmla="val 60792"/>
+              </a:avLst>
+            </a:prstGeom>
+            <a:solidFill>
+              <a:srgbClr val="EAEDF5"/>
+            </a:solidFill>
+            <a:ln w="25400" cap="flat" cmpd="sng">
+              <a:solidFill>
+                <a:schemeClr val="dk2"/>
+              </a:solidFill>
+              <a:prstDash val="solid"/>
+              <a:round/>
+              <a:headEnd type="none" w="sm" len="sm"/>
+              <a:tailEnd type="none" w="sm" len="sm"/>
+            </a:ln>
+          </p:spPr>
+          <p:txBody>
+            <a:bodyPr spcFirstLastPara="1" wrap="square" lIns="91425" tIns="91425" rIns="91425" bIns="91425" anchor="ctr" anchorCtr="0">
+              <a:noAutofit/>
+            </a:bodyPr>
+            <a:lstStyle/>
+            <a:p>
+              <a:pPr marL="0" lvl="0" indent="0" algn="l" rtl="0">
+                <a:spcBef>
+                  <a:spcPts val="0"/>
+                </a:spcBef>
+                <a:spcAft>
+                  <a:spcPts val="0"/>
+                </a:spcAft>
+                <a:buNone/>
+              </a:pPr>
+              <a:endParaRPr/>
+            </a:p>
+          </p:txBody>
+        </p:sp>
+        <p:sp>
+          <p:nvSpPr>
+            <p:cNvPr id="55" name="Google Shape;55;p3"/>
+            <p:cNvSpPr txBox="1"/>
+            <p:nvPr/>
+          </p:nvSpPr>
+          <p:spPr>
+            <a:xfrm>
+              <a:off x="240842" y="0"/>
+              <a:ext cx="894556" cy="282982"/>
+            </a:xfrm>
+            <a:prstGeom prst="rect">
+              <a:avLst/>
+            </a:prstGeom>
+            <a:noFill/>
+            <a:ln>
+              <a:noFill/>
+            </a:ln>
+          </p:spPr>
+          <p:txBody>
+            <a:bodyPr spcFirstLastPara="1" wrap="square" lIns="10150" tIns="10150" rIns="10150" bIns="10150" anchor="ctr" anchorCtr="0">
+              <a:noAutofit/>
+            </a:bodyPr>
+            <a:lstStyle/>
+            <a:p>
+              <a:pPr marL="0" marR="0" lvl="0" indent="0" algn="ctr" rtl="0">
+                <a:lnSpc>
+                  <a:spcPct val="90000"/>
+                </a:lnSpc>
+                <a:spcBef>
+                  <a:spcPts val="0"/>
+                </a:spcBef>
+                <a:spcAft>
+                  <a:spcPts val="0"/>
+                </a:spcAft>
+                <a:buClr>
+                  <a:srgbClr val="262626"/>
+                </a:buClr>
+                <a:buSzPts val="800"/>
+                <a:buFont typeface="Arial"/>
+                <a:buNone/>
+              </a:pPr>
+              <a:r>
+                <a:rPr lang="ja-JP" sz="800" b="1">
+                  <a:solidFill>
+                    <a:srgbClr val="262626"/>
+                  </a:solidFill>
+                  <a:latin typeface="Arial"/>
+                  <a:ea typeface="Arial"/>
+                  <a:cs typeface="Arial"/>
+                  <a:sym typeface="Arial"/>
+                </a:rPr>
+                <a:t>認知</a:t>
+              </a:r>
+              <a:endParaRPr/>
+            </a:p>
+          </p:txBody>
+        </p:sp>
+        <p:sp>
+          <p:nvSpPr>
+            <p:cNvPr id="56" name="Google Shape;56;p3"/>
+            <p:cNvSpPr/>
+            <p:nvPr/>
+          </p:nvSpPr>
+          <p:spPr>
+            <a:xfrm rot="10800000">
+              <a:off x="172030" y="282982"/>
+              <a:ext cx="1032180" cy="282982"/>
+            </a:xfrm>
+            <a:prstGeom prst="trapezoid">
+              <a:avLst>
+                <a:gd name="adj" fmla="val 60792"/>
+              </a:avLst>
+            </a:prstGeom>
+            <a:solidFill>
+              <a:schemeClr val="lt1"/>
+            </a:solidFill>
+            <a:ln w="25400" cap="flat" cmpd="sng">
+              <a:solidFill>
+                <a:schemeClr val="dk2"/>
+              </a:solidFill>
+              <a:prstDash val="solid"/>
+              <a:round/>
+              <a:headEnd type="none" w="sm" len="sm"/>
+              <a:tailEnd type="none" w="sm" len="sm"/>
+            </a:ln>
+          </p:spPr>
+          <p:txBody>
+            <a:bodyPr spcFirstLastPara="1" wrap="square" lIns="91425" tIns="91425" rIns="91425" bIns="91425" anchor="ctr" anchorCtr="0">
+              <a:noAutofit/>
+            </a:bodyPr>
+            <a:lstStyle/>
+            <a:p>
+              <a:pPr marL="0" lvl="0" indent="0" algn="l" rtl="0">
+                <a:spcBef>
+                  <a:spcPts val="0"/>
+                </a:spcBef>
+                <a:spcAft>
+                  <a:spcPts val="0"/>
+                </a:spcAft>
+                <a:buNone/>
+              </a:pPr>
+              <a:endParaRPr/>
+            </a:p>
+          </p:txBody>
+        </p:sp>
+        <p:sp>
+          <p:nvSpPr>
+            <p:cNvPr id="57" name="Google Shape;57;p3"/>
+            <p:cNvSpPr txBox="1"/>
+            <p:nvPr/>
+          </p:nvSpPr>
+          <p:spPr>
+            <a:xfrm>
+              <a:off x="352661" y="282982"/>
+              <a:ext cx="670917" cy="282982"/>
+            </a:xfrm>
+            <a:prstGeom prst="rect">
+              <a:avLst/>
+            </a:prstGeom>
+            <a:noFill/>
+            <a:ln>
+              <a:noFill/>
+            </a:ln>
+          </p:spPr>
+          <p:txBody>
+            <a:bodyPr spcFirstLastPara="1" wrap="square" lIns="10150" tIns="10150" rIns="10150" bIns="10150" anchor="ctr" anchorCtr="0">
+              <a:noAutofit/>
+            </a:bodyPr>
+            <a:lstStyle/>
+            <a:p>
+              <a:pPr marL="0" marR="0" lvl="0" indent="0" algn="ctr" rtl="0">
+                <a:lnSpc>
+                  <a:spcPct val="90000"/>
+                </a:lnSpc>
+                <a:spcBef>
+                  <a:spcPts val="0"/>
+                </a:spcBef>
+                <a:spcAft>
+                  <a:spcPts val="0"/>
+                </a:spcAft>
+                <a:buClr>
+                  <a:srgbClr val="262626"/>
+                </a:buClr>
+                <a:buSzPts val="800"/>
+                <a:buFont typeface="Arial"/>
+                <a:buNone/>
+              </a:pPr>
+              <a:r>
+                <a:rPr lang="ja-JP" sz="800" b="1">
+                  <a:solidFill>
+                    <a:srgbClr val="262626"/>
+                  </a:solidFill>
+                  <a:latin typeface="Arial"/>
+                  <a:ea typeface="Arial"/>
+                  <a:cs typeface="Arial"/>
+                  <a:sym typeface="Arial"/>
+                </a:rPr>
+                <a:t>検討</a:t>
+              </a:r>
+              <a:endParaRPr/>
+            </a:p>
+          </p:txBody>
+        </p:sp>
+        <p:sp>
+          <p:nvSpPr>
+            <p:cNvPr id="58" name="Google Shape;58;p3"/>
+            <p:cNvSpPr/>
+            <p:nvPr/>
+          </p:nvSpPr>
+          <p:spPr>
+            <a:xfrm rot="10800000">
+              <a:off x="344060" y="565965"/>
+              <a:ext cx="688120" cy="282982"/>
+            </a:xfrm>
+            <a:prstGeom prst="trapezoid">
+              <a:avLst>
+                <a:gd name="adj" fmla="val 60792"/>
+              </a:avLst>
+            </a:prstGeom>
+            <a:solidFill>
+              <a:schemeClr val="lt1"/>
+            </a:solidFill>
+            <a:ln w="25400" cap="flat" cmpd="sng">
+              <a:solidFill>
+                <a:schemeClr val="dk2"/>
+              </a:solidFill>
+              <a:prstDash val="solid"/>
+              <a:round/>
+              <a:headEnd type="none" w="sm" len="sm"/>
+              <a:tailEnd type="none" w="sm" len="sm"/>
+            </a:ln>
+          </p:spPr>
+          <p:txBody>
+            <a:bodyPr spcFirstLastPara="1" wrap="square" lIns="91425" tIns="91425" rIns="91425" bIns="91425" anchor="ctr" anchorCtr="0">
+              <a:noAutofit/>
+            </a:bodyPr>
+            <a:lstStyle/>
+            <a:p>
+              <a:pPr marL="0" lvl="0" indent="0" algn="l" rtl="0">
+                <a:spcBef>
+                  <a:spcPts val="0"/>
+                </a:spcBef>
+                <a:spcAft>
+                  <a:spcPts val="0"/>
+                </a:spcAft>
+                <a:buNone/>
+              </a:pPr>
+              <a:endParaRPr/>
+            </a:p>
+          </p:txBody>
+        </p:sp>
+        <p:sp>
+          <p:nvSpPr>
+            <p:cNvPr id="59" name="Google Shape;59;p3"/>
+            <p:cNvSpPr txBox="1"/>
+            <p:nvPr/>
+          </p:nvSpPr>
+          <p:spPr>
+            <a:xfrm>
+              <a:off x="464481" y="565965"/>
+              <a:ext cx="447278" cy="282982"/>
+            </a:xfrm>
+            <a:prstGeom prst="rect">
+              <a:avLst/>
+            </a:prstGeom>
+            <a:noFill/>
+            <a:ln>
+              <a:noFill/>
+            </a:ln>
+          </p:spPr>
+          <p:txBody>
+            <a:bodyPr spcFirstLastPara="1" wrap="square" lIns="10150" tIns="10150" rIns="10150" bIns="10150" anchor="ctr" anchorCtr="0">
+              <a:noAutofit/>
+            </a:bodyPr>
+            <a:lstStyle/>
+            <a:p>
+              <a:pPr marL="0" marR="0" lvl="0" indent="0" algn="ctr" rtl="0">
+                <a:lnSpc>
+                  <a:spcPct val="90000"/>
+                </a:lnSpc>
+                <a:spcBef>
+                  <a:spcPts val="0"/>
+                </a:spcBef>
+                <a:spcAft>
+                  <a:spcPts val="0"/>
+                </a:spcAft>
+                <a:buClr>
+                  <a:srgbClr val="262626"/>
+                </a:buClr>
+                <a:buSzPts val="800"/>
+                <a:buFont typeface="Arial"/>
+                <a:buNone/>
+              </a:pPr>
+              <a:r>
+                <a:rPr lang="ja-JP" sz="800" b="1">
+                  <a:solidFill>
+                    <a:srgbClr val="262626"/>
+                  </a:solidFill>
+                  <a:latin typeface="Arial"/>
+                  <a:ea typeface="Arial"/>
+                  <a:cs typeface="Arial"/>
+                  <a:sym typeface="Arial"/>
+                </a:rPr>
+                <a:t>獲得</a:t>
+              </a:r>
+              <a:endParaRPr/>
+            </a:p>
+          </p:txBody>
+        </p:sp>
+        <p:sp>
+          <p:nvSpPr>
+            <p:cNvPr id="60" name="Google Shape;60;p3"/>
+            <p:cNvSpPr/>
+            <p:nvPr/>
+          </p:nvSpPr>
+          <p:spPr>
+            <a:xfrm rot="10800000">
+              <a:off x="516090" y="848948"/>
+              <a:ext cx="344060" cy="282982"/>
+            </a:xfrm>
+            <a:prstGeom prst="trapezoid">
+              <a:avLst>
+                <a:gd name="adj" fmla="val 60792"/>
+              </a:avLst>
+            </a:prstGeom>
+            <a:noFill/>
+            <a:ln w="25400" cap="flat" cmpd="sng">
+              <a:solidFill>
+                <a:schemeClr val="dk2"/>
+              </a:solidFill>
+              <a:prstDash val="solid"/>
+              <a:round/>
+              <a:headEnd type="none" w="sm" len="sm"/>
+              <a:tailEnd type="none" w="sm" len="sm"/>
+            </a:ln>
+          </p:spPr>
+          <p:txBody>
+            <a:bodyPr spcFirstLastPara="1" wrap="square" lIns="91425" tIns="91425" rIns="91425" bIns="91425" anchor="ctr" anchorCtr="0">
+              <a:noAutofit/>
+            </a:bodyPr>
+            <a:lstStyle/>
+            <a:p>
+              <a:pPr marL="0" lvl="0" indent="0" algn="l" rtl="0">
+                <a:spcBef>
+                  <a:spcPts val="0"/>
+                </a:spcBef>
+                <a:spcAft>
+                  <a:spcPts val="0"/>
+                </a:spcAft>
+                <a:buNone/>
+              </a:pPr>
+              <a:endParaRPr/>
+            </a:p>
+          </p:txBody>
+        </p:sp>
+        <p:sp>
+          <p:nvSpPr>
+            <p:cNvPr id="61" name="Google Shape;61;p3"/>
+            <p:cNvSpPr txBox="1"/>
+            <p:nvPr/>
+          </p:nvSpPr>
+          <p:spPr>
+            <a:xfrm>
+              <a:off x="516090" y="848948"/>
+              <a:ext cx="344060" cy="282982"/>
+            </a:xfrm>
+            <a:prstGeom prst="rect">
+              <a:avLst/>
+            </a:prstGeom>
+            <a:noFill/>
+            <a:ln>
+              <a:noFill/>
+            </a:ln>
+          </p:spPr>
+          <p:txBody>
+            <a:bodyPr spcFirstLastPara="1" wrap="square" lIns="10150" tIns="10150" rIns="10150" bIns="10150" anchor="ctr" anchorCtr="0">
+              <a:noAutofit/>
+            </a:bodyPr>
+            <a:lstStyle/>
+            <a:p>
+              <a:pPr marL="0" marR="0" lvl="0" indent="0" algn="ctr" rtl="0">
+                <a:lnSpc>
+                  <a:spcPct val="90000"/>
+                </a:lnSpc>
+                <a:spcBef>
+                  <a:spcPts val="0"/>
+                </a:spcBef>
+                <a:spcAft>
+                  <a:spcPts val="0"/>
+                </a:spcAft>
+                <a:buClr>
+                  <a:srgbClr val="262626"/>
+                </a:buClr>
+                <a:buSzPts val="800"/>
+                <a:buFont typeface="Arial"/>
+                <a:buNone/>
+              </a:pPr>
+              <a:r>
+                <a:rPr lang="ja-JP" sz="800" b="1">
+                  <a:solidFill>
+                    <a:srgbClr val="262626"/>
+                  </a:solidFill>
+                  <a:latin typeface="Arial"/>
+                  <a:ea typeface="Arial"/>
+                  <a:cs typeface="Arial"/>
+                  <a:sym typeface="Arial"/>
+                </a:rPr>
+                <a:t>伸長</a:t>
+              </a:r>
+              <a:endParaRPr/>
+            </a:p>
+          </p:txBody>
+        </p:sp>
+      </p:grpSp>
+      <p:pic>
+        <p:nvPicPr>
+          <p:cNvPr id="62" name="Google Shape;62;p3" descr="LINE公式アカウントのロゴの使用方法とは？種類やダウンロード方法、利用時の注意点を紹介 | Mico（ミコ）"/>
+          <p:cNvPicPr preferRelativeResize="0"/>
+          <p:nvPr/>
+        </p:nvPicPr>
+        <p:blipFill rotWithShape="1">
+          <a:blip r:embed="rId2">
+            <a:alphaModFix/>
+          </a:blip>
+          <a:srcRect/>
+          <a:stretch/>
+        </p:blipFill>
+        <p:spPr>
+          <a:xfrm>
+            <a:off x="351381" y="1234746"/>
+            <a:ext cx="656177" cy="655521"/>
+          </a:xfrm>
+          <a:prstGeom prst="rect">
+            <a:avLst/>
+          </a:prstGeom>
+          <a:noFill/>
+          <a:ln>
+            <a:noFill/>
+          </a:ln>
+        </p:spPr>
+      </p:pic>
+      <p:graphicFrame>
+        <p:nvGraphicFramePr>
+          <p:cNvPr id="63" name="Table 62"/>
+          <p:cNvGraphicFramePr>
+            <a:graphicFrameLocks noGrp="1"/>
+          </p:cNvGraphicFramePr>
+          <p:nvPr/>
+        </p:nvGraphicFramePr>
+        <p:xfrm>
+          <a:off x="548640" y="3437459"/>
+          <a:ext cx="8814815" cy="2304288"/>
+        </p:xfrm>
+        <a:graphic>
+          <a:graphicData uri="http://schemas.openxmlformats.org/drawingml/2006/table">
+            <a:tbl>
+              <a:tblPr firstRow="1" bandRow="1">
+                <a:tableStyleId>{5C22544A-7EE6-4342-B048-85BDC9FD1C3A}</a:tableStyleId>
+              </a:tblPr>
+              <a:tblGrid>
+                <a:gridCol w="1737360"/>
+                <a:gridCol w="3291840"/>
+                <a:gridCol w="3785615"/>
+              </a:tblGrid>
+              <a:tr h="384048">
+                <a:tc>
+                  <a:txBody>
+                    <a:bodyPr/>
+                    <a:lstStyle/>
+                    <a:p>
+                      <a:pPr algn="ctr"/>
+                      <a:r>
+                        <a:rPr sz="1400" b="1">
+                          <a:solidFill>
+                            <a:srgbClr val="FFFFFF"/>
+                          </a:solidFill>
+                          <a:latin typeface="メイリオ"/>
+                        </a:rPr>
+                        <a:t/>
+                      </a:r>
+                    </a:p>
+                  </a:txBody>
+                  <a:tcPr anchor="ctr" marL="109728" marR="109728">
+                    <a:solidFill>
+                      <a:srgbClr val="15133D"/>
+                    </a:solidFill>
+                  </a:tcPr>
+                </a:tc>
+                <a:tc>
+                  <a:txBody>
+                    <a:bodyPr/>
+                    <a:lstStyle/>
+                    <a:p>
+                      <a:pPr algn="ctr"/>
+                      <a:r>
+                        <a:rPr sz="1400" b="1">
+                          <a:solidFill>
+                            <a:srgbClr val="FFFFFF"/>
+                          </a:solidFill>
+                          <a:latin typeface="メイリオ"/>
+                        </a:rPr>
+                        <a:t>OK</a:t>
+                      </a:r>
+                    </a:p>
+                  </a:txBody>
+                  <a:tcPr anchor="ctr" marL="109728" marR="109728">
+                    <a:solidFill>
+                      <a:srgbClr val="15133D"/>
+                    </a:solidFill>
+                  </a:tcPr>
+                </a:tc>
+                <a:tc>
+                  <a:txBody>
+                    <a:bodyPr/>
+                    <a:lstStyle/>
+                    <a:p>
+                      <a:pPr algn="ctr"/>
+                      <a:r>
+                        <a:rPr sz="1400" b="1">
+                          <a:solidFill>
+                            <a:srgbClr val="FFFFFF"/>
+                          </a:solidFill>
+                          <a:latin typeface="メイリオ"/>
+                        </a:rPr>
+                        <a:t>NG</a:t>
+                      </a:r>
+                    </a:p>
+                  </a:txBody>
+                  <a:tcPr anchor="ctr" marL="109728" marR="109728">
+                    <a:solidFill>
+                      <a:srgbClr val="15133D"/>
+                    </a:solidFill>
+                  </a:tcPr>
+                </a:tc>
+              </a:tr>
+              <a:tr h="868680">
+                <a:tc>
+                  <a:txBody>
+                    <a:bodyPr/>
+                    <a:lstStyle/>
+                    <a:p>
+                      <a:pPr algn="ctr"/>
+                      <a:r>
+                        <a:rPr sz="1400" b="1">
+                          <a:solidFill>
+                            <a:srgbClr val="15133D"/>
+                          </a:solidFill>
+                          <a:latin typeface="メイリオ"/>
+                        </a:rPr>
+                        <a:t>告知してよい場所</a:t>
+                      </a:r>
+                    </a:p>
+                  </a:txBody>
+                  <a:tcPr anchor="ctr" marL="109728" marR="109728">
+                    <a:solidFill>
+                      <a:srgbClr val="EAF0FA"/>
+                    </a:solidFill>
+                  </a:tcPr>
+                </a:tc>
+                <a:tc>
+                  <a:txBody>
+                    <a:bodyPr/>
+                    <a:lstStyle/>
+                    <a:p>
+                      <a:pPr algn="l"/>
+                      <a:r>
+                        <a:rPr sz="1300">
+                          <a:solidFill>
+                            <a:srgbClr val="333333"/>
+                          </a:solidFill>
+                          <a:latin typeface="メイリオ"/>
+                        </a:rPr>
+                        <a:t>広告主のLINE公式アカウント・アプリ・SNS、Web全般（LINEヤフー広告も可）、店頭POP・屋外広告</a:t>
+                      </a:r>
+                    </a:p>
+                  </a:txBody>
+                  <a:tcPr anchor="ctr" marL="109728" marR="109728">
+                    <a:solidFill>
+                      <a:srgbClr val="FFFFFF"/>
+                    </a:solidFill>
+                  </a:tcPr>
+                </a:tc>
+                <a:tc>
+                  <a:txBody>
+                    <a:bodyPr/>
+                    <a:lstStyle/>
+                    <a:p>
+                      <a:pPr algn="l"/>
+                      <a:r>
+                        <a:rPr sz="1300">
+                          <a:solidFill>
+                            <a:srgbClr val="333333"/>
+                          </a:solidFill>
+                          <a:latin typeface="メイリオ"/>
+                        </a:rPr>
+                        <a:t>LINEヤフーが持つアプリ（スタンプショップ、LINEミニアプリ、LINEヤフーの公式アカウントなど）</a:t>
+                      </a:r>
+                    </a:p>
+                  </a:txBody>
+                  <a:tcPr anchor="ctr" marL="109728" marR="109728">
+                    <a:solidFill>
+                      <a:srgbClr val="FFFFFF"/>
+                    </a:solidFill>
+                  </a:tcPr>
+                </a:tc>
+              </a:tr>
+              <a:tr h="1051560">
+                <a:tc>
+                  <a:txBody>
+                    <a:bodyPr/>
+                    <a:lstStyle/>
+                    <a:p>
+                      <a:pPr algn="ctr"/>
+                      <a:r>
+                        <a:rPr sz="1400" b="1">
+                          <a:solidFill>
+                            <a:srgbClr val="15133D"/>
+                          </a:solidFill>
+                          <a:latin typeface="メイリオ"/>
+                        </a:rPr>
+                        <a:t>コードを渡す条件</a:t>
+                      </a:r>
+                    </a:p>
+                  </a:txBody>
+                  <a:tcPr anchor="ctr" marL="109728" marR="109728">
+                    <a:solidFill>
+                      <a:srgbClr val="EAF0FA"/>
+                    </a:solidFill>
+                  </a:tcPr>
+                </a:tc>
+                <a:tc>
+                  <a:txBody>
+                    <a:bodyPr/>
+                    <a:lstStyle/>
+                    <a:p>
+                      <a:pPr algn="l"/>
+                      <a:r>
+                        <a:rPr sz="1300">
+                          <a:solidFill>
+                            <a:srgbClr val="333333"/>
+                          </a:solidFill>
+                          <a:latin typeface="メイリオ"/>
+                        </a:rPr>
+                        <a:t>Webでの行動（商品購入など）、店頭での行動（来店・購入）</a:t>
+                      </a:r>
+                    </a:p>
+                  </a:txBody>
+                  <a:tcPr anchor="ctr" marL="109728" marR="109728">
+                    <a:solidFill>
+                      <a:srgbClr val="FFFFFF"/>
+                    </a:solidFill>
+                  </a:tcPr>
+                </a:tc>
+                <a:tc>
+                  <a:txBody>
+                    <a:bodyPr/>
+                    <a:lstStyle/>
+                    <a:p>
+                      <a:pPr algn="l"/>
+                      <a:r>
+                        <a:rPr sz="1300">
+                          <a:solidFill>
+                            <a:srgbClr val="333333"/>
+                          </a:solidFill>
+                          <a:latin typeface="メイリオ"/>
+                        </a:rPr>
+                        <a:t>LINEアプリ内の行動（友だち追加・アンケート回答、ミニアプリ内の行動）、広告主アプリ内の行動（会員登録など）、アプリのダウンロードが必須のもの</a:t>
+                      </a:r>
+                    </a:p>
+                  </a:txBody>
+                  <a:tcPr anchor="ctr" marL="109728" marR="109728">
+                    <a:solidFill>
+                      <a:srgbClr val="FFFFFF"/>
+                    </a:solidFill>
+                  </a:tcPr>
+                </a:tc>
+              </a:tr>
+            </a:tbl>
+          </a:graphicData>
+        </a:graphic>
+      </p:graphicFrame>
+      <p:sp>
+        <p:nvSpPr>
+          <p:cNvPr id="64" name="TextBox 63"/>
+          <p:cNvSpPr txBox="1"/>
+          <p:nvPr/>
+        </p:nvSpPr>
+        <p:spPr>
+          <a:xfrm>
+            <a:off x="548640" y="5814899"/>
+            <a:ext cx="8814816" cy="320040"/>
+          </a:xfrm>
+          <a:prstGeom prst="rect">
+            <a:avLst/>
+          </a:prstGeom>
+          <a:noFill/>
+        </p:spPr>
+        <p:txBody>
+          <a:bodyPr wrap="none">
+            <a:spAutoFit/>
+          </a:bodyPr>
+          <a:lstStyle/>
+          <a:p>
+            <a:r>
+              <a:rPr sz="1200">
+                <a:solidFill>
+                  <a:srgbClr val="333333"/>
+                </a:solidFill>
+                <a:latin typeface="メイリオ"/>
+              </a:rPr>
+              <a:t>※ スタンプをもらうまでの流れに、アプリへの遷移が少しでも入るとNG</a:t>
+            </a:r>
+          </a:p>
+        </p:txBody>
+      </p:sp>
+    </p:spTree>
+  </p:cSld>
+  <p:clrMapOvr>
+    <a:masterClrMapping/>
+  </p:clrMapOvr>
+</p:sld>
+</file>
+
+<file path=ppt/slides/slide7.xml><?xml version="1.0" encoding="utf-8"?>
+<p:sld xmlns:a="http://schemas.openxmlformats.org/drawingml/2006/main" xmlns:p="http://schemas.openxmlformats.org/presentationml/2006/main" xmlns:r="http://schemas.openxmlformats.org/officeDocument/2006/relationships">
+  <p:cSld>
+    <p:spTree>
+      <p:nvGrpSpPr>
+        <p:cNvPr id="1" name=""/>
+        <p:cNvGrpSpPr/>
+        <p:nvPr/>
+      </p:nvGrpSpPr>
+      <p:grpSpPr/>
+      <p:sp>
+        <p:nvSpPr>
+          <p:cNvPr id="40" name="Google Shape;40;p3"/>
+          <p:cNvSpPr/>
+          <p:nvPr/>
+        </p:nvSpPr>
+        <p:spPr>
+          <a:xfrm>
+            <a:off x="292801" y="730955"/>
+            <a:ext cx="1296144" cy="435690"/>
+          </a:xfrm>
+          <a:prstGeom prst="rect">
+            <a:avLst/>
+          </a:prstGeom>
+          <a:solidFill>
+            <a:schemeClr val="dk2"/>
+          </a:solidFill>
+          <a:ln w="9525" cap="flat" cmpd="sng">
+            <a:solidFill>
+              <a:srgbClr val="4A7DBA"/>
+            </a:solidFill>
+            <a:prstDash val="solid"/>
+            <a:round/>
+            <a:headEnd type="none" w="sm" len="sm"/>
+            <a:tailEnd type="none" w="sm" len="sm"/>
+          </a:ln>
+        </p:spPr>
+        <p:txBody>
+          <a:bodyPr spcFirstLastPara="1" wrap="square" lIns="91425" tIns="45700" rIns="91425" bIns="45700" anchor="ctr" anchorCtr="0">
+            <a:noAutofit/>
+          </a:bodyPr>
+          <a:lstStyle/>
+          <a:p>
+            <a:pPr marL="0" marR="0" lvl="0" indent="0" algn="ctr" rtl="0">
+              <a:spcBef>
+                <a:spcPts val="0"/>
+              </a:spcBef>
+              <a:spcAft>
+                <a:spcPts val="0"/>
+              </a:spcAft>
+              <a:buNone/>
+            </a:pPr>
+            <a:r>
+              <a:rPr lang="ja-JP" sz="1800" b="0" i="0" u="none" strike="noStrike" cap="none">
+                <a:solidFill>
+                  <a:schemeClr val="lt1"/>
+                </a:solidFill>
+                <a:latin typeface="メイリオ"/>
+                <a:ea typeface="Meiryo"/>
+                <a:cs typeface="Meiryo"/>
+                <a:sym typeface="Meiryo"/>
+              </a:rPr>
+              <a:t>対象業界</a:t>
+            </a:r>
+            <a:endParaRPr/>
+          </a:p>
+        </p:txBody>
+      </p:sp>
+      <p:sp>
+        <p:nvSpPr>
+          <p:cNvPr id="41" name="Google Shape;41;p3"/>
+          <p:cNvSpPr/>
+          <p:nvPr/>
+        </p:nvSpPr>
+        <p:spPr>
+          <a:xfrm>
+            <a:off x="7560840" y="730955"/>
+            <a:ext cx="829618" cy="435690"/>
+          </a:xfrm>
+          <a:prstGeom prst="rect">
+            <a:avLst/>
+          </a:prstGeom>
+          <a:solidFill>
+            <a:schemeClr val="bg1"/>
+          </a:solidFill>
+          <a:ln w="9525" cap="flat" cmpd="sng">
+            <a:solidFill>
+              <a:srgbClr val="4F81BD"/>
+            </a:solidFill>
+            <a:prstDash val="sysDash"/>
+            <a:round/>
+            <a:headEnd type="none" w="sm" len="sm"/>
+            <a:tailEnd type="none" w="sm" len="sm"/>
+          </a:ln>
+        </p:spPr>
+        <p:txBody>
+          <a:bodyPr spcFirstLastPara="1" wrap="square" lIns="91425" tIns="45700" rIns="91425" bIns="45700" anchor="ctr" anchorCtr="0">
+            <a:noAutofit/>
+          </a:bodyPr>
+          <a:lstStyle/>
+          <a:p>
+            <a:pPr marL="0" marR="0" lvl="0" indent="0" algn="ctr" rtl="0">
+              <a:spcBef>
+                <a:spcPts val="0"/>
+              </a:spcBef>
+              <a:spcAft>
+                <a:spcPts val="0"/>
+              </a:spcAft>
+              <a:buNone/>
+            </a:pPr>
+            <a:r>
+              <a:rPr lang="ja-JP" sz="1200" b="0" i="0" u="none" strike="noStrike" cap="none">
+                <a:solidFill>
+                  <a:schemeClr val="dk1"/>
+                </a:solidFill>
+                <a:latin typeface="メイリオ"/>
+                <a:ea typeface="Meiryo"/>
+                <a:cs typeface="Meiryo"/>
+                <a:sym typeface="Meiryo"/>
+              </a:rPr>
+              <a:t>その他</a:t>
+            </a:r>
+            <a:endParaRPr sz="1200" b="0" i="0" u="none" strike="noStrike" cap="none">
+              <a:solidFill>
+                <a:schemeClr val="dk1"/>
+              </a:solidFill>
+              <a:latin typeface="Meiryo"/>
+              <a:ea typeface="Meiryo"/>
+              <a:cs typeface="Meiryo"/>
+              <a:sym typeface="Meiryo"/>
+            </a:endParaRPr>
+          </a:p>
+        </p:txBody>
+      </p:sp>
+      <p:sp>
+        <p:nvSpPr>
+          <p:cNvPr id="42" name="Google Shape;42;p3"/>
+          <p:cNvSpPr/>
+          <p:nvPr/>
+        </p:nvSpPr>
+        <p:spPr>
+          <a:xfrm>
+            <a:off x="6679050" y="730955"/>
+            <a:ext cx="829618" cy="435690"/>
+          </a:xfrm>
+          <a:prstGeom prst="rect">
+            <a:avLst/>
+          </a:prstGeom>
+          <a:solidFill>
+            <a:schemeClr val="tx2"/>
+          </a:solidFill>
+          <a:ln w="9525" cap="flat" cmpd="sng">
+            <a:solidFill>
+              <a:srgbClr val="4F81BD"/>
+            </a:solidFill>
+            <a:prstDash val="solid"/>
+            <a:round/>
+            <a:headEnd type="none" w="sm" len="sm"/>
+            <a:tailEnd type="none" w="sm" len="sm"/>
+          </a:ln>
+        </p:spPr>
+        <p:txBody>
+          <a:bodyPr spcFirstLastPara="1" wrap="square" lIns="91425" tIns="45700" rIns="91425" bIns="45700" anchor="ctr" anchorCtr="0">
+            <a:noAutofit/>
+          </a:bodyPr>
+          <a:lstStyle/>
+          <a:p>
+            <a:pPr marL="0" marR="0" lvl="0" indent="0" algn="ctr" rtl="0">
+              <a:spcBef>
+                <a:spcPts val="0"/>
+              </a:spcBef>
+              <a:spcAft>
+                <a:spcPts val="0"/>
+              </a:spcAft>
+              <a:buNone/>
+            </a:pPr>
+            <a:r>
+              <a:rPr lang="ja-JP" sz="1000" b="0" i="0" u="none" strike="noStrike" cap="none">
+                <a:solidFill>
+                  <a:schemeClr val="dk1"/>
+                </a:solidFill>
+                <a:latin typeface="メイリオ"/>
+                <a:ea typeface="Meiryo"/>
+                <a:cs typeface="Meiryo"/>
+                <a:sym typeface="Meiryo"/>
+              </a:rPr>
+              <a:t>オプション</a:t>
+            </a:r>
+            <a:endParaRPr sz="1000" b="0" i="0" u="none" strike="noStrike" cap="none">
+              <a:solidFill>
+                <a:schemeClr val="dk1"/>
+              </a:solidFill>
+              <a:latin typeface="Meiryo"/>
+              <a:ea typeface="Meiryo"/>
+              <a:cs typeface="Meiryo"/>
+              <a:sym typeface="Meiryo"/>
+            </a:endParaRPr>
+          </a:p>
+          <a:p>
+            <a:pPr marL="0" marR="0" lvl="0" indent="0" algn="ctr" rtl="0">
+              <a:spcBef>
+                <a:spcPts val="0"/>
+              </a:spcBef>
+              <a:spcAft>
+                <a:spcPts val="0"/>
+              </a:spcAft>
+              <a:buNone/>
+            </a:pPr>
+            <a:r>
+              <a:rPr lang="ja-JP" sz="1000" b="0" i="0" u="none" strike="noStrike" cap="none">
+                <a:solidFill>
+                  <a:schemeClr val="dk1"/>
+                </a:solidFill>
+                <a:latin typeface="メイリオ"/>
+                <a:ea typeface="Meiryo"/>
+                <a:cs typeface="Meiryo"/>
+                <a:sym typeface="Meiryo"/>
+              </a:rPr>
+              <a:t>商材</a:t>
+            </a:r>
+            <a:endParaRPr/>
+          </a:p>
+        </p:txBody>
+      </p:sp>
+      <p:sp>
+        <p:nvSpPr>
+          <p:cNvPr id="43" name="Google Shape;43;p3"/>
+          <p:cNvSpPr/>
+          <p:nvPr/>
+        </p:nvSpPr>
+        <p:spPr>
+          <a:xfrm>
+            <a:off x="1594068" y="730955"/>
+            <a:ext cx="2926883" cy="435690"/>
+          </a:xfrm>
+          <a:prstGeom prst="rect">
+            <a:avLst/>
+          </a:prstGeom>
+          <a:noFill/>
+          <a:ln w="9525" cap="flat" cmpd="sng">
+            <a:solidFill>
+              <a:srgbClr val="4A7DBA"/>
+            </a:solidFill>
+            <a:prstDash val="solid"/>
+            <a:round/>
+            <a:headEnd type="none" w="sm" len="sm"/>
+            <a:tailEnd type="none" w="sm" len="sm"/>
+          </a:ln>
+        </p:spPr>
+        <p:txBody>
+          <a:bodyPr spcFirstLastPara="1" wrap="square" lIns="91425" tIns="45700" rIns="91425" bIns="45700" anchor="ctr" anchorCtr="0">
+            <a:noAutofit/>
+          </a:bodyPr>
+          <a:lstStyle/>
+          <a:p>
+            <a:pPr marL="0" marR="0" lvl="0" indent="0" algn="ctr" rtl="0">
+              <a:spcBef>
+                <a:spcPts val="0"/>
+              </a:spcBef>
+              <a:spcAft>
+                <a:spcPts val="0"/>
+              </a:spcAft>
+              <a:buNone/>
+            </a:pPr>
+            <a:r>
+              <a:rPr lang="ja-JP" sz="1300" b="0" i="0" u="none" strike="noStrike" cap="none">
+                <a:solidFill>
+                  <a:schemeClr val="dk1"/>
+                </a:solidFill>
+                <a:latin typeface="メイリオ"/>
+                <a:ea typeface="Meiryo"/>
+                <a:cs typeface="Meiryo"/>
+                <a:sym typeface="Meiryo"/>
+              </a:rPr>
+              <a:t>食品・飲料メーカー、</a:t>
+            </a:r>
+            <a:br>
+              <a:rPr lang="ja-JP" sz="1300" b="0" i="0" u="none" strike="noStrike" cap="none">
+                <a:solidFill>
+                  <a:schemeClr val="dk1"/>
+                </a:solidFill>
+                <a:latin typeface="メイリオ"/>
+                <a:ea typeface="Meiryo"/>
+                <a:cs typeface="Meiryo"/>
+                <a:sym typeface="Meiryo"/>
+              </a:rPr>
+            </a:br>
+            <a:r>
+              <a:rPr lang="ja-JP" sz="1300" b="0" i="0" u="none" strike="noStrike" cap="none">
+                <a:solidFill>
+                  <a:schemeClr val="dk1"/>
+                </a:solidFill>
+                <a:latin typeface="メイリオ"/>
+                <a:ea typeface="Meiryo"/>
+                <a:cs typeface="Meiryo"/>
+                <a:sym typeface="Meiryo"/>
+              </a:rPr>
+              <a:t>小売・コンビニ</a:t>
+            </a:r>
+            <a:endParaRPr/>
+          </a:p>
+        </p:txBody>
+      </p:sp>
+      <p:sp>
+        <p:nvSpPr>
+          <p:cNvPr id="44" name="Google Shape;44;p3"/>
+          <p:cNvSpPr txBox="1"/>
+          <p:nvPr/>
+        </p:nvSpPr>
+        <p:spPr>
+          <a:xfrm>
+            <a:off x="3296816" y="6597352"/>
+            <a:ext cx="6209091" cy="215444"/>
+          </a:xfrm>
+          <a:prstGeom prst="rect">
+            <a:avLst/>
+          </a:prstGeom>
+          <a:noFill/>
+          <a:ln>
+            <a:noFill/>
+          </a:ln>
+        </p:spPr>
+        <p:txBody>
+          <a:bodyPr spcFirstLastPara="1" wrap="square" lIns="91425" tIns="45700" rIns="91425" bIns="45700" anchor="t" anchorCtr="0">
+            <a:spAutoFit/>
+          </a:bodyPr>
+          <a:lstStyle/>
+          <a:p>
+            <a:pPr marL="0" marR="0" lvl="0" indent="0" algn="l" rtl="0">
+              <a:spcBef>
+                <a:spcPts val="0"/>
+              </a:spcBef>
+              <a:spcAft>
+                <a:spcPts val="0"/>
+              </a:spcAft>
+              <a:buNone/>
+            </a:pPr>
+            <a:r>
+              <a:rPr lang="ja-JP" sz="800" b="0" i="0" u="none" strike="noStrike" cap="none">
+                <a:solidFill>
+                  <a:schemeClr val="lt1"/>
+                </a:solidFill>
+                <a:latin typeface="メイリオ"/>
+                <a:ea typeface="Meiryo"/>
+                <a:cs typeface="Meiryo"/>
+                <a:sym typeface="Meiryo"/>
+              </a:rPr>
+              <a:t>出典：代理店情報</a:t>
+            </a:r>
+            <a:endParaRPr sz="800">
+              <a:solidFill>
+                <a:schemeClr val="lt1"/>
+              </a:solidFill>
+              <a:latin typeface="Meiryo"/>
+              <a:ea typeface="Meiryo"/>
+              <a:cs typeface="Meiryo"/>
+              <a:sym typeface="Meiryo"/>
+            </a:endParaRPr>
+          </a:p>
+        </p:txBody>
+      </p:sp>
+      <p:sp>
+        <p:nvSpPr>
+          <p:cNvPr id="45" name="Google Shape;45;p3"/>
+          <p:cNvSpPr/>
+          <p:nvPr/>
+        </p:nvSpPr>
+        <p:spPr>
+          <a:xfrm>
+            <a:off x="0" y="1234746"/>
+            <a:ext cx="9906000" cy="672259"/>
+          </a:xfrm>
+          <a:prstGeom prst="rect">
+            <a:avLst/>
+          </a:prstGeom>
+          <a:solidFill>
+            <a:srgbClr val="C5D8F1"/>
+          </a:solidFill>
+          <a:ln>
+            <a:noFill/>
+          </a:ln>
+        </p:spPr>
+        <p:txBody>
+          <a:bodyPr spcFirstLastPara="1" wrap="square" lIns="91425" tIns="45700" rIns="91425" bIns="45700" anchor="ctr" anchorCtr="0">
+            <a:noAutofit/>
+          </a:bodyPr>
+          <a:lstStyle/>
+          <a:p>
+            <a:pPr marL="0" marR="0" lvl="0" indent="0" algn="ctr" rtl="0">
+              <a:spcBef>
+                <a:spcPts val="0"/>
+              </a:spcBef>
+              <a:spcAft>
+                <a:spcPts val="0"/>
+              </a:spcAft>
+              <a:buNone/>
+            </a:pPr>
+            <a:r>
+              <a:rPr lang="ja-JP" sz="1600" b="1">
+                <a:solidFill>
+                  <a:srgbClr val="004DE6"/>
+                </a:solidFill>
+                <a:latin typeface="メイリオ"/>
+                <a:ea typeface="Meiryo"/>
+                <a:cs typeface="Meiryo"/>
+                <a:sym typeface="Meiryo"/>
+              </a:rPr>
+              <a:t>　　　　　　</a:t>
+            </a:r>
+            <a:endParaRPr sz="1800" b="1">
+              <a:solidFill>
+                <a:srgbClr val="004DE6"/>
+              </a:solidFill>
+              <a:latin typeface="Meiryo"/>
+              <a:ea typeface="Meiryo"/>
+              <a:cs typeface="Meiryo"/>
+              <a:sym typeface="Meiryo"/>
+            </a:endParaRPr>
+          </a:p>
+        </p:txBody>
+      </p:sp>
+      <p:sp>
+        <p:nvSpPr>
+          <p:cNvPr id="46" name="Google Shape;46;p3"/>
+          <p:cNvSpPr/>
+          <p:nvPr/>
+        </p:nvSpPr>
+        <p:spPr>
+          <a:xfrm>
+            <a:off x="1089832" y="1437370"/>
+            <a:ext cx="7031520" cy="338554"/>
+          </a:xfrm>
+          <a:prstGeom prst="rect">
+            <a:avLst/>
+          </a:prstGeom>
+          <a:noFill/>
+          <a:ln>
+            <a:noFill/>
+          </a:ln>
+        </p:spPr>
+        <p:txBody>
+          <a:bodyPr spcFirstLastPara="1" wrap="square" lIns="91425" tIns="45700" rIns="91425" bIns="45700" anchor="t" anchorCtr="0">
+            <a:spAutoFit/>
+          </a:bodyPr>
+          <a:lstStyle/>
+          <a:p>
+            <a:pPr marL="0" marR="0" lvl="0" indent="0" algn="l" rtl="0">
+              <a:spcBef>
+                <a:spcPts val="0"/>
+              </a:spcBef>
+              <a:spcAft>
+                <a:spcPts val="0"/>
+              </a:spcAft>
+              <a:buNone/>
+            </a:pPr>
+            <a:r>
+              <a:rPr lang="ja-JP" sz="1600" b="1">
+                <a:solidFill>
+                  <a:srgbClr val="004DE6"/>
+                </a:solidFill>
+                <a:latin typeface="メイリオ"/>
+                <a:ea typeface="Meiryo"/>
+                <a:cs typeface="Meiryo"/>
+                <a:sym typeface="Meiryo"/>
+              </a:rPr>
+              <a:t>【LINEシリアルコードスタンプ】クリエイティブ基準の緩和と進め方</a:t>
+            </a:r>
+            <a:endParaRPr sz="1600" b="1">
+              <a:solidFill>
+                <a:srgbClr val="004DE6"/>
+              </a:solidFill>
+              <a:latin typeface="Meiryo"/>
+              <a:ea typeface="Meiryo"/>
+              <a:cs typeface="Meiryo"/>
+              <a:sym typeface="Meiryo"/>
+            </a:endParaRPr>
+          </a:p>
+        </p:txBody>
+      </p:sp>
+      <p:sp>
+        <p:nvSpPr>
+          <p:cNvPr id="47" name="Google Shape;47;p3"/>
+          <p:cNvSpPr txBox="1"/>
+          <p:nvPr/>
+        </p:nvSpPr>
+        <p:spPr>
+          <a:xfrm>
+            <a:off x="182880" y="88175"/>
+            <a:ext cx="7512385" cy="365091"/>
+          </a:xfrm>
+          <a:prstGeom prst="rect">
+            <a:avLst/>
+          </a:prstGeom>
+          <a:noFill/>
+          <a:ln>
+            <a:noFill/>
+          </a:ln>
+        </p:spPr>
+        <p:txBody>
+          <a:bodyPr spcFirstLastPara="1" wrap="square" lIns="91425" tIns="72000" rIns="91425" bIns="45700" anchor="t" anchorCtr="0">
+            <a:spAutoFit/>
+          </a:bodyPr>
+          <a:lstStyle/>
+          <a:p>
+            <a:pPr marL="0" marR="0" lvl="0" indent="0" algn="l" rtl="0">
+              <a:spcBef>
+                <a:spcPts val="0"/>
+              </a:spcBef>
+              <a:spcAft>
+                <a:spcPts val="0"/>
+              </a:spcAft>
+              <a:buClr>
+                <a:schemeClr val="dk1"/>
+              </a:buClr>
+              <a:buSzPts val="1600"/>
+              <a:buFont typeface="Arial"/>
+              <a:buNone/>
+            </a:pPr>
+            <a:r>
+              <a:rPr lang="ja-JP" sz="1600" b="0" u="none">
+                <a:solidFill>
+                  <a:schemeClr val="dk1"/>
+                </a:solidFill>
+                <a:latin typeface="メイリオ"/>
+                <a:ea typeface="Meiryo"/>
+                <a:cs typeface="Meiryo"/>
+                <a:sym typeface="Meiryo"/>
+              </a:rPr>
+              <a:t>    今後のアップデート情報</a:t>
+            </a:r>
+            <a:endParaRPr sz="1600" b="0" u="none">
+              <a:solidFill>
+                <a:schemeClr val="dk1"/>
+              </a:solidFill>
+              <a:latin typeface="Meiryo"/>
+              <a:ea typeface="Meiryo"/>
+              <a:cs typeface="Meiryo"/>
+              <a:sym typeface="Meiryo"/>
+            </a:endParaRPr>
+          </a:p>
+        </p:txBody>
+      </p:sp>
+      <p:sp>
+        <p:nvSpPr>
+          <p:cNvPr id="48" name="Google Shape;48;p3"/>
+          <p:cNvSpPr/>
+          <p:nvPr/>
+        </p:nvSpPr>
+        <p:spPr>
+          <a:xfrm>
+            <a:off x="5797260" y="730955"/>
+            <a:ext cx="829618" cy="435690"/>
+          </a:xfrm>
+          <a:prstGeom prst="rect">
+            <a:avLst/>
+          </a:prstGeom>
+          <a:solidFill>
+            <a:schemeClr val="bg1"/>
+          </a:solidFill>
+          <a:ln w="9525" cap="flat" cmpd="sng">
+            <a:solidFill>
+              <a:srgbClr val="4F81BD"/>
+            </a:solidFill>
+            <a:prstDash val="sysDash"/>
+            <a:round/>
+            <a:headEnd type="none" w="sm" len="sm"/>
+            <a:tailEnd type="none" w="sm" len="sm"/>
+          </a:ln>
+        </p:spPr>
+        <p:txBody>
+          <a:bodyPr spcFirstLastPara="1" wrap="square" lIns="91425" tIns="45700" rIns="91425" bIns="45700" anchor="ctr" anchorCtr="0">
+            <a:noAutofit/>
+          </a:bodyPr>
+          <a:lstStyle/>
+          <a:p>
+            <a:pPr marL="0" marR="0" lvl="0" indent="0" algn="ctr" rtl="0">
+              <a:spcBef>
+                <a:spcPts val="0"/>
+              </a:spcBef>
+              <a:spcAft>
+                <a:spcPts val="0"/>
+              </a:spcAft>
+              <a:buClr>
+                <a:schemeClr val="dk1"/>
+              </a:buClr>
+              <a:buSzPts val="1000"/>
+              <a:buFont typeface="Meiryo"/>
+              <a:buNone/>
+            </a:pPr>
+            <a:r>
+              <a:rPr lang="ja-JP" sz="1000">
+                <a:solidFill>
+                  <a:schemeClr val="dk1"/>
+                </a:solidFill>
+                <a:latin typeface="メイリオ"/>
+                <a:ea typeface="Meiryo"/>
+                <a:cs typeface="Meiryo"/>
+                <a:sym typeface="Meiryo"/>
+              </a:rPr>
+              <a:t>開発</a:t>
+            </a:r>
+            <a:endParaRPr sz="1000">
+              <a:solidFill>
+                <a:schemeClr val="dk1"/>
+              </a:solidFill>
+              <a:latin typeface="Meiryo"/>
+              <a:ea typeface="Meiryo"/>
+              <a:cs typeface="Meiryo"/>
+              <a:sym typeface="Meiryo"/>
+            </a:endParaRPr>
+          </a:p>
+          <a:p>
+            <a:pPr marL="0" marR="0" lvl="0" indent="0" algn="ctr" rtl="0">
+              <a:spcBef>
+                <a:spcPts val="0"/>
+              </a:spcBef>
+              <a:spcAft>
+                <a:spcPts val="0"/>
+              </a:spcAft>
+              <a:buClr>
+                <a:schemeClr val="dk1"/>
+              </a:buClr>
+              <a:buSzPts val="1000"/>
+              <a:buFont typeface="Meiryo"/>
+              <a:buNone/>
+            </a:pPr>
+            <a:r>
+              <a:rPr lang="ja-JP" sz="1000">
+                <a:solidFill>
+                  <a:schemeClr val="dk1"/>
+                </a:solidFill>
+                <a:latin typeface="メイリオ"/>
+                <a:ea typeface="Meiryo"/>
+                <a:cs typeface="Meiryo"/>
+                <a:sym typeface="Meiryo"/>
+              </a:rPr>
+              <a:t>LINE API</a:t>
+            </a:r>
+            <a:endParaRPr sz="1000">
+              <a:solidFill>
+                <a:schemeClr val="dk1"/>
+              </a:solidFill>
+              <a:latin typeface="Meiryo"/>
+              <a:ea typeface="Meiryo"/>
+              <a:cs typeface="Meiryo"/>
+              <a:sym typeface="Meiryo"/>
+            </a:endParaRPr>
+          </a:p>
+        </p:txBody>
+      </p:sp>
+      <p:sp>
+        <p:nvSpPr>
+          <p:cNvPr id="49" name="Google Shape;49;p3"/>
+          <p:cNvSpPr/>
+          <p:nvPr/>
+        </p:nvSpPr>
+        <p:spPr>
+          <a:xfrm>
+            <a:off x="4915470" y="730955"/>
+            <a:ext cx="829618" cy="435690"/>
+          </a:xfrm>
+          <a:prstGeom prst="rect">
+            <a:avLst/>
+          </a:prstGeom>
+          <a:solidFill>
+            <a:schemeClr val="bg1"/>
+          </a:solidFill>
+          <a:ln w="9525" cap="flat" cmpd="sng">
+            <a:solidFill>
+              <a:srgbClr val="4F81BD"/>
+            </a:solidFill>
+            <a:prstDash val="sysDash"/>
+            <a:round/>
+            <a:headEnd type="none" w="sm" len="sm"/>
+            <a:tailEnd type="none" w="sm" len="sm"/>
+          </a:ln>
+        </p:spPr>
+        <p:txBody>
+          <a:bodyPr spcFirstLastPara="1" wrap="square" lIns="91425" tIns="45700" rIns="91425" bIns="45700" anchor="ctr" anchorCtr="0">
+            <a:noAutofit/>
+          </a:bodyPr>
+          <a:lstStyle/>
+          <a:p>
+            <a:pPr marL="0" marR="0" lvl="0" indent="0" algn="ctr" rtl="0">
+              <a:spcBef>
+                <a:spcPts val="0"/>
+              </a:spcBef>
+              <a:spcAft>
+                <a:spcPts val="0"/>
+              </a:spcAft>
+              <a:buNone/>
+            </a:pPr>
+            <a:r>
+              <a:rPr lang="ja-JP" sz="1000">
+                <a:solidFill>
+                  <a:schemeClr val="dk1"/>
+                </a:solidFill>
+                <a:latin typeface="メイリオ"/>
+                <a:ea typeface="Meiryo"/>
+                <a:cs typeface="Meiryo"/>
+                <a:sym typeface="Meiryo"/>
+              </a:rPr>
+              <a:t>LINE公式アカウント</a:t>
+            </a:r>
+            <a:endParaRPr sz="1000">
+              <a:solidFill>
+                <a:schemeClr val="dk1"/>
+              </a:solidFill>
+              <a:latin typeface="Meiryo"/>
+              <a:ea typeface="Meiryo"/>
+              <a:cs typeface="Meiryo"/>
+              <a:sym typeface="Meiryo"/>
+            </a:endParaRPr>
+          </a:p>
+        </p:txBody>
+      </p:sp>
+      <p:sp>
+        <p:nvSpPr>
+          <p:cNvPr id="50" name="Google Shape;50;p3"/>
+          <p:cNvSpPr/>
+          <p:nvPr/>
+        </p:nvSpPr>
+        <p:spPr>
+          <a:xfrm>
+            <a:off x="0" y="1890267"/>
+            <a:ext cx="9906000" cy="733579"/>
+          </a:xfrm>
+          <a:prstGeom prst="rect">
+            <a:avLst/>
+          </a:prstGeom>
+          <a:solidFill>
+            <a:srgbClr val="F2F2F2"/>
+          </a:solidFill>
+          <a:ln>
+            <a:noFill/>
+          </a:ln>
+        </p:spPr>
+        <p:txBody>
+          <a:bodyPr spcFirstLastPara="1" wrap="square" lIns="91425" tIns="45700" rIns="91425" bIns="45700" anchor="ctr" anchorCtr="0">
+            <a:noAutofit/>
+          </a:bodyPr>
+          <a:lstStyle/>
+          <a:p>
+            <a:pPr marL="0" marR="0" lvl="0" indent="0" algn="ctr" rtl="0">
+              <a:spcBef>
+                <a:spcPts val="0"/>
+              </a:spcBef>
+              <a:spcAft>
+                <a:spcPts val="0"/>
+              </a:spcAft>
+              <a:buNone/>
+            </a:pPr>
+            <a:endParaRPr sz="1200">
+              <a:solidFill>
+                <a:schemeClr val="dk1"/>
+              </a:solidFill>
+              <a:latin typeface="Meiryo"/>
+              <a:ea typeface="Meiryo"/>
+              <a:cs typeface="Meiryo"/>
+              <a:sym typeface="Meiryo"/>
+            </a:endParaRPr>
+          </a:p>
+        </p:txBody>
+      </p:sp>
+      <p:sp>
+        <p:nvSpPr>
+          <p:cNvPr id="51" name="Google Shape;51;p3"/>
+          <p:cNvSpPr/>
+          <p:nvPr/>
+        </p:nvSpPr>
+        <p:spPr>
+          <a:xfrm>
+            <a:off x="544108" y="1961282"/>
+            <a:ext cx="8817783" cy="646331"/>
+          </a:xfrm>
+          <a:prstGeom prst="rect">
+            <a:avLst/>
+          </a:prstGeom>
+          <a:noFill/>
+          <a:ln>
+            <a:noFill/>
+          </a:ln>
+        </p:spPr>
+        <p:txBody>
+          <a:bodyPr spcFirstLastPara="1" wrap="square" lIns="91425" tIns="45700" rIns="91425" bIns="45700" anchor="t" anchorCtr="0">
+            <a:spAutoFit/>
+          </a:bodyPr>
+          <a:lstStyle/>
+          <a:p>
+            <a:pPr marL="0" marR="0" lvl="0" indent="0" algn="ctr" rtl="0">
+              <a:spcBef>
+                <a:spcPts val="0"/>
+              </a:spcBef>
+              <a:spcAft>
+                <a:spcPts val="0"/>
+              </a:spcAft>
+              <a:buNone/>
+            </a:pPr>
+            <a:r>
+              <a:rPr lang="ja-JP" sz="1200" b="1">
+                <a:solidFill>
+                  <a:schemeClr val="dk1"/>
+                </a:solidFill>
+                <a:latin typeface="メイリオ"/>
+                <a:ea typeface="Meiryo"/>
+                <a:cs typeface="Meiryo"/>
+                <a:sym typeface="Meiryo"/>
+              </a:rPr>
+              <a:t>LINEシリアルコードスタンプに限り、クリエイティブの基準が3点緩和されている。</a:t>
+            </a:r>
+            <a:endParaRPr sz="1200" b="1">
+              <a:solidFill>
+                <a:schemeClr val="dk1"/>
+              </a:solidFill>
+              <a:latin typeface="Meiryo"/>
+              <a:ea typeface="Meiryo"/>
+              <a:cs typeface="Meiryo"/>
+              <a:sym typeface="Meiryo"/>
+            </a:endParaRPr>
+          </a:p>
+          <a:p>
+            <a:pPr marL="0" marR="0" lvl="0" indent="0" algn="ctr" rtl="0">
+              <a:spcBef>
+                <a:spcPts val="0"/>
+              </a:spcBef>
+              <a:spcAft>
+                <a:spcPts val="0"/>
+              </a:spcAft>
+              <a:buNone/>
+            </a:pPr>
+            <a:r>
+              <a:rPr lang="ja-JP" sz="1200" b="1">
+                <a:solidFill>
+                  <a:schemeClr val="dk1"/>
+                </a:solidFill>
+                <a:latin typeface="メイリオ"/>
+                <a:ea typeface="Meiryo"/>
+                <a:cs typeface="Meiryo"/>
+                <a:sym typeface="Meiryo"/>
+              </a:rPr>
+              <a:t>審査から開始までの流れと、コード発行・入稿の締切を押さえておく。</a:t>
+            </a:r>
+            <a:endParaRPr/>
+          </a:p>
+          <a:p>
+            <a:pPr marL="0" marR="0" lvl="0" indent="0" algn="ctr" rtl="0">
+              <a:spcBef>
+                <a:spcPts val="0"/>
+              </a:spcBef>
+              <a:spcAft>
+                <a:spcPts val="0"/>
+              </a:spcAft>
+              <a:buNone/>
+            </a:pPr>
+            <a:r>
+              <a:rPr lang="ja-JP" sz="1200" b="1">
+                <a:solidFill>
+                  <a:schemeClr val="dk1"/>
+                </a:solidFill>
+                <a:latin typeface="メイリオ"/>
+                <a:ea typeface="Meiryo"/>
+                <a:cs typeface="Meiryo"/>
+                <a:sym typeface="Meiryo"/>
+              </a:rPr>
+              <a:t>詳細は「LINEシリアルコードスタンプ 進行ガイド（2026年10月版）」に記載。</a:t>
             </a:r>
             <a:endParaRPr sz="1400" b="1">
               <a:solidFill>
@@ -13719,8 +15393,8 @@
         </p:nvSpPr>
         <p:spPr>
           <a:xfrm>
-            <a:off x="548640" y="3127248"/>
-            <a:ext cx="8814816" cy="1481328"/>
+            <a:off x="548640" y="3217876"/>
+            <a:ext cx="8814816" cy="1476883"/>
           </a:xfrm>
           <a:prstGeom prst="roundRect">
             <a:avLst>
@@ -13763,7 +15437,7 @@
                 </a:solidFill>
                 <a:latin typeface="メイリオ"/>
               </a:rPr>
-              <a:t>告知してよい場所</a:t>
+              <a:t>クリエイティブの基準緩和（この商品だけ）</a:t>
             </a:r>
           </a:p>
           <a:p>
@@ -13782,7 +15456,7 @@
                 </a:solidFill>
                 <a:latin typeface="メイリオ"/>
               </a:rPr>
-              <a:t>○ OK：広告主のLINE公式アカウント、広告主のアプリ、SNS、Web全般（LINEヤフー広告も可）、店頭POP・屋外広告</a:t>
+              <a:t>・飲酒表現：可（「お酒は20歳になってから」の注記が必須）</a:t>
             </a:r>
           </a:p>
           <a:p>
@@ -13801,7 +15475,26 @@
                 </a:solidFill>
                 <a:latin typeface="メイリオ"/>
               </a:rPr>
-              <a:t>× NG：LINEヤフーが持つアプリでの告知（スタンプショップ、LINEミニアプリ、LINEヤフーの公式アカウントなど）</a:t>
+              <a:t>・実写素材：タレントの写真や、CM・ポスター素材の転用が可（品質基準あり。肖像権の処理は広告主側）</a:t>
+            </a:r>
+          </a:p>
+          <a:p>
+            <a:pPr algn="l">
+              <a:lnSpc>
+                <a:spcPct val="115000"/>
+              </a:lnSpc>
+              <a:spcBef>
+                <a:spcPts val="400"/>
+              </a:spcBef>
+            </a:pPr>
+            <a:r>
+              <a:rPr sz="1300">
+                <a:solidFill>
+                  <a:srgbClr val="333333"/>
+                </a:solidFill>
+                <a:latin typeface="メイリオ"/>
+              </a:rPr>
+              <a:t>・PR要素（ロゴ・商品パッケージ）：通常は全体の1/4までのところ、個数の制限なし</a:t>
             </a:r>
           </a:p>
         </p:txBody>
@@ -13814,1636 +15507,8 @@
         </p:nvSpPr>
         <p:spPr>
           <a:xfrm>
-            <a:off x="548640" y="4754880"/>
-            <a:ext cx="8814816" cy="1618488"/>
-          </a:xfrm>
-          <a:prstGeom prst="roundRect">
-            <a:avLst>
-              <a:gd name="adj" fmla="val 6000"/>
-            </a:avLst>
-          </a:prstGeom>
-          <a:solidFill>
-            <a:srgbClr val="EAF0FA"/>
-          </a:solidFill>
-          <a:ln w="12700">
-            <a:solidFill>
-              <a:srgbClr val="3467B2"/>
-            </a:solidFill>
-          </a:ln>
-          <a:effectLst/>
-        </p:spPr>
-        <p:style>
-          <a:lnRef idx="1">
-            <a:schemeClr val="accent1"/>
-          </a:lnRef>
-          <a:fillRef idx="3">
-            <a:schemeClr val="accent1"/>
-          </a:fillRef>
-          <a:effectRef idx="2">
-            <a:schemeClr val="accent1"/>
-          </a:effectRef>
-          <a:fontRef idx="minor">
-            <a:schemeClr val="lt1"/>
-          </a:fontRef>
-        </p:style>
-        <p:txBody>
-          <a:bodyPr wrap="square" lIns="228600" rIns="182880" rtlCol="0" anchor="ctr"/>
-          <a:lstStyle/>
-          <a:p>
-            <a:pPr algn="l"/>
-            <a:r>
-              <a:rPr sz="1900" b="1">
-                <a:solidFill>
-                  <a:srgbClr val="15133D"/>
-                </a:solidFill>
-                <a:latin typeface="メイリオ"/>
-              </a:rPr>
-              <a:t>コードを渡す条件</a:t>
-            </a:r>
-          </a:p>
-          <a:p>
-            <a:pPr algn="l">
-              <a:lnSpc>
-                <a:spcPct val="115000"/>
-              </a:lnSpc>
-              <a:spcBef>
-                <a:spcPts val="400"/>
-              </a:spcBef>
-            </a:pPr>
-            <a:r>
-              <a:rPr sz="1300">
-                <a:solidFill>
-                  <a:srgbClr val="333333"/>
-                </a:solidFill>
-                <a:latin typeface="メイリオ"/>
-              </a:rPr>
-              <a:t>○ OK：Webでの行動（商品購入など）、店頭での行動（来店・購入）</a:t>
-            </a:r>
-          </a:p>
-          <a:p>
-            <a:pPr algn="l">
-              <a:lnSpc>
-                <a:spcPct val="115000"/>
-              </a:lnSpc>
-              <a:spcBef>
-                <a:spcPts val="400"/>
-              </a:spcBef>
-            </a:pPr>
-            <a:r>
-              <a:rPr sz="1300">
-                <a:solidFill>
-                  <a:srgbClr val="333333"/>
-                </a:solidFill>
-                <a:latin typeface="メイリオ"/>
-              </a:rPr>
-              <a:t>× NG：LINEアプリ内での行動（LINE公式アカウントの友だち追加・アンケート回答、LINEミニアプリ内の行動）、広告主アプリ内の行動（会員登録など）、アプリのダウンロードが必須になるもの</a:t>
-            </a:r>
-          </a:p>
-          <a:p>
-            <a:pPr algn="l">
-              <a:lnSpc>
-                <a:spcPct val="115000"/>
-              </a:lnSpc>
-              <a:spcBef>
-                <a:spcPts val="400"/>
-              </a:spcBef>
-            </a:pPr>
-            <a:r>
-              <a:rPr sz="1300">
-                <a:solidFill>
-                  <a:srgbClr val="333333"/>
-                </a:solidFill>
-                <a:latin typeface="メイリオ"/>
-              </a:rPr>
-              <a:t>※ スタンプをもらうまでの流れに、アプリへの遷移が少しでも入るとNG</a:t>
-            </a:r>
-          </a:p>
-        </p:txBody>
-      </p:sp>
-    </p:spTree>
-  </p:cSld>
-  <p:clrMapOvr>
-    <a:masterClrMapping/>
-  </p:clrMapOvr>
-</p:sld>
-</file>
-
-<file path=ppt/slides/slide7.xml><?xml version="1.0" encoding="utf-8"?>
-<p:sld xmlns:a="http://schemas.openxmlformats.org/drawingml/2006/main" xmlns:p="http://schemas.openxmlformats.org/presentationml/2006/main" xmlns:r="http://schemas.openxmlformats.org/officeDocument/2006/relationships">
-  <p:cSld>
-    <p:spTree>
-      <p:nvGrpSpPr>
-        <p:cNvPr id="1" name=""/>
-        <p:cNvGrpSpPr/>
-        <p:nvPr/>
-      </p:nvGrpSpPr>
-      <p:grpSpPr/>
-      <p:sp>
-        <p:nvSpPr>
-          <p:cNvPr id="40" name="Google Shape;40;p3"/>
-          <p:cNvSpPr/>
-          <p:nvPr/>
-        </p:nvSpPr>
-        <p:spPr>
-          <a:xfrm>
-            <a:off x="292801" y="730955"/>
-            <a:ext cx="1296144" cy="435690"/>
-          </a:xfrm>
-          <a:prstGeom prst="rect">
-            <a:avLst/>
-          </a:prstGeom>
-          <a:solidFill>
-            <a:schemeClr val="dk2"/>
-          </a:solidFill>
-          <a:ln w="9525" cap="flat" cmpd="sng">
-            <a:solidFill>
-              <a:srgbClr val="4A7DBA"/>
-            </a:solidFill>
-            <a:prstDash val="solid"/>
-            <a:round/>
-            <a:headEnd type="none" w="sm" len="sm"/>
-            <a:tailEnd type="none" w="sm" len="sm"/>
-          </a:ln>
-        </p:spPr>
-        <p:txBody>
-          <a:bodyPr spcFirstLastPara="1" wrap="square" lIns="91425" tIns="45700" rIns="91425" bIns="45700" anchor="ctr" anchorCtr="0">
-            <a:noAutofit/>
-          </a:bodyPr>
-          <a:lstStyle/>
-          <a:p>
-            <a:pPr marL="0" marR="0" lvl="0" indent="0" algn="ctr" rtl="0">
-              <a:spcBef>
-                <a:spcPts val="0"/>
-              </a:spcBef>
-              <a:spcAft>
-                <a:spcPts val="0"/>
-              </a:spcAft>
-              <a:buNone/>
-            </a:pPr>
-            <a:r>
-              <a:rPr lang="ja-JP" sz="1800" b="0" i="0" u="none" strike="noStrike" cap="none">
-                <a:solidFill>
-                  <a:schemeClr val="lt1"/>
-                </a:solidFill>
-                <a:latin typeface="メイリオ"/>
-                <a:ea typeface="Meiryo"/>
-                <a:cs typeface="Meiryo"/>
-                <a:sym typeface="Meiryo"/>
-              </a:rPr>
-              <a:t>対象業界</a:t>
-            </a:r>
-            <a:endParaRPr/>
-          </a:p>
-        </p:txBody>
-      </p:sp>
-      <p:sp>
-        <p:nvSpPr>
-          <p:cNvPr id="41" name="Google Shape;41;p3"/>
-          <p:cNvSpPr/>
-          <p:nvPr/>
-        </p:nvSpPr>
-        <p:spPr>
-          <a:xfrm>
-            <a:off x="7560840" y="730955"/>
-            <a:ext cx="829618" cy="435690"/>
-          </a:xfrm>
-          <a:prstGeom prst="rect">
-            <a:avLst/>
-          </a:prstGeom>
-          <a:solidFill>
-            <a:schemeClr val="bg1"/>
-          </a:solidFill>
-          <a:ln w="9525" cap="flat" cmpd="sng">
-            <a:solidFill>
-              <a:srgbClr val="4F81BD"/>
-            </a:solidFill>
-            <a:prstDash val="sysDash"/>
-            <a:round/>
-            <a:headEnd type="none" w="sm" len="sm"/>
-            <a:tailEnd type="none" w="sm" len="sm"/>
-          </a:ln>
-        </p:spPr>
-        <p:txBody>
-          <a:bodyPr spcFirstLastPara="1" wrap="square" lIns="91425" tIns="45700" rIns="91425" bIns="45700" anchor="ctr" anchorCtr="0">
-            <a:noAutofit/>
-          </a:bodyPr>
-          <a:lstStyle/>
-          <a:p>
-            <a:pPr marL="0" marR="0" lvl="0" indent="0" algn="ctr" rtl="0">
-              <a:spcBef>
-                <a:spcPts val="0"/>
-              </a:spcBef>
-              <a:spcAft>
-                <a:spcPts val="0"/>
-              </a:spcAft>
-              <a:buNone/>
-            </a:pPr>
-            <a:r>
-              <a:rPr lang="ja-JP" sz="1200" b="0" i="0" u="none" strike="noStrike" cap="none">
-                <a:solidFill>
-                  <a:schemeClr val="dk1"/>
-                </a:solidFill>
-                <a:latin typeface="メイリオ"/>
-                <a:ea typeface="Meiryo"/>
-                <a:cs typeface="Meiryo"/>
-                <a:sym typeface="Meiryo"/>
-              </a:rPr>
-              <a:t>その他</a:t>
-            </a:r>
-            <a:endParaRPr sz="1200" b="0" i="0" u="none" strike="noStrike" cap="none">
-              <a:solidFill>
-                <a:schemeClr val="dk1"/>
-              </a:solidFill>
-              <a:latin typeface="Meiryo"/>
-              <a:ea typeface="Meiryo"/>
-              <a:cs typeface="Meiryo"/>
-              <a:sym typeface="Meiryo"/>
-            </a:endParaRPr>
-          </a:p>
-        </p:txBody>
-      </p:sp>
-      <p:sp>
-        <p:nvSpPr>
-          <p:cNvPr id="42" name="Google Shape;42;p3"/>
-          <p:cNvSpPr/>
-          <p:nvPr/>
-        </p:nvSpPr>
-        <p:spPr>
-          <a:xfrm>
-            <a:off x="6679050" y="730955"/>
-            <a:ext cx="829618" cy="435690"/>
-          </a:xfrm>
-          <a:prstGeom prst="rect">
-            <a:avLst/>
-          </a:prstGeom>
-          <a:solidFill>
-            <a:schemeClr val="tx2"/>
-          </a:solidFill>
-          <a:ln w="9525" cap="flat" cmpd="sng">
-            <a:solidFill>
-              <a:srgbClr val="4F81BD"/>
-            </a:solidFill>
-            <a:prstDash val="solid"/>
-            <a:round/>
-            <a:headEnd type="none" w="sm" len="sm"/>
-            <a:tailEnd type="none" w="sm" len="sm"/>
-          </a:ln>
-        </p:spPr>
-        <p:txBody>
-          <a:bodyPr spcFirstLastPara="1" wrap="square" lIns="91425" tIns="45700" rIns="91425" bIns="45700" anchor="ctr" anchorCtr="0">
-            <a:noAutofit/>
-          </a:bodyPr>
-          <a:lstStyle/>
-          <a:p>
-            <a:pPr marL="0" marR="0" lvl="0" indent="0" algn="ctr" rtl="0">
-              <a:spcBef>
-                <a:spcPts val="0"/>
-              </a:spcBef>
-              <a:spcAft>
-                <a:spcPts val="0"/>
-              </a:spcAft>
-              <a:buNone/>
-            </a:pPr>
-            <a:r>
-              <a:rPr lang="ja-JP" sz="1000" b="0" i="0" u="none" strike="noStrike" cap="none">
-                <a:solidFill>
-                  <a:schemeClr val="dk1"/>
-                </a:solidFill>
-                <a:latin typeface="メイリオ"/>
-                <a:ea typeface="Meiryo"/>
-                <a:cs typeface="Meiryo"/>
-                <a:sym typeface="Meiryo"/>
-              </a:rPr>
-              <a:t>オプション</a:t>
-            </a:r>
-            <a:endParaRPr sz="1000" b="0" i="0" u="none" strike="noStrike" cap="none">
-              <a:solidFill>
-                <a:schemeClr val="dk1"/>
-              </a:solidFill>
-              <a:latin typeface="Meiryo"/>
-              <a:ea typeface="Meiryo"/>
-              <a:cs typeface="Meiryo"/>
-              <a:sym typeface="Meiryo"/>
-            </a:endParaRPr>
-          </a:p>
-          <a:p>
-            <a:pPr marL="0" marR="0" lvl="0" indent="0" algn="ctr" rtl="0">
-              <a:spcBef>
-                <a:spcPts val="0"/>
-              </a:spcBef>
-              <a:spcAft>
-                <a:spcPts val="0"/>
-              </a:spcAft>
-              <a:buNone/>
-            </a:pPr>
-            <a:r>
-              <a:rPr lang="ja-JP" sz="1000" b="0" i="0" u="none" strike="noStrike" cap="none">
-                <a:solidFill>
-                  <a:schemeClr val="dk1"/>
-                </a:solidFill>
-                <a:latin typeface="メイリオ"/>
-                <a:ea typeface="Meiryo"/>
-                <a:cs typeface="Meiryo"/>
-                <a:sym typeface="Meiryo"/>
-              </a:rPr>
-              <a:t>商材</a:t>
-            </a:r>
-            <a:endParaRPr/>
-          </a:p>
-        </p:txBody>
-      </p:sp>
-      <p:sp>
-        <p:nvSpPr>
-          <p:cNvPr id="43" name="Google Shape;43;p3"/>
-          <p:cNvSpPr/>
-          <p:nvPr/>
-        </p:nvSpPr>
-        <p:spPr>
-          <a:xfrm>
-            <a:off x="1594068" y="730955"/>
-            <a:ext cx="2926883" cy="435690"/>
-          </a:xfrm>
-          <a:prstGeom prst="rect">
-            <a:avLst/>
-          </a:prstGeom>
-          <a:noFill/>
-          <a:ln w="9525" cap="flat" cmpd="sng">
-            <a:solidFill>
-              <a:srgbClr val="4A7DBA"/>
-            </a:solidFill>
-            <a:prstDash val="solid"/>
-            <a:round/>
-            <a:headEnd type="none" w="sm" len="sm"/>
-            <a:tailEnd type="none" w="sm" len="sm"/>
-          </a:ln>
-        </p:spPr>
-        <p:txBody>
-          <a:bodyPr spcFirstLastPara="1" wrap="square" lIns="91425" tIns="45700" rIns="91425" bIns="45700" anchor="ctr" anchorCtr="0">
-            <a:noAutofit/>
-          </a:bodyPr>
-          <a:lstStyle/>
-          <a:p>
-            <a:pPr marL="0" marR="0" lvl="0" indent="0" algn="ctr" rtl="0">
-              <a:spcBef>
-                <a:spcPts val="0"/>
-              </a:spcBef>
-              <a:spcAft>
-                <a:spcPts val="0"/>
-              </a:spcAft>
-              <a:buNone/>
-            </a:pPr>
-            <a:r>
-              <a:rPr lang="ja-JP" sz="1300" b="0" i="0" u="none" strike="noStrike" cap="none">
-                <a:solidFill>
-                  <a:schemeClr val="dk1"/>
-                </a:solidFill>
-                <a:latin typeface="メイリオ"/>
-                <a:ea typeface="Meiryo"/>
-                <a:cs typeface="Meiryo"/>
-                <a:sym typeface="Meiryo"/>
-              </a:rPr>
-              <a:t>食品・飲料メーカー、</a:t>
-            </a:r>
-            <a:br>
-              <a:rPr lang="ja-JP" sz="1300" b="0" i="0" u="none" strike="noStrike" cap="none">
-                <a:solidFill>
-                  <a:schemeClr val="dk1"/>
-                </a:solidFill>
-                <a:latin typeface="メイリオ"/>
-                <a:ea typeface="Meiryo"/>
-                <a:cs typeface="Meiryo"/>
-                <a:sym typeface="Meiryo"/>
-              </a:rPr>
-            </a:br>
-            <a:r>
-              <a:rPr lang="ja-JP" sz="1300" b="0" i="0" u="none" strike="noStrike" cap="none">
-                <a:solidFill>
-                  <a:schemeClr val="dk1"/>
-                </a:solidFill>
-                <a:latin typeface="メイリオ"/>
-                <a:ea typeface="Meiryo"/>
-                <a:cs typeface="Meiryo"/>
-                <a:sym typeface="Meiryo"/>
-              </a:rPr>
-              <a:t>小売・コンビニ</a:t>
-            </a:r>
-            <a:endParaRPr/>
-          </a:p>
-        </p:txBody>
-      </p:sp>
-      <p:sp>
-        <p:nvSpPr>
-          <p:cNvPr id="44" name="Google Shape;44;p3"/>
-          <p:cNvSpPr txBox="1"/>
-          <p:nvPr/>
-        </p:nvSpPr>
-        <p:spPr>
-          <a:xfrm>
-            <a:off x="3296816" y="6597352"/>
-            <a:ext cx="6209091" cy="215444"/>
-          </a:xfrm>
-          <a:prstGeom prst="rect">
-            <a:avLst/>
-          </a:prstGeom>
-          <a:noFill/>
-          <a:ln>
-            <a:noFill/>
-          </a:ln>
-        </p:spPr>
-        <p:txBody>
-          <a:bodyPr spcFirstLastPara="1" wrap="square" lIns="91425" tIns="45700" rIns="91425" bIns="45700" anchor="t" anchorCtr="0">
-            <a:spAutoFit/>
-          </a:bodyPr>
-          <a:lstStyle/>
-          <a:p>
-            <a:pPr marL="0" marR="0" lvl="0" indent="0" algn="l" rtl="0">
-              <a:spcBef>
-                <a:spcPts val="0"/>
-              </a:spcBef>
-              <a:spcAft>
-                <a:spcPts val="0"/>
-              </a:spcAft>
-              <a:buNone/>
-            </a:pPr>
-            <a:r>
-              <a:rPr lang="ja-JP" sz="800" b="0" i="0" u="none" strike="noStrike" cap="none">
-                <a:solidFill>
-                  <a:schemeClr val="lt1"/>
-                </a:solidFill>
-                <a:latin typeface="メイリオ"/>
-                <a:ea typeface="Meiryo"/>
-                <a:cs typeface="Meiryo"/>
-                <a:sym typeface="Meiryo"/>
-              </a:rPr>
-              <a:t>出典：代理店情報</a:t>
-            </a:r>
-            <a:endParaRPr sz="800">
-              <a:solidFill>
-                <a:schemeClr val="lt1"/>
-              </a:solidFill>
-              <a:latin typeface="Meiryo"/>
-              <a:ea typeface="Meiryo"/>
-              <a:cs typeface="Meiryo"/>
-              <a:sym typeface="Meiryo"/>
-            </a:endParaRPr>
-          </a:p>
-        </p:txBody>
-      </p:sp>
-      <p:sp>
-        <p:nvSpPr>
-          <p:cNvPr id="45" name="Google Shape;45;p3"/>
-          <p:cNvSpPr/>
-          <p:nvPr/>
-        </p:nvSpPr>
-        <p:spPr>
-          <a:xfrm>
-            <a:off x="0" y="1234746"/>
-            <a:ext cx="9906000" cy="672259"/>
-          </a:xfrm>
-          <a:prstGeom prst="rect">
-            <a:avLst/>
-          </a:prstGeom>
-          <a:solidFill>
-            <a:srgbClr val="C5D8F1"/>
-          </a:solidFill>
-          <a:ln>
-            <a:noFill/>
-          </a:ln>
-        </p:spPr>
-        <p:txBody>
-          <a:bodyPr spcFirstLastPara="1" wrap="square" lIns="91425" tIns="45700" rIns="91425" bIns="45700" anchor="ctr" anchorCtr="0">
-            <a:noAutofit/>
-          </a:bodyPr>
-          <a:lstStyle/>
-          <a:p>
-            <a:pPr marL="0" marR="0" lvl="0" indent="0" algn="ctr" rtl="0">
-              <a:spcBef>
-                <a:spcPts val="0"/>
-              </a:spcBef>
-              <a:spcAft>
-                <a:spcPts val="0"/>
-              </a:spcAft>
-              <a:buNone/>
-            </a:pPr>
-            <a:r>
-              <a:rPr lang="ja-JP" sz="1600" b="1">
-                <a:solidFill>
-                  <a:srgbClr val="004DE6"/>
-                </a:solidFill>
-                <a:latin typeface="メイリオ"/>
-                <a:ea typeface="Meiryo"/>
-                <a:cs typeface="Meiryo"/>
-                <a:sym typeface="Meiryo"/>
-              </a:rPr>
-              <a:t>　　　　　　</a:t>
-            </a:r>
-            <a:endParaRPr sz="1800" b="1">
-              <a:solidFill>
-                <a:srgbClr val="004DE6"/>
-              </a:solidFill>
-              <a:latin typeface="Meiryo"/>
-              <a:ea typeface="Meiryo"/>
-              <a:cs typeface="Meiryo"/>
-              <a:sym typeface="Meiryo"/>
-            </a:endParaRPr>
-          </a:p>
-        </p:txBody>
-      </p:sp>
-      <p:sp>
-        <p:nvSpPr>
-          <p:cNvPr id="46" name="Google Shape;46;p3"/>
-          <p:cNvSpPr/>
-          <p:nvPr/>
-        </p:nvSpPr>
-        <p:spPr>
-          <a:xfrm>
-            <a:off x="1089832" y="1437370"/>
-            <a:ext cx="7031520" cy="338554"/>
-          </a:xfrm>
-          <a:prstGeom prst="rect">
-            <a:avLst/>
-          </a:prstGeom>
-          <a:noFill/>
-          <a:ln>
-            <a:noFill/>
-          </a:ln>
-        </p:spPr>
-        <p:txBody>
-          <a:bodyPr spcFirstLastPara="1" wrap="square" lIns="91425" tIns="45700" rIns="91425" bIns="45700" anchor="t" anchorCtr="0">
-            <a:spAutoFit/>
-          </a:bodyPr>
-          <a:lstStyle/>
-          <a:p>
-            <a:pPr marL="0" marR="0" lvl="0" indent="0" algn="l" rtl="0">
-              <a:spcBef>
-                <a:spcPts val="0"/>
-              </a:spcBef>
-              <a:spcAft>
-                <a:spcPts val="0"/>
-              </a:spcAft>
-              <a:buNone/>
-            </a:pPr>
-            <a:r>
-              <a:rPr lang="ja-JP" sz="1600" b="1">
-                <a:solidFill>
-                  <a:srgbClr val="004DE6"/>
-                </a:solidFill>
-                <a:latin typeface="メイリオ"/>
-                <a:ea typeface="Meiryo"/>
-                <a:cs typeface="Meiryo"/>
-                <a:sym typeface="Meiryo"/>
-              </a:rPr>
-              <a:t>【LINEシリアルコードスタンプ】クリエイティブ基準の緩和と進め方</a:t>
-            </a:r>
-            <a:endParaRPr sz="1600" b="1">
-              <a:solidFill>
-                <a:srgbClr val="004DE6"/>
-              </a:solidFill>
-              <a:latin typeface="Meiryo"/>
-              <a:ea typeface="Meiryo"/>
-              <a:cs typeface="Meiryo"/>
-              <a:sym typeface="Meiryo"/>
-            </a:endParaRPr>
-          </a:p>
-        </p:txBody>
-      </p:sp>
-      <p:sp>
-        <p:nvSpPr>
-          <p:cNvPr id="47" name="Google Shape;47;p3"/>
-          <p:cNvSpPr txBox="1"/>
-          <p:nvPr/>
-        </p:nvSpPr>
-        <p:spPr>
-          <a:xfrm>
-            <a:off x="182880" y="88175"/>
-            <a:ext cx="7512385" cy="365091"/>
-          </a:xfrm>
-          <a:prstGeom prst="rect">
-            <a:avLst/>
-          </a:prstGeom>
-          <a:noFill/>
-          <a:ln>
-            <a:noFill/>
-          </a:ln>
-        </p:spPr>
-        <p:txBody>
-          <a:bodyPr spcFirstLastPara="1" wrap="square" lIns="91425" tIns="72000" rIns="91425" bIns="45700" anchor="t" anchorCtr="0">
-            <a:spAutoFit/>
-          </a:bodyPr>
-          <a:lstStyle/>
-          <a:p>
-            <a:pPr marL="0" marR="0" lvl="0" indent="0" algn="l" rtl="0">
-              <a:spcBef>
-                <a:spcPts val="0"/>
-              </a:spcBef>
-              <a:spcAft>
-                <a:spcPts val="0"/>
-              </a:spcAft>
-              <a:buClr>
-                <a:schemeClr val="dk1"/>
-              </a:buClr>
-              <a:buSzPts val="1600"/>
-              <a:buFont typeface="Arial"/>
-              <a:buNone/>
-            </a:pPr>
-            <a:r>
-              <a:rPr lang="ja-JP" sz="1600" b="0" u="none">
-                <a:solidFill>
-                  <a:schemeClr val="dk1"/>
-                </a:solidFill>
-                <a:latin typeface="メイリオ"/>
-                <a:ea typeface="Meiryo"/>
-                <a:cs typeface="Meiryo"/>
-                <a:sym typeface="Meiryo"/>
-              </a:rPr>
-              <a:t>    今後のアップデート情報</a:t>
-            </a:r>
-            <a:endParaRPr sz="1600" b="0" u="none">
-              <a:solidFill>
-                <a:schemeClr val="dk1"/>
-              </a:solidFill>
-              <a:latin typeface="Meiryo"/>
-              <a:ea typeface="Meiryo"/>
-              <a:cs typeface="Meiryo"/>
-              <a:sym typeface="Meiryo"/>
-            </a:endParaRPr>
-          </a:p>
-        </p:txBody>
-      </p:sp>
-      <p:sp>
-        <p:nvSpPr>
-          <p:cNvPr id="48" name="Google Shape;48;p3"/>
-          <p:cNvSpPr/>
-          <p:nvPr/>
-        </p:nvSpPr>
-        <p:spPr>
-          <a:xfrm>
-            <a:off x="5797260" y="730955"/>
-            <a:ext cx="829618" cy="435690"/>
-          </a:xfrm>
-          <a:prstGeom prst="rect">
-            <a:avLst/>
-          </a:prstGeom>
-          <a:solidFill>
-            <a:schemeClr val="bg1"/>
-          </a:solidFill>
-          <a:ln w="9525" cap="flat" cmpd="sng">
-            <a:solidFill>
-              <a:srgbClr val="4F81BD"/>
-            </a:solidFill>
-            <a:prstDash val="sysDash"/>
-            <a:round/>
-            <a:headEnd type="none" w="sm" len="sm"/>
-            <a:tailEnd type="none" w="sm" len="sm"/>
-          </a:ln>
-        </p:spPr>
-        <p:txBody>
-          <a:bodyPr spcFirstLastPara="1" wrap="square" lIns="91425" tIns="45700" rIns="91425" bIns="45700" anchor="ctr" anchorCtr="0">
-            <a:noAutofit/>
-          </a:bodyPr>
-          <a:lstStyle/>
-          <a:p>
-            <a:pPr marL="0" marR="0" lvl="0" indent="0" algn="ctr" rtl="0">
-              <a:spcBef>
-                <a:spcPts val="0"/>
-              </a:spcBef>
-              <a:spcAft>
-                <a:spcPts val="0"/>
-              </a:spcAft>
-              <a:buClr>
-                <a:schemeClr val="dk1"/>
-              </a:buClr>
-              <a:buSzPts val="1000"/>
-              <a:buFont typeface="Meiryo"/>
-              <a:buNone/>
-            </a:pPr>
-            <a:r>
-              <a:rPr lang="ja-JP" sz="1000">
-                <a:solidFill>
-                  <a:schemeClr val="dk1"/>
-                </a:solidFill>
-                <a:latin typeface="メイリオ"/>
-                <a:ea typeface="Meiryo"/>
-                <a:cs typeface="Meiryo"/>
-                <a:sym typeface="Meiryo"/>
-              </a:rPr>
-              <a:t>開発</a:t>
-            </a:r>
-            <a:endParaRPr sz="1000">
-              <a:solidFill>
-                <a:schemeClr val="dk1"/>
-              </a:solidFill>
-              <a:latin typeface="Meiryo"/>
-              <a:ea typeface="Meiryo"/>
-              <a:cs typeface="Meiryo"/>
-              <a:sym typeface="Meiryo"/>
-            </a:endParaRPr>
-          </a:p>
-          <a:p>
-            <a:pPr marL="0" marR="0" lvl="0" indent="0" algn="ctr" rtl="0">
-              <a:spcBef>
-                <a:spcPts val="0"/>
-              </a:spcBef>
-              <a:spcAft>
-                <a:spcPts val="0"/>
-              </a:spcAft>
-              <a:buClr>
-                <a:schemeClr val="dk1"/>
-              </a:buClr>
-              <a:buSzPts val="1000"/>
-              <a:buFont typeface="Meiryo"/>
-              <a:buNone/>
-            </a:pPr>
-            <a:r>
-              <a:rPr lang="ja-JP" sz="1000">
-                <a:solidFill>
-                  <a:schemeClr val="dk1"/>
-                </a:solidFill>
-                <a:latin typeface="メイリオ"/>
-                <a:ea typeface="Meiryo"/>
-                <a:cs typeface="Meiryo"/>
-                <a:sym typeface="Meiryo"/>
-              </a:rPr>
-              <a:t>LINE API</a:t>
-            </a:r>
-            <a:endParaRPr sz="1000">
-              <a:solidFill>
-                <a:schemeClr val="dk1"/>
-              </a:solidFill>
-              <a:latin typeface="Meiryo"/>
-              <a:ea typeface="Meiryo"/>
-              <a:cs typeface="Meiryo"/>
-              <a:sym typeface="Meiryo"/>
-            </a:endParaRPr>
-          </a:p>
-        </p:txBody>
-      </p:sp>
-      <p:sp>
-        <p:nvSpPr>
-          <p:cNvPr id="49" name="Google Shape;49;p3"/>
-          <p:cNvSpPr/>
-          <p:nvPr/>
-        </p:nvSpPr>
-        <p:spPr>
-          <a:xfrm>
-            <a:off x="4915470" y="730955"/>
-            <a:ext cx="829618" cy="435690"/>
-          </a:xfrm>
-          <a:prstGeom prst="rect">
-            <a:avLst/>
-          </a:prstGeom>
-          <a:solidFill>
-            <a:schemeClr val="bg1"/>
-          </a:solidFill>
-          <a:ln w="9525" cap="flat" cmpd="sng">
-            <a:solidFill>
-              <a:srgbClr val="4F81BD"/>
-            </a:solidFill>
-            <a:prstDash val="sysDash"/>
-            <a:round/>
-            <a:headEnd type="none" w="sm" len="sm"/>
-            <a:tailEnd type="none" w="sm" len="sm"/>
-          </a:ln>
-        </p:spPr>
-        <p:txBody>
-          <a:bodyPr spcFirstLastPara="1" wrap="square" lIns="91425" tIns="45700" rIns="91425" bIns="45700" anchor="ctr" anchorCtr="0">
-            <a:noAutofit/>
-          </a:bodyPr>
-          <a:lstStyle/>
-          <a:p>
-            <a:pPr marL="0" marR="0" lvl="0" indent="0" algn="ctr" rtl="0">
-              <a:spcBef>
-                <a:spcPts val="0"/>
-              </a:spcBef>
-              <a:spcAft>
-                <a:spcPts val="0"/>
-              </a:spcAft>
-              <a:buNone/>
-            </a:pPr>
-            <a:r>
-              <a:rPr lang="ja-JP" sz="1000">
-                <a:solidFill>
-                  <a:schemeClr val="dk1"/>
-                </a:solidFill>
-                <a:latin typeface="メイリオ"/>
-                <a:ea typeface="Meiryo"/>
-                <a:cs typeface="Meiryo"/>
-                <a:sym typeface="Meiryo"/>
-              </a:rPr>
-              <a:t>LINE公式アカウント</a:t>
-            </a:r>
-            <a:endParaRPr sz="1000">
-              <a:solidFill>
-                <a:schemeClr val="dk1"/>
-              </a:solidFill>
-              <a:latin typeface="Meiryo"/>
-              <a:ea typeface="Meiryo"/>
-              <a:cs typeface="Meiryo"/>
-              <a:sym typeface="Meiryo"/>
-            </a:endParaRPr>
-          </a:p>
-        </p:txBody>
-      </p:sp>
-      <p:sp>
-        <p:nvSpPr>
-          <p:cNvPr id="50" name="Google Shape;50;p3"/>
-          <p:cNvSpPr/>
-          <p:nvPr/>
-        </p:nvSpPr>
-        <p:spPr>
-          <a:xfrm>
-            <a:off x="0" y="1890267"/>
-            <a:ext cx="9906000" cy="733579"/>
-          </a:xfrm>
-          <a:prstGeom prst="rect">
-            <a:avLst/>
-          </a:prstGeom>
-          <a:solidFill>
-            <a:srgbClr val="F2F2F2"/>
-          </a:solidFill>
-          <a:ln>
-            <a:noFill/>
-          </a:ln>
-        </p:spPr>
-        <p:txBody>
-          <a:bodyPr spcFirstLastPara="1" wrap="square" lIns="91425" tIns="45700" rIns="91425" bIns="45700" anchor="ctr" anchorCtr="0">
-            <a:noAutofit/>
-          </a:bodyPr>
-          <a:lstStyle/>
-          <a:p>
-            <a:pPr marL="0" marR="0" lvl="0" indent="0" algn="ctr" rtl="0">
-              <a:spcBef>
-                <a:spcPts val="0"/>
-              </a:spcBef>
-              <a:spcAft>
-                <a:spcPts val="0"/>
-              </a:spcAft>
-              <a:buNone/>
-            </a:pPr>
-            <a:endParaRPr sz="1200">
-              <a:solidFill>
-                <a:schemeClr val="dk1"/>
-              </a:solidFill>
-              <a:latin typeface="Meiryo"/>
-              <a:ea typeface="Meiryo"/>
-              <a:cs typeface="Meiryo"/>
-              <a:sym typeface="Meiryo"/>
-            </a:endParaRPr>
-          </a:p>
-        </p:txBody>
-      </p:sp>
-      <p:sp>
-        <p:nvSpPr>
-          <p:cNvPr id="51" name="Google Shape;51;p3"/>
-          <p:cNvSpPr/>
-          <p:nvPr/>
-        </p:nvSpPr>
-        <p:spPr>
-          <a:xfrm>
-            <a:off x="544108" y="1961282"/>
-            <a:ext cx="8817783" cy="646331"/>
-          </a:xfrm>
-          <a:prstGeom prst="rect">
-            <a:avLst/>
-          </a:prstGeom>
-          <a:noFill/>
-          <a:ln>
-            <a:noFill/>
-          </a:ln>
-        </p:spPr>
-        <p:txBody>
-          <a:bodyPr spcFirstLastPara="1" wrap="square" lIns="91425" tIns="45700" rIns="91425" bIns="45700" anchor="t" anchorCtr="0">
-            <a:spAutoFit/>
-          </a:bodyPr>
-          <a:lstStyle/>
-          <a:p>
-            <a:pPr marL="0" marR="0" lvl="0" indent="0" algn="ctr" rtl="0">
-              <a:spcBef>
-                <a:spcPts val="0"/>
-              </a:spcBef>
-              <a:spcAft>
-                <a:spcPts val="0"/>
-              </a:spcAft>
-              <a:buNone/>
-            </a:pPr>
-            <a:r>
-              <a:rPr lang="ja-JP" sz="1200" b="1">
-                <a:solidFill>
-                  <a:schemeClr val="dk1"/>
-                </a:solidFill>
-                <a:latin typeface="メイリオ"/>
-                <a:ea typeface="Meiryo"/>
-                <a:cs typeface="Meiryo"/>
-                <a:sym typeface="Meiryo"/>
-              </a:rPr>
-              <a:t>LINEシリアルコードスタンプに限り、クリエイティブの基準が3点緩和されている。</a:t>
-            </a:r>
-            <a:endParaRPr sz="1200" b="1">
-              <a:solidFill>
-                <a:schemeClr val="dk1"/>
-              </a:solidFill>
-              <a:latin typeface="Meiryo"/>
-              <a:ea typeface="Meiryo"/>
-              <a:cs typeface="Meiryo"/>
-              <a:sym typeface="Meiryo"/>
-            </a:endParaRPr>
-          </a:p>
-          <a:p>
-            <a:pPr marL="0" marR="0" lvl="0" indent="0" algn="ctr" rtl="0">
-              <a:spcBef>
-                <a:spcPts val="0"/>
-              </a:spcBef>
-              <a:spcAft>
-                <a:spcPts val="0"/>
-              </a:spcAft>
-              <a:buNone/>
-            </a:pPr>
-            <a:r>
-              <a:rPr lang="ja-JP" sz="1200" b="1">
-                <a:solidFill>
-                  <a:schemeClr val="dk1"/>
-                </a:solidFill>
-                <a:latin typeface="メイリオ"/>
-                <a:ea typeface="Meiryo"/>
-                <a:cs typeface="Meiryo"/>
-                <a:sym typeface="Meiryo"/>
-              </a:rPr>
-              <a:t>審査から開始までの流れと、コード発行・入稿の締切を押さえておく。</a:t>
-            </a:r>
-            <a:endParaRPr/>
-          </a:p>
-          <a:p>
-            <a:pPr marL="0" marR="0" lvl="0" indent="0" algn="ctr" rtl="0">
-              <a:spcBef>
-                <a:spcPts val="0"/>
-              </a:spcBef>
-              <a:spcAft>
-                <a:spcPts val="0"/>
-              </a:spcAft>
-              <a:buNone/>
-            </a:pPr>
-            <a:r>
-              <a:rPr lang="ja-JP" sz="1200" b="1">
-                <a:solidFill>
-                  <a:schemeClr val="dk1"/>
-                </a:solidFill>
-                <a:latin typeface="メイリオ"/>
-                <a:ea typeface="Meiryo"/>
-                <a:cs typeface="Meiryo"/>
-                <a:sym typeface="Meiryo"/>
-              </a:rPr>
-              <a:t>詳細は「LINEシリアルコードスタンプ 進行ガイド（2026年10月版）」に記載。</a:t>
-            </a:r>
-            <a:endParaRPr sz="1400" b="1">
-              <a:solidFill>
-                <a:schemeClr val="dk1"/>
-              </a:solidFill>
-              <a:latin typeface="Meiryo"/>
-              <a:ea typeface="Meiryo"/>
-              <a:cs typeface="Meiryo"/>
-              <a:sym typeface="Meiryo"/>
-            </a:endParaRPr>
-          </a:p>
-        </p:txBody>
-      </p:sp>
-      <p:sp>
-        <p:nvSpPr>
-          <p:cNvPr id="52" name="Google Shape;52;p3"/>
-          <p:cNvSpPr/>
-          <p:nvPr/>
-        </p:nvSpPr>
-        <p:spPr>
-          <a:xfrm>
-            <a:off x="351381" y="2714173"/>
-            <a:ext cx="5200000" cy="338554"/>
-          </a:xfrm>
-          <a:prstGeom prst="rect">
-            <a:avLst/>
-          </a:prstGeom>
-          <a:noFill/>
-          <a:ln>
-            <a:noFill/>
-          </a:ln>
-        </p:spPr>
-        <p:txBody>
-          <a:bodyPr spcFirstLastPara="1" wrap="square" lIns="91425" tIns="45700" rIns="91425" bIns="45700" anchor="t" anchorCtr="0">
-            <a:noAutofit/>
-          </a:bodyPr>
-          <a:lstStyle/>
-          <a:p>
-            <a:pPr marL="0" marR="0" lvl="0" indent="0" algn="l" rtl="0">
-              <a:spcBef>
-                <a:spcPts val="0"/>
-              </a:spcBef>
-              <a:spcAft>
-                <a:spcPts val="0"/>
-              </a:spcAft>
-              <a:buNone/>
-            </a:pPr>
-            <a:r>
-              <a:rPr lang="ja-JP" sz="1400" b="1">
-                <a:solidFill>
-                  <a:srgbClr val="15133D"/>
-                </a:solidFill>
-                <a:latin typeface="メイリオ"/>
-                <a:ea typeface="Meiryo"/>
-                <a:cs typeface="Meiryo"/>
-                <a:sym typeface="Meiryo"/>
-              </a:rPr>
-              <a:t>■ 詳細</a:t>
-            </a:r>
-            <a:endParaRPr/>
-          </a:p>
-        </p:txBody>
-      </p:sp>
-      <p:grpSp>
-        <p:nvGrpSpPr>
-          <p:cNvPr id="53" name="Google Shape;53;p3"/>
-          <p:cNvGrpSpPr/>
-          <p:nvPr/>
-        </p:nvGrpSpPr>
-        <p:grpSpPr>
-          <a:xfrm>
-            <a:off x="8473303" y="730955"/>
-            <a:ext cx="1376241" cy="1131930"/>
-            <a:chOff x="0" y="0"/>
-            <a:chExt cx="1376241" cy="1131930"/>
-          </a:xfrm>
-        </p:grpSpPr>
-        <p:sp>
-          <p:nvSpPr>
-            <p:cNvPr id="54" name="Google Shape;54;p3"/>
-            <p:cNvSpPr/>
-            <p:nvPr/>
-          </p:nvSpPr>
-          <p:spPr>
-            <a:xfrm rot="10800000">
-              <a:off x="0" y="0"/>
-              <a:ext cx="1376241" cy="282982"/>
-            </a:xfrm>
-            <a:prstGeom prst="trapezoid">
-              <a:avLst>
-                <a:gd name="adj" fmla="val 60792"/>
-              </a:avLst>
-            </a:prstGeom>
-            <a:solidFill>
-              <a:srgbClr val="EAEDF5"/>
-            </a:solidFill>
-            <a:ln w="25400" cap="flat" cmpd="sng">
-              <a:solidFill>
-                <a:schemeClr val="dk2"/>
-              </a:solidFill>
-              <a:prstDash val="solid"/>
-              <a:round/>
-              <a:headEnd type="none" w="sm" len="sm"/>
-              <a:tailEnd type="none" w="sm" len="sm"/>
-            </a:ln>
-          </p:spPr>
-          <p:txBody>
-            <a:bodyPr spcFirstLastPara="1" wrap="square" lIns="91425" tIns="91425" rIns="91425" bIns="91425" anchor="ctr" anchorCtr="0">
-              <a:noAutofit/>
-            </a:bodyPr>
-            <a:lstStyle/>
-            <a:p>
-              <a:pPr marL="0" lvl="0" indent="0" algn="l" rtl="0">
-                <a:spcBef>
-                  <a:spcPts val="0"/>
-                </a:spcBef>
-                <a:spcAft>
-                  <a:spcPts val="0"/>
-                </a:spcAft>
-                <a:buNone/>
-              </a:pPr>
-              <a:endParaRPr/>
-            </a:p>
-          </p:txBody>
-        </p:sp>
-        <p:sp>
-          <p:nvSpPr>
-            <p:cNvPr id="55" name="Google Shape;55;p3"/>
-            <p:cNvSpPr txBox="1"/>
-            <p:nvPr/>
-          </p:nvSpPr>
-          <p:spPr>
-            <a:xfrm>
-              <a:off x="240842" y="0"/>
-              <a:ext cx="894556" cy="282982"/>
-            </a:xfrm>
-            <a:prstGeom prst="rect">
-              <a:avLst/>
-            </a:prstGeom>
-            <a:noFill/>
-            <a:ln>
-              <a:noFill/>
-            </a:ln>
-          </p:spPr>
-          <p:txBody>
-            <a:bodyPr spcFirstLastPara="1" wrap="square" lIns="10150" tIns="10150" rIns="10150" bIns="10150" anchor="ctr" anchorCtr="0">
-              <a:noAutofit/>
-            </a:bodyPr>
-            <a:lstStyle/>
-            <a:p>
-              <a:pPr marL="0" marR="0" lvl="0" indent="0" algn="ctr" rtl="0">
-                <a:lnSpc>
-                  <a:spcPct val="90000"/>
-                </a:lnSpc>
-                <a:spcBef>
-                  <a:spcPts val="0"/>
-                </a:spcBef>
-                <a:spcAft>
-                  <a:spcPts val="0"/>
-                </a:spcAft>
-                <a:buClr>
-                  <a:srgbClr val="262626"/>
-                </a:buClr>
-                <a:buSzPts val="800"/>
-                <a:buFont typeface="Arial"/>
-                <a:buNone/>
-              </a:pPr>
-              <a:r>
-                <a:rPr lang="ja-JP" sz="800" b="1">
-                  <a:solidFill>
-                    <a:srgbClr val="262626"/>
-                  </a:solidFill>
-                  <a:latin typeface="Arial"/>
-                  <a:ea typeface="Arial"/>
-                  <a:cs typeface="Arial"/>
-                  <a:sym typeface="Arial"/>
-                </a:rPr>
-                <a:t>認知</a:t>
-              </a:r>
-              <a:endParaRPr/>
-            </a:p>
-          </p:txBody>
-        </p:sp>
-        <p:sp>
-          <p:nvSpPr>
-            <p:cNvPr id="56" name="Google Shape;56;p3"/>
-            <p:cNvSpPr/>
-            <p:nvPr/>
-          </p:nvSpPr>
-          <p:spPr>
-            <a:xfrm rot="10800000">
-              <a:off x="172030" y="282982"/>
-              <a:ext cx="1032180" cy="282982"/>
-            </a:xfrm>
-            <a:prstGeom prst="trapezoid">
-              <a:avLst>
-                <a:gd name="adj" fmla="val 60792"/>
-              </a:avLst>
-            </a:prstGeom>
-            <a:solidFill>
-              <a:schemeClr val="lt1"/>
-            </a:solidFill>
-            <a:ln w="25400" cap="flat" cmpd="sng">
-              <a:solidFill>
-                <a:schemeClr val="dk2"/>
-              </a:solidFill>
-              <a:prstDash val="solid"/>
-              <a:round/>
-              <a:headEnd type="none" w="sm" len="sm"/>
-              <a:tailEnd type="none" w="sm" len="sm"/>
-            </a:ln>
-          </p:spPr>
-          <p:txBody>
-            <a:bodyPr spcFirstLastPara="1" wrap="square" lIns="91425" tIns="91425" rIns="91425" bIns="91425" anchor="ctr" anchorCtr="0">
-              <a:noAutofit/>
-            </a:bodyPr>
-            <a:lstStyle/>
-            <a:p>
-              <a:pPr marL="0" lvl="0" indent="0" algn="l" rtl="0">
-                <a:spcBef>
-                  <a:spcPts val="0"/>
-                </a:spcBef>
-                <a:spcAft>
-                  <a:spcPts val="0"/>
-                </a:spcAft>
-                <a:buNone/>
-              </a:pPr>
-              <a:endParaRPr/>
-            </a:p>
-          </p:txBody>
-        </p:sp>
-        <p:sp>
-          <p:nvSpPr>
-            <p:cNvPr id="57" name="Google Shape;57;p3"/>
-            <p:cNvSpPr txBox="1"/>
-            <p:nvPr/>
-          </p:nvSpPr>
-          <p:spPr>
-            <a:xfrm>
-              <a:off x="352661" y="282982"/>
-              <a:ext cx="670917" cy="282982"/>
-            </a:xfrm>
-            <a:prstGeom prst="rect">
-              <a:avLst/>
-            </a:prstGeom>
-            <a:noFill/>
-            <a:ln>
-              <a:noFill/>
-            </a:ln>
-          </p:spPr>
-          <p:txBody>
-            <a:bodyPr spcFirstLastPara="1" wrap="square" lIns="10150" tIns="10150" rIns="10150" bIns="10150" anchor="ctr" anchorCtr="0">
-              <a:noAutofit/>
-            </a:bodyPr>
-            <a:lstStyle/>
-            <a:p>
-              <a:pPr marL="0" marR="0" lvl="0" indent="0" algn="ctr" rtl="0">
-                <a:lnSpc>
-                  <a:spcPct val="90000"/>
-                </a:lnSpc>
-                <a:spcBef>
-                  <a:spcPts val="0"/>
-                </a:spcBef>
-                <a:spcAft>
-                  <a:spcPts val="0"/>
-                </a:spcAft>
-                <a:buClr>
-                  <a:srgbClr val="262626"/>
-                </a:buClr>
-                <a:buSzPts val="800"/>
-                <a:buFont typeface="Arial"/>
-                <a:buNone/>
-              </a:pPr>
-              <a:r>
-                <a:rPr lang="ja-JP" sz="800" b="1">
-                  <a:solidFill>
-                    <a:srgbClr val="262626"/>
-                  </a:solidFill>
-                  <a:latin typeface="Arial"/>
-                  <a:ea typeface="Arial"/>
-                  <a:cs typeface="Arial"/>
-                  <a:sym typeface="Arial"/>
-                </a:rPr>
-                <a:t>検討</a:t>
-              </a:r>
-              <a:endParaRPr/>
-            </a:p>
-          </p:txBody>
-        </p:sp>
-        <p:sp>
-          <p:nvSpPr>
-            <p:cNvPr id="58" name="Google Shape;58;p3"/>
-            <p:cNvSpPr/>
-            <p:nvPr/>
-          </p:nvSpPr>
-          <p:spPr>
-            <a:xfrm rot="10800000">
-              <a:off x="344060" y="565965"/>
-              <a:ext cx="688120" cy="282982"/>
-            </a:xfrm>
-            <a:prstGeom prst="trapezoid">
-              <a:avLst>
-                <a:gd name="adj" fmla="val 60792"/>
-              </a:avLst>
-            </a:prstGeom>
-            <a:solidFill>
-              <a:schemeClr val="lt1"/>
-            </a:solidFill>
-            <a:ln w="25400" cap="flat" cmpd="sng">
-              <a:solidFill>
-                <a:schemeClr val="dk2"/>
-              </a:solidFill>
-              <a:prstDash val="solid"/>
-              <a:round/>
-              <a:headEnd type="none" w="sm" len="sm"/>
-              <a:tailEnd type="none" w="sm" len="sm"/>
-            </a:ln>
-          </p:spPr>
-          <p:txBody>
-            <a:bodyPr spcFirstLastPara="1" wrap="square" lIns="91425" tIns="91425" rIns="91425" bIns="91425" anchor="ctr" anchorCtr="0">
-              <a:noAutofit/>
-            </a:bodyPr>
-            <a:lstStyle/>
-            <a:p>
-              <a:pPr marL="0" lvl="0" indent="0" algn="l" rtl="0">
-                <a:spcBef>
-                  <a:spcPts val="0"/>
-                </a:spcBef>
-                <a:spcAft>
-                  <a:spcPts val="0"/>
-                </a:spcAft>
-                <a:buNone/>
-              </a:pPr>
-              <a:endParaRPr/>
-            </a:p>
-          </p:txBody>
-        </p:sp>
-        <p:sp>
-          <p:nvSpPr>
-            <p:cNvPr id="59" name="Google Shape;59;p3"/>
-            <p:cNvSpPr txBox="1"/>
-            <p:nvPr/>
-          </p:nvSpPr>
-          <p:spPr>
-            <a:xfrm>
-              <a:off x="464481" y="565965"/>
-              <a:ext cx="447278" cy="282982"/>
-            </a:xfrm>
-            <a:prstGeom prst="rect">
-              <a:avLst/>
-            </a:prstGeom>
-            <a:noFill/>
-            <a:ln>
-              <a:noFill/>
-            </a:ln>
-          </p:spPr>
-          <p:txBody>
-            <a:bodyPr spcFirstLastPara="1" wrap="square" lIns="10150" tIns="10150" rIns="10150" bIns="10150" anchor="ctr" anchorCtr="0">
-              <a:noAutofit/>
-            </a:bodyPr>
-            <a:lstStyle/>
-            <a:p>
-              <a:pPr marL="0" marR="0" lvl="0" indent="0" algn="ctr" rtl="0">
-                <a:lnSpc>
-                  <a:spcPct val="90000"/>
-                </a:lnSpc>
-                <a:spcBef>
-                  <a:spcPts val="0"/>
-                </a:spcBef>
-                <a:spcAft>
-                  <a:spcPts val="0"/>
-                </a:spcAft>
-                <a:buClr>
-                  <a:srgbClr val="262626"/>
-                </a:buClr>
-                <a:buSzPts val="800"/>
-                <a:buFont typeface="Arial"/>
-                <a:buNone/>
-              </a:pPr>
-              <a:r>
-                <a:rPr lang="ja-JP" sz="800" b="1">
-                  <a:solidFill>
-                    <a:srgbClr val="262626"/>
-                  </a:solidFill>
-                  <a:latin typeface="Arial"/>
-                  <a:ea typeface="Arial"/>
-                  <a:cs typeface="Arial"/>
-                  <a:sym typeface="Arial"/>
-                </a:rPr>
-                <a:t>獲得</a:t>
-              </a:r>
-              <a:endParaRPr/>
-            </a:p>
-          </p:txBody>
-        </p:sp>
-        <p:sp>
-          <p:nvSpPr>
-            <p:cNvPr id="60" name="Google Shape;60;p3"/>
-            <p:cNvSpPr/>
-            <p:nvPr/>
-          </p:nvSpPr>
-          <p:spPr>
-            <a:xfrm rot="10800000">
-              <a:off x="516090" y="848948"/>
-              <a:ext cx="344060" cy="282982"/>
-            </a:xfrm>
-            <a:prstGeom prst="trapezoid">
-              <a:avLst>
-                <a:gd name="adj" fmla="val 60792"/>
-              </a:avLst>
-            </a:prstGeom>
-            <a:noFill/>
-            <a:ln w="25400" cap="flat" cmpd="sng">
-              <a:solidFill>
-                <a:schemeClr val="dk2"/>
-              </a:solidFill>
-              <a:prstDash val="solid"/>
-              <a:round/>
-              <a:headEnd type="none" w="sm" len="sm"/>
-              <a:tailEnd type="none" w="sm" len="sm"/>
-            </a:ln>
-          </p:spPr>
-          <p:txBody>
-            <a:bodyPr spcFirstLastPara="1" wrap="square" lIns="91425" tIns="91425" rIns="91425" bIns="91425" anchor="ctr" anchorCtr="0">
-              <a:noAutofit/>
-            </a:bodyPr>
-            <a:lstStyle/>
-            <a:p>
-              <a:pPr marL="0" lvl="0" indent="0" algn="l" rtl="0">
-                <a:spcBef>
-                  <a:spcPts val="0"/>
-                </a:spcBef>
-                <a:spcAft>
-                  <a:spcPts val="0"/>
-                </a:spcAft>
-                <a:buNone/>
-              </a:pPr>
-              <a:endParaRPr/>
-            </a:p>
-          </p:txBody>
-        </p:sp>
-        <p:sp>
-          <p:nvSpPr>
-            <p:cNvPr id="61" name="Google Shape;61;p3"/>
-            <p:cNvSpPr txBox="1"/>
-            <p:nvPr/>
-          </p:nvSpPr>
-          <p:spPr>
-            <a:xfrm>
-              <a:off x="516090" y="848948"/>
-              <a:ext cx="344060" cy="282982"/>
-            </a:xfrm>
-            <a:prstGeom prst="rect">
-              <a:avLst/>
-            </a:prstGeom>
-            <a:noFill/>
-            <a:ln>
-              <a:noFill/>
-            </a:ln>
-          </p:spPr>
-          <p:txBody>
-            <a:bodyPr spcFirstLastPara="1" wrap="square" lIns="10150" tIns="10150" rIns="10150" bIns="10150" anchor="ctr" anchorCtr="0">
-              <a:noAutofit/>
-            </a:bodyPr>
-            <a:lstStyle/>
-            <a:p>
-              <a:pPr marL="0" marR="0" lvl="0" indent="0" algn="ctr" rtl="0">
-                <a:lnSpc>
-                  <a:spcPct val="90000"/>
-                </a:lnSpc>
-                <a:spcBef>
-                  <a:spcPts val="0"/>
-                </a:spcBef>
-                <a:spcAft>
-                  <a:spcPts val="0"/>
-                </a:spcAft>
-                <a:buClr>
-                  <a:srgbClr val="262626"/>
-                </a:buClr>
-                <a:buSzPts val="800"/>
-                <a:buFont typeface="Arial"/>
-                <a:buNone/>
-              </a:pPr>
-              <a:r>
-                <a:rPr lang="ja-JP" sz="800" b="1">
-                  <a:solidFill>
-                    <a:srgbClr val="262626"/>
-                  </a:solidFill>
-                  <a:latin typeface="Arial"/>
-                  <a:ea typeface="Arial"/>
-                  <a:cs typeface="Arial"/>
-                  <a:sym typeface="Arial"/>
-                </a:rPr>
-                <a:t>伸長</a:t>
-              </a:r>
-              <a:endParaRPr/>
-            </a:p>
-          </p:txBody>
-        </p:sp>
-      </p:grpSp>
-      <p:pic>
-        <p:nvPicPr>
-          <p:cNvPr id="62" name="Google Shape;62;p3" descr="LINE公式アカウントのロゴの使用方法とは？種類やダウンロード方法、利用時の注意点を紹介 | Mico（ミコ）"/>
-          <p:cNvPicPr preferRelativeResize="0"/>
-          <p:nvPr/>
-        </p:nvPicPr>
-        <p:blipFill rotWithShape="1">
-          <a:blip r:embed="rId2">
-            <a:alphaModFix/>
-          </a:blip>
-          <a:srcRect/>
-          <a:stretch/>
-        </p:blipFill>
-        <p:spPr>
-          <a:xfrm>
-            <a:off x="351381" y="1234746"/>
-            <a:ext cx="656177" cy="655521"/>
-          </a:xfrm>
-          <a:prstGeom prst="rect">
-            <a:avLst/>
-          </a:prstGeom>
-          <a:noFill/>
-          <a:ln>
-            <a:noFill/>
-          </a:ln>
-        </p:spPr>
-      </p:pic>
-      <p:sp>
-        <p:nvSpPr>
-          <p:cNvPr id="63" name="Rounded Rectangle 62"/>
-          <p:cNvSpPr/>
-          <p:nvPr/>
-        </p:nvSpPr>
-        <p:spPr>
-          <a:xfrm>
-            <a:off x="548640" y="3127248"/>
-            <a:ext cx="8814816" cy="1527048"/>
-          </a:xfrm>
-          <a:prstGeom prst="roundRect">
-            <a:avLst>
-              <a:gd name="adj" fmla="val 6000"/>
-            </a:avLst>
-          </a:prstGeom>
-          <a:solidFill>
-            <a:srgbClr val="EAF0FA"/>
-          </a:solidFill>
-          <a:ln w="12700">
-            <a:solidFill>
-              <a:srgbClr val="3467B2"/>
-            </a:solidFill>
-          </a:ln>
-          <a:effectLst/>
-        </p:spPr>
-        <p:style>
-          <a:lnRef idx="1">
-            <a:schemeClr val="accent1"/>
-          </a:lnRef>
-          <a:fillRef idx="3">
-            <a:schemeClr val="accent1"/>
-          </a:fillRef>
-          <a:effectRef idx="2">
-            <a:schemeClr val="accent1"/>
-          </a:effectRef>
-          <a:fontRef idx="minor">
-            <a:schemeClr val="lt1"/>
-          </a:fontRef>
-        </p:style>
-        <p:txBody>
-          <a:bodyPr wrap="square" lIns="228600" rIns="182880" rtlCol="0" anchor="ctr"/>
-          <a:lstStyle/>
-          <a:p>
-            <a:pPr algn="l"/>
-            <a:r>
-              <a:rPr sz="1900" b="1">
-                <a:solidFill>
-                  <a:srgbClr val="15133D"/>
-                </a:solidFill>
-                <a:latin typeface="メイリオ"/>
-              </a:rPr>
-              <a:t>クリエイティブの基準緩和（この商品だけ）</a:t>
-            </a:r>
-          </a:p>
-          <a:p>
-            <a:pPr algn="l">
-              <a:lnSpc>
-                <a:spcPct val="115000"/>
-              </a:lnSpc>
-              <a:spcBef>
-                <a:spcPts val="400"/>
-              </a:spcBef>
-            </a:pPr>
-            <a:r>
-              <a:rPr sz="1300">
-                <a:solidFill>
-                  <a:srgbClr val="333333"/>
-                </a:solidFill>
-                <a:latin typeface="メイリオ"/>
-              </a:rPr>
-              <a:t>・飲酒表現：可（「お酒は20歳になってから」の注記が必須）</a:t>
-            </a:r>
-          </a:p>
-          <a:p>
-            <a:pPr algn="l">
-              <a:lnSpc>
-                <a:spcPct val="115000"/>
-              </a:lnSpc>
-              <a:spcBef>
-                <a:spcPts val="400"/>
-              </a:spcBef>
-            </a:pPr>
-            <a:r>
-              <a:rPr sz="1300">
-                <a:solidFill>
-                  <a:srgbClr val="333333"/>
-                </a:solidFill>
-                <a:latin typeface="メイリオ"/>
-              </a:rPr>
-              <a:t>・実写素材：タレントの写真や、CM・ポスター素材の転用が可（品質基準あり。肖像権の処理は広告主側）</a:t>
-            </a:r>
-          </a:p>
-          <a:p>
-            <a:pPr algn="l">
-              <a:lnSpc>
-                <a:spcPct val="115000"/>
-              </a:lnSpc>
-              <a:spcBef>
-                <a:spcPts val="400"/>
-              </a:spcBef>
-            </a:pPr>
-            <a:r>
-              <a:rPr sz="1300">
-                <a:solidFill>
-                  <a:srgbClr val="333333"/>
-                </a:solidFill>
-                <a:latin typeface="メイリオ"/>
-              </a:rPr>
-              <a:t>・PR要素（ロゴ・商品パッケージ）：通常は全体の1/4までのところ、個数の制限なし</a:t>
-            </a:r>
-          </a:p>
-        </p:txBody>
-      </p:sp>
-      <p:sp>
-        <p:nvSpPr>
-          <p:cNvPr id="64" name="Rounded Rectangle 63"/>
-          <p:cNvSpPr/>
-          <p:nvPr/>
-        </p:nvSpPr>
-        <p:spPr>
-          <a:xfrm>
-            <a:off x="548640" y="4818888"/>
-            <a:ext cx="8814816" cy="1527048"/>
+            <a:off x="548640" y="4877639"/>
+            <a:ext cx="8814816" cy="1476883"/>
           </a:xfrm>
           <a:prstGeom prst="roundRect">
             <a:avLst>

--- a/LINEOA媒体最新情報_2026年10月トレンドレポート.pptx
+++ b/LINEOA媒体最新情報_2026年10月トレンドレポート.pptx
@@ -8215,7 +8215,3428 @@
               </a:avLst>
             </a:prstGeom>
             <a:solidFill>
-              <a:srgbClr val="EAEDF5"/>
+              <a:schemeClr val="lt1"/>
+            </a:solidFill>
+            <a:ln w="25400" cap="flat" cmpd="sng">
+              <a:solidFill>
+                <a:schemeClr val="dk2"/>
+              </a:solidFill>
+              <a:prstDash val="solid"/>
+              <a:round/>
+              <a:headEnd type="none" w="sm" len="sm"/>
+              <a:tailEnd type="none" w="sm" len="sm"/>
+            </a:ln>
+          </p:spPr>
+          <p:txBody>
+            <a:bodyPr spcFirstLastPara="1" wrap="square" lIns="91425" tIns="91425" rIns="91425" bIns="91425" anchor="ctr" anchorCtr="0">
+              <a:noAutofit/>
+            </a:bodyPr>
+            <a:lstStyle/>
+            <a:p>
+              <a:pPr marL="0" lvl="0" indent="0" algn="l" rtl="0">
+                <a:spcBef>
+                  <a:spcPts val="0"/>
+                </a:spcBef>
+                <a:spcAft>
+                  <a:spcPts val="0"/>
+                </a:spcAft>
+                <a:buNone/>
+              </a:pPr>
+              <a:endParaRPr/>
+            </a:p>
+          </p:txBody>
+        </p:sp>
+        <p:sp>
+          <p:nvSpPr>
+            <p:cNvPr id="55" name="Google Shape;55;p3"/>
+            <p:cNvSpPr txBox="1"/>
+            <p:nvPr/>
+          </p:nvSpPr>
+          <p:spPr>
+            <a:xfrm>
+              <a:off x="240842" y="0"/>
+              <a:ext cx="894556" cy="282982"/>
+            </a:xfrm>
+            <a:prstGeom prst="rect">
+              <a:avLst/>
+            </a:prstGeom>
+            <a:noFill/>
+            <a:ln>
+              <a:noFill/>
+            </a:ln>
+          </p:spPr>
+          <p:txBody>
+            <a:bodyPr spcFirstLastPara="1" wrap="square" lIns="10150" tIns="10150" rIns="10150" bIns="10150" anchor="ctr" anchorCtr="0">
+              <a:noAutofit/>
+            </a:bodyPr>
+            <a:lstStyle/>
+            <a:p>
+              <a:pPr marL="0" marR="0" lvl="0" indent="0" algn="ctr" rtl="0">
+                <a:lnSpc>
+                  <a:spcPct val="90000"/>
+                </a:lnSpc>
+                <a:spcBef>
+                  <a:spcPts val="0"/>
+                </a:spcBef>
+                <a:spcAft>
+                  <a:spcPts val="0"/>
+                </a:spcAft>
+                <a:buClr>
+                  <a:srgbClr val="262626"/>
+                </a:buClr>
+                <a:buSzPts val="800"/>
+                <a:buFont typeface="Arial"/>
+                <a:buNone/>
+              </a:pPr>
+              <a:r>
+                <a:rPr lang="ja-JP" sz="800" b="1">
+                  <a:solidFill>
+                    <a:srgbClr val="262626"/>
+                  </a:solidFill>
+                  <a:latin typeface="Arial"/>
+                  <a:ea typeface="Arial"/>
+                  <a:cs typeface="Arial"/>
+                  <a:sym typeface="Arial"/>
+                </a:rPr>
+                <a:t>認知</a:t>
+              </a:r>
+              <a:endParaRPr/>
+            </a:p>
+          </p:txBody>
+        </p:sp>
+        <p:sp>
+          <p:nvSpPr>
+            <p:cNvPr id="56" name="Google Shape;56;p3"/>
+            <p:cNvSpPr/>
+            <p:nvPr/>
+          </p:nvSpPr>
+          <p:spPr>
+            <a:xfrm rot="10800000">
+              <a:off x="172030" y="282982"/>
+              <a:ext cx="1032180" cy="282982"/>
+            </a:xfrm>
+            <a:prstGeom prst="trapezoid">
+              <a:avLst>
+                <a:gd name="adj" fmla="val 60792"/>
+              </a:avLst>
+            </a:prstGeom>
+            <a:solidFill>
+              <a:schemeClr val="lt1"/>
+            </a:solidFill>
+            <a:ln w="25400" cap="flat" cmpd="sng">
+              <a:solidFill>
+                <a:schemeClr val="dk2"/>
+              </a:solidFill>
+              <a:prstDash val="solid"/>
+              <a:round/>
+              <a:headEnd type="none" w="sm" len="sm"/>
+              <a:tailEnd type="none" w="sm" len="sm"/>
+            </a:ln>
+          </p:spPr>
+          <p:txBody>
+            <a:bodyPr spcFirstLastPara="1" wrap="square" lIns="91425" tIns="91425" rIns="91425" bIns="91425" anchor="ctr" anchorCtr="0">
+              <a:noAutofit/>
+            </a:bodyPr>
+            <a:lstStyle/>
+            <a:p>
+              <a:pPr marL="0" lvl="0" indent="0" algn="l" rtl="0">
+                <a:spcBef>
+                  <a:spcPts val="0"/>
+                </a:spcBef>
+                <a:spcAft>
+                  <a:spcPts val="0"/>
+                </a:spcAft>
+                <a:buNone/>
+              </a:pPr>
+              <a:endParaRPr/>
+            </a:p>
+          </p:txBody>
+        </p:sp>
+        <p:sp>
+          <p:nvSpPr>
+            <p:cNvPr id="57" name="Google Shape;57;p3"/>
+            <p:cNvSpPr txBox="1"/>
+            <p:nvPr/>
+          </p:nvSpPr>
+          <p:spPr>
+            <a:xfrm>
+              <a:off x="352661" y="282982"/>
+              <a:ext cx="670917" cy="282982"/>
+            </a:xfrm>
+            <a:prstGeom prst="rect">
+              <a:avLst/>
+            </a:prstGeom>
+            <a:noFill/>
+            <a:ln>
+              <a:noFill/>
+            </a:ln>
+          </p:spPr>
+          <p:txBody>
+            <a:bodyPr spcFirstLastPara="1" wrap="square" lIns="10150" tIns="10150" rIns="10150" bIns="10150" anchor="ctr" anchorCtr="0">
+              <a:noAutofit/>
+            </a:bodyPr>
+            <a:lstStyle/>
+            <a:p>
+              <a:pPr marL="0" marR="0" lvl="0" indent="0" algn="ctr" rtl="0">
+                <a:lnSpc>
+                  <a:spcPct val="90000"/>
+                </a:lnSpc>
+                <a:spcBef>
+                  <a:spcPts val="0"/>
+                </a:spcBef>
+                <a:spcAft>
+                  <a:spcPts val="0"/>
+                </a:spcAft>
+                <a:buClr>
+                  <a:srgbClr val="262626"/>
+                </a:buClr>
+                <a:buSzPts val="800"/>
+                <a:buFont typeface="Arial"/>
+                <a:buNone/>
+              </a:pPr>
+              <a:r>
+                <a:rPr lang="ja-JP" sz="800" b="1">
+                  <a:solidFill>
+                    <a:srgbClr val="262626"/>
+                  </a:solidFill>
+                  <a:latin typeface="Arial"/>
+                  <a:ea typeface="Arial"/>
+                  <a:cs typeface="Arial"/>
+                  <a:sym typeface="Arial"/>
+                </a:rPr>
+                <a:t>検討</a:t>
+              </a:r>
+              <a:endParaRPr/>
+            </a:p>
+          </p:txBody>
+        </p:sp>
+        <p:sp>
+          <p:nvSpPr>
+            <p:cNvPr id="58" name="Google Shape;58;p3"/>
+            <p:cNvSpPr/>
+            <p:nvPr/>
+          </p:nvSpPr>
+          <p:spPr>
+            <a:xfrm rot="10800000">
+              <a:off x="344060" y="565965"/>
+              <a:ext cx="688120" cy="282982"/>
+            </a:xfrm>
+            <a:prstGeom prst="trapezoid">
+              <a:avLst>
+                <a:gd name="adj" fmla="val 60792"/>
+              </a:avLst>
+            </a:prstGeom>
+            <a:solidFill>
+              <a:schemeClr val="dk2"/>
+            </a:solidFill>
+            <a:ln w="25400" cap="flat" cmpd="sng">
+              <a:solidFill>
+                <a:schemeClr val="dk2"/>
+              </a:solidFill>
+              <a:prstDash val="solid"/>
+              <a:round/>
+              <a:headEnd type="none" w="sm" len="sm"/>
+              <a:tailEnd type="none" w="sm" len="sm"/>
+            </a:ln>
+          </p:spPr>
+          <p:txBody>
+            <a:bodyPr spcFirstLastPara="1" wrap="square" lIns="91425" tIns="91425" rIns="91425" bIns="91425" anchor="ctr" anchorCtr="0">
+              <a:noAutofit/>
+            </a:bodyPr>
+            <a:lstStyle/>
+            <a:p>
+              <a:pPr marL="0" lvl="0" indent="0" algn="l" rtl="0">
+                <a:spcBef>
+                  <a:spcPts val="0"/>
+                </a:spcBef>
+                <a:spcAft>
+                  <a:spcPts val="0"/>
+                </a:spcAft>
+                <a:buNone/>
+              </a:pPr>
+              <a:endParaRPr/>
+            </a:p>
+          </p:txBody>
+        </p:sp>
+        <p:sp>
+          <p:nvSpPr>
+            <p:cNvPr id="59" name="Google Shape;59;p3"/>
+            <p:cNvSpPr txBox="1"/>
+            <p:nvPr/>
+          </p:nvSpPr>
+          <p:spPr>
+            <a:xfrm>
+              <a:off x="464481" y="565965"/>
+              <a:ext cx="447278" cy="282982"/>
+            </a:xfrm>
+            <a:prstGeom prst="rect">
+              <a:avLst/>
+            </a:prstGeom>
+            <a:noFill/>
+            <a:ln>
+              <a:noFill/>
+            </a:ln>
+          </p:spPr>
+          <p:txBody>
+            <a:bodyPr spcFirstLastPara="1" wrap="square" lIns="10150" tIns="10150" rIns="10150" bIns="10150" anchor="ctr" anchorCtr="0">
+              <a:noAutofit/>
+            </a:bodyPr>
+            <a:lstStyle/>
+            <a:p>
+              <a:pPr marL="0" marR="0" lvl="0" indent="0" algn="ctr" rtl="0">
+                <a:lnSpc>
+                  <a:spcPct val="90000"/>
+                </a:lnSpc>
+                <a:spcBef>
+                  <a:spcPts val="0"/>
+                </a:spcBef>
+                <a:spcAft>
+                  <a:spcPts val="0"/>
+                </a:spcAft>
+                <a:buClr>
+                  <a:srgbClr val="262626"/>
+                </a:buClr>
+                <a:buSzPts val="800"/>
+                <a:buFont typeface="Arial"/>
+                <a:buNone/>
+              </a:pPr>
+              <a:r>
+                <a:rPr lang="ja-JP" sz="800" b="1">
+                  <a:solidFill>
+                    <a:srgbClr val="FFFFFF"/>
+                  </a:solidFill>
+                  <a:latin typeface="Arial"/>
+                  <a:ea typeface="Arial"/>
+                  <a:cs typeface="Arial"/>
+                  <a:sym typeface="Arial"/>
+                </a:rPr>
+                <a:t>獲得</a:t>
+              </a:r>
+              <a:endParaRPr/>
+            </a:p>
+          </p:txBody>
+        </p:sp>
+        <p:sp>
+          <p:nvSpPr>
+            <p:cNvPr id="60" name="Google Shape;60;p3"/>
+            <p:cNvSpPr/>
+            <p:nvPr/>
+          </p:nvSpPr>
+          <p:spPr>
+            <a:xfrm rot="10800000">
+              <a:off x="516090" y="848948"/>
+              <a:ext cx="344060" cy="282982"/>
+            </a:xfrm>
+            <a:prstGeom prst="trapezoid">
+              <a:avLst>
+                <a:gd name="adj" fmla="val 60792"/>
+              </a:avLst>
+            </a:prstGeom>
+            <a:solidFill>
+              <a:schemeClr val="lt1"/>
+            </a:solidFill>
+            <a:ln w="25400" cap="flat" cmpd="sng">
+              <a:solidFill>
+                <a:schemeClr val="dk2"/>
+              </a:solidFill>
+              <a:prstDash val="solid"/>
+              <a:round/>
+              <a:headEnd type="none" w="sm" len="sm"/>
+              <a:tailEnd type="none" w="sm" len="sm"/>
+            </a:ln>
+          </p:spPr>
+          <p:txBody>
+            <a:bodyPr spcFirstLastPara="1" wrap="square" lIns="91425" tIns="91425" rIns="91425" bIns="91425" anchor="ctr" anchorCtr="0">
+              <a:noAutofit/>
+            </a:bodyPr>
+            <a:lstStyle/>
+            <a:p>
+              <a:pPr marL="0" lvl="0" indent="0" algn="l" rtl="0">
+                <a:spcBef>
+                  <a:spcPts val="0"/>
+                </a:spcBef>
+                <a:spcAft>
+                  <a:spcPts val="0"/>
+                </a:spcAft>
+                <a:buNone/>
+              </a:pPr>
+              <a:endParaRPr/>
+            </a:p>
+          </p:txBody>
+        </p:sp>
+        <p:sp>
+          <p:nvSpPr>
+            <p:cNvPr id="61" name="Google Shape;61;p3"/>
+            <p:cNvSpPr txBox="1"/>
+            <p:nvPr/>
+          </p:nvSpPr>
+          <p:spPr>
+            <a:xfrm>
+              <a:off x="516090" y="848948"/>
+              <a:ext cx="344060" cy="282982"/>
+            </a:xfrm>
+            <a:prstGeom prst="rect">
+              <a:avLst/>
+            </a:prstGeom>
+            <a:noFill/>
+            <a:ln>
+              <a:noFill/>
+            </a:ln>
+          </p:spPr>
+          <p:txBody>
+            <a:bodyPr spcFirstLastPara="1" wrap="square" lIns="10150" tIns="10150" rIns="10150" bIns="10150" anchor="ctr" anchorCtr="0">
+              <a:noAutofit/>
+            </a:bodyPr>
+            <a:lstStyle/>
+            <a:p>
+              <a:pPr marL="0" marR="0" lvl="0" indent="0" algn="ctr" rtl="0">
+                <a:lnSpc>
+                  <a:spcPct val="90000"/>
+                </a:lnSpc>
+                <a:spcBef>
+                  <a:spcPts val="0"/>
+                </a:spcBef>
+                <a:spcAft>
+                  <a:spcPts val="0"/>
+                </a:spcAft>
+                <a:buClr>
+                  <a:srgbClr val="262626"/>
+                </a:buClr>
+                <a:buSzPts val="800"/>
+                <a:buFont typeface="Arial"/>
+                <a:buNone/>
+              </a:pPr>
+              <a:r>
+                <a:rPr lang="ja-JP" sz="800" b="1">
+                  <a:solidFill>
+                    <a:srgbClr val="262626"/>
+                  </a:solidFill>
+                  <a:latin typeface="Arial"/>
+                  <a:ea typeface="Arial"/>
+                  <a:cs typeface="Arial"/>
+                  <a:sym typeface="Arial"/>
+                </a:rPr>
+                <a:t>伸長</a:t>
+              </a:r>
+              <a:endParaRPr/>
+            </a:p>
+          </p:txBody>
+        </p:sp>
+      </p:grpSp>
+      <p:pic>
+        <p:nvPicPr>
+          <p:cNvPr id="62" name="Google Shape;62;p3" descr="LINE公式アカウントのロゴの使用方法とは？種類やダウンロード方法、利用時の注意点を紹介 | Mico（ミコ）"/>
+          <p:cNvPicPr preferRelativeResize="0"/>
+          <p:nvPr/>
+        </p:nvPicPr>
+        <p:blipFill rotWithShape="1">
+          <a:blip r:embed="rId3">
+            <a:alphaModFix/>
+          </a:blip>
+          <a:srcRect/>
+          <a:stretch/>
+        </p:blipFill>
+        <p:spPr>
+          <a:xfrm>
+            <a:off x="351381" y="1234746"/>
+            <a:ext cx="656177" cy="655521"/>
+          </a:xfrm>
+          <a:prstGeom prst="rect">
+            <a:avLst/>
+          </a:prstGeom>
+          <a:noFill/>
+          <a:ln>
+            <a:noFill/>
+          </a:ln>
+        </p:spPr>
+      </p:pic>
+      <p:sp>
+        <p:nvSpPr>
+          <p:cNvPr id="68" name="Rounded Rectangle 67"/>
+          <p:cNvSpPr/>
+          <p:nvPr/>
+        </p:nvSpPr>
+        <p:spPr>
+          <a:xfrm>
+            <a:off x="548640" y="3313126"/>
+            <a:ext cx="8814816" cy="1548638"/>
+          </a:xfrm>
+          <a:prstGeom prst="roundRect">
+            <a:avLst>
+              <a:gd name="adj" fmla="val 6000"/>
+            </a:avLst>
+          </a:prstGeom>
+          <a:solidFill>
+            <a:srgbClr val="EAF0FA"/>
+          </a:solidFill>
+          <a:ln w="12700">
+            <a:solidFill>
+              <a:srgbClr val="3467B2"/>
+            </a:solidFill>
+          </a:ln>
+          <a:effectLst/>
+        </p:spPr>
+        <p:style>
+          <a:lnRef idx="1">
+            <a:schemeClr val="accent1"/>
+          </a:lnRef>
+          <a:fillRef idx="3">
+            <a:schemeClr val="accent1"/>
+          </a:fillRef>
+          <a:effectRef idx="2">
+            <a:schemeClr val="accent1"/>
+          </a:effectRef>
+          <a:fontRef idx="minor">
+            <a:schemeClr val="lt1"/>
+          </a:fontRef>
+        </p:style>
+        <p:txBody>
+          <a:bodyPr wrap="square" lIns="228600" rIns="182880" rtlCol="0" anchor="ctr"/>
+          <a:lstStyle/>
+          <a:p>
+            <a:pPr algn="l"/>
+            <a:r>
+              <a:rPr sz="2000" b="1" dirty="0" err="1">
+                <a:solidFill>
+                  <a:srgbClr val="15133D"/>
+                </a:solidFill>
+                <a:latin typeface="メイリオ"/>
+              </a:rPr>
+              <a:t>変更点</a:t>
+            </a:r>
+            <a:endParaRPr sz="2000" b="1" dirty="0">
+              <a:solidFill>
+                <a:srgbClr val="15133D"/>
+              </a:solidFill>
+              <a:latin typeface="メイリオ"/>
+            </a:endParaRPr>
+          </a:p>
+          <a:p>
+            <a:pPr algn="l">
+              <a:lnSpc>
+                <a:spcPct val="115000"/>
+              </a:lnSpc>
+              <a:spcBef>
+                <a:spcPts val="600"/>
+              </a:spcBef>
+            </a:pPr>
+            <a:r>
+              <a:rPr sz="1400" dirty="0" err="1">
+                <a:solidFill>
+                  <a:srgbClr val="333333"/>
+                </a:solidFill>
+                <a:latin typeface="メイリオ"/>
+              </a:rPr>
+              <a:t>LINE通知メッセージのボタンから、自社のネイティブアプリを直接開けるようになった</a:t>
+            </a:r>
+            <a:r>
+              <a:rPr sz="1400" dirty="0">
+                <a:solidFill>
+                  <a:srgbClr val="333333"/>
+                </a:solidFill>
+                <a:latin typeface="メイリオ"/>
+              </a:rPr>
+              <a:t>。</a:t>
+            </a:r>
+            <a:endParaRPr lang="en-US" sz="1400" dirty="0">
+              <a:solidFill>
+                <a:srgbClr val="333333"/>
+              </a:solidFill>
+              <a:latin typeface="メイリオ"/>
+            </a:endParaRPr>
+          </a:p>
+          <a:p>
+            <a:pPr algn="l">
+              <a:lnSpc>
+                <a:spcPct val="115000"/>
+              </a:lnSpc>
+              <a:spcBef>
+                <a:spcPts val="600"/>
+              </a:spcBef>
+            </a:pPr>
+            <a:r>
+              <a:rPr sz="1400" dirty="0" err="1">
+                <a:solidFill>
+                  <a:srgbClr val="333333"/>
+                </a:solidFill>
+                <a:latin typeface="メイリオ"/>
+              </a:rPr>
+              <a:t>アプリが入っていない場合は、通知内容に関連するWebページへ遷移する</a:t>
+            </a:r>
+            <a:r>
+              <a:rPr sz="1400" dirty="0">
+                <a:solidFill>
+                  <a:srgbClr val="333333"/>
+                </a:solidFill>
+                <a:latin typeface="メイリオ"/>
+              </a:rPr>
+              <a:t>。</a:t>
+            </a:r>
+            <a:br>
+              <a:rPr lang="en-US" sz="1400" dirty="0">
+                <a:solidFill>
+                  <a:srgbClr val="333333"/>
+                </a:solidFill>
+                <a:latin typeface="メイリオ"/>
+              </a:rPr>
+            </a:br>
+            <a:r>
+              <a:rPr sz="1400" dirty="0" err="1">
+                <a:solidFill>
+                  <a:srgbClr val="333333"/>
+                </a:solidFill>
+                <a:latin typeface="メイリオ"/>
+              </a:rPr>
+              <a:t>シームレスな導線で、ユーザー体験が向上する</a:t>
+            </a:r>
+            <a:r>
+              <a:rPr sz="1400" dirty="0">
+                <a:solidFill>
+                  <a:srgbClr val="333333"/>
+                </a:solidFill>
+                <a:latin typeface="メイリオ"/>
+              </a:rPr>
+              <a:t>。</a:t>
+            </a:r>
+          </a:p>
+        </p:txBody>
+      </p:sp>
+      <p:sp>
+        <p:nvSpPr>
+          <p:cNvPr id="69" name="Rounded Rectangle 68"/>
+          <p:cNvSpPr/>
+          <p:nvPr/>
+        </p:nvSpPr>
+        <p:spPr>
+          <a:xfrm>
+            <a:off x="548640" y="5044644"/>
+            <a:ext cx="8814816" cy="1214628"/>
+          </a:xfrm>
+          <a:prstGeom prst="roundRect">
+            <a:avLst>
+              <a:gd name="adj" fmla="val 6000"/>
+            </a:avLst>
+          </a:prstGeom>
+          <a:solidFill>
+            <a:srgbClr val="EAF0FA"/>
+          </a:solidFill>
+          <a:ln w="12700">
+            <a:solidFill>
+              <a:srgbClr val="3467B2"/>
+            </a:solidFill>
+          </a:ln>
+          <a:effectLst/>
+        </p:spPr>
+        <p:style>
+          <a:lnRef idx="1">
+            <a:schemeClr val="accent1"/>
+          </a:lnRef>
+          <a:fillRef idx="3">
+            <a:schemeClr val="accent1"/>
+          </a:fillRef>
+          <a:effectRef idx="2">
+            <a:schemeClr val="accent1"/>
+          </a:effectRef>
+          <a:fontRef idx="minor">
+            <a:schemeClr val="lt1"/>
+          </a:fontRef>
+        </p:style>
+        <p:txBody>
+          <a:bodyPr wrap="square" lIns="228600" rIns="182880" rtlCol="0" anchor="ctr"/>
+          <a:lstStyle/>
+          <a:p>
+            <a:pPr algn="l"/>
+            <a:r>
+              <a:rPr sz="2000" b="1" dirty="0" err="1">
+                <a:solidFill>
+                  <a:srgbClr val="15133D"/>
+                </a:solidFill>
+                <a:latin typeface="メイリオ"/>
+              </a:rPr>
+              <a:t>費用と必要な手続き</a:t>
+            </a:r>
+            <a:endParaRPr sz="2000" b="1" dirty="0">
+              <a:solidFill>
+                <a:srgbClr val="15133D"/>
+              </a:solidFill>
+              <a:latin typeface="メイリオ"/>
+            </a:endParaRPr>
+          </a:p>
+          <a:p>
+            <a:pPr algn="l">
+              <a:lnSpc>
+                <a:spcPct val="115000"/>
+              </a:lnSpc>
+              <a:spcBef>
+                <a:spcPts val="600"/>
+              </a:spcBef>
+            </a:pPr>
+            <a:r>
+              <a:rPr sz="1400" dirty="0">
+                <a:solidFill>
+                  <a:srgbClr val="333333"/>
+                </a:solidFill>
+                <a:latin typeface="メイリオ"/>
+              </a:rPr>
+              <a:t>審査費は10万円（税抜）／1UX。承認時のみ発生し、否認の場合はかからない。</a:t>
+            </a:r>
+            <a:br>
+              <a:rPr lang="en-US" sz="1400" dirty="0">
+                <a:solidFill>
+                  <a:srgbClr val="333333"/>
+                </a:solidFill>
+                <a:latin typeface="メイリオ"/>
+              </a:rPr>
+            </a:br>
+            <a:r>
+              <a:rPr sz="1400" dirty="0" err="1">
+                <a:solidFill>
+                  <a:srgbClr val="333333"/>
+                </a:solidFill>
+                <a:latin typeface="メイリオ"/>
+              </a:rPr>
+              <a:t>申し込みはLBPMのUX追加申請から</a:t>
+            </a:r>
+            <a:r>
+              <a:rPr lang="ja-JP" altLang="en-US" sz="1400" dirty="0">
+                <a:solidFill>
+                  <a:srgbClr val="333333"/>
+                </a:solidFill>
+                <a:latin typeface="メイリオ" panose="020B0604030504040204" pitchFamily="50" charset="-128"/>
+                <a:ea typeface="メイリオ" panose="020B0604030504040204" pitchFamily="50" charset="-128"/>
+              </a:rPr>
+              <a:t>行う</a:t>
+            </a:r>
+            <a:r>
+              <a:rPr sz="1400" dirty="0">
+                <a:solidFill>
+                  <a:srgbClr val="333333"/>
+                </a:solidFill>
+                <a:latin typeface="メイリオ"/>
+              </a:rPr>
+              <a:t>。</a:t>
+            </a:r>
+          </a:p>
+        </p:txBody>
+      </p:sp>
+    </p:spTree>
+  </p:cSld>
+  <p:clrMapOvr>
+    <a:masterClrMapping/>
+  </p:clrMapOvr>
+</p:sld>
+</file>
+
+<file path=ppt/slides/slide4.xml><?xml version="1.0" encoding="utf-8"?>
+<p:sld xmlns:a="http://schemas.openxmlformats.org/drawingml/2006/main" xmlns:r="http://schemas.openxmlformats.org/officeDocument/2006/relationships" xmlns:p="http://schemas.openxmlformats.org/presentationml/2006/main">
+  <p:cSld>
+    <p:spTree>
+      <p:nvGrpSpPr>
+        <p:cNvPr id="1" name=""/>
+        <p:cNvGrpSpPr/>
+        <p:nvPr/>
+      </p:nvGrpSpPr>
+      <p:grpSpPr>
+        <a:xfrm>
+          <a:off x="0" y="0"/>
+          <a:ext cx="0" cy="0"/>
+          <a:chOff x="0" y="0"/>
+          <a:chExt cx="0" cy="0"/>
+        </a:xfrm>
+      </p:grpSpPr>
+      <p:sp>
+        <p:nvSpPr>
+          <p:cNvPr id="40" name="Google Shape;40;p3"/>
+          <p:cNvSpPr/>
+          <p:nvPr/>
+        </p:nvSpPr>
+        <p:spPr>
+          <a:xfrm>
+            <a:off x="292801" y="730955"/>
+            <a:ext cx="1296144" cy="435690"/>
+          </a:xfrm>
+          <a:prstGeom prst="rect">
+            <a:avLst/>
+          </a:prstGeom>
+          <a:solidFill>
+            <a:schemeClr val="dk2"/>
+          </a:solidFill>
+          <a:ln w="9525" cap="flat" cmpd="sng">
+            <a:solidFill>
+              <a:srgbClr val="4A7DBA"/>
+            </a:solidFill>
+            <a:prstDash val="solid"/>
+            <a:round/>
+            <a:headEnd type="none" w="sm" len="sm"/>
+            <a:tailEnd type="none" w="sm" len="sm"/>
+          </a:ln>
+        </p:spPr>
+        <p:txBody>
+          <a:bodyPr spcFirstLastPara="1" wrap="square" lIns="91425" tIns="45700" rIns="91425" bIns="45700" anchor="ctr" anchorCtr="0">
+            <a:noAutofit/>
+          </a:bodyPr>
+          <a:lstStyle/>
+          <a:p>
+            <a:pPr marL="0" marR="0" lvl="0" indent="0" algn="ctr" rtl="0">
+              <a:spcBef>
+                <a:spcPts val="0"/>
+              </a:spcBef>
+              <a:spcAft>
+                <a:spcPts val="0"/>
+              </a:spcAft>
+              <a:buNone/>
+            </a:pPr>
+            <a:r>
+              <a:rPr lang="ja-JP" sz="1800" b="0" i="0" u="none" strike="noStrike" cap="none">
+                <a:solidFill>
+                  <a:schemeClr val="lt1"/>
+                </a:solidFill>
+                <a:latin typeface="メイリオ"/>
+                <a:ea typeface="Meiryo"/>
+                <a:cs typeface="Meiryo"/>
+                <a:sym typeface="Meiryo"/>
+              </a:rPr>
+              <a:t>対象業界</a:t>
+            </a:r>
+            <a:endParaRPr/>
+          </a:p>
+        </p:txBody>
+      </p:sp>
+      <p:sp>
+        <p:nvSpPr>
+          <p:cNvPr id="41" name="Google Shape;41;p3"/>
+          <p:cNvSpPr/>
+          <p:nvPr/>
+        </p:nvSpPr>
+        <p:spPr>
+          <a:xfrm>
+            <a:off x="7560840" y="730955"/>
+            <a:ext cx="829618" cy="435690"/>
+          </a:xfrm>
+          <a:prstGeom prst="rect">
+            <a:avLst/>
+          </a:prstGeom>
+          <a:solidFill>
+            <a:schemeClr val="bg1"/>
+          </a:solidFill>
+          <a:ln w="9525" cap="flat" cmpd="sng">
+            <a:solidFill>
+              <a:srgbClr val="4F81BD"/>
+            </a:solidFill>
+            <a:prstDash val="sysDash"/>
+            <a:round/>
+            <a:headEnd type="none" w="sm" len="sm"/>
+            <a:tailEnd type="none" w="sm" len="sm"/>
+          </a:ln>
+        </p:spPr>
+        <p:txBody>
+          <a:bodyPr spcFirstLastPara="1" wrap="square" lIns="91425" tIns="45700" rIns="91425" bIns="45700" anchor="ctr" anchorCtr="0">
+            <a:noAutofit/>
+          </a:bodyPr>
+          <a:lstStyle/>
+          <a:p>
+            <a:pPr marL="0" marR="0" lvl="0" indent="0" algn="ctr" rtl="0">
+              <a:spcBef>
+                <a:spcPts val="0"/>
+              </a:spcBef>
+              <a:spcAft>
+                <a:spcPts val="0"/>
+              </a:spcAft>
+              <a:buNone/>
+            </a:pPr>
+            <a:r>
+              <a:rPr lang="ja-JP" sz="1200" b="0" i="0" u="none" strike="noStrike" cap="none">
+                <a:solidFill>
+                  <a:schemeClr val="dk1"/>
+                </a:solidFill>
+                <a:latin typeface="メイリオ"/>
+                <a:ea typeface="Meiryo"/>
+                <a:cs typeface="Meiryo"/>
+                <a:sym typeface="Meiryo"/>
+              </a:rPr>
+              <a:t>その他</a:t>
+            </a:r>
+            <a:endParaRPr sz="1200" b="0" i="0" u="none" strike="noStrike" cap="none">
+              <a:solidFill>
+                <a:schemeClr val="dk1"/>
+              </a:solidFill>
+              <a:latin typeface="Meiryo"/>
+              <a:ea typeface="Meiryo"/>
+              <a:cs typeface="Meiryo"/>
+              <a:sym typeface="Meiryo"/>
+            </a:endParaRPr>
+          </a:p>
+        </p:txBody>
+      </p:sp>
+      <p:sp>
+        <p:nvSpPr>
+          <p:cNvPr id="42" name="Google Shape;42;p3"/>
+          <p:cNvSpPr/>
+          <p:nvPr/>
+        </p:nvSpPr>
+        <p:spPr>
+          <a:xfrm>
+            <a:off x="6679050" y="730955"/>
+            <a:ext cx="829618" cy="435690"/>
+          </a:xfrm>
+          <a:prstGeom prst="rect">
+            <a:avLst/>
+          </a:prstGeom>
+          <a:solidFill>
+            <a:schemeClr val="bg1"/>
+          </a:solidFill>
+          <a:ln w="9525" cap="flat" cmpd="sng">
+            <a:solidFill>
+              <a:srgbClr val="4F81BD"/>
+            </a:solidFill>
+            <a:prstDash val="sysDash"/>
+            <a:round/>
+            <a:headEnd type="none" w="sm" len="sm"/>
+            <a:tailEnd type="none" w="sm" len="sm"/>
+          </a:ln>
+        </p:spPr>
+        <p:txBody>
+          <a:bodyPr spcFirstLastPara="1" wrap="square" lIns="91425" tIns="45700" rIns="91425" bIns="45700" anchor="ctr" anchorCtr="0">
+            <a:noAutofit/>
+          </a:bodyPr>
+          <a:lstStyle/>
+          <a:p>
+            <a:pPr marL="0" marR="0" lvl="0" indent="0" algn="ctr" rtl="0">
+              <a:spcBef>
+                <a:spcPts val="0"/>
+              </a:spcBef>
+              <a:spcAft>
+                <a:spcPts val="0"/>
+              </a:spcAft>
+              <a:buNone/>
+            </a:pPr>
+            <a:r>
+              <a:rPr lang="ja-JP" sz="1000" b="0" i="0" u="none" strike="noStrike" cap="none">
+                <a:solidFill>
+                  <a:schemeClr val="dk1"/>
+                </a:solidFill>
+                <a:latin typeface="メイリオ"/>
+                <a:ea typeface="Meiryo"/>
+                <a:cs typeface="Meiryo"/>
+                <a:sym typeface="Meiryo"/>
+              </a:rPr>
+              <a:t>オプション</a:t>
+            </a:r>
+            <a:endParaRPr sz="1000" b="0" i="0" u="none" strike="noStrike" cap="none">
+              <a:solidFill>
+                <a:schemeClr val="dk1"/>
+              </a:solidFill>
+              <a:latin typeface="Meiryo"/>
+              <a:ea typeface="Meiryo"/>
+              <a:cs typeface="Meiryo"/>
+              <a:sym typeface="Meiryo"/>
+            </a:endParaRPr>
+          </a:p>
+          <a:p>
+            <a:pPr marL="0" marR="0" lvl="0" indent="0" algn="ctr" rtl="0">
+              <a:spcBef>
+                <a:spcPts val="0"/>
+              </a:spcBef>
+              <a:spcAft>
+                <a:spcPts val="0"/>
+              </a:spcAft>
+              <a:buNone/>
+            </a:pPr>
+            <a:r>
+              <a:rPr lang="ja-JP" sz="1000" b="0" i="0" u="none" strike="noStrike" cap="none">
+                <a:solidFill>
+                  <a:schemeClr val="dk1"/>
+                </a:solidFill>
+                <a:latin typeface="メイリオ"/>
+                <a:ea typeface="Meiryo"/>
+                <a:cs typeface="Meiryo"/>
+                <a:sym typeface="Meiryo"/>
+              </a:rPr>
+              <a:t>商材</a:t>
+            </a:r>
+            <a:endParaRPr/>
+          </a:p>
+        </p:txBody>
+      </p:sp>
+      <p:sp>
+        <p:nvSpPr>
+          <p:cNvPr id="43" name="Google Shape;43;p3"/>
+          <p:cNvSpPr/>
+          <p:nvPr/>
+        </p:nvSpPr>
+        <p:spPr>
+          <a:xfrm>
+            <a:off x="1594068" y="730955"/>
+            <a:ext cx="2926883" cy="435690"/>
+          </a:xfrm>
+          <a:prstGeom prst="rect">
+            <a:avLst/>
+          </a:prstGeom>
+          <a:noFill/>
+          <a:ln w="9525" cap="flat" cmpd="sng">
+            <a:solidFill>
+              <a:srgbClr val="4A7DBA"/>
+            </a:solidFill>
+            <a:prstDash val="solid"/>
+            <a:round/>
+            <a:headEnd type="none" w="sm" len="sm"/>
+            <a:tailEnd type="none" w="sm" len="sm"/>
+          </a:ln>
+        </p:spPr>
+        <p:txBody>
+          <a:bodyPr spcFirstLastPara="1" wrap="square" lIns="91425" tIns="45700" rIns="91425" bIns="45700" anchor="ctr" anchorCtr="0">
+            <a:noAutofit/>
+          </a:bodyPr>
+          <a:lstStyle/>
+          <a:p>
+            <a:pPr marL="0" marR="0" lvl="0" indent="0" algn="ctr" rtl="0">
+              <a:spcBef>
+                <a:spcPts val="0"/>
+              </a:spcBef>
+              <a:spcAft>
+                <a:spcPts val="0"/>
+              </a:spcAft>
+              <a:buNone/>
+            </a:pPr>
+            <a:r>
+              <a:rPr lang="ja-JP" sz="1300" b="0" i="0" u="none" strike="noStrike" cap="none">
+                <a:solidFill>
+                  <a:schemeClr val="dk1"/>
+                </a:solidFill>
+                <a:latin typeface="メイリオ"/>
+                <a:ea typeface="Meiryo"/>
+                <a:cs typeface="Meiryo"/>
+                <a:sym typeface="Meiryo"/>
+              </a:rPr>
+              <a:t>EC・通販・予約サービス</a:t>
+            </a:r>
+            <a:br>
+              <a:rPr lang="ja-JP" sz="1300" b="0" i="0" u="none" strike="noStrike" cap="none">
+                <a:solidFill>
+                  <a:schemeClr val="dk1"/>
+                </a:solidFill>
+                <a:latin typeface="メイリオ"/>
+                <a:ea typeface="Meiryo"/>
+                <a:cs typeface="Meiryo"/>
+                <a:sym typeface="Meiryo"/>
+              </a:rPr>
+            </a:br>
+            <a:r>
+              <a:rPr lang="ja-JP" sz="1300" b="0" i="0" u="none" strike="noStrike" cap="none">
+                <a:solidFill>
+                  <a:schemeClr val="dk1"/>
+                </a:solidFill>
+                <a:latin typeface="メイリオ"/>
+                <a:ea typeface="Meiryo"/>
+                <a:cs typeface="Meiryo"/>
+                <a:sym typeface="Meiryo"/>
+              </a:rPr>
+              <a:t>（自社アプリあり）</a:t>
+            </a:r>
+            <a:endParaRPr/>
+          </a:p>
+        </p:txBody>
+      </p:sp>
+      <p:sp>
+        <p:nvSpPr>
+          <p:cNvPr id="44" name="Google Shape;44;p3"/>
+          <p:cNvSpPr txBox="1"/>
+          <p:nvPr/>
+        </p:nvSpPr>
+        <p:spPr>
+          <a:xfrm>
+            <a:off x="3296816" y="6597352"/>
+            <a:ext cx="6209091" cy="215444"/>
+          </a:xfrm>
+          <a:prstGeom prst="rect">
+            <a:avLst/>
+          </a:prstGeom>
+          <a:noFill/>
+          <a:ln>
+            <a:noFill/>
+          </a:ln>
+        </p:spPr>
+        <p:txBody>
+          <a:bodyPr spcFirstLastPara="1" wrap="square" lIns="91425" tIns="45700" rIns="91425" bIns="45700" anchor="t" anchorCtr="0">
+            <a:spAutoFit/>
+          </a:bodyPr>
+          <a:lstStyle/>
+          <a:p>
+            <a:pPr marL="0" marR="0" lvl="0" indent="0" algn="l" rtl="0">
+              <a:spcBef>
+                <a:spcPts val="0"/>
+              </a:spcBef>
+              <a:spcAft>
+                <a:spcPts val="0"/>
+              </a:spcAft>
+              <a:buNone/>
+            </a:pPr>
+            <a:r>
+              <a:rPr lang="ja-JP" sz="800" b="0" i="0" u="none" strike="noStrike" cap="none">
+                <a:solidFill>
+                  <a:schemeClr val="lt1"/>
+                </a:solidFill>
+                <a:latin typeface="メイリオ"/>
+                <a:ea typeface="Meiryo"/>
+                <a:cs typeface="Meiryo"/>
+                <a:sym typeface="Meiryo"/>
+              </a:rPr>
+              <a:t>出典：代理店情報</a:t>
+            </a:r>
+            <a:endParaRPr sz="800">
+              <a:solidFill>
+                <a:schemeClr val="lt1"/>
+              </a:solidFill>
+              <a:latin typeface="Meiryo"/>
+              <a:ea typeface="Meiryo"/>
+              <a:cs typeface="Meiryo"/>
+              <a:sym typeface="Meiryo"/>
+            </a:endParaRPr>
+          </a:p>
+        </p:txBody>
+      </p:sp>
+      <p:sp>
+        <p:nvSpPr>
+          <p:cNvPr id="45" name="Google Shape;45;p3"/>
+          <p:cNvSpPr/>
+          <p:nvPr/>
+        </p:nvSpPr>
+        <p:spPr>
+          <a:xfrm>
+            <a:off x="0" y="1234746"/>
+            <a:ext cx="9906000" cy="672259"/>
+          </a:xfrm>
+          <a:prstGeom prst="rect">
+            <a:avLst/>
+          </a:prstGeom>
+          <a:solidFill>
+            <a:srgbClr val="C5D8F1"/>
+          </a:solidFill>
+          <a:ln>
+            <a:noFill/>
+          </a:ln>
+        </p:spPr>
+        <p:txBody>
+          <a:bodyPr spcFirstLastPara="1" wrap="square" lIns="91425" tIns="45700" rIns="91425" bIns="45700" anchor="ctr" anchorCtr="0">
+            <a:noAutofit/>
+          </a:bodyPr>
+          <a:lstStyle/>
+          <a:p>
+            <a:pPr marL="0" marR="0" lvl="0" indent="0" algn="ctr" rtl="0">
+              <a:spcBef>
+                <a:spcPts val="0"/>
+              </a:spcBef>
+              <a:spcAft>
+                <a:spcPts val="0"/>
+              </a:spcAft>
+              <a:buNone/>
+            </a:pPr>
+            <a:r>
+              <a:rPr lang="ja-JP" sz="1600" b="1">
+                <a:solidFill>
+                  <a:srgbClr val="004DE6"/>
+                </a:solidFill>
+                <a:latin typeface="メイリオ"/>
+                <a:ea typeface="Meiryo"/>
+                <a:cs typeface="Meiryo"/>
+                <a:sym typeface="Meiryo"/>
+              </a:rPr>
+              <a:t>　　　　　　</a:t>
+            </a:r>
+            <a:endParaRPr sz="1800" b="1">
+              <a:solidFill>
+                <a:srgbClr val="004DE6"/>
+              </a:solidFill>
+              <a:latin typeface="Meiryo"/>
+              <a:ea typeface="Meiryo"/>
+              <a:cs typeface="Meiryo"/>
+              <a:sym typeface="Meiryo"/>
+            </a:endParaRPr>
+          </a:p>
+        </p:txBody>
+      </p:sp>
+      <p:sp>
+        <p:nvSpPr>
+          <p:cNvPr id="46" name="Google Shape;46;p3"/>
+          <p:cNvSpPr/>
+          <p:nvPr/>
+        </p:nvSpPr>
+        <p:spPr>
+          <a:xfrm>
+            <a:off x="1089832" y="1437370"/>
+            <a:ext cx="7031520" cy="338554"/>
+          </a:xfrm>
+          <a:prstGeom prst="rect">
+            <a:avLst/>
+          </a:prstGeom>
+          <a:noFill/>
+          <a:ln>
+            <a:noFill/>
+          </a:ln>
+        </p:spPr>
+        <p:txBody>
+          <a:bodyPr spcFirstLastPara="1" wrap="square" lIns="91425" tIns="45700" rIns="91425" bIns="45700" anchor="t" anchorCtr="0">
+            <a:spAutoFit/>
+          </a:bodyPr>
+          <a:lstStyle/>
+          <a:p>
+            <a:pPr marL="0" marR="0" lvl="0" indent="0" algn="l" rtl="0">
+              <a:spcBef>
+                <a:spcPts val="0"/>
+              </a:spcBef>
+              <a:spcAft>
+                <a:spcPts val="0"/>
+              </a:spcAft>
+              <a:buNone/>
+            </a:pPr>
+            <a:r>
+              <a:rPr lang="ja-JP" sz="1600" b="1">
+                <a:solidFill>
+                  <a:srgbClr val="004DE6"/>
+                </a:solidFill>
+                <a:latin typeface="メイリオ"/>
+                <a:ea typeface="Meiryo"/>
+                <a:cs typeface="Meiryo"/>
+                <a:sym typeface="Meiryo"/>
+              </a:rPr>
+              <a:t>【LINE通知メッセージ】ネイティブアプリ遷移の条件</a:t>
+            </a:r>
+            <a:endParaRPr sz="1600" b="1">
+              <a:solidFill>
+                <a:srgbClr val="004DE6"/>
+              </a:solidFill>
+              <a:latin typeface="Meiryo"/>
+              <a:ea typeface="Meiryo"/>
+              <a:cs typeface="Meiryo"/>
+              <a:sym typeface="Meiryo"/>
+            </a:endParaRPr>
+          </a:p>
+        </p:txBody>
+      </p:sp>
+      <p:sp>
+        <p:nvSpPr>
+          <p:cNvPr id="47" name="Google Shape;47;p3"/>
+          <p:cNvSpPr txBox="1"/>
+          <p:nvPr/>
+        </p:nvSpPr>
+        <p:spPr>
+          <a:xfrm>
+            <a:off x="182880" y="88175"/>
+            <a:ext cx="7512385" cy="365091"/>
+          </a:xfrm>
+          <a:prstGeom prst="rect">
+            <a:avLst/>
+          </a:prstGeom>
+          <a:noFill/>
+          <a:ln>
+            <a:noFill/>
+          </a:ln>
+        </p:spPr>
+        <p:txBody>
+          <a:bodyPr spcFirstLastPara="1" wrap="square" lIns="91425" tIns="72000" rIns="91425" bIns="45700" anchor="t" anchorCtr="0">
+            <a:spAutoFit/>
+          </a:bodyPr>
+          <a:lstStyle/>
+          <a:p>
+            <a:pPr marL="0" marR="0" lvl="0" indent="0" algn="l" rtl="0">
+              <a:spcBef>
+                <a:spcPts val="0"/>
+              </a:spcBef>
+              <a:spcAft>
+                <a:spcPts val="0"/>
+              </a:spcAft>
+              <a:buClr>
+                <a:schemeClr val="dk1"/>
+              </a:buClr>
+              <a:buSzPts val="1600"/>
+              <a:buFont typeface="Arial"/>
+              <a:buNone/>
+            </a:pPr>
+            <a:r>
+              <a:rPr lang="ja-JP" sz="1600" b="0" u="none">
+                <a:solidFill>
+                  <a:schemeClr val="dk1"/>
+                </a:solidFill>
+                <a:latin typeface="メイリオ"/>
+                <a:ea typeface="Meiryo"/>
+                <a:cs typeface="Meiryo"/>
+                <a:sym typeface="Meiryo"/>
+              </a:rPr>
+              <a:t>    今後のアップデート情報</a:t>
+            </a:r>
+            <a:endParaRPr sz="1600" b="0" u="none">
+              <a:solidFill>
+                <a:schemeClr val="dk1"/>
+              </a:solidFill>
+              <a:latin typeface="Meiryo"/>
+              <a:ea typeface="Meiryo"/>
+              <a:cs typeface="Meiryo"/>
+              <a:sym typeface="Meiryo"/>
+            </a:endParaRPr>
+          </a:p>
+        </p:txBody>
+      </p:sp>
+      <p:sp>
+        <p:nvSpPr>
+          <p:cNvPr id="48" name="Google Shape;48;p3"/>
+          <p:cNvSpPr/>
+          <p:nvPr/>
+        </p:nvSpPr>
+        <p:spPr>
+          <a:xfrm>
+            <a:off x="5797260" y="730955"/>
+            <a:ext cx="829618" cy="435690"/>
+          </a:xfrm>
+          <a:prstGeom prst="rect">
+            <a:avLst/>
+          </a:prstGeom>
+          <a:solidFill>
+            <a:schemeClr val="tx2"/>
+          </a:solidFill>
+          <a:ln w="9525" cap="flat" cmpd="sng">
+            <a:solidFill>
+              <a:srgbClr val="4F81BD"/>
+            </a:solidFill>
+            <a:prstDash val="solid"/>
+            <a:round/>
+            <a:headEnd type="none" w="sm" len="sm"/>
+            <a:tailEnd type="none" w="sm" len="sm"/>
+          </a:ln>
+        </p:spPr>
+        <p:txBody>
+          <a:bodyPr spcFirstLastPara="1" wrap="square" lIns="91425" tIns="45700" rIns="91425" bIns="45700" anchor="ctr" anchorCtr="0">
+            <a:noAutofit/>
+          </a:bodyPr>
+          <a:lstStyle/>
+          <a:p>
+            <a:pPr marL="0" marR="0" lvl="0" indent="0" algn="ctr" rtl="0">
+              <a:spcBef>
+                <a:spcPts val="0"/>
+              </a:spcBef>
+              <a:spcAft>
+                <a:spcPts val="0"/>
+              </a:spcAft>
+              <a:buClr>
+                <a:schemeClr val="dk1"/>
+              </a:buClr>
+              <a:buSzPts val="1000"/>
+              <a:buFont typeface="Meiryo"/>
+              <a:buNone/>
+            </a:pPr>
+            <a:r>
+              <a:rPr lang="ja-JP" sz="1000">
+                <a:solidFill>
+                  <a:schemeClr val="dk1"/>
+                </a:solidFill>
+                <a:latin typeface="メイリオ"/>
+                <a:ea typeface="Meiryo"/>
+                <a:cs typeface="Meiryo"/>
+                <a:sym typeface="Meiryo"/>
+              </a:rPr>
+              <a:t>開発</a:t>
+            </a:r>
+            <a:endParaRPr sz="1000">
+              <a:solidFill>
+                <a:schemeClr val="dk1"/>
+              </a:solidFill>
+              <a:latin typeface="Meiryo"/>
+              <a:ea typeface="Meiryo"/>
+              <a:cs typeface="Meiryo"/>
+              <a:sym typeface="Meiryo"/>
+            </a:endParaRPr>
+          </a:p>
+          <a:p>
+            <a:pPr marL="0" marR="0" lvl="0" indent="0" algn="ctr" rtl="0">
+              <a:spcBef>
+                <a:spcPts val="0"/>
+              </a:spcBef>
+              <a:spcAft>
+                <a:spcPts val="0"/>
+              </a:spcAft>
+              <a:buClr>
+                <a:schemeClr val="dk1"/>
+              </a:buClr>
+              <a:buSzPts val="1000"/>
+              <a:buFont typeface="Meiryo"/>
+              <a:buNone/>
+            </a:pPr>
+            <a:r>
+              <a:rPr lang="ja-JP" sz="1000">
+                <a:solidFill>
+                  <a:schemeClr val="dk1"/>
+                </a:solidFill>
+                <a:latin typeface="メイリオ"/>
+                <a:ea typeface="Meiryo"/>
+                <a:cs typeface="Meiryo"/>
+                <a:sym typeface="Meiryo"/>
+              </a:rPr>
+              <a:t>LINE API</a:t>
+            </a:r>
+            <a:endParaRPr sz="1000">
+              <a:solidFill>
+                <a:schemeClr val="dk1"/>
+              </a:solidFill>
+              <a:latin typeface="Meiryo"/>
+              <a:ea typeface="Meiryo"/>
+              <a:cs typeface="Meiryo"/>
+              <a:sym typeface="Meiryo"/>
+            </a:endParaRPr>
+          </a:p>
+        </p:txBody>
+      </p:sp>
+      <p:sp>
+        <p:nvSpPr>
+          <p:cNvPr id="49" name="Google Shape;49;p3"/>
+          <p:cNvSpPr/>
+          <p:nvPr/>
+        </p:nvSpPr>
+        <p:spPr>
+          <a:xfrm>
+            <a:off x="4915470" y="730955"/>
+            <a:ext cx="829618" cy="435690"/>
+          </a:xfrm>
+          <a:prstGeom prst="rect">
+            <a:avLst/>
+          </a:prstGeom>
+          <a:solidFill>
+            <a:schemeClr val="bg1"/>
+          </a:solidFill>
+          <a:ln w="9525" cap="flat" cmpd="sng">
+            <a:solidFill>
+              <a:srgbClr val="4F81BD"/>
+            </a:solidFill>
+            <a:prstDash val="sysDash"/>
+            <a:round/>
+            <a:headEnd type="none" w="sm" len="sm"/>
+            <a:tailEnd type="none" w="sm" len="sm"/>
+          </a:ln>
+        </p:spPr>
+        <p:txBody>
+          <a:bodyPr spcFirstLastPara="1" wrap="square" lIns="91425" tIns="45700" rIns="91425" bIns="45700" anchor="ctr" anchorCtr="0">
+            <a:noAutofit/>
+          </a:bodyPr>
+          <a:lstStyle/>
+          <a:p>
+            <a:pPr marL="0" marR="0" lvl="0" indent="0" algn="ctr" rtl="0">
+              <a:spcBef>
+                <a:spcPts val="0"/>
+              </a:spcBef>
+              <a:spcAft>
+                <a:spcPts val="0"/>
+              </a:spcAft>
+              <a:buNone/>
+            </a:pPr>
+            <a:r>
+              <a:rPr lang="ja-JP" sz="1000">
+                <a:solidFill>
+                  <a:schemeClr val="dk1"/>
+                </a:solidFill>
+                <a:latin typeface="メイリオ"/>
+                <a:ea typeface="Meiryo"/>
+                <a:cs typeface="Meiryo"/>
+                <a:sym typeface="Meiryo"/>
+              </a:rPr>
+              <a:t>LINE公式アカウント</a:t>
+            </a:r>
+            <a:endParaRPr sz="1000">
+              <a:solidFill>
+                <a:schemeClr val="dk1"/>
+              </a:solidFill>
+              <a:latin typeface="Meiryo"/>
+              <a:ea typeface="Meiryo"/>
+              <a:cs typeface="Meiryo"/>
+              <a:sym typeface="Meiryo"/>
+            </a:endParaRPr>
+          </a:p>
+        </p:txBody>
+      </p:sp>
+      <p:sp>
+        <p:nvSpPr>
+          <p:cNvPr id="50" name="Google Shape;50;p3"/>
+          <p:cNvSpPr/>
+          <p:nvPr/>
+        </p:nvSpPr>
+        <p:spPr>
+          <a:xfrm>
+            <a:off x="0" y="1890267"/>
+            <a:ext cx="9906000" cy="733579"/>
+          </a:xfrm>
+          <a:prstGeom prst="rect">
+            <a:avLst/>
+          </a:prstGeom>
+          <a:solidFill>
+            <a:srgbClr val="F2F2F2"/>
+          </a:solidFill>
+          <a:ln>
+            <a:noFill/>
+          </a:ln>
+        </p:spPr>
+        <p:txBody>
+          <a:bodyPr spcFirstLastPara="1" wrap="square" lIns="91425" tIns="45700" rIns="91425" bIns="45700" anchor="ctr" anchorCtr="0">
+            <a:noAutofit/>
+          </a:bodyPr>
+          <a:lstStyle/>
+          <a:p>
+            <a:pPr marL="0" marR="0" lvl="0" indent="0" algn="ctr" rtl="0">
+              <a:spcBef>
+                <a:spcPts val="0"/>
+              </a:spcBef>
+              <a:spcAft>
+                <a:spcPts val="0"/>
+              </a:spcAft>
+              <a:buNone/>
+            </a:pPr>
+            <a:endParaRPr sz="1200">
+              <a:solidFill>
+                <a:schemeClr val="dk1"/>
+              </a:solidFill>
+              <a:latin typeface="Meiryo"/>
+              <a:ea typeface="Meiryo"/>
+              <a:cs typeface="Meiryo"/>
+              <a:sym typeface="Meiryo"/>
+            </a:endParaRPr>
+          </a:p>
+        </p:txBody>
+      </p:sp>
+      <p:sp>
+        <p:nvSpPr>
+          <p:cNvPr id="51" name="Google Shape;51;p3"/>
+          <p:cNvSpPr/>
+          <p:nvPr/>
+        </p:nvSpPr>
+        <p:spPr>
+          <a:xfrm>
+            <a:off x="544108" y="1961282"/>
+            <a:ext cx="8817783" cy="646331"/>
+          </a:xfrm>
+          <a:prstGeom prst="rect">
+            <a:avLst/>
+          </a:prstGeom>
+          <a:noFill/>
+          <a:ln>
+            <a:noFill/>
+          </a:ln>
+        </p:spPr>
+        <p:txBody>
+          <a:bodyPr spcFirstLastPara="1" wrap="square" lIns="91425" tIns="45700" rIns="91425" bIns="45700" anchor="t" anchorCtr="0">
+            <a:spAutoFit/>
+          </a:bodyPr>
+          <a:lstStyle/>
+          <a:p>
+            <a:pPr marL="0" marR="0" lvl="0" indent="0" algn="ctr" rtl="0">
+              <a:spcBef>
+                <a:spcPts val="0"/>
+              </a:spcBef>
+              <a:spcAft>
+                <a:spcPts val="0"/>
+              </a:spcAft>
+              <a:buNone/>
+            </a:pPr>
+            <a:r>
+              <a:rPr lang="ja-JP" sz="1200" b="1">
+                <a:solidFill>
+                  <a:schemeClr val="dk1"/>
+                </a:solidFill>
+                <a:latin typeface="メイリオ"/>
+                <a:ea typeface="Meiryo"/>
+                <a:cs typeface="Meiryo"/>
+                <a:sym typeface="Meiryo"/>
+              </a:rPr>
+              <a:t>ネイティブアプリへ遷移させるには、LINEヤフーの審査で次の4つを満たす必要がある。</a:t>
+            </a:r>
+            <a:endParaRPr sz="1200" b="1">
+              <a:solidFill>
+                <a:schemeClr val="dk1"/>
+              </a:solidFill>
+              <a:latin typeface="Meiryo"/>
+              <a:ea typeface="Meiryo"/>
+              <a:cs typeface="Meiryo"/>
+              <a:sym typeface="Meiryo"/>
+            </a:endParaRPr>
+          </a:p>
+          <a:p>
+            <a:pPr marL="0" marR="0" lvl="0" indent="0" algn="ctr" rtl="0">
+              <a:spcBef>
+                <a:spcPts val="0"/>
+              </a:spcBef>
+              <a:spcAft>
+                <a:spcPts val="0"/>
+              </a:spcAft>
+              <a:buNone/>
+            </a:pPr>
+            <a:r>
+              <a:rPr lang="ja-JP" sz="1200" b="1">
+                <a:solidFill>
+                  <a:schemeClr val="dk1"/>
+                </a:solidFill>
+                <a:latin typeface="メイリオ"/>
+                <a:ea typeface="Meiryo"/>
+                <a:cs typeface="Meiryo"/>
+                <a:sym typeface="Meiryo"/>
+              </a:rPr>
+              <a:t>条件はLINE通知メッセージ（フレキシブル／テンプレート）のUXガイドラインに記載。</a:t>
+            </a:r>
+            <a:endParaRPr/>
+          </a:p>
+          <a:p>
+            <a:pPr marL="0" marR="0" lvl="0" indent="0" algn="ctr" rtl="0">
+              <a:spcBef>
+                <a:spcPts val="0"/>
+              </a:spcBef>
+              <a:spcAft>
+                <a:spcPts val="0"/>
+              </a:spcAft>
+              <a:buNone/>
+            </a:pPr>
+            <a:r>
+              <a:rPr lang="ja-JP" sz="1200" b="1">
+                <a:solidFill>
+                  <a:schemeClr val="dk1"/>
+                </a:solidFill>
+                <a:latin typeface="メイリオ"/>
+                <a:ea typeface="Meiryo"/>
+                <a:cs typeface="Meiryo"/>
+                <a:sym typeface="Meiryo"/>
+              </a:rPr>
+              <a:t>対象プラン：エッセンシャル／パフォーマンス／アンリミテッド</a:t>
+            </a:r>
+            <a:endParaRPr sz="1400" b="1">
+              <a:solidFill>
+                <a:schemeClr val="dk1"/>
+              </a:solidFill>
+              <a:latin typeface="Meiryo"/>
+              <a:ea typeface="Meiryo"/>
+              <a:cs typeface="Meiryo"/>
+              <a:sym typeface="Meiryo"/>
+            </a:endParaRPr>
+          </a:p>
+        </p:txBody>
+      </p:sp>
+      <p:sp>
+        <p:nvSpPr>
+          <p:cNvPr id="52" name="Google Shape;52;p3"/>
+          <p:cNvSpPr/>
+          <p:nvPr/>
+        </p:nvSpPr>
+        <p:spPr>
+          <a:xfrm>
+            <a:off x="351381" y="2714173"/>
+            <a:ext cx="5200000" cy="338554"/>
+          </a:xfrm>
+          <a:prstGeom prst="rect">
+            <a:avLst/>
+          </a:prstGeom>
+          <a:noFill/>
+          <a:ln>
+            <a:noFill/>
+          </a:ln>
+        </p:spPr>
+        <p:txBody>
+          <a:bodyPr spcFirstLastPara="1" wrap="square" lIns="91425" tIns="45700" rIns="91425" bIns="45700" anchor="t" anchorCtr="0">
+            <a:noAutofit/>
+          </a:bodyPr>
+          <a:lstStyle/>
+          <a:p>
+            <a:pPr marL="0" marR="0" lvl="0" indent="0" algn="l" rtl="0">
+              <a:spcBef>
+                <a:spcPts val="0"/>
+              </a:spcBef>
+              <a:spcAft>
+                <a:spcPts val="0"/>
+              </a:spcAft>
+              <a:buNone/>
+            </a:pPr>
+            <a:r>
+              <a:rPr lang="ja-JP" sz="1400" b="1">
+                <a:solidFill>
+                  <a:srgbClr val="15133D"/>
+                </a:solidFill>
+                <a:latin typeface="メイリオ"/>
+                <a:ea typeface="Meiryo"/>
+                <a:cs typeface="Meiryo"/>
+                <a:sym typeface="Meiryo"/>
+              </a:rPr>
+              <a:t>■ 詳細</a:t>
+            </a:r>
+            <a:endParaRPr/>
+          </a:p>
+        </p:txBody>
+      </p:sp>
+      <p:grpSp>
+        <p:nvGrpSpPr>
+          <p:cNvPr id="53" name="Google Shape;53;p3"/>
+          <p:cNvGrpSpPr/>
+          <p:nvPr/>
+        </p:nvGrpSpPr>
+        <p:grpSpPr>
+          <a:xfrm>
+            <a:off x="8473303" y="730955"/>
+            <a:ext cx="1376241" cy="1131930"/>
+            <a:chOff x="0" y="0"/>
+            <a:chExt cx="1376241" cy="1131930"/>
+          </a:xfrm>
+        </p:grpSpPr>
+        <p:sp>
+          <p:nvSpPr>
+            <p:cNvPr id="54" name="Google Shape;54;p3"/>
+            <p:cNvSpPr/>
+            <p:nvPr/>
+          </p:nvSpPr>
+          <p:spPr>
+            <a:xfrm rot="10800000">
+              <a:off x="0" y="0"/>
+              <a:ext cx="1376241" cy="282982"/>
+            </a:xfrm>
+            <a:prstGeom prst="trapezoid">
+              <a:avLst>
+                <a:gd name="adj" fmla="val 60792"/>
+              </a:avLst>
+            </a:prstGeom>
+            <a:solidFill>
+              <a:schemeClr val="lt1"/>
+            </a:solidFill>
+            <a:ln w="25400" cap="flat" cmpd="sng">
+              <a:solidFill>
+                <a:schemeClr val="dk2"/>
+              </a:solidFill>
+              <a:prstDash val="solid"/>
+              <a:round/>
+              <a:headEnd type="none" w="sm" len="sm"/>
+              <a:tailEnd type="none" w="sm" len="sm"/>
+            </a:ln>
+          </p:spPr>
+          <p:txBody>
+            <a:bodyPr spcFirstLastPara="1" wrap="square" lIns="91425" tIns="91425" rIns="91425" bIns="91425" anchor="ctr" anchorCtr="0">
+              <a:noAutofit/>
+            </a:bodyPr>
+            <a:lstStyle/>
+            <a:p>
+              <a:pPr marL="0" lvl="0" indent="0" algn="l" rtl="0">
+                <a:spcBef>
+                  <a:spcPts val="0"/>
+                </a:spcBef>
+                <a:spcAft>
+                  <a:spcPts val="0"/>
+                </a:spcAft>
+                <a:buNone/>
+              </a:pPr>
+              <a:endParaRPr/>
+            </a:p>
+          </p:txBody>
+        </p:sp>
+        <p:sp>
+          <p:nvSpPr>
+            <p:cNvPr id="55" name="Google Shape;55;p3"/>
+            <p:cNvSpPr txBox="1"/>
+            <p:nvPr/>
+          </p:nvSpPr>
+          <p:spPr>
+            <a:xfrm>
+              <a:off x="240842" y="0"/>
+              <a:ext cx="894556" cy="282982"/>
+            </a:xfrm>
+            <a:prstGeom prst="rect">
+              <a:avLst/>
+            </a:prstGeom>
+            <a:noFill/>
+            <a:ln>
+              <a:noFill/>
+            </a:ln>
+          </p:spPr>
+          <p:txBody>
+            <a:bodyPr spcFirstLastPara="1" wrap="square" lIns="10150" tIns="10150" rIns="10150" bIns="10150" anchor="ctr" anchorCtr="0">
+              <a:noAutofit/>
+            </a:bodyPr>
+            <a:lstStyle/>
+            <a:p>
+              <a:pPr marL="0" marR="0" lvl="0" indent="0" algn="ctr" rtl="0">
+                <a:lnSpc>
+                  <a:spcPct val="90000"/>
+                </a:lnSpc>
+                <a:spcBef>
+                  <a:spcPts val="0"/>
+                </a:spcBef>
+                <a:spcAft>
+                  <a:spcPts val="0"/>
+                </a:spcAft>
+                <a:buClr>
+                  <a:srgbClr val="262626"/>
+                </a:buClr>
+                <a:buSzPts val="800"/>
+                <a:buFont typeface="Arial"/>
+                <a:buNone/>
+              </a:pPr>
+              <a:r>
+                <a:rPr lang="ja-JP" sz="800" b="1">
+                  <a:solidFill>
+                    <a:srgbClr val="262626"/>
+                  </a:solidFill>
+                  <a:latin typeface="Arial"/>
+                  <a:ea typeface="Arial"/>
+                  <a:cs typeface="Arial"/>
+                  <a:sym typeface="Arial"/>
+                </a:rPr>
+                <a:t>認知</a:t>
+              </a:r>
+              <a:endParaRPr/>
+            </a:p>
+          </p:txBody>
+        </p:sp>
+        <p:sp>
+          <p:nvSpPr>
+            <p:cNvPr id="56" name="Google Shape;56;p3"/>
+            <p:cNvSpPr/>
+            <p:nvPr/>
+          </p:nvSpPr>
+          <p:spPr>
+            <a:xfrm rot="10800000">
+              <a:off x="172030" y="282982"/>
+              <a:ext cx="1032180" cy="282982"/>
+            </a:xfrm>
+            <a:prstGeom prst="trapezoid">
+              <a:avLst>
+                <a:gd name="adj" fmla="val 60792"/>
+              </a:avLst>
+            </a:prstGeom>
+            <a:solidFill>
+              <a:schemeClr val="lt1"/>
+            </a:solidFill>
+            <a:ln w="25400" cap="flat" cmpd="sng">
+              <a:solidFill>
+                <a:schemeClr val="dk2"/>
+              </a:solidFill>
+              <a:prstDash val="solid"/>
+              <a:round/>
+              <a:headEnd type="none" w="sm" len="sm"/>
+              <a:tailEnd type="none" w="sm" len="sm"/>
+            </a:ln>
+          </p:spPr>
+          <p:txBody>
+            <a:bodyPr spcFirstLastPara="1" wrap="square" lIns="91425" tIns="91425" rIns="91425" bIns="91425" anchor="ctr" anchorCtr="0">
+              <a:noAutofit/>
+            </a:bodyPr>
+            <a:lstStyle/>
+            <a:p>
+              <a:pPr marL="0" lvl="0" indent="0" algn="l" rtl="0">
+                <a:spcBef>
+                  <a:spcPts val="0"/>
+                </a:spcBef>
+                <a:spcAft>
+                  <a:spcPts val="0"/>
+                </a:spcAft>
+                <a:buNone/>
+              </a:pPr>
+              <a:endParaRPr/>
+            </a:p>
+          </p:txBody>
+        </p:sp>
+        <p:sp>
+          <p:nvSpPr>
+            <p:cNvPr id="57" name="Google Shape;57;p3"/>
+            <p:cNvSpPr txBox="1"/>
+            <p:nvPr/>
+          </p:nvSpPr>
+          <p:spPr>
+            <a:xfrm>
+              <a:off x="352661" y="282982"/>
+              <a:ext cx="670917" cy="282982"/>
+            </a:xfrm>
+            <a:prstGeom prst="rect">
+              <a:avLst/>
+            </a:prstGeom>
+            <a:noFill/>
+            <a:ln>
+              <a:noFill/>
+            </a:ln>
+          </p:spPr>
+          <p:txBody>
+            <a:bodyPr spcFirstLastPara="1" wrap="square" lIns="10150" tIns="10150" rIns="10150" bIns="10150" anchor="ctr" anchorCtr="0">
+              <a:noAutofit/>
+            </a:bodyPr>
+            <a:lstStyle/>
+            <a:p>
+              <a:pPr marL="0" marR="0" lvl="0" indent="0" algn="ctr" rtl="0">
+                <a:lnSpc>
+                  <a:spcPct val="90000"/>
+                </a:lnSpc>
+                <a:spcBef>
+                  <a:spcPts val="0"/>
+                </a:spcBef>
+                <a:spcAft>
+                  <a:spcPts val="0"/>
+                </a:spcAft>
+                <a:buClr>
+                  <a:srgbClr val="262626"/>
+                </a:buClr>
+                <a:buSzPts val="800"/>
+                <a:buFont typeface="Arial"/>
+                <a:buNone/>
+              </a:pPr>
+              <a:r>
+                <a:rPr lang="ja-JP" sz="800" b="1">
+                  <a:solidFill>
+                    <a:srgbClr val="262626"/>
+                  </a:solidFill>
+                  <a:latin typeface="Arial"/>
+                  <a:ea typeface="Arial"/>
+                  <a:cs typeface="Arial"/>
+                  <a:sym typeface="Arial"/>
+                </a:rPr>
+                <a:t>検討</a:t>
+              </a:r>
+              <a:endParaRPr/>
+            </a:p>
+          </p:txBody>
+        </p:sp>
+        <p:sp>
+          <p:nvSpPr>
+            <p:cNvPr id="58" name="Google Shape;58;p3"/>
+            <p:cNvSpPr/>
+            <p:nvPr/>
+          </p:nvSpPr>
+          <p:spPr>
+            <a:xfrm rot="10800000">
+              <a:off x="344060" y="565965"/>
+              <a:ext cx="688120" cy="282982"/>
+            </a:xfrm>
+            <a:prstGeom prst="trapezoid">
+              <a:avLst>
+                <a:gd name="adj" fmla="val 60792"/>
+              </a:avLst>
+            </a:prstGeom>
+            <a:solidFill>
+              <a:schemeClr val="dk2"/>
+            </a:solidFill>
+            <a:ln w="25400" cap="flat" cmpd="sng">
+              <a:solidFill>
+                <a:schemeClr val="dk2"/>
+              </a:solidFill>
+              <a:prstDash val="solid"/>
+              <a:round/>
+              <a:headEnd type="none" w="sm" len="sm"/>
+              <a:tailEnd type="none" w="sm" len="sm"/>
+            </a:ln>
+          </p:spPr>
+          <p:txBody>
+            <a:bodyPr spcFirstLastPara="1" wrap="square" lIns="91425" tIns="91425" rIns="91425" bIns="91425" anchor="ctr" anchorCtr="0">
+              <a:noAutofit/>
+            </a:bodyPr>
+            <a:lstStyle/>
+            <a:p>
+              <a:pPr marL="0" lvl="0" indent="0" algn="l" rtl="0">
+                <a:spcBef>
+                  <a:spcPts val="0"/>
+                </a:spcBef>
+                <a:spcAft>
+                  <a:spcPts val="0"/>
+                </a:spcAft>
+                <a:buNone/>
+              </a:pPr>
+              <a:endParaRPr/>
+            </a:p>
+          </p:txBody>
+        </p:sp>
+        <p:sp>
+          <p:nvSpPr>
+            <p:cNvPr id="59" name="Google Shape;59;p3"/>
+            <p:cNvSpPr txBox="1"/>
+            <p:nvPr/>
+          </p:nvSpPr>
+          <p:spPr>
+            <a:xfrm>
+              <a:off x="464481" y="565965"/>
+              <a:ext cx="447278" cy="282982"/>
+            </a:xfrm>
+            <a:prstGeom prst="rect">
+              <a:avLst/>
+            </a:prstGeom>
+            <a:noFill/>
+            <a:ln>
+              <a:noFill/>
+            </a:ln>
+          </p:spPr>
+          <p:txBody>
+            <a:bodyPr spcFirstLastPara="1" wrap="square" lIns="10150" tIns="10150" rIns="10150" bIns="10150" anchor="ctr" anchorCtr="0">
+              <a:noAutofit/>
+            </a:bodyPr>
+            <a:lstStyle/>
+            <a:p>
+              <a:pPr marL="0" marR="0" lvl="0" indent="0" algn="ctr" rtl="0">
+                <a:lnSpc>
+                  <a:spcPct val="90000"/>
+                </a:lnSpc>
+                <a:spcBef>
+                  <a:spcPts val="0"/>
+                </a:spcBef>
+                <a:spcAft>
+                  <a:spcPts val="0"/>
+                </a:spcAft>
+                <a:buClr>
+                  <a:srgbClr val="262626"/>
+                </a:buClr>
+                <a:buSzPts val="800"/>
+                <a:buFont typeface="Arial"/>
+                <a:buNone/>
+              </a:pPr>
+              <a:r>
+                <a:rPr lang="ja-JP" sz="800" b="1">
+                  <a:solidFill>
+                    <a:srgbClr val="FFFFFF"/>
+                  </a:solidFill>
+                  <a:latin typeface="Arial"/>
+                  <a:ea typeface="Arial"/>
+                  <a:cs typeface="Arial"/>
+                  <a:sym typeface="Arial"/>
+                </a:rPr>
+                <a:t>獲得</a:t>
+              </a:r>
+              <a:endParaRPr/>
+            </a:p>
+          </p:txBody>
+        </p:sp>
+        <p:sp>
+          <p:nvSpPr>
+            <p:cNvPr id="60" name="Google Shape;60;p3"/>
+            <p:cNvSpPr/>
+            <p:nvPr/>
+          </p:nvSpPr>
+          <p:spPr>
+            <a:xfrm rot="10800000">
+              <a:off x="516090" y="848948"/>
+              <a:ext cx="344060" cy="282982"/>
+            </a:xfrm>
+            <a:prstGeom prst="trapezoid">
+              <a:avLst>
+                <a:gd name="adj" fmla="val 60792"/>
+              </a:avLst>
+            </a:prstGeom>
+            <a:solidFill>
+              <a:schemeClr val="lt1"/>
+            </a:solidFill>
+            <a:ln w="25400" cap="flat" cmpd="sng">
+              <a:solidFill>
+                <a:schemeClr val="dk2"/>
+              </a:solidFill>
+              <a:prstDash val="solid"/>
+              <a:round/>
+              <a:headEnd type="none" w="sm" len="sm"/>
+              <a:tailEnd type="none" w="sm" len="sm"/>
+            </a:ln>
+          </p:spPr>
+          <p:txBody>
+            <a:bodyPr spcFirstLastPara="1" wrap="square" lIns="91425" tIns="91425" rIns="91425" bIns="91425" anchor="ctr" anchorCtr="0">
+              <a:noAutofit/>
+            </a:bodyPr>
+            <a:lstStyle/>
+            <a:p>
+              <a:pPr marL="0" lvl="0" indent="0" algn="l" rtl="0">
+                <a:spcBef>
+                  <a:spcPts val="0"/>
+                </a:spcBef>
+                <a:spcAft>
+                  <a:spcPts val="0"/>
+                </a:spcAft>
+                <a:buNone/>
+              </a:pPr>
+              <a:endParaRPr/>
+            </a:p>
+          </p:txBody>
+        </p:sp>
+        <p:sp>
+          <p:nvSpPr>
+            <p:cNvPr id="61" name="Google Shape;61;p3"/>
+            <p:cNvSpPr txBox="1"/>
+            <p:nvPr/>
+          </p:nvSpPr>
+          <p:spPr>
+            <a:xfrm>
+              <a:off x="516090" y="848948"/>
+              <a:ext cx="344060" cy="282982"/>
+            </a:xfrm>
+            <a:prstGeom prst="rect">
+              <a:avLst/>
+            </a:prstGeom>
+            <a:noFill/>
+            <a:ln>
+              <a:noFill/>
+            </a:ln>
+          </p:spPr>
+          <p:txBody>
+            <a:bodyPr spcFirstLastPara="1" wrap="square" lIns="10150" tIns="10150" rIns="10150" bIns="10150" anchor="ctr" anchorCtr="0">
+              <a:noAutofit/>
+            </a:bodyPr>
+            <a:lstStyle/>
+            <a:p>
+              <a:pPr marL="0" marR="0" lvl="0" indent="0" algn="ctr" rtl="0">
+                <a:lnSpc>
+                  <a:spcPct val="90000"/>
+                </a:lnSpc>
+                <a:spcBef>
+                  <a:spcPts val="0"/>
+                </a:spcBef>
+                <a:spcAft>
+                  <a:spcPts val="0"/>
+                </a:spcAft>
+                <a:buClr>
+                  <a:srgbClr val="262626"/>
+                </a:buClr>
+                <a:buSzPts val="800"/>
+                <a:buFont typeface="Arial"/>
+                <a:buNone/>
+              </a:pPr>
+              <a:r>
+                <a:rPr lang="ja-JP" sz="800" b="1">
+                  <a:solidFill>
+                    <a:srgbClr val="262626"/>
+                  </a:solidFill>
+                  <a:latin typeface="Arial"/>
+                  <a:ea typeface="Arial"/>
+                  <a:cs typeface="Arial"/>
+                  <a:sym typeface="Arial"/>
+                </a:rPr>
+                <a:t>伸長</a:t>
+              </a:r>
+              <a:endParaRPr/>
+            </a:p>
+          </p:txBody>
+        </p:sp>
+      </p:grpSp>
+      <p:pic>
+        <p:nvPicPr>
+          <p:cNvPr id="62" name="Google Shape;62;p3" descr="LINE公式アカウントのロゴの使用方法とは？種類やダウンロード方法、利用時の注意点を紹介 | Mico（ミコ）"/>
+          <p:cNvPicPr preferRelativeResize="0"/>
+          <p:nvPr/>
+        </p:nvPicPr>
+        <p:blipFill rotWithShape="1">
+          <a:blip r:embed="rId2">
+            <a:alphaModFix/>
+          </a:blip>
+          <a:srcRect/>
+          <a:stretch/>
+        </p:blipFill>
+        <p:spPr>
+          <a:xfrm>
+            <a:off x="351381" y="1234746"/>
+            <a:ext cx="656177" cy="655521"/>
+          </a:xfrm>
+          <a:prstGeom prst="rect">
+            <a:avLst/>
+          </a:prstGeom>
+          <a:noFill/>
+          <a:ln>
+            <a:noFill/>
+          </a:ln>
+        </p:spPr>
+      </p:pic>
+      <p:sp>
+        <p:nvSpPr>
+          <p:cNvPr id="68" name="Rounded Rectangle 67"/>
+          <p:cNvSpPr/>
+          <p:nvPr/>
+        </p:nvSpPr>
+        <p:spPr>
+          <a:xfrm>
+            <a:off x="548640" y="3199715"/>
+            <a:ext cx="8814816" cy="3172968"/>
+          </a:xfrm>
+          <a:prstGeom prst="roundRect">
+            <a:avLst>
+              <a:gd name="adj" fmla="val 6000"/>
+            </a:avLst>
+          </a:prstGeom>
+          <a:solidFill>
+            <a:srgbClr val="EAF0FA"/>
+          </a:solidFill>
+          <a:ln w="12700">
+            <a:solidFill>
+              <a:srgbClr val="3467B2"/>
+            </a:solidFill>
+          </a:ln>
+          <a:effectLst/>
+        </p:spPr>
+        <p:style>
+          <a:lnRef idx="1">
+            <a:schemeClr val="accent1"/>
+          </a:lnRef>
+          <a:fillRef idx="3">
+            <a:schemeClr val="accent1"/>
+          </a:fillRef>
+          <a:effectRef idx="2">
+            <a:schemeClr val="accent1"/>
+          </a:effectRef>
+          <a:fontRef idx="minor">
+            <a:schemeClr val="lt1"/>
+          </a:fontRef>
+        </p:style>
+        <p:txBody>
+          <a:bodyPr wrap="square" lIns="228600" rIns="182880" rtlCol="0" anchor="ctr"/>
+          <a:lstStyle/>
+          <a:p>
+            <a:pPr algn="l"/>
+            <a:r>
+              <a:rPr sz="1900" b="1" dirty="0">
+                <a:solidFill>
+                  <a:srgbClr val="15133D"/>
+                </a:solidFill>
+                <a:latin typeface="メイリオ"/>
+              </a:rPr>
+              <a:t>審査で確認される4つの条件</a:t>
+            </a:r>
+          </a:p>
+          <a:p>
+            <a:pPr algn="l">
+              <a:lnSpc>
+                <a:spcPct val="115000"/>
+              </a:lnSpc>
+              <a:spcBef>
+                <a:spcPts val="1000"/>
+              </a:spcBef>
+            </a:pPr>
+            <a:r>
+              <a:rPr sz="1400" b="1" dirty="0">
+                <a:solidFill>
+                  <a:srgbClr val="15133D"/>
+                </a:solidFill>
+                <a:latin typeface="メイリオ"/>
+              </a:rPr>
+              <a:t>■ </a:t>
+            </a:r>
+            <a:r>
+              <a:rPr sz="1400" b="1" dirty="0" err="1">
+                <a:solidFill>
+                  <a:srgbClr val="15133D"/>
+                </a:solidFill>
+                <a:latin typeface="メイリオ"/>
+              </a:rPr>
+              <a:t>遷移の方式：</a:t>
+            </a:r>
+            <a:r>
+              <a:rPr sz="1400" dirty="0" err="1">
+                <a:solidFill>
+                  <a:srgbClr val="333333"/>
+                </a:solidFill>
+                <a:latin typeface="メイリオ"/>
+              </a:rPr>
+              <a:t>iPhone／Androidの標準の仕組み（Universal</a:t>
+            </a:r>
+            <a:r>
+              <a:rPr sz="1400" dirty="0">
+                <a:solidFill>
+                  <a:srgbClr val="333333"/>
+                </a:solidFill>
+                <a:latin typeface="メイリオ"/>
+              </a:rPr>
+              <a:t> </a:t>
+            </a:r>
+            <a:r>
+              <a:rPr sz="1400" dirty="0" err="1">
+                <a:solidFill>
+                  <a:srgbClr val="333333"/>
+                </a:solidFill>
+                <a:latin typeface="メイリオ"/>
+              </a:rPr>
+              <a:t>links／App</a:t>
+            </a:r>
+            <a:r>
+              <a:rPr sz="1400" dirty="0">
+                <a:solidFill>
+                  <a:srgbClr val="333333"/>
+                </a:solidFill>
+                <a:latin typeface="メイリオ"/>
+              </a:rPr>
+              <a:t> </a:t>
+            </a:r>
+            <a:r>
+              <a:rPr sz="1400" dirty="0" err="1">
+                <a:solidFill>
+                  <a:srgbClr val="333333"/>
+                </a:solidFill>
+                <a:latin typeface="メイリオ"/>
+              </a:rPr>
+              <a:t>Links）でアプリを開くこと</a:t>
+            </a:r>
+            <a:endParaRPr sz="1400" dirty="0">
+              <a:solidFill>
+                <a:srgbClr val="333333"/>
+              </a:solidFill>
+              <a:latin typeface="メイリオ"/>
+            </a:endParaRPr>
+          </a:p>
+          <a:p>
+            <a:pPr algn="l">
+              <a:lnSpc>
+                <a:spcPct val="115000"/>
+              </a:lnSpc>
+              <a:spcBef>
+                <a:spcPts val="1000"/>
+              </a:spcBef>
+            </a:pPr>
+            <a:r>
+              <a:rPr sz="1400" b="1" dirty="0">
+                <a:solidFill>
+                  <a:srgbClr val="15133D"/>
+                </a:solidFill>
+                <a:latin typeface="メイリオ"/>
+              </a:rPr>
+              <a:t>■ </a:t>
+            </a:r>
+            <a:r>
+              <a:rPr sz="1400" b="1" dirty="0" err="1">
+                <a:solidFill>
+                  <a:srgbClr val="15133D"/>
+                </a:solidFill>
+                <a:latin typeface="メイリオ"/>
+              </a:rPr>
+              <a:t>ドメインの一致：</a:t>
+            </a:r>
+            <a:r>
+              <a:rPr sz="1400" dirty="0" err="1">
+                <a:solidFill>
+                  <a:srgbClr val="333333"/>
+                </a:solidFill>
+                <a:latin typeface="メイリオ"/>
+              </a:rPr>
+              <a:t>送信元の公式ドメインと、遷移先URLのドメインが同じであること</a:t>
+            </a:r>
+            <a:endParaRPr sz="1400" dirty="0">
+              <a:solidFill>
+                <a:srgbClr val="333333"/>
+              </a:solidFill>
+              <a:latin typeface="メイリオ"/>
+            </a:endParaRPr>
+          </a:p>
+          <a:p>
+            <a:pPr algn="l">
+              <a:lnSpc>
+                <a:spcPct val="115000"/>
+              </a:lnSpc>
+              <a:spcBef>
+                <a:spcPts val="1000"/>
+              </a:spcBef>
+            </a:pPr>
+            <a:r>
+              <a:rPr sz="1400" b="1" dirty="0">
+                <a:solidFill>
+                  <a:srgbClr val="15133D"/>
+                </a:solidFill>
+                <a:latin typeface="メイリオ"/>
+              </a:rPr>
+              <a:t>■ </a:t>
+            </a:r>
+            <a:r>
+              <a:rPr sz="1400" b="1" dirty="0" err="1">
+                <a:solidFill>
+                  <a:srgbClr val="15133D"/>
+                </a:solidFill>
+                <a:latin typeface="メイリオ"/>
+              </a:rPr>
+              <a:t>アプリ未インストール時：</a:t>
+            </a:r>
+            <a:r>
+              <a:rPr sz="1400" dirty="0" err="1">
+                <a:solidFill>
+                  <a:srgbClr val="333333"/>
+                </a:solidFill>
+                <a:latin typeface="メイリオ"/>
+              </a:rPr>
+              <a:t>通知内容に関連するWebページを表示すること</a:t>
+            </a:r>
+            <a:endParaRPr lang="en-US" sz="1400" dirty="0">
+              <a:solidFill>
+                <a:srgbClr val="333333"/>
+              </a:solidFill>
+              <a:latin typeface="メイリオ"/>
+            </a:endParaRPr>
+          </a:p>
+          <a:p>
+            <a:pPr algn="l">
+              <a:lnSpc>
+                <a:spcPct val="115000"/>
+              </a:lnSpc>
+              <a:spcBef>
+                <a:spcPts val="1000"/>
+              </a:spcBef>
+            </a:pPr>
+            <a:r>
+              <a:rPr sz="1400" dirty="0">
+                <a:solidFill>
+                  <a:srgbClr val="333333"/>
+                </a:solidFill>
+                <a:latin typeface="メイリオ"/>
+              </a:rPr>
+              <a:t>（App </a:t>
+            </a:r>
+            <a:r>
+              <a:rPr sz="1400" dirty="0" err="1">
+                <a:solidFill>
+                  <a:srgbClr val="333333"/>
+                </a:solidFill>
+                <a:latin typeface="メイリオ"/>
+              </a:rPr>
+              <a:t>Store／Google</a:t>
+            </a:r>
+            <a:r>
+              <a:rPr sz="1400" dirty="0">
+                <a:solidFill>
+                  <a:srgbClr val="333333"/>
+                </a:solidFill>
+                <a:latin typeface="メイリオ"/>
+              </a:rPr>
+              <a:t> </a:t>
+            </a:r>
+            <a:r>
+              <a:rPr sz="1400" dirty="0" err="1">
+                <a:solidFill>
+                  <a:srgbClr val="333333"/>
+                </a:solidFill>
+                <a:latin typeface="メイリオ"/>
+              </a:rPr>
+              <a:t>Playへの自動遷移は不可</a:t>
+            </a:r>
+            <a:r>
+              <a:rPr sz="1400" dirty="0">
+                <a:solidFill>
+                  <a:srgbClr val="333333"/>
+                </a:solidFill>
+                <a:latin typeface="メイリオ"/>
+              </a:rPr>
+              <a:t>）</a:t>
+            </a:r>
+          </a:p>
+          <a:p>
+            <a:pPr algn="l">
+              <a:lnSpc>
+                <a:spcPct val="115000"/>
+              </a:lnSpc>
+              <a:spcBef>
+                <a:spcPts val="1000"/>
+              </a:spcBef>
+            </a:pPr>
+            <a:r>
+              <a:rPr sz="1400" b="1" dirty="0">
+                <a:solidFill>
+                  <a:srgbClr val="15133D"/>
+                </a:solidFill>
+                <a:latin typeface="メイリオ"/>
+              </a:rPr>
+              <a:t>■ </a:t>
+            </a:r>
+            <a:r>
+              <a:rPr sz="1400" b="1" dirty="0" err="1">
+                <a:solidFill>
+                  <a:srgbClr val="15133D"/>
+                </a:solidFill>
+                <a:latin typeface="メイリオ"/>
+              </a:rPr>
+              <a:t>表示内容の一致：</a:t>
+            </a:r>
+            <a:r>
+              <a:rPr sz="1400" dirty="0" err="1">
+                <a:solidFill>
+                  <a:srgbClr val="333333"/>
+                </a:solidFill>
+                <a:latin typeface="メイリオ"/>
+              </a:rPr>
+              <a:t>アプリとWebで同じ内容を表示すること</a:t>
+            </a:r>
+            <a:endParaRPr lang="en-US" sz="1400" dirty="0">
+              <a:solidFill>
+                <a:srgbClr val="333333"/>
+              </a:solidFill>
+              <a:latin typeface="メイリオ"/>
+            </a:endParaRPr>
+          </a:p>
+          <a:p>
+            <a:pPr algn="l">
+              <a:lnSpc>
+                <a:spcPct val="115000"/>
+              </a:lnSpc>
+              <a:spcBef>
+                <a:spcPts val="1000"/>
+              </a:spcBef>
+            </a:pPr>
+            <a:r>
+              <a:rPr sz="1400" dirty="0">
+                <a:solidFill>
+                  <a:srgbClr val="333333"/>
+                </a:solidFill>
+                <a:latin typeface="メイリオ"/>
+              </a:rPr>
+              <a:t>（</a:t>
+            </a:r>
+            <a:r>
+              <a:rPr sz="1400" dirty="0" err="1">
+                <a:solidFill>
+                  <a:srgbClr val="333333"/>
+                </a:solidFill>
+                <a:latin typeface="メイリオ"/>
+              </a:rPr>
+              <a:t>アプリはマイページ・Webはトップページ、のような構成は不可</a:t>
+            </a:r>
+            <a:r>
+              <a:rPr sz="1400" dirty="0">
+                <a:solidFill>
+                  <a:srgbClr val="333333"/>
+                </a:solidFill>
+                <a:latin typeface="メイリオ"/>
+              </a:rPr>
+              <a:t>）</a:t>
+            </a:r>
+          </a:p>
+        </p:txBody>
+      </p:sp>
+    </p:spTree>
+  </p:cSld>
+  <p:clrMapOvr>
+    <a:masterClrMapping/>
+  </p:clrMapOvr>
+</p:sld>
+</file>
+
+<file path=ppt/slides/slide5.xml><?xml version="1.0" encoding="utf-8"?>
+<p:sld xmlns:a="http://schemas.openxmlformats.org/drawingml/2006/main" xmlns:r="http://schemas.openxmlformats.org/officeDocument/2006/relationships" xmlns:p="http://schemas.openxmlformats.org/presentationml/2006/main">
+  <p:cSld>
+    <p:spTree>
+      <p:nvGrpSpPr>
+        <p:cNvPr id="1" name=""/>
+        <p:cNvGrpSpPr/>
+        <p:nvPr/>
+      </p:nvGrpSpPr>
+      <p:grpSpPr>
+        <a:xfrm>
+          <a:off x="0" y="0"/>
+          <a:ext cx="0" cy="0"/>
+          <a:chOff x="0" y="0"/>
+          <a:chExt cx="0" cy="0"/>
+        </a:xfrm>
+      </p:grpSpPr>
+      <p:sp>
+        <p:nvSpPr>
+          <p:cNvPr id="40" name="Google Shape;40;p3"/>
+          <p:cNvSpPr/>
+          <p:nvPr/>
+        </p:nvSpPr>
+        <p:spPr>
+          <a:xfrm>
+            <a:off x="292801" y="730955"/>
+            <a:ext cx="1296144" cy="435690"/>
+          </a:xfrm>
+          <a:prstGeom prst="rect">
+            <a:avLst/>
+          </a:prstGeom>
+          <a:solidFill>
+            <a:schemeClr val="dk2"/>
+          </a:solidFill>
+          <a:ln w="9525" cap="flat" cmpd="sng">
+            <a:solidFill>
+              <a:srgbClr val="4A7DBA"/>
+            </a:solidFill>
+            <a:prstDash val="solid"/>
+            <a:round/>
+            <a:headEnd type="none" w="sm" len="sm"/>
+            <a:tailEnd type="none" w="sm" len="sm"/>
+          </a:ln>
+        </p:spPr>
+        <p:txBody>
+          <a:bodyPr spcFirstLastPara="1" wrap="square" lIns="91425" tIns="45700" rIns="91425" bIns="45700" anchor="ctr" anchorCtr="0">
+            <a:noAutofit/>
+          </a:bodyPr>
+          <a:lstStyle/>
+          <a:p>
+            <a:pPr marL="0" marR="0" lvl="0" indent="0" algn="ctr" rtl="0">
+              <a:spcBef>
+                <a:spcPts val="0"/>
+              </a:spcBef>
+              <a:spcAft>
+                <a:spcPts val="0"/>
+              </a:spcAft>
+              <a:buNone/>
+            </a:pPr>
+            <a:r>
+              <a:rPr lang="ja-JP" sz="1800" b="0" i="0" u="none" strike="noStrike" cap="none">
+                <a:solidFill>
+                  <a:schemeClr val="lt1"/>
+                </a:solidFill>
+                <a:latin typeface="メイリオ"/>
+                <a:ea typeface="Meiryo"/>
+                <a:cs typeface="Meiryo"/>
+                <a:sym typeface="Meiryo"/>
+              </a:rPr>
+              <a:t>対象業界</a:t>
+            </a:r>
+            <a:endParaRPr/>
+          </a:p>
+        </p:txBody>
+      </p:sp>
+      <p:sp>
+        <p:nvSpPr>
+          <p:cNvPr id="41" name="Google Shape;41;p3"/>
+          <p:cNvSpPr/>
+          <p:nvPr/>
+        </p:nvSpPr>
+        <p:spPr>
+          <a:xfrm>
+            <a:off x="7560840" y="730955"/>
+            <a:ext cx="829618" cy="435690"/>
+          </a:xfrm>
+          <a:prstGeom prst="rect">
+            <a:avLst/>
+          </a:prstGeom>
+          <a:solidFill>
+            <a:schemeClr val="bg1"/>
+          </a:solidFill>
+          <a:ln w="9525" cap="flat" cmpd="sng">
+            <a:solidFill>
+              <a:srgbClr val="4F81BD"/>
+            </a:solidFill>
+            <a:prstDash val="sysDash"/>
+            <a:round/>
+            <a:headEnd type="none" w="sm" len="sm"/>
+            <a:tailEnd type="none" w="sm" len="sm"/>
+          </a:ln>
+        </p:spPr>
+        <p:txBody>
+          <a:bodyPr spcFirstLastPara="1" wrap="square" lIns="91425" tIns="45700" rIns="91425" bIns="45700" anchor="ctr" anchorCtr="0">
+            <a:noAutofit/>
+          </a:bodyPr>
+          <a:lstStyle/>
+          <a:p>
+            <a:pPr marL="0" marR="0" lvl="0" indent="0" algn="ctr" rtl="0">
+              <a:spcBef>
+                <a:spcPts val="0"/>
+              </a:spcBef>
+              <a:spcAft>
+                <a:spcPts val="0"/>
+              </a:spcAft>
+              <a:buNone/>
+            </a:pPr>
+            <a:r>
+              <a:rPr lang="ja-JP" sz="1200" b="0" i="0" u="none" strike="noStrike" cap="none">
+                <a:solidFill>
+                  <a:schemeClr val="dk1"/>
+                </a:solidFill>
+                <a:latin typeface="メイリオ"/>
+                <a:ea typeface="Meiryo"/>
+                <a:cs typeface="Meiryo"/>
+                <a:sym typeface="Meiryo"/>
+              </a:rPr>
+              <a:t>その他</a:t>
+            </a:r>
+            <a:endParaRPr sz="1200" b="0" i="0" u="none" strike="noStrike" cap="none">
+              <a:solidFill>
+                <a:schemeClr val="dk1"/>
+              </a:solidFill>
+              <a:latin typeface="Meiryo"/>
+              <a:ea typeface="Meiryo"/>
+              <a:cs typeface="Meiryo"/>
+              <a:sym typeface="Meiryo"/>
+            </a:endParaRPr>
+          </a:p>
+        </p:txBody>
+      </p:sp>
+      <p:sp>
+        <p:nvSpPr>
+          <p:cNvPr id="42" name="Google Shape;42;p3"/>
+          <p:cNvSpPr/>
+          <p:nvPr/>
+        </p:nvSpPr>
+        <p:spPr>
+          <a:xfrm>
+            <a:off x="6679050" y="730955"/>
+            <a:ext cx="829618" cy="435690"/>
+          </a:xfrm>
+          <a:prstGeom prst="rect">
+            <a:avLst/>
+          </a:prstGeom>
+          <a:solidFill>
+            <a:schemeClr val="bg1"/>
+          </a:solidFill>
+          <a:ln w="9525" cap="flat" cmpd="sng">
+            <a:solidFill>
+              <a:srgbClr val="4F81BD"/>
+            </a:solidFill>
+            <a:prstDash val="sysDash"/>
+            <a:round/>
+            <a:headEnd type="none" w="sm" len="sm"/>
+            <a:tailEnd type="none" w="sm" len="sm"/>
+          </a:ln>
+        </p:spPr>
+        <p:txBody>
+          <a:bodyPr spcFirstLastPara="1" wrap="square" lIns="91425" tIns="45700" rIns="91425" bIns="45700" anchor="ctr" anchorCtr="0">
+            <a:noAutofit/>
+          </a:bodyPr>
+          <a:lstStyle/>
+          <a:p>
+            <a:pPr marL="0" marR="0" lvl="0" indent="0" algn="ctr" rtl="0">
+              <a:spcBef>
+                <a:spcPts val="0"/>
+              </a:spcBef>
+              <a:spcAft>
+                <a:spcPts val="0"/>
+              </a:spcAft>
+              <a:buNone/>
+            </a:pPr>
+            <a:r>
+              <a:rPr lang="ja-JP" sz="1000" b="0" i="0" u="none" strike="noStrike" cap="none">
+                <a:solidFill>
+                  <a:schemeClr val="dk1"/>
+                </a:solidFill>
+                <a:latin typeface="メイリオ"/>
+                <a:ea typeface="Meiryo"/>
+                <a:cs typeface="Meiryo"/>
+                <a:sym typeface="Meiryo"/>
+              </a:rPr>
+              <a:t>オプション</a:t>
+            </a:r>
+            <a:endParaRPr sz="1000" b="0" i="0" u="none" strike="noStrike" cap="none">
+              <a:solidFill>
+                <a:schemeClr val="dk1"/>
+              </a:solidFill>
+              <a:latin typeface="Meiryo"/>
+              <a:ea typeface="Meiryo"/>
+              <a:cs typeface="Meiryo"/>
+              <a:sym typeface="Meiryo"/>
+            </a:endParaRPr>
+          </a:p>
+          <a:p>
+            <a:pPr marL="0" marR="0" lvl="0" indent="0" algn="ctr" rtl="0">
+              <a:spcBef>
+                <a:spcPts val="0"/>
+              </a:spcBef>
+              <a:spcAft>
+                <a:spcPts val="0"/>
+              </a:spcAft>
+              <a:buNone/>
+            </a:pPr>
+            <a:r>
+              <a:rPr lang="ja-JP" sz="1000" b="0" i="0" u="none" strike="noStrike" cap="none">
+                <a:solidFill>
+                  <a:schemeClr val="dk1"/>
+                </a:solidFill>
+                <a:latin typeface="メイリオ"/>
+                <a:ea typeface="Meiryo"/>
+                <a:cs typeface="Meiryo"/>
+                <a:sym typeface="Meiryo"/>
+              </a:rPr>
+              <a:t>商材</a:t>
+            </a:r>
+            <a:endParaRPr/>
+          </a:p>
+        </p:txBody>
+      </p:sp>
+      <p:sp>
+        <p:nvSpPr>
+          <p:cNvPr id="43" name="Google Shape;43;p3"/>
+          <p:cNvSpPr/>
+          <p:nvPr/>
+        </p:nvSpPr>
+        <p:spPr>
+          <a:xfrm>
+            <a:off x="1594068" y="730955"/>
+            <a:ext cx="2926883" cy="435690"/>
+          </a:xfrm>
+          <a:prstGeom prst="rect">
+            <a:avLst/>
+          </a:prstGeom>
+          <a:noFill/>
+          <a:ln w="9525" cap="flat" cmpd="sng">
+            <a:solidFill>
+              <a:srgbClr val="4A7DBA"/>
+            </a:solidFill>
+            <a:prstDash val="solid"/>
+            <a:round/>
+            <a:headEnd type="none" w="sm" len="sm"/>
+            <a:tailEnd type="none" w="sm" len="sm"/>
+          </a:ln>
+        </p:spPr>
+        <p:txBody>
+          <a:bodyPr spcFirstLastPara="1" wrap="square" lIns="91425" tIns="45700" rIns="91425" bIns="45700" anchor="ctr" anchorCtr="0">
+            <a:noAutofit/>
+          </a:bodyPr>
+          <a:lstStyle/>
+          <a:p>
+            <a:pPr marL="0" marR="0" lvl="0" indent="0" algn="ctr" rtl="0">
+              <a:spcBef>
+                <a:spcPts val="0"/>
+              </a:spcBef>
+              <a:spcAft>
+                <a:spcPts val="0"/>
+              </a:spcAft>
+              <a:buNone/>
+            </a:pPr>
+            <a:r>
+              <a:rPr lang="ja-JP" sz="1300" b="0" i="0" u="none" strike="noStrike" cap="none">
+                <a:solidFill>
+                  <a:schemeClr val="dk1"/>
+                </a:solidFill>
+                <a:latin typeface="メイリオ"/>
+                <a:ea typeface="Meiryo"/>
+                <a:cs typeface="Meiryo"/>
+                <a:sym typeface="Meiryo"/>
+              </a:rPr>
+              <a:t>通知メッセージをご利用中の全業種</a:t>
+            </a:r>
+            <a:endParaRPr/>
+          </a:p>
+        </p:txBody>
+      </p:sp>
+      <p:sp>
+        <p:nvSpPr>
+          <p:cNvPr id="44" name="Google Shape;44;p3"/>
+          <p:cNvSpPr txBox="1"/>
+          <p:nvPr/>
+        </p:nvSpPr>
+        <p:spPr>
+          <a:xfrm>
+            <a:off x="3296816" y="6597352"/>
+            <a:ext cx="6209091" cy="215444"/>
+          </a:xfrm>
+          <a:prstGeom prst="rect">
+            <a:avLst/>
+          </a:prstGeom>
+          <a:noFill/>
+          <a:ln>
+            <a:noFill/>
+          </a:ln>
+        </p:spPr>
+        <p:txBody>
+          <a:bodyPr spcFirstLastPara="1" wrap="square" lIns="91425" tIns="45700" rIns="91425" bIns="45700" anchor="t" anchorCtr="0">
+            <a:spAutoFit/>
+          </a:bodyPr>
+          <a:lstStyle/>
+          <a:p>
+            <a:pPr marL="0" marR="0" lvl="0" indent="0" algn="l" rtl="0">
+              <a:spcBef>
+                <a:spcPts val="0"/>
+              </a:spcBef>
+              <a:spcAft>
+                <a:spcPts val="0"/>
+              </a:spcAft>
+              <a:buNone/>
+            </a:pPr>
+            <a:r>
+              <a:rPr lang="ja-JP" sz="800" b="0" i="0" u="none" strike="noStrike" cap="none">
+                <a:solidFill>
+                  <a:schemeClr val="lt1"/>
+                </a:solidFill>
+                <a:latin typeface="メイリオ"/>
+                <a:ea typeface="Meiryo"/>
+                <a:cs typeface="Meiryo"/>
+                <a:sym typeface="Meiryo"/>
+              </a:rPr>
+              <a:t>出典：代理店情報</a:t>
+            </a:r>
+            <a:endParaRPr sz="800">
+              <a:solidFill>
+                <a:schemeClr val="lt1"/>
+              </a:solidFill>
+              <a:latin typeface="Meiryo"/>
+              <a:ea typeface="Meiryo"/>
+              <a:cs typeface="Meiryo"/>
+              <a:sym typeface="Meiryo"/>
+            </a:endParaRPr>
+          </a:p>
+        </p:txBody>
+      </p:sp>
+      <p:sp>
+        <p:nvSpPr>
+          <p:cNvPr id="45" name="Google Shape;45;p3"/>
+          <p:cNvSpPr/>
+          <p:nvPr/>
+        </p:nvSpPr>
+        <p:spPr>
+          <a:xfrm>
+            <a:off x="0" y="1234746"/>
+            <a:ext cx="9906000" cy="672259"/>
+          </a:xfrm>
+          <a:prstGeom prst="rect">
+            <a:avLst/>
+          </a:prstGeom>
+          <a:solidFill>
+            <a:srgbClr val="C5D8F1"/>
+          </a:solidFill>
+          <a:ln>
+            <a:noFill/>
+          </a:ln>
+        </p:spPr>
+        <p:txBody>
+          <a:bodyPr spcFirstLastPara="1" wrap="square" lIns="91425" tIns="45700" rIns="91425" bIns="45700" anchor="ctr" anchorCtr="0">
+            <a:noAutofit/>
+          </a:bodyPr>
+          <a:lstStyle/>
+          <a:p>
+            <a:pPr marL="0" marR="0" lvl="0" indent="0" algn="ctr" rtl="0">
+              <a:spcBef>
+                <a:spcPts val="0"/>
+              </a:spcBef>
+              <a:spcAft>
+                <a:spcPts val="0"/>
+              </a:spcAft>
+              <a:buNone/>
+            </a:pPr>
+            <a:r>
+              <a:rPr lang="ja-JP" sz="1600" b="1">
+                <a:solidFill>
+                  <a:srgbClr val="004DE6"/>
+                </a:solidFill>
+                <a:latin typeface="メイリオ"/>
+                <a:ea typeface="Meiryo"/>
+                <a:cs typeface="Meiryo"/>
+                <a:sym typeface="Meiryo"/>
+              </a:rPr>
+              <a:t>　　　　　　</a:t>
+            </a:r>
+            <a:endParaRPr sz="1800" b="1">
+              <a:solidFill>
+                <a:srgbClr val="004DE6"/>
+              </a:solidFill>
+              <a:latin typeface="Meiryo"/>
+              <a:ea typeface="Meiryo"/>
+              <a:cs typeface="Meiryo"/>
+              <a:sym typeface="Meiryo"/>
+            </a:endParaRPr>
+          </a:p>
+        </p:txBody>
+      </p:sp>
+      <p:sp>
+        <p:nvSpPr>
+          <p:cNvPr id="46" name="Google Shape;46;p3"/>
+          <p:cNvSpPr/>
+          <p:nvPr/>
+        </p:nvSpPr>
+        <p:spPr>
+          <a:xfrm>
+            <a:off x="1089832" y="1437370"/>
+            <a:ext cx="7031520" cy="338554"/>
+          </a:xfrm>
+          <a:prstGeom prst="rect">
+            <a:avLst/>
+          </a:prstGeom>
+          <a:noFill/>
+          <a:ln>
+            <a:noFill/>
+          </a:ln>
+        </p:spPr>
+        <p:txBody>
+          <a:bodyPr spcFirstLastPara="1" wrap="square" lIns="91425" tIns="45700" rIns="91425" bIns="45700" anchor="t" anchorCtr="0">
+            <a:spAutoFit/>
+          </a:bodyPr>
+          <a:lstStyle/>
+          <a:p>
+            <a:pPr marL="0" marR="0" lvl="0" indent="0" algn="l" rtl="0">
+              <a:spcBef>
+                <a:spcPts val="0"/>
+              </a:spcBef>
+              <a:spcAft>
+                <a:spcPts val="0"/>
+              </a:spcAft>
+              <a:buNone/>
+            </a:pPr>
+            <a:r>
+              <a:rPr lang="ja-JP" sz="1600" b="1">
+                <a:solidFill>
+                  <a:srgbClr val="004DE6"/>
+                </a:solidFill>
+                <a:latin typeface="メイリオ"/>
+                <a:ea typeface="Meiryo"/>
+                <a:cs typeface="Meiryo"/>
+                <a:sym typeface="Meiryo"/>
+              </a:rPr>
+              <a:t>【LINE通知メッセージ】UX追加申請の請求書発行をLBPMへ移行</a:t>
+            </a:r>
+            <a:endParaRPr sz="1600" b="1">
+              <a:solidFill>
+                <a:srgbClr val="004DE6"/>
+              </a:solidFill>
+              <a:latin typeface="Meiryo"/>
+              <a:ea typeface="Meiryo"/>
+              <a:cs typeface="Meiryo"/>
+              <a:sym typeface="Meiryo"/>
+            </a:endParaRPr>
+          </a:p>
+        </p:txBody>
+      </p:sp>
+      <p:sp>
+        <p:nvSpPr>
+          <p:cNvPr id="47" name="Google Shape;47;p3"/>
+          <p:cNvSpPr txBox="1"/>
+          <p:nvPr/>
+        </p:nvSpPr>
+        <p:spPr>
+          <a:xfrm>
+            <a:off x="182880" y="88175"/>
+            <a:ext cx="7512385" cy="365091"/>
+          </a:xfrm>
+          <a:prstGeom prst="rect">
+            <a:avLst/>
+          </a:prstGeom>
+          <a:noFill/>
+          <a:ln>
+            <a:noFill/>
+          </a:ln>
+        </p:spPr>
+        <p:txBody>
+          <a:bodyPr spcFirstLastPara="1" wrap="square" lIns="91425" tIns="72000" rIns="91425" bIns="45700" anchor="t" anchorCtr="0">
+            <a:spAutoFit/>
+          </a:bodyPr>
+          <a:lstStyle/>
+          <a:p>
+            <a:pPr marL="0" marR="0" lvl="0" indent="0" algn="l" rtl="0">
+              <a:spcBef>
+                <a:spcPts val="0"/>
+              </a:spcBef>
+              <a:spcAft>
+                <a:spcPts val="0"/>
+              </a:spcAft>
+              <a:buClr>
+                <a:schemeClr val="dk1"/>
+              </a:buClr>
+              <a:buSzPts val="1600"/>
+              <a:buFont typeface="Arial"/>
+              <a:buNone/>
+            </a:pPr>
+            <a:r>
+              <a:rPr lang="ja-JP" sz="1600" b="0" u="none">
+                <a:solidFill>
+                  <a:schemeClr val="dk1"/>
+                </a:solidFill>
+                <a:latin typeface="メイリオ"/>
+                <a:ea typeface="Meiryo"/>
+                <a:cs typeface="Meiryo"/>
+                <a:sym typeface="Meiryo"/>
+              </a:rPr>
+              <a:t>    今後のアップデート情報</a:t>
+            </a:r>
+            <a:endParaRPr sz="1600" b="0" u="none">
+              <a:solidFill>
+                <a:schemeClr val="dk1"/>
+              </a:solidFill>
+              <a:latin typeface="Meiryo"/>
+              <a:ea typeface="Meiryo"/>
+              <a:cs typeface="Meiryo"/>
+              <a:sym typeface="Meiryo"/>
+            </a:endParaRPr>
+          </a:p>
+        </p:txBody>
+      </p:sp>
+      <p:sp>
+        <p:nvSpPr>
+          <p:cNvPr id="48" name="Google Shape;48;p3"/>
+          <p:cNvSpPr/>
+          <p:nvPr/>
+        </p:nvSpPr>
+        <p:spPr>
+          <a:xfrm>
+            <a:off x="5797260" y="730955"/>
+            <a:ext cx="829618" cy="435690"/>
+          </a:xfrm>
+          <a:prstGeom prst="rect">
+            <a:avLst/>
+          </a:prstGeom>
+          <a:solidFill>
+            <a:schemeClr val="tx2"/>
+          </a:solidFill>
+          <a:ln w="9525" cap="flat" cmpd="sng">
+            <a:solidFill>
+              <a:srgbClr val="4F81BD"/>
+            </a:solidFill>
+            <a:prstDash val="solid"/>
+            <a:round/>
+            <a:headEnd type="none" w="sm" len="sm"/>
+            <a:tailEnd type="none" w="sm" len="sm"/>
+          </a:ln>
+        </p:spPr>
+        <p:txBody>
+          <a:bodyPr spcFirstLastPara="1" wrap="square" lIns="91425" tIns="45700" rIns="91425" bIns="45700" anchor="ctr" anchorCtr="0">
+            <a:noAutofit/>
+          </a:bodyPr>
+          <a:lstStyle/>
+          <a:p>
+            <a:pPr marL="0" marR="0" lvl="0" indent="0" algn="ctr" rtl="0">
+              <a:spcBef>
+                <a:spcPts val="0"/>
+              </a:spcBef>
+              <a:spcAft>
+                <a:spcPts val="0"/>
+              </a:spcAft>
+              <a:buClr>
+                <a:schemeClr val="dk1"/>
+              </a:buClr>
+              <a:buSzPts val="1000"/>
+              <a:buFont typeface="Meiryo"/>
+              <a:buNone/>
+            </a:pPr>
+            <a:r>
+              <a:rPr lang="ja-JP" sz="1000">
+                <a:solidFill>
+                  <a:schemeClr val="dk1"/>
+                </a:solidFill>
+                <a:latin typeface="メイリオ"/>
+                <a:ea typeface="Meiryo"/>
+                <a:cs typeface="Meiryo"/>
+                <a:sym typeface="Meiryo"/>
+              </a:rPr>
+              <a:t>開発</a:t>
+            </a:r>
+            <a:endParaRPr sz="1000">
+              <a:solidFill>
+                <a:schemeClr val="dk1"/>
+              </a:solidFill>
+              <a:latin typeface="Meiryo"/>
+              <a:ea typeface="Meiryo"/>
+              <a:cs typeface="Meiryo"/>
+              <a:sym typeface="Meiryo"/>
+            </a:endParaRPr>
+          </a:p>
+          <a:p>
+            <a:pPr marL="0" marR="0" lvl="0" indent="0" algn="ctr" rtl="0">
+              <a:spcBef>
+                <a:spcPts val="0"/>
+              </a:spcBef>
+              <a:spcAft>
+                <a:spcPts val="0"/>
+              </a:spcAft>
+              <a:buClr>
+                <a:schemeClr val="dk1"/>
+              </a:buClr>
+              <a:buSzPts val="1000"/>
+              <a:buFont typeface="Meiryo"/>
+              <a:buNone/>
+            </a:pPr>
+            <a:r>
+              <a:rPr lang="ja-JP" sz="1000">
+                <a:solidFill>
+                  <a:schemeClr val="dk1"/>
+                </a:solidFill>
+                <a:latin typeface="メイリオ"/>
+                <a:ea typeface="Meiryo"/>
+                <a:cs typeface="Meiryo"/>
+                <a:sym typeface="Meiryo"/>
+              </a:rPr>
+              <a:t>LINE API</a:t>
+            </a:r>
+            <a:endParaRPr sz="1000">
+              <a:solidFill>
+                <a:schemeClr val="dk1"/>
+              </a:solidFill>
+              <a:latin typeface="Meiryo"/>
+              <a:ea typeface="Meiryo"/>
+              <a:cs typeface="Meiryo"/>
+              <a:sym typeface="Meiryo"/>
+            </a:endParaRPr>
+          </a:p>
+        </p:txBody>
+      </p:sp>
+      <p:sp>
+        <p:nvSpPr>
+          <p:cNvPr id="49" name="Google Shape;49;p3"/>
+          <p:cNvSpPr/>
+          <p:nvPr/>
+        </p:nvSpPr>
+        <p:spPr>
+          <a:xfrm>
+            <a:off x="4915470" y="730955"/>
+            <a:ext cx="829618" cy="435690"/>
+          </a:xfrm>
+          <a:prstGeom prst="rect">
+            <a:avLst/>
+          </a:prstGeom>
+          <a:solidFill>
+            <a:schemeClr val="bg1"/>
+          </a:solidFill>
+          <a:ln w="9525" cap="flat" cmpd="sng">
+            <a:solidFill>
+              <a:srgbClr val="4F81BD"/>
+            </a:solidFill>
+            <a:prstDash val="sysDash"/>
+            <a:round/>
+            <a:headEnd type="none" w="sm" len="sm"/>
+            <a:tailEnd type="none" w="sm" len="sm"/>
+          </a:ln>
+        </p:spPr>
+        <p:txBody>
+          <a:bodyPr spcFirstLastPara="1" wrap="square" lIns="91425" tIns="45700" rIns="91425" bIns="45700" anchor="ctr" anchorCtr="0">
+            <a:noAutofit/>
+          </a:bodyPr>
+          <a:lstStyle/>
+          <a:p>
+            <a:pPr marL="0" marR="0" lvl="0" indent="0" algn="ctr" rtl="0">
+              <a:spcBef>
+                <a:spcPts val="0"/>
+              </a:spcBef>
+              <a:spcAft>
+                <a:spcPts val="0"/>
+              </a:spcAft>
+              <a:buNone/>
+            </a:pPr>
+            <a:r>
+              <a:rPr lang="ja-JP" sz="1000">
+                <a:solidFill>
+                  <a:schemeClr val="dk1"/>
+                </a:solidFill>
+                <a:latin typeface="メイリオ"/>
+                <a:ea typeface="Meiryo"/>
+                <a:cs typeface="Meiryo"/>
+                <a:sym typeface="Meiryo"/>
+              </a:rPr>
+              <a:t>LINE公式アカウント</a:t>
+            </a:r>
+            <a:endParaRPr sz="1000">
+              <a:solidFill>
+                <a:schemeClr val="dk1"/>
+              </a:solidFill>
+              <a:latin typeface="Meiryo"/>
+              <a:ea typeface="Meiryo"/>
+              <a:cs typeface="Meiryo"/>
+              <a:sym typeface="Meiryo"/>
+            </a:endParaRPr>
+          </a:p>
+        </p:txBody>
+      </p:sp>
+      <p:sp>
+        <p:nvSpPr>
+          <p:cNvPr id="50" name="Google Shape;50;p3"/>
+          <p:cNvSpPr/>
+          <p:nvPr/>
+        </p:nvSpPr>
+        <p:spPr>
+          <a:xfrm>
+            <a:off x="0" y="1890267"/>
+            <a:ext cx="9906000" cy="733579"/>
+          </a:xfrm>
+          <a:prstGeom prst="rect">
+            <a:avLst/>
+          </a:prstGeom>
+          <a:solidFill>
+            <a:srgbClr val="F2F2F2"/>
+          </a:solidFill>
+          <a:ln>
+            <a:noFill/>
+          </a:ln>
+        </p:spPr>
+        <p:txBody>
+          <a:bodyPr spcFirstLastPara="1" wrap="square" lIns="91425" tIns="45700" rIns="91425" bIns="45700" anchor="ctr" anchorCtr="0">
+            <a:noAutofit/>
+          </a:bodyPr>
+          <a:lstStyle/>
+          <a:p>
+            <a:pPr marL="0" marR="0" lvl="0" indent="0" algn="ctr" rtl="0">
+              <a:spcBef>
+                <a:spcPts val="0"/>
+              </a:spcBef>
+              <a:spcAft>
+                <a:spcPts val="0"/>
+              </a:spcAft>
+              <a:buNone/>
+            </a:pPr>
+            <a:endParaRPr sz="1200">
+              <a:solidFill>
+                <a:schemeClr val="dk1"/>
+              </a:solidFill>
+              <a:latin typeface="Meiryo"/>
+              <a:ea typeface="Meiryo"/>
+              <a:cs typeface="Meiryo"/>
+              <a:sym typeface="Meiryo"/>
+            </a:endParaRPr>
+          </a:p>
+        </p:txBody>
+      </p:sp>
+      <p:sp>
+        <p:nvSpPr>
+          <p:cNvPr id="51" name="Google Shape;51;p3"/>
+          <p:cNvSpPr/>
+          <p:nvPr/>
+        </p:nvSpPr>
+        <p:spPr>
+          <a:xfrm>
+            <a:off x="544108" y="1961282"/>
+            <a:ext cx="8817783" cy="646331"/>
+          </a:xfrm>
+          <a:prstGeom prst="rect">
+            <a:avLst/>
+          </a:prstGeom>
+          <a:noFill/>
+          <a:ln>
+            <a:noFill/>
+          </a:ln>
+        </p:spPr>
+        <p:txBody>
+          <a:bodyPr spcFirstLastPara="1" wrap="square" lIns="91425" tIns="45700" rIns="91425" bIns="45700" anchor="t" anchorCtr="0">
+            <a:spAutoFit/>
+          </a:bodyPr>
+          <a:lstStyle/>
+          <a:p>
+            <a:pPr marL="0" marR="0" lvl="0" indent="0" algn="ctr" rtl="0">
+              <a:spcBef>
+                <a:spcPts val="0"/>
+              </a:spcBef>
+              <a:spcAft>
+                <a:spcPts val="0"/>
+              </a:spcAft>
+              <a:buNone/>
+            </a:pPr>
+            <a:r>
+              <a:rPr lang="ja-JP" sz="1200" b="1">
+                <a:solidFill>
+                  <a:schemeClr val="dk1"/>
+                </a:solidFill>
+                <a:latin typeface="メイリオ"/>
+                <a:ea typeface="Meiryo"/>
+                <a:cs typeface="Meiryo"/>
+                <a:sym typeface="Meiryo"/>
+              </a:rPr>
+              <a:t>LINE通知メッセージの「UX追加申請」は、新しい通知の型を使うときに出す申請。</a:t>
+            </a:r>
+            <a:endParaRPr sz="1200" b="1">
+              <a:solidFill>
+                <a:schemeClr val="dk1"/>
+              </a:solidFill>
+              <a:latin typeface="Meiryo"/>
+              <a:ea typeface="Meiryo"/>
+              <a:cs typeface="Meiryo"/>
+              <a:sym typeface="Meiryo"/>
+            </a:endParaRPr>
+          </a:p>
+          <a:p>
+            <a:pPr marL="0" marR="0" lvl="0" indent="0" algn="ctr" rtl="0">
+              <a:spcBef>
+                <a:spcPts val="0"/>
+              </a:spcBef>
+              <a:spcAft>
+                <a:spcPts val="0"/>
+              </a:spcAft>
+              <a:buNone/>
+            </a:pPr>
+            <a:r>
+              <a:rPr lang="ja-JP" sz="1200" b="1">
+                <a:solidFill>
+                  <a:schemeClr val="dk1"/>
+                </a:solidFill>
+                <a:latin typeface="メイリオ"/>
+                <a:ea typeface="Meiryo"/>
+                <a:cs typeface="Meiryo"/>
+                <a:sym typeface="Meiryo"/>
+              </a:rPr>
+              <a:t>2026年9月9日（水）から、LBPM上の発注画面と、請求書の発行元が変わった。</a:t>
+            </a:r>
+            <a:endParaRPr/>
+          </a:p>
+          <a:p>
+            <a:pPr marL="0" marR="0" lvl="0" indent="0" algn="ctr" rtl="0">
+              <a:spcBef>
+                <a:spcPts val="0"/>
+              </a:spcBef>
+              <a:spcAft>
+                <a:spcPts val="0"/>
+              </a:spcAft>
+              <a:buNone/>
+            </a:pPr>
+            <a:r>
+              <a:rPr lang="ja-JP" sz="1200" b="1">
+                <a:solidFill>
+                  <a:schemeClr val="dk1"/>
+                </a:solidFill>
+                <a:latin typeface="メイリオ"/>
+                <a:ea typeface="Meiryo"/>
+                <a:cs typeface="Meiryo"/>
+                <a:sym typeface="Meiryo"/>
+              </a:rPr>
+              <a:t>過去に作った申請は編集しても受領されないため、既存の案件をコピーして作り直す必要がある。</a:t>
+            </a:r>
+            <a:endParaRPr sz="1400" b="1">
+              <a:solidFill>
+                <a:schemeClr val="dk1"/>
+              </a:solidFill>
+              <a:latin typeface="Meiryo"/>
+              <a:ea typeface="Meiryo"/>
+              <a:cs typeface="Meiryo"/>
+              <a:sym typeface="Meiryo"/>
+            </a:endParaRPr>
+          </a:p>
+        </p:txBody>
+      </p:sp>
+      <p:sp>
+        <p:nvSpPr>
+          <p:cNvPr id="52" name="Google Shape;52;p3"/>
+          <p:cNvSpPr/>
+          <p:nvPr/>
+        </p:nvSpPr>
+        <p:spPr>
+          <a:xfrm>
+            <a:off x="351381" y="2714173"/>
+            <a:ext cx="5200000" cy="338554"/>
+          </a:xfrm>
+          <a:prstGeom prst="rect">
+            <a:avLst/>
+          </a:prstGeom>
+          <a:noFill/>
+          <a:ln>
+            <a:noFill/>
+          </a:ln>
+        </p:spPr>
+        <p:txBody>
+          <a:bodyPr spcFirstLastPara="1" wrap="square" lIns="91425" tIns="45700" rIns="91425" bIns="45700" anchor="t" anchorCtr="0">
+            <a:noAutofit/>
+          </a:bodyPr>
+          <a:lstStyle/>
+          <a:p>
+            <a:pPr marL="0" marR="0" lvl="0" indent="0" algn="l" rtl="0">
+              <a:spcBef>
+                <a:spcPts val="0"/>
+              </a:spcBef>
+              <a:spcAft>
+                <a:spcPts val="0"/>
+              </a:spcAft>
+              <a:buNone/>
+            </a:pPr>
+            <a:r>
+              <a:rPr lang="ja-JP" sz="1400" b="1">
+                <a:solidFill>
+                  <a:srgbClr val="15133D"/>
+                </a:solidFill>
+                <a:latin typeface="メイリオ"/>
+                <a:ea typeface="Meiryo"/>
+                <a:cs typeface="Meiryo"/>
+                <a:sym typeface="Meiryo"/>
+              </a:rPr>
+              <a:t>■ 詳細</a:t>
+            </a:r>
+            <a:endParaRPr/>
+          </a:p>
+        </p:txBody>
+      </p:sp>
+      <p:grpSp>
+        <p:nvGrpSpPr>
+          <p:cNvPr id="53" name="Google Shape;53;p3"/>
+          <p:cNvGrpSpPr/>
+          <p:nvPr/>
+        </p:nvGrpSpPr>
+        <p:grpSpPr>
+          <a:xfrm>
+            <a:off x="8473303" y="730955"/>
+            <a:ext cx="1376241" cy="1131930"/>
+            <a:chOff x="0" y="0"/>
+            <a:chExt cx="1376241" cy="1131930"/>
+          </a:xfrm>
+        </p:grpSpPr>
+        <p:sp>
+          <p:nvSpPr>
+            <p:cNvPr id="54" name="Google Shape;54;p3"/>
+            <p:cNvSpPr/>
+            <p:nvPr/>
+          </p:nvSpPr>
+          <p:spPr>
+            <a:xfrm rot="10800000">
+              <a:off x="0" y="0"/>
+              <a:ext cx="1376241" cy="282982"/>
+            </a:xfrm>
+            <a:prstGeom prst="trapezoid">
+              <a:avLst>
+                <a:gd name="adj" fmla="val 60792"/>
+              </a:avLst>
+            </a:prstGeom>
+            <a:solidFill>
+              <a:schemeClr val="lt1"/>
             </a:solidFill>
             <a:ln w="25400" cap="flat" cmpd="sng">
               <a:solidFill>
@@ -8532,7 +11953,9 @@
                 <a:gd name="adj" fmla="val 60792"/>
               </a:avLst>
             </a:prstGeom>
-            <a:noFill/>
+            <a:solidFill>
+              <a:schemeClr val="lt1"/>
+            </a:solidFill>
             <a:ln w="25400" cap="flat" cmpd="sng">
               <a:solidFill>
                 <a:schemeClr val="dk2"/>
@@ -8628,7 +12051,7 @@
           <p:nvPr/>
         </p:nvPicPr>
         <p:blipFill rotWithShape="1">
-          <a:blip r:embed="rId3">
+          <a:blip r:embed="rId2">
             <a:alphaModFix/>
           </a:blip>
           <a:srcRect/>
@@ -8656,8 +12079,8 @@
         </p:nvSpPr>
         <p:spPr>
           <a:xfrm>
-            <a:off x="548640" y="3313126"/>
-            <a:ext cx="8814816" cy="1548638"/>
+            <a:off x="548640" y="3403931"/>
+            <a:ext cx="8814816" cy="1290828"/>
           </a:xfrm>
           <a:prstGeom prst="roundRect">
             <a:avLst>
@@ -8694,7 +12117,7 @@
           <a:p>
             <a:pPr algn="l"/>
             <a:r>
-              <a:rPr sz="2000" b="1" dirty="0" err="1">
+              <a:rPr lang="ja-JP" altLang="en-US" sz="2000" b="1" dirty="0">
                 <a:solidFill>
                   <a:srgbClr val="15133D"/>
                 </a:solidFill>
@@ -8719,13 +12142,32 @@
               </a:spcBef>
             </a:pPr>
             <a:r>
+              <a:rPr sz="1400" dirty="0">
+                <a:solidFill>
+                  <a:srgbClr val="333333"/>
+                </a:solidFill>
+                <a:latin typeface="メイリオ"/>
+              </a:rPr>
+              <a:t>・</a:t>
+            </a:r>
+            <a:r>
               <a:rPr sz="1400" dirty="0" err="1">
                 <a:solidFill>
                   <a:srgbClr val="333333"/>
                 </a:solidFill>
                 <a:latin typeface="メイリオ"/>
               </a:rPr>
-              <a:t>LINE通知メッセージのボタンから、自社のネイティブアプリを直接開けるようになった</a:t>
+              <a:t>請求書の発行元が、AGPからLBPM</a:t>
+            </a:r>
+            <a:r>
+              <a:rPr lang="ja-JP" altLang="en-US" dirty="0">
+                <a:solidFill>
+                  <a:srgbClr val="333333"/>
+                </a:solidFill>
+                <a:latin typeface="メイリオ" panose="020B0604030504040204" pitchFamily="50" charset="-128"/>
+                <a:ea typeface="メイリオ" panose="020B0604030504040204" pitchFamily="50" charset="-128"/>
+              </a:rPr>
+              <a:t>へ</a:t>
             </a:r>
             <a:r>
               <a:rPr sz="1400" dirty="0">
@@ -8734,68 +12176,42 @@
                 </a:solidFill>
                 <a:latin typeface="メイリオ"/>
               </a:rPr>
-              <a:t>。</a:t>
-            </a:r>
-            <a:endParaRPr lang="en-US" sz="1400" dirty="0">
+              <a:t>（2026年9月受領分＝10月初めに発行される請求書から）。</a:t>
+            </a:r>
+          </a:p>
+          <a:p>
+            <a:pPr algn="l">
+              <a:lnSpc>
+                <a:spcPct val="115000"/>
+              </a:lnSpc>
+              <a:spcBef>
+                <a:spcPts val="600"/>
+              </a:spcBef>
+            </a:pPr>
+            <a:r>
+              <a:rPr sz="1400" dirty="0">
+                <a:solidFill>
+                  <a:srgbClr val="333333"/>
+                </a:solidFill>
+                <a:latin typeface="メイリオ"/>
+              </a:rPr>
+              <a:t>・</a:t>
+            </a:r>
+            <a:r>
+              <a:rPr sz="1400" dirty="0" err="1">
+                <a:solidFill>
+                  <a:srgbClr val="333333"/>
+                </a:solidFill>
+                <a:latin typeface="メイリオ"/>
+              </a:rPr>
+              <a:t>LBPM上の発注画面と申請方法</a:t>
+            </a:r>
+            <a:endParaRPr sz="1400" dirty="0">
               <a:solidFill>
                 <a:srgbClr val="333333"/>
               </a:solidFill>
               <a:latin typeface="メイリオ"/>
             </a:endParaRPr>
-          </a:p>
-          <a:p>
-            <a:pPr algn="l">
-              <a:lnSpc>
-                <a:spcPct val="115000"/>
-              </a:lnSpc>
-              <a:spcBef>
-                <a:spcPts val="600"/>
-              </a:spcBef>
-            </a:pPr>
-            <a:r>
-              <a:rPr sz="1400" dirty="0" err="1">
-                <a:solidFill>
-                  <a:srgbClr val="333333"/>
-                </a:solidFill>
-                <a:latin typeface="メイリオ"/>
-              </a:rPr>
-              <a:t>アプリが入っていない場合は、通知内容に関連するWebページへ遷移する</a:t>
-            </a:r>
-            <a:r>
-              <a:rPr sz="1400" dirty="0">
-                <a:solidFill>
-                  <a:srgbClr val="333333"/>
-                </a:solidFill>
-                <a:latin typeface="メイリオ"/>
-              </a:rPr>
-              <a:t>。</a:t>
-            </a:r>
-            <a:br>
-              <a:rPr lang="en-US" sz="1400" dirty="0">
-                <a:solidFill>
-                  <a:srgbClr val="333333"/>
-                </a:solidFill>
-                <a:latin typeface="メイリオ"/>
-              </a:rPr>
-            </a:br>
-            <a:r>
-              <a:rPr sz="1400" dirty="0" err="1">
-                <a:solidFill>
-                  <a:srgbClr val="333333"/>
-                </a:solidFill>
-                <a:latin typeface="メイリオ"/>
-              </a:rPr>
-              <a:t>シームレスな導線で、ユーザー体験が向上する</a:t>
-            </a:r>
-            <a:r>
-              <a:rPr sz="1400" dirty="0">
-                <a:solidFill>
-                  <a:srgbClr val="333333"/>
-                </a:solidFill>
-                <a:latin typeface="メイリオ"/>
-              </a:rPr>
-              <a:t>。</a:t>
-            </a:r>
           </a:p>
         </p:txBody>
       </p:sp>
@@ -8807,8 +12223,8 @@
         </p:nvSpPr>
         <p:spPr>
           <a:xfrm>
-            <a:off x="548640" y="5044644"/>
-            <a:ext cx="8814816" cy="1214628"/>
+            <a:off x="548640" y="4877639"/>
+            <a:ext cx="8814816" cy="1290828"/>
           </a:xfrm>
           <a:prstGeom prst="roundRect">
             <a:avLst>
@@ -8845,20 +12261,14 @@
           <a:p>
             <a:pPr algn="l"/>
             <a:r>
-              <a:rPr sz="2000" b="1" dirty="0" err="1">
+              <a:rPr sz="2000" b="1">
                 <a:solidFill>
                   <a:srgbClr val="15133D"/>
                 </a:solidFill>
                 <a:latin typeface="メイリオ"/>
               </a:rPr>
-              <a:t>費用と必要な手続き</a:t>
-            </a:r>
-            <a:endParaRPr sz="2000" b="1" dirty="0">
-              <a:solidFill>
-                <a:srgbClr val="15133D"/>
-              </a:solidFill>
-              <a:latin typeface="メイリオ"/>
-            </a:endParaRPr>
+              <a:t>新しい発注画面</a:t>
+            </a:r>
           </a:p>
           <a:p>
             <a:pPr algn="l">
@@ -8870,49 +12280,32 @@
               </a:spcBef>
             </a:pPr>
             <a:r>
-              <a:rPr sz="1400" dirty="0">
+              <a:rPr sz="1400">
                 <a:solidFill>
                   <a:srgbClr val="333333"/>
                 </a:solidFill>
                 <a:latin typeface="メイリオ"/>
               </a:rPr>
-              <a:t>審査費は10万円（税抜）／1UX。承認時のみ発生し、否認の場合はかからない。</a:t>
-            </a:r>
-            <a:br>
-              <a:rPr lang="en-US" sz="1400" dirty="0">
+              <a:t>・申請フォームを入力すると、そのあとに金額の計算画面が出る。</a:t>
+            </a:r>
+          </a:p>
+          <a:p>
+            <a:pPr algn="l">
+              <a:lnSpc>
+                <a:spcPct val="115000"/>
+              </a:lnSpc>
+              <a:spcBef>
+                <a:spcPts val="600"/>
+              </a:spcBef>
+            </a:pPr>
+            <a:r>
+              <a:rPr sz="1400">
                 <a:solidFill>
                   <a:srgbClr val="333333"/>
                 </a:solidFill>
                 <a:latin typeface="メイリオ"/>
               </a:rPr>
-            </a:br>
-            <a:r>
-              <a:rPr sz="1400" dirty="0" err="1">
-                <a:solidFill>
-                  <a:srgbClr val="333333"/>
-                </a:solidFill>
-                <a:latin typeface="メイリオ"/>
-              </a:rPr>
-              <a:t>申し込みはLBPMのUX追加申請から</a:t>
-            </a:r>
-            <a:r>
-              <a:rPr lang="ja-JP" altLang="en-US" sz="1400" dirty="0">
-                <a:solidFill>
-                  <a:srgbClr val="333333"/>
-                </a:solidFill>
-                <a:latin typeface="メイリオ" panose="020B0604030504040204" pitchFamily="50" charset="-128"/>
-                <a:ea typeface="メイリオ" panose="020B0604030504040204" pitchFamily="50" charset="-128"/>
-              </a:rPr>
-              <a:t>行う</a:t>
-            </a:r>
-            <a:r>
-              <a:rPr sz="1400" dirty="0">
-                <a:solidFill>
-                  <a:srgbClr val="333333"/>
-                </a:solidFill>
-                <a:latin typeface="メイリオ"/>
-              </a:rPr>
-              <a:t>。</a:t>
+              <a:t>・請求書は、LBPMのメニューの「請求書DL」からダウンロードする。</a:t>
             </a:r>
           </a:p>
         </p:txBody>
@@ -8925,7 +12318,7 @@
 </p:sld>
 </file>
 
-<file path=ppt/slides/slide4.xml><?xml version="1.0" encoding="utf-8"?>
+<file path=ppt/slides/slide6.xml><?xml version="1.0" encoding="utf-8"?>
 <p:sld xmlns:a="http://schemas.openxmlformats.org/drawingml/2006/main" xmlns:r="http://schemas.openxmlformats.org/officeDocument/2006/relationships" xmlns:p="http://schemas.openxmlformats.org/presentationml/2006/main">
   <p:cSld>
     <p:spTree>
@@ -9081,13 +12474,13 @@
             <a:avLst/>
           </a:prstGeom>
           <a:solidFill>
-            <a:schemeClr val="bg1"/>
+            <a:schemeClr val="tx2"/>
           </a:solidFill>
           <a:ln w="9525" cap="flat" cmpd="sng">
             <a:solidFill>
               <a:srgbClr val="4F81BD"/>
             </a:solidFill>
-            <a:prstDash val="sysDash"/>
+            <a:prstDash val="solid"/>
             <a:round/>
             <a:headEnd type="none" w="sm" len="sm"/>
             <a:tailEnd type="none" w="sm" len="sm"/>
@@ -9206,7 +12599,7 @@
                 <a:cs typeface="Meiryo"/>
                 <a:sym typeface="Meiryo"/>
               </a:rPr>
-              <a:t>EC・通販・予約サービス</a:t>
+              <a:t>食品・飲料メーカー、</a:t>
             </a:r>
             <a:br>
               <a:rPr lang="ja-JP" sz="1300" b="0" i="0" u="none" strike="noStrike" cap="none">
@@ -9229,7 +12622,7 @@
                 <a:cs typeface="Meiryo"/>
                 <a:sym typeface="Meiryo"/>
               </a:rPr>
-              <a:t>（自社アプリあり）</a:t>
+              <a:t>小売・コンビニ</a:t>
             </a:r>
             <a:endParaRPr/>
           </a:p>
@@ -9397,7 +12790,7 @@
                 <a:cs typeface="Meiryo"/>
                 <a:sym typeface="Meiryo"/>
               </a:rPr>
-              <a:t>【LINE通知メッセージ】ネイティブアプリ遷移の条件</a:t>
+              <a:t>【LINEシリアルコードスタンプ】新商品のご案内</a:t>
             </a:r>
             <a:endParaRPr sz="1600" b="1">
               <a:solidFill>
@@ -9489,13 +12882,13 @@
             <a:avLst/>
           </a:prstGeom>
           <a:solidFill>
-            <a:schemeClr val="tx2"/>
+            <a:schemeClr val="bg1"/>
           </a:solidFill>
           <a:ln w="9525" cap="flat" cmpd="sng">
             <a:solidFill>
               <a:srgbClr val="4F81BD"/>
             </a:solidFill>
-            <a:prstDash val="solid"/>
+            <a:prstDash val="sysDash"/>
             <a:round/>
             <a:headEnd type="none" w="sm" len="sm"/>
             <a:tailEnd type="none" w="sm" len="sm"/>
@@ -9740,7 +13133,7 @@
                 <a:cs typeface="Meiryo"/>
                 <a:sym typeface="Meiryo"/>
               </a:rPr>
-              <a:t>ネイティブアプリへ遷移させるには、LINEヤフーの審査で次の4つを満たす必要がある。</a:t>
+              <a:t>2026年10月1日リリースの新商材。シリアルコードを入力した人だけが無料スタンプをもらえる。</a:t>
             </a:r>
             <a:endParaRPr sz="1200" b="1">
               <a:solidFill>
@@ -9772,7 +13165,7 @@
                 <a:cs typeface="Meiryo"/>
                 <a:sym typeface="Meiryo"/>
               </a:rPr>
-              <a:t>条件はLINE通知メッセージ（フレキシブル／テンプレート）のUXガイドラインに記載。</a:t>
+              <a:t>コードの発行は発注を受けた後。印刷・配布がある場合は、その日数も見込んでスケジュールを組む。</a:t>
             </a:r>
             <a:endParaRPr/>
           </a:p>
@@ -9796,7 +13189,7 @@
                 <a:cs typeface="Meiryo"/>
                 <a:sym typeface="Meiryo"/>
               </a:rPr>
-              <a:t>対象プラン：エッセンシャル／パフォーマンス／アンリミテッド</a:t>
+              <a:t>告知やコード配布のルールに違反すると、Apple・Googleの指摘でキャンペーン停止になる場合も。</a:t>
             </a:r>
             <a:endParaRPr sz="1400" b="1">
               <a:solidFill>
@@ -9891,7 +13284,7 @@
               </a:avLst>
             </a:prstGeom>
             <a:solidFill>
-              <a:srgbClr val="EAEDF5"/>
+              <a:schemeClr val="lt1"/>
             </a:solidFill>
             <a:ln w="25400" cap="flat" cmpd="sng">
               <a:solidFill>
@@ -10103,7 +13496,7 @@
               </a:avLst>
             </a:prstGeom>
             <a:solidFill>
-              <a:schemeClr val="lt1"/>
+              <a:schemeClr val="dk2"/>
             </a:solidFill>
             <a:ln w="25400" cap="flat" cmpd="sng">
               <a:solidFill>
@@ -10179,7 +13572,7 @@
               <a:r>
                 <a:rPr lang="ja-JP" sz="800" b="1">
                   <a:solidFill>
-                    <a:srgbClr val="262626"/>
+                    <a:srgbClr val="FFFFFF"/>
                   </a:solidFill>
                   <a:latin typeface="Arial"/>
                   <a:ea typeface="Arial"/>
@@ -10208,3394 +13601,9 @@
                 <a:gd name="adj" fmla="val 60792"/>
               </a:avLst>
             </a:prstGeom>
-            <a:noFill/>
-            <a:ln w="25400" cap="flat" cmpd="sng">
-              <a:solidFill>
-                <a:schemeClr val="dk2"/>
-              </a:solidFill>
-              <a:prstDash val="solid"/>
-              <a:round/>
-              <a:headEnd type="none" w="sm" len="sm"/>
-              <a:tailEnd type="none" w="sm" len="sm"/>
-            </a:ln>
-          </p:spPr>
-          <p:txBody>
-            <a:bodyPr spcFirstLastPara="1" wrap="square" lIns="91425" tIns="91425" rIns="91425" bIns="91425" anchor="ctr" anchorCtr="0">
-              <a:noAutofit/>
-            </a:bodyPr>
-            <a:lstStyle/>
-            <a:p>
-              <a:pPr marL="0" lvl="0" indent="0" algn="l" rtl="0">
-                <a:spcBef>
-                  <a:spcPts val="0"/>
-                </a:spcBef>
-                <a:spcAft>
-                  <a:spcPts val="0"/>
-                </a:spcAft>
-                <a:buNone/>
-              </a:pPr>
-              <a:endParaRPr/>
-            </a:p>
-          </p:txBody>
-        </p:sp>
-        <p:sp>
-          <p:nvSpPr>
-            <p:cNvPr id="61" name="Google Shape;61;p3"/>
-            <p:cNvSpPr txBox="1"/>
-            <p:nvPr/>
-          </p:nvSpPr>
-          <p:spPr>
-            <a:xfrm>
-              <a:off x="516090" y="848948"/>
-              <a:ext cx="344060" cy="282982"/>
-            </a:xfrm>
-            <a:prstGeom prst="rect">
-              <a:avLst/>
-            </a:prstGeom>
-            <a:noFill/>
-            <a:ln>
-              <a:noFill/>
-            </a:ln>
-          </p:spPr>
-          <p:txBody>
-            <a:bodyPr spcFirstLastPara="1" wrap="square" lIns="10150" tIns="10150" rIns="10150" bIns="10150" anchor="ctr" anchorCtr="0">
-              <a:noAutofit/>
-            </a:bodyPr>
-            <a:lstStyle/>
-            <a:p>
-              <a:pPr marL="0" marR="0" lvl="0" indent="0" algn="ctr" rtl="0">
-                <a:lnSpc>
-                  <a:spcPct val="90000"/>
-                </a:lnSpc>
-                <a:spcBef>
-                  <a:spcPts val="0"/>
-                </a:spcBef>
-                <a:spcAft>
-                  <a:spcPts val="0"/>
-                </a:spcAft>
-                <a:buClr>
-                  <a:srgbClr val="262626"/>
-                </a:buClr>
-                <a:buSzPts val="800"/>
-                <a:buFont typeface="Arial"/>
-                <a:buNone/>
-              </a:pPr>
-              <a:r>
-                <a:rPr lang="ja-JP" sz="800" b="1">
-                  <a:solidFill>
-                    <a:srgbClr val="262626"/>
-                  </a:solidFill>
-                  <a:latin typeface="Arial"/>
-                  <a:ea typeface="Arial"/>
-                  <a:cs typeface="Arial"/>
-                  <a:sym typeface="Arial"/>
-                </a:rPr>
-                <a:t>伸長</a:t>
-              </a:r>
-              <a:endParaRPr/>
-            </a:p>
-          </p:txBody>
-        </p:sp>
-      </p:grpSp>
-      <p:pic>
-        <p:nvPicPr>
-          <p:cNvPr id="62" name="Google Shape;62;p3" descr="LINE公式アカウントのロゴの使用方法とは？種類やダウンロード方法、利用時の注意点を紹介 | Mico（ミコ）"/>
-          <p:cNvPicPr preferRelativeResize="0"/>
-          <p:nvPr/>
-        </p:nvPicPr>
-        <p:blipFill rotWithShape="1">
-          <a:blip r:embed="rId2">
-            <a:alphaModFix/>
-          </a:blip>
-          <a:srcRect/>
-          <a:stretch/>
-        </p:blipFill>
-        <p:spPr>
-          <a:xfrm>
-            <a:off x="351381" y="1234746"/>
-            <a:ext cx="656177" cy="655521"/>
-          </a:xfrm>
-          <a:prstGeom prst="rect">
-            <a:avLst/>
-          </a:prstGeom>
-          <a:noFill/>
-          <a:ln>
-            <a:noFill/>
-          </a:ln>
-        </p:spPr>
-      </p:pic>
-      <p:sp>
-        <p:nvSpPr>
-          <p:cNvPr id="68" name="Rounded Rectangle 67"/>
-          <p:cNvSpPr/>
-          <p:nvPr/>
-        </p:nvSpPr>
-        <p:spPr>
-          <a:xfrm>
-            <a:off x="548640" y="3199715"/>
-            <a:ext cx="8814816" cy="3172968"/>
-          </a:xfrm>
-          <a:prstGeom prst="roundRect">
-            <a:avLst>
-              <a:gd name="adj" fmla="val 6000"/>
-            </a:avLst>
-          </a:prstGeom>
-          <a:solidFill>
-            <a:srgbClr val="EAF0FA"/>
-          </a:solidFill>
-          <a:ln w="12700">
-            <a:solidFill>
-              <a:srgbClr val="3467B2"/>
-            </a:solidFill>
-          </a:ln>
-          <a:effectLst/>
-        </p:spPr>
-        <p:style>
-          <a:lnRef idx="1">
-            <a:schemeClr val="accent1"/>
-          </a:lnRef>
-          <a:fillRef idx="3">
-            <a:schemeClr val="accent1"/>
-          </a:fillRef>
-          <a:effectRef idx="2">
-            <a:schemeClr val="accent1"/>
-          </a:effectRef>
-          <a:fontRef idx="minor">
-            <a:schemeClr val="lt1"/>
-          </a:fontRef>
-        </p:style>
-        <p:txBody>
-          <a:bodyPr wrap="square" lIns="228600" rIns="182880" rtlCol="0" anchor="ctr"/>
-          <a:lstStyle/>
-          <a:p>
-            <a:pPr algn="l"/>
-            <a:r>
-              <a:rPr sz="1900" b="1" dirty="0">
-                <a:solidFill>
-                  <a:srgbClr val="15133D"/>
-                </a:solidFill>
-                <a:latin typeface="メイリオ"/>
-              </a:rPr>
-              <a:t>審査で確認される4つの条件</a:t>
-            </a:r>
-          </a:p>
-          <a:p>
-            <a:pPr algn="l">
-              <a:lnSpc>
-                <a:spcPct val="115000"/>
-              </a:lnSpc>
-              <a:spcBef>
-                <a:spcPts val="1000"/>
-              </a:spcBef>
-            </a:pPr>
-            <a:r>
-              <a:rPr sz="1400" b="1" dirty="0">
-                <a:solidFill>
-                  <a:srgbClr val="15133D"/>
-                </a:solidFill>
-                <a:latin typeface="メイリオ"/>
-              </a:rPr>
-              <a:t>■ </a:t>
-            </a:r>
-            <a:r>
-              <a:rPr sz="1400" b="1" dirty="0" err="1">
-                <a:solidFill>
-                  <a:srgbClr val="15133D"/>
-                </a:solidFill>
-                <a:latin typeface="メイリオ"/>
-              </a:rPr>
-              <a:t>遷移の方式：</a:t>
-            </a:r>
-            <a:r>
-              <a:rPr sz="1400" dirty="0" err="1">
-                <a:solidFill>
-                  <a:srgbClr val="333333"/>
-                </a:solidFill>
-                <a:latin typeface="メイリオ"/>
-              </a:rPr>
-              <a:t>iPhone／Androidの標準の仕組み（Universal</a:t>
-            </a:r>
-            <a:r>
-              <a:rPr sz="1400" dirty="0">
-                <a:solidFill>
-                  <a:srgbClr val="333333"/>
-                </a:solidFill>
-                <a:latin typeface="メイリオ"/>
-              </a:rPr>
-              <a:t> </a:t>
-            </a:r>
-            <a:r>
-              <a:rPr sz="1400" dirty="0" err="1">
-                <a:solidFill>
-                  <a:srgbClr val="333333"/>
-                </a:solidFill>
-                <a:latin typeface="メイリオ"/>
-              </a:rPr>
-              <a:t>links／App</a:t>
-            </a:r>
-            <a:r>
-              <a:rPr sz="1400" dirty="0">
-                <a:solidFill>
-                  <a:srgbClr val="333333"/>
-                </a:solidFill>
-                <a:latin typeface="メイリオ"/>
-              </a:rPr>
-              <a:t> </a:t>
-            </a:r>
-            <a:r>
-              <a:rPr sz="1400" dirty="0" err="1">
-                <a:solidFill>
-                  <a:srgbClr val="333333"/>
-                </a:solidFill>
-                <a:latin typeface="メイリオ"/>
-              </a:rPr>
-              <a:t>Links）でアプリを開くこと</a:t>
-            </a:r>
-            <a:endParaRPr sz="1400" dirty="0">
-              <a:solidFill>
-                <a:srgbClr val="333333"/>
-              </a:solidFill>
-              <a:latin typeface="メイリオ"/>
-            </a:endParaRPr>
-          </a:p>
-          <a:p>
-            <a:pPr algn="l">
-              <a:lnSpc>
-                <a:spcPct val="115000"/>
-              </a:lnSpc>
-              <a:spcBef>
-                <a:spcPts val="1000"/>
-              </a:spcBef>
-            </a:pPr>
-            <a:r>
-              <a:rPr sz="1400" b="1" dirty="0">
-                <a:solidFill>
-                  <a:srgbClr val="15133D"/>
-                </a:solidFill>
-                <a:latin typeface="メイリオ"/>
-              </a:rPr>
-              <a:t>■ </a:t>
-            </a:r>
-            <a:r>
-              <a:rPr sz="1400" b="1" dirty="0" err="1">
-                <a:solidFill>
-                  <a:srgbClr val="15133D"/>
-                </a:solidFill>
-                <a:latin typeface="メイリオ"/>
-              </a:rPr>
-              <a:t>ドメインの一致：</a:t>
-            </a:r>
-            <a:r>
-              <a:rPr sz="1400" dirty="0" err="1">
-                <a:solidFill>
-                  <a:srgbClr val="333333"/>
-                </a:solidFill>
-                <a:latin typeface="メイリオ"/>
-              </a:rPr>
-              <a:t>送信元の公式ドメインと、遷移先URLのドメインが同じであること</a:t>
-            </a:r>
-            <a:endParaRPr sz="1400" dirty="0">
-              <a:solidFill>
-                <a:srgbClr val="333333"/>
-              </a:solidFill>
-              <a:latin typeface="メイリオ"/>
-            </a:endParaRPr>
-          </a:p>
-          <a:p>
-            <a:pPr algn="l">
-              <a:lnSpc>
-                <a:spcPct val="115000"/>
-              </a:lnSpc>
-              <a:spcBef>
-                <a:spcPts val="1000"/>
-              </a:spcBef>
-            </a:pPr>
-            <a:r>
-              <a:rPr sz="1400" b="1" dirty="0">
-                <a:solidFill>
-                  <a:srgbClr val="15133D"/>
-                </a:solidFill>
-                <a:latin typeface="メイリオ"/>
-              </a:rPr>
-              <a:t>■ </a:t>
-            </a:r>
-            <a:r>
-              <a:rPr sz="1400" b="1" dirty="0" err="1">
-                <a:solidFill>
-                  <a:srgbClr val="15133D"/>
-                </a:solidFill>
-                <a:latin typeface="メイリオ"/>
-              </a:rPr>
-              <a:t>アプリ未インストール時：</a:t>
-            </a:r>
-            <a:r>
-              <a:rPr sz="1400" dirty="0" err="1">
-                <a:solidFill>
-                  <a:srgbClr val="333333"/>
-                </a:solidFill>
-                <a:latin typeface="メイリオ"/>
-              </a:rPr>
-              <a:t>通知内容に関連するWebページを表示すること</a:t>
-            </a:r>
-            <a:endParaRPr lang="en-US" sz="1400" dirty="0">
-              <a:solidFill>
-                <a:srgbClr val="333333"/>
-              </a:solidFill>
-              <a:latin typeface="メイリオ"/>
-            </a:endParaRPr>
-          </a:p>
-          <a:p>
-            <a:pPr algn="l">
-              <a:lnSpc>
-                <a:spcPct val="115000"/>
-              </a:lnSpc>
-              <a:spcBef>
-                <a:spcPts val="1000"/>
-              </a:spcBef>
-            </a:pPr>
-            <a:r>
-              <a:rPr sz="1400" dirty="0">
-                <a:solidFill>
-                  <a:srgbClr val="333333"/>
-                </a:solidFill>
-                <a:latin typeface="メイリオ"/>
-              </a:rPr>
-              <a:t>（App </a:t>
-            </a:r>
-            <a:r>
-              <a:rPr sz="1400" dirty="0" err="1">
-                <a:solidFill>
-                  <a:srgbClr val="333333"/>
-                </a:solidFill>
-                <a:latin typeface="メイリオ"/>
-              </a:rPr>
-              <a:t>Store／Google</a:t>
-            </a:r>
-            <a:r>
-              <a:rPr sz="1400" dirty="0">
-                <a:solidFill>
-                  <a:srgbClr val="333333"/>
-                </a:solidFill>
-                <a:latin typeface="メイリオ"/>
-              </a:rPr>
-              <a:t> </a:t>
-            </a:r>
-            <a:r>
-              <a:rPr sz="1400" dirty="0" err="1">
-                <a:solidFill>
-                  <a:srgbClr val="333333"/>
-                </a:solidFill>
-                <a:latin typeface="メイリオ"/>
-              </a:rPr>
-              <a:t>Playへの自動遷移は不可</a:t>
-            </a:r>
-            <a:r>
-              <a:rPr sz="1400" dirty="0">
-                <a:solidFill>
-                  <a:srgbClr val="333333"/>
-                </a:solidFill>
-                <a:latin typeface="メイリオ"/>
-              </a:rPr>
-              <a:t>）</a:t>
-            </a:r>
-          </a:p>
-          <a:p>
-            <a:pPr algn="l">
-              <a:lnSpc>
-                <a:spcPct val="115000"/>
-              </a:lnSpc>
-              <a:spcBef>
-                <a:spcPts val="1000"/>
-              </a:spcBef>
-            </a:pPr>
-            <a:r>
-              <a:rPr sz="1400" b="1" dirty="0">
-                <a:solidFill>
-                  <a:srgbClr val="15133D"/>
-                </a:solidFill>
-                <a:latin typeface="メイリオ"/>
-              </a:rPr>
-              <a:t>■ </a:t>
-            </a:r>
-            <a:r>
-              <a:rPr sz="1400" b="1" dirty="0" err="1">
-                <a:solidFill>
-                  <a:srgbClr val="15133D"/>
-                </a:solidFill>
-                <a:latin typeface="メイリオ"/>
-              </a:rPr>
-              <a:t>表示内容の一致：</a:t>
-            </a:r>
-            <a:r>
-              <a:rPr sz="1400" dirty="0" err="1">
-                <a:solidFill>
-                  <a:srgbClr val="333333"/>
-                </a:solidFill>
-                <a:latin typeface="メイリオ"/>
-              </a:rPr>
-              <a:t>アプリとWebで同じ内容を表示すること</a:t>
-            </a:r>
-            <a:endParaRPr lang="en-US" sz="1400" dirty="0">
-              <a:solidFill>
-                <a:srgbClr val="333333"/>
-              </a:solidFill>
-              <a:latin typeface="メイリオ"/>
-            </a:endParaRPr>
-          </a:p>
-          <a:p>
-            <a:pPr algn="l">
-              <a:lnSpc>
-                <a:spcPct val="115000"/>
-              </a:lnSpc>
-              <a:spcBef>
-                <a:spcPts val="1000"/>
-              </a:spcBef>
-            </a:pPr>
-            <a:r>
-              <a:rPr sz="1400" dirty="0">
-                <a:solidFill>
-                  <a:srgbClr val="333333"/>
-                </a:solidFill>
-                <a:latin typeface="メイリオ"/>
-              </a:rPr>
-              <a:t>（</a:t>
-            </a:r>
-            <a:r>
-              <a:rPr sz="1400" dirty="0" err="1">
-                <a:solidFill>
-                  <a:srgbClr val="333333"/>
-                </a:solidFill>
-                <a:latin typeface="メイリオ"/>
-              </a:rPr>
-              <a:t>アプリはマイページ・Webはトップページ、のような構成は不可</a:t>
-            </a:r>
-            <a:r>
-              <a:rPr sz="1400" dirty="0">
-                <a:solidFill>
-                  <a:srgbClr val="333333"/>
-                </a:solidFill>
-                <a:latin typeface="メイリオ"/>
-              </a:rPr>
-              <a:t>）</a:t>
-            </a:r>
-          </a:p>
-        </p:txBody>
-      </p:sp>
-    </p:spTree>
-  </p:cSld>
-  <p:clrMapOvr>
-    <a:masterClrMapping/>
-  </p:clrMapOvr>
-</p:sld>
-</file>
-
-<file path=ppt/slides/slide5.xml><?xml version="1.0" encoding="utf-8"?>
-<p:sld xmlns:a="http://schemas.openxmlformats.org/drawingml/2006/main" xmlns:r="http://schemas.openxmlformats.org/officeDocument/2006/relationships" xmlns:p="http://schemas.openxmlformats.org/presentationml/2006/main">
-  <p:cSld>
-    <p:spTree>
-      <p:nvGrpSpPr>
-        <p:cNvPr id="1" name=""/>
-        <p:cNvGrpSpPr/>
-        <p:nvPr/>
-      </p:nvGrpSpPr>
-      <p:grpSpPr>
-        <a:xfrm>
-          <a:off x="0" y="0"/>
-          <a:ext cx="0" cy="0"/>
-          <a:chOff x="0" y="0"/>
-          <a:chExt cx="0" cy="0"/>
-        </a:xfrm>
-      </p:grpSpPr>
-      <p:sp>
-        <p:nvSpPr>
-          <p:cNvPr id="40" name="Google Shape;40;p3"/>
-          <p:cNvSpPr/>
-          <p:nvPr/>
-        </p:nvSpPr>
-        <p:spPr>
-          <a:xfrm>
-            <a:off x="292801" y="730955"/>
-            <a:ext cx="1296144" cy="435690"/>
-          </a:xfrm>
-          <a:prstGeom prst="rect">
-            <a:avLst/>
-          </a:prstGeom>
-          <a:solidFill>
-            <a:schemeClr val="dk2"/>
-          </a:solidFill>
-          <a:ln w="9525" cap="flat" cmpd="sng">
-            <a:solidFill>
-              <a:srgbClr val="4A7DBA"/>
-            </a:solidFill>
-            <a:prstDash val="solid"/>
-            <a:round/>
-            <a:headEnd type="none" w="sm" len="sm"/>
-            <a:tailEnd type="none" w="sm" len="sm"/>
-          </a:ln>
-        </p:spPr>
-        <p:txBody>
-          <a:bodyPr spcFirstLastPara="1" wrap="square" lIns="91425" tIns="45700" rIns="91425" bIns="45700" anchor="ctr" anchorCtr="0">
-            <a:noAutofit/>
-          </a:bodyPr>
-          <a:lstStyle/>
-          <a:p>
-            <a:pPr marL="0" marR="0" lvl="0" indent="0" algn="ctr" rtl="0">
-              <a:spcBef>
-                <a:spcPts val="0"/>
-              </a:spcBef>
-              <a:spcAft>
-                <a:spcPts val="0"/>
-              </a:spcAft>
-              <a:buNone/>
-            </a:pPr>
-            <a:r>
-              <a:rPr lang="ja-JP" sz="1800" b="0" i="0" u="none" strike="noStrike" cap="none">
-                <a:solidFill>
-                  <a:schemeClr val="lt1"/>
-                </a:solidFill>
-                <a:latin typeface="メイリオ"/>
-                <a:ea typeface="Meiryo"/>
-                <a:cs typeface="Meiryo"/>
-                <a:sym typeface="Meiryo"/>
-              </a:rPr>
-              <a:t>対象業界</a:t>
-            </a:r>
-            <a:endParaRPr/>
-          </a:p>
-        </p:txBody>
-      </p:sp>
-      <p:sp>
-        <p:nvSpPr>
-          <p:cNvPr id="41" name="Google Shape;41;p3"/>
-          <p:cNvSpPr/>
-          <p:nvPr/>
-        </p:nvSpPr>
-        <p:spPr>
-          <a:xfrm>
-            <a:off x="7560840" y="730955"/>
-            <a:ext cx="829618" cy="435690"/>
-          </a:xfrm>
-          <a:prstGeom prst="rect">
-            <a:avLst/>
-          </a:prstGeom>
-          <a:solidFill>
-            <a:schemeClr val="bg1"/>
-          </a:solidFill>
-          <a:ln w="9525" cap="flat" cmpd="sng">
-            <a:solidFill>
-              <a:srgbClr val="4F81BD"/>
-            </a:solidFill>
-            <a:prstDash val="sysDash"/>
-            <a:round/>
-            <a:headEnd type="none" w="sm" len="sm"/>
-            <a:tailEnd type="none" w="sm" len="sm"/>
-          </a:ln>
-        </p:spPr>
-        <p:txBody>
-          <a:bodyPr spcFirstLastPara="1" wrap="square" lIns="91425" tIns="45700" rIns="91425" bIns="45700" anchor="ctr" anchorCtr="0">
-            <a:noAutofit/>
-          </a:bodyPr>
-          <a:lstStyle/>
-          <a:p>
-            <a:pPr marL="0" marR="0" lvl="0" indent="0" algn="ctr" rtl="0">
-              <a:spcBef>
-                <a:spcPts val="0"/>
-              </a:spcBef>
-              <a:spcAft>
-                <a:spcPts val="0"/>
-              </a:spcAft>
-              <a:buNone/>
-            </a:pPr>
-            <a:r>
-              <a:rPr lang="ja-JP" sz="1200" b="0" i="0" u="none" strike="noStrike" cap="none">
-                <a:solidFill>
-                  <a:schemeClr val="dk1"/>
-                </a:solidFill>
-                <a:latin typeface="メイリオ"/>
-                <a:ea typeface="Meiryo"/>
-                <a:cs typeface="Meiryo"/>
-                <a:sym typeface="Meiryo"/>
-              </a:rPr>
-              <a:t>その他</a:t>
-            </a:r>
-            <a:endParaRPr sz="1200" b="0" i="0" u="none" strike="noStrike" cap="none">
-              <a:solidFill>
-                <a:schemeClr val="dk1"/>
-              </a:solidFill>
-              <a:latin typeface="Meiryo"/>
-              <a:ea typeface="Meiryo"/>
-              <a:cs typeface="Meiryo"/>
-              <a:sym typeface="Meiryo"/>
-            </a:endParaRPr>
-          </a:p>
-        </p:txBody>
-      </p:sp>
-      <p:sp>
-        <p:nvSpPr>
-          <p:cNvPr id="42" name="Google Shape;42;p3"/>
-          <p:cNvSpPr/>
-          <p:nvPr/>
-        </p:nvSpPr>
-        <p:spPr>
-          <a:xfrm>
-            <a:off x="6679050" y="730955"/>
-            <a:ext cx="829618" cy="435690"/>
-          </a:xfrm>
-          <a:prstGeom prst="rect">
-            <a:avLst/>
-          </a:prstGeom>
-          <a:solidFill>
-            <a:schemeClr val="bg1"/>
-          </a:solidFill>
-          <a:ln w="9525" cap="flat" cmpd="sng">
-            <a:solidFill>
-              <a:srgbClr val="4F81BD"/>
-            </a:solidFill>
-            <a:prstDash val="sysDash"/>
-            <a:round/>
-            <a:headEnd type="none" w="sm" len="sm"/>
-            <a:tailEnd type="none" w="sm" len="sm"/>
-          </a:ln>
-        </p:spPr>
-        <p:txBody>
-          <a:bodyPr spcFirstLastPara="1" wrap="square" lIns="91425" tIns="45700" rIns="91425" bIns="45700" anchor="ctr" anchorCtr="0">
-            <a:noAutofit/>
-          </a:bodyPr>
-          <a:lstStyle/>
-          <a:p>
-            <a:pPr marL="0" marR="0" lvl="0" indent="0" algn="ctr" rtl="0">
-              <a:spcBef>
-                <a:spcPts val="0"/>
-              </a:spcBef>
-              <a:spcAft>
-                <a:spcPts val="0"/>
-              </a:spcAft>
-              <a:buNone/>
-            </a:pPr>
-            <a:r>
-              <a:rPr lang="ja-JP" sz="1000" b="0" i="0" u="none" strike="noStrike" cap="none">
-                <a:solidFill>
-                  <a:schemeClr val="dk1"/>
-                </a:solidFill>
-                <a:latin typeface="メイリオ"/>
-                <a:ea typeface="Meiryo"/>
-                <a:cs typeface="Meiryo"/>
-                <a:sym typeface="Meiryo"/>
-              </a:rPr>
-              <a:t>オプション</a:t>
-            </a:r>
-            <a:endParaRPr sz="1000" b="0" i="0" u="none" strike="noStrike" cap="none">
-              <a:solidFill>
-                <a:schemeClr val="dk1"/>
-              </a:solidFill>
-              <a:latin typeface="Meiryo"/>
-              <a:ea typeface="Meiryo"/>
-              <a:cs typeface="Meiryo"/>
-              <a:sym typeface="Meiryo"/>
-            </a:endParaRPr>
-          </a:p>
-          <a:p>
-            <a:pPr marL="0" marR="0" lvl="0" indent="0" algn="ctr" rtl="0">
-              <a:spcBef>
-                <a:spcPts val="0"/>
-              </a:spcBef>
-              <a:spcAft>
-                <a:spcPts val="0"/>
-              </a:spcAft>
-              <a:buNone/>
-            </a:pPr>
-            <a:r>
-              <a:rPr lang="ja-JP" sz="1000" b="0" i="0" u="none" strike="noStrike" cap="none">
-                <a:solidFill>
-                  <a:schemeClr val="dk1"/>
-                </a:solidFill>
-                <a:latin typeface="メイリオ"/>
-                <a:ea typeface="Meiryo"/>
-                <a:cs typeface="Meiryo"/>
-                <a:sym typeface="Meiryo"/>
-              </a:rPr>
-              <a:t>商材</a:t>
-            </a:r>
-            <a:endParaRPr/>
-          </a:p>
-        </p:txBody>
-      </p:sp>
-      <p:sp>
-        <p:nvSpPr>
-          <p:cNvPr id="43" name="Google Shape;43;p3"/>
-          <p:cNvSpPr/>
-          <p:nvPr/>
-        </p:nvSpPr>
-        <p:spPr>
-          <a:xfrm>
-            <a:off x="1594068" y="730955"/>
-            <a:ext cx="2926883" cy="435690"/>
-          </a:xfrm>
-          <a:prstGeom prst="rect">
-            <a:avLst/>
-          </a:prstGeom>
-          <a:noFill/>
-          <a:ln w="9525" cap="flat" cmpd="sng">
-            <a:solidFill>
-              <a:srgbClr val="4A7DBA"/>
-            </a:solidFill>
-            <a:prstDash val="solid"/>
-            <a:round/>
-            <a:headEnd type="none" w="sm" len="sm"/>
-            <a:tailEnd type="none" w="sm" len="sm"/>
-          </a:ln>
-        </p:spPr>
-        <p:txBody>
-          <a:bodyPr spcFirstLastPara="1" wrap="square" lIns="91425" tIns="45700" rIns="91425" bIns="45700" anchor="ctr" anchorCtr="0">
-            <a:noAutofit/>
-          </a:bodyPr>
-          <a:lstStyle/>
-          <a:p>
-            <a:pPr marL="0" marR="0" lvl="0" indent="0" algn="ctr" rtl="0">
-              <a:spcBef>
-                <a:spcPts val="0"/>
-              </a:spcBef>
-              <a:spcAft>
-                <a:spcPts val="0"/>
-              </a:spcAft>
-              <a:buNone/>
-            </a:pPr>
-            <a:r>
-              <a:rPr lang="ja-JP" sz="1300" b="0" i="0" u="none" strike="noStrike" cap="none">
-                <a:solidFill>
-                  <a:schemeClr val="dk1"/>
-                </a:solidFill>
-                <a:latin typeface="メイリオ"/>
-                <a:ea typeface="Meiryo"/>
-                <a:cs typeface="Meiryo"/>
-                <a:sym typeface="Meiryo"/>
-              </a:rPr>
-              <a:t>通知メッセージをご利用中の全業種</a:t>
-            </a:r>
-            <a:endParaRPr/>
-          </a:p>
-        </p:txBody>
-      </p:sp>
-      <p:sp>
-        <p:nvSpPr>
-          <p:cNvPr id="44" name="Google Shape;44;p3"/>
-          <p:cNvSpPr txBox="1"/>
-          <p:nvPr/>
-        </p:nvSpPr>
-        <p:spPr>
-          <a:xfrm>
-            <a:off x="3296816" y="6597352"/>
-            <a:ext cx="6209091" cy="215444"/>
-          </a:xfrm>
-          <a:prstGeom prst="rect">
-            <a:avLst/>
-          </a:prstGeom>
-          <a:noFill/>
-          <a:ln>
-            <a:noFill/>
-          </a:ln>
-        </p:spPr>
-        <p:txBody>
-          <a:bodyPr spcFirstLastPara="1" wrap="square" lIns="91425" tIns="45700" rIns="91425" bIns="45700" anchor="t" anchorCtr="0">
-            <a:spAutoFit/>
-          </a:bodyPr>
-          <a:lstStyle/>
-          <a:p>
-            <a:pPr marL="0" marR="0" lvl="0" indent="0" algn="l" rtl="0">
-              <a:spcBef>
-                <a:spcPts val="0"/>
-              </a:spcBef>
-              <a:spcAft>
-                <a:spcPts val="0"/>
-              </a:spcAft>
-              <a:buNone/>
-            </a:pPr>
-            <a:r>
-              <a:rPr lang="ja-JP" sz="800" b="0" i="0" u="none" strike="noStrike" cap="none">
-                <a:solidFill>
-                  <a:schemeClr val="lt1"/>
-                </a:solidFill>
-                <a:latin typeface="メイリオ"/>
-                <a:ea typeface="Meiryo"/>
-                <a:cs typeface="Meiryo"/>
-                <a:sym typeface="Meiryo"/>
-              </a:rPr>
-              <a:t>出典：代理店情報</a:t>
-            </a:r>
-            <a:endParaRPr sz="800">
-              <a:solidFill>
-                <a:schemeClr val="lt1"/>
-              </a:solidFill>
-              <a:latin typeface="Meiryo"/>
-              <a:ea typeface="Meiryo"/>
-              <a:cs typeface="Meiryo"/>
-              <a:sym typeface="Meiryo"/>
-            </a:endParaRPr>
-          </a:p>
-        </p:txBody>
-      </p:sp>
-      <p:sp>
-        <p:nvSpPr>
-          <p:cNvPr id="45" name="Google Shape;45;p3"/>
-          <p:cNvSpPr/>
-          <p:nvPr/>
-        </p:nvSpPr>
-        <p:spPr>
-          <a:xfrm>
-            <a:off x="0" y="1234746"/>
-            <a:ext cx="9906000" cy="672259"/>
-          </a:xfrm>
-          <a:prstGeom prst="rect">
-            <a:avLst/>
-          </a:prstGeom>
-          <a:solidFill>
-            <a:srgbClr val="C5D8F1"/>
-          </a:solidFill>
-          <a:ln>
-            <a:noFill/>
-          </a:ln>
-        </p:spPr>
-        <p:txBody>
-          <a:bodyPr spcFirstLastPara="1" wrap="square" lIns="91425" tIns="45700" rIns="91425" bIns="45700" anchor="ctr" anchorCtr="0">
-            <a:noAutofit/>
-          </a:bodyPr>
-          <a:lstStyle/>
-          <a:p>
-            <a:pPr marL="0" marR="0" lvl="0" indent="0" algn="ctr" rtl="0">
-              <a:spcBef>
-                <a:spcPts val="0"/>
-              </a:spcBef>
-              <a:spcAft>
-                <a:spcPts val="0"/>
-              </a:spcAft>
-              <a:buNone/>
-            </a:pPr>
-            <a:r>
-              <a:rPr lang="ja-JP" sz="1600" b="1">
-                <a:solidFill>
-                  <a:srgbClr val="004DE6"/>
-                </a:solidFill>
-                <a:latin typeface="メイリオ"/>
-                <a:ea typeface="Meiryo"/>
-                <a:cs typeface="Meiryo"/>
-                <a:sym typeface="Meiryo"/>
-              </a:rPr>
-              <a:t>　　　　　　</a:t>
-            </a:r>
-            <a:endParaRPr sz="1800" b="1">
-              <a:solidFill>
-                <a:srgbClr val="004DE6"/>
-              </a:solidFill>
-              <a:latin typeface="Meiryo"/>
-              <a:ea typeface="Meiryo"/>
-              <a:cs typeface="Meiryo"/>
-              <a:sym typeface="Meiryo"/>
-            </a:endParaRPr>
-          </a:p>
-        </p:txBody>
-      </p:sp>
-      <p:sp>
-        <p:nvSpPr>
-          <p:cNvPr id="46" name="Google Shape;46;p3"/>
-          <p:cNvSpPr/>
-          <p:nvPr/>
-        </p:nvSpPr>
-        <p:spPr>
-          <a:xfrm>
-            <a:off x="1089832" y="1437370"/>
-            <a:ext cx="7031520" cy="338554"/>
-          </a:xfrm>
-          <a:prstGeom prst="rect">
-            <a:avLst/>
-          </a:prstGeom>
-          <a:noFill/>
-          <a:ln>
-            <a:noFill/>
-          </a:ln>
-        </p:spPr>
-        <p:txBody>
-          <a:bodyPr spcFirstLastPara="1" wrap="square" lIns="91425" tIns="45700" rIns="91425" bIns="45700" anchor="t" anchorCtr="0">
-            <a:spAutoFit/>
-          </a:bodyPr>
-          <a:lstStyle/>
-          <a:p>
-            <a:pPr marL="0" marR="0" lvl="0" indent="0" algn="l" rtl="0">
-              <a:spcBef>
-                <a:spcPts val="0"/>
-              </a:spcBef>
-              <a:spcAft>
-                <a:spcPts val="0"/>
-              </a:spcAft>
-              <a:buNone/>
-            </a:pPr>
-            <a:r>
-              <a:rPr lang="ja-JP" sz="1600" b="1">
-                <a:solidFill>
-                  <a:srgbClr val="004DE6"/>
-                </a:solidFill>
-                <a:latin typeface="メイリオ"/>
-                <a:ea typeface="Meiryo"/>
-                <a:cs typeface="Meiryo"/>
-                <a:sym typeface="Meiryo"/>
-              </a:rPr>
-              <a:t>【LINE通知メッセージ】UX追加申請の請求書発行をLBPMへ移行</a:t>
-            </a:r>
-            <a:endParaRPr sz="1600" b="1">
-              <a:solidFill>
-                <a:srgbClr val="004DE6"/>
-              </a:solidFill>
-              <a:latin typeface="Meiryo"/>
-              <a:ea typeface="Meiryo"/>
-              <a:cs typeface="Meiryo"/>
-              <a:sym typeface="Meiryo"/>
-            </a:endParaRPr>
-          </a:p>
-        </p:txBody>
-      </p:sp>
-      <p:sp>
-        <p:nvSpPr>
-          <p:cNvPr id="47" name="Google Shape;47;p3"/>
-          <p:cNvSpPr txBox="1"/>
-          <p:nvPr/>
-        </p:nvSpPr>
-        <p:spPr>
-          <a:xfrm>
-            <a:off x="182880" y="88175"/>
-            <a:ext cx="7512385" cy="365091"/>
-          </a:xfrm>
-          <a:prstGeom prst="rect">
-            <a:avLst/>
-          </a:prstGeom>
-          <a:noFill/>
-          <a:ln>
-            <a:noFill/>
-          </a:ln>
-        </p:spPr>
-        <p:txBody>
-          <a:bodyPr spcFirstLastPara="1" wrap="square" lIns="91425" tIns="72000" rIns="91425" bIns="45700" anchor="t" anchorCtr="0">
-            <a:spAutoFit/>
-          </a:bodyPr>
-          <a:lstStyle/>
-          <a:p>
-            <a:pPr marL="0" marR="0" lvl="0" indent="0" algn="l" rtl="0">
-              <a:spcBef>
-                <a:spcPts val="0"/>
-              </a:spcBef>
-              <a:spcAft>
-                <a:spcPts val="0"/>
-              </a:spcAft>
-              <a:buClr>
-                <a:schemeClr val="dk1"/>
-              </a:buClr>
-              <a:buSzPts val="1600"/>
-              <a:buFont typeface="Arial"/>
-              <a:buNone/>
-            </a:pPr>
-            <a:r>
-              <a:rPr lang="ja-JP" sz="1600" b="0" u="none">
-                <a:solidFill>
-                  <a:schemeClr val="dk1"/>
-                </a:solidFill>
-                <a:latin typeface="メイリオ"/>
-                <a:ea typeface="Meiryo"/>
-                <a:cs typeface="Meiryo"/>
-                <a:sym typeface="Meiryo"/>
-              </a:rPr>
-              <a:t>    今後のアップデート情報</a:t>
-            </a:r>
-            <a:endParaRPr sz="1600" b="0" u="none">
-              <a:solidFill>
-                <a:schemeClr val="dk1"/>
-              </a:solidFill>
-              <a:latin typeface="Meiryo"/>
-              <a:ea typeface="Meiryo"/>
-              <a:cs typeface="Meiryo"/>
-              <a:sym typeface="Meiryo"/>
-            </a:endParaRPr>
-          </a:p>
-        </p:txBody>
-      </p:sp>
-      <p:sp>
-        <p:nvSpPr>
-          <p:cNvPr id="48" name="Google Shape;48;p3"/>
-          <p:cNvSpPr/>
-          <p:nvPr/>
-        </p:nvSpPr>
-        <p:spPr>
-          <a:xfrm>
-            <a:off x="5797260" y="730955"/>
-            <a:ext cx="829618" cy="435690"/>
-          </a:xfrm>
-          <a:prstGeom prst="rect">
-            <a:avLst/>
-          </a:prstGeom>
-          <a:solidFill>
-            <a:schemeClr val="tx2"/>
-          </a:solidFill>
-          <a:ln w="9525" cap="flat" cmpd="sng">
-            <a:solidFill>
-              <a:srgbClr val="4F81BD"/>
-            </a:solidFill>
-            <a:prstDash val="solid"/>
-            <a:round/>
-            <a:headEnd type="none" w="sm" len="sm"/>
-            <a:tailEnd type="none" w="sm" len="sm"/>
-          </a:ln>
-        </p:spPr>
-        <p:txBody>
-          <a:bodyPr spcFirstLastPara="1" wrap="square" lIns="91425" tIns="45700" rIns="91425" bIns="45700" anchor="ctr" anchorCtr="0">
-            <a:noAutofit/>
-          </a:bodyPr>
-          <a:lstStyle/>
-          <a:p>
-            <a:pPr marL="0" marR="0" lvl="0" indent="0" algn="ctr" rtl="0">
-              <a:spcBef>
-                <a:spcPts val="0"/>
-              </a:spcBef>
-              <a:spcAft>
-                <a:spcPts val="0"/>
-              </a:spcAft>
-              <a:buClr>
-                <a:schemeClr val="dk1"/>
-              </a:buClr>
-              <a:buSzPts val="1000"/>
-              <a:buFont typeface="Meiryo"/>
-              <a:buNone/>
-            </a:pPr>
-            <a:r>
-              <a:rPr lang="ja-JP" sz="1000">
-                <a:solidFill>
-                  <a:schemeClr val="dk1"/>
-                </a:solidFill>
-                <a:latin typeface="メイリオ"/>
-                <a:ea typeface="Meiryo"/>
-                <a:cs typeface="Meiryo"/>
-                <a:sym typeface="Meiryo"/>
-              </a:rPr>
-              <a:t>開発</a:t>
-            </a:r>
-            <a:endParaRPr sz="1000">
-              <a:solidFill>
-                <a:schemeClr val="dk1"/>
-              </a:solidFill>
-              <a:latin typeface="Meiryo"/>
-              <a:ea typeface="Meiryo"/>
-              <a:cs typeface="Meiryo"/>
-              <a:sym typeface="Meiryo"/>
-            </a:endParaRPr>
-          </a:p>
-          <a:p>
-            <a:pPr marL="0" marR="0" lvl="0" indent="0" algn="ctr" rtl="0">
-              <a:spcBef>
-                <a:spcPts val="0"/>
-              </a:spcBef>
-              <a:spcAft>
-                <a:spcPts val="0"/>
-              </a:spcAft>
-              <a:buClr>
-                <a:schemeClr val="dk1"/>
-              </a:buClr>
-              <a:buSzPts val="1000"/>
-              <a:buFont typeface="Meiryo"/>
-              <a:buNone/>
-            </a:pPr>
-            <a:r>
-              <a:rPr lang="ja-JP" sz="1000">
-                <a:solidFill>
-                  <a:schemeClr val="dk1"/>
-                </a:solidFill>
-                <a:latin typeface="メイリオ"/>
-                <a:ea typeface="Meiryo"/>
-                <a:cs typeface="Meiryo"/>
-                <a:sym typeface="Meiryo"/>
-              </a:rPr>
-              <a:t>LINE API</a:t>
-            </a:r>
-            <a:endParaRPr sz="1000">
-              <a:solidFill>
-                <a:schemeClr val="dk1"/>
-              </a:solidFill>
-              <a:latin typeface="Meiryo"/>
-              <a:ea typeface="Meiryo"/>
-              <a:cs typeface="Meiryo"/>
-              <a:sym typeface="Meiryo"/>
-            </a:endParaRPr>
-          </a:p>
-        </p:txBody>
-      </p:sp>
-      <p:sp>
-        <p:nvSpPr>
-          <p:cNvPr id="49" name="Google Shape;49;p3"/>
-          <p:cNvSpPr/>
-          <p:nvPr/>
-        </p:nvSpPr>
-        <p:spPr>
-          <a:xfrm>
-            <a:off x="4915470" y="730955"/>
-            <a:ext cx="829618" cy="435690"/>
-          </a:xfrm>
-          <a:prstGeom prst="rect">
-            <a:avLst/>
-          </a:prstGeom>
-          <a:solidFill>
-            <a:schemeClr val="bg1"/>
-          </a:solidFill>
-          <a:ln w="9525" cap="flat" cmpd="sng">
-            <a:solidFill>
-              <a:srgbClr val="4F81BD"/>
-            </a:solidFill>
-            <a:prstDash val="sysDash"/>
-            <a:round/>
-            <a:headEnd type="none" w="sm" len="sm"/>
-            <a:tailEnd type="none" w="sm" len="sm"/>
-          </a:ln>
-        </p:spPr>
-        <p:txBody>
-          <a:bodyPr spcFirstLastPara="1" wrap="square" lIns="91425" tIns="45700" rIns="91425" bIns="45700" anchor="ctr" anchorCtr="0">
-            <a:noAutofit/>
-          </a:bodyPr>
-          <a:lstStyle/>
-          <a:p>
-            <a:pPr marL="0" marR="0" lvl="0" indent="0" algn="ctr" rtl="0">
-              <a:spcBef>
-                <a:spcPts val="0"/>
-              </a:spcBef>
-              <a:spcAft>
-                <a:spcPts val="0"/>
-              </a:spcAft>
-              <a:buNone/>
-            </a:pPr>
-            <a:r>
-              <a:rPr lang="ja-JP" sz="1000">
-                <a:solidFill>
-                  <a:schemeClr val="dk1"/>
-                </a:solidFill>
-                <a:latin typeface="メイリオ"/>
-                <a:ea typeface="Meiryo"/>
-                <a:cs typeface="Meiryo"/>
-                <a:sym typeface="Meiryo"/>
-              </a:rPr>
-              <a:t>LINE公式アカウント</a:t>
-            </a:r>
-            <a:endParaRPr sz="1000">
-              <a:solidFill>
-                <a:schemeClr val="dk1"/>
-              </a:solidFill>
-              <a:latin typeface="Meiryo"/>
-              <a:ea typeface="Meiryo"/>
-              <a:cs typeface="Meiryo"/>
-              <a:sym typeface="Meiryo"/>
-            </a:endParaRPr>
-          </a:p>
-        </p:txBody>
-      </p:sp>
-      <p:sp>
-        <p:nvSpPr>
-          <p:cNvPr id="50" name="Google Shape;50;p3"/>
-          <p:cNvSpPr/>
-          <p:nvPr/>
-        </p:nvSpPr>
-        <p:spPr>
-          <a:xfrm>
-            <a:off x="0" y="1890267"/>
-            <a:ext cx="9906000" cy="733579"/>
-          </a:xfrm>
-          <a:prstGeom prst="rect">
-            <a:avLst/>
-          </a:prstGeom>
-          <a:solidFill>
-            <a:srgbClr val="F2F2F2"/>
-          </a:solidFill>
-          <a:ln>
-            <a:noFill/>
-          </a:ln>
-        </p:spPr>
-        <p:txBody>
-          <a:bodyPr spcFirstLastPara="1" wrap="square" lIns="91425" tIns="45700" rIns="91425" bIns="45700" anchor="ctr" anchorCtr="0">
-            <a:noAutofit/>
-          </a:bodyPr>
-          <a:lstStyle/>
-          <a:p>
-            <a:pPr marL="0" marR="0" lvl="0" indent="0" algn="ctr" rtl="0">
-              <a:spcBef>
-                <a:spcPts val="0"/>
-              </a:spcBef>
-              <a:spcAft>
-                <a:spcPts val="0"/>
-              </a:spcAft>
-              <a:buNone/>
-            </a:pPr>
-            <a:endParaRPr sz="1200">
-              <a:solidFill>
-                <a:schemeClr val="dk1"/>
-              </a:solidFill>
-              <a:latin typeface="Meiryo"/>
-              <a:ea typeface="Meiryo"/>
-              <a:cs typeface="Meiryo"/>
-              <a:sym typeface="Meiryo"/>
-            </a:endParaRPr>
-          </a:p>
-        </p:txBody>
-      </p:sp>
-      <p:sp>
-        <p:nvSpPr>
-          <p:cNvPr id="51" name="Google Shape;51;p3"/>
-          <p:cNvSpPr/>
-          <p:nvPr/>
-        </p:nvSpPr>
-        <p:spPr>
-          <a:xfrm>
-            <a:off x="544108" y="1961282"/>
-            <a:ext cx="8817783" cy="646331"/>
-          </a:xfrm>
-          <a:prstGeom prst="rect">
-            <a:avLst/>
-          </a:prstGeom>
-          <a:noFill/>
-          <a:ln>
-            <a:noFill/>
-          </a:ln>
-        </p:spPr>
-        <p:txBody>
-          <a:bodyPr spcFirstLastPara="1" wrap="square" lIns="91425" tIns="45700" rIns="91425" bIns="45700" anchor="t" anchorCtr="0">
-            <a:spAutoFit/>
-          </a:bodyPr>
-          <a:lstStyle/>
-          <a:p>
-            <a:pPr marL="0" marR="0" lvl="0" indent="0" algn="ctr" rtl="0">
-              <a:spcBef>
-                <a:spcPts val="0"/>
-              </a:spcBef>
-              <a:spcAft>
-                <a:spcPts val="0"/>
-              </a:spcAft>
-              <a:buNone/>
-            </a:pPr>
-            <a:r>
-              <a:rPr lang="ja-JP" sz="1200" b="1">
-                <a:solidFill>
-                  <a:schemeClr val="dk1"/>
-                </a:solidFill>
-                <a:latin typeface="メイリオ"/>
-                <a:ea typeface="Meiryo"/>
-                <a:cs typeface="Meiryo"/>
-                <a:sym typeface="Meiryo"/>
-              </a:rPr>
-              <a:t>LINE通知メッセージの「UX追加申請」は、新しい通知の型を使うときに出す申請。</a:t>
-            </a:r>
-            <a:endParaRPr sz="1200" b="1">
-              <a:solidFill>
-                <a:schemeClr val="dk1"/>
-              </a:solidFill>
-              <a:latin typeface="Meiryo"/>
-              <a:ea typeface="Meiryo"/>
-              <a:cs typeface="Meiryo"/>
-              <a:sym typeface="Meiryo"/>
-            </a:endParaRPr>
-          </a:p>
-          <a:p>
-            <a:pPr marL="0" marR="0" lvl="0" indent="0" algn="ctr" rtl="0">
-              <a:spcBef>
-                <a:spcPts val="0"/>
-              </a:spcBef>
-              <a:spcAft>
-                <a:spcPts val="0"/>
-              </a:spcAft>
-              <a:buNone/>
-            </a:pPr>
-            <a:r>
-              <a:rPr lang="ja-JP" sz="1200" b="1">
-                <a:solidFill>
-                  <a:schemeClr val="dk1"/>
-                </a:solidFill>
-                <a:latin typeface="メイリオ"/>
-                <a:ea typeface="Meiryo"/>
-                <a:cs typeface="Meiryo"/>
-                <a:sym typeface="Meiryo"/>
-              </a:rPr>
-              <a:t>2026年9月9日（水）から、LBPM上の発注画面と、請求書の発行元が変わった。</a:t>
-            </a:r>
-            <a:endParaRPr/>
-          </a:p>
-          <a:p>
-            <a:pPr marL="0" marR="0" lvl="0" indent="0" algn="ctr" rtl="0">
-              <a:spcBef>
-                <a:spcPts val="0"/>
-              </a:spcBef>
-              <a:spcAft>
-                <a:spcPts val="0"/>
-              </a:spcAft>
-              <a:buNone/>
-            </a:pPr>
-            <a:r>
-              <a:rPr lang="ja-JP" sz="1200" b="1">
-                <a:solidFill>
-                  <a:schemeClr val="dk1"/>
-                </a:solidFill>
-                <a:latin typeface="メイリオ"/>
-                <a:ea typeface="Meiryo"/>
-                <a:cs typeface="Meiryo"/>
-                <a:sym typeface="Meiryo"/>
-              </a:rPr>
-              <a:t>過去に作った申請は編集しても受領されないため、既存の案件をコピーして作り直す必要がある。</a:t>
-            </a:r>
-            <a:endParaRPr sz="1400" b="1">
-              <a:solidFill>
-                <a:schemeClr val="dk1"/>
-              </a:solidFill>
-              <a:latin typeface="Meiryo"/>
-              <a:ea typeface="Meiryo"/>
-              <a:cs typeface="Meiryo"/>
-              <a:sym typeface="Meiryo"/>
-            </a:endParaRPr>
-          </a:p>
-        </p:txBody>
-      </p:sp>
-      <p:sp>
-        <p:nvSpPr>
-          <p:cNvPr id="52" name="Google Shape;52;p3"/>
-          <p:cNvSpPr/>
-          <p:nvPr/>
-        </p:nvSpPr>
-        <p:spPr>
-          <a:xfrm>
-            <a:off x="351381" y="2714173"/>
-            <a:ext cx="5200000" cy="338554"/>
-          </a:xfrm>
-          <a:prstGeom prst="rect">
-            <a:avLst/>
-          </a:prstGeom>
-          <a:noFill/>
-          <a:ln>
-            <a:noFill/>
-          </a:ln>
-        </p:spPr>
-        <p:txBody>
-          <a:bodyPr spcFirstLastPara="1" wrap="square" lIns="91425" tIns="45700" rIns="91425" bIns="45700" anchor="t" anchorCtr="0">
-            <a:noAutofit/>
-          </a:bodyPr>
-          <a:lstStyle/>
-          <a:p>
-            <a:pPr marL="0" marR="0" lvl="0" indent="0" algn="l" rtl="0">
-              <a:spcBef>
-                <a:spcPts val="0"/>
-              </a:spcBef>
-              <a:spcAft>
-                <a:spcPts val="0"/>
-              </a:spcAft>
-              <a:buNone/>
-            </a:pPr>
-            <a:r>
-              <a:rPr lang="ja-JP" sz="1400" b="1">
-                <a:solidFill>
-                  <a:srgbClr val="15133D"/>
-                </a:solidFill>
-                <a:latin typeface="メイリオ"/>
-                <a:ea typeface="Meiryo"/>
-                <a:cs typeface="Meiryo"/>
-                <a:sym typeface="Meiryo"/>
-              </a:rPr>
-              <a:t>■ 詳細</a:t>
-            </a:r>
-            <a:endParaRPr/>
-          </a:p>
-        </p:txBody>
-      </p:sp>
-      <p:grpSp>
-        <p:nvGrpSpPr>
-          <p:cNvPr id="53" name="Google Shape;53;p3"/>
-          <p:cNvGrpSpPr/>
-          <p:nvPr/>
-        </p:nvGrpSpPr>
-        <p:grpSpPr>
-          <a:xfrm>
-            <a:off x="8473303" y="730955"/>
-            <a:ext cx="1376241" cy="1131930"/>
-            <a:chOff x="0" y="0"/>
-            <a:chExt cx="1376241" cy="1131930"/>
-          </a:xfrm>
-        </p:grpSpPr>
-        <p:sp>
-          <p:nvSpPr>
-            <p:cNvPr id="54" name="Google Shape;54;p3"/>
-            <p:cNvSpPr/>
-            <p:nvPr/>
-          </p:nvSpPr>
-          <p:spPr>
-            <a:xfrm rot="10800000">
-              <a:off x="0" y="0"/>
-              <a:ext cx="1376241" cy="282982"/>
-            </a:xfrm>
-            <a:prstGeom prst="trapezoid">
-              <a:avLst>
-                <a:gd name="adj" fmla="val 60792"/>
-              </a:avLst>
-            </a:prstGeom>
-            <a:solidFill>
-              <a:srgbClr val="EAEDF5"/>
-            </a:solidFill>
-            <a:ln w="25400" cap="flat" cmpd="sng">
-              <a:solidFill>
-                <a:schemeClr val="dk2"/>
-              </a:solidFill>
-              <a:prstDash val="solid"/>
-              <a:round/>
-              <a:headEnd type="none" w="sm" len="sm"/>
-              <a:tailEnd type="none" w="sm" len="sm"/>
-            </a:ln>
-          </p:spPr>
-          <p:txBody>
-            <a:bodyPr spcFirstLastPara="1" wrap="square" lIns="91425" tIns="91425" rIns="91425" bIns="91425" anchor="ctr" anchorCtr="0">
-              <a:noAutofit/>
-            </a:bodyPr>
-            <a:lstStyle/>
-            <a:p>
-              <a:pPr marL="0" lvl="0" indent="0" algn="l" rtl="0">
-                <a:spcBef>
-                  <a:spcPts val="0"/>
-                </a:spcBef>
-                <a:spcAft>
-                  <a:spcPts val="0"/>
-                </a:spcAft>
-                <a:buNone/>
-              </a:pPr>
-              <a:endParaRPr/>
-            </a:p>
-          </p:txBody>
-        </p:sp>
-        <p:sp>
-          <p:nvSpPr>
-            <p:cNvPr id="55" name="Google Shape;55;p3"/>
-            <p:cNvSpPr txBox="1"/>
-            <p:nvPr/>
-          </p:nvSpPr>
-          <p:spPr>
-            <a:xfrm>
-              <a:off x="240842" y="0"/>
-              <a:ext cx="894556" cy="282982"/>
-            </a:xfrm>
-            <a:prstGeom prst="rect">
-              <a:avLst/>
-            </a:prstGeom>
-            <a:noFill/>
-            <a:ln>
-              <a:noFill/>
-            </a:ln>
-          </p:spPr>
-          <p:txBody>
-            <a:bodyPr spcFirstLastPara="1" wrap="square" lIns="10150" tIns="10150" rIns="10150" bIns="10150" anchor="ctr" anchorCtr="0">
-              <a:noAutofit/>
-            </a:bodyPr>
-            <a:lstStyle/>
-            <a:p>
-              <a:pPr marL="0" marR="0" lvl="0" indent="0" algn="ctr" rtl="0">
-                <a:lnSpc>
-                  <a:spcPct val="90000"/>
-                </a:lnSpc>
-                <a:spcBef>
-                  <a:spcPts val="0"/>
-                </a:spcBef>
-                <a:spcAft>
-                  <a:spcPts val="0"/>
-                </a:spcAft>
-                <a:buClr>
-                  <a:srgbClr val="262626"/>
-                </a:buClr>
-                <a:buSzPts val="800"/>
-                <a:buFont typeface="Arial"/>
-                <a:buNone/>
-              </a:pPr>
-              <a:r>
-                <a:rPr lang="ja-JP" sz="800" b="1">
-                  <a:solidFill>
-                    <a:srgbClr val="262626"/>
-                  </a:solidFill>
-                  <a:latin typeface="Arial"/>
-                  <a:ea typeface="Arial"/>
-                  <a:cs typeface="Arial"/>
-                  <a:sym typeface="Arial"/>
-                </a:rPr>
-                <a:t>認知</a:t>
-              </a:r>
-              <a:endParaRPr/>
-            </a:p>
-          </p:txBody>
-        </p:sp>
-        <p:sp>
-          <p:nvSpPr>
-            <p:cNvPr id="56" name="Google Shape;56;p3"/>
-            <p:cNvSpPr/>
-            <p:nvPr/>
-          </p:nvSpPr>
-          <p:spPr>
-            <a:xfrm rot="10800000">
-              <a:off x="172030" y="282982"/>
-              <a:ext cx="1032180" cy="282982"/>
-            </a:xfrm>
-            <a:prstGeom prst="trapezoid">
-              <a:avLst>
-                <a:gd name="adj" fmla="val 60792"/>
-              </a:avLst>
-            </a:prstGeom>
             <a:solidFill>
               <a:schemeClr val="lt1"/>
             </a:solidFill>
-            <a:ln w="25400" cap="flat" cmpd="sng">
-              <a:solidFill>
-                <a:schemeClr val="dk2"/>
-              </a:solidFill>
-              <a:prstDash val="solid"/>
-              <a:round/>
-              <a:headEnd type="none" w="sm" len="sm"/>
-              <a:tailEnd type="none" w="sm" len="sm"/>
-            </a:ln>
-          </p:spPr>
-          <p:txBody>
-            <a:bodyPr spcFirstLastPara="1" wrap="square" lIns="91425" tIns="91425" rIns="91425" bIns="91425" anchor="ctr" anchorCtr="0">
-              <a:noAutofit/>
-            </a:bodyPr>
-            <a:lstStyle/>
-            <a:p>
-              <a:pPr marL="0" lvl="0" indent="0" algn="l" rtl="0">
-                <a:spcBef>
-                  <a:spcPts val="0"/>
-                </a:spcBef>
-                <a:spcAft>
-                  <a:spcPts val="0"/>
-                </a:spcAft>
-                <a:buNone/>
-              </a:pPr>
-              <a:endParaRPr/>
-            </a:p>
-          </p:txBody>
-        </p:sp>
-        <p:sp>
-          <p:nvSpPr>
-            <p:cNvPr id="57" name="Google Shape;57;p3"/>
-            <p:cNvSpPr txBox="1"/>
-            <p:nvPr/>
-          </p:nvSpPr>
-          <p:spPr>
-            <a:xfrm>
-              <a:off x="352661" y="282982"/>
-              <a:ext cx="670917" cy="282982"/>
-            </a:xfrm>
-            <a:prstGeom prst="rect">
-              <a:avLst/>
-            </a:prstGeom>
-            <a:noFill/>
-            <a:ln>
-              <a:noFill/>
-            </a:ln>
-          </p:spPr>
-          <p:txBody>
-            <a:bodyPr spcFirstLastPara="1" wrap="square" lIns="10150" tIns="10150" rIns="10150" bIns="10150" anchor="ctr" anchorCtr="0">
-              <a:noAutofit/>
-            </a:bodyPr>
-            <a:lstStyle/>
-            <a:p>
-              <a:pPr marL="0" marR="0" lvl="0" indent="0" algn="ctr" rtl="0">
-                <a:lnSpc>
-                  <a:spcPct val="90000"/>
-                </a:lnSpc>
-                <a:spcBef>
-                  <a:spcPts val="0"/>
-                </a:spcBef>
-                <a:spcAft>
-                  <a:spcPts val="0"/>
-                </a:spcAft>
-                <a:buClr>
-                  <a:srgbClr val="262626"/>
-                </a:buClr>
-                <a:buSzPts val="800"/>
-                <a:buFont typeface="Arial"/>
-                <a:buNone/>
-              </a:pPr>
-              <a:r>
-                <a:rPr lang="ja-JP" sz="800" b="1">
-                  <a:solidFill>
-                    <a:srgbClr val="262626"/>
-                  </a:solidFill>
-                  <a:latin typeface="Arial"/>
-                  <a:ea typeface="Arial"/>
-                  <a:cs typeface="Arial"/>
-                  <a:sym typeface="Arial"/>
-                </a:rPr>
-                <a:t>検討</a:t>
-              </a:r>
-              <a:endParaRPr/>
-            </a:p>
-          </p:txBody>
-        </p:sp>
-        <p:sp>
-          <p:nvSpPr>
-            <p:cNvPr id="58" name="Google Shape;58;p3"/>
-            <p:cNvSpPr/>
-            <p:nvPr/>
-          </p:nvSpPr>
-          <p:spPr>
-            <a:xfrm rot="10800000">
-              <a:off x="344060" y="565965"/>
-              <a:ext cx="688120" cy="282982"/>
-            </a:xfrm>
-            <a:prstGeom prst="trapezoid">
-              <a:avLst>
-                <a:gd name="adj" fmla="val 60792"/>
-              </a:avLst>
-            </a:prstGeom>
-            <a:solidFill>
-              <a:schemeClr val="lt1"/>
-            </a:solidFill>
-            <a:ln w="25400" cap="flat" cmpd="sng">
-              <a:solidFill>
-                <a:schemeClr val="dk2"/>
-              </a:solidFill>
-              <a:prstDash val="solid"/>
-              <a:round/>
-              <a:headEnd type="none" w="sm" len="sm"/>
-              <a:tailEnd type="none" w="sm" len="sm"/>
-            </a:ln>
-          </p:spPr>
-          <p:txBody>
-            <a:bodyPr spcFirstLastPara="1" wrap="square" lIns="91425" tIns="91425" rIns="91425" bIns="91425" anchor="ctr" anchorCtr="0">
-              <a:noAutofit/>
-            </a:bodyPr>
-            <a:lstStyle/>
-            <a:p>
-              <a:pPr marL="0" lvl="0" indent="0" algn="l" rtl="0">
-                <a:spcBef>
-                  <a:spcPts val="0"/>
-                </a:spcBef>
-                <a:spcAft>
-                  <a:spcPts val="0"/>
-                </a:spcAft>
-                <a:buNone/>
-              </a:pPr>
-              <a:endParaRPr/>
-            </a:p>
-          </p:txBody>
-        </p:sp>
-        <p:sp>
-          <p:nvSpPr>
-            <p:cNvPr id="59" name="Google Shape;59;p3"/>
-            <p:cNvSpPr txBox="1"/>
-            <p:nvPr/>
-          </p:nvSpPr>
-          <p:spPr>
-            <a:xfrm>
-              <a:off x="464481" y="565965"/>
-              <a:ext cx="447278" cy="282982"/>
-            </a:xfrm>
-            <a:prstGeom prst="rect">
-              <a:avLst/>
-            </a:prstGeom>
-            <a:noFill/>
-            <a:ln>
-              <a:noFill/>
-            </a:ln>
-          </p:spPr>
-          <p:txBody>
-            <a:bodyPr spcFirstLastPara="1" wrap="square" lIns="10150" tIns="10150" rIns="10150" bIns="10150" anchor="ctr" anchorCtr="0">
-              <a:noAutofit/>
-            </a:bodyPr>
-            <a:lstStyle/>
-            <a:p>
-              <a:pPr marL="0" marR="0" lvl="0" indent="0" algn="ctr" rtl="0">
-                <a:lnSpc>
-                  <a:spcPct val="90000"/>
-                </a:lnSpc>
-                <a:spcBef>
-                  <a:spcPts val="0"/>
-                </a:spcBef>
-                <a:spcAft>
-                  <a:spcPts val="0"/>
-                </a:spcAft>
-                <a:buClr>
-                  <a:srgbClr val="262626"/>
-                </a:buClr>
-                <a:buSzPts val="800"/>
-                <a:buFont typeface="Arial"/>
-                <a:buNone/>
-              </a:pPr>
-              <a:r>
-                <a:rPr lang="ja-JP" sz="800" b="1">
-                  <a:solidFill>
-                    <a:srgbClr val="262626"/>
-                  </a:solidFill>
-                  <a:latin typeface="Arial"/>
-                  <a:ea typeface="Arial"/>
-                  <a:cs typeface="Arial"/>
-                  <a:sym typeface="Arial"/>
-                </a:rPr>
-                <a:t>獲得</a:t>
-              </a:r>
-              <a:endParaRPr/>
-            </a:p>
-          </p:txBody>
-        </p:sp>
-        <p:sp>
-          <p:nvSpPr>
-            <p:cNvPr id="60" name="Google Shape;60;p3"/>
-            <p:cNvSpPr/>
-            <p:nvPr/>
-          </p:nvSpPr>
-          <p:spPr>
-            <a:xfrm rot="10800000">
-              <a:off x="516090" y="848948"/>
-              <a:ext cx="344060" cy="282982"/>
-            </a:xfrm>
-            <a:prstGeom prst="trapezoid">
-              <a:avLst>
-                <a:gd name="adj" fmla="val 60792"/>
-              </a:avLst>
-            </a:prstGeom>
-            <a:noFill/>
-            <a:ln w="25400" cap="flat" cmpd="sng">
-              <a:solidFill>
-                <a:schemeClr val="dk2"/>
-              </a:solidFill>
-              <a:prstDash val="solid"/>
-              <a:round/>
-              <a:headEnd type="none" w="sm" len="sm"/>
-              <a:tailEnd type="none" w="sm" len="sm"/>
-            </a:ln>
-          </p:spPr>
-          <p:txBody>
-            <a:bodyPr spcFirstLastPara="1" wrap="square" lIns="91425" tIns="91425" rIns="91425" bIns="91425" anchor="ctr" anchorCtr="0">
-              <a:noAutofit/>
-            </a:bodyPr>
-            <a:lstStyle/>
-            <a:p>
-              <a:pPr marL="0" lvl="0" indent="0" algn="l" rtl="0">
-                <a:spcBef>
-                  <a:spcPts val="0"/>
-                </a:spcBef>
-                <a:spcAft>
-                  <a:spcPts val="0"/>
-                </a:spcAft>
-                <a:buNone/>
-              </a:pPr>
-              <a:endParaRPr/>
-            </a:p>
-          </p:txBody>
-        </p:sp>
-        <p:sp>
-          <p:nvSpPr>
-            <p:cNvPr id="61" name="Google Shape;61;p3"/>
-            <p:cNvSpPr txBox="1"/>
-            <p:nvPr/>
-          </p:nvSpPr>
-          <p:spPr>
-            <a:xfrm>
-              <a:off x="516090" y="848948"/>
-              <a:ext cx="344060" cy="282982"/>
-            </a:xfrm>
-            <a:prstGeom prst="rect">
-              <a:avLst/>
-            </a:prstGeom>
-            <a:noFill/>
-            <a:ln>
-              <a:noFill/>
-            </a:ln>
-          </p:spPr>
-          <p:txBody>
-            <a:bodyPr spcFirstLastPara="1" wrap="square" lIns="10150" tIns="10150" rIns="10150" bIns="10150" anchor="ctr" anchorCtr="0">
-              <a:noAutofit/>
-            </a:bodyPr>
-            <a:lstStyle/>
-            <a:p>
-              <a:pPr marL="0" marR="0" lvl="0" indent="0" algn="ctr" rtl="0">
-                <a:lnSpc>
-                  <a:spcPct val="90000"/>
-                </a:lnSpc>
-                <a:spcBef>
-                  <a:spcPts val="0"/>
-                </a:spcBef>
-                <a:spcAft>
-                  <a:spcPts val="0"/>
-                </a:spcAft>
-                <a:buClr>
-                  <a:srgbClr val="262626"/>
-                </a:buClr>
-                <a:buSzPts val="800"/>
-                <a:buFont typeface="Arial"/>
-                <a:buNone/>
-              </a:pPr>
-              <a:r>
-                <a:rPr lang="ja-JP" sz="800" b="1">
-                  <a:solidFill>
-                    <a:srgbClr val="262626"/>
-                  </a:solidFill>
-                  <a:latin typeface="Arial"/>
-                  <a:ea typeface="Arial"/>
-                  <a:cs typeface="Arial"/>
-                  <a:sym typeface="Arial"/>
-                </a:rPr>
-                <a:t>伸長</a:t>
-              </a:r>
-              <a:endParaRPr/>
-            </a:p>
-          </p:txBody>
-        </p:sp>
-      </p:grpSp>
-      <p:pic>
-        <p:nvPicPr>
-          <p:cNvPr id="62" name="Google Shape;62;p3" descr="LINE公式アカウントのロゴの使用方法とは？種類やダウンロード方法、利用時の注意点を紹介 | Mico（ミコ）"/>
-          <p:cNvPicPr preferRelativeResize="0"/>
-          <p:nvPr/>
-        </p:nvPicPr>
-        <p:blipFill rotWithShape="1">
-          <a:blip r:embed="rId2">
-            <a:alphaModFix/>
-          </a:blip>
-          <a:srcRect/>
-          <a:stretch/>
-        </p:blipFill>
-        <p:spPr>
-          <a:xfrm>
-            <a:off x="351381" y="1234746"/>
-            <a:ext cx="656177" cy="655521"/>
-          </a:xfrm>
-          <a:prstGeom prst="rect">
-            <a:avLst/>
-          </a:prstGeom>
-          <a:noFill/>
-          <a:ln>
-            <a:noFill/>
-          </a:ln>
-        </p:spPr>
-      </p:pic>
-      <p:sp>
-        <p:nvSpPr>
-          <p:cNvPr id="68" name="Rounded Rectangle 67"/>
-          <p:cNvSpPr/>
-          <p:nvPr/>
-        </p:nvSpPr>
-        <p:spPr>
-          <a:xfrm>
-            <a:off x="548640" y="3403931"/>
-            <a:ext cx="8814816" cy="1290828"/>
-          </a:xfrm>
-          <a:prstGeom prst="roundRect">
-            <a:avLst>
-              <a:gd name="adj" fmla="val 6000"/>
-            </a:avLst>
-          </a:prstGeom>
-          <a:solidFill>
-            <a:srgbClr val="EAF0FA"/>
-          </a:solidFill>
-          <a:ln w="12700">
-            <a:solidFill>
-              <a:srgbClr val="3467B2"/>
-            </a:solidFill>
-          </a:ln>
-          <a:effectLst/>
-        </p:spPr>
-        <p:style>
-          <a:lnRef idx="1">
-            <a:schemeClr val="accent1"/>
-          </a:lnRef>
-          <a:fillRef idx="3">
-            <a:schemeClr val="accent1"/>
-          </a:fillRef>
-          <a:effectRef idx="2">
-            <a:schemeClr val="accent1"/>
-          </a:effectRef>
-          <a:fontRef idx="minor">
-            <a:schemeClr val="lt1"/>
-          </a:fontRef>
-        </p:style>
-        <p:txBody>
-          <a:bodyPr wrap="square" lIns="228600" rIns="182880" rtlCol="0" anchor="ctr"/>
-          <a:lstStyle/>
-          <a:p>
-            <a:pPr algn="l"/>
-            <a:r>
-              <a:rPr lang="ja-JP" altLang="en-US" sz="2000" b="1" dirty="0">
-                <a:solidFill>
-                  <a:srgbClr val="15133D"/>
-                </a:solidFill>
-                <a:latin typeface="メイリオ"/>
-              </a:rPr>
-              <a:t>変更点</a:t>
-            </a:r>
-            <a:endParaRPr sz="2000" b="1" dirty="0">
-              <a:solidFill>
-                <a:srgbClr val="15133D"/>
-              </a:solidFill>
-              <a:latin typeface="メイリオ"/>
-            </a:endParaRPr>
-          </a:p>
-          <a:p>
-            <a:pPr algn="l">
-              <a:lnSpc>
-                <a:spcPct val="115000"/>
-              </a:lnSpc>
-              <a:spcBef>
-                <a:spcPts val="600"/>
-              </a:spcBef>
-            </a:pPr>
-            <a:r>
-              <a:rPr sz="1400" dirty="0">
-                <a:solidFill>
-                  <a:srgbClr val="333333"/>
-                </a:solidFill>
-                <a:latin typeface="メイリオ"/>
-              </a:rPr>
-              <a:t>・</a:t>
-            </a:r>
-            <a:r>
-              <a:rPr sz="1400" dirty="0" err="1">
-                <a:solidFill>
-                  <a:srgbClr val="333333"/>
-                </a:solidFill>
-                <a:latin typeface="メイリオ"/>
-              </a:rPr>
-              <a:t>請求書の発行元が、AGPからLBPM</a:t>
-            </a:r>
-            <a:r>
-              <a:rPr lang="ja-JP" altLang="en-US" dirty="0">
-                <a:solidFill>
-                  <a:srgbClr val="333333"/>
-                </a:solidFill>
-                <a:latin typeface="メイリオ" panose="020B0604030504040204" pitchFamily="50" charset="-128"/>
-                <a:ea typeface="メイリオ" panose="020B0604030504040204" pitchFamily="50" charset="-128"/>
-              </a:rPr>
-              <a:t>へ</a:t>
-            </a:r>
-            <a:r>
-              <a:rPr sz="1400" dirty="0">
-                <a:solidFill>
-                  <a:srgbClr val="333333"/>
-                </a:solidFill>
-                <a:latin typeface="メイリオ"/>
-              </a:rPr>
-              <a:t>（2026年9月受領分＝10月初めに発行される請求書から）。</a:t>
-            </a:r>
-          </a:p>
-          <a:p>
-            <a:pPr algn="l">
-              <a:lnSpc>
-                <a:spcPct val="115000"/>
-              </a:lnSpc>
-              <a:spcBef>
-                <a:spcPts val="600"/>
-              </a:spcBef>
-            </a:pPr>
-            <a:r>
-              <a:rPr sz="1400" dirty="0">
-                <a:solidFill>
-                  <a:srgbClr val="333333"/>
-                </a:solidFill>
-                <a:latin typeface="メイリオ"/>
-              </a:rPr>
-              <a:t>・</a:t>
-            </a:r>
-            <a:r>
-              <a:rPr sz="1400" dirty="0" err="1">
-                <a:solidFill>
-                  <a:srgbClr val="333333"/>
-                </a:solidFill>
-                <a:latin typeface="メイリオ"/>
-              </a:rPr>
-              <a:t>LBPM上の発注画面と申請方法</a:t>
-            </a:r>
-            <a:endParaRPr sz="1400" dirty="0">
-              <a:solidFill>
-                <a:srgbClr val="333333"/>
-              </a:solidFill>
-              <a:latin typeface="メイリオ"/>
-            </a:endParaRPr>
-          </a:p>
-        </p:txBody>
-      </p:sp>
-      <p:sp>
-        <p:nvSpPr>
-          <p:cNvPr id="69" name="Rounded Rectangle 68"/>
-          <p:cNvSpPr/>
-          <p:nvPr/>
-        </p:nvSpPr>
-        <p:spPr>
-          <a:xfrm>
-            <a:off x="548640" y="4877639"/>
-            <a:ext cx="8814816" cy="1290828"/>
-          </a:xfrm>
-          <a:prstGeom prst="roundRect">
-            <a:avLst>
-              <a:gd name="adj" fmla="val 6000"/>
-            </a:avLst>
-          </a:prstGeom>
-          <a:solidFill>
-            <a:srgbClr val="EAF0FA"/>
-          </a:solidFill>
-          <a:ln w="12700">
-            <a:solidFill>
-              <a:srgbClr val="3467B2"/>
-            </a:solidFill>
-          </a:ln>
-          <a:effectLst/>
-        </p:spPr>
-        <p:style>
-          <a:lnRef idx="1">
-            <a:schemeClr val="accent1"/>
-          </a:lnRef>
-          <a:fillRef idx="3">
-            <a:schemeClr val="accent1"/>
-          </a:fillRef>
-          <a:effectRef idx="2">
-            <a:schemeClr val="accent1"/>
-          </a:effectRef>
-          <a:fontRef idx="minor">
-            <a:schemeClr val="lt1"/>
-          </a:fontRef>
-        </p:style>
-        <p:txBody>
-          <a:bodyPr wrap="square" lIns="228600" rIns="182880" rtlCol="0" anchor="ctr"/>
-          <a:lstStyle/>
-          <a:p>
-            <a:pPr algn="l"/>
-            <a:r>
-              <a:rPr sz="2000" b="1">
-                <a:solidFill>
-                  <a:srgbClr val="15133D"/>
-                </a:solidFill>
-                <a:latin typeface="メイリオ"/>
-              </a:rPr>
-              <a:t>新しい発注画面</a:t>
-            </a:r>
-          </a:p>
-          <a:p>
-            <a:pPr algn="l">
-              <a:lnSpc>
-                <a:spcPct val="115000"/>
-              </a:lnSpc>
-              <a:spcBef>
-                <a:spcPts val="600"/>
-              </a:spcBef>
-            </a:pPr>
-            <a:r>
-              <a:rPr sz="1400">
-                <a:solidFill>
-                  <a:srgbClr val="333333"/>
-                </a:solidFill>
-                <a:latin typeface="メイリオ"/>
-              </a:rPr>
-              <a:t>・申請フォームを入力すると、そのあとに金額の計算画面が出る。</a:t>
-            </a:r>
-          </a:p>
-          <a:p>
-            <a:pPr algn="l">
-              <a:lnSpc>
-                <a:spcPct val="115000"/>
-              </a:lnSpc>
-              <a:spcBef>
-                <a:spcPts val="600"/>
-              </a:spcBef>
-            </a:pPr>
-            <a:r>
-              <a:rPr sz="1400">
-                <a:solidFill>
-                  <a:srgbClr val="333333"/>
-                </a:solidFill>
-                <a:latin typeface="メイリオ"/>
-              </a:rPr>
-              <a:t>・請求書は、LBPMのメニューの「請求書DL」からダウンロードする。</a:t>
-            </a:r>
-          </a:p>
-        </p:txBody>
-      </p:sp>
-    </p:spTree>
-  </p:cSld>
-  <p:clrMapOvr>
-    <a:masterClrMapping/>
-  </p:clrMapOvr>
-</p:sld>
-</file>
-
-<file path=ppt/slides/slide6.xml><?xml version="1.0" encoding="utf-8"?>
-<p:sld xmlns:a="http://schemas.openxmlformats.org/drawingml/2006/main" xmlns:r="http://schemas.openxmlformats.org/officeDocument/2006/relationships" xmlns:p="http://schemas.openxmlformats.org/presentationml/2006/main">
-  <p:cSld>
-    <p:spTree>
-      <p:nvGrpSpPr>
-        <p:cNvPr id="1" name=""/>
-        <p:cNvGrpSpPr/>
-        <p:nvPr/>
-      </p:nvGrpSpPr>
-      <p:grpSpPr>
-        <a:xfrm>
-          <a:off x="0" y="0"/>
-          <a:ext cx="0" cy="0"/>
-          <a:chOff x="0" y="0"/>
-          <a:chExt cx="0" cy="0"/>
-        </a:xfrm>
-      </p:grpSpPr>
-      <p:sp>
-        <p:nvSpPr>
-          <p:cNvPr id="40" name="Google Shape;40;p3"/>
-          <p:cNvSpPr/>
-          <p:nvPr/>
-        </p:nvSpPr>
-        <p:spPr>
-          <a:xfrm>
-            <a:off x="292801" y="730955"/>
-            <a:ext cx="1296144" cy="435690"/>
-          </a:xfrm>
-          <a:prstGeom prst="rect">
-            <a:avLst/>
-          </a:prstGeom>
-          <a:solidFill>
-            <a:schemeClr val="dk2"/>
-          </a:solidFill>
-          <a:ln w="9525" cap="flat" cmpd="sng">
-            <a:solidFill>
-              <a:srgbClr val="4A7DBA"/>
-            </a:solidFill>
-            <a:prstDash val="solid"/>
-            <a:round/>
-            <a:headEnd type="none" w="sm" len="sm"/>
-            <a:tailEnd type="none" w="sm" len="sm"/>
-          </a:ln>
-        </p:spPr>
-        <p:txBody>
-          <a:bodyPr spcFirstLastPara="1" wrap="square" lIns="91425" tIns="45700" rIns="91425" bIns="45700" anchor="ctr" anchorCtr="0">
-            <a:noAutofit/>
-          </a:bodyPr>
-          <a:lstStyle/>
-          <a:p>
-            <a:pPr marL="0" marR="0" lvl="0" indent="0" algn="ctr" rtl="0">
-              <a:spcBef>
-                <a:spcPts val="0"/>
-              </a:spcBef>
-              <a:spcAft>
-                <a:spcPts val="0"/>
-              </a:spcAft>
-              <a:buNone/>
-            </a:pPr>
-            <a:r>
-              <a:rPr lang="ja-JP" sz="1800" b="0" i="0" u="none" strike="noStrike" cap="none">
-                <a:solidFill>
-                  <a:schemeClr val="lt1"/>
-                </a:solidFill>
-                <a:latin typeface="メイリオ"/>
-                <a:ea typeface="Meiryo"/>
-                <a:cs typeface="Meiryo"/>
-                <a:sym typeface="Meiryo"/>
-              </a:rPr>
-              <a:t>対象業界</a:t>
-            </a:r>
-            <a:endParaRPr/>
-          </a:p>
-        </p:txBody>
-      </p:sp>
-      <p:sp>
-        <p:nvSpPr>
-          <p:cNvPr id="41" name="Google Shape;41;p3"/>
-          <p:cNvSpPr/>
-          <p:nvPr/>
-        </p:nvSpPr>
-        <p:spPr>
-          <a:xfrm>
-            <a:off x="7560840" y="730955"/>
-            <a:ext cx="829618" cy="435690"/>
-          </a:xfrm>
-          <a:prstGeom prst="rect">
-            <a:avLst/>
-          </a:prstGeom>
-          <a:solidFill>
-            <a:schemeClr val="bg1"/>
-          </a:solidFill>
-          <a:ln w="9525" cap="flat" cmpd="sng">
-            <a:solidFill>
-              <a:srgbClr val="4F81BD"/>
-            </a:solidFill>
-            <a:prstDash val="sysDash"/>
-            <a:round/>
-            <a:headEnd type="none" w="sm" len="sm"/>
-            <a:tailEnd type="none" w="sm" len="sm"/>
-          </a:ln>
-        </p:spPr>
-        <p:txBody>
-          <a:bodyPr spcFirstLastPara="1" wrap="square" lIns="91425" tIns="45700" rIns="91425" bIns="45700" anchor="ctr" anchorCtr="0">
-            <a:noAutofit/>
-          </a:bodyPr>
-          <a:lstStyle/>
-          <a:p>
-            <a:pPr marL="0" marR="0" lvl="0" indent="0" algn="ctr" rtl="0">
-              <a:spcBef>
-                <a:spcPts val="0"/>
-              </a:spcBef>
-              <a:spcAft>
-                <a:spcPts val="0"/>
-              </a:spcAft>
-              <a:buNone/>
-            </a:pPr>
-            <a:r>
-              <a:rPr lang="ja-JP" sz="1200" b="0" i="0" u="none" strike="noStrike" cap="none">
-                <a:solidFill>
-                  <a:schemeClr val="dk1"/>
-                </a:solidFill>
-                <a:latin typeface="メイリオ"/>
-                <a:ea typeface="Meiryo"/>
-                <a:cs typeface="Meiryo"/>
-                <a:sym typeface="Meiryo"/>
-              </a:rPr>
-              <a:t>その他</a:t>
-            </a:r>
-            <a:endParaRPr sz="1200" b="0" i="0" u="none" strike="noStrike" cap="none">
-              <a:solidFill>
-                <a:schemeClr val="dk1"/>
-              </a:solidFill>
-              <a:latin typeface="Meiryo"/>
-              <a:ea typeface="Meiryo"/>
-              <a:cs typeface="Meiryo"/>
-              <a:sym typeface="Meiryo"/>
-            </a:endParaRPr>
-          </a:p>
-        </p:txBody>
-      </p:sp>
-      <p:sp>
-        <p:nvSpPr>
-          <p:cNvPr id="42" name="Google Shape;42;p3"/>
-          <p:cNvSpPr/>
-          <p:nvPr/>
-        </p:nvSpPr>
-        <p:spPr>
-          <a:xfrm>
-            <a:off x="6679050" y="730955"/>
-            <a:ext cx="829618" cy="435690"/>
-          </a:xfrm>
-          <a:prstGeom prst="rect">
-            <a:avLst/>
-          </a:prstGeom>
-          <a:solidFill>
-            <a:schemeClr val="tx2"/>
-          </a:solidFill>
-          <a:ln w="9525" cap="flat" cmpd="sng">
-            <a:solidFill>
-              <a:srgbClr val="4F81BD"/>
-            </a:solidFill>
-            <a:prstDash val="solid"/>
-            <a:round/>
-            <a:headEnd type="none" w="sm" len="sm"/>
-            <a:tailEnd type="none" w="sm" len="sm"/>
-          </a:ln>
-        </p:spPr>
-        <p:txBody>
-          <a:bodyPr spcFirstLastPara="1" wrap="square" lIns="91425" tIns="45700" rIns="91425" bIns="45700" anchor="ctr" anchorCtr="0">
-            <a:noAutofit/>
-          </a:bodyPr>
-          <a:lstStyle/>
-          <a:p>
-            <a:pPr marL="0" marR="0" lvl="0" indent="0" algn="ctr" rtl="0">
-              <a:spcBef>
-                <a:spcPts val="0"/>
-              </a:spcBef>
-              <a:spcAft>
-                <a:spcPts val="0"/>
-              </a:spcAft>
-              <a:buNone/>
-            </a:pPr>
-            <a:r>
-              <a:rPr lang="ja-JP" sz="1000" b="0" i="0" u="none" strike="noStrike" cap="none">
-                <a:solidFill>
-                  <a:schemeClr val="dk1"/>
-                </a:solidFill>
-                <a:latin typeface="メイリオ"/>
-                <a:ea typeface="Meiryo"/>
-                <a:cs typeface="Meiryo"/>
-                <a:sym typeface="Meiryo"/>
-              </a:rPr>
-              <a:t>オプション</a:t>
-            </a:r>
-            <a:endParaRPr sz="1000" b="0" i="0" u="none" strike="noStrike" cap="none">
-              <a:solidFill>
-                <a:schemeClr val="dk1"/>
-              </a:solidFill>
-              <a:latin typeface="Meiryo"/>
-              <a:ea typeface="Meiryo"/>
-              <a:cs typeface="Meiryo"/>
-              <a:sym typeface="Meiryo"/>
-            </a:endParaRPr>
-          </a:p>
-          <a:p>
-            <a:pPr marL="0" marR="0" lvl="0" indent="0" algn="ctr" rtl="0">
-              <a:spcBef>
-                <a:spcPts val="0"/>
-              </a:spcBef>
-              <a:spcAft>
-                <a:spcPts val="0"/>
-              </a:spcAft>
-              <a:buNone/>
-            </a:pPr>
-            <a:r>
-              <a:rPr lang="ja-JP" sz="1000" b="0" i="0" u="none" strike="noStrike" cap="none">
-                <a:solidFill>
-                  <a:schemeClr val="dk1"/>
-                </a:solidFill>
-                <a:latin typeface="メイリオ"/>
-                <a:ea typeface="Meiryo"/>
-                <a:cs typeface="Meiryo"/>
-                <a:sym typeface="Meiryo"/>
-              </a:rPr>
-              <a:t>商材</a:t>
-            </a:r>
-            <a:endParaRPr/>
-          </a:p>
-        </p:txBody>
-      </p:sp>
-      <p:sp>
-        <p:nvSpPr>
-          <p:cNvPr id="43" name="Google Shape;43;p3"/>
-          <p:cNvSpPr/>
-          <p:nvPr/>
-        </p:nvSpPr>
-        <p:spPr>
-          <a:xfrm>
-            <a:off x="1594068" y="730955"/>
-            <a:ext cx="2926883" cy="435690"/>
-          </a:xfrm>
-          <a:prstGeom prst="rect">
-            <a:avLst/>
-          </a:prstGeom>
-          <a:noFill/>
-          <a:ln w="9525" cap="flat" cmpd="sng">
-            <a:solidFill>
-              <a:srgbClr val="4A7DBA"/>
-            </a:solidFill>
-            <a:prstDash val="solid"/>
-            <a:round/>
-            <a:headEnd type="none" w="sm" len="sm"/>
-            <a:tailEnd type="none" w="sm" len="sm"/>
-          </a:ln>
-        </p:spPr>
-        <p:txBody>
-          <a:bodyPr spcFirstLastPara="1" wrap="square" lIns="91425" tIns="45700" rIns="91425" bIns="45700" anchor="ctr" anchorCtr="0">
-            <a:noAutofit/>
-          </a:bodyPr>
-          <a:lstStyle/>
-          <a:p>
-            <a:pPr marL="0" marR="0" lvl="0" indent="0" algn="ctr" rtl="0">
-              <a:spcBef>
-                <a:spcPts val="0"/>
-              </a:spcBef>
-              <a:spcAft>
-                <a:spcPts val="0"/>
-              </a:spcAft>
-              <a:buNone/>
-            </a:pPr>
-            <a:r>
-              <a:rPr lang="ja-JP" sz="1300" b="0" i="0" u="none" strike="noStrike" cap="none">
-                <a:solidFill>
-                  <a:schemeClr val="dk1"/>
-                </a:solidFill>
-                <a:latin typeface="メイリオ"/>
-                <a:ea typeface="Meiryo"/>
-                <a:cs typeface="Meiryo"/>
-                <a:sym typeface="Meiryo"/>
-              </a:rPr>
-              <a:t>食品・飲料メーカー、</a:t>
-            </a:r>
-            <a:br>
-              <a:rPr lang="ja-JP" sz="1300" b="0" i="0" u="none" strike="noStrike" cap="none">
-                <a:solidFill>
-                  <a:schemeClr val="dk1"/>
-                </a:solidFill>
-                <a:latin typeface="メイリオ"/>
-                <a:ea typeface="Meiryo"/>
-                <a:cs typeface="Meiryo"/>
-                <a:sym typeface="Meiryo"/>
-              </a:rPr>
-            </a:br>
-            <a:r>
-              <a:rPr lang="ja-JP" sz="1300" b="0" i="0" u="none" strike="noStrike" cap="none">
-                <a:solidFill>
-                  <a:schemeClr val="dk1"/>
-                </a:solidFill>
-                <a:latin typeface="メイリオ"/>
-                <a:ea typeface="Meiryo"/>
-                <a:cs typeface="Meiryo"/>
-                <a:sym typeface="Meiryo"/>
-              </a:rPr>
-              <a:t>小売・コンビニ</a:t>
-            </a:r>
-            <a:endParaRPr/>
-          </a:p>
-        </p:txBody>
-      </p:sp>
-      <p:sp>
-        <p:nvSpPr>
-          <p:cNvPr id="44" name="Google Shape;44;p3"/>
-          <p:cNvSpPr txBox="1"/>
-          <p:nvPr/>
-        </p:nvSpPr>
-        <p:spPr>
-          <a:xfrm>
-            <a:off x="3296816" y="6597352"/>
-            <a:ext cx="6209091" cy="215444"/>
-          </a:xfrm>
-          <a:prstGeom prst="rect">
-            <a:avLst/>
-          </a:prstGeom>
-          <a:noFill/>
-          <a:ln>
-            <a:noFill/>
-          </a:ln>
-        </p:spPr>
-        <p:txBody>
-          <a:bodyPr spcFirstLastPara="1" wrap="square" lIns="91425" tIns="45700" rIns="91425" bIns="45700" anchor="t" anchorCtr="0">
-            <a:spAutoFit/>
-          </a:bodyPr>
-          <a:lstStyle/>
-          <a:p>
-            <a:pPr marL="0" marR="0" lvl="0" indent="0" algn="l" rtl="0">
-              <a:spcBef>
-                <a:spcPts val="0"/>
-              </a:spcBef>
-              <a:spcAft>
-                <a:spcPts val="0"/>
-              </a:spcAft>
-              <a:buNone/>
-            </a:pPr>
-            <a:r>
-              <a:rPr lang="ja-JP" sz="800" b="0" i="0" u="none" strike="noStrike" cap="none">
-                <a:solidFill>
-                  <a:schemeClr val="lt1"/>
-                </a:solidFill>
-                <a:latin typeface="メイリオ"/>
-                <a:ea typeface="Meiryo"/>
-                <a:cs typeface="Meiryo"/>
-                <a:sym typeface="Meiryo"/>
-              </a:rPr>
-              <a:t>出典：代理店情報</a:t>
-            </a:r>
-            <a:endParaRPr sz="800">
-              <a:solidFill>
-                <a:schemeClr val="lt1"/>
-              </a:solidFill>
-              <a:latin typeface="Meiryo"/>
-              <a:ea typeface="Meiryo"/>
-              <a:cs typeface="Meiryo"/>
-              <a:sym typeface="Meiryo"/>
-            </a:endParaRPr>
-          </a:p>
-        </p:txBody>
-      </p:sp>
-      <p:sp>
-        <p:nvSpPr>
-          <p:cNvPr id="45" name="Google Shape;45;p3"/>
-          <p:cNvSpPr/>
-          <p:nvPr/>
-        </p:nvSpPr>
-        <p:spPr>
-          <a:xfrm>
-            <a:off x="0" y="1234746"/>
-            <a:ext cx="9906000" cy="672259"/>
-          </a:xfrm>
-          <a:prstGeom prst="rect">
-            <a:avLst/>
-          </a:prstGeom>
-          <a:solidFill>
-            <a:srgbClr val="C5D8F1"/>
-          </a:solidFill>
-          <a:ln>
-            <a:noFill/>
-          </a:ln>
-        </p:spPr>
-        <p:txBody>
-          <a:bodyPr spcFirstLastPara="1" wrap="square" lIns="91425" tIns="45700" rIns="91425" bIns="45700" anchor="ctr" anchorCtr="0">
-            <a:noAutofit/>
-          </a:bodyPr>
-          <a:lstStyle/>
-          <a:p>
-            <a:pPr marL="0" marR="0" lvl="0" indent="0" algn="ctr" rtl="0">
-              <a:spcBef>
-                <a:spcPts val="0"/>
-              </a:spcBef>
-              <a:spcAft>
-                <a:spcPts val="0"/>
-              </a:spcAft>
-              <a:buNone/>
-            </a:pPr>
-            <a:r>
-              <a:rPr lang="ja-JP" sz="1600" b="1">
-                <a:solidFill>
-                  <a:srgbClr val="004DE6"/>
-                </a:solidFill>
-                <a:latin typeface="メイリオ"/>
-                <a:ea typeface="Meiryo"/>
-                <a:cs typeface="Meiryo"/>
-                <a:sym typeface="Meiryo"/>
-              </a:rPr>
-              <a:t>　　　　　　</a:t>
-            </a:r>
-            <a:endParaRPr sz="1800" b="1">
-              <a:solidFill>
-                <a:srgbClr val="004DE6"/>
-              </a:solidFill>
-              <a:latin typeface="Meiryo"/>
-              <a:ea typeface="Meiryo"/>
-              <a:cs typeface="Meiryo"/>
-              <a:sym typeface="Meiryo"/>
-            </a:endParaRPr>
-          </a:p>
-        </p:txBody>
-      </p:sp>
-      <p:sp>
-        <p:nvSpPr>
-          <p:cNvPr id="46" name="Google Shape;46;p3"/>
-          <p:cNvSpPr/>
-          <p:nvPr/>
-        </p:nvSpPr>
-        <p:spPr>
-          <a:xfrm>
-            <a:off x="1089832" y="1437370"/>
-            <a:ext cx="7031520" cy="338554"/>
-          </a:xfrm>
-          <a:prstGeom prst="rect">
-            <a:avLst/>
-          </a:prstGeom>
-          <a:noFill/>
-          <a:ln>
-            <a:noFill/>
-          </a:ln>
-        </p:spPr>
-        <p:txBody>
-          <a:bodyPr spcFirstLastPara="1" wrap="square" lIns="91425" tIns="45700" rIns="91425" bIns="45700" anchor="t" anchorCtr="0">
-            <a:spAutoFit/>
-          </a:bodyPr>
-          <a:lstStyle/>
-          <a:p>
-            <a:pPr marL="0" marR="0" lvl="0" indent="0" algn="l" rtl="0">
-              <a:spcBef>
-                <a:spcPts val="0"/>
-              </a:spcBef>
-              <a:spcAft>
-                <a:spcPts val="0"/>
-              </a:spcAft>
-              <a:buNone/>
-            </a:pPr>
-            <a:r>
-              <a:rPr lang="ja-JP" sz="1600" b="1">
-                <a:solidFill>
-                  <a:srgbClr val="004DE6"/>
-                </a:solidFill>
-                <a:latin typeface="メイリオ"/>
-                <a:ea typeface="Meiryo"/>
-                <a:cs typeface="Meiryo"/>
-                <a:sym typeface="Meiryo"/>
-              </a:rPr>
-              <a:t>【LINEシリアルコードスタンプ】新商品のご案内</a:t>
-            </a:r>
-            <a:endParaRPr sz="1600" b="1">
-              <a:solidFill>
-                <a:srgbClr val="004DE6"/>
-              </a:solidFill>
-              <a:latin typeface="Meiryo"/>
-              <a:ea typeface="Meiryo"/>
-              <a:cs typeface="Meiryo"/>
-              <a:sym typeface="Meiryo"/>
-            </a:endParaRPr>
-          </a:p>
-        </p:txBody>
-      </p:sp>
-      <p:sp>
-        <p:nvSpPr>
-          <p:cNvPr id="47" name="Google Shape;47;p3"/>
-          <p:cNvSpPr txBox="1"/>
-          <p:nvPr/>
-        </p:nvSpPr>
-        <p:spPr>
-          <a:xfrm>
-            <a:off x="182880" y="88175"/>
-            <a:ext cx="7512385" cy="365091"/>
-          </a:xfrm>
-          <a:prstGeom prst="rect">
-            <a:avLst/>
-          </a:prstGeom>
-          <a:noFill/>
-          <a:ln>
-            <a:noFill/>
-          </a:ln>
-        </p:spPr>
-        <p:txBody>
-          <a:bodyPr spcFirstLastPara="1" wrap="square" lIns="91425" tIns="72000" rIns="91425" bIns="45700" anchor="t" anchorCtr="0">
-            <a:spAutoFit/>
-          </a:bodyPr>
-          <a:lstStyle/>
-          <a:p>
-            <a:pPr marL="0" marR="0" lvl="0" indent="0" algn="l" rtl="0">
-              <a:spcBef>
-                <a:spcPts val="0"/>
-              </a:spcBef>
-              <a:spcAft>
-                <a:spcPts val="0"/>
-              </a:spcAft>
-              <a:buClr>
-                <a:schemeClr val="dk1"/>
-              </a:buClr>
-              <a:buSzPts val="1600"/>
-              <a:buFont typeface="Arial"/>
-              <a:buNone/>
-            </a:pPr>
-            <a:r>
-              <a:rPr lang="ja-JP" sz="1600" b="0" u="none">
-                <a:solidFill>
-                  <a:schemeClr val="dk1"/>
-                </a:solidFill>
-                <a:latin typeface="メイリオ"/>
-                <a:ea typeface="Meiryo"/>
-                <a:cs typeface="Meiryo"/>
-                <a:sym typeface="Meiryo"/>
-              </a:rPr>
-              <a:t>    今後のアップデート情報</a:t>
-            </a:r>
-            <a:endParaRPr sz="1600" b="0" u="none">
-              <a:solidFill>
-                <a:schemeClr val="dk1"/>
-              </a:solidFill>
-              <a:latin typeface="Meiryo"/>
-              <a:ea typeface="Meiryo"/>
-              <a:cs typeface="Meiryo"/>
-              <a:sym typeface="Meiryo"/>
-            </a:endParaRPr>
-          </a:p>
-        </p:txBody>
-      </p:sp>
-      <p:sp>
-        <p:nvSpPr>
-          <p:cNvPr id="48" name="Google Shape;48;p3"/>
-          <p:cNvSpPr/>
-          <p:nvPr/>
-        </p:nvSpPr>
-        <p:spPr>
-          <a:xfrm>
-            <a:off x="5797260" y="730955"/>
-            <a:ext cx="829618" cy="435690"/>
-          </a:xfrm>
-          <a:prstGeom prst="rect">
-            <a:avLst/>
-          </a:prstGeom>
-          <a:solidFill>
-            <a:schemeClr val="bg1"/>
-          </a:solidFill>
-          <a:ln w="9525" cap="flat" cmpd="sng">
-            <a:solidFill>
-              <a:srgbClr val="4F81BD"/>
-            </a:solidFill>
-            <a:prstDash val="sysDash"/>
-            <a:round/>
-            <a:headEnd type="none" w="sm" len="sm"/>
-            <a:tailEnd type="none" w="sm" len="sm"/>
-          </a:ln>
-        </p:spPr>
-        <p:txBody>
-          <a:bodyPr spcFirstLastPara="1" wrap="square" lIns="91425" tIns="45700" rIns="91425" bIns="45700" anchor="ctr" anchorCtr="0">
-            <a:noAutofit/>
-          </a:bodyPr>
-          <a:lstStyle/>
-          <a:p>
-            <a:pPr marL="0" marR="0" lvl="0" indent="0" algn="ctr" rtl="0">
-              <a:spcBef>
-                <a:spcPts val="0"/>
-              </a:spcBef>
-              <a:spcAft>
-                <a:spcPts val="0"/>
-              </a:spcAft>
-              <a:buClr>
-                <a:schemeClr val="dk1"/>
-              </a:buClr>
-              <a:buSzPts val="1000"/>
-              <a:buFont typeface="Meiryo"/>
-              <a:buNone/>
-            </a:pPr>
-            <a:r>
-              <a:rPr lang="ja-JP" sz="1000">
-                <a:solidFill>
-                  <a:schemeClr val="dk1"/>
-                </a:solidFill>
-                <a:latin typeface="メイリオ"/>
-                <a:ea typeface="Meiryo"/>
-                <a:cs typeface="Meiryo"/>
-                <a:sym typeface="Meiryo"/>
-              </a:rPr>
-              <a:t>開発</a:t>
-            </a:r>
-            <a:endParaRPr sz="1000">
-              <a:solidFill>
-                <a:schemeClr val="dk1"/>
-              </a:solidFill>
-              <a:latin typeface="Meiryo"/>
-              <a:ea typeface="Meiryo"/>
-              <a:cs typeface="Meiryo"/>
-              <a:sym typeface="Meiryo"/>
-            </a:endParaRPr>
-          </a:p>
-          <a:p>
-            <a:pPr marL="0" marR="0" lvl="0" indent="0" algn="ctr" rtl="0">
-              <a:spcBef>
-                <a:spcPts val="0"/>
-              </a:spcBef>
-              <a:spcAft>
-                <a:spcPts val="0"/>
-              </a:spcAft>
-              <a:buClr>
-                <a:schemeClr val="dk1"/>
-              </a:buClr>
-              <a:buSzPts val="1000"/>
-              <a:buFont typeface="Meiryo"/>
-              <a:buNone/>
-            </a:pPr>
-            <a:r>
-              <a:rPr lang="ja-JP" sz="1000">
-                <a:solidFill>
-                  <a:schemeClr val="dk1"/>
-                </a:solidFill>
-                <a:latin typeface="メイリオ"/>
-                <a:ea typeface="Meiryo"/>
-                <a:cs typeface="Meiryo"/>
-                <a:sym typeface="Meiryo"/>
-              </a:rPr>
-              <a:t>LINE API</a:t>
-            </a:r>
-            <a:endParaRPr sz="1000">
-              <a:solidFill>
-                <a:schemeClr val="dk1"/>
-              </a:solidFill>
-              <a:latin typeface="Meiryo"/>
-              <a:ea typeface="Meiryo"/>
-              <a:cs typeface="Meiryo"/>
-              <a:sym typeface="Meiryo"/>
-            </a:endParaRPr>
-          </a:p>
-        </p:txBody>
-      </p:sp>
-      <p:sp>
-        <p:nvSpPr>
-          <p:cNvPr id="49" name="Google Shape;49;p3"/>
-          <p:cNvSpPr/>
-          <p:nvPr/>
-        </p:nvSpPr>
-        <p:spPr>
-          <a:xfrm>
-            <a:off x="4915470" y="730955"/>
-            <a:ext cx="829618" cy="435690"/>
-          </a:xfrm>
-          <a:prstGeom prst="rect">
-            <a:avLst/>
-          </a:prstGeom>
-          <a:solidFill>
-            <a:schemeClr val="bg1"/>
-          </a:solidFill>
-          <a:ln w="9525" cap="flat" cmpd="sng">
-            <a:solidFill>
-              <a:srgbClr val="4F81BD"/>
-            </a:solidFill>
-            <a:prstDash val="sysDash"/>
-            <a:round/>
-            <a:headEnd type="none" w="sm" len="sm"/>
-            <a:tailEnd type="none" w="sm" len="sm"/>
-          </a:ln>
-        </p:spPr>
-        <p:txBody>
-          <a:bodyPr spcFirstLastPara="1" wrap="square" lIns="91425" tIns="45700" rIns="91425" bIns="45700" anchor="ctr" anchorCtr="0">
-            <a:noAutofit/>
-          </a:bodyPr>
-          <a:lstStyle/>
-          <a:p>
-            <a:pPr marL="0" marR="0" lvl="0" indent="0" algn="ctr" rtl="0">
-              <a:spcBef>
-                <a:spcPts val="0"/>
-              </a:spcBef>
-              <a:spcAft>
-                <a:spcPts val="0"/>
-              </a:spcAft>
-              <a:buNone/>
-            </a:pPr>
-            <a:r>
-              <a:rPr lang="ja-JP" sz="1000">
-                <a:solidFill>
-                  <a:schemeClr val="dk1"/>
-                </a:solidFill>
-                <a:latin typeface="メイリオ"/>
-                <a:ea typeface="Meiryo"/>
-                <a:cs typeface="Meiryo"/>
-                <a:sym typeface="Meiryo"/>
-              </a:rPr>
-              <a:t>LINE公式アカウント</a:t>
-            </a:r>
-            <a:endParaRPr sz="1000">
-              <a:solidFill>
-                <a:schemeClr val="dk1"/>
-              </a:solidFill>
-              <a:latin typeface="Meiryo"/>
-              <a:ea typeface="Meiryo"/>
-              <a:cs typeface="Meiryo"/>
-              <a:sym typeface="Meiryo"/>
-            </a:endParaRPr>
-          </a:p>
-        </p:txBody>
-      </p:sp>
-      <p:sp>
-        <p:nvSpPr>
-          <p:cNvPr id="50" name="Google Shape;50;p3"/>
-          <p:cNvSpPr/>
-          <p:nvPr/>
-        </p:nvSpPr>
-        <p:spPr>
-          <a:xfrm>
-            <a:off x="0" y="1890267"/>
-            <a:ext cx="9906000" cy="733579"/>
-          </a:xfrm>
-          <a:prstGeom prst="rect">
-            <a:avLst/>
-          </a:prstGeom>
-          <a:solidFill>
-            <a:srgbClr val="F2F2F2"/>
-          </a:solidFill>
-          <a:ln>
-            <a:noFill/>
-          </a:ln>
-        </p:spPr>
-        <p:txBody>
-          <a:bodyPr spcFirstLastPara="1" wrap="square" lIns="91425" tIns="45700" rIns="91425" bIns="45700" anchor="ctr" anchorCtr="0">
-            <a:noAutofit/>
-          </a:bodyPr>
-          <a:lstStyle/>
-          <a:p>
-            <a:pPr marL="0" marR="0" lvl="0" indent="0" algn="ctr" rtl="0">
-              <a:spcBef>
-                <a:spcPts val="0"/>
-              </a:spcBef>
-              <a:spcAft>
-                <a:spcPts val="0"/>
-              </a:spcAft>
-              <a:buNone/>
-            </a:pPr>
-            <a:endParaRPr sz="1200">
-              <a:solidFill>
-                <a:schemeClr val="dk1"/>
-              </a:solidFill>
-              <a:latin typeface="Meiryo"/>
-              <a:ea typeface="Meiryo"/>
-              <a:cs typeface="Meiryo"/>
-              <a:sym typeface="Meiryo"/>
-            </a:endParaRPr>
-          </a:p>
-        </p:txBody>
-      </p:sp>
-      <p:sp>
-        <p:nvSpPr>
-          <p:cNvPr id="51" name="Google Shape;51;p3"/>
-          <p:cNvSpPr/>
-          <p:nvPr/>
-        </p:nvSpPr>
-        <p:spPr>
-          <a:xfrm>
-            <a:off x="544108" y="1961282"/>
-            <a:ext cx="8817783" cy="646331"/>
-          </a:xfrm>
-          <a:prstGeom prst="rect">
-            <a:avLst/>
-          </a:prstGeom>
-          <a:noFill/>
-          <a:ln>
-            <a:noFill/>
-          </a:ln>
-        </p:spPr>
-        <p:txBody>
-          <a:bodyPr spcFirstLastPara="1" wrap="square" lIns="91425" tIns="45700" rIns="91425" bIns="45700" anchor="t" anchorCtr="0">
-            <a:spAutoFit/>
-          </a:bodyPr>
-          <a:lstStyle/>
-          <a:p>
-            <a:pPr marL="0" marR="0" lvl="0" indent="0" algn="ctr" rtl="0">
-              <a:spcBef>
-                <a:spcPts val="0"/>
-              </a:spcBef>
-              <a:spcAft>
-                <a:spcPts val="0"/>
-              </a:spcAft>
-              <a:buNone/>
-            </a:pPr>
-            <a:r>
-              <a:rPr lang="ja-JP" sz="1200" b="1">
-                <a:solidFill>
-                  <a:schemeClr val="dk1"/>
-                </a:solidFill>
-                <a:latin typeface="メイリオ"/>
-                <a:ea typeface="Meiryo"/>
-                <a:cs typeface="Meiryo"/>
-                <a:sym typeface="Meiryo"/>
-              </a:rPr>
-              <a:t>2026年10月1日リリースの新商材。シリアルコードを入力した人だけが無料スタンプをもらえる。</a:t>
-            </a:r>
-            <a:endParaRPr sz="1200" b="1">
-              <a:solidFill>
-                <a:schemeClr val="dk1"/>
-              </a:solidFill>
-              <a:latin typeface="Meiryo"/>
-              <a:ea typeface="Meiryo"/>
-              <a:cs typeface="Meiryo"/>
-              <a:sym typeface="Meiryo"/>
-            </a:endParaRPr>
-          </a:p>
-          <a:p>
-            <a:pPr marL="0" marR="0" lvl="0" indent="0" algn="ctr" rtl="0">
-              <a:spcBef>
-                <a:spcPts val="0"/>
-              </a:spcBef>
-              <a:spcAft>
-                <a:spcPts val="0"/>
-              </a:spcAft>
-              <a:buNone/>
-            </a:pPr>
-            <a:r>
-              <a:rPr lang="ja-JP" sz="1200" b="1">
-                <a:solidFill>
-                  <a:schemeClr val="dk1"/>
-                </a:solidFill>
-                <a:latin typeface="メイリオ"/>
-                <a:ea typeface="Meiryo"/>
-                <a:cs typeface="Meiryo"/>
-                <a:sym typeface="Meiryo"/>
-              </a:rPr>
-              <a:t>コードの発行は発注を受けた後。印刷・配布がある場合は、その日数も見込んでスケジュールを組む。</a:t>
-            </a:r>
-            <a:endParaRPr/>
-          </a:p>
-          <a:p>
-            <a:pPr marL="0" marR="0" lvl="0" indent="0" algn="ctr" rtl="0">
-              <a:spcBef>
-                <a:spcPts val="0"/>
-              </a:spcBef>
-              <a:spcAft>
-                <a:spcPts val="0"/>
-              </a:spcAft>
-              <a:buNone/>
-            </a:pPr>
-            <a:r>
-              <a:rPr lang="ja-JP" sz="1200" b="1">
-                <a:solidFill>
-                  <a:schemeClr val="dk1"/>
-                </a:solidFill>
-                <a:latin typeface="メイリオ"/>
-                <a:ea typeface="Meiryo"/>
-                <a:cs typeface="Meiryo"/>
-                <a:sym typeface="Meiryo"/>
-              </a:rPr>
-              <a:t>告知やコード配布のルールに違反すると、Apple・Googleの指摘でキャンペーン停止になる場合も。</a:t>
-            </a:r>
-            <a:endParaRPr sz="1400" b="1">
-              <a:solidFill>
-                <a:schemeClr val="dk1"/>
-              </a:solidFill>
-              <a:latin typeface="Meiryo"/>
-              <a:ea typeface="Meiryo"/>
-              <a:cs typeface="Meiryo"/>
-              <a:sym typeface="Meiryo"/>
-            </a:endParaRPr>
-          </a:p>
-        </p:txBody>
-      </p:sp>
-      <p:sp>
-        <p:nvSpPr>
-          <p:cNvPr id="52" name="Google Shape;52;p3"/>
-          <p:cNvSpPr/>
-          <p:nvPr/>
-        </p:nvSpPr>
-        <p:spPr>
-          <a:xfrm>
-            <a:off x="351381" y="2714173"/>
-            <a:ext cx="5200000" cy="338554"/>
-          </a:xfrm>
-          <a:prstGeom prst="rect">
-            <a:avLst/>
-          </a:prstGeom>
-          <a:noFill/>
-          <a:ln>
-            <a:noFill/>
-          </a:ln>
-        </p:spPr>
-        <p:txBody>
-          <a:bodyPr spcFirstLastPara="1" wrap="square" lIns="91425" tIns="45700" rIns="91425" bIns="45700" anchor="t" anchorCtr="0">
-            <a:noAutofit/>
-          </a:bodyPr>
-          <a:lstStyle/>
-          <a:p>
-            <a:pPr marL="0" marR="0" lvl="0" indent="0" algn="l" rtl="0">
-              <a:spcBef>
-                <a:spcPts val="0"/>
-              </a:spcBef>
-              <a:spcAft>
-                <a:spcPts val="0"/>
-              </a:spcAft>
-              <a:buNone/>
-            </a:pPr>
-            <a:r>
-              <a:rPr lang="ja-JP" sz="1400" b="1">
-                <a:solidFill>
-                  <a:srgbClr val="15133D"/>
-                </a:solidFill>
-                <a:latin typeface="メイリオ"/>
-                <a:ea typeface="Meiryo"/>
-                <a:cs typeface="Meiryo"/>
-                <a:sym typeface="Meiryo"/>
-              </a:rPr>
-              <a:t>■ 詳細</a:t>
-            </a:r>
-            <a:endParaRPr/>
-          </a:p>
-        </p:txBody>
-      </p:sp>
-      <p:grpSp>
-        <p:nvGrpSpPr>
-          <p:cNvPr id="53" name="Google Shape;53;p3"/>
-          <p:cNvGrpSpPr/>
-          <p:nvPr/>
-        </p:nvGrpSpPr>
-        <p:grpSpPr>
-          <a:xfrm>
-            <a:off x="8473303" y="730955"/>
-            <a:ext cx="1376241" cy="1131930"/>
-            <a:chOff x="0" y="0"/>
-            <a:chExt cx="1376241" cy="1131930"/>
-          </a:xfrm>
-        </p:grpSpPr>
-        <p:sp>
-          <p:nvSpPr>
-            <p:cNvPr id="54" name="Google Shape;54;p3"/>
-            <p:cNvSpPr/>
-            <p:nvPr/>
-          </p:nvSpPr>
-          <p:spPr>
-            <a:xfrm rot="10800000">
-              <a:off x="0" y="0"/>
-              <a:ext cx="1376241" cy="282982"/>
-            </a:xfrm>
-            <a:prstGeom prst="trapezoid">
-              <a:avLst>
-                <a:gd name="adj" fmla="val 60792"/>
-              </a:avLst>
-            </a:prstGeom>
-            <a:solidFill>
-              <a:srgbClr val="EAEDF5"/>
-            </a:solidFill>
-            <a:ln w="25400" cap="flat" cmpd="sng">
-              <a:solidFill>
-                <a:schemeClr val="dk2"/>
-              </a:solidFill>
-              <a:prstDash val="solid"/>
-              <a:round/>
-              <a:headEnd type="none" w="sm" len="sm"/>
-              <a:tailEnd type="none" w="sm" len="sm"/>
-            </a:ln>
-          </p:spPr>
-          <p:txBody>
-            <a:bodyPr spcFirstLastPara="1" wrap="square" lIns="91425" tIns="91425" rIns="91425" bIns="91425" anchor="ctr" anchorCtr="0">
-              <a:noAutofit/>
-            </a:bodyPr>
-            <a:lstStyle/>
-            <a:p>
-              <a:pPr marL="0" lvl="0" indent="0" algn="l" rtl="0">
-                <a:spcBef>
-                  <a:spcPts val="0"/>
-                </a:spcBef>
-                <a:spcAft>
-                  <a:spcPts val="0"/>
-                </a:spcAft>
-                <a:buNone/>
-              </a:pPr>
-              <a:endParaRPr/>
-            </a:p>
-          </p:txBody>
-        </p:sp>
-        <p:sp>
-          <p:nvSpPr>
-            <p:cNvPr id="55" name="Google Shape;55;p3"/>
-            <p:cNvSpPr txBox="1"/>
-            <p:nvPr/>
-          </p:nvSpPr>
-          <p:spPr>
-            <a:xfrm>
-              <a:off x="240842" y="0"/>
-              <a:ext cx="894556" cy="282982"/>
-            </a:xfrm>
-            <a:prstGeom prst="rect">
-              <a:avLst/>
-            </a:prstGeom>
-            <a:noFill/>
-            <a:ln>
-              <a:noFill/>
-            </a:ln>
-          </p:spPr>
-          <p:txBody>
-            <a:bodyPr spcFirstLastPara="1" wrap="square" lIns="10150" tIns="10150" rIns="10150" bIns="10150" anchor="ctr" anchorCtr="0">
-              <a:noAutofit/>
-            </a:bodyPr>
-            <a:lstStyle/>
-            <a:p>
-              <a:pPr marL="0" marR="0" lvl="0" indent="0" algn="ctr" rtl="0">
-                <a:lnSpc>
-                  <a:spcPct val="90000"/>
-                </a:lnSpc>
-                <a:spcBef>
-                  <a:spcPts val="0"/>
-                </a:spcBef>
-                <a:spcAft>
-                  <a:spcPts val="0"/>
-                </a:spcAft>
-                <a:buClr>
-                  <a:srgbClr val="262626"/>
-                </a:buClr>
-                <a:buSzPts val="800"/>
-                <a:buFont typeface="Arial"/>
-                <a:buNone/>
-              </a:pPr>
-              <a:r>
-                <a:rPr lang="ja-JP" sz="800" b="1">
-                  <a:solidFill>
-                    <a:srgbClr val="262626"/>
-                  </a:solidFill>
-                  <a:latin typeface="Arial"/>
-                  <a:ea typeface="Arial"/>
-                  <a:cs typeface="Arial"/>
-                  <a:sym typeface="Arial"/>
-                </a:rPr>
-                <a:t>認知</a:t>
-              </a:r>
-              <a:endParaRPr/>
-            </a:p>
-          </p:txBody>
-        </p:sp>
-        <p:sp>
-          <p:nvSpPr>
-            <p:cNvPr id="56" name="Google Shape;56;p3"/>
-            <p:cNvSpPr/>
-            <p:nvPr/>
-          </p:nvSpPr>
-          <p:spPr>
-            <a:xfrm rot="10800000">
-              <a:off x="172030" y="282982"/>
-              <a:ext cx="1032180" cy="282982"/>
-            </a:xfrm>
-            <a:prstGeom prst="trapezoid">
-              <a:avLst>
-                <a:gd name="adj" fmla="val 60792"/>
-              </a:avLst>
-            </a:prstGeom>
-            <a:solidFill>
-              <a:schemeClr val="lt1"/>
-            </a:solidFill>
-            <a:ln w="25400" cap="flat" cmpd="sng">
-              <a:solidFill>
-                <a:schemeClr val="dk2"/>
-              </a:solidFill>
-              <a:prstDash val="solid"/>
-              <a:round/>
-              <a:headEnd type="none" w="sm" len="sm"/>
-              <a:tailEnd type="none" w="sm" len="sm"/>
-            </a:ln>
-          </p:spPr>
-          <p:txBody>
-            <a:bodyPr spcFirstLastPara="1" wrap="square" lIns="91425" tIns="91425" rIns="91425" bIns="91425" anchor="ctr" anchorCtr="0">
-              <a:noAutofit/>
-            </a:bodyPr>
-            <a:lstStyle/>
-            <a:p>
-              <a:pPr marL="0" lvl="0" indent="0" algn="l" rtl="0">
-                <a:spcBef>
-                  <a:spcPts val="0"/>
-                </a:spcBef>
-                <a:spcAft>
-                  <a:spcPts val="0"/>
-                </a:spcAft>
-                <a:buNone/>
-              </a:pPr>
-              <a:endParaRPr/>
-            </a:p>
-          </p:txBody>
-        </p:sp>
-        <p:sp>
-          <p:nvSpPr>
-            <p:cNvPr id="57" name="Google Shape;57;p3"/>
-            <p:cNvSpPr txBox="1"/>
-            <p:nvPr/>
-          </p:nvSpPr>
-          <p:spPr>
-            <a:xfrm>
-              <a:off x="352661" y="282982"/>
-              <a:ext cx="670917" cy="282982"/>
-            </a:xfrm>
-            <a:prstGeom prst="rect">
-              <a:avLst/>
-            </a:prstGeom>
-            <a:noFill/>
-            <a:ln>
-              <a:noFill/>
-            </a:ln>
-          </p:spPr>
-          <p:txBody>
-            <a:bodyPr spcFirstLastPara="1" wrap="square" lIns="10150" tIns="10150" rIns="10150" bIns="10150" anchor="ctr" anchorCtr="0">
-              <a:noAutofit/>
-            </a:bodyPr>
-            <a:lstStyle/>
-            <a:p>
-              <a:pPr marL="0" marR="0" lvl="0" indent="0" algn="ctr" rtl="0">
-                <a:lnSpc>
-                  <a:spcPct val="90000"/>
-                </a:lnSpc>
-                <a:spcBef>
-                  <a:spcPts val="0"/>
-                </a:spcBef>
-                <a:spcAft>
-                  <a:spcPts val="0"/>
-                </a:spcAft>
-                <a:buClr>
-                  <a:srgbClr val="262626"/>
-                </a:buClr>
-                <a:buSzPts val="800"/>
-                <a:buFont typeface="Arial"/>
-                <a:buNone/>
-              </a:pPr>
-              <a:r>
-                <a:rPr lang="ja-JP" sz="800" b="1">
-                  <a:solidFill>
-                    <a:srgbClr val="262626"/>
-                  </a:solidFill>
-                  <a:latin typeface="Arial"/>
-                  <a:ea typeface="Arial"/>
-                  <a:cs typeface="Arial"/>
-                  <a:sym typeface="Arial"/>
-                </a:rPr>
-                <a:t>検討</a:t>
-              </a:r>
-              <a:endParaRPr/>
-            </a:p>
-          </p:txBody>
-        </p:sp>
-        <p:sp>
-          <p:nvSpPr>
-            <p:cNvPr id="58" name="Google Shape;58;p3"/>
-            <p:cNvSpPr/>
-            <p:nvPr/>
-          </p:nvSpPr>
-          <p:spPr>
-            <a:xfrm rot="10800000">
-              <a:off x="344060" y="565965"/>
-              <a:ext cx="688120" cy="282982"/>
-            </a:xfrm>
-            <a:prstGeom prst="trapezoid">
-              <a:avLst>
-                <a:gd name="adj" fmla="val 60792"/>
-              </a:avLst>
-            </a:prstGeom>
-            <a:solidFill>
-              <a:schemeClr val="lt1"/>
-            </a:solidFill>
-            <a:ln w="25400" cap="flat" cmpd="sng">
-              <a:solidFill>
-                <a:schemeClr val="dk2"/>
-              </a:solidFill>
-              <a:prstDash val="solid"/>
-              <a:round/>
-              <a:headEnd type="none" w="sm" len="sm"/>
-              <a:tailEnd type="none" w="sm" len="sm"/>
-            </a:ln>
-          </p:spPr>
-          <p:txBody>
-            <a:bodyPr spcFirstLastPara="1" wrap="square" lIns="91425" tIns="91425" rIns="91425" bIns="91425" anchor="ctr" anchorCtr="0">
-              <a:noAutofit/>
-            </a:bodyPr>
-            <a:lstStyle/>
-            <a:p>
-              <a:pPr marL="0" lvl="0" indent="0" algn="l" rtl="0">
-                <a:spcBef>
-                  <a:spcPts val="0"/>
-                </a:spcBef>
-                <a:spcAft>
-                  <a:spcPts val="0"/>
-                </a:spcAft>
-                <a:buNone/>
-              </a:pPr>
-              <a:endParaRPr/>
-            </a:p>
-          </p:txBody>
-        </p:sp>
-        <p:sp>
-          <p:nvSpPr>
-            <p:cNvPr id="59" name="Google Shape;59;p3"/>
-            <p:cNvSpPr txBox="1"/>
-            <p:nvPr/>
-          </p:nvSpPr>
-          <p:spPr>
-            <a:xfrm>
-              <a:off x="464481" y="565965"/>
-              <a:ext cx="447278" cy="282982"/>
-            </a:xfrm>
-            <a:prstGeom prst="rect">
-              <a:avLst/>
-            </a:prstGeom>
-            <a:noFill/>
-            <a:ln>
-              <a:noFill/>
-            </a:ln>
-          </p:spPr>
-          <p:txBody>
-            <a:bodyPr spcFirstLastPara="1" wrap="square" lIns="10150" tIns="10150" rIns="10150" bIns="10150" anchor="ctr" anchorCtr="0">
-              <a:noAutofit/>
-            </a:bodyPr>
-            <a:lstStyle/>
-            <a:p>
-              <a:pPr marL="0" marR="0" lvl="0" indent="0" algn="ctr" rtl="0">
-                <a:lnSpc>
-                  <a:spcPct val="90000"/>
-                </a:lnSpc>
-                <a:spcBef>
-                  <a:spcPts val="0"/>
-                </a:spcBef>
-                <a:spcAft>
-                  <a:spcPts val="0"/>
-                </a:spcAft>
-                <a:buClr>
-                  <a:srgbClr val="262626"/>
-                </a:buClr>
-                <a:buSzPts val="800"/>
-                <a:buFont typeface="Arial"/>
-                <a:buNone/>
-              </a:pPr>
-              <a:r>
-                <a:rPr lang="ja-JP" sz="800" b="1">
-                  <a:solidFill>
-                    <a:srgbClr val="262626"/>
-                  </a:solidFill>
-                  <a:latin typeface="Arial"/>
-                  <a:ea typeface="Arial"/>
-                  <a:cs typeface="Arial"/>
-                  <a:sym typeface="Arial"/>
-                </a:rPr>
-                <a:t>獲得</a:t>
-              </a:r>
-              <a:endParaRPr/>
-            </a:p>
-          </p:txBody>
-        </p:sp>
-        <p:sp>
-          <p:nvSpPr>
-            <p:cNvPr id="60" name="Google Shape;60;p3"/>
-            <p:cNvSpPr/>
-            <p:nvPr/>
-          </p:nvSpPr>
-          <p:spPr>
-            <a:xfrm rot="10800000">
-              <a:off x="516090" y="848948"/>
-              <a:ext cx="344060" cy="282982"/>
-            </a:xfrm>
-            <a:prstGeom prst="trapezoid">
-              <a:avLst>
-                <a:gd name="adj" fmla="val 60792"/>
-              </a:avLst>
-            </a:prstGeom>
-            <a:noFill/>
             <a:ln w="25400" cap="flat" cmpd="sng">
               <a:solidFill>
                 <a:schemeClr val="dk2"/>
@@ -14952,7 +14960,7 @@
               </a:avLst>
             </a:prstGeom>
             <a:solidFill>
-              <a:srgbClr val="EAEDF5"/>
+              <a:schemeClr val="lt1"/>
             </a:solidFill>
             <a:ln w="25400" cap="flat" cmpd="sng">
               <a:solidFill>
@@ -15164,7 +15172,7 @@
               </a:avLst>
             </a:prstGeom>
             <a:solidFill>
-              <a:schemeClr val="lt1"/>
+              <a:schemeClr val="dk2"/>
             </a:solidFill>
             <a:ln w="25400" cap="flat" cmpd="sng">
               <a:solidFill>
@@ -15240,7 +15248,7 @@
               <a:r>
                 <a:rPr lang="ja-JP" sz="800" b="1">
                   <a:solidFill>
-                    <a:srgbClr val="262626"/>
+                    <a:srgbClr val="FFFFFF"/>
                   </a:solidFill>
                   <a:latin typeface="Arial"/>
                   <a:ea typeface="Arial"/>
@@ -15269,7 +15277,9 @@
                 <a:gd name="adj" fmla="val 60792"/>
               </a:avLst>
             </a:prstGeom>
-            <a:noFill/>
+            <a:solidFill>
+              <a:schemeClr val="lt1"/>
+            </a:solidFill>
             <a:ln w="25400" cap="flat" cmpd="sng">
               <a:solidFill>
                 <a:schemeClr val="dk2"/>

--- a/LINEOA媒体最新情報_2026年10月トレンドレポート.pptx
+++ b/LINEOA媒体最新情報_2026年10月トレンドレポート.pptx
@@ -8658,8 +8658,8 @@
         </p:nvSpPr>
         <p:spPr>
           <a:xfrm>
-            <a:off x="548640" y="3313126"/>
-            <a:ext cx="8814816" cy="1548638"/>
+            <a:off x="967740" y="3313126"/>
+            <a:ext cx="7970520" cy="1548638"/>
           </a:xfrm>
           <a:prstGeom prst="roundRect">
             <a:avLst>
@@ -8809,8 +8809,8 @@
         </p:nvSpPr>
         <p:spPr>
           <a:xfrm>
-            <a:off x="548640" y="5044644"/>
-            <a:ext cx="8814816" cy="1214628"/>
+            <a:off x="967740" y="5044644"/>
+            <a:ext cx="7970520" cy="1214628"/>
           </a:xfrm>
           <a:prstGeom prst="roundRect">
             <a:avLst>
@@ -10336,7 +10336,7 @@
         </p:nvSpPr>
         <p:spPr>
           <a:xfrm>
-            <a:off x="548640" y="3199715"/>
+            <a:off x="545592" y="3199715"/>
             <a:ext cx="8814816" cy="3172968"/>
           </a:xfrm>
           <a:prstGeom prst="roundRect">
@@ -12079,8 +12079,8 @@
         </p:nvSpPr>
         <p:spPr>
           <a:xfrm>
-            <a:off x="548640" y="3403931"/>
-            <a:ext cx="8814816" cy="1290828"/>
+            <a:off x="656590" y="3403931"/>
+            <a:ext cx="8592820" cy="1290828"/>
           </a:xfrm>
           <a:prstGeom prst="roundRect">
             <a:avLst>
@@ -12223,8 +12223,8 @@
         </p:nvSpPr>
         <p:spPr>
           <a:xfrm>
-            <a:off x="548640" y="4877639"/>
-            <a:ext cx="8814816" cy="1290828"/>
+            <a:off x="656590" y="4877639"/>
+            <a:ext cx="8592820" cy="1290828"/>
           </a:xfrm>
           <a:prstGeom prst="roundRect">
             <a:avLst>
@@ -15403,8 +15403,8 @@
         </p:nvSpPr>
         <p:spPr>
           <a:xfrm>
-            <a:off x="548640" y="3217876"/>
-            <a:ext cx="8814816" cy="1476883"/>
+            <a:off x="570865" y="3217876"/>
+            <a:ext cx="8764270" cy="1476883"/>
           </a:xfrm>
           <a:prstGeom prst="roundRect">
             <a:avLst>
@@ -15517,8 +15517,8 @@
         </p:nvSpPr>
         <p:spPr>
           <a:xfrm>
-            <a:off x="548640" y="4877639"/>
-            <a:ext cx="8814816" cy="1476883"/>
+            <a:off x="570865" y="4877639"/>
+            <a:ext cx="8764270" cy="1476883"/>
           </a:xfrm>
           <a:prstGeom prst="roundRect">
             <a:avLst>

--- a/LINEOA媒体最新情報_2026年10月トレンドレポート.pptx
+++ b/LINEOA媒体最新情報_2026年10月トレンドレポート.pptx
@@ -16597,7 +16597,7 @@
               </a:avLst>
             </a:prstGeom>
             <a:solidFill>
-              <a:srgbClr val="EAEDF5"/>
+              <a:schemeClr val="lt1"/>
             </a:solidFill>
             <a:ln w="25400" cap="flat" cmpd="sng">
               <a:solidFill>
@@ -16914,7 +16914,9 @@
                 <a:gd name="adj" fmla="val 60792"/>
               </a:avLst>
             </a:prstGeom>
-            <a:noFill/>
+            <a:solidFill>
+              <a:schemeClr val="dk2"/>
+            </a:solidFill>
             <a:ln w="25400" cap="flat" cmpd="sng">
               <a:solidFill>
                 <a:schemeClr val="dk2"/>
@@ -16989,7 +16991,7 @@
               <a:r>
                 <a:rPr lang="ja-JP" sz="800" b="1">
                   <a:solidFill>
-                    <a:srgbClr val="262626"/>
+                    <a:srgbClr val="FFFFFF"/>
                   </a:solidFill>
                   <a:latin typeface="Arial"/>
                   <a:ea typeface="Arial"/>
@@ -17032,292 +17034,14 @@
       </p:pic>
       <p:sp>
         <p:nvSpPr>
-          <p:cNvPr id="63" name="Rectangle 62"/>
+          <p:cNvPr id="69" name="Rounded Rectangle 67"/>
           <p:cNvSpPr/>
           <p:nvPr/>
         </p:nvSpPr>
         <p:spPr>
           <a:xfrm>
-            <a:off x="544108" y="3068960"/>
-            <a:ext cx="3354215" cy="274320"/>
-          </a:xfrm>
-          <a:prstGeom prst="rect">
-            <a:avLst/>
-          </a:prstGeom>
-          <a:solidFill>
-            <a:srgbClr val="F2F2F2"/>
-          </a:solidFill>
-          <a:ln>
-            <a:noFill/>
-          </a:ln>
-          <a:effectLst/>
-        </p:spPr>
-        <p:style>
-          <a:lnRef idx="1">
-            <a:schemeClr val="accent1"/>
-          </a:lnRef>
-          <a:fillRef idx="3">
-            <a:schemeClr val="accent1"/>
-          </a:fillRef>
-          <a:effectRef idx="2">
-            <a:schemeClr val="accent1"/>
-          </a:effectRef>
-          <a:fontRef idx="minor">
-            <a:schemeClr val="lt1"/>
-          </a:fontRef>
-        </p:style>
-        <p:txBody>
-          <a:bodyPr wrap="square" rIns="45720" rtlCol="0" anchor="ctr"/>
-          <a:lstStyle/>
-          <a:p>
-            <a:pPr algn="ctr"/>
-            <a:r>
-              <a:rPr sz="1300" b="1">
-                <a:solidFill>
-                  <a:srgbClr val="333333"/>
-                </a:solidFill>
-                <a:latin typeface="メイリオ"/>
-              </a:rPr>
-              <a:t>AS-IS</a:t>
-            </a:r>
-          </a:p>
-        </p:txBody>
-      </p:sp>
-      <p:sp>
-        <p:nvSpPr>
-          <p:cNvPr id="64" name="Rectangle 63"/>
-          <p:cNvSpPr/>
-          <p:nvPr/>
-        </p:nvSpPr>
-        <p:spPr>
-          <a:xfrm>
-            <a:off x="544108" y="3343280"/>
-            <a:ext cx="3354215" cy="640080"/>
-          </a:xfrm>
-          <a:prstGeom prst="rect">
-            <a:avLst/>
-          </a:prstGeom>
-          <a:solidFill>
-            <a:srgbClr val="F2F2F2"/>
-          </a:solidFill>
-          <a:ln w="12700">
-            <a:solidFill>
-              <a:srgbClr val="D9D9D9"/>
-            </a:solidFill>
-          </a:ln>
-          <a:effectLst/>
-        </p:spPr>
-        <p:style>
-          <a:lnRef idx="1">
-            <a:schemeClr val="accent1"/>
-          </a:lnRef>
-          <a:fillRef idx="3">
-            <a:schemeClr val="accent1"/>
-          </a:fillRef>
-          <a:effectRef idx="2">
-            <a:schemeClr val="accent1"/>
-          </a:effectRef>
-          <a:fontRef idx="minor">
-            <a:schemeClr val="lt1"/>
-          </a:fontRef>
-        </p:style>
-        <p:txBody>
-          <a:bodyPr wrap="square" lIns="182880" tIns="54864" rIns="137160" bIns="54864" rtlCol="0" anchor="ctr"/>
-          <a:lstStyle/>
-          <a:p>
-            <a:pPr algn="ctr">
-              <a:lnSpc>
-                <a:spcPct val="110000"/>
-              </a:lnSpc>
-            </a:pPr>
-            <a:r>
-              <a:rPr sz="1300" b="1">
-                <a:solidFill>
-                  <a:srgbClr val="15133D"/>
-                </a:solidFill>
-                <a:latin typeface="メイリオ"/>
-              </a:rPr>
-              <a:t>プライバシー保護のため、開封・タップの統計は取得できない</a:t>
-            </a:r>
-          </a:p>
-        </p:txBody>
-      </p:sp>
-      <p:sp>
-        <p:nvSpPr>
-          <p:cNvPr id="65" name="TextBox 64"/>
-          <p:cNvSpPr txBox="1"/>
-          <p:nvPr/>
-        </p:nvSpPr>
-        <p:spPr>
-          <a:xfrm>
-            <a:off x="3898323" y="3068960"/>
-            <a:ext cx="432244" cy="914400"/>
-          </a:xfrm>
-          <a:prstGeom prst="rect">
-            <a:avLst/>
-          </a:prstGeom>
-          <a:noFill/>
-        </p:spPr>
-        <p:txBody>
-          <a:bodyPr wrap="none" anchor="ctr">
-            <a:spAutoFit/>
-          </a:bodyPr>
-          <a:lstStyle/>
-          <a:p>
-            <a:pPr algn="ctr"/>
-            <a:r>
-              <a:rPr sz="1800" b="1">
-                <a:solidFill>
-                  <a:srgbClr val="3467B2"/>
-                </a:solidFill>
-                <a:latin typeface="メイリオ"/>
-              </a:rPr>
-              <a:t>▶</a:t>
-            </a:r>
-          </a:p>
-        </p:txBody>
-      </p:sp>
-      <p:sp>
-        <p:nvSpPr>
-          <p:cNvPr id="66" name="Rectangle 65"/>
-          <p:cNvSpPr/>
-          <p:nvPr/>
-        </p:nvSpPr>
-        <p:spPr>
-          <a:xfrm>
-            <a:off x="4330568" y="3068960"/>
-            <a:ext cx="5031323" cy="274320"/>
-          </a:xfrm>
-          <a:prstGeom prst="rect">
-            <a:avLst/>
-          </a:prstGeom>
-          <a:solidFill>
-            <a:srgbClr val="15133D"/>
-          </a:solidFill>
-          <a:ln>
-            <a:noFill/>
-          </a:ln>
-          <a:effectLst/>
-        </p:spPr>
-        <p:style>
-          <a:lnRef idx="1">
-            <a:schemeClr val="accent1"/>
-          </a:lnRef>
-          <a:fillRef idx="3">
-            <a:schemeClr val="accent1"/>
-          </a:fillRef>
-          <a:effectRef idx="2">
-            <a:schemeClr val="accent1"/>
-          </a:effectRef>
-          <a:fontRef idx="minor">
-            <a:schemeClr val="lt1"/>
-          </a:fontRef>
-        </p:style>
-        <p:txBody>
-          <a:bodyPr wrap="square" rIns="45720" rtlCol="0" anchor="ctr"/>
-          <a:lstStyle/>
-          <a:p>
-            <a:pPr algn="ctr"/>
-            <a:r>
-              <a:rPr sz="1300" b="1">
-                <a:solidFill>
-                  <a:srgbClr val="FFFFFF"/>
-                </a:solidFill>
-                <a:latin typeface="メイリオ"/>
-              </a:rPr>
-              <a:t>TO-BE</a:t>
-            </a:r>
-          </a:p>
-        </p:txBody>
-      </p:sp>
-      <p:sp>
-        <p:nvSpPr>
-          <p:cNvPr id="67" name="Rectangle 66"/>
-          <p:cNvSpPr/>
-          <p:nvPr/>
-        </p:nvSpPr>
-        <p:spPr>
-          <a:xfrm>
-            <a:off x="4330568" y="3343280"/>
-            <a:ext cx="5031323" cy="640080"/>
-          </a:xfrm>
-          <a:prstGeom prst="rect">
-            <a:avLst/>
-          </a:prstGeom>
-          <a:solidFill>
-            <a:srgbClr val="EAF0FA"/>
-          </a:solidFill>
-          <a:ln w="12700">
-            <a:solidFill>
-              <a:srgbClr val="3467B2"/>
-            </a:solidFill>
-          </a:ln>
-          <a:effectLst/>
-        </p:spPr>
-        <p:style>
-          <a:lnRef idx="1">
-            <a:schemeClr val="accent1"/>
-          </a:lnRef>
-          <a:fillRef idx="3">
-            <a:schemeClr val="accent1"/>
-          </a:fillRef>
-          <a:effectRef idx="2">
-            <a:schemeClr val="accent1"/>
-          </a:effectRef>
-          <a:fontRef idx="minor">
-            <a:schemeClr val="lt1"/>
-          </a:fontRef>
-        </p:style>
-        <p:txBody>
-          <a:bodyPr wrap="square" lIns="182880" tIns="54864" rIns="137160" bIns="54864" rtlCol="0" anchor="ctr"/>
-          <a:lstStyle/>
-          <a:p>
-            <a:pPr algn="ctr">
-              <a:lnSpc>
-                <a:spcPct val="110000"/>
-              </a:lnSpc>
-            </a:pPr>
-            <a:r>
-              <a:rPr sz="1800" b="1">
-                <a:solidFill>
-                  <a:srgbClr val="15133D"/>
-                </a:solidFill>
-                <a:latin typeface="メイリオ"/>
-              </a:rPr>
-              <a:t>ユニット単位の統計情報をAPIで取得可能に</a:t>
-            </a:r>
-          </a:p>
-          <a:p>
-            <a:pPr>
-              <a:lnSpc>
-                <a:spcPct val="110000"/>
-              </a:lnSpc>
-              <a:spcBef>
-                <a:spcPts val="500"/>
-              </a:spcBef>
-            </a:pPr>
-            <a:r>
-              <a:rPr sz="1050">
-                <a:solidFill>
-                  <a:srgbClr val="333333"/>
-                </a:solidFill>
-                <a:latin typeface="メイリオ"/>
-              </a:rPr>
-              <a:t>開封・URLタップ・動画再生の人数をユニットごとに確認</a:t>
-            </a:r>
-          </a:p>
-        </p:txBody>
-      </p:sp>
-      <p:sp>
-        <p:nvSpPr>
-          <p:cNvPr id="68" name="Rounded Rectangle 67"/>
-          <p:cNvSpPr/>
-          <p:nvPr/>
-        </p:nvSpPr>
-        <p:spPr>
-          <a:xfrm>
-            <a:off x="544108" y="4211960"/>
-            <a:ext cx="4322443" cy="1357915"/>
+            <a:off x="998855" y="3788741"/>
+            <a:ext cx="7908289" cy="1290828"/>
           </a:xfrm>
           <a:prstGeom prst="roundRect">
             <a:avLst>
@@ -17354,14 +17078,20 @@
           <a:p>
             <a:pPr algn="l"/>
             <a:r>
-              <a:rPr sz="1900" b="1">
+              <a:rPr sz="2000" b="1" dirty="0" err="1">
                 <a:solidFill>
                   <a:srgbClr val="15133D"/>
                 </a:solidFill>
                 <a:latin typeface="メイリオ"/>
               </a:rPr>
-              <a:t>送信時にユニット名を付ける</a:t>
-            </a:r>
+              <a:t>変更点</a:t>
+            </a:r>
+            <a:endParaRPr sz="2000" b="1" dirty="0">
+              <a:solidFill>
+                <a:srgbClr val="15133D"/>
+              </a:solidFill>
+              <a:latin typeface="メイリオ"/>
+            </a:endParaRPr>
           </a:p>
           <a:p>
             <a:pPr algn="l">
@@ -17373,89 +17103,83 @@
               </a:spcBef>
             </a:pPr>
             <a:r>
-              <a:rPr sz="1300">
+              <a:rPr sz="1400" dirty="0" err="1">
                 <a:solidFill>
                   <a:srgbClr val="333333"/>
                 </a:solidFill>
                 <a:latin typeface="メイリオ"/>
               </a:rPr>
-              <a:t>送信時にユニット名（1通に1つ）を指定して集計する。後から付けたり変えたりはできない。月1,000種類まで。</a:t>
+              <a:t>・ユニットごとの統計情報を、LINE通知メッセージでもAPIで取得できるようになった。</a:t>
+            </a:r>
+            <a:endParaRPr lang="en-US" sz="1400" dirty="0">
+              <a:solidFill>
+                <a:srgbClr val="333333"/>
+              </a:solidFill>
+              <a:latin typeface="メイリオ"/>
+            </a:endParaRPr>
+          </a:p>
+          <a:p>
+            <a:pPr algn="l">
+              <a:lnSpc>
+                <a:spcPct val="115000"/>
+              </a:lnSpc>
+              <a:spcBef>
+                <a:spcPts val="600"/>
+              </a:spcBef>
+            </a:pPr>
+            <a:r>
+              <a:rPr sz="1400" dirty="0" err="1">
+                <a:solidFill>
+                  <a:srgbClr val="333333"/>
+                </a:solidFill>
+                <a:latin typeface="メイリオ"/>
+              </a:rPr>
+              <a:t>・ユニットごとに、開封数・URLタップ数などを確認できる。</a:t>
             </a:r>
           </a:p>
         </p:txBody>
       </p:sp>
       <p:sp>
         <p:nvSpPr>
-          <p:cNvPr id="69" name="Rounded Rectangle 68"/>
-          <p:cNvSpPr/>
+          <p:cNvPr id="70" name="TextBox 69"/>
+          <p:cNvSpPr txBox="1"/>
           <p:nvPr/>
         </p:nvSpPr>
         <p:spPr>
           <a:xfrm>
-            <a:off x="5039448" y="4211960"/>
-            <a:ext cx="4322443" cy="1357915"/>
+            <a:off x="998855" y="5216729"/>
+            <a:ext cx="7908289" cy="566928"/>
           </a:xfrm>
-          <a:prstGeom prst="roundRect">
-            <a:avLst>
-              <a:gd name="adj" fmla="val 6000"/>
-            </a:avLst>
+          <a:prstGeom prst="rect">
+            <a:avLst/>
           </a:prstGeom>
-          <a:solidFill>
-            <a:srgbClr val="EAF0FA"/>
-          </a:solidFill>
-          <a:ln w="12700">
-            <a:solidFill>
-              <a:srgbClr val="3467B2"/>
-            </a:solidFill>
-          </a:ln>
-          <a:effectLst/>
+          <a:noFill/>
         </p:spPr>
-        <p:style>
-          <a:lnRef idx="1">
-            <a:schemeClr val="accent1"/>
-          </a:lnRef>
-          <a:fillRef idx="3">
-            <a:schemeClr val="accent1"/>
-          </a:fillRef>
-          <a:effectRef idx="2">
-            <a:schemeClr val="accent1"/>
-          </a:effectRef>
-          <a:fontRef idx="minor">
-            <a:schemeClr val="lt1"/>
-          </a:fontRef>
-        </p:style>
         <p:txBody>
-          <a:bodyPr wrap="square" lIns="228600" rIns="182880" rtlCol="0" anchor="ctr"/>
+          <a:bodyPr wrap="square">
+            <a:spAutoFit/>
+          </a:bodyPr>
           <a:lstStyle/>
           <a:p>
-            <a:pPr algn="l"/>
-            <a:r>
-              <a:rPr sz="1900" b="1">
-                <a:solidFill>
-                  <a:srgbClr val="15133D"/>
-                </a:solidFill>
-                <a:latin typeface="メイリオ"/>
-              </a:rPr>
-              <a:t>少ない数は表示されない</a:t>
-            </a:r>
-          </a:p>
-          <a:p>
-            <a:pPr algn="l">
-              <a:lnSpc>
-                <a:spcPct val="115000"/>
-              </a:lnSpc>
-              <a:spcBef>
-                <a:spcPts val="600"/>
-              </a:spcBef>
-            </a:pPr>
-            <a:r>
-              <a:rPr sz="1300">
+            <a:r>
+              <a:rPr sz="1200">
                 <a:solidFill>
                   <a:srgbClr val="333333"/>
                 </a:solidFill>
                 <a:latin typeface="メイリオ"/>
               </a:rPr>
-              <a:t>値が20未満（実人数20人未満）の項目は表示されない。送信数は含まれないため、開封率の分母は別で持っておく。</a:t>
+              <a:t>※ ユニット名は送るときに付ける（1通に1つ。後から付けたり変えたりはできない。月1,000種類まで）。</a:t>
+            </a:r>
+          </a:p>
+          <a:p>
+            <a:r>
+              <a:rPr sz="1200">
+                <a:solidFill>
+                  <a:srgbClr val="333333"/>
+                </a:solidFill>
+                <a:latin typeface="メイリオ"/>
+              </a:rPr>
+              <a:t>※ 20人未満の数字は表示されない。送信数は取れないため、開封率の分母は自社で持っておく。</a:t>
             </a:r>
           </a:p>
         </p:txBody>

--- a/LINEOA媒体最新情報_2026年10月トレンドレポート.pptx
+++ b/LINEOA媒体最新情報_2026年10月トレンドレポート.pptx
@@ -17040,8 +17040,8 @@
         </p:nvSpPr>
         <p:spPr>
           <a:xfrm>
-            <a:off x="998855" y="3788741"/>
-            <a:ext cx="7908289" cy="1290828"/>
+            <a:off x="709930" y="3403931"/>
+            <a:ext cx="8486139" cy="1290828"/>
           </a:xfrm>
           <a:prstGeom prst="roundRect">
             <a:avLst>
@@ -17141,45 +17141,107 @@
       </p:sp>
       <p:sp>
         <p:nvSpPr>
-          <p:cNvPr id="70" name="TextBox 69"/>
-          <p:cNvSpPr txBox="1"/>
+          <p:cNvPr id="70" name="Rounded Rectangle 67_note"/>
+          <p:cNvSpPr/>
           <p:nvPr/>
         </p:nvSpPr>
         <p:spPr>
           <a:xfrm>
-            <a:off x="998855" y="5216729"/>
-            <a:ext cx="7908289" cy="566928"/>
+            <a:off x="709930" y="4877639"/>
+            <a:ext cx="8486139" cy="1290828"/>
           </a:xfrm>
-          <a:prstGeom prst="rect">
-            <a:avLst/>
+          <a:prstGeom prst="roundRect">
+            <a:avLst>
+              <a:gd name="adj" fmla="val 6000"/>
+            </a:avLst>
           </a:prstGeom>
-          <a:noFill/>
+          <a:solidFill>
+            <a:srgbClr val="EAF0FA"/>
+          </a:solidFill>
+          <a:ln w="12700">
+            <a:solidFill>
+              <a:srgbClr val="3467B2"/>
+            </a:solidFill>
+          </a:ln>
+          <a:effectLst/>
         </p:spPr>
+        <p:style>
+          <a:lnRef idx="1">
+            <a:schemeClr val="accent1"/>
+          </a:lnRef>
+          <a:fillRef idx="3">
+            <a:schemeClr val="accent1"/>
+          </a:fillRef>
+          <a:effectRef idx="2">
+            <a:schemeClr val="accent1"/>
+          </a:effectRef>
+          <a:fontRef idx="minor">
+            <a:schemeClr val="lt1"/>
+          </a:fontRef>
+        </p:style>
         <p:txBody>
-          <a:bodyPr wrap="square">
-            <a:spAutoFit/>
-          </a:bodyPr>
+          <a:bodyPr wrap="square" lIns="228600" rIns="182880" rtlCol="0" anchor="ctr"/>
           <a:lstStyle/>
           <a:p>
-            <a:r>
-              <a:rPr sz="1200">
+            <a:pPr algn="l"/>
+            <a:r>
+              <a:rPr sz="2000" b="1" dirty="0" err="1">
+                <a:solidFill>
+                  <a:srgbClr val="15133D"/>
+                </a:solidFill>
+                <a:latin typeface="メイリオ"/>
+              </a:rPr>
+              <a:t>注意点</a:t>
+            </a:r>
+            <a:endParaRPr sz="2000" b="1" dirty="0">
+              <a:solidFill>
+                <a:srgbClr val="15133D"/>
+              </a:solidFill>
+              <a:latin typeface="メイリオ"/>
+            </a:endParaRPr>
+          </a:p>
+          <a:p>
+            <a:pPr algn="l">
+              <a:lnSpc>
+                <a:spcPct val="115000"/>
+              </a:lnSpc>
+              <a:spcBef>
+                <a:spcPts val="600"/>
+              </a:spcBef>
+            </a:pPr>
+            <a:r>
+              <a:rPr sz="1400" dirty="0" err="1">
                 <a:solidFill>
                   <a:srgbClr val="333333"/>
                 </a:solidFill>
                 <a:latin typeface="メイリオ"/>
               </a:rPr>
-              <a:t>※ ユニット名は送るときに付ける（1通に1つ。後から付けたり変えたりはできない。月1,000種類まで）。</a:t>
-            </a:r>
-          </a:p>
-          <a:p>
-            <a:r>
-              <a:rPr sz="1200">
+              <a:t>・ユニット名は送るときに付ける（1通に1つ・後から変更不可・月1,000種類まで）。</a:t>
+            </a:r>
+            <a:endParaRPr lang="en-US" sz="1400" dirty="0">
+              <a:solidFill>
+                <a:srgbClr val="333333"/>
+              </a:solidFill>
+              <a:latin typeface="メイリオ"/>
+            </a:endParaRPr>
+          </a:p>
+          <a:p>
+            <a:pPr algn="l">
+              <a:lnSpc>
+                <a:spcPct val="115000"/>
+              </a:lnSpc>
+              <a:spcBef>
+                <a:spcPts val="600"/>
+              </a:spcBef>
+            </a:pPr>
+            <a:r>
+              <a:rPr sz="1400" dirty="0" err="1">
                 <a:solidFill>
                   <a:srgbClr val="333333"/>
                 </a:solidFill>
                 <a:latin typeface="メイリオ"/>
               </a:rPr>
-              <a:t>※ 20人未満の数字は表示されない。送信数は取れないため、開封率の分母は自社で持っておく。</a:t>
+              <a:t>・20人未満の数字は表示されない。送信数は取れないため、開封率の分母は自社で持っておく。</a:t>
             </a:r>
           </a:p>
         </p:txBody>

--- a/LINEOA媒体最新情報_2026年10月トレンドレポート.pptx
+++ b/LINEOA媒体最新情報_2026年10月トレンドレポート.pptx
@@ -18220,7 +18220,7 @@
               </a:avLst>
             </a:prstGeom>
             <a:solidFill>
-              <a:srgbClr val="EAEDF5"/>
+              <a:schemeClr val="dk2"/>
             </a:solidFill>
             <a:ln w="25400" cap="flat" cmpd="sng">
               <a:solidFill>
@@ -18296,7 +18296,7 @@
               <a:r>
                 <a:rPr lang="ja-JP" sz="800" b="1">
                   <a:solidFill>
-                    <a:srgbClr val="262626"/>
+                    <a:srgbClr val="FFFFFF"/>
                   </a:solidFill>
                   <a:latin typeface="Arial"/>
                   <a:ea typeface="Arial"/>
@@ -18537,7 +18537,9 @@
                 <a:gd name="adj" fmla="val 60792"/>
               </a:avLst>
             </a:prstGeom>
-            <a:noFill/>
+            <a:solidFill>
+              <a:schemeClr val="lt1"/>
+            </a:solidFill>
             <a:ln w="25400" cap="flat" cmpd="sng">
               <a:solidFill>
                 <a:schemeClr val="dk2"/>
@@ -18661,8 +18663,8 @@
         </p:nvSpPr>
         <p:spPr>
           <a:xfrm>
-            <a:off x="544108" y="3068960"/>
-            <a:ext cx="2107191" cy="1371600"/>
+            <a:off x="548640" y="3220289"/>
+            <a:ext cx="2816352" cy="822960"/>
           </a:xfrm>
           <a:prstGeom prst="roundRect">
             <a:avLst>
@@ -18699,7 +18701,7 @@
           <a:p>
             <a:pPr algn="ctr"/>
             <a:r>
-              <a:rPr sz="2600" b="1">
+              <a:rPr sz="2400" b="1">
                 <a:solidFill>
                   <a:srgbClr val="15133D"/>
                 </a:solidFill>
@@ -18750,8 +18752,8 @@
         </p:nvSpPr>
         <p:spPr>
           <a:xfrm>
-            <a:off x="2780972" y="3068960"/>
-            <a:ext cx="2107191" cy="1371600"/>
+            <a:off x="3547872" y="3220289"/>
+            <a:ext cx="2816352" cy="822960"/>
           </a:xfrm>
           <a:prstGeom prst="roundRect">
             <a:avLst>
@@ -18788,7 +18790,7 @@
           <a:p>
             <a:pPr algn="ctr"/>
             <a:r>
-              <a:rPr sz="2600" b="1">
+              <a:rPr sz="2400" b="1">
                 <a:solidFill>
                   <a:srgbClr val="15133D"/>
                 </a:solidFill>
@@ -18839,8 +18841,8 @@
         </p:nvSpPr>
         <p:spPr>
           <a:xfrm>
-            <a:off x="5017836" y="3068960"/>
-            <a:ext cx="2107191" cy="1371600"/>
+            <a:off x="6547104" y="3220289"/>
+            <a:ext cx="2816352" cy="822960"/>
           </a:xfrm>
           <a:prstGeom prst="roundRect">
             <a:avLst>
@@ -18877,7 +18879,7 @@
           <a:p>
             <a:pPr algn="ctr"/>
             <a:r>
-              <a:rPr sz="2600" b="1">
+              <a:rPr sz="2400" b="1">
                 <a:solidFill>
                   <a:srgbClr val="15133D"/>
                 </a:solidFill>
@@ -18922,14 +18924,14 @@
       </p:sp>
       <p:sp>
         <p:nvSpPr>
-          <p:cNvPr id="66" name="Rounded Rectangle 65"/>
+          <p:cNvPr id="68" name="Rounded Rectangle 67"/>
           <p:cNvSpPr/>
           <p:nvPr/>
         </p:nvSpPr>
         <p:spPr>
           <a:xfrm>
-            <a:off x="7254700" y="3068960"/>
-            <a:ext cx="2107191" cy="1371600"/>
+            <a:off x="5047488" y="4180409"/>
+            <a:ext cx="4315968" cy="2171700"/>
           </a:xfrm>
           <a:prstGeom prst="roundRect">
             <a:avLst>
@@ -18961,314 +18963,125 @@
           </a:fontRef>
         </p:style>
         <p:txBody>
-          <a:bodyPr wrap="square" rtlCol="0" anchor="ctr"/>
+          <a:bodyPr wrap="square" lIns="228600" rIns="182880" rtlCol="0" anchor="t"/>
           <a:lstStyle/>
           <a:p>
-            <a:pPr algn="ctr"/>
-            <a:r>
-              <a:rPr sz="2600" b="1">
+            <a:pPr algn="l"/>
+            <a:r>
+              <a:rPr sz="1800" b="1">
                 <a:solidFill>
                   <a:srgbClr val="15133D"/>
                 </a:solidFill>
                 <a:latin typeface="メイリオ"/>
               </a:rPr>
-              <a:t>200万円〜</a:t>
-            </a:r>
-          </a:p>
-          <a:p>
-            <a:pPr algn="ctr">
-              <a:spcBef>
-                <a:spcPts val="200"/>
-              </a:spcBef>
-            </a:pPr>
-            <a:r>
-              <a:rPr sz="1100" b="1">
-                <a:solidFill>
-                  <a:srgbClr val="3467B2"/>
-                </a:solidFill>
-                <a:latin typeface="メイリオ"/>
-              </a:rPr>
-              <a:t>最低発注金額</a:t>
-            </a:r>
-          </a:p>
-          <a:p>
-            <a:pPr algn="ctr">
-              <a:spcBef>
-                <a:spcPts val="200"/>
-              </a:spcBef>
-            </a:pPr>
-            <a:r>
-              <a:rPr sz="800">
+              <a:t>注意点</a:t>
+            </a:r>
+          </a:p>
+          <a:p>
+            <a:pPr algn="l">
+              <a:lnSpc>
+                <a:spcPct val="115000"/>
+              </a:lnSpc>
+              <a:spcBef>
+                <a:spcPts val="0"/>
+              </a:spcBef>
+            </a:pPr>
+            <a:r>
+              <a:rPr sz="1200">
                 <a:solidFill>
                   <a:srgbClr val="333333"/>
                 </a:solidFill>
                 <a:latin typeface="メイリオ"/>
               </a:rPr>
-              <a:t>最新の媒体資料に準拠</a:t>
+              <a:t>・発注時、備考欄に次の文言を記載</a:t>
+            </a:r>
+            <a:br>
+              <a:rPr sz="1200">
+                <a:solidFill>
+                  <a:srgbClr val="333333"/>
+                </a:solidFill>
+                <a:latin typeface="メイリオ"/>
+              </a:rPr>
+            </a:br>
+            <a:r>
+              <a:rPr sz="1200">
+                <a:solidFill>
+                  <a:srgbClr val="333333"/>
+                </a:solidFill>
+                <a:latin typeface="メイリオ"/>
+              </a:rPr>
+              <a:t>　「FY26 Winter Campaign適用」</a:t>
+            </a:r>
+          </a:p>
+          <a:p>
+            <a:pPr algn="l">
+              <a:lnSpc>
+                <a:spcPct val="115000"/>
+              </a:lnSpc>
+              <a:spcBef>
+                <a:spcPts val="0"/>
+              </a:spcBef>
+            </a:pPr>
+            <a:r>
+              <a:rPr sz="1200">
+                <a:solidFill>
+                  <a:srgbClr val="333333"/>
+                </a:solidFill>
+                <a:latin typeface="メイリオ"/>
+              </a:rPr>
+              <a:t>・配信中・発注受領済みの案件には適用できない</a:t>
+            </a:r>
+          </a:p>
+          <a:p>
+            <a:pPr algn="l">
+              <a:lnSpc>
+                <a:spcPct val="115000"/>
+              </a:lnSpc>
+              <a:spcBef>
+                <a:spcPts val="0"/>
+              </a:spcBef>
+            </a:pPr>
+            <a:r>
+              <a:rPr sz="1200">
+                <a:solidFill>
+                  <a:srgbClr val="333333"/>
+                </a:solidFill>
+                <a:latin typeface="メイリオ"/>
+              </a:rPr>
+              <a:t>・他の割引・キャンペーンとは併用できない</a:t>
+            </a:r>
+          </a:p>
+          <a:p>
+            <a:pPr algn="l">
+              <a:lnSpc>
+                <a:spcPct val="115000"/>
+              </a:lnSpc>
+              <a:spcBef>
+                <a:spcPts val="0"/>
+              </a:spcBef>
+            </a:pPr>
+            <a:r>
+              <a:rPr sz="1200">
+                <a:solidFill>
+                  <a:srgbClr val="333333"/>
+                </a:solidFill>
+                <a:latin typeface="メイリオ"/>
+              </a:rPr>
+              <a:t>・記載のない条件は、最新の媒体資料に準拠</a:t>
             </a:r>
           </a:p>
         </p:txBody>
       </p:sp>
-      <p:graphicFrame>
-        <p:nvGraphicFramePr>
-          <p:cNvPr id="67" name="Table 66"/>
-          <p:cNvGraphicFramePr>
-            <a:graphicFrameLocks noGrp="1"/>
-          </p:cNvGraphicFramePr>
-          <p:nvPr/>
-        </p:nvGraphicFramePr>
-        <p:xfrm>
-          <a:off x="544108" y="4623440"/>
-          <a:ext cx="9078296" cy="822960"/>
-        </p:xfrm>
-        <a:graphic>
-          <a:graphicData uri="http://schemas.openxmlformats.org/drawingml/2006/table">
-            <a:tbl>
-              <a:tblPr firstRow="1" bandRow="1">
-                <a:tableStyleId>{5C22544A-7EE6-4342-B048-85BDC9FD1C3A}</a:tableStyleId>
-              </a:tblPr>
-              <a:tblGrid>
-                <a:gridCol w="2204446">
-                  <a:extLst>
-                    <a:ext uri="{9D8B030D-6E8A-4147-A177-3AD203B41FA5}">
-                      <a16:colId xmlns:a16="http://schemas.microsoft.com/office/drawing/2014/main" val="20000"/>
-                    </a:ext>
-                  </a:extLst>
-                </a:gridCol>
-                <a:gridCol w="2299901">
-                  <a:extLst>
-                    <a:ext uri="{9D8B030D-6E8A-4147-A177-3AD203B41FA5}">
-                      <a16:colId xmlns:a16="http://schemas.microsoft.com/office/drawing/2014/main" val="20001"/>
-                    </a:ext>
-                  </a:extLst>
-                </a:gridCol>
-                <a:gridCol w="2291946">
-                  <a:extLst>
-                    <a:ext uri="{9D8B030D-6E8A-4147-A177-3AD203B41FA5}">
-                      <a16:colId xmlns:a16="http://schemas.microsoft.com/office/drawing/2014/main" val="20002"/>
-                    </a:ext>
-                  </a:extLst>
-                </a:gridCol>
-                <a:gridCol w="2282003">
-                  <a:extLst>
-                    <a:ext uri="{9D8B030D-6E8A-4147-A177-3AD203B41FA5}">
-                      <a16:colId xmlns:a16="http://schemas.microsoft.com/office/drawing/2014/main" val="20003"/>
-                    </a:ext>
-                  </a:extLst>
-                </a:gridCol>
-              </a:tblGrid>
-              <a:tr h="411480">
-                <a:tc>
-                  <a:txBody>
-                    <a:bodyPr/>
-                    <a:lstStyle/>
-                    <a:p>
-                      <a:pPr algn="ctr"/>
-                      <a:r>
-                        <a:rPr sz="900" b="1">
-                          <a:solidFill>
-                            <a:srgbClr val="FFFFFF"/>
-                          </a:solidFill>
-                          <a:latin typeface="メイリオ"/>
-                        </a:rPr>
-                        <a:t>対象期間</a:t>
-                      </a:r>
-                    </a:p>
-                  </a:txBody>
-                  <a:tcPr anchor="ctr">
-                    <a:solidFill>
-                      <a:srgbClr val="15133D"/>
-                    </a:solidFill>
-                  </a:tcPr>
-                </a:tc>
-                <a:tc>
-                  <a:txBody>
-                    <a:bodyPr/>
-                    <a:lstStyle/>
-                    <a:p>
-                      <a:pPr algn="ctr"/>
-                      <a:r>
-                        <a:rPr sz="900" b="1">
-                          <a:solidFill>
-                            <a:srgbClr val="FFFFFF"/>
-                          </a:solidFill>
-                          <a:latin typeface="メイリオ"/>
-                        </a:rPr>
-                        <a:t>対象メニュー</a:t>
-                      </a:r>
-                    </a:p>
-                  </a:txBody>
-                  <a:tcPr anchor="ctr">
-                    <a:solidFill>
-                      <a:srgbClr val="15133D"/>
-                    </a:solidFill>
-                  </a:tcPr>
-                </a:tc>
-                <a:tc>
-                  <a:txBody>
-                    <a:bodyPr/>
-                    <a:lstStyle/>
-                    <a:p>
-                      <a:pPr algn="ctr"/>
-                      <a:r>
-                        <a:rPr sz="900" b="1">
-                          <a:solidFill>
-                            <a:srgbClr val="FFFFFF"/>
-                          </a:solidFill>
-                          <a:latin typeface="メイリオ"/>
-                        </a:rPr>
-                        <a:t>対象セグメント</a:t>
-                      </a:r>
-                    </a:p>
-                  </a:txBody>
-                  <a:tcPr anchor="ctr">
-                    <a:solidFill>
-                      <a:srgbClr val="15133D"/>
-                    </a:solidFill>
-                  </a:tcPr>
-                </a:tc>
-                <a:tc>
-                  <a:txBody>
-                    <a:bodyPr/>
-                    <a:lstStyle/>
-                    <a:p>
-                      <a:pPr algn="ctr"/>
-                      <a:r>
-                        <a:rPr sz="900" b="1">
-                          <a:solidFill>
-                            <a:srgbClr val="FFFFFF"/>
-                          </a:solidFill>
-                          <a:latin typeface="メイリオ"/>
-                        </a:rPr>
-                        <a:t>対象クライアント</a:t>
-                      </a:r>
-                    </a:p>
-                  </a:txBody>
-                  <a:tcPr anchor="ctr">
-                    <a:solidFill>
-                      <a:srgbClr val="15133D"/>
-                    </a:solidFill>
-                  </a:tcPr>
-                </a:tc>
-                <a:extLst>
-                  <a:ext uri="{0D108BD9-81ED-4DB2-BD59-A6C34878D82A}">
-                    <a16:rowId xmlns:a16="http://schemas.microsoft.com/office/drawing/2014/main" val="10000"/>
-                  </a:ext>
-                </a:extLst>
-              </a:tr>
-              <a:tr h="411480">
-                <a:tc>
-                  <a:txBody>
-                    <a:bodyPr/>
-                    <a:lstStyle/>
-                    <a:p>
-                      <a:pPr algn="ctr"/>
-                      <a:r>
-                        <a:rPr sz="1400" b="1">
-                          <a:solidFill>
-                            <a:srgbClr val="15133D"/>
-                          </a:solidFill>
-                          <a:latin typeface="メイリオ"/>
-                        </a:rPr>
-                        <a:t>26/12/1〜27/3/31</a:t>
-                      </a:r>
-                    </a:p>
-                  </a:txBody>
-                  <a:tcPr anchor="ctr">
-                    <a:solidFill>
-                      <a:srgbClr val="EAF0FA"/>
-                    </a:solidFill>
-                  </a:tcPr>
-                </a:tc>
-                <a:tc>
-                  <a:txBody>
-                    <a:bodyPr/>
-                    <a:lstStyle/>
-                    <a:p>
-                      <a:pPr algn="ctr"/>
-                      <a:r>
-                        <a:rPr sz="1400" b="1">
-                          <a:solidFill>
-                            <a:srgbClr val="15133D"/>
-                          </a:solidFill>
-                          <a:latin typeface="メイリオ"/>
-                        </a:rPr>
-                        <a:t>Swipe AD／Video AD</a:t>
-                      </a:r>
-                    </a:p>
-                  </a:txBody>
-                  <a:tcPr anchor="ctr">
-                    <a:solidFill>
-                      <a:srgbClr val="EAF0FA"/>
-                    </a:solidFill>
-                  </a:tcPr>
-                </a:tc>
-                <a:tc>
-                  <a:txBody>
-                    <a:bodyPr/>
-                    <a:lstStyle/>
-                    <a:p>
-                      <a:pPr algn="ctr"/>
-                      <a:r>
-                        <a:rPr sz="1400" b="1">
-                          <a:solidFill>
-                            <a:srgbClr val="15133D"/>
-                          </a:solidFill>
-                          <a:latin typeface="メイリオ"/>
-                        </a:rPr>
-                        <a:t>ALL配信のみ</a:t>
-                      </a:r>
-                    </a:p>
-                  </a:txBody>
-                  <a:tcPr anchor="ctr">
-                    <a:solidFill>
-                      <a:srgbClr val="EAF0FA"/>
-                    </a:solidFill>
-                  </a:tcPr>
-                </a:tc>
-                <a:tc>
-                  <a:txBody>
-                    <a:bodyPr/>
-                    <a:lstStyle/>
-                    <a:p>
-                      <a:pPr algn="ctr"/>
-                      <a:r>
-                        <a:rPr sz="1400" b="1">
-                          <a:solidFill>
-                            <a:srgbClr val="15133D"/>
-                          </a:solidFill>
-                          <a:latin typeface="メイリオ"/>
-                        </a:rPr>
-                        <a:t>全クライアント</a:t>
-                      </a:r>
-                    </a:p>
-                  </a:txBody>
-                  <a:tcPr anchor="ctr">
-                    <a:solidFill>
-                      <a:srgbClr val="EAF0FA"/>
-                    </a:solidFill>
-                  </a:tcPr>
-                </a:tc>
-                <a:extLst>
-                  <a:ext uri="{0D108BD9-81ED-4DB2-BD59-A6C34878D82A}">
-                    <a16:rowId xmlns:a16="http://schemas.microsoft.com/office/drawing/2014/main" val="10001"/>
-                  </a:ext>
-                </a:extLst>
-              </a:tr>
-            </a:tbl>
-          </a:graphicData>
-        </a:graphic>
-      </p:graphicFrame>
       <p:sp>
         <p:nvSpPr>
-          <p:cNvPr id="68" name="Rounded Rectangle 67"/>
+          <p:cNvPr id="69" name="Rounded Rectangle 67_cond"/>
           <p:cNvSpPr/>
           <p:nvPr/>
         </p:nvSpPr>
         <p:spPr>
           <a:xfrm>
-            <a:off x="544108" y="5629280"/>
-            <a:ext cx="8817784" cy="777240"/>
+            <a:off x="548640" y="4180409"/>
+            <a:ext cx="4315968" cy="2171700"/>
           </a:xfrm>
           <a:prstGeom prst="roundRect">
             <a:avLst>
@@ -19300,7 +19113,7 @@
           </a:fontRef>
         </p:style>
         <p:txBody>
-          <a:bodyPr wrap="square" lIns="228600" rIns="182880" rtlCol="0" anchor="ctr"/>
+          <a:bodyPr wrap="square" lIns="228600" rIns="182880" rtlCol="0" anchor="t"/>
           <a:lstStyle/>
           <a:p>
             <a:pPr algn="l"/>
@@ -19311,7 +19124,7 @@
                 </a:solidFill>
                 <a:latin typeface="メイリオ"/>
               </a:rPr>
-              <a:t>発注時の注意</a:t>
+              <a:t>対象条件</a:t>
             </a:r>
           </a:p>
           <a:p>
@@ -19320,17 +19133,127 @@
                 <a:spcPct val="115000"/>
               </a:lnSpc>
               <a:spcBef>
-                <a:spcPts val="600"/>
-              </a:spcBef>
-            </a:pPr>
-            <a:r>
-              <a:rPr sz="1100">
+                <a:spcPts val="0"/>
+              </a:spcBef>
+            </a:pPr>
+            <a:r>
+              <a:rPr sz="1200">
                 <a:solidFill>
                   <a:srgbClr val="333333"/>
                 </a:solidFill>
                 <a:latin typeface="メイリオ"/>
               </a:rPr>
-              <a:t>備考欄に「FY26 Winter Campaign適用」と記載。配信中・発注受領済みの案件、他割引との併用、デリタゲ配信は対象外。</a:t>
+              <a:t>・対象期間：2026/12/1（火）〜2027/3/31（水）</a:t>
+            </a:r>
+            <a:br>
+              <a:rPr sz="1200">
+                <a:solidFill>
+                  <a:srgbClr val="333333"/>
+                </a:solidFill>
+                <a:latin typeface="メイリオ"/>
+              </a:rPr>
+            </a:br>
+            <a:r>
+              <a:rPr sz="1200">
+                <a:solidFill>
+                  <a:srgbClr val="333333"/>
+                </a:solidFill>
+                <a:latin typeface="メイリオ"/>
+              </a:rPr>
+              <a:t>　※2027/3/31までに掲載が終わる案件</a:t>
+            </a:r>
+          </a:p>
+          <a:p>
+            <a:pPr algn="l">
+              <a:lnSpc>
+                <a:spcPct val="115000"/>
+              </a:lnSpc>
+              <a:spcBef>
+                <a:spcPts val="0"/>
+              </a:spcBef>
+            </a:pPr>
+            <a:r>
+              <a:rPr sz="1200">
+                <a:solidFill>
+                  <a:srgbClr val="333333"/>
+                </a:solidFill>
+                <a:latin typeface="メイリオ"/>
+              </a:rPr>
+              <a:t>・対象メニュー：Friends Swipe AD／Video AD</a:t>
+            </a:r>
+            <a:br>
+              <a:rPr sz="1200">
+                <a:solidFill>
+                  <a:srgbClr val="333333"/>
+                </a:solidFill>
+                <a:latin typeface="メイリオ"/>
+              </a:rPr>
+            </a:br>
+            <a:r>
+              <a:rPr sz="1200">
+                <a:solidFill>
+                  <a:srgbClr val="333333"/>
+                </a:solidFill>
+                <a:latin typeface="メイリオ"/>
+              </a:rPr>
+              <a:t>　※リーチ最適化配信を含む。デリタゲ配信は対象外</a:t>
+            </a:r>
+          </a:p>
+          <a:p>
+            <a:pPr algn="l">
+              <a:lnSpc>
+                <a:spcPct val="115000"/>
+              </a:lnSpc>
+              <a:spcBef>
+                <a:spcPts val="0"/>
+              </a:spcBef>
+            </a:pPr>
+            <a:r>
+              <a:rPr sz="1200">
+                <a:solidFill>
+                  <a:srgbClr val="333333"/>
+                </a:solidFill>
+                <a:latin typeface="メイリオ"/>
+              </a:rPr>
+              <a:t>・対象の配信：ALL配信のみ</a:t>
+            </a:r>
+          </a:p>
+          <a:p>
+            <a:pPr algn="l">
+              <a:lnSpc>
+                <a:spcPct val="115000"/>
+              </a:lnSpc>
+              <a:spcBef>
+                <a:spcPts val="0"/>
+              </a:spcBef>
+            </a:pPr>
+            <a:r>
+              <a:rPr sz="1200">
+                <a:solidFill>
+                  <a:srgbClr val="333333"/>
+                </a:solidFill>
+                <a:latin typeface="メイリオ"/>
+              </a:rPr>
+              <a:t>・対象クライアント：全クライアント</a:t>
+            </a:r>
+          </a:p>
+          <a:p>
+            <a:pPr algn="l">
+              <a:lnSpc>
+                <a:spcPct val="115000"/>
+              </a:lnSpc>
+              <a:spcBef>
+                <a:spcPts val="0"/>
+              </a:spcBef>
+            </a:pPr>
+            <a:r>
+              <a:rPr sz="1200">
+                <a:solidFill>
+                  <a:srgbClr val="333333"/>
+                </a:solidFill>
+                <a:latin typeface="メイリオ"/>
+              </a:rPr>
+              <a:t>・最低発注金額：200万円〜</a:t>
             </a:r>
           </a:p>
         </p:txBody>

--- a/LINEOA媒体最新情報_2026年10月トレンドレポート.pptx
+++ b/LINEOA媒体最新情報_2026年10月トレンドレポート.pptx
@@ -18663,7 +18663,7 @@
         </p:nvSpPr>
         <p:spPr>
           <a:xfrm>
-            <a:off x="548640" y="3220289"/>
+            <a:off x="548640" y="3254579"/>
             <a:ext cx="2816352" cy="822960"/>
           </a:xfrm>
           <a:prstGeom prst="roundRect">
@@ -18717,7 +18717,7 @@
               </a:spcBef>
             </a:pPr>
             <a:r>
-              <a:rPr sz="1100" b="1">
+              <a:rPr sz="1200" b="1">
                 <a:solidFill>
                   <a:srgbClr val="3467B2"/>
                 </a:solidFill>
@@ -18733,7 +18733,7 @@
               </a:spcBef>
             </a:pPr>
             <a:r>
-              <a:rPr sz="800">
+              <a:rPr sz="900">
                 <a:solidFill>
                   <a:srgbClr val="333333"/>
                 </a:solidFill>
@@ -18752,7 +18752,7 @@
         </p:nvSpPr>
         <p:spPr>
           <a:xfrm>
-            <a:off x="3547872" y="3220289"/>
+            <a:off x="3547872" y="3254579"/>
             <a:ext cx="2816352" cy="822960"/>
           </a:xfrm>
           <a:prstGeom prst="roundRect">
@@ -18806,7 +18806,7 @@
               </a:spcBef>
             </a:pPr>
             <a:r>
-              <a:rPr sz="1100" b="1">
+              <a:rPr sz="1200" b="1">
                 <a:solidFill>
                   <a:srgbClr val="3467B2"/>
                 </a:solidFill>
@@ -18822,7 +18822,7 @@
               </a:spcBef>
             </a:pPr>
             <a:r>
-              <a:rPr sz="800">
+              <a:rPr sz="900">
                 <a:solidFill>
                   <a:srgbClr val="333333"/>
                 </a:solidFill>
@@ -18841,7 +18841,7 @@
         </p:nvSpPr>
         <p:spPr>
           <a:xfrm>
-            <a:off x="6547104" y="3220289"/>
+            <a:off x="6547104" y="3254579"/>
             <a:ext cx="2816352" cy="822960"/>
           </a:xfrm>
           <a:prstGeom prst="roundRect">
@@ -18895,7 +18895,7 @@
               </a:spcBef>
             </a:pPr>
             <a:r>
-              <a:rPr sz="1100" b="1">
+              <a:rPr sz="1200" b="1">
                 <a:solidFill>
                   <a:srgbClr val="3467B2"/>
                 </a:solidFill>
@@ -18911,7 +18911,7 @@
               </a:spcBef>
             </a:pPr>
             <a:r>
-              <a:rPr sz="800">
+              <a:rPr sz="900">
                 <a:solidFill>
                   <a:srgbClr val="333333"/>
                 </a:solidFill>
@@ -18922,342 +18922,356 @@
           </a:p>
         </p:txBody>
       </p:sp>
-      <p:sp>
-        <p:nvSpPr>
-          <p:cNvPr id="68" name="Rounded Rectangle 67"/>
-          <p:cNvSpPr/>
+      <p:graphicFrame>
+        <p:nvGraphicFramePr>
+          <p:cNvPr id="69" name="Table 68"/>
+          <p:cNvGraphicFramePr>
+            <a:graphicFrameLocks noGrp="1"/>
+          </p:cNvGraphicFramePr>
           <p:nvPr/>
-        </p:nvSpPr>
-        <p:spPr>
-          <a:xfrm>
-            <a:off x="5047488" y="4180409"/>
-            <a:ext cx="4315968" cy="2171700"/>
-          </a:xfrm>
-          <a:prstGeom prst="roundRect">
-            <a:avLst>
-              <a:gd name="adj" fmla="val 6000"/>
-            </a:avLst>
-          </a:prstGeom>
-          <a:solidFill>
-            <a:srgbClr val="EAF0FA"/>
-          </a:solidFill>
-          <a:ln w="12700">
-            <a:solidFill>
-              <a:srgbClr val="3467B2"/>
-            </a:solidFill>
-          </a:ln>
-          <a:effectLst/>
-        </p:spPr>
-        <p:style>
-          <a:lnRef idx="1">
-            <a:schemeClr val="accent1"/>
-          </a:lnRef>
-          <a:fillRef idx="3">
-            <a:schemeClr val="accent1"/>
-          </a:fillRef>
-          <a:effectRef idx="2">
-            <a:schemeClr val="accent1"/>
-          </a:effectRef>
-          <a:fontRef idx="minor">
-            <a:schemeClr val="lt1"/>
-          </a:fontRef>
-        </p:style>
-        <p:txBody>
-          <a:bodyPr wrap="square" lIns="228600" rIns="182880" rtlCol="0" anchor="t"/>
-          <a:lstStyle/>
-          <a:p>
-            <a:pPr algn="l"/>
-            <a:r>
-              <a:rPr sz="1800" b="1">
-                <a:solidFill>
-                  <a:srgbClr val="15133D"/>
-                </a:solidFill>
-                <a:latin typeface="メイリオ"/>
-              </a:rPr>
-              <a:t>注意点</a:t>
-            </a:r>
-          </a:p>
-          <a:p>
-            <a:pPr algn="l">
-              <a:lnSpc>
-                <a:spcPct val="115000"/>
-              </a:lnSpc>
-              <a:spcBef>
-                <a:spcPts val="0"/>
-              </a:spcBef>
-            </a:pPr>
-            <a:r>
-              <a:rPr sz="1200">
-                <a:solidFill>
-                  <a:srgbClr val="333333"/>
-                </a:solidFill>
-                <a:latin typeface="メイリオ"/>
-              </a:rPr>
-              <a:t>・発注時、備考欄に次の文言を記載</a:t>
-            </a:r>
-            <a:br>
-              <a:rPr sz="1200">
-                <a:solidFill>
-                  <a:srgbClr val="333333"/>
-                </a:solidFill>
-                <a:latin typeface="メイリオ"/>
-              </a:rPr>
-            </a:br>
-            <a:r>
-              <a:rPr sz="1200">
-                <a:solidFill>
-                  <a:srgbClr val="333333"/>
-                </a:solidFill>
-                <a:latin typeface="メイリオ"/>
-              </a:rPr>
-              <a:t>　「FY26 Winter Campaign適用」</a:t>
-            </a:r>
-          </a:p>
-          <a:p>
-            <a:pPr algn="l">
-              <a:lnSpc>
-                <a:spcPct val="115000"/>
-              </a:lnSpc>
-              <a:spcBef>
-                <a:spcPts val="0"/>
-              </a:spcBef>
-            </a:pPr>
-            <a:r>
-              <a:rPr sz="1200">
-                <a:solidFill>
-                  <a:srgbClr val="333333"/>
-                </a:solidFill>
-                <a:latin typeface="メイリオ"/>
-              </a:rPr>
-              <a:t>・配信中・発注受領済みの案件には適用できない</a:t>
-            </a:r>
-          </a:p>
-          <a:p>
-            <a:pPr algn="l">
-              <a:lnSpc>
-                <a:spcPct val="115000"/>
-              </a:lnSpc>
-              <a:spcBef>
-                <a:spcPts val="0"/>
-              </a:spcBef>
-            </a:pPr>
-            <a:r>
-              <a:rPr sz="1200">
-                <a:solidFill>
-                  <a:srgbClr val="333333"/>
-                </a:solidFill>
-                <a:latin typeface="メイリオ"/>
-              </a:rPr>
-              <a:t>・他の割引・キャンペーンとは併用できない</a:t>
-            </a:r>
-          </a:p>
-          <a:p>
-            <a:pPr algn="l">
-              <a:lnSpc>
-                <a:spcPct val="115000"/>
-              </a:lnSpc>
-              <a:spcBef>
-                <a:spcPts val="0"/>
-              </a:spcBef>
-            </a:pPr>
-            <a:r>
-              <a:rPr sz="1200">
-                <a:solidFill>
-                  <a:srgbClr val="333333"/>
-                </a:solidFill>
-                <a:latin typeface="メイリオ"/>
-              </a:rPr>
-              <a:t>・記載のない条件は、最新の媒体資料に準拠</a:t>
-            </a:r>
-          </a:p>
-        </p:txBody>
-      </p:sp>
-      <p:sp>
-        <p:nvSpPr>
-          <p:cNvPr id="69" name="Rounded Rectangle 67_cond"/>
-          <p:cNvSpPr/>
-          <p:nvPr/>
-        </p:nvSpPr>
-        <p:spPr>
-          <a:xfrm>
-            <a:off x="548640" y="4180409"/>
-            <a:ext cx="4315968" cy="2171700"/>
-          </a:xfrm>
-          <a:prstGeom prst="roundRect">
-            <a:avLst>
-              <a:gd name="adj" fmla="val 6000"/>
-            </a:avLst>
-          </a:prstGeom>
-          <a:solidFill>
-            <a:srgbClr val="EAF0FA"/>
-          </a:solidFill>
-          <a:ln w="12700">
-            <a:solidFill>
-              <a:srgbClr val="3467B2"/>
-            </a:solidFill>
-          </a:ln>
-          <a:effectLst/>
-        </p:spPr>
-        <p:style>
-          <a:lnRef idx="1">
-            <a:schemeClr val="accent1"/>
-          </a:lnRef>
-          <a:fillRef idx="3">
-            <a:schemeClr val="accent1"/>
-          </a:fillRef>
-          <a:effectRef idx="2">
-            <a:schemeClr val="accent1"/>
-          </a:effectRef>
-          <a:fontRef idx="minor">
-            <a:schemeClr val="lt1"/>
-          </a:fontRef>
-        </p:style>
-        <p:txBody>
-          <a:bodyPr wrap="square" lIns="228600" rIns="182880" rtlCol="0" anchor="t"/>
-          <a:lstStyle/>
-          <a:p>
-            <a:pPr algn="l"/>
-            <a:r>
-              <a:rPr sz="1800" b="1">
-                <a:solidFill>
-                  <a:srgbClr val="15133D"/>
-                </a:solidFill>
-                <a:latin typeface="メイリオ"/>
-              </a:rPr>
-              <a:t>対象条件</a:t>
-            </a:r>
-          </a:p>
-          <a:p>
-            <a:pPr algn="l">
-              <a:lnSpc>
-                <a:spcPct val="115000"/>
-              </a:lnSpc>
-              <a:spcBef>
-                <a:spcPts val="0"/>
-              </a:spcBef>
-            </a:pPr>
-            <a:r>
-              <a:rPr sz="1200">
-                <a:solidFill>
-                  <a:srgbClr val="333333"/>
-                </a:solidFill>
-                <a:latin typeface="メイリオ"/>
-              </a:rPr>
-              <a:t>・対象期間：2026/12/1（火）〜2027/3/31（水）</a:t>
-            </a:r>
-            <a:br>
-              <a:rPr sz="1200">
-                <a:solidFill>
-                  <a:srgbClr val="333333"/>
-                </a:solidFill>
-                <a:latin typeface="メイリオ"/>
-              </a:rPr>
-            </a:br>
-            <a:r>
-              <a:rPr sz="1200">
-                <a:solidFill>
-                  <a:srgbClr val="333333"/>
-                </a:solidFill>
-                <a:latin typeface="メイリオ"/>
-              </a:rPr>
-              <a:t>　※2027/3/31までに掲載が終わる案件</a:t>
-            </a:r>
-          </a:p>
-          <a:p>
-            <a:pPr algn="l">
-              <a:lnSpc>
-                <a:spcPct val="115000"/>
-              </a:lnSpc>
-              <a:spcBef>
-                <a:spcPts val="0"/>
-              </a:spcBef>
-            </a:pPr>
-            <a:r>
-              <a:rPr sz="1200">
-                <a:solidFill>
-                  <a:srgbClr val="333333"/>
-                </a:solidFill>
-                <a:latin typeface="メイリオ"/>
-              </a:rPr>
-              <a:t>・対象メニュー：Friends Swipe AD／Video AD</a:t>
-            </a:r>
-            <a:br>
-              <a:rPr sz="1200">
-                <a:solidFill>
-                  <a:srgbClr val="333333"/>
-                </a:solidFill>
-                <a:latin typeface="メイリオ"/>
-              </a:rPr>
-            </a:br>
-            <a:r>
-              <a:rPr sz="1200">
-                <a:solidFill>
-                  <a:srgbClr val="333333"/>
-                </a:solidFill>
-                <a:latin typeface="メイリオ"/>
-              </a:rPr>
-              <a:t>　※リーチ最適化配信を含む。デリタゲ配信は対象外</a:t>
-            </a:r>
-          </a:p>
-          <a:p>
-            <a:pPr algn="l">
-              <a:lnSpc>
-                <a:spcPct val="115000"/>
-              </a:lnSpc>
-              <a:spcBef>
-                <a:spcPts val="0"/>
-              </a:spcBef>
-            </a:pPr>
-            <a:r>
-              <a:rPr sz="1200">
-                <a:solidFill>
-                  <a:srgbClr val="333333"/>
-                </a:solidFill>
-                <a:latin typeface="メイリオ"/>
-              </a:rPr>
-              <a:t>・対象の配信：ALL配信のみ</a:t>
-            </a:r>
-          </a:p>
-          <a:p>
-            <a:pPr algn="l">
-              <a:lnSpc>
-                <a:spcPct val="115000"/>
-              </a:lnSpc>
-              <a:spcBef>
-                <a:spcPts val="0"/>
-              </a:spcBef>
-            </a:pPr>
-            <a:r>
-              <a:rPr sz="1200">
-                <a:solidFill>
-                  <a:srgbClr val="333333"/>
-                </a:solidFill>
-                <a:latin typeface="メイリオ"/>
-              </a:rPr>
-              <a:t>・対象クライアント：全クライアント</a:t>
-            </a:r>
-          </a:p>
-          <a:p>
-            <a:pPr algn="l">
-              <a:lnSpc>
-                <a:spcPct val="115000"/>
-              </a:lnSpc>
-              <a:spcBef>
-                <a:spcPts val="0"/>
-              </a:spcBef>
-            </a:pPr>
-            <a:r>
-              <a:rPr sz="1200">
-                <a:solidFill>
-                  <a:srgbClr val="333333"/>
-                </a:solidFill>
-                <a:latin typeface="メイリオ"/>
-              </a:rPr>
-              <a:t>・最低発注金額：200万円〜</a:t>
-            </a:r>
-          </a:p>
-        </p:txBody>
-      </p:sp>
+        </p:nvGraphicFramePr>
+        <p:xfrm>
+          <a:off x="548640" y="4214699"/>
+          <a:ext cx="8814816" cy="2221992"/>
+        </p:xfrm>
+        <a:graphic>
+          <a:graphicData uri="http://schemas.openxmlformats.org/drawingml/2006/table">
+            <a:tbl>
+              <a:tblPr firstRow="1" bandRow="1">
+                <a:tableStyleId>{5C22544A-7EE6-4342-B048-85BDC9FD1C3A}</a:tableStyleId>
+              </a:tblPr>
+              <a:tblGrid>
+                <a:gridCol w="1600200"/>
+                <a:gridCol w="7214616"/>
+              </a:tblGrid>
+              <a:tr h="283464">
+                <a:tc>
+                  <a:txBody>
+                    <a:bodyPr/>
+                    <a:lstStyle/>
+                    <a:p>
+                      <a:pPr algn="ctr"/>
+                      <a:r>
+                        <a:rPr sz="1200" b="1">
+                          <a:solidFill>
+                            <a:srgbClr val="15133D"/>
+                          </a:solidFill>
+                          <a:latin typeface="メイリオ"/>
+                        </a:rPr>
+                        <a:t>対象期間</a:t>
+                      </a:r>
+                    </a:p>
+                  </a:txBody>
+                  <a:tcPr anchor="ctr" marL="109728" marR="109728" marT="18288" marB="18288">
+                    <a:solidFill>
+                      <a:srgbClr val="EAF0FA"/>
+                    </a:solidFill>
+                  </a:tcPr>
+                </a:tc>
+                <a:tc>
+                  <a:txBody>
+                    <a:bodyPr/>
+                    <a:lstStyle/>
+                    <a:p>
+                      <a:pPr algn="l"/>
+                      <a:r>
+                        <a:rPr sz="1200" b="0">
+                          <a:solidFill>
+                            <a:srgbClr val="333333"/>
+                          </a:solidFill>
+                          <a:latin typeface="メイリオ"/>
+                        </a:rPr>
+                        <a:t>2026/12/1（火）〜2027/3/31（水）　※2027/3/31までに掲載が終わる案件</a:t>
+                      </a:r>
+                    </a:p>
+                  </a:txBody>
+                  <a:tcPr anchor="ctr" marL="109728" marR="109728" marT="18288" marB="18288">
+                    <a:solidFill>
+                      <a:srgbClr val="FFFFFF"/>
+                    </a:solidFill>
+                  </a:tcPr>
+                </a:tc>
+              </a:tr>
+              <a:tr h="283464">
+                <a:tc>
+                  <a:txBody>
+                    <a:bodyPr/>
+                    <a:lstStyle/>
+                    <a:p>
+                      <a:pPr algn="ctr"/>
+                      <a:r>
+                        <a:rPr sz="1200" b="1">
+                          <a:solidFill>
+                            <a:srgbClr val="15133D"/>
+                          </a:solidFill>
+                          <a:latin typeface="メイリオ"/>
+                        </a:rPr>
+                        <a:t>対象メニュー</a:t>
+                      </a:r>
+                    </a:p>
+                  </a:txBody>
+                  <a:tcPr anchor="ctr" marL="109728" marR="109728" marT="18288" marB="18288">
+                    <a:solidFill>
+                      <a:srgbClr val="EAF0FA"/>
+                    </a:solidFill>
+                  </a:tcPr>
+                </a:tc>
+                <a:tc>
+                  <a:txBody>
+                    <a:bodyPr/>
+                    <a:lstStyle/>
+                    <a:p>
+                      <a:pPr algn="l"/>
+                      <a:r>
+                        <a:rPr sz="1200" b="0">
+                          <a:solidFill>
+                            <a:srgbClr val="333333"/>
+                          </a:solidFill>
+                          <a:latin typeface="メイリオ"/>
+                        </a:rPr>
+                        <a:t>Friends Swipe AD／Friends Video AD　※リーチ最適化配信を含む。デリタゲ配信は対象外</a:t>
+                      </a:r>
+                    </a:p>
+                  </a:txBody>
+                  <a:tcPr anchor="ctr" marL="109728" marR="109728" marT="18288" marB="18288">
+                    <a:solidFill>
+                      <a:srgbClr val="FFFFFF"/>
+                    </a:solidFill>
+                  </a:tcPr>
+                </a:tc>
+              </a:tr>
+              <a:tr h="283464">
+                <a:tc>
+                  <a:txBody>
+                    <a:bodyPr/>
+                    <a:lstStyle/>
+                    <a:p>
+                      <a:pPr algn="ctr"/>
+                      <a:r>
+                        <a:rPr sz="1200" b="1">
+                          <a:solidFill>
+                            <a:srgbClr val="15133D"/>
+                          </a:solidFill>
+                          <a:latin typeface="メイリオ"/>
+                        </a:rPr>
+                        <a:t>対象の配信</a:t>
+                      </a:r>
+                    </a:p>
+                  </a:txBody>
+                  <a:tcPr anchor="ctr" marL="109728" marR="109728" marT="18288" marB="18288">
+                    <a:solidFill>
+                      <a:srgbClr val="EAF0FA"/>
+                    </a:solidFill>
+                  </a:tcPr>
+                </a:tc>
+                <a:tc>
+                  <a:txBody>
+                    <a:bodyPr/>
+                    <a:lstStyle/>
+                    <a:p>
+                      <a:pPr algn="l"/>
+                      <a:r>
+                        <a:rPr sz="1200" b="0">
+                          <a:solidFill>
+                            <a:srgbClr val="333333"/>
+                          </a:solidFill>
+                          <a:latin typeface="メイリオ"/>
+                        </a:rPr>
+                        <a:t>ALL配信のみ</a:t>
+                      </a:r>
+                    </a:p>
+                  </a:txBody>
+                  <a:tcPr anchor="ctr" marL="109728" marR="109728" marT="18288" marB="18288">
+                    <a:solidFill>
+                      <a:srgbClr val="FFFFFF"/>
+                    </a:solidFill>
+                  </a:tcPr>
+                </a:tc>
+              </a:tr>
+              <a:tr h="283464">
+                <a:tc>
+                  <a:txBody>
+                    <a:bodyPr/>
+                    <a:lstStyle/>
+                    <a:p>
+                      <a:pPr algn="ctr"/>
+                      <a:r>
+                        <a:rPr sz="1200" b="1">
+                          <a:solidFill>
+                            <a:srgbClr val="15133D"/>
+                          </a:solidFill>
+                          <a:latin typeface="メイリオ"/>
+                        </a:rPr>
+                        <a:t>対象クライアント</a:t>
+                      </a:r>
+                    </a:p>
+                  </a:txBody>
+                  <a:tcPr anchor="ctr" marL="109728" marR="109728" marT="18288" marB="18288">
+                    <a:solidFill>
+                      <a:srgbClr val="EAF0FA"/>
+                    </a:solidFill>
+                  </a:tcPr>
+                </a:tc>
+                <a:tc>
+                  <a:txBody>
+                    <a:bodyPr/>
+                    <a:lstStyle/>
+                    <a:p>
+                      <a:pPr algn="l"/>
+                      <a:r>
+                        <a:rPr sz="1200" b="0">
+                          <a:solidFill>
+                            <a:srgbClr val="333333"/>
+                          </a:solidFill>
+                          <a:latin typeface="メイリオ"/>
+                        </a:rPr>
+                        <a:t>全クライアント</a:t>
+                      </a:r>
+                    </a:p>
+                  </a:txBody>
+                  <a:tcPr anchor="ctr" marL="109728" marR="109728" marT="18288" marB="18288">
+                    <a:solidFill>
+                      <a:srgbClr val="FFFFFF"/>
+                    </a:solidFill>
+                  </a:tcPr>
+                </a:tc>
+              </a:tr>
+              <a:tr h="283464">
+                <a:tc>
+                  <a:txBody>
+                    <a:bodyPr/>
+                    <a:lstStyle/>
+                    <a:p>
+                      <a:pPr algn="ctr"/>
+                      <a:r>
+                        <a:rPr sz="1200" b="1">
+                          <a:solidFill>
+                            <a:srgbClr val="15133D"/>
+                          </a:solidFill>
+                          <a:latin typeface="メイリオ"/>
+                        </a:rPr>
+                        <a:t>最低発注金額</a:t>
+                      </a:r>
+                    </a:p>
+                  </a:txBody>
+                  <a:tcPr anchor="ctr" marL="109728" marR="109728" marT="18288" marB="18288">
+                    <a:solidFill>
+                      <a:srgbClr val="EAF0FA"/>
+                    </a:solidFill>
+                  </a:tcPr>
+                </a:tc>
+                <a:tc>
+                  <a:txBody>
+                    <a:bodyPr/>
+                    <a:lstStyle/>
+                    <a:p>
+                      <a:pPr algn="l"/>
+                      <a:r>
+                        <a:rPr sz="1200" b="0">
+                          <a:solidFill>
+                            <a:srgbClr val="333333"/>
+                          </a:solidFill>
+                          <a:latin typeface="メイリオ"/>
+                        </a:rPr>
+                        <a:t>200万円〜</a:t>
+                      </a:r>
+                    </a:p>
+                  </a:txBody>
+                  <a:tcPr anchor="ctr" marL="109728" marR="109728" marT="18288" marB="18288">
+                    <a:solidFill>
+                      <a:srgbClr val="FFFFFF"/>
+                    </a:solidFill>
+                  </a:tcPr>
+                </a:tc>
+              </a:tr>
+              <a:tr h="804672">
+                <a:tc>
+                  <a:txBody>
+                    <a:bodyPr/>
+                    <a:lstStyle/>
+                    <a:p>
+                      <a:pPr algn="ctr"/>
+                      <a:r>
+                        <a:rPr sz="1200" b="1">
+                          <a:solidFill>
+                            <a:srgbClr val="15133D"/>
+                          </a:solidFill>
+                          <a:latin typeface="メイリオ"/>
+                        </a:rPr>
+                        <a:t>注意点</a:t>
+                      </a:r>
+                    </a:p>
+                  </a:txBody>
+                  <a:tcPr anchor="ctr" marL="109728" marR="109728" marT="18288" marB="18288">
+                    <a:solidFill>
+                      <a:srgbClr val="EAF0FA"/>
+                    </a:solidFill>
+                  </a:tcPr>
+                </a:tc>
+                <a:tc>
+                  <a:txBody>
+                    <a:bodyPr/>
+                    <a:lstStyle/>
+                    <a:p>
+                      <a:pPr algn="l"/>
+                      <a:r>
+                        <a:rPr sz="1200" b="0">
+                          <a:solidFill>
+                            <a:srgbClr val="333333"/>
+                          </a:solidFill>
+                          <a:latin typeface="メイリオ"/>
+                        </a:rPr>
+                        <a:t>・発注時、備考欄に「FY26 Winter Campaign適用」と記載</a:t>
+                      </a:r>
+                    </a:p>
+                    <a:p>
+                      <a:pPr algn="l"/>
+                      <a:r>
+                        <a:rPr sz="1200" b="0">
+                          <a:solidFill>
+                            <a:srgbClr val="333333"/>
+                          </a:solidFill>
+                          <a:latin typeface="メイリオ"/>
+                        </a:rPr>
+                        <a:t>・配信中・発注受領済みの案件には適用できない</a:t>
+                      </a:r>
+                    </a:p>
+                    <a:p>
+                      <a:pPr algn="l"/>
+                      <a:r>
+                        <a:rPr sz="1200" b="0">
+                          <a:solidFill>
+                            <a:srgbClr val="333333"/>
+                          </a:solidFill>
+                          <a:latin typeface="メイリオ"/>
+                        </a:rPr>
+                        <a:t>・他の割引・キャンペーンとは併用できない</a:t>
+                      </a:r>
+                    </a:p>
+                    <a:p>
+                      <a:pPr algn="l"/>
+                      <a:r>
+                        <a:rPr sz="1200" b="0">
+                          <a:solidFill>
+                            <a:srgbClr val="333333"/>
+                          </a:solidFill>
+                          <a:latin typeface="メイリオ"/>
+                        </a:rPr>
+                        <a:t>・記載のない条件は、最新の媒体資料に準拠</a:t>
+                      </a:r>
+                    </a:p>
+                  </a:txBody>
+                  <a:tcPr anchor="ctr" marL="109728" marR="109728" marT="18288" marB="18288">
+                    <a:solidFill>
+                      <a:srgbClr val="FFFFFF"/>
+                    </a:solidFill>
+                  </a:tcPr>
+                </a:tc>
+              </a:tr>
+            </a:tbl>
+          </a:graphicData>
+        </a:graphic>
+      </p:graphicFrame>
     </p:spTree>
   </p:cSld>
   <p:clrMapOvr>

--- a/LINEOA媒体最新情報_2026年10月トレンドレポート.pptx
+++ b/LINEOA媒体最新情報_2026年10月トレンドレポート.pptx
@@ -3339,13 +3339,13 @@
             <a:avLst/>
           </a:prstGeom>
           <a:solidFill>
-            <a:schemeClr val="bg1"/>
+            <a:schemeClr val="tx2"/>
           </a:solidFill>
           <a:ln w="9525" cap="flat" cmpd="sng">
             <a:solidFill>
               <a:srgbClr val="4F81BD"/>
             </a:solidFill>
-            <a:prstDash val="sysDash"/>
+            <a:prstDash val="solid"/>
             <a:round/>
             <a:headEnd type="none" w="sm" len="sm"/>
             <a:tailEnd type="none" w="sm" len="sm"/>
@@ -3405,13 +3405,13 @@
             <a:avLst/>
           </a:prstGeom>
           <a:solidFill>
-            <a:schemeClr val="tx2"/>
+            <a:schemeClr val="bg1"/>
           </a:solidFill>
           <a:ln w="9525" cap="flat" cmpd="sng">
             <a:solidFill>
               <a:srgbClr val="4F81BD"/>
             </a:solidFill>
-            <a:prstDash val="solid"/>
+            <a:prstDash val="sysDash"/>
             <a:round/>
             <a:headEnd type="none" w="sm" len="sm"/>
             <a:tailEnd type="none" w="sm" len="sm"/>
@@ -4215,7 +4215,7 @@
               </a:avLst>
             </a:prstGeom>
             <a:solidFill>
-              <a:srgbClr val="EAEDF5"/>
+              <a:schemeClr val="lt1"/>
             </a:solidFill>
             <a:ln w="25400" cap="flat" cmpd="sng">
               <a:solidFill>
@@ -4532,7 +4532,9 @@
                 <a:gd name="adj" fmla="val 60792"/>
               </a:avLst>
             </a:prstGeom>
-            <a:noFill/>
+            <a:solidFill>
+              <a:schemeClr val="lt1"/>
+            </a:solidFill>
             <a:ln w="25400" cap="flat" cmpd="sng">
               <a:solidFill>
                 <a:schemeClr val="dk2"/>
@@ -4650,14 +4652,14 @@
       </p:pic>
       <p:sp>
         <p:nvSpPr>
-          <p:cNvPr id="63" name="Rounded Rectangle 62"/>
+          <p:cNvPr id="69" name="Rounded Rectangle 67_p10_0"/>
           <p:cNvSpPr/>
           <p:nvPr/>
         </p:nvSpPr>
         <p:spPr>
           <a:xfrm>
-            <a:off x="544108" y="3068960"/>
-            <a:ext cx="4322443" cy="1120584"/>
+            <a:off x="2319020" y="3403931"/>
+            <a:ext cx="5267960" cy="1290828"/>
           </a:xfrm>
           <a:prstGeom prst="roundRect">
             <a:avLst>
@@ -4694,14 +4696,20 @@
           <a:p>
             <a:pPr algn="l"/>
             <a:r>
-              <a:rPr sz="1900" b="1">
+              <a:rPr sz="2000" b="1" dirty="0" err="1">
                 <a:solidFill>
                   <a:srgbClr val="15133D"/>
                 </a:solidFill>
                 <a:latin typeface="メイリオ"/>
               </a:rPr>
-              <a:t>改定時期</a:t>
-            </a:r>
+              <a:t>価格（改定前 → 改定後）</a:t>
+            </a:r>
+            <a:endParaRPr sz="2000" b="1" dirty="0">
+              <a:solidFill>
+                <a:srgbClr val="15133D"/>
+              </a:solidFill>
+              <a:latin typeface="メイリオ"/>
+            </a:endParaRPr>
           </a:p>
           <a:p>
             <a:pPr algn="l">
@@ -4713,27 +4721,52 @@
               </a:spcBef>
             </a:pPr>
             <a:r>
-              <a:rPr sz="1300">
+              <a:rPr sz="1400" dirty="0" err="1">
                 <a:solidFill>
                   <a:srgbClr val="333333"/>
                 </a:solidFill>
                 <a:latin typeface="メイリオ"/>
               </a:rPr>
-              <a:t>2027年2月上旬予定。改定日以降に購入した機材から新価格が適用される。</a:t>
+              <a:t>・プリンター：37,000円 → 41,700円</a:t>
+            </a:r>
+            <a:endParaRPr lang="en-US" sz="1400" dirty="0">
+              <a:solidFill>
+                <a:srgbClr val="333333"/>
+              </a:solidFill>
+              <a:latin typeface="メイリオ"/>
+            </a:endParaRPr>
+          </a:p>
+          <a:p>
+            <a:pPr algn="l">
+              <a:lnSpc>
+                <a:spcPct val="115000"/>
+              </a:lnSpc>
+              <a:spcBef>
+                <a:spcPts val="600"/>
+              </a:spcBef>
+            </a:pPr>
+            <a:r>
+              <a:rPr sz="1400" dirty="0" err="1">
+                <a:solidFill>
+                  <a:srgbClr val="333333"/>
+                </a:solidFill>
+                <a:latin typeface="メイリオ"/>
+              </a:rPr>
+              <a:t>・キャッシュドロアー：16,000円 → 17,700円</a:t>
             </a:r>
           </a:p>
         </p:txBody>
       </p:sp>
       <p:sp>
         <p:nvSpPr>
-          <p:cNvPr id="64" name="Rounded Rectangle 63"/>
+          <p:cNvPr id="70" name="Rounded Rectangle 67_p10_1"/>
           <p:cNvSpPr/>
           <p:nvPr/>
         </p:nvSpPr>
         <p:spPr>
           <a:xfrm>
-            <a:off x="5039448" y="3068960"/>
-            <a:ext cx="4322443" cy="1120584"/>
+            <a:off x="2319020" y="4877639"/>
+            <a:ext cx="5267960" cy="1290828"/>
           </a:xfrm>
           <a:prstGeom prst="roundRect">
             <a:avLst>
@@ -4770,14 +4803,20 @@
           <a:p>
             <a:pPr algn="l"/>
             <a:r>
-              <a:rPr sz="1900" b="1">
+              <a:rPr sz="2000" b="1" dirty="0" err="1">
                 <a:solidFill>
                   <a:srgbClr val="15133D"/>
                 </a:solidFill>
                 <a:latin typeface="メイリオ"/>
               </a:rPr>
-              <a:t>対象機材</a:t>
-            </a:r>
+              <a:t>適用時期</a:t>
+            </a:r>
+            <a:endParaRPr sz="2000" b="1" dirty="0">
+              <a:solidFill>
+                <a:srgbClr val="15133D"/>
+              </a:solidFill>
+              <a:latin typeface="メイリオ"/>
+            </a:endParaRPr>
           </a:p>
           <a:p>
             <a:pPr algn="l">
@@ -4789,71 +4828,20 @@
               </a:spcBef>
             </a:pPr>
             <a:r>
-              <a:rPr sz="1300">
+              <a:rPr sz="1400" dirty="0" err="1">
                 <a:solidFill>
                   <a:srgbClr val="333333"/>
                 </a:solidFill>
                 <a:latin typeface="メイリオ"/>
               </a:rPr>
-              <a:t>EPSON製のプリンター・キャッシュドロアー。</a:t>
-            </a:r>
-          </a:p>
-        </p:txBody>
-      </p:sp>
-      <p:sp>
-        <p:nvSpPr>
-          <p:cNvPr id="65" name="Rounded Rectangle 64"/>
-          <p:cNvSpPr/>
-          <p:nvPr/>
-        </p:nvSpPr>
-        <p:spPr>
-          <a:xfrm>
-            <a:off x="544108" y="4372424"/>
-            <a:ext cx="4322443" cy="1120584"/>
-          </a:xfrm>
-          <a:prstGeom prst="roundRect">
-            <a:avLst>
-              <a:gd name="adj" fmla="val 6000"/>
-            </a:avLst>
-          </a:prstGeom>
-          <a:solidFill>
-            <a:srgbClr val="EAF0FA"/>
-          </a:solidFill>
-          <a:ln w="12700">
-            <a:solidFill>
-              <a:srgbClr val="3467B2"/>
-            </a:solidFill>
-          </a:ln>
-          <a:effectLst/>
-        </p:spPr>
-        <p:style>
-          <a:lnRef idx="1">
-            <a:schemeClr val="accent1"/>
-          </a:lnRef>
-          <a:fillRef idx="3">
-            <a:schemeClr val="accent1"/>
-          </a:fillRef>
-          <a:effectRef idx="2">
-            <a:schemeClr val="accent1"/>
-          </a:effectRef>
-          <a:fontRef idx="minor">
-            <a:schemeClr val="lt1"/>
-          </a:fontRef>
-        </p:style>
-        <p:txBody>
-          <a:bodyPr wrap="square" lIns="228600" rIns="182880" rtlCol="0" anchor="ctr"/>
-          <a:lstStyle/>
-          <a:p>
-            <a:pPr algn="l"/>
-            <a:r>
-              <a:rPr sz="1900" b="1">
-                <a:solidFill>
-                  <a:srgbClr val="15133D"/>
-                </a:solidFill>
-                <a:latin typeface="メイリオ"/>
-              </a:rPr>
-              <a:t>価格</a:t>
-            </a:r>
+              <a:t>・2027年2月上旬の予定</a:t>
+            </a:r>
+            <a:endParaRPr lang="en-US" sz="1400" dirty="0">
+              <a:solidFill>
+                <a:srgbClr val="333333"/>
+              </a:solidFill>
+              <a:latin typeface="メイリオ"/>
+            </a:endParaRPr>
           </a:p>
           <a:p>
             <a:pPr algn="l">
@@ -4865,89 +4853,13 @@
               </a:spcBef>
             </a:pPr>
             <a:r>
-              <a:rPr sz="1300">
+              <a:rPr sz="1400" dirty="0" err="1">
                 <a:solidFill>
                   <a:srgbClr val="333333"/>
                 </a:solidFill>
                 <a:latin typeface="メイリオ"/>
               </a:rPr>
-              <a:t>プリンター：37,000円→41,700円／キャッシュドロアー：16,000円→17,700円。</a:t>
-            </a:r>
-          </a:p>
-        </p:txBody>
-      </p:sp>
-      <p:sp>
-        <p:nvSpPr>
-          <p:cNvPr id="66" name="Rounded Rectangle 65"/>
-          <p:cNvSpPr/>
-          <p:nvPr/>
-        </p:nvSpPr>
-        <p:spPr>
-          <a:xfrm>
-            <a:off x="5039448" y="4372424"/>
-            <a:ext cx="4322443" cy="1120584"/>
-          </a:xfrm>
-          <a:prstGeom prst="roundRect">
-            <a:avLst>
-              <a:gd name="adj" fmla="val 6000"/>
-            </a:avLst>
-          </a:prstGeom>
-          <a:solidFill>
-            <a:srgbClr val="EAF0FA"/>
-          </a:solidFill>
-          <a:ln w="12700">
-            <a:solidFill>
-              <a:srgbClr val="3467B2"/>
-            </a:solidFill>
-          </a:ln>
-          <a:effectLst/>
-        </p:spPr>
-        <p:style>
-          <a:lnRef idx="1">
-            <a:schemeClr val="accent1"/>
-          </a:lnRef>
-          <a:fillRef idx="3">
-            <a:schemeClr val="accent1"/>
-          </a:fillRef>
-          <a:effectRef idx="2">
-            <a:schemeClr val="accent1"/>
-          </a:effectRef>
-          <a:fontRef idx="minor">
-            <a:schemeClr val="lt1"/>
-          </a:fontRef>
-        </p:style>
-        <p:txBody>
-          <a:bodyPr wrap="square" lIns="228600" rIns="182880" rtlCol="0" anchor="ctr"/>
-          <a:lstStyle/>
-          <a:p>
-            <a:pPr algn="l"/>
-            <a:r>
-              <a:rPr sz="1900" b="1">
-                <a:solidFill>
-                  <a:srgbClr val="15133D"/>
-                </a:solidFill>
-                <a:latin typeface="メイリオ"/>
-              </a:rPr>
-              <a:t>告知</a:t>
-            </a:r>
-          </a:p>
-          <a:p>
-            <a:pPr algn="l">
-              <a:lnSpc>
-                <a:spcPct val="115000"/>
-              </a:lnSpc>
-              <a:spcBef>
-                <a:spcPts val="600"/>
-              </a:spcBef>
-            </a:pPr>
-            <a:r>
-              <a:rPr sz="1300">
-                <a:solidFill>
-                  <a:srgbClr val="333333"/>
-                </a:solidFill>
-                <a:latin typeface="メイリオ"/>
-              </a:rPr>
-              <a:t>OAMの申し込み導線・AGPお知らせ・飲食CMSお知らせにも掲載予定。</a:t>
+              <a:t>・改定日以降に購入した機材から、改定後の価格になる</a:t>
             </a:r>
           </a:p>
         </p:txBody>

--- a/LINEOA媒体最新情報_2026年10月トレンドレポート.pptx
+++ b/LINEOA媒体最新情報_2026年10月トレンドレポート.pptx
@@ -19,6 +19,9 @@
     <p:sldId id="264" r:id="rId9"/>
     <p:sldId id="265" r:id="rId10"/>
     <p:sldId id="266" r:id="rId11"/>
+    <p:sldId id="270" r:id="rId27"/>
+    <p:sldId id="271" r:id="rId28"/>
+    <p:sldId id="272" r:id="rId29"/>
   </p:sldIdLst>
   <p:sldSz cx="9906000" cy="6858000" type="A4"/>
   <p:notesSz cx="6799263" cy="9929813"/>
@@ -5664,7 +5667,7 @@
                 <a:cs typeface="Meiryo"/>
                 <a:sym typeface="Meiryo"/>
               </a:rPr>
-              <a:t>CRMオプションの導入事例（タオル美術館様）が、媒体資料Ver2.0に追加された。</a:t>
+              <a:t>CRMオプションの媒体資料（Ver2.0・2026年9月更新）に、タオル美術館様の導入事例が2件追加された。</a:t>
             </a:r>
             <a:endParaRPr sz="1200" b="1">
               <a:solidFill>
@@ -5696,7 +5699,7 @@
                 <a:cs typeface="Meiryo"/>
                 <a:sym typeface="Meiryo"/>
               </a:rPr>
-              <a:t>誕生月を聞くフォームで回答数が約2.0倍、</a:t>
+              <a:t>フォームで取った情報をもとに、クーポンの配信と商品の出し分けを行った事例。</a:t>
             </a:r>
             <a:endParaRPr/>
           </a:p>
@@ -5720,7 +5723,7 @@
                 <a:cs typeface="Meiryo"/>
                 <a:sym typeface="Meiryo"/>
               </a:rPr>
-              <a:t>好きなキャラクターに合わせた出し分け配信でクリック率が約2.8倍に。</a:t>
+              <a:t>フォームの回答数は約2.0倍、配信のクリック率は約2.8倍になった。</a:t>
             </a:r>
             <a:endParaRPr sz="1400" b="1">
               <a:solidFill>
@@ -5815,7 +5818,7 @@
               </a:avLst>
             </a:prstGeom>
             <a:solidFill>
-              <a:srgbClr val="EAEDF5"/>
+              <a:schemeClr val="lt1"/>
             </a:solidFill>
             <a:ln w="25400" cap="flat" cmpd="sng">
               <a:solidFill>
@@ -6132,7 +6135,9 @@
                 <a:gd name="adj" fmla="val 60792"/>
               </a:avLst>
             </a:prstGeom>
-            <a:noFill/>
+            <a:solidFill>
+              <a:schemeClr val="dk2"/>
+            </a:solidFill>
             <a:ln w="25400" cap="flat" cmpd="sng">
               <a:solidFill>
                 <a:schemeClr val="dk2"/>
@@ -6207,7 +6212,7 @@
               <a:r>
                 <a:rPr lang="ja-JP" sz="800" b="1">
                   <a:solidFill>
-                    <a:srgbClr val="262626"/>
+                    <a:srgbClr val="FFFFFF"/>
                   </a:solidFill>
                   <a:latin typeface="Arial"/>
                   <a:ea typeface="Arial"/>
@@ -6250,14 +6255,14 @@
       </p:pic>
       <p:sp>
         <p:nvSpPr>
-          <p:cNvPr id="63" name="Rounded Rectangle 62"/>
+          <p:cNvPr id="69" name="Rounded Rectangle 67"/>
           <p:cNvSpPr/>
           <p:nvPr/>
         </p:nvSpPr>
         <p:spPr>
           <a:xfrm>
-            <a:off x="544108" y="3068960"/>
-            <a:ext cx="4322443" cy="1357915"/>
+            <a:off x="548640" y="3483179"/>
+            <a:ext cx="4315968" cy="2606040"/>
           </a:xfrm>
           <a:prstGeom prst="roundRect">
             <a:avLst>
@@ -6289,19 +6294,47 @@
           </a:fontRef>
         </p:style>
         <p:txBody>
-          <a:bodyPr wrap="square" lIns="228600" rIns="182880" rtlCol="0" anchor="ctr"/>
+          <a:bodyPr wrap="square" lIns="228600" rIns="182880" rtlCol="0" anchor="t"/>
           <a:lstStyle/>
           <a:p>
             <a:pPr algn="l"/>
             <a:r>
-              <a:rPr sz="1900" b="1">
+              <a:rPr sz="1500" b="1" dirty="0" err="1">
                 <a:solidFill>
                   <a:srgbClr val="15133D"/>
                 </a:solidFill>
                 <a:latin typeface="メイリオ"/>
               </a:rPr>
-              <a:t>① フォーム回答数 約2.0倍</a:t>
-            </a:r>
+              <a:t>① 誕生月クーポンでフォームの回答を促進</a:t>
+            </a:r>
+            <a:endParaRPr sz="2000" b="1" dirty="0">
+              <a:solidFill>
+                <a:srgbClr val="15133D"/>
+              </a:solidFill>
+              <a:latin typeface="メイリオ"/>
+            </a:endParaRPr>
+          </a:p>
+          <a:p>
+            <a:pPr algn="l">
+              <a:spcBef>
+                <a:spcPts val="0"/>
+              </a:spcBef>
+            </a:pPr>
+            <a:r>
+              <a:rPr sz="1900" b="1" dirty="0" err="1">
+                <a:solidFill>
+                  <a:srgbClr val="3467B2"/>
+                </a:solidFill>
+                <a:latin typeface="メイリオ"/>
+              </a:rPr>
+              <a:t>回答数 約2.0倍</a:t>
+            </a:r>
+            <a:endParaRPr sz="2000" b="1" dirty="0">
+              <a:solidFill>
+                <a:srgbClr val="15133D"/>
+              </a:solidFill>
+              <a:latin typeface="メイリオ"/>
+            </a:endParaRPr>
           </a:p>
           <a:p>
             <a:pPr algn="l">
@@ -6313,27 +6346,83 @@
               </a:spcBef>
             </a:pPr>
             <a:r>
-              <a:rPr sz="1300">
+              <a:rPr sz="1200" dirty="0" err="1">
                 <a:solidFill>
                   <a:srgbClr val="333333"/>
                 </a:solidFill>
                 <a:latin typeface="メイリオ"/>
               </a:rPr>
-              <a:t>リサーチ機能から、誕生月を聞くフォーム（誕生月クーポン付き）に変更。店頭チラシ・リッチメニュー・あいさつメッセージで回答を促した。</a:t>
-            </a:r>
+              <a:t>・課題：リサーチ機能でアンケートを取っていたが、回答数が伸びない</a:t>
+            </a:r>
+            <a:endParaRPr lang="en-US" sz="1400" dirty="0">
+              <a:solidFill>
+                <a:srgbClr val="333333"/>
+              </a:solidFill>
+              <a:latin typeface="メイリオ"/>
+            </a:endParaRPr>
+          </a:p>
+          <a:p>
+            <a:pPr algn="l">
+              <a:lnSpc>
+                <a:spcPct val="115000"/>
+              </a:lnSpc>
+              <a:spcBef>
+                <a:spcPts val="600"/>
+              </a:spcBef>
+            </a:pPr>
+            <a:r>
+              <a:rPr sz="1200" dirty="0" err="1">
+                <a:solidFill>
+                  <a:srgbClr val="333333"/>
+                </a:solidFill>
+                <a:latin typeface="メイリオ"/>
+              </a:rPr>
+              <a:t>・解決策：誕生月を聞くフォームを置き、回答した月ごとにクーポンを配信。店頭チラシ・リッチメニュー・あいさつメッセージで回答を促した</a:t>
+            </a:r>
+            <a:endParaRPr lang="en-US" sz="1400" dirty="0">
+              <a:solidFill>
+                <a:srgbClr val="333333"/>
+              </a:solidFill>
+              <a:latin typeface="メイリオ"/>
+            </a:endParaRPr>
+          </a:p>
+          <a:p>
+            <a:pPr algn="l">
+              <a:lnSpc>
+                <a:spcPct val="115000"/>
+              </a:lnSpc>
+              <a:spcBef>
+                <a:spcPts val="600"/>
+              </a:spcBef>
+            </a:pPr>
+            <a:r>
+              <a:rPr sz="1200" dirty="0" err="1">
+                <a:solidFill>
+                  <a:srgbClr val="333333"/>
+                </a:solidFill>
+                <a:latin typeface="メイリオ"/>
+              </a:rPr>
+              <a:t>・結果：リサーチ機能のときと比べて、ひと月あたりの回答数が約2.0倍</a:t>
+            </a:r>
+            <a:endParaRPr lang="en-US" sz="1400" dirty="0">
+              <a:solidFill>
+                <a:srgbClr val="333333"/>
+              </a:solidFill>
+              <a:latin typeface="メイリオ"/>
+            </a:endParaRPr>
           </a:p>
         </p:txBody>
       </p:sp>
       <p:sp>
         <p:nvSpPr>
-          <p:cNvPr id="65" name="Rounded Rectangle 62_add0"/>
+          <p:cNvPr id="70" name="Rounded Rectangle 67"/>
           <p:cNvSpPr/>
           <p:nvPr/>
         </p:nvSpPr>
         <p:spPr>
           <a:xfrm>
-            <a:off x="544108" y="4609755"/>
-            <a:ext cx="4322443" cy="1357915"/>
+            <a:off x="5047488" y="3483179"/>
+            <a:ext cx="4315968" cy="2606040"/>
           </a:xfrm>
           <a:prstGeom prst="roundRect">
             <a:avLst>
@@ -6365,19 +6454,47 @@
           </a:fontRef>
         </p:style>
         <p:txBody>
-          <a:bodyPr wrap="square" lIns="228600" rIns="182880" rtlCol="0" anchor="ctr"/>
+          <a:bodyPr wrap="square" lIns="228600" rIns="182880" rtlCol="0" anchor="t"/>
           <a:lstStyle/>
           <a:p>
             <a:pPr algn="l"/>
             <a:r>
-              <a:rPr sz="1900" b="1">
+              <a:rPr sz="1500" b="1" dirty="0" err="1">
                 <a:solidFill>
                   <a:srgbClr val="15133D"/>
                 </a:solidFill>
                 <a:latin typeface="メイリオ"/>
               </a:rPr>
-              <a:t>月額5,000円（税別）</a:t>
-            </a:r>
+              <a:t>② キャラクターコラボ商品の出し分け</a:t>
+            </a:r>
+            <a:endParaRPr sz="2000" b="1" dirty="0">
+              <a:solidFill>
+                <a:srgbClr val="15133D"/>
+              </a:solidFill>
+              <a:latin typeface="メイリオ"/>
+            </a:endParaRPr>
+          </a:p>
+          <a:p>
+            <a:pPr algn="l">
+              <a:spcBef>
+                <a:spcPts val="0"/>
+              </a:spcBef>
+            </a:pPr>
+            <a:r>
+              <a:rPr sz="1900" b="1" dirty="0" err="1">
+                <a:solidFill>
+                  <a:srgbClr val="3467B2"/>
+                </a:solidFill>
+                <a:latin typeface="メイリオ"/>
+              </a:rPr>
+              <a:t>クリック率 約2.8倍</a:t>
+            </a:r>
+            <a:endParaRPr sz="2000" b="1" dirty="0">
+              <a:solidFill>
+                <a:srgbClr val="15133D"/>
+              </a:solidFill>
+              <a:latin typeface="メイリオ"/>
+            </a:endParaRPr>
           </a:p>
           <a:p>
             <a:pPr algn="l">
@@ -6389,27 +6506,1462 @@
               </a:spcBef>
             </a:pPr>
             <a:r>
-              <a:rPr sz="1300">
+              <a:rPr sz="1200" dirty="0" err="1">
                 <a:solidFill>
                   <a:srgbClr val="333333"/>
                 </a:solidFill>
                 <a:latin typeface="メイリオ"/>
               </a:rPr>
-              <a:t>チャットProオプションを含む。別途LINE公式アカウントのプラン料金がかかる。初期サポート（2万円・1回）も用意。</a:t>
-            </a:r>
+              <a:t>・課題：コラボ商品を一斉配信しても、開封・クリックにつながらない</a:t>
+            </a:r>
+            <a:endParaRPr lang="en-US" sz="1400" dirty="0">
+              <a:solidFill>
+                <a:srgbClr val="333333"/>
+              </a:solidFill>
+              <a:latin typeface="メイリオ"/>
+            </a:endParaRPr>
+          </a:p>
+          <a:p>
+            <a:pPr algn="l">
+              <a:lnSpc>
+                <a:spcPct val="115000"/>
+              </a:lnSpc>
+              <a:spcBef>
+                <a:spcPts val="600"/>
+              </a:spcBef>
+            </a:pPr>
+            <a:r>
+              <a:rPr sz="1200" dirty="0" err="1">
+                <a:solidFill>
+                  <a:srgbClr val="333333"/>
+                </a:solidFill>
+                <a:latin typeface="メイリオ"/>
+              </a:rPr>
+              <a:t>・解決策：フォームの回答で好きなキャラクターのタグを付け、コラボ商品の配信を出し分け</a:t>
+            </a:r>
+            <a:endParaRPr lang="en-US" sz="1400" dirty="0">
+              <a:solidFill>
+                <a:srgbClr val="333333"/>
+              </a:solidFill>
+              <a:latin typeface="メイリオ"/>
+            </a:endParaRPr>
+          </a:p>
+          <a:p>
+            <a:pPr algn="l">
+              <a:lnSpc>
+                <a:spcPct val="115000"/>
+              </a:lnSpc>
+              <a:spcBef>
+                <a:spcPts val="600"/>
+              </a:spcBef>
+            </a:pPr>
+            <a:r>
+              <a:rPr sz="1200" dirty="0" err="1">
+                <a:solidFill>
+                  <a:srgbClr val="333333"/>
+                </a:solidFill>
+                <a:latin typeface="メイリオ"/>
+              </a:rPr>
+              <a:t>・結果：一斉配信と比べて、クリック率が約2.8倍</a:t>
+            </a:r>
+            <a:endParaRPr lang="en-US" sz="1400" dirty="0">
+              <a:solidFill>
+                <a:srgbClr val="333333"/>
+              </a:solidFill>
+              <a:latin typeface="メイリオ"/>
+            </a:endParaRPr>
           </a:p>
         </p:txBody>
       </p:sp>
+    </p:spTree>
+  </p:cSld>
+  <p:clrMapOvr>
+    <a:masterClrMapping/>
+  </p:clrMapOvr>
+</p:sld>
+</file>
+
+<file path=ppt/slides/slide12.xml><?xml version="1.0" encoding="utf-8"?>
+<p:sld xmlns:a="http://schemas.openxmlformats.org/drawingml/2006/main" xmlns:p="http://schemas.openxmlformats.org/presentationml/2006/main" xmlns:r="http://schemas.openxmlformats.org/officeDocument/2006/relationships">
+  <p:cSld>
+    <p:spTree>
+      <p:nvGrpSpPr>
+        <p:cNvPr id="1" name=""/>
+        <p:cNvGrpSpPr/>
+        <p:nvPr/>
+      </p:nvGrpSpPr>
+      <p:grpSpPr/>
       <p:sp>
         <p:nvSpPr>
-          <p:cNvPr id="64" name="Rounded Rectangle 63"/>
+          <p:cNvPr id="40" name="Google Shape;40;p3"/>
           <p:cNvSpPr/>
           <p:nvPr/>
         </p:nvSpPr>
         <p:spPr>
           <a:xfrm>
-            <a:off x="5039448" y="3068960"/>
-            <a:ext cx="4322443" cy="1357915"/>
+            <a:off x="292801" y="730955"/>
+            <a:ext cx="1296144" cy="435690"/>
+          </a:xfrm>
+          <a:prstGeom prst="rect">
+            <a:avLst/>
+          </a:prstGeom>
+          <a:solidFill>
+            <a:schemeClr val="dk2"/>
+          </a:solidFill>
+          <a:ln w="9525" cap="flat" cmpd="sng">
+            <a:solidFill>
+              <a:srgbClr val="4A7DBA"/>
+            </a:solidFill>
+            <a:prstDash val="solid"/>
+            <a:round/>
+            <a:headEnd type="none" w="sm" len="sm"/>
+            <a:tailEnd type="none" w="sm" len="sm"/>
+          </a:ln>
+        </p:spPr>
+        <p:txBody>
+          <a:bodyPr spcFirstLastPara="1" wrap="square" lIns="91425" tIns="45700" rIns="91425" bIns="45700" anchor="ctr" anchorCtr="0">
+            <a:noAutofit/>
+          </a:bodyPr>
+          <a:lstStyle/>
+          <a:p>
+            <a:pPr marL="0" marR="0" lvl="0" indent="0" algn="ctr" rtl="0">
+              <a:spcBef>
+                <a:spcPts val="0"/>
+              </a:spcBef>
+              <a:spcAft>
+                <a:spcPts val="0"/>
+              </a:spcAft>
+              <a:buNone/>
+            </a:pPr>
+            <a:r>
+              <a:rPr lang="ja-JP" sz="1800" b="0" i="0" u="none" strike="noStrike" cap="none">
+                <a:solidFill>
+                  <a:schemeClr val="lt1"/>
+                </a:solidFill>
+                <a:latin typeface="メイリオ"/>
+                <a:ea typeface="Meiryo"/>
+                <a:cs typeface="Meiryo"/>
+                <a:sym typeface="Meiryo"/>
+              </a:rPr>
+              <a:t>対象業界</a:t>
+            </a:r>
+            <a:endParaRPr/>
+          </a:p>
+        </p:txBody>
+      </p:sp>
+      <p:sp>
+        <p:nvSpPr>
+          <p:cNvPr id="41" name="Google Shape;41;p3"/>
+          <p:cNvSpPr/>
+          <p:nvPr/>
+        </p:nvSpPr>
+        <p:spPr>
+          <a:xfrm>
+            <a:off x="7560840" y="730955"/>
+            <a:ext cx="829618" cy="435690"/>
+          </a:xfrm>
+          <a:prstGeom prst="rect">
+            <a:avLst/>
+          </a:prstGeom>
+          <a:solidFill>
+            <a:schemeClr val="bg1"/>
+          </a:solidFill>
+          <a:ln w="9525" cap="flat" cmpd="sng">
+            <a:solidFill>
+              <a:srgbClr val="4F81BD"/>
+            </a:solidFill>
+            <a:prstDash val="sysDash"/>
+            <a:round/>
+            <a:headEnd type="none" w="sm" len="sm"/>
+            <a:tailEnd type="none" w="sm" len="sm"/>
+          </a:ln>
+        </p:spPr>
+        <p:txBody>
+          <a:bodyPr spcFirstLastPara="1" wrap="square" lIns="91425" tIns="45700" rIns="91425" bIns="45700" anchor="ctr" anchorCtr="0">
+            <a:noAutofit/>
+          </a:bodyPr>
+          <a:lstStyle/>
+          <a:p>
+            <a:pPr marL="0" marR="0" lvl="0" indent="0" algn="ctr" rtl="0">
+              <a:spcBef>
+                <a:spcPts val="0"/>
+              </a:spcBef>
+              <a:spcAft>
+                <a:spcPts val="0"/>
+              </a:spcAft>
+              <a:buNone/>
+            </a:pPr>
+            <a:r>
+              <a:rPr lang="ja-JP" sz="1200" b="0" i="0" u="none" strike="noStrike" cap="none">
+                <a:solidFill>
+                  <a:schemeClr val="dk1"/>
+                </a:solidFill>
+                <a:latin typeface="メイリオ"/>
+                <a:ea typeface="Meiryo"/>
+                <a:cs typeface="Meiryo"/>
+                <a:sym typeface="Meiryo"/>
+              </a:rPr>
+              <a:t>その他</a:t>
+            </a:r>
+            <a:endParaRPr sz="1200" b="0" i="0" u="none" strike="noStrike" cap="none">
+              <a:solidFill>
+                <a:schemeClr val="dk1"/>
+              </a:solidFill>
+              <a:latin typeface="Meiryo"/>
+              <a:ea typeface="Meiryo"/>
+              <a:cs typeface="Meiryo"/>
+              <a:sym typeface="Meiryo"/>
+            </a:endParaRPr>
+          </a:p>
+        </p:txBody>
+      </p:sp>
+      <p:sp>
+        <p:nvSpPr>
+          <p:cNvPr id="42" name="Google Shape;42;p3"/>
+          <p:cNvSpPr/>
+          <p:nvPr/>
+        </p:nvSpPr>
+        <p:spPr>
+          <a:xfrm>
+            <a:off x="6679050" y="730955"/>
+            <a:ext cx="829618" cy="435690"/>
+          </a:xfrm>
+          <a:prstGeom prst="rect">
+            <a:avLst/>
+          </a:prstGeom>
+          <a:solidFill>
+            <a:schemeClr val="tx2"/>
+          </a:solidFill>
+          <a:ln w="9525" cap="flat" cmpd="sng">
+            <a:solidFill>
+              <a:srgbClr val="4F81BD"/>
+            </a:solidFill>
+            <a:prstDash val="solid"/>
+            <a:round/>
+            <a:headEnd type="none" w="sm" len="sm"/>
+            <a:tailEnd type="none" w="sm" len="sm"/>
+          </a:ln>
+        </p:spPr>
+        <p:txBody>
+          <a:bodyPr spcFirstLastPara="1" wrap="square" lIns="91425" tIns="45700" rIns="91425" bIns="45700" anchor="ctr" anchorCtr="0">
+            <a:noAutofit/>
+          </a:bodyPr>
+          <a:lstStyle/>
+          <a:p>
+            <a:pPr marL="0" marR="0" lvl="0" indent="0" algn="ctr" rtl="0">
+              <a:spcBef>
+                <a:spcPts val="0"/>
+              </a:spcBef>
+              <a:spcAft>
+                <a:spcPts val="0"/>
+              </a:spcAft>
+              <a:buNone/>
+            </a:pPr>
+            <a:r>
+              <a:rPr lang="ja-JP" sz="1000" b="0" i="0" u="none" strike="noStrike" cap="none">
+                <a:solidFill>
+                  <a:schemeClr val="dk1"/>
+                </a:solidFill>
+                <a:latin typeface="メイリオ"/>
+                <a:ea typeface="Meiryo"/>
+                <a:cs typeface="Meiryo"/>
+                <a:sym typeface="Meiryo"/>
+              </a:rPr>
+              <a:t>オプション</a:t>
+            </a:r>
+            <a:endParaRPr sz="1000" b="0" i="0" u="none" strike="noStrike" cap="none">
+              <a:solidFill>
+                <a:schemeClr val="dk1"/>
+              </a:solidFill>
+              <a:latin typeface="Meiryo"/>
+              <a:ea typeface="Meiryo"/>
+              <a:cs typeface="Meiryo"/>
+              <a:sym typeface="Meiryo"/>
+            </a:endParaRPr>
+          </a:p>
+          <a:p>
+            <a:pPr marL="0" marR="0" lvl="0" indent="0" algn="ctr" rtl="0">
+              <a:spcBef>
+                <a:spcPts val="0"/>
+              </a:spcBef>
+              <a:spcAft>
+                <a:spcPts val="0"/>
+              </a:spcAft>
+              <a:buNone/>
+            </a:pPr>
+            <a:r>
+              <a:rPr lang="ja-JP" sz="1000" b="0" i="0" u="none" strike="noStrike" cap="none">
+                <a:solidFill>
+                  <a:schemeClr val="dk1"/>
+                </a:solidFill>
+                <a:latin typeface="メイリオ"/>
+                <a:ea typeface="Meiryo"/>
+                <a:cs typeface="Meiryo"/>
+                <a:sym typeface="Meiryo"/>
+              </a:rPr>
+              <a:t>商材</a:t>
+            </a:r>
+            <a:endParaRPr/>
+          </a:p>
+        </p:txBody>
+      </p:sp>
+      <p:sp>
+        <p:nvSpPr>
+          <p:cNvPr id="43" name="Google Shape;43;p3"/>
+          <p:cNvSpPr/>
+          <p:nvPr/>
+        </p:nvSpPr>
+        <p:spPr>
+          <a:xfrm>
+            <a:off x="1594068" y="730955"/>
+            <a:ext cx="2926883" cy="435690"/>
+          </a:xfrm>
+          <a:prstGeom prst="rect">
+            <a:avLst/>
+          </a:prstGeom>
+          <a:noFill/>
+          <a:ln w="9525" cap="flat" cmpd="sng">
+            <a:solidFill>
+              <a:srgbClr val="4A7DBA"/>
+            </a:solidFill>
+            <a:prstDash val="solid"/>
+            <a:round/>
+            <a:headEnd type="none" w="sm" len="sm"/>
+            <a:tailEnd type="none" w="sm" len="sm"/>
+          </a:ln>
+        </p:spPr>
+        <p:txBody>
+          <a:bodyPr spcFirstLastPara="1" wrap="square" lIns="91425" tIns="45700" rIns="91425" bIns="45700" anchor="ctr" anchorCtr="0">
+            <a:noAutofit/>
+          </a:bodyPr>
+          <a:lstStyle/>
+          <a:p>
+            <a:pPr marL="0" marR="0" lvl="0" indent="0" algn="ctr" rtl="0">
+              <a:spcBef>
+                <a:spcPts val="0"/>
+              </a:spcBef>
+              <a:spcAft>
+                <a:spcPts val="0"/>
+              </a:spcAft>
+              <a:buNone/>
+            </a:pPr>
+            <a:r>
+              <a:rPr lang="ja-JP" sz="1300" b="0" i="0" u="none" strike="noStrike" cap="none">
+                <a:solidFill>
+                  <a:schemeClr val="dk1"/>
+                </a:solidFill>
+                <a:latin typeface="メイリオ"/>
+                <a:ea typeface="Meiryo"/>
+                <a:cs typeface="Meiryo"/>
+                <a:sym typeface="Meiryo"/>
+              </a:rPr>
+              <a:t>小売・アパレル・教育・サービス業</a:t>
+            </a:r>
+            <a:endParaRPr/>
+          </a:p>
+        </p:txBody>
+      </p:sp>
+      <p:sp>
+        <p:nvSpPr>
+          <p:cNvPr id="44" name="Google Shape;44;p3"/>
+          <p:cNvSpPr txBox="1"/>
+          <p:nvPr/>
+        </p:nvSpPr>
+        <p:spPr>
+          <a:xfrm>
+            <a:off x="3296816" y="6597352"/>
+            <a:ext cx="6209091" cy="215444"/>
+          </a:xfrm>
+          <a:prstGeom prst="rect">
+            <a:avLst/>
+          </a:prstGeom>
+          <a:noFill/>
+          <a:ln>
+            <a:noFill/>
+          </a:ln>
+        </p:spPr>
+        <p:txBody>
+          <a:bodyPr spcFirstLastPara="1" wrap="square" lIns="91425" tIns="45700" rIns="91425" bIns="45700" anchor="t" anchorCtr="0">
+            <a:spAutoFit/>
+          </a:bodyPr>
+          <a:lstStyle/>
+          <a:p>
+            <a:pPr marL="0" marR="0" lvl="0" indent="0" algn="l" rtl="0">
+              <a:spcBef>
+                <a:spcPts val="0"/>
+              </a:spcBef>
+              <a:spcAft>
+                <a:spcPts val="0"/>
+              </a:spcAft>
+              <a:buNone/>
+            </a:pPr>
+            <a:r>
+              <a:rPr lang="ja-JP" sz="800" b="0" i="0" u="none" strike="noStrike" cap="none">
+                <a:solidFill>
+                  <a:schemeClr val="lt1"/>
+                </a:solidFill>
+                <a:latin typeface="メイリオ"/>
+                <a:ea typeface="Meiryo"/>
+                <a:cs typeface="Meiryo"/>
+                <a:sym typeface="Meiryo"/>
+              </a:rPr>
+              <a:t>出典：代理店情報</a:t>
+            </a:r>
+            <a:endParaRPr sz="800">
+              <a:solidFill>
+                <a:schemeClr val="lt1"/>
+              </a:solidFill>
+              <a:latin typeface="Meiryo"/>
+              <a:ea typeface="Meiryo"/>
+              <a:cs typeface="Meiryo"/>
+              <a:sym typeface="Meiryo"/>
+            </a:endParaRPr>
+          </a:p>
+        </p:txBody>
+      </p:sp>
+      <p:sp>
+        <p:nvSpPr>
+          <p:cNvPr id="45" name="Google Shape;45;p3"/>
+          <p:cNvSpPr/>
+          <p:nvPr/>
+        </p:nvSpPr>
+        <p:spPr>
+          <a:xfrm>
+            <a:off x="0" y="1234746"/>
+            <a:ext cx="9906000" cy="672259"/>
+          </a:xfrm>
+          <a:prstGeom prst="rect">
+            <a:avLst/>
+          </a:prstGeom>
+          <a:solidFill>
+            <a:srgbClr val="C5D8F1"/>
+          </a:solidFill>
+          <a:ln>
+            <a:noFill/>
+          </a:ln>
+        </p:spPr>
+        <p:txBody>
+          <a:bodyPr spcFirstLastPara="1" wrap="square" lIns="91425" tIns="45700" rIns="91425" bIns="45700" anchor="ctr" anchorCtr="0">
+            <a:noAutofit/>
+          </a:bodyPr>
+          <a:lstStyle/>
+          <a:p>
+            <a:pPr marL="0" marR="0" lvl="0" indent="0" algn="ctr" rtl="0">
+              <a:spcBef>
+                <a:spcPts val="0"/>
+              </a:spcBef>
+              <a:spcAft>
+                <a:spcPts val="0"/>
+              </a:spcAft>
+              <a:buNone/>
+            </a:pPr>
+            <a:r>
+              <a:rPr lang="ja-JP" sz="1600" b="1">
+                <a:solidFill>
+                  <a:srgbClr val="004DE6"/>
+                </a:solidFill>
+                <a:latin typeface="メイリオ"/>
+                <a:ea typeface="Meiryo"/>
+                <a:cs typeface="Meiryo"/>
+                <a:sym typeface="Meiryo"/>
+              </a:rPr>
+              <a:t>　　　　　　</a:t>
+            </a:r>
+            <a:endParaRPr sz="1800" b="1">
+              <a:solidFill>
+                <a:srgbClr val="004DE6"/>
+              </a:solidFill>
+              <a:latin typeface="Meiryo"/>
+              <a:ea typeface="Meiryo"/>
+              <a:cs typeface="Meiryo"/>
+              <a:sym typeface="Meiryo"/>
+            </a:endParaRPr>
+          </a:p>
+        </p:txBody>
+      </p:sp>
+      <p:sp>
+        <p:nvSpPr>
+          <p:cNvPr id="46" name="Google Shape;46;p3"/>
+          <p:cNvSpPr/>
+          <p:nvPr/>
+        </p:nvSpPr>
+        <p:spPr>
+          <a:xfrm>
+            <a:off x="1089832" y="1437370"/>
+            <a:ext cx="7031520" cy="338554"/>
+          </a:xfrm>
+          <a:prstGeom prst="rect">
+            <a:avLst/>
+          </a:prstGeom>
+          <a:noFill/>
+          <a:ln>
+            <a:noFill/>
+          </a:ln>
+        </p:spPr>
+        <p:txBody>
+          <a:bodyPr spcFirstLastPara="1" wrap="square" lIns="91425" tIns="45700" rIns="91425" bIns="45700" anchor="t" anchorCtr="0">
+            <a:spAutoFit/>
+          </a:bodyPr>
+          <a:lstStyle/>
+          <a:p>
+            <a:pPr marL="0" marR="0" lvl="0" indent="0" algn="l" rtl="0">
+              <a:spcBef>
+                <a:spcPts val="0"/>
+              </a:spcBef>
+              <a:spcAft>
+                <a:spcPts val="0"/>
+              </a:spcAft>
+              <a:buNone/>
+            </a:pPr>
+            <a:r>
+              <a:rPr lang="ja-JP" sz="1600" b="1">
+                <a:solidFill>
+                  <a:srgbClr val="004DE6"/>
+                </a:solidFill>
+                <a:latin typeface="メイリオ"/>
+                <a:ea typeface="Meiryo"/>
+                <a:cs typeface="Meiryo"/>
+                <a:sym typeface="Meiryo"/>
+              </a:rPr>
+              <a:t>【CRMオプション】おすすめの対象とよくある悩み</a:t>
+            </a:r>
+            <a:endParaRPr sz="1600" b="1">
+              <a:solidFill>
+                <a:srgbClr val="004DE6"/>
+              </a:solidFill>
+              <a:latin typeface="Meiryo"/>
+              <a:ea typeface="Meiryo"/>
+              <a:cs typeface="Meiryo"/>
+              <a:sym typeface="Meiryo"/>
+            </a:endParaRPr>
+          </a:p>
+        </p:txBody>
+      </p:sp>
+      <p:sp>
+        <p:nvSpPr>
+          <p:cNvPr id="47" name="Google Shape;47;p3"/>
+          <p:cNvSpPr txBox="1"/>
+          <p:nvPr/>
+        </p:nvSpPr>
+        <p:spPr>
+          <a:xfrm>
+            <a:off x="182880" y="88175"/>
+            <a:ext cx="7512385" cy="365091"/>
+          </a:xfrm>
+          <a:prstGeom prst="rect">
+            <a:avLst/>
+          </a:prstGeom>
+          <a:noFill/>
+          <a:ln>
+            <a:noFill/>
+          </a:ln>
+        </p:spPr>
+        <p:txBody>
+          <a:bodyPr spcFirstLastPara="1" wrap="square" lIns="91425" tIns="72000" rIns="91425" bIns="45700" anchor="t" anchorCtr="0">
+            <a:spAutoFit/>
+          </a:bodyPr>
+          <a:lstStyle/>
+          <a:p>
+            <a:pPr marL="0" marR="0" lvl="0" indent="0" algn="l" rtl="0">
+              <a:spcBef>
+                <a:spcPts val="0"/>
+              </a:spcBef>
+              <a:spcAft>
+                <a:spcPts val="0"/>
+              </a:spcAft>
+              <a:buClr>
+                <a:schemeClr val="dk1"/>
+              </a:buClr>
+              <a:buSzPts val="1600"/>
+              <a:buFont typeface="Arial"/>
+              <a:buNone/>
+            </a:pPr>
+            <a:r>
+              <a:rPr lang="ja-JP" sz="1600" b="0" u="none">
+                <a:solidFill>
+                  <a:schemeClr val="dk1"/>
+                </a:solidFill>
+                <a:latin typeface="メイリオ"/>
+                <a:ea typeface="Meiryo"/>
+                <a:cs typeface="Meiryo"/>
+                <a:sym typeface="Meiryo"/>
+              </a:rPr>
+              <a:t>    今後のアップデート情報</a:t>
+            </a:r>
+            <a:endParaRPr sz="1600" b="0" u="none">
+              <a:solidFill>
+                <a:schemeClr val="dk1"/>
+              </a:solidFill>
+              <a:latin typeface="Meiryo"/>
+              <a:ea typeface="Meiryo"/>
+              <a:cs typeface="Meiryo"/>
+              <a:sym typeface="Meiryo"/>
+            </a:endParaRPr>
+          </a:p>
+        </p:txBody>
+      </p:sp>
+      <p:sp>
+        <p:nvSpPr>
+          <p:cNvPr id="48" name="Google Shape;48;p3"/>
+          <p:cNvSpPr/>
+          <p:nvPr/>
+        </p:nvSpPr>
+        <p:spPr>
+          <a:xfrm>
+            <a:off x="5797260" y="730955"/>
+            <a:ext cx="829618" cy="435690"/>
+          </a:xfrm>
+          <a:prstGeom prst="rect">
+            <a:avLst/>
+          </a:prstGeom>
+          <a:solidFill>
+            <a:schemeClr val="bg1"/>
+          </a:solidFill>
+          <a:ln w="9525" cap="flat" cmpd="sng">
+            <a:solidFill>
+              <a:srgbClr val="4F81BD"/>
+            </a:solidFill>
+            <a:prstDash val="sysDash"/>
+            <a:round/>
+            <a:headEnd type="none" w="sm" len="sm"/>
+            <a:tailEnd type="none" w="sm" len="sm"/>
+          </a:ln>
+        </p:spPr>
+        <p:txBody>
+          <a:bodyPr spcFirstLastPara="1" wrap="square" lIns="91425" tIns="45700" rIns="91425" bIns="45700" anchor="ctr" anchorCtr="0">
+            <a:noAutofit/>
+          </a:bodyPr>
+          <a:lstStyle/>
+          <a:p>
+            <a:pPr marL="0" marR="0" lvl="0" indent="0" algn="ctr" rtl="0">
+              <a:spcBef>
+                <a:spcPts val="0"/>
+              </a:spcBef>
+              <a:spcAft>
+                <a:spcPts val="0"/>
+              </a:spcAft>
+              <a:buClr>
+                <a:schemeClr val="dk1"/>
+              </a:buClr>
+              <a:buSzPts val="1000"/>
+              <a:buFont typeface="Meiryo"/>
+              <a:buNone/>
+            </a:pPr>
+            <a:r>
+              <a:rPr lang="ja-JP" sz="1000">
+                <a:solidFill>
+                  <a:schemeClr val="dk1"/>
+                </a:solidFill>
+                <a:latin typeface="メイリオ"/>
+                <a:ea typeface="Meiryo"/>
+                <a:cs typeface="Meiryo"/>
+                <a:sym typeface="Meiryo"/>
+              </a:rPr>
+              <a:t>開発</a:t>
+            </a:r>
+            <a:endParaRPr sz="1000">
+              <a:solidFill>
+                <a:schemeClr val="dk1"/>
+              </a:solidFill>
+              <a:latin typeface="Meiryo"/>
+              <a:ea typeface="Meiryo"/>
+              <a:cs typeface="Meiryo"/>
+              <a:sym typeface="Meiryo"/>
+            </a:endParaRPr>
+          </a:p>
+          <a:p>
+            <a:pPr marL="0" marR="0" lvl="0" indent="0" algn="ctr" rtl="0">
+              <a:spcBef>
+                <a:spcPts val="0"/>
+              </a:spcBef>
+              <a:spcAft>
+                <a:spcPts val="0"/>
+              </a:spcAft>
+              <a:buClr>
+                <a:schemeClr val="dk1"/>
+              </a:buClr>
+              <a:buSzPts val="1000"/>
+              <a:buFont typeface="Meiryo"/>
+              <a:buNone/>
+            </a:pPr>
+            <a:r>
+              <a:rPr lang="ja-JP" sz="1000">
+                <a:solidFill>
+                  <a:schemeClr val="dk1"/>
+                </a:solidFill>
+                <a:latin typeface="メイリオ"/>
+                <a:ea typeface="Meiryo"/>
+                <a:cs typeface="Meiryo"/>
+                <a:sym typeface="Meiryo"/>
+              </a:rPr>
+              <a:t>LINE API</a:t>
+            </a:r>
+            <a:endParaRPr sz="1000">
+              <a:solidFill>
+                <a:schemeClr val="dk1"/>
+              </a:solidFill>
+              <a:latin typeface="Meiryo"/>
+              <a:ea typeface="Meiryo"/>
+              <a:cs typeface="Meiryo"/>
+              <a:sym typeface="Meiryo"/>
+            </a:endParaRPr>
+          </a:p>
+        </p:txBody>
+      </p:sp>
+      <p:sp>
+        <p:nvSpPr>
+          <p:cNvPr id="49" name="Google Shape;49;p3"/>
+          <p:cNvSpPr/>
+          <p:nvPr/>
+        </p:nvSpPr>
+        <p:spPr>
+          <a:xfrm>
+            <a:off x="4915470" y="730955"/>
+            <a:ext cx="829618" cy="435690"/>
+          </a:xfrm>
+          <a:prstGeom prst="rect">
+            <a:avLst/>
+          </a:prstGeom>
+          <a:solidFill>
+            <a:schemeClr val="bg1"/>
+          </a:solidFill>
+          <a:ln w="9525" cap="flat" cmpd="sng">
+            <a:solidFill>
+              <a:srgbClr val="4F81BD"/>
+            </a:solidFill>
+            <a:prstDash val="sysDash"/>
+            <a:round/>
+            <a:headEnd type="none" w="sm" len="sm"/>
+            <a:tailEnd type="none" w="sm" len="sm"/>
+          </a:ln>
+        </p:spPr>
+        <p:txBody>
+          <a:bodyPr spcFirstLastPara="1" wrap="square" lIns="91425" tIns="45700" rIns="91425" bIns="45700" anchor="ctr" anchorCtr="0">
+            <a:noAutofit/>
+          </a:bodyPr>
+          <a:lstStyle/>
+          <a:p>
+            <a:pPr marL="0" marR="0" lvl="0" indent="0" algn="ctr" rtl="0">
+              <a:spcBef>
+                <a:spcPts val="0"/>
+              </a:spcBef>
+              <a:spcAft>
+                <a:spcPts val="0"/>
+              </a:spcAft>
+              <a:buNone/>
+            </a:pPr>
+            <a:r>
+              <a:rPr lang="ja-JP" sz="1000">
+                <a:solidFill>
+                  <a:schemeClr val="dk1"/>
+                </a:solidFill>
+                <a:latin typeface="メイリオ"/>
+                <a:ea typeface="Meiryo"/>
+                <a:cs typeface="Meiryo"/>
+                <a:sym typeface="Meiryo"/>
+              </a:rPr>
+              <a:t>LINE公式アカウント</a:t>
+            </a:r>
+            <a:endParaRPr sz="1000">
+              <a:solidFill>
+                <a:schemeClr val="dk1"/>
+              </a:solidFill>
+              <a:latin typeface="Meiryo"/>
+              <a:ea typeface="Meiryo"/>
+              <a:cs typeface="Meiryo"/>
+              <a:sym typeface="Meiryo"/>
+            </a:endParaRPr>
+          </a:p>
+        </p:txBody>
+      </p:sp>
+      <p:sp>
+        <p:nvSpPr>
+          <p:cNvPr id="50" name="Google Shape;50;p3"/>
+          <p:cNvSpPr/>
+          <p:nvPr/>
+        </p:nvSpPr>
+        <p:spPr>
+          <a:xfrm>
+            <a:off x="0" y="1890267"/>
+            <a:ext cx="9906000" cy="733579"/>
+          </a:xfrm>
+          <a:prstGeom prst="rect">
+            <a:avLst/>
+          </a:prstGeom>
+          <a:solidFill>
+            <a:srgbClr val="F2F2F2"/>
+          </a:solidFill>
+          <a:ln>
+            <a:noFill/>
+          </a:ln>
+        </p:spPr>
+        <p:txBody>
+          <a:bodyPr spcFirstLastPara="1" wrap="square" lIns="91425" tIns="45700" rIns="91425" bIns="45700" anchor="ctr" anchorCtr="0">
+            <a:noAutofit/>
+          </a:bodyPr>
+          <a:lstStyle/>
+          <a:p>
+            <a:pPr marL="0" marR="0" lvl="0" indent="0" algn="ctr" rtl="0">
+              <a:spcBef>
+                <a:spcPts val="0"/>
+              </a:spcBef>
+              <a:spcAft>
+                <a:spcPts val="0"/>
+              </a:spcAft>
+              <a:buNone/>
+            </a:pPr>
+            <a:endParaRPr sz="1200">
+              <a:solidFill>
+                <a:schemeClr val="dk1"/>
+              </a:solidFill>
+              <a:latin typeface="Meiryo"/>
+              <a:ea typeface="Meiryo"/>
+              <a:cs typeface="Meiryo"/>
+              <a:sym typeface="Meiryo"/>
+            </a:endParaRPr>
+          </a:p>
+        </p:txBody>
+      </p:sp>
+      <p:sp>
+        <p:nvSpPr>
+          <p:cNvPr id="51" name="Google Shape;51;p3"/>
+          <p:cNvSpPr/>
+          <p:nvPr/>
+        </p:nvSpPr>
+        <p:spPr>
+          <a:xfrm>
+            <a:off x="544108" y="1961282"/>
+            <a:ext cx="8817783" cy="646331"/>
+          </a:xfrm>
+          <a:prstGeom prst="rect">
+            <a:avLst/>
+          </a:prstGeom>
+          <a:noFill/>
+          <a:ln>
+            <a:noFill/>
+          </a:ln>
+        </p:spPr>
+        <p:txBody>
+          <a:bodyPr spcFirstLastPara="1" wrap="square" lIns="91425" tIns="45700" rIns="91425" bIns="45700" anchor="t" anchorCtr="0">
+            <a:spAutoFit/>
+          </a:bodyPr>
+          <a:lstStyle/>
+          <a:p>
+            <a:pPr marL="0" marR="0" lvl="0" indent="0" algn="ctr" rtl="0">
+              <a:spcBef>
+                <a:spcPts val="0"/>
+              </a:spcBef>
+              <a:spcAft>
+                <a:spcPts val="0"/>
+              </a:spcAft>
+              <a:buNone/>
+            </a:pPr>
+            <a:r>
+              <a:rPr lang="ja-JP" sz="1200" b="1">
+                <a:solidFill>
+                  <a:schemeClr val="dk1"/>
+                </a:solidFill>
+                <a:latin typeface="メイリオ"/>
+                <a:ea typeface="Meiryo"/>
+                <a:cs typeface="Meiryo"/>
+                <a:sym typeface="Meiryo"/>
+              </a:rPr>
+              <a:t>CRMオプションは、LINE公式アカウントの中で手軽に完結する顧客管理（CRM）の機能。</a:t>
+            </a:r>
+            <a:endParaRPr sz="1200" b="1">
+              <a:solidFill>
+                <a:schemeClr val="dk1"/>
+              </a:solidFill>
+              <a:latin typeface="Meiryo"/>
+              <a:ea typeface="Meiryo"/>
+              <a:cs typeface="Meiryo"/>
+              <a:sym typeface="Meiryo"/>
+            </a:endParaRPr>
+          </a:p>
+          <a:p>
+            <a:pPr marL="0" marR="0" lvl="0" indent="0" algn="ctr" rtl="0">
+              <a:spcBef>
+                <a:spcPts val="0"/>
+              </a:spcBef>
+              <a:spcAft>
+                <a:spcPts val="0"/>
+              </a:spcAft>
+              <a:buNone/>
+            </a:pPr>
+            <a:r>
+              <a:rPr lang="ja-JP" sz="1200" b="1">
+                <a:solidFill>
+                  <a:schemeClr val="dk1"/>
+                </a:solidFill>
+                <a:latin typeface="メイリオ"/>
+                <a:ea typeface="Meiryo"/>
+                <a:cs typeface="Meiryo"/>
+                <a:sym typeface="Meiryo"/>
+              </a:rPr>
+              <a:t>フォームで顧客のニーズを集め、顧客ごとにデータを整理して、顧客ごとの配信に使える。</a:t>
+            </a:r>
+            <a:endParaRPr/>
+          </a:p>
+          <a:p>
+            <a:pPr marL="0" marR="0" lvl="0" indent="0" algn="ctr" rtl="0">
+              <a:spcBef>
+                <a:spcPts val="0"/>
+              </a:spcBef>
+              <a:spcAft>
+                <a:spcPts val="0"/>
+              </a:spcAft>
+              <a:buNone/>
+            </a:pPr>
+            <a:r>
+              <a:rPr lang="ja-JP" sz="1200" b="1">
+                <a:solidFill>
+                  <a:schemeClr val="dk1"/>
+                </a:solidFill>
+                <a:latin typeface="メイリオ"/>
+                <a:ea typeface="Meiryo"/>
+                <a:cs typeface="Meiryo"/>
+                <a:sym typeface="Meiryo"/>
+              </a:rPr>
+              <a:t>月額5,000円（税別）から始められる。</a:t>
+            </a:r>
+            <a:endParaRPr sz="1400" b="1">
+              <a:solidFill>
+                <a:schemeClr val="dk1"/>
+              </a:solidFill>
+              <a:latin typeface="Meiryo"/>
+              <a:ea typeface="Meiryo"/>
+              <a:cs typeface="Meiryo"/>
+              <a:sym typeface="Meiryo"/>
+            </a:endParaRPr>
+          </a:p>
+        </p:txBody>
+      </p:sp>
+      <p:sp>
+        <p:nvSpPr>
+          <p:cNvPr id="52" name="Google Shape;52;p3"/>
+          <p:cNvSpPr/>
+          <p:nvPr/>
+        </p:nvSpPr>
+        <p:spPr>
+          <a:xfrm>
+            <a:off x="351381" y="2714173"/>
+            <a:ext cx="5200000" cy="338554"/>
+          </a:xfrm>
+          <a:prstGeom prst="rect">
+            <a:avLst/>
+          </a:prstGeom>
+          <a:noFill/>
+          <a:ln>
+            <a:noFill/>
+          </a:ln>
+        </p:spPr>
+        <p:txBody>
+          <a:bodyPr spcFirstLastPara="1" wrap="square" lIns="91425" tIns="45700" rIns="91425" bIns="45700" anchor="t" anchorCtr="0">
+            <a:noAutofit/>
+          </a:bodyPr>
+          <a:lstStyle/>
+          <a:p>
+            <a:pPr marL="0" marR="0" lvl="0" indent="0" algn="l" rtl="0">
+              <a:spcBef>
+                <a:spcPts val="0"/>
+              </a:spcBef>
+              <a:spcAft>
+                <a:spcPts val="0"/>
+              </a:spcAft>
+              <a:buNone/>
+            </a:pPr>
+            <a:r>
+              <a:rPr lang="ja-JP" sz="1400" b="1">
+                <a:solidFill>
+                  <a:srgbClr val="15133D"/>
+                </a:solidFill>
+                <a:latin typeface="メイリオ"/>
+                <a:ea typeface="Meiryo"/>
+                <a:cs typeface="Meiryo"/>
+                <a:sym typeface="Meiryo"/>
+              </a:rPr>
+              <a:t>■ 詳細</a:t>
+            </a:r>
+            <a:endParaRPr/>
+          </a:p>
+        </p:txBody>
+      </p:sp>
+      <p:grpSp>
+        <p:nvGrpSpPr>
+          <p:cNvPr id="53" name="Google Shape;53;p3"/>
+          <p:cNvGrpSpPr/>
+          <p:nvPr/>
+        </p:nvGrpSpPr>
+        <p:grpSpPr>
+          <a:xfrm>
+            <a:off x="8473303" y="730955"/>
+            <a:ext cx="1376241" cy="1131930"/>
+            <a:chOff x="0" y="0"/>
+            <a:chExt cx="1376241" cy="1131930"/>
+          </a:xfrm>
+        </p:grpSpPr>
+        <p:sp>
+          <p:nvSpPr>
+            <p:cNvPr id="54" name="Google Shape;54;p3"/>
+            <p:cNvSpPr/>
+            <p:nvPr/>
+          </p:nvSpPr>
+          <p:spPr>
+            <a:xfrm rot="10800000">
+              <a:off x="0" y="0"/>
+              <a:ext cx="1376241" cy="282982"/>
+            </a:xfrm>
+            <a:prstGeom prst="trapezoid">
+              <a:avLst>
+                <a:gd name="adj" fmla="val 60792"/>
+              </a:avLst>
+            </a:prstGeom>
+            <a:solidFill>
+              <a:schemeClr val="lt1"/>
+            </a:solidFill>
+            <a:ln w="25400" cap="flat" cmpd="sng">
+              <a:solidFill>
+                <a:schemeClr val="dk2"/>
+              </a:solidFill>
+              <a:prstDash val="solid"/>
+              <a:round/>
+              <a:headEnd type="none" w="sm" len="sm"/>
+              <a:tailEnd type="none" w="sm" len="sm"/>
+            </a:ln>
+          </p:spPr>
+          <p:txBody>
+            <a:bodyPr spcFirstLastPara="1" wrap="square" lIns="91425" tIns="91425" rIns="91425" bIns="91425" anchor="ctr" anchorCtr="0">
+              <a:noAutofit/>
+            </a:bodyPr>
+            <a:lstStyle/>
+            <a:p>
+              <a:pPr marL="0" lvl="0" indent="0" algn="l" rtl="0">
+                <a:spcBef>
+                  <a:spcPts val="0"/>
+                </a:spcBef>
+                <a:spcAft>
+                  <a:spcPts val="0"/>
+                </a:spcAft>
+                <a:buNone/>
+              </a:pPr>
+              <a:endParaRPr/>
+            </a:p>
+          </p:txBody>
+        </p:sp>
+        <p:sp>
+          <p:nvSpPr>
+            <p:cNvPr id="55" name="Google Shape;55;p3"/>
+            <p:cNvSpPr txBox="1"/>
+            <p:nvPr/>
+          </p:nvSpPr>
+          <p:spPr>
+            <a:xfrm>
+              <a:off x="240842" y="0"/>
+              <a:ext cx="894556" cy="282982"/>
+            </a:xfrm>
+            <a:prstGeom prst="rect">
+              <a:avLst/>
+            </a:prstGeom>
+            <a:noFill/>
+            <a:ln>
+              <a:noFill/>
+            </a:ln>
+          </p:spPr>
+          <p:txBody>
+            <a:bodyPr spcFirstLastPara="1" wrap="square" lIns="10150" tIns="10150" rIns="10150" bIns="10150" anchor="ctr" anchorCtr="0">
+              <a:noAutofit/>
+            </a:bodyPr>
+            <a:lstStyle/>
+            <a:p>
+              <a:pPr marL="0" marR="0" lvl="0" indent="0" algn="ctr" rtl="0">
+                <a:lnSpc>
+                  <a:spcPct val="90000"/>
+                </a:lnSpc>
+                <a:spcBef>
+                  <a:spcPts val="0"/>
+                </a:spcBef>
+                <a:spcAft>
+                  <a:spcPts val="0"/>
+                </a:spcAft>
+                <a:buClr>
+                  <a:srgbClr val="262626"/>
+                </a:buClr>
+                <a:buSzPts val="800"/>
+                <a:buFont typeface="Arial"/>
+                <a:buNone/>
+              </a:pPr>
+              <a:r>
+                <a:rPr lang="ja-JP" sz="800" b="1">
+                  <a:solidFill>
+                    <a:srgbClr val="262626"/>
+                  </a:solidFill>
+                  <a:latin typeface="Arial"/>
+                  <a:ea typeface="Arial"/>
+                  <a:cs typeface="Arial"/>
+                  <a:sym typeface="Arial"/>
+                </a:rPr>
+                <a:t>認知</a:t>
+              </a:r>
+              <a:endParaRPr/>
+            </a:p>
+          </p:txBody>
+        </p:sp>
+        <p:sp>
+          <p:nvSpPr>
+            <p:cNvPr id="56" name="Google Shape;56;p3"/>
+            <p:cNvSpPr/>
+            <p:nvPr/>
+          </p:nvSpPr>
+          <p:spPr>
+            <a:xfrm rot="10800000">
+              <a:off x="172030" y="282982"/>
+              <a:ext cx="1032180" cy="282982"/>
+            </a:xfrm>
+            <a:prstGeom prst="trapezoid">
+              <a:avLst>
+                <a:gd name="adj" fmla="val 60792"/>
+              </a:avLst>
+            </a:prstGeom>
+            <a:solidFill>
+              <a:schemeClr val="lt1"/>
+            </a:solidFill>
+            <a:ln w="25400" cap="flat" cmpd="sng">
+              <a:solidFill>
+                <a:schemeClr val="dk2"/>
+              </a:solidFill>
+              <a:prstDash val="solid"/>
+              <a:round/>
+              <a:headEnd type="none" w="sm" len="sm"/>
+              <a:tailEnd type="none" w="sm" len="sm"/>
+            </a:ln>
+          </p:spPr>
+          <p:txBody>
+            <a:bodyPr spcFirstLastPara="1" wrap="square" lIns="91425" tIns="91425" rIns="91425" bIns="91425" anchor="ctr" anchorCtr="0">
+              <a:noAutofit/>
+            </a:bodyPr>
+            <a:lstStyle/>
+            <a:p>
+              <a:pPr marL="0" lvl="0" indent="0" algn="l" rtl="0">
+                <a:spcBef>
+                  <a:spcPts val="0"/>
+                </a:spcBef>
+                <a:spcAft>
+                  <a:spcPts val="0"/>
+                </a:spcAft>
+                <a:buNone/>
+              </a:pPr>
+              <a:endParaRPr/>
+            </a:p>
+          </p:txBody>
+        </p:sp>
+        <p:sp>
+          <p:nvSpPr>
+            <p:cNvPr id="57" name="Google Shape;57;p3"/>
+            <p:cNvSpPr txBox="1"/>
+            <p:nvPr/>
+          </p:nvSpPr>
+          <p:spPr>
+            <a:xfrm>
+              <a:off x="352661" y="282982"/>
+              <a:ext cx="670917" cy="282982"/>
+            </a:xfrm>
+            <a:prstGeom prst="rect">
+              <a:avLst/>
+            </a:prstGeom>
+            <a:noFill/>
+            <a:ln>
+              <a:noFill/>
+            </a:ln>
+          </p:spPr>
+          <p:txBody>
+            <a:bodyPr spcFirstLastPara="1" wrap="square" lIns="10150" tIns="10150" rIns="10150" bIns="10150" anchor="ctr" anchorCtr="0">
+              <a:noAutofit/>
+            </a:bodyPr>
+            <a:lstStyle/>
+            <a:p>
+              <a:pPr marL="0" marR="0" lvl="0" indent="0" algn="ctr" rtl="0">
+                <a:lnSpc>
+                  <a:spcPct val="90000"/>
+                </a:lnSpc>
+                <a:spcBef>
+                  <a:spcPts val="0"/>
+                </a:spcBef>
+                <a:spcAft>
+                  <a:spcPts val="0"/>
+                </a:spcAft>
+                <a:buClr>
+                  <a:srgbClr val="262626"/>
+                </a:buClr>
+                <a:buSzPts val="800"/>
+                <a:buFont typeface="Arial"/>
+                <a:buNone/>
+              </a:pPr>
+              <a:r>
+                <a:rPr lang="ja-JP" sz="800" b="1">
+                  <a:solidFill>
+                    <a:srgbClr val="262626"/>
+                  </a:solidFill>
+                  <a:latin typeface="Arial"/>
+                  <a:ea typeface="Arial"/>
+                  <a:cs typeface="Arial"/>
+                  <a:sym typeface="Arial"/>
+                </a:rPr>
+                <a:t>検討</a:t>
+              </a:r>
+              <a:endParaRPr/>
+            </a:p>
+          </p:txBody>
+        </p:sp>
+        <p:sp>
+          <p:nvSpPr>
+            <p:cNvPr id="58" name="Google Shape;58;p3"/>
+            <p:cNvSpPr/>
+            <p:nvPr/>
+          </p:nvSpPr>
+          <p:spPr>
+            <a:xfrm rot="10800000">
+              <a:off x="344060" y="565965"/>
+              <a:ext cx="688120" cy="282982"/>
+            </a:xfrm>
+            <a:prstGeom prst="trapezoid">
+              <a:avLst>
+                <a:gd name="adj" fmla="val 60792"/>
+              </a:avLst>
+            </a:prstGeom>
+            <a:solidFill>
+              <a:schemeClr val="lt1"/>
+            </a:solidFill>
+            <a:ln w="25400" cap="flat" cmpd="sng">
+              <a:solidFill>
+                <a:schemeClr val="dk2"/>
+              </a:solidFill>
+              <a:prstDash val="solid"/>
+              <a:round/>
+              <a:headEnd type="none" w="sm" len="sm"/>
+              <a:tailEnd type="none" w="sm" len="sm"/>
+            </a:ln>
+          </p:spPr>
+          <p:txBody>
+            <a:bodyPr spcFirstLastPara="1" wrap="square" lIns="91425" tIns="91425" rIns="91425" bIns="91425" anchor="ctr" anchorCtr="0">
+              <a:noAutofit/>
+            </a:bodyPr>
+            <a:lstStyle/>
+            <a:p>
+              <a:pPr marL="0" lvl="0" indent="0" algn="l" rtl="0">
+                <a:spcBef>
+                  <a:spcPts val="0"/>
+                </a:spcBef>
+                <a:spcAft>
+                  <a:spcPts val="0"/>
+                </a:spcAft>
+                <a:buNone/>
+              </a:pPr>
+              <a:endParaRPr/>
+            </a:p>
+          </p:txBody>
+        </p:sp>
+        <p:sp>
+          <p:nvSpPr>
+            <p:cNvPr id="59" name="Google Shape;59;p3"/>
+            <p:cNvSpPr txBox="1"/>
+            <p:nvPr/>
+          </p:nvSpPr>
+          <p:spPr>
+            <a:xfrm>
+              <a:off x="464481" y="565965"/>
+              <a:ext cx="447278" cy="282982"/>
+            </a:xfrm>
+            <a:prstGeom prst="rect">
+              <a:avLst/>
+            </a:prstGeom>
+            <a:noFill/>
+            <a:ln>
+              <a:noFill/>
+            </a:ln>
+          </p:spPr>
+          <p:txBody>
+            <a:bodyPr spcFirstLastPara="1" wrap="square" lIns="10150" tIns="10150" rIns="10150" bIns="10150" anchor="ctr" anchorCtr="0">
+              <a:noAutofit/>
+            </a:bodyPr>
+            <a:lstStyle/>
+            <a:p>
+              <a:pPr marL="0" marR="0" lvl="0" indent="0" algn="ctr" rtl="0">
+                <a:lnSpc>
+                  <a:spcPct val="90000"/>
+                </a:lnSpc>
+                <a:spcBef>
+                  <a:spcPts val="0"/>
+                </a:spcBef>
+                <a:spcAft>
+                  <a:spcPts val="0"/>
+                </a:spcAft>
+                <a:buClr>
+                  <a:srgbClr val="262626"/>
+                </a:buClr>
+                <a:buSzPts val="800"/>
+                <a:buFont typeface="Arial"/>
+                <a:buNone/>
+              </a:pPr>
+              <a:r>
+                <a:rPr lang="ja-JP" sz="800" b="1">
+                  <a:solidFill>
+                    <a:srgbClr val="262626"/>
+                  </a:solidFill>
+                  <a:latin typeface="Arial"/>
+                  <a:ea typeface="Arial"/>
+                  <a:cs typeface="Arial"/>
+                  <a:sym typeface="Arial"/>
+                </a:rPr>
+                <a:t>獲得</a:t>
+              </a:r>
+              <a:endParaRPr/>
+            </a:p>
+          </p:txBody>
+        </p:sp>
+        <p:sp>
+          <p:nvSpPr>
+            <p:cNvPr id="60" name="Google Shape;60;p3"/>
+            <p:cNvSpPr/>
+            <p:nvPr/>
+          </p:nvSpPr>
+          <p:spPr>
+            <a:xfrm rot="10800000">
+              <a:off x="516090" y="848948"/>
+              <a:ext cx="344060" cy="282982"/>
+            </a:xfrm>
+            <a:prstGeom prst="trapezoid">
+              <a:avLst>
+                <a:gd name="adj" fmla="val 60792"/>
+              </a:avLst>
+            </a:prstGeom>
+            <a:solidFill>
+              <a:schemeClr val="dk2"/>
+            </a:solidFill>
+            <a:ln w="25400" cap="flat" cmpd="sng">
+              <a:solidFill>
+                <a:schemeClr val="dk2"/>
+              </a:solidFill>
+              <a:prstDash val="solid"/>
+              <a:round/>
+              <a:headEnd type="none" w="sm" len="sm"/>
+              <a:tailEnd type="none" w="sm" len="sm"/>
+            </a:ln>
+          </p:spPr>
+          <p:txBody>
+            <a:bodyPr spcFirstLastPara="1" wrap="square" lIns="91425" tIns="91425" rIns="91425" bIns="91425" anchor="ctr" anchorCtr="0">
+              <a:noAutofit/>
+            </a:bodyPr>
+            <a:lstStyle/>
+            <a:p>
+              <a:pPr marL="0" lvl="0" indent="0" algn="l" rtl="0">
+                <a:spcBef>
+                  <a:spcPts val="0"/>
+                </a:spcBef>
+                <a:spcAft>
+                  <a:spcPts val="0"/>
+                </a:spcAft>
+                <a:buNone/>
+              </a:pPr>
+              <a:endParaRPr/>
+            </a:p>
+          </p:txBody>
+        </p:sp>
+        <p:sp>
+          <p:nvSpPr>
+            <p:cNvPr id="61" name="Google Shape;61;p3"/>
+            <p:cNvSpPr txBox="1"/>
+            <p:nvPr/>
+          </p:nvSpPr>
+          <p:spPr>
+            <a:xfrm>
+              <a:off x="516090" y="848948"/>
+              <a:ext cx="344060" cy="282982"/>
+            </a:xfrm>
+            <a:prstGeom prst="rect">
+              <a:avLst/>
+            </a:prstGeom>
+            <a:noFill/>
+            <a:ln>
+              <a:noFill/>
+            </a:ln>
+          </p:spPr>
+          <p:txBody>
+            <a:bodyPr spcFirstLastPara="1" wrap="square" lIns="10150" tIns="10150" rIns="10150" bIns="10150" anchor="ctr" anchorCtr="0">
+              <a:noAutofit/>
+            </a:bodyPr>
+            <a:lstStyle/>
+            <a:p>
+              <a:pPr marL="0" marR="0" lvl="0" indent="0" algn="ctr" rtl="0">
+                <a:lnSpc>
+                  <a:spcPct val="90000"/>
+                </a:lnSpc>
+                <a:spcBef>
+                  <a:spcPts val="0"/>
+                </a:spcBef>
+                <a:spcAft>
+                  <a:spcPts val="0"/>
+                </a:spcAft>
+                <a:buClr>
+                  <a:srgbClr val="262626"/>
+                </a:buClr>
+                <a:buSzPts val="800"/>
+                <a:buFont typeface="Arial"/>
+                <a:buNone/>
+              </a:pPr>
+              <a:r>
+                <a:rPr lang="ja-JP" sz="800" b="1">
+                  <a:solidFill>
+                    <a:srgbClr val="FFFFFF"/>
+                  </a:solidFill>
+                  <a:latin typeface="Arial"/>
+                  <a:ea typeface="Arial"/>
+                  <a:cs typeface="Arial"/>
+                  <a:sym typeface="Arial"/>
+                </a:rPr>
+                <a:t>伸長</a:t>
+              </a:r>
+              <a:endParaRPr/>
+            </a:p>
+          </p:txBody>
+        </p:sp>
+      </p:grpSp>
+      <p:pic>
+        <p:nvPicPr>
+          <p:cNvPr id="62" name="Google Shape;62;p3" descr="LINE公式アカウントのロゴの使用方法とは？種類やダウンロード方法、利用時の注意点を紹介 | Mico（ミコ）"/>
+          <p:cNvPicPr preferRelativeResize="0"/>
+          <p:nvPr/>
+        </p:nvPicPr>
+        <p:blipFill rotWithShape="1">
+          <a:blip r:embed="rId2">
+            <a:alphaModFix/>
+          </a:blip>
+          <a:srcRect/>
+          <a:stretch/>
+        </p:blipFill>
+        <p:spPr>
+          <a:xfrm>
+            <a:off x="351381" y="1234746"/>
+            <a:ext cx="656177" cy="655521"/>
+          </a:xfrm>
+          <a:prstGeom prst="rect">
+            <a:avLst/>
+          </a:prstGeom>
+          <a:noFill/>
+          <a:ln>
+            <a:noFill/>
+          </a:ln>
+        </p:spPr>
+      </p:pic>
+      <p:sp>
+        <p:nvSpPr>
+          <p:cNvPr id="69" name="Rounded Rectangle 67"/>
+          <p:cNvSpPr/>
+          <p:nvPr/>
+        </p:nvSpPr>
+        <p:spPr>
+          <a:xfrm>
+            <a:off x="548640" y="3185999"/>
+            <a:ext cx="4315968" cy="1691640"/>
           </a:xfrm>
           <a:prstGeom prst="roundRect">
             <a:avLst>
@@ -6441,19 +7993,25 @@
           </a:fontRef>
         </p:style>
         <p:txBody>
-          <a:bodyPr wrap="square" lIns="228600" rIns="182880" rtlCol="0" anchor="ctr"/>
+          <a:bodyPr wrap="square" lIns="228600" rIns="182880" rtlCol="0" anchor="t"/>
           <a:lstStyle/>
           <a:p>
             <a:pPr algn="l"/>
             <a:r>
-              <a:rPr sz="1900" b="1">
+              <a:rPr sz="1600" b="1" dirty="0" err="1">
                 <a:solidFill>
                   <a:srgbClr val="15133D"/>
                 </a:solidFill>
                 <a:latin typeface="メイリオ"/>
               </a:rPr>
-              <a:t>② 配信のクリック率 約2.8倍</a:t>
-            </a:r>
+              <a:t>おすすめの対象</a:t>
+            </a:r>
+            <a:endParaRPr sz="2000" b="1" dirty="0">
+              <a:solidFill>
+                <a:srgbClr val="15133D"/>
+              </a:solidFill>
+              <a:latin typeface="メイリオ"/>
+            </a:endParaRPr>
           </a:p>
           <a:p>
             <a:pPr algn="l">
@@ -6465,27 +8023,83 @@
               </a:spcBef>
             </a:pPr>
             <a:r>
-              <a:rPr sz="1300">
+              <a:rPr sz="1200" dirty="0" err="1">
                 <a:solidFill>
                   <a:srgbClr val="333333"/>
                 </a:solidFill>
                 <a:latin typeface="メイリオ"/>
               </a:rPr>
-              <a:t>好きなキャラクターをフォームで聞いてタグを付け、コラボ商品の配信を出し分け。従来の一斉配信と比べてクリック率が約2.8倍。</a:t>
-            </a:r>
+              <a:t>・配信しているが、成果が伸び悩んでいる</a:t>
+            </a:r>
+            <a:endParaRPr lang="en-US" sz="1400" dirty="0">
+              <a:solidFill>
+                <a:srgbClr val="333333"/>
+              </a:solidFill>
+              <a:latin typeface="メイリオ"/>
+            </a:endParaRPr>
+          </a:p>
+          <a:p>
+            <a:pPr algn="l">
+              <a:lnSpc>
+                <a:spcPct val="115000"/>
+              </a:lnSpc>
+              <a:spcBef>
+                <a:spcPts val="600"/>
+              </a:spcBef>
+            </a:pPr>
+            <a:r>
+              <a:rPr sz="1200" dirty="0" err="1">
+                <a:solidFill>
+                  <a:srgbClr val="333333"/>
+                </a:solidFill>
+                <a:latin typeface="メイリオ"/>
+              </a:rPr>
+              <a:t>・顧客管理ができていない</a:t>
+            </a:r>
+            <a:endParaRPr lang="en-US" sz="1400" dirty="0">
+              <a:solidFill>
+                <a:srgbClr val="333333"/>
+              </a:solidFill>
+              <a:latin typeface="メイリオ"/>
+            </a:endParaRPr>
+          </a:p>
+          <a:p>
+            <a:pPr algn="l">
+              <a:lnSpc>
+                <a:spcPct val="115000"/>
+              </a:lnSpc>
+              <a:spcBef>
+                <a:spcPts val="600"/>
+              </a:spcBef>
+            </a:pPr>
+            <a:r>
+              <a:rPr sz="1200" dirty="0" err="1">
+                <a:solidFill>
+                  <a:srgbClr val="333333"/>
+                </a:solidFill>
+                <a:latin typeface="メイリオ"/>
+              </a:rPr>
+              <a:t>・チャット対応が中心で、配信をうまく使えていない</a:t>
+            </a:r>
+            <a:endParaRPr lang="en-US" sz="1400" dirty="0">
+              <a:solidFill>
+                <a:srgbClr val="333333"/>
+              </a:solidFill>
+              <a:latin typeface="メイリオ"/>
+            </a:endParaRPr>
           </a:p>
         </p:txBody>
       </p:sp>
       <p:sp>
         <p:nvSpPr>
-          <p:cNvPr id="66" name="Rounded Rectangle 63_add1"/>
+          <p:cNvPr id="70" name="Rounded Rectangle 67"/>
           <p:cNvSpPr/>
           <p:nvPr/>
         </p:nvSpPr>
         <p:spPr>
           <a:xfrm>
-            <a:off x="5039448" y="4609755"/>
-            <a:ext cx="4322443" cy="1357915"/>
+            <a:off x="5047488" y="3185999"/>
+            <a:ext cx="4315968" cy="1691640"/>
           </a:xfrm>
           <a:prstGeom prst="roundRect">
             <a:avLst>
@@ -6517,19 +8131,25 @@
           </a:fontRef>
         </p:style>
         <p:txBody>
-          <a:bodyPr wrap="square" lIns="228600" rIns="182880" rtlCol="0" anchor="ctr"/>
+          <a:bodyPr wrap="square" lIns="228600" rIns="182880" rtlCol="0" anchor="t"/>
           <a:lstStyle/>
           <a:p>
             <a:pPr algn="l"/>
             <a:r>
-              <a:rPr sz="1900" b="1">
+              <a:rPr sz="1600" b="1" dirty="0" err="1">
                 <a:solidFill>
                   <a:srgbClr val="15133D"/>
                 </a:solidFill>
                 <a:latin typeface="メイリオ"/>
               </a:rPr>
-              <a:t>利用条件</a:t>
-            </a:r>
+              <a:t>料金</a:t>
+            </a:r>
+            <a:endParaRPr sz="2000" b="1" dirty="0">
+              <a:solidFill>
+                <a:srgbClr val="15133D"/>
+              </a:solidFill>
+              <a:latin typeface="メイリオ"/>
+            </a:endParaRPr>
           </a:p>
           <a:p>
             <a:pPr algn="l">
@@ -6541,17 +8161,3850 @@
               </a:spcBef>
             </a:pPr>
             <a:r>
-              <a:rPr sz="1300">
+              <a:rPr sz="1200" dirty="0" err="1">
                 <a:solidFill>
                   <a:srgbClr val="333333"/>
                 </a:solidFill>
                 <a:latin typeface="メイリオ"/>
               </a:rPr>
-              <a:t>認証済みアカウントとビジネスマネージャーの接続、友だち数10万人未満が条件。レストラン・Beauty・チャットProとは同時に契約できない。</a:t>
-            </a:r>
+              <a:t>・月額5,000円（税別）</a:t>
+            </a:r>
+            <a:endParaRPr lang="en-US" sz="1400" dirty="0">
+              <a:solidFill>
+                <a:srgbClr val="333333"/>
+              </a:solidFill>
+              <a:latin typeface="メイリオ"/>
+            </a:endParaRPr>
+          </a:p>
+          <a:p>
+            <a:pPr algn="l">
+              <a:lnSpc>
+                <a:spcPct val="115000"/>
+              </a:lnSpc>
+              <a:spcBef>
+                <a:spcPts val="600"/>
+              </a:spcBef>
+            </a:pPr>
+            <a:r>
+              <a:rPr sz="1200" dirty="0" err="1">
+                <a:solidFill>
+                  <a:srgbClr val="333333"/>
+                </a:solidFill>
+                <a:latin typeface="メイリオ"/>
+              </a:rPr>
+              <a:t>・チャットProオプションを含む</a:t>
+            </a:r>
+            <a:endParaRPr lang="en-US" sz="1400" dirty="0">
+              <a:solidFill>
+                <a:srgbClr val="333333"/>
+              </a:solidFill>
+              <a:latin typeface="メイリオ"/>
+            </a:endParaRPr>
+          </a:p>
+          <a:p>
+            <a:pPr algn="l">
+              <a:lnSpc>
+                <a:spcPct val="115000"/>
+              </a:lnSpc>
+              <a:spcBef>
+                <a:spcPts val="600"/>
+              </a:spcBef>
+            </a:pPr>
+            <a:r>
+              <a:rPr sz="1200" dirty="0" err="1">
+                <a:solidFill>
+                  <a:srgbClr val="333333"/>
+                </a:solidFill>
+                <a:latin typeface="メイリオ"/>
+              </a:rPr>
+              <a:t>・LINE公式アカウントのプラン代は別途かかる</a:t>
+            </a:r>
+            <a:endParaRPr lang="en-US" sz="1400" dirty="0">
+              <a:solidFill>
+                <a:srgbClr val="333333"/>
+              </a:solidFill>
+              <a:latin typeface="メイリオ"/>
+            </a:endParaRPr>
+          </a:p>
+          <a:p>
+            <a:pPr algn="l">
+              <a:lnSpc>
+                <a:spcPct val="115000"/>
+              </a:lnSpc>
+              <a:spcBef>
+                <a:spcPts val="600"/>
+              </a:spcBef>
+            </a:pPr>
+            <a:r>
+              <a:rPr sz="1200" dirty="0" err="1">
+                <a:solidFill>
+                  <a:srgbClr val="333333"/>
+                </a:solidFill>
+                <a:latin typeface="メイリオ"/>
+              </a:rPr>
+              <a:t>・初期サポート：20,000円（税別）・1回のみ</a:t>
+            </a:r>
+            <a:endParaRPr lang="en-US" sz="1400" dirty="0">
+              <a:solidFill>
+                <a:srgbClr val="333333"/>
+              </a:solidFill>
+              <a:latin typeface="メイリオ"/>
+            </a:endParaRPr>
           </a:p>
         </p:txBody>
       </p:sp>
+      <p:sp>
+        <p:nvSpPr>
+          <p:cNvPr id="71" name="Rounded Rectangle 67"/>
+          <p:cNvSpPr/>
+          <p:nvPr/>
+        </p:nvSpPr>
+        <p:spPr>
+          <a:xfrm>
+            <a:off x="548640" y="5060519"/>
+            <a:ext cx="8814816" cy="1325880"/>
+          </a:xfrm>
+          <a:prstGeom prst="roundRect">
+            <a:avLst>
+              <a:gd name="adj" fmla="val 6000"/>
+            </a:avLst>
+          </a:prstGeom>
+          <a:solidFill>
+            <a:srgbClr val="EAF0FA"/>
+          </a:solidFill>
+          <a:ln w="12700">
+            <a:solidFill>
+              <a:srgbClr val="3467B2"/>
+            </a:solidFill>
+          </a:ln>
+          <a:effectLst/>
+        </p:spPr>
+        <p:style>
+          <a:lnRef idx="1">
+            <a:schemeClr val="accent1"/>
+          </a:lnRef>
+          <a:fillRef idx="3">
+            <a:schemeClr val="accent1"/>
+          </a:fillRef>
+          <a:effectRef idx="2">
+            <a:schemeClr val="accent1"/>
+          </a:effectRef>
+          <a:fontRef idx="minor">
+            <a:schemeClr val="lt1"/>
+          </a:fontRef>
+        </p:style>
+        <p:txBody>
+          <a:bodyPr wrap="square" lIns="228600" rIns="182880" rtlCol="0" anchor="t"/>
+          <a:lstStyle/>
+          <a:p>
+            <a:pPr algn="l"/>
+            <a:r>
+              <a:rPr sz="1600" b="1" dirty="0" err="1">
+                <a:solidFill>
+                  <a:srgbClr val="15133D"/>
+                </a:solidFill>
+                <a:latin typeface="メイリオ"/>
+              </a:rPr>
+              <a:t>よくある悩み</a:t>
+            </a:r>
+            <a:endParaRPr sz="2000" b="1" dirty="0">
+              <a:solidFill>
+                <a:srgbClr val="15133D"/>
+              </a:solidFill>
+              <a:latin typeface="メイリオ"/>
+            </a:endParaRPr>
+          </a:p>
+          <a:p>
+            <a:pPr algn="l">
+              <a:lnSpc>
+                <a:spcPct val="115000"/>
+              </a:lnSpc>
+              <a:spcBef>
+                <a:spcPts val="600"/>
+              </a:spcBef>
+            </a:pPr>
+            <a:r>
+              <a:rPr sz="1200" dirty="0" err="1">
+                <a:solidFill>
+                  <a:srgbClr val="333333"/>
+                </a:solidFill>
+                <a:latin typeface="メイリオ"/>
+              </a:rPr>
+              <a:t>・誰に送るかが曖昧：興味のある人・ない人が混ざった配信になっている</a:t>
+            </a:r>
+            <a:endParaRPr lang="en-US" sz="1400" dirty="0">
+              <a:solidFill>
+                <a:srgbClr val="333333"/>
+              </a:solidFill>
+              <a:latin typeface="メイリオ"/>
+            </a:endParaRPr>
+          </a:p>
+          <a:p>
+            <a:pPr algn="l">
+              <a:lnSpc>
+                <a:spcPct val="115000"/>
+              </a:lnSpc>
+              <a:spcBef>
+                <a:spcPts val="600"/>
+              </a:spcBef>
+            </a:pPr>
+            <a:r>
+              <a:rPr sz="1200" dirty="0" err="1">
+                <a:solidFill>
+                  <a:srgbClr val="333333"/>
+                </a:solidFill>
+                <a:latin typeface="メイリオ"/>
+              </a:rPr>
+              <a:t>・顧客情報が整理されていない：チャット・タグなどに情報が散らばっている</a:t>
+            </a:r>
+            <a:endParaRPr lang="en-US" sz="1400" dirty="0">
+              <a:solidFill>
+                <a:srgbClr val="333333"/>
+              </a:solidFill>
+              <a:latin typeface="メイリオ"/>
+            </a:endParaRPr>
+          </a:p>
+          <a:p>
+            <a:pPr algn="l">
+              <a:lnSpc>
+                <a:spcPct val="115000"/>
+              </a:lnSpc>
+              <a:spcBef>
+                <a:spcPts val="600"/>
+              </a:spcBef>
+            </a:pPr>
+            <a:r>
+              <a:rPr sz="1200" dirty="0" err="1">
+                <a:solidFill>
+                  <a:srgbClr val="333333"/>
+                </a:solidFill>
+                <a:latin typeface="メイリオ"/>
+              </a:rPr>
+              <a:t>・運用が担当者まかせ：経験や感覚に頼っていて、情報が配信に使える形で貯まっていない</a:t>
+            </a:r>
+            <a:endParaRPr lang="en-US" sz="1400" dirty="0">
+              <a:solidFill>
+                <a:srgbClr val="333333"/>
+              </a:solidFill>
+              <a:latin typeface="メイリオ"/>
+            </a:endParaRPr>
+          </a:p>
+        </p:txBody>
+      </p:sp>
+    </p:spTree>
+  </p:cSld>
+  <p:clrMapOvr>
+    <a:masterClrMapping/>
+  </p:clrMapOvr>
+</p:sld>
+</file>
+
+<file path=ppt/slides/slide13.xml><?xml version="1.0" encoding="utf-8"?>
+<p:sld xmlns:a="http://schemas.openxmlformats.org/drawingml/2006/main" xmlns:p="http://schemas.openxmlformats.org/presentationml/2006/main" xmlns:r="http://schemas.openxmlformats.org/officeDocument/2006/relationships">
+  <p:cSld>
+    <p:spTree>
+      <p:nvGrpSpPr>
+        <p:cNvPr id="1" name=""/>
+        <p:cNvGrpSpPr/>
+        <p:nvPr/>
+      </p:nvGrpSpPr>
+      <p:grpSpPr/>
+      <p:sp>
+        <p:nvSpPr>
+          <p:cNvPr id="40" name="Google Shape;40;p3"/>
+          <p:cNvSpPr/>
+          <p:nvPr/>
+        </p:nvSpPr>
+        <p:spPr>
+          <a:xfrm>
+            <a:off x="292801" y="730955"/>
+            <a:ext cx="1296144" cy="435690"/>
+          </a:xfrm>
+          <a:prstGeom prst="rect">
+            <a:avLst/>
+          </a:prstGeom>
+          <a:solidFill>
+            <a:schemeClr val="dk2"/>
+          </a:solidFill>
+          <a:ln w="9525" cap="flat" cmpd="sng">
+            <a:solidFill>
+              <a:srgbClr val="4A7DBA"/>
+            </a:solidFill>
+            <a:prstDash val="solid"/>
+            <a:round/>
+            <a:headEnd type="none" w="sm" len="sm"/>
+            <a:tailEnd type="none" w="sm" len="sm"/>
+          </a:ln>
+        </p:spPr>
+        <p:txBody>
+          <a:bodyPr spcFirstLastPara="1" wrap="square" lIns="91425" tIns="45700" rIns="91425" bIns="45700" anchor="ctr" anchorCtr="0">
+            <a:noAutofit/>
+          </a:bodyPr>
+          <a:lstStyle/>
+          <a:p>
+            <a:pPr marL="0" marR="0" lvl="0" indent="0" algn="ctr" rtl="0">
+              <a:spcBef>
+                <a:spcPts val="0"/>
+              </a:spcBef>
+              <a:spcAft>
+                <a:spcPts val="0"/>
+              </a:spcAft>
+              <a:buNone/>
+            </a:pPr>
+            <a:r>
+              <a:rPr lang="ja-JP" sz="1800" b="0" i="0" u="none" strike="noStrike" cap="none">
+                <a:solidFill>
+                  <a:schemeClr val="lt1"/>
+                </a:solidFill>
+                <a:latin typeface="メイリオ"/>
+                <a:ea typeface="Meiryo"/>
+                <a:cs typeface="Meiryo"/>
+                <a:sym typeface="Meiryo"/>
+              </a:rPr>
+              <a:t>対象業界</a:t>
+            </a:r>
+            <a:endParaRPr/>
+          </a:p>
+        </p:txBody>
+      </p:sp>
+      <p:sp>
+        <p:nvSpPr>
+          <p:cNvPr id="41" name="Google Shape;41;p3"/>
+          <p:cNvSpPr/>
+          <p:nvPr/>
+        </p:nvSpPr>
+        <p:spPr>
+          <a:xfrm>
+            <a:off x="7560840" y="730955"/>
+            <a:ext cx="829618" cy="435690"/>
+          </a:xfrm>
+          <a:prstGeom prst="rect">
+            <a:avLst/>
+          </a:prstGeom>
+          <a:solidFill>
+            <a:schemeClr val="bg1"/>
+          </a:solidFill>
+          <a:ln w="9525" cap="flat" cmpd="sng">
+            <a:solidFill>
+              <a:srgbClr val="4F81BD"/>
+            </a:solidFill>
+            <a:prstDash val="sysDash"/>
+            <a:round/>
+            <a:headEnd type="none" w="sm" len="sm"/>
+            <a:tailEnd type="none" w="sm" len="sm"/>
+          </a:ln>
+        </p:spPr>
+        <p:txBody>
+          <a:bodyPr spcFirstLastPara="1" wrap="square" lIns="91425" tIns="45700" rIns="91425" bIns="45700" anchor="ctr" anchorCtr="0">
+            <a:noAutofit/>
+          </a:bodyPr>
+          <a:lstStyle/>
+          <a:p>
+            <a:pPr marL="0" marR="0" lvl="0" indent="0" algn="ctr" rtl="0">
+              <a:spcBef>
+                <a:spcPts val="0"/>
+              </a:spcBef>
+              <a:spcAft>
+                <a:spcPts val="0"/>
+              </a:spcAft>
+              <a:buNone/>
+            </a:pPr>
+            <a:r>
+              <a:rPr lang="ja-JP" sz="1200" b="0" i="0" u="none" strike="noStrike" cap="none">
+                <a:solidFill>
+                  <a:schemeClr val="dk1"/>
+                </a:solidFill>
+                <a:latin typeface="メイリオ"/>
+                <a:ea typeface="Meiryo"/>
+                <a:cs typeface="Meiryo"/>
+                <a:sym typeface="Meiryo"/>
+              </a:rPr>
+              <a:t>その他</a:t>
+            </a:r>
+            <a:endParaRPr sz="1200" b="0" i="0" u="none" strike="noStrike" cap="none">
+              <a:solidFill>
+                <a:schemeClr val="dk1"/>
+              </a:solidFill>
+              <a:latin typeface="Meiryo"/>
+              <a:ea typeface="Meiryo"/>
+              <a:cs typeface="Meiryo"/>
+              <a:sym typeface="Meiryo"/>
+            </a:endParaRPr>
+          </a:p>
+        </p:txBody>
+      </p:sp>
+      <p:sp>
+        <p:nvSpPr>
+          <p:cNvPr id="42" name="Google Shape;42;p3"/>
+          <p:cNvSpPr/>
+          <p:nvPr/>
+        </p:nvSpPr>
+        <p:spPr>
+          <a:xfrm>
+            <a:off x="6679050" y="730955"/>
+            <a:ext cx="829618" cy="435690"/>
+          </a:xfrm>
+          <a:prstGeom prst="rect">
+            <a:avLst/>
+          </a:prstGeom>
+          <a:solidFill>
+            <a:schemeClr val="tx2"/>
+          </a:solidFill>
+          <a:ln w="9525" cap="flat" cmpd="sng">
+            <a:solidFill>
+              <a:srgbClr val="4F81BD"/>
+            </a:solidFill>
+            <a:prstDash val="solid"/>
+            <a:round/>
+            <a:headEnd type="none" w="sm" len="sm"/>
+            <a:tailEnd type="none" w="sm" len="sm"/>
+          </a:ln>
+        </p:spPr>
+        <p:txBody>
+          <a:bodyPr spcFirstLastPara="1" wrap="square" lIns="91425" tIns="45700" rIns="91425" bIns="45700" anchor="ctr" anchorCtr="0">
+            <a:noAutofit/>
+          </a:bodyPr>
+          <a:lstStyle/>
+          <a:p>
+            <a:pPr marL="0" marR="0" lvl="0" indent="0" algn="ctr" rtl="0">
+              <a:spcBef>
+                <a:spcPts val="0"/>
+              </a:spcBef>
+              <a:spcAft>
+                <a:spcPts val="0"/>
+              </a:spcAft>
+              <a:buNone/>
+            </a:pPr>
+            <a:r>
+              <a:rPr lang="ja-JP" sz="1000" b="0" i="0" u="none" strike="noStrike" cap="none">
+                <a:solidFill>
+                  <a:schemeClr val="dk1"/>
+                </a:solidFill>
+                <a:latin typeface="メイリオ"/>
+                <a:ea typeface="Meiryo"/>
+                <a:cs typeface="Meiryo"/>
+                <a:sym typeface="Meiryo"/>
+              </a:rPr>
+              <a:t>オプション</a:t>
+            </a:r>
+            <a:endParaRPr sz="1000" b="0" i="0" u="none" strike="noStrike" cap="none">
+              <a:solidFill>
+                <a:schemeClr val="dk1"/>
+              </a:solidFill>
+              <a:latin typeface="Meiryo"/>
+              <a:ea typeface="Meiryo"/>
+              <a:cs typeface="Meiryo"/>
+              <a:sym typeface="Meiryo"/>
+            </a:endParaRPr>
+          </a:p>
+          <a:p>
+            <a:pPr marL="0" marR="0" lvl="0" indent="0" algn="ctr" rtl="0">
+              <a:spcBef>
+                <a:spcPts val="0"/>
+              </a:spcBef>
+              <a:spcAft>
+                <a:spcPts val="0"/>
+              </a:spcAft>
+              <a:buNone/>
+            </a:pPr>
+            <a:r>
+              <a:rPr lang="ja-JP" sz="1000" b="0" i="0" u="none" strike="noStrike" cap="none">
+                <a:solidFill>
+                  <a:schemeClr val="dk1"/>
+                </a:solidFill>
+                <a:latin typeface="メイリオ"/>
+                <a:ea typeface="Meiryo"/>
+                <a:cs typeface="Meiryo"/>
+                <a:sym typeface="Meiryo"/>
+              </a:rPr>
+              <a:t>商材</a:t>
+            </a:r>
+            <a:endParaRPr/>
+          </a:p>
+        </p:txBody>
+      </p:sp>
+      <p:sp>
+        <p:nvSpPr>
+          <p:cNvPr id="43" name="Google Shape;43;p3"/>
+          <p:cNvSpPr/>
+          <p:nvPr/>
+        </p:nvSpPr>
+        <p:spPr>
+          <a:xfrm>
+            <a:off x="1594068" y="730955"/>
+            <a:ext cx="2926883" cy="435690"/>
+          </a:xfrm>
+          <a:prstGeom prst="rect">
+            <a:avLst/>
+          </a:prstGeom>
+          <a:noFill/>
+          <a:ln w="9525" cap="flat" cmpd="sng">
+            <a:solidFill>
+              <a:srgbClr val="4A7DBA"/>
+            </a:solidFill>
+            <a:prstDash val="solid"/>
+            <a:round/>
+            <a:headEnd type="none" w="sm" len="sm"/>
+            <a:tailEnd type="none" w="sm" len="sm"/>
+          </a:ln>
+        </p:spPr>
+        <p:txBody>
+          <a:bodyPr spcFirstLastPara="1" wrap="square" lIns="91425" tIns="45700" rIns="91425" bIns="45700" anchor="ctr" anchorCtr="0">
+            <a:noAutofit/>
+          </a:bodyPr>
+          <a:lstStyle/>
+          <a:p>
+            <a:pPr marL="0" marR="0" lvl="0" indent="0" algn="ctr" rtl="0">
+              <a:spcBef>
+                <a:spcPts val="0"/>
+              </a:spcBef>
+              <a:spcAft>
+                <a:spcPts val="0"/>
+              </a:spcAft>
+              <a:buNone/>
+            </a:pPr>
+            <a:r>
+              <a:rPr lang="ja-JP" sz="1300" b="0" i="0" u="none" strike="noStrike" cap="none">
+                <a:solidFill>
+                  <a:schemeClr val="dk1"/>
+                </a:solidFill>
+                <a:latin typeface="メイリオ"/>
+                <a:ea typeface="Meiryo"/>
+                <a:cs typeface="Meiryo"/>
+                <a:sym typeface="Meiryo"/>
+              </a:rPr>
+              <a:t>小売・アパレル・教育・サービス業</a:t>
+            </a:r>
+            <a:endParaRPr/>
+          </a:p>
+        </p:txBody>
+      </p:sp>
+      <p:sp>
+        <p:nvSpPr>
+          <p:cNvPr id="44" name="Google Shape;44;p3"/>
+          <p:cNvSpPr txBox="1"/>
+          <p:nvPr/>
+        </p:nvSpPr>
+        <p:spPr>
+          <a:xfrm>
+            <a:off x="3296816" y="6597352"/>
+            <a:ext cx="6209091" cy="215444"/>
+          </a:xfrm>
+          <a:prstGeom prst="rect">
+            <a:avLst/>
+          </a:prstGeom>
+          <a:noFill/>
+          <a:ln>
+            <a:noFill/>
+          </a:ln>
+        </p:spPr>
+        <p:txBody>
+          <a:bodyPr spcFirstLastPara="1" wrap="square" lIns="91425" tIns="45700" rIns="91425" bIns="45700" anchor="t" anchorCtr="0">
+            <a:spAutoFit/>
+          </a:bodyPr>
+          <a:lstStyle/>
+          <a:p>
+            <a:pPr marL="0" marR="0" lvl="0" indent="0" algn="l" rtl="0">
+              <a:spcBef>
+                <a:spcPts val="0"/>
+              </a:spcBef>
+              <a:spcAft>
+                <a:spcPts val="0"/>
+              </a:spcAft>
+              <a:buNone/>
+            </a:pPr>
+            <a:r>
+              <a:rPr lang="ja-JP" sz="800" b="0" i="0" u="none" strike="noStrike" cap="none">
+                <a:solidFill>
+                  <a:schemeClr val="lt1"/>
+                </a:solidFill>
+                <a:latin typeface="メイリオ"/>
+                <a:ea typeface="Meiryo"/>
+                <a:cs typeface="Meiryo"/>
+                <a:sym typeface="Meiryo"/>
+              </a:rPr>
+              <a:t>出典：代理店情報</a:t>
+            </a:r>
+            <a:endParaRPr sz="800">
+              <a:solidFill>
+                <a:schemeClr val="lt1"/>
+              </a:solidFill>
+              <a:latin typeface="Meiryo"/>
+              <a:ea typeface="Meiryo"/>
+              <a:cs typeface="Meiryo"/>
+              <a:sym typeface="Meiryo"/>
+            </a:endParaRPr>
+          </a:p>
+        </p:txBody>
+      </p:sp>
+      <p:sp>
+        <p:nvSpPr>
+          <p:cNvPr id="45" name="Google Shape;45;p3"/>
+          <p:cNvSpPr/>
+          <p:nvPr/>
+        </p:nvSpPr>
+        <p:spPr>
+          <a:xfrm>
+            <a:off x="0" y="1234746"/>
+            <a:ext cx="9906000" cy="672259"/>
+          </a:xfrm>
+          <a:prstGeom prst="rect">
+            <a:avLst/>
+          </a:prstGeom>
+          <a:solidFill>
+            <a:srgbClr val="C5D8F1"/>
+          </a:solidFill>
+          <a:ln>
+            <a:noFill/>
+          </a:ln>
+        </p:spPr>
+        <p:txBody>
+          <a:bodyPr spcFirstLastPara="1" wrap="square" lIns="91425" tIns="45700" rIns="91425" bIns="45700" anchor="ctr" anchorCtr="0">
+            <a:noAutofit/>
+          </a:bodyPr>
+          <a:lstStyle/>
+          <a:p>
+            <a:pPr marL="0" marR="0" lvl="0" indent="0" algn="ctr" rtl="0">
+              <a:spcBef>
+                <a:spcPts val="0"/>
+              </a:spcBef>
+              <a:spcAft>
+                <a:spcPts val="0"/>
+              </a:spcAft>
+              <a:buNone/>
+            </a:pPr>
+            <a:r>
+              <a:rPr lang="ja-JP" sz="1600" b="1">
+                <a:solidFill>
+                  <a:srgbClr val="004DE6"/>
+                </a:solidFill>
+                <a:latin typeface="メイリオ"/>
+                <a:ea typeface="Meiryo"/>
+                <a:cs typeface="Meiryo"/>
+                <a:sym typeface="Meiryo"/>
+              </a:rPr>
+              <a:t>　　　　　　</a:t>
+            </a:r>
+            <a:endParaRPr sz="1800" b="1">
+              <a:solidFill>
+                <a:srgbClr val="004DE6"/>
+              </a:solidFill>
+              <a:latin typeface="Meiryo"/>
+              <a:ea typeface="Meiryo"/>
+              <a:cs typeface="Meiryo"/>
+              <a:sym typeface="Meiryo"/>
+            </a:endParaRPr>
+          </a:p>
+        </p:txBody>
+      </p:sp>
+      <p:sp>
+        <p:nvSpPr>
+          <p:cNvPr id="46" name="Google Shape;46;p3"/>
+          <p:cNvSpPr/>
+          <p:nvPr/>
+        </p:nvSpPr>
+        <p:spPr>
+          <a:xfrm>
+            <a:off x="1089832" y="1437370"/>
+            <a:ext cx="7031520" cy="338554"/>
+          </a:xfrm>
+          <a:prstGeom prst="rect">
+            <a:avLst/>
+          </a:prstGeom>
+          <a:noFill/>
+          <a:ln>
+            <a:noFill/>
+          </a:ln>
+        </p:spPr>
+        <p:txBody>
+          <a:bodyPr spcFirstLastPara="1" wrap="square" lIns="91425" tIns="45700" rIns="91425" bIns="45700" anchor="t" anchorCtr="0">
+            <a:spAutoFit/>
+          </a:bodyPr>
+          <a:lstStyle/>
+          <a:p>
+            <a:pPr marL="0" marR="0" lvl="0" indent="0" algn="l" rtl="0">
+              <a:spcBef>
+                <a:spcPts val="0"/>
+              </a:spcBef>
+              <a:spcAft>
+                <a:spcPts val="0"/>
+              </a:spcAft>
+              <a:buNone/>
+            </a:pPr>
+            <a:r>
+              <a:rPr lang="ja-JP" sz="1600" b="1">
+                <a:solidFill>
+                  <a:srgbClr val="004DE6"/>
+                </a:solidFill>
+                <a:latin typeface="メイリオ"/>
+                <a:ea typeface="Meiryo"/>
+                <a:cs typeface="Meiryo"/>
+                <a:sym typeface="Meiryo"/>
+              </a:rPr>
+              <a:t>【CRMオプション】導入で変わることと4つの機能</a:t>
+            </a:r>
+            <a:endParaRPr sz="1600" b="1">
+              <a:solidFill>
+                <a:srgbClr val="004DE6"/>
+              </a:solidFill>
+              <a:latin typeface="Meiryo"/>
+              <a:ea typeface="Meiryo"/>
+              <a:cs typeface="Meiryo"/>
+              <a:sym typeface="Meiryo"/>
+            </a:endParaRPr>
+          </a:p>
+        </p:txBody>
+      </p:sp>
+      <p:sp>
+        <p:nvSpPr>
+          <p:cNvPr id="47" name="Google Shape;47;p3"/>
+          <p:cNvSpPr txBox="1"/>
+          <p:nvPr/>
+        </p:nvSpPr>
+        <p:spPr>
+          <a:xfrm>
+            <a:off x="182880" y="88175"/>
+            <a:ext cx="7512385" cy="365091"/>
+          </a:xfrm>
+          <a:prstGeom prst="rect">
+            <a:avLst/>
+          </a:prstGeom>
+          <a:noFill/>
+          <a:ln>
+            <a:noFill/>
+          </a:ln>
+        </p:spPr>
+        <p:txBody>
+          <a:bodyPr spcFirstLastPara="1" wrap="square" lIns="91425" tIns="72000" rIns="91425" bIns="45700" anchor="t" anchorCtr="0">
+            <a:spAutoFit/>
+          </a:bodyPr>
+          <a:lstStyle/>
+          <a:p>
+            <a:pPr marL="0" marR="0" lvl="0" indent="0" algn="l" rtl="0">
+              <a:spcBef>
+                <a:spcPts val="0"/>
+              </a:spcBef>
+              <a:spcAft>
+                <a:spcPts val="0"/>
+              </a:spcAft>
+              <a:buClr>
+                <a:schemeClr val="dk1"/>
+              </a:buClr>
+              <a:buSzPts val="1600"/>
+              <a:buFont typeface="Arial"/>
+              <a:buNone/>
+            </a:pPr>
+            <a:r>
+              <a:rPr lang="ja-JP" sz="1600" b="0" u="none">
+                <a:solidFill>
+                  <a:schemeClr val="dk1"/>
+                </a:solidFill>
+                <a:latin typeface="メイリオ"/>
+                <a:ea typeface="Meiryo"/>
+                <a:cs typeface="Meiryo"/>
+                <a:sym typeface="Meiryo"/>
+              </a:rPr>
+              <a:t>    今後のアップデート情報</a:t>
+            </a:r>
+            <a:endParaRPr sz="1600" b="0" u="none">
+              <a:solidFill>
+                <a:schemeClr val="dk1"/>
+              </a:solidFill>
+              <a:latin typeface="Meiryo"/>
+              <a:ea typeface="Meiryo"/>
+              <a:cs typeface="Meiryo"/>
+              <a:sym typeface="Meiryo"/>
+            </a:endParaRPr>
+          </a:p>
+        </p:txBody>
+      </p:sp>
+      <p:sp>
+        <p:nvSpPr>
+          <p:cNvPr id="48" name="Google Shape;48;p3"/>
+          <p:cNvSpPr/>
+          <p:nvPr/>
+        </p:nvSpPr>
+        <p:spPr>
+          <a:xfrm>
+            <a:off x="5797260" y="730955"/>
+            <a:ext cx="829618" cy="435690"/>
+          </a:xfrm>
+          <a:prstGeom prst="rect">
+            <a:avLst/>
+          </a:prstGeom>
+          <a:solidFill>
+            <a:schemeClr val="bg1"/>
+          </a:solidFill>
+          <a:ln w="9525" cap="flat" cmpd="sng">
+            <a:solidFill>
+              <a:srgbClr val="4F81BD"/>
+            </a:solidFill>
+            <a:prstDash val="sysDash"/>
+            <a:round/>
+            <a:headEnd type="none" w="sm" len="sm"/>
+            <a:tailEnd type="none" w="sm" len="sm"/>
+          </a:ln>
+        </p:spPr>
+        <p:txBody>
+          <a:bodyPr spcFirstLastPara="1" wrap="square" lIns="91425" tIns="45700" rIns="91425" bIns="45700" anchor="ctr" anchorCtr="0">
+            <a:noAutofit/>
+          </a:bodyPr>
+          <a:lstStyle/>
+          <a:p>
+            <a:pPr marL="0" marR="0" lvl="0" indent="0" algn="ctr" rtl="0">
+              <a:spcBef>
+                <a:spcPts val="0"/>
+              </a:spcBef>
+              <a:spcAft>
+                <a:spcPts val="0"/>
+              </a:spcAft>
+              <a:buClr>
+                <a:schemeClr val="dk1"/>
+              </a:buClr>
+              <a:buSzPts val="1000"/>
+              <a:buFont typeface="Meiryo"/>
+              <a:buNone/>
+            </a:pPr>
+            <a:r>
+              <a:rPr lang="ja-JP" sz="1000">
+                <a:solidFill>
+                  <a:schemeClr val="dk1"/>
+                </a:solidFill>
+                <a:latin typeface="メイリオ"/>
+                <a:ea typeface="Meiryo"/>
+                <a:cs typeface="Meiryo"/>
+                <a:sym typeface="Meiryo"/>
+              </a:rPr>
+              <a:t>開発</a:t>
+            </a:r>
+            <a:endParaRPr sz="1000">
+              <a:solidFill>
+                <a:schemeClr val="dk1"/>
+              </a:solidFill>
+              <a:latin typeface="Meiryo"/>
+              <a:ea typeface="Meiryo"/>
+              <a:cs typeface="Meiryo"/>
+              <a:sym typeface="Meiryo"/>
+            </a:endParaRPr>
+          </a:p>
+          <a:p>
+            <a:pPr marL="0" marR="0" lvl="0" indent="0" algn="ctr" rtl="0">
+              <a:spcBef>
+                <a:spcPts val="0"/>
+              </a:spcBef>
+              <a:spcAft>
+                <a:spcPts val="0"/>
+              </a:spcAft>
+              <a:buClr>
+                <a:schemeClr val="dk1"/>
+              </a:buClr>
+              <a:buSzPts val="1000"/>
+              <a:buFont typeface="Meiryo"/>
+              <a:buNone/>
+            </a:pPr>
+            <a:r>
+              <a:rPr lang="ja-JP" sz="1000">
+                <a:solidFill>
+                  <a:schemeClr val="dk1"/>
+                </a:solidFill>
+                <a:latin typeface="メイリオ"/>
+                <a:ea typeface="Meiryo"/>
+                <a:cs typeface="Meiryo"/>
+                <a:sym typeface="Meiryo"/>
+              </a:rPr>
+              <a:t>LINE API</a:t>
+            </a:r>
+            <a:endParaRPr sz="1000">
+              <a:solidFill>
+                <a:schemeClr val="dk1"/>
+              </a:solidFill>
+              <a:latin typeface="Meiryo"/>
+              <a:ea typeface="Meiryo"/>
+              <a:cs typeface="Meiryo"/>
+              <a:sym typeface="Meiryo"/>
+            </a:endParaRPr>
+          </a:p>
+        </p:txBody>
+      </p:sp>
+      <p:sp>
+        <p:nvSpPr>
+          <p:cNvPr id="49" name="Google Shape;49;p3"/>
+          <p:cNvSpPr/>
+          <p:nvPr/>
+        </p:nvSpPr>
+        <p:spPr>
+          <a:xfrm>
+            <a:off x="4915470" y="730955"/>
+            <a:ext cx="829618" cy="435690"/>
+          </a:xfrm>
+          <a:prstGeom prst="rect">
+            <a:avLst/>
+          </a:prstGeom>
+          <a:solidFill>
+            <a:schemeClr val="bg1"/>
+          </a:solidFill>
+          <a:ln w="9525" cap="flat" cmpd="sng">
+            <a:solidFill>
+              <a:srgbClr val="4F81BD"/>
+            </a:solidFill>
+            <a:prstDash val="sysDash"/>
+            <a:round/>
+            <a:headEnd type="none" w="sm" len="sm"/>
+            <a:tailEnd type="none" w="sm" len="sm"/>
+          </a:ln>
+        </p:spPr>
+        <p:txBody>
+          <a:bodyPr spcFirstLastPara="1" wrap="square" lIns="91425" tIns="45700" rIns="91425" bIns="45700" anchor="ctr" anchorCtr="0">
+            <a:noAutofit/>
+          </a:bodyPr>
+          <a:lstStyle/>
+          <a:p>
+            <a:pPr marL="0" marR="0" lvl="0" indent="0" algn="ctr" rtl="0">
+              <a:spcBef>
+                <a:spcPts val="0"/>
+              </a:spcBef>
+              <a:spcAft>
+                <a:spcPts val="0"/>
+              </a:spcAft>
+              <a:buNone/>
+            </a:pPr>
+            <a:r>
+              <a:rPr lang="ja-JP" sz="1000">
+                <a:solidFill>
+                  <a:schemeClr val="dk1"/>
+                </a:solidFill>
+                <a:latin typeface="メイリオ"/>
+                <a:ea typeface="Meiryo"/>
+                <a:cs typeface="Meiryo"/>
+                <a:sym typeface="Meiryo"/>
+              </a:rPr>
+              <a:t>LINE公式アカウント</a:t>
+            </a:r>
+            <a:endParaRPr sz="1000">
+              <a:solidFill>
+                <a:schemeClr val="dk1"/>
+              </a:solidFill>
+              <a:latin typeface="Meiryo"/>
+              <a:ea typeface="Meiryo"/>
+              <a:cs typeface="Meiryo"/>
+              <a:sym typeface="Meiryo"/>
+            </a:endParaRPr>
+          </a:p>
+        </p:txBody>
+      </p:sp>
+      <p:sp>
+        <p:nvSpPr>
+          <p:cNvPr id="50" name="Google Shape;50;p3"/>
+          <p:cNvSpPr/>
+          <p:nvPr/>
+        </p:nvSpPr>
+        <p:spPr>
+          <a:xfrm>
+            <a:off x="0" y="1890267"/>
+            <a:ext cx="9906000" cy="733579"/>
+          </a:xfrm>
+          <a:prstGeom prst="rect">
+            <a:avLst/>
+          </a:prstGeom>
+          <a:solidFill>
+            <a:srgbClr val="F2F2F2"/>
+          </a:solidFill>
+          <a:ln>
+            <a:noFill/>
+          </a:ln>
+        </p:spPr>
+        <p:txBody>
+          <a:bodyPr spcFirstLastPara="1" wrap="square" lIns="91425" tIns="45700" rIns="91425" bIns="45700" anchor="ctr" anchorCtr="0">
+            <a:noAutofit/>
+          </a:bodyPr>
+          <a:lstStyle/>
+          <a:p>
+            <a:pPr marL="0" marR="0" lvl="0" indent="0" algn="ctr" rtl="0">
+              <a:spcBef>
+                <a:spcPts val="0"/>
+              </a:spcBef>
+              <a:spcAft>
+                <a:spcPts val="0"/>
+              </a:spcAft>
+              <a:buNone/>
+            </a:pPr>
+            <a:endParaRPr sz="1200">
+              <a:solidFill>
+                <a:schemeClr val="dk1"/>
+              </a:solidFill>
+              <a:latin typeface="Meiryo"/>
+              <a:ea typeface="Meiryo"/>
+              <a:cs typeface="Meiryo"/>
+              <a:sym typeface="Meiryo"/>
+            </a:endParaRPr>
+          </a:p>
+        </p:txBody>
+      </p:sp>
+      <p:sp>
+        <p:nvSpPr>
+          <p:cNvPr id="51" name="Google Shape;51;p3"/>
+          <p:cNvSpPr/>
+          <p:nvPr/>
+        </p:nvSpPr>
+        <p:spPr>
+          <a:xfrm>
+            <a:off x="544108" y="1961282"/>
+            <a:ext cx="8817783" cy="646331"/>
+          </a:xfrm>
+          <a:prstGeom prst="rect">
+            <a:avLst/>
+          </a:prstGeom>
+          <a:noFill/>
+          <a:ln>
+            <a:noFill/>
+          </a:ln>
+        </p:spPr>
+        <p:txBody>
+          <a:bodyPr spcFirstLastPara="1" wrap="square" lIns="91425" tIns="45700" rIns="91425" bIns="45700" anchor="t" anchorCtr="0">
+            <a:spAutoFit/>
+          </a:bodyPr>
+          <a:lstStyle/>
+          <a:p>
+            <a:pPr marL="0" marR="0" lvl="0" indent="0" algn="ctr" rtl="0">
+              <a:spcBef>
+                <a:spcPts val="0"/>
+              </a:spcBef>
+              <a:spcAft>
+                <a:spcPts val="0"/>
+              </a:spcAft>
+              <a:buNone/>
+            </a:pPr>
+            <a:r>
+              <a:rPr lang="ja-JP" sz="1200" b="1">
+                <a:solidFill>
+                  <a:schemeClr val="dk1"/>
+                </a:solidFill>
+                <a:latin typeface="メイリオ"/>
+                <a:ea typeface="Meiryo"/>
+                <a:cs typeface="Meiryo"/>
+                <a:sym typeface="Meiryo"/>
+              </a:rPr>
+              <a:t>CRMオプションを入れると、一斉配信が中心の運用から、顧客ごとに最適な配信に変えられる。</a:t>
+            </a:r>
+            <a:endParaRPr sz="1200" b="1">
+              <a:solidFill>
+                <a:schemeClr val="dk1"/>
+              </a:solidFill>
+              <a:latin typeface="Meiryo"/>
+              <a:ea typeface="Meiryo"/>
+              <a:cs typeface="Meiryo"/>
+              <a:sym typeface="Meiryo"/>
+            </a:endParaRPr>
+          </a:p>
+          <a:p>
+            <a:pPr marL="0" marR="0" lvl="0" indent="0" algn="ctr" rtl="0">
+              <a:spcBef>
+                <a:spcPts val="0"/>
+              </a:spcBef>
+              <a:spcAft>
+                <a:spcPts val="0"/>
+              </a:spcAft>
+              <a:buNone/>
+            </a:pPr>
+            <a:r>
+              <a:rPr lang="ja-JP" sz="1200" b="1">
+                <a:solidFill>
+                  <a:schemeClr val="dk1"/>
+                </a:solidFill>
+                <a:latin typeface="メイリオ"/>
+                <a:ea typeface="Meiryo"/>
+                <a:cs typeface="Meiryo"/>
+                <a:sym typeface="Meiryo"/>
+              </a:rPr>
+              <a:t>フォーム・ユーザーリスト・ユーザーリスト配信・オートメーションの4つの機能を、</a:t>
+            </a:r>
+            <a:endParaRPr/>
+          </a:p>
+          <a:p>
+            <a:pPr marL="0" marR="0" lvl="0" indent="0" algn="ctr" rtl="0">
+              <a:spcBef>
+                <a:spcPts val="0"/>
+              </a:spcBef>
+              <a:spcAft>
+                <a:spcPts val="0"/>
+              </a:spcAft>
+              <a:buNone/>
+            </a:pPr>
+            <a:r>
+              <a:rPr lang="ja-JP" sz="1200" b="1">
+                <a:solidFill>
+                  <a:schemeClr val="dk1"/>
+                </a:solidFill>
+                <a:latin typeface="メイリオ"/>
+                <a:ea typeface="Meiryo"/>
+                <a:cs typeface="Meiryo"/>
+                <a:sym typeface="Meiryo"/>
+              </a:rPr>
+              <a:t>LINE公式アカウントの管理画面ひとつで使える。</a:t>
+            </a:r>
+            <a:endParaRPr sz="1400" b="1">
+              <a:solidFill>
+                <a:schemeClr val="dk1"/>
+              </a:solidFill>
+              <a:latin typeface="Meiryo"/>
+              <a:ea typeface="Meiryo"/>
+              <a:cs typeface="Meiryo"/>
+              <a:sym typeface="Meiryo"/>
+            </a:endParaRPr>
+          </a:p>
+        </p:txBody>
+      </p:sp>
+      <p:sp>
+        <p:nvSpPr>
+          <p:cNvPr id="52" name="Google Shape;52;p3"/>
+          <p:cNvSpPr/>
+          <p:nvPr/>
+        </p:nvSpPr>
+        <p:spPr>
+          <a:xfrm>
+            <a:off x="351381" y="2714173"/>
+            <a:ext cx="5200000" cy="338554"/>
+          </a:xfrm>
+          <a:prstGeom prst="rect">
+            <a:avLst/>
+          </a:prstGeom>
+          <a:noFill/>
+          <a:ln>
+            <a:noFill/>
+          </a:ln>
+        </p:spPr>
+        <p:txBody>
+          <a:bodyPr spcFirstLastPara="1" wrap="square" lIns="91425" tIns="45700" rIns="91425" bIns="45700" anchor="t" anchorCtr="0">
+            <a:noAutofit/>
+          </a:bodyPr>
+          <a:lstStyle/>
+          <a:p>
+            <a:pPr marL="0" marR="0" lvl="0" indent="0" algn="l" rtl="0">
+              <a:spcBef>
+                <a:spcPts val="0"/>
+              </a:spcBef>
+              <a:spcAft>
+                <a:spcPts val="0"/>
+              </a:spcAft>
+              <a:buNone/>
+            </a:pPr>
+            <a:r>
+              <a:rPr lang="ja-JP" sz="1400" b="1">
+                <a:solidFill>
+                  <a:srgbClr val="15133D"/>
+                </a:solidFill>
+                <a:latin typeface="メイリオ"/>
+                <a:ea typeface="Meiryo"/>
+                <a:cs typeface="Meiryo"/>
+                <a:sym typeface="Meiryo"/>
+              </a:rPr>
+              <a:t>■ 詳細</a:t>
+            </a:r>
+            <a:endParaRPr/>
+          </a:p>
+        </p:txBody>
+      </p:sp>
+      <p:grpSp>
+        <p:nvGrpSpPr>
+          <p:cNvPr id="53" name="Google Shape;53;p3"/>
+          <p:cNvGrpSpPr/>
+          <p:nvPr/>
+        </p:nvGrpSpPr>
+        <p:grpSpPr>
+          <a:xfrm>
+            <a:off x="8473303" y="730955"/>
+            <a:ext cx="1376241" cy="1131930"/>
+            <a:chOff x="0" y="0"/>
+            <a:chExt cx="1376241" cy="1131930"/>
+          </a:xfrm>
+        </p:grpSpPr>
+        <p:sp>
+          <p:nvSpPr>
+            <p:cNvPr id="54" name="Google Shape;54;p3"/>
+            <p:cNvSpPr/>
+            <p:nvPr/>
+          </p:nvSpPr>
+          <p:spPr>
+            <a:xfrm rot="10800000">
+              <a:off x="0" y="0"/>
+              <a:ext cx="1376241" cy="282982"/>
+            </a:xfrm>
+            <a:prstGeom prst="trapezoid">
+              <a:avLst>
+                <a:gd name="adj" fmla="val 60792"/>
+              </a:avLst>
+            </a:prstGeom>
+            <a:solidFill>
+              <a:schemeClr val="lt1"/>
+            </a:solidFill>
+            <a:ln w="25400" cap="flat" cmpd="sng">
+              <a:solidFill>
+                <a:schemeClr val="dk2"/>
+              </a:solidFill>
+              <a:prstDash val="solid"/>
+              <a:round/>
+              <a:headEnd type="none" w="sm" len="sm"/>
+              <a:tailEnd type="none" w="sm" len="sm"/>
+            </a:ln>
+          </p:spPr>
+          <p:txBody>
+            <a:bodyPr spcFirstLastPara="1" wrap="square" lIns="91425" tIns="91425" rIns="91425" bIns="91425" anchor="ctr" anchorCtr="0">
+              <a:noAutofit/>
+            </a:bodyPr>
+            <a:lstStyle/>
+            <a:p>
+              <a:pPr marL="0" lvl="0" indent="0" algn="l" rtl="0">
+                <a:spcBef>
+                  <a:spcPts val="0"/>
+                </a:spcBef>
+                <a:spcAft>
+                  <a:spcPts val="0"/>
+                </a:spcAft>
+                <a:buNone/>
+              </a:pPr>
+              <a:endParaRPr/>
+            </a:p>
+          </p:txBody>
+        </p:sp>
+        <p:sp>
+          <p:nvSpPr>
+            <p:cNvPr id="55" name="Google Shape;55;p3"/>
+            <p:cNvSpPr txBox="1"/>
+            <p:nvPr/>
+          </p:nvSpPr>
+          <p:spPr>
+            <a:xfrm>
+              <a:off x="240842" y="0"/>
+              <a:ext cx="894556" cy="282982"/>
+            </a:xfrm>
+            <a:prstGeom prst="rect">
+              <a:avLst/>
+            </a:prstGeom>
+            <a:noFill/>
+            <a:ln>
+              <a:noFill/>
+            </a:ln>
+          </p:spPr>
+          <p:txBody>
+            <a:bodyPr spcFirstLastPara="1" wrap="square" lIns="10150" tIns="10150" rIns="10150" bIns="10150" anchor="ctr" anchorCtr="0">
+              <a:noAutofit/>
+            </a:bodyPr>
+            <a:lstStyle/>
+            <a:p>
+              <a:pPr marL="0" marR="0" lvl="0" indent="0" algn="ctr" rtl="0">
+                <a:lnSpc>
+                  <a:spcPct val="90000"/>
+                </a:lnSpc>
+                <a:spcBef>
+                  <a:spcPts val="0"/>
+                </a:spcBef>
+                <a:spcAft>
+                  <a:spcPts val="0"/>
+                </a:spcAft>
+                <a:buClr>
+                  <a:srgbClr val="262626"/>
+                </a:buClr>
+                <a:buSzPts val="800"/>
+                <a:buFont typeface="Arial"/>
+                <a:buNone/>
+              </a:pPr>
+              <a:r>
+                <a:rPr lang="ja-JP" sz="800" b="1">
+                  <a:solidFill>
+                    <a:srgbClr val="262626"/>
+                  </a:solidFill>
+                  <a:latin typeface="Arial"/>
+                  <a:ea typeface="Arial"/>
+                  <a:cs typeface="Arial"/>
+                  <a:sym typeface="Arial"/>
+                </a:rPr>
+                <a:t>認知</a:t>
+              </a:r>
+              <a:endParaRPr/>
+            </a:p>
+          </p:txBody>
+        </p:sp>
+        <p:sp>
+          <p:nvSpPr>
+            <p:cNvPr id="56" name="Google Shape;56;p3"/>
+            <p:cNvSpPr/>
+            <p:nvPr/>
+          </p:nvSpPr>
+          <p:spPr>
+            <a:xfrm rot="10800000">
+              <a:off x="172030" y="282982"/>
+              <a:ext cx="1032180" cy="282982"/>
+            </a:xfrm>
+            <a:prstGeom prst="trapezoid">
+              <a:avLst>
+                <a:gd name="adj" fmla="val 60792"/>
+              </a:avLst>
+            </a:prstGeom>
+            <a:solidFill>
+              <a:schemeClr val="lt1"/>
+            </a:solidFill>
+            <a:ln w="25400" cap="flat" cmpd="sng">
+              <a:solidFill>
+                <a:schemeClr val="dk2"/>
+              </a:solidFill>
+              <a:prstDash val="solid"/>
+              <a:round/>
+              <a:headEnd type="none" w="sm" len="sm"/>
+              <a:tailEnd type="none" w="sm" len="sm"/>
+            </a:ln>
+          </p:spPr>
+          <p:txBody>
+            <a:bodyPr spcFirstLastPara="1" wrap="square" lIns="91425" tIns="91425" rIns="91425" bIns="91425" anchor="ctr" anchorCtr="0">
+              <a:noAutofit/>
+            </a:bodyPr>
+            <a:lstStyle/>
+            <a:p>
+              <a:pPr marL="0" lvl="0" indent="0" algn="l" rtl="0">
+                <a:spcBef>
+                  <a:spcPts val="0"/>
+                </a:spcBef>
+                <a:spcAft>
+                  <a:spcPts val="0"/>
+                </a:spcAft>
+                <a:buNone/>
+              </a:pPr>
+              <a:endParaRPr/>
+            </a:p>
+          </p:txBody>
+        </p:sp>
+        <p:sp>
+          <p:nvSpPr>
+            <p:cNvPr id="57" name="Google Shape;57;p3"/>
+            <p:cNvSpPr txBox="1"/>
+            <p:nvPr/>
+          </p:nvSpPr>
+          <p:spPr>
+            <a:xfrm>
+              <a:off x="352661" y="282982"/>
+              <a:ext cx="670917" cy="282982"/>
+            </a:xfrm>
+            <a:prstGeom prst="rect">
+              <a:avLst/>
+            </a:prstGeom>
+            <a:noFill/>
+            <a:ln>
+              <a:noFill/>
+            </a:ln>
+          </p:spPr>
+          <p:txBody>
+            <a:bodyPr spcFirstLastPara="1" wrap="square" lIns="10150" tIns="10150" rIns="10150" bIns="10150" anchor="ctr" anchorCtr="0">
+              <a:noAutofit/>
+            </a:bodyPr>
+            <a:lstStyle/>
+            <a:p>
+              <a:pPr marL="0" marR="0" lvl="0" indent="0" algn="ctr" rtl="0">
+                <a:lnSpc>
+                  <a:spcPct val="90000"/>
+                </a:lnSpc>
+                <a:spcBef>
+                  <a:spcPts val="0"/>
+                </a:spcBef>
+                <a:spcAft>
+                  <a:spcPts val="0"/>
+                </a:spcAft>
+                <a:buClr>
+                  <a:srgbClr val="262626"/>
+                </a:buClr>
+                <a:buSzPts val="800"/>
+                <a:buFont typeface="Arial"/>
+                <a:buNone/>
+              </a:pPr>
+              <a:r>
+                <a:rPr lang="ja-JP" sz="800" b="1">
+                  <a:solidFill>
+                    <a:srgbClr val="262626"/>
+                  </a:solidFill>
+                  <a:latin typeface="Arial"/>
+                  <a:ea typeface="Arial"/>
+                  <a:cs typeface="Arial"/>
+                  <a:sym typeface="Arial"/>
+                </a:rPr>
+                <a:t>検討</a:t>
+              </a:r>
+              <a:endParaRPr/>
+            </a:p>
+          </p:txBody>
+        </p:sp>
+        <p:sp>
+          <p:nvSpPr>
+            <p:cNvPr id="58" name="Google Shape;58;p3"/>
+            <p:cNvSpPr/>
+            <p:nvPr/>
+          </p:nvSpPr>
+          <p:spPr>
+            <a:xfrm rot="10800000">
+              <a:off x="344060" y="565965"/>
+              <a:ext cx="688120" cy="282982"/>
+            </a:xfrm>
+            <a:prstGeom prst="trapezoid">
+              <a:avLst>
+                <a:gd name="adj" fmla="val 60792"/>
+              </a:avLst>
+            </a:prstGeom>
+            <a:solidFill>
+              <a:schemeClr val="lt1"/>
+            </a:solidFill>
+            <a:ln w="25400" cap="flat" cmpd="sng">
+              <a:solidFill>
+                <a:schemeClr val="dk2"/>
+              </a:solidFill>
+              <a:prstDash val="solid"/>
+              <a:round/>
+              <a:headEnd type="none" w="sm" len="sm"/>
+              <a:tailEnd type="none" w="sm" len="sm"/>
+            </a:ln>
+          </p:spPr>
+          <p:txBody>
+            <a:bodyPr spcFirstLastPara="1" wrap="square" lIns="91425" tIns="91425" rIns="91425" bIns="91425" anchor="ctr" anchorCtr="0">
+              <a:noAutofit/>
+            </a:bodyPr>
+            <a:lstStyle/>
+            <a:p>
+              <a:pPr marL="0" lvl="0" indent="0" algn="l" rtl="0">
+                <a:spcBef>
+                  <a:spcPts val="0"/>
+                </a:spcBef>
+                <a:spcAft>
+                  <a:spcPts val="0"/>
+                </a:spcAft>
+                <a:buNone/>
+              </a:pPr>
+              <a:endParaRPr/>
+            </a:p>
+          </p:txBody>
+        </p:sp>
+        <p:sp>
+          <p:nvSpPr>
+            <p:cNvPr id="59" name="Google Shape;59;p3"/>
+            <p:cNvSpPr txBox="1"/>
+            <p:nvPr/>
+          </p:nvSpPr>
+          <p:spPr>
+            <a:xfrm>
+              <a:off x="464481" y="565965"/>
+              <a:ext cx="447278" cy="282982"/>
+            </a:xfrm>
+            <a:prstGeom prst="rect">
+              <a:avLst/>
+            </a:prstGeom>
+            <a:noFill/>
+            <a:ln>
+              <a:noFill/>
+            </a:ln>
+          </p:spPr>
+          <p:txBody>
+            <a:bodyPr spcFirstLastPara="1" wrap="square" lIns="10150" tIns="10150" rIns="10150" bIns="10150" anchor="ctr" anchorCtr="0">
+              <a:noAutofit/>
+            </a:bodyPr>
+            <a:lstStyle/>
+            <a:p>
+              <a:pPr marL="0" marR="0" lvl="0" indent="0" algn="ctr" rtl="0">
+                <a:lnSpc>
+                  <a:spcPct val="90000"/>
+                </a:lnSpc>
+                <a:spcBef>
+                  <a:spcPts val="0"/>
+                </a:spcBef>
+                <a:spcAft>
+                  <a:spcPts val="0"/>
+                </a:spcAft>
+                <a:buClr>
+                  <a:srgbClr val="262626"/>
+                </a:buClr>
+                <a:buSzPts val="800"/>
+                <a:buFont typeface="Arial"/>
+                <a:buNone/>
+              </a:pPr>
+              <a:r>
+                <a:rPr lang="ja-JP" sz="800" b="1">
+                  <a:solidFill>
+                    <a:srgbClr val="262626"/>
+                  </a:solidFill>
+                  <a:latin typeface="Arial"/>
+                  <a:ea typeface="Arial"/>
+                  <a:cs typeface="Arial"/>
+                  <a:sym typeface="Arial"/>
+                </a:rPr>
+                <a:t>獲得</a:t>
+              </a:r>
+              <a:endParaRPr/>
+            </a:p>
+          </p:txBody>
+        </p:sp>
+        <p:sp>
+          <p:nvSpPr>
+            <p:cNvPr id="60" name="Google Shape;60;p3"/>
+            <p:cNvSpPr/>
+            <p:nvPr/>
+          </p:nvSpPr>
+          <p:spPr>
+            <a:xfrm rot="10800000">
+              <a:off x="516090" y="848948"/>
+              <a:ext cx="344060" cy="282982"/>
+            </a:xfrm>
+            <a:prstGeom prst="trapezoid">
+              <a:avLst>
+                <a:gd name="adj" fmla="val 60792"/>
+              </a:avLst>
+            </a:prstGeom>
+            <a:solidFill>
+              <a:schemeClr val="dk2"/>
+            </a:solidFill>
+            <a:ln w="25400" cap="flat" cmpd="sng">
+              <a:solidFill>
+                <a:schemeClr val="dk2"/>
+              </a:solidFill>
+              <a:prstDash val="solid"/>
+              <a:round/>
+              <a:headEnd type="none" w="sm" len="sm"/>
+              <a:tailEnd type="none" w="sm" len="sm"/>
+            </a:ln>
+          </p:spPr>
+          <p:txBody>
+            <a:bodyPr spcFirstLastPara="1" wrap="square" lIns="91425" tIns="91425" rIns="91425" bIns="91425" anchor="ctr" anchorCtr="0">
+              <a:noAutofit/>
+            </a:bodyPr>
+            <a:lstStyle/>
+            <a:p>
+              <a:pPr marL="0" lvl="0" indent="0" algn="l" rtl="0">
+                <a:spcBef>
+                  <a:spcPts val="0"/>
+                </a:spcBef>
+                <a:spcAft>
+                  <a:spcPts val="0"/>
+                </a:spcAft>
+                <a:buNone/>
+              </a:pPr>
+              <a:endParaRPr/>
+            </a:p>
+          </p:txBody>
+        </p:sp>
+        <p:sp>
+          <p:nvSpPr>
+            <p:cNvPr id="61" name="Google Shape;61;p3"/>
+            <p:cNvSpPr txBox="1"/>
+            <p:nvPr/>
+          </p:nvSpPr>
+          <p:spPr>
+            <a:xfrm>
+              <a:off x="516090" y="848948"/>
+              <a:ext cx="344060" cy="282982"/>
+            </a:xfrm>
+            <a:prstGeom prst="rect">
+              <a:avLst/>
+            </a:prstGeom>
+            <a:noFill/>
+            <a:ln>
+              <a:noFill/>
+            </a:ln>
+          </p:spPr>
+          <p:txBody>
+            <a:bodyPr spcFirstLastPara="1" wrap="square" lIns="10150" tIns="10150" rIns="10150" bIns="10150" anchor="ctr" anchorCtr="0">
+              <a:noAutofit/>
+            </a:bodyPr>
+            <a:lstStyle/>
+            <a:p>
+              <a:pPr marL="0" marR="0" lvl="0" indent="0" algn="ctr" rtl="0">
+                <a:lnSpc>
+                  <a:spcPct val="90000"/>
+                </a:lnSpc>
+                <a:spcBef>
+                  <a:spcPts val="0"/>
+                </a:spcBef>
+                <a:spcAft>
+                  <a:spcPts val="0"/>
+                </a:spcAft>
+                <a:buClr>
+                  <a:srgbClr val="262626"/>
+                </a:buClr>
+                <a:buSzPts val="800"/>
+                <a:buFont typeface="Arial"/>
+                <a:buNone/>
+              </a:pPr>
+              <a:r>
+                <a:rPr lang="ja-JP" sz="800" b="1">
+                  <a:solidFill>
+                    <a:srgbClr val="FFFFFF"/>
+                  </a:solidFill>
+                  <a:latin typeface="Arial"/>
+                  <a:ea typeface="Arial"/>
+                  <a:cs typeface="Arial"/>
+                  <a:sym typeface="Arial"/>
+                </a:rPr>
+                <a:t>伸長</a:t>
+              </a:r>
+              <a:endParaRPr/>
+            </a:p>
+          </p:txBody>
+        </p:sp>
+      </p:grpSp>
+      <p:pic>
+        <p:nvPicPr>
+          <p:cNvPr id="62" name="Google Shape;62;p3" descr="LINE公式アカウントのロゴの使用方法とは？種類やダウンロード方法、利用時の注意点を紹介 | Mico（ミコ）"/>
+          <p:cNvPicPr preferRelativeResize="0"/>
+          <p:nvPr/>
+        </p:nvPicPr>
+        <p:blipFill rotWithShape="1">
+          <a:blip r:embed="rId2">
+            <a:alphaModFix/>
+          </a:blip>
+          <a:srcRect/>
+          <a:stretch/>
+        </p:blipFill>
+        <p:spPr>
+          <a:xfrm>
+            <a:off x="351381" y="1234746"/>
+            <a:ext cx="656177" cy="655521"/>
+          </a:xfrm>
+          <a:prstGeom prst="rect">
+            <a:avLst/>
+          </a:prstGeom>
+          <a:noFill/>
+          <a:ln>
+            <a:noFill/>
+          </a:ln>
+        </p:spPr>
+      </p:pic>
+      <p:graphicFrame>
+        <p:nvGraphicFramePr>
+          <p:cNvPr id="63" name="Table 62"/>
+          <p:cNvGraphicFramePr>
+            <a:graphicFrameLocks noGrp="1"/>
+          </p:cNvGraphicFramePr>
+          <p:nvPr/>
+        </p:nvGraphicFramePr>
+        <p:xfrm>
+          <a:off x="548640" y="3300299"/>
+          <a:ext cx="8814816" cy="1188720"/>
+        </p:xfrm>
+        <a:graphic>
+          <a:graphicData uri="http://schemas.openxmlformats.org/drawingml/2006/table">
+            <a:tbl>
+              <a:tblPr firstRow="1" bandRow="1">
+                <a:tableStyleId>{5C22544A-7EE6-4342-B048-85BDC9FD1C3A}</a:tableStyleId>
+              </a:tblPr>
+              <a:tblGrid>
+                <a:gridCol w="1737360"/>
+                <a:gridCol w="3538728"/>
+                <a:gridCol w="3538728"/>
+              </a:tblGrid>
+              <a:tr h="310896">
+                <a:tc>
+                  <a:txBody>
+                    <a:bodyPr/>
+                    <a:lstStyle/>
+                    <a:p>
+                      <a:pPr algn="ctr"/>
+                      <a:r>
+                        <a:rPr sz="1400" b="1">
+                          <a:solidFill>
+                            <a:srgbClr val="FFFFFF"/>
+                          </a:solidFill>
+                          <a:latin typeface="メイリオ"/>
+                        </a:rPr>
+                        <a:t>導入で変わること</a:t>
+                      </a:r>
+                    </a:p>
+                  </a:txBody>
+                  <a:tcPr anchor="ctr" marL="109728" marR="109728" marT="27432" marB="27432">
+                    <a:solidFill>
+                      <a:srgbClr val="15133D"/>
+                    </a:solidFill>
+                  </a:tcPr>
+                </a:tc>
+                <a:tc>
+                  <a:txBody>
+                    <a:bodyPr/>
+                    <a:lstStyle/>
+                    <a:p>
+                      <a:pPr algn="ctr"/>
+                      <a:r>
+                        <a:rPr sz="1400" b="1">
+                          <a:solidFill>
+                            <a:srgbClr val="FFFFFF"/>
+                          </a:solidFill>
+                          <a:latin typeface="メイリオ"/>
+                        </a:rPr>
+                        <a:t>Before</a:t>
+                      </a:r>
+                    </a:p>
+                  </a:txBody>
+                  <a:tcPr anchor="ctr" marL="109728" marR="109728" marT="27432" marB="27432">
+                    <a:solidFill>
+                      <a:srgbClr val="15133D"/>
+                    </a:solidFill>
+                  </a:tcPr>
+                </a:tc>
+                <a:tc>
+                  <a:txBody>
+                    <a:bodyPr/>
+                    <a:lstStyle/>
+                    <a:p>
+                      <a:pPr algn="ctr"/>
+                      <a:r>
+                        <a:rPr sz="1400" b="1">
+                          <a:solidFill>
+                            <a:srgbClr val="FFFFFF"/>
+                          </a:solidFill>
+                          <a:latin typeface="メイリオ"/>
+                        </a:rPr>
+                        <a:t>After</a:t>
+                      </a:r>
+                    </a:p>
+                  </a:txBody>
+                  <a:tcPr anchor="ctr" marL="109728" marR="109728" marT="27432" marB="27432">
+                    <a:solidFill>
+                      <a:srgbClr val="15133D"/>
+                    </a:solidFill>
+                  </a:tcPr>
+                </a:tc>
+              </a:tr>
+              <a:tr h="292608">
+                <a:tc>
+                  <a:txBody>
+                    <a:bodyPr/>
+                    <a:lstStyle/>
+                    <a:p>
+                      <a:pPr algn="ctr"/>
+                      <a:r>
+                        <a:rPr sz="1300" b="1">
+                          <a:solidFill>
+                            <a:srgbClr val="15133D"/>
+                          </a:solidFill>
+                          <a:latin typeface="メイリオ"/>
+                        </a:rPr>
+                        <a:t>配信の方法</a:t>
+                      </a:r>
+                    </a:p>
+                  </a:txBody>
+                  <a:tcPr anchor="ctr" marL="109728" marR="109728" marT="27432" marB="27432">
+                    <a:solidFill>
+                      <a:srgbClr val="EAF0FA"/>
+                    </a:solidFill>
+                  </a:tcPr>
+                </a:tc>
+                <a:tc>
+                  <a:txBody>
+                    <a:bodyPr/>
+                    <a:lstStyle/>
+                    <a:p>
+                      <a:pPr algn="l"/>
+                      <a:r>
+                        <a:rPr sz="1300" b="0">
+                          <a:solidFill>
+                            <a:srgbClr val="333333"/>
+                          </a:solidFill>
+                          <a:latin typeface="メイリオ"/>
+                        </a:rPr>
+                        <a:t>一斉配信が中心</a:t>
+                      </a:r>
+                    </a:p>
+                  </a:txBody>
+                  <a:tcPr anchor="ctr" marL="109728" marR="109728" marT="27432" marB="27432">
+                    <a:solidFill>
+                      <a:srgbClr val="FFFFFF"/>
+                    </a:solidFill>
+                  </a:tcPr>
+                </a:tc>
+                <a:tc>
+                  <a:txBody>
+                    <a:bodyPr/>
+                    <a:lstStyle/>
+                    <a:p>
+                      <a:pPr algn="l"/>
+                      <a:r>
+                        <a:rPr sz="1300" b="0">
+                          <a:solidFill>
+                            <a:srgbClr val="333333"/>
+                          </a:solidFill>
+                          <a:latin typeface="メイリオ"/>
+                        </a:rPr>
+                        <a:t>顧客ごとに最適な配信</a:t>
+                      </a:r>
+                    </a:p>
+                  </a:txBody>
+                  <a:tcPr anchor="ctr" marL="109728" marR="109728" marT="27432" marB="27432">
+                    <a:solidFill>
+                      <a:srgbClr val="FFFFFF"/>
+                    </a:solidFill>
+                  </a:tcPr>
+                </a:tc>
+              </a:tr>
+              <a:tr h="292608">
+                <a:tc>
+                  <a:txBody>
+                    <a:bodyPr/>
+                    <a:lstStyle/>
+                    <a:p>
+                      <a:pPr algn="ctr"/>
+                      <a:r>
+                        <a:rPr sz="1300" b="1">
+                          <a:solidFill>
+                            <a:srgbClr val="15133D"/>
+                          </a:solidFill>
+                          <a:latin typeface="メイリオ"/>
+                        </a:rPr>
+                        <a:t>顧客の理解</a:t>
+                      </a:r>
+                    </a:p>
+                  </a:txBody>
+                  <a:tcPr anchor="ctr" marL="109728" marR="109728" marT="27432" marB="27432">
+                    <a:solidFill>
+                      <a:srgbClr val="EAF0FA"/>
+                    </a:solidFill>
+                  </a:tcPr>
+                </a:tc>
+                <a:tc>
+                  <a:txBody>
+                    <a:bodyPr/>
+                    <a:lstStyle/>
+                    <a:p>
+                      <a:pPr algn="l"/>
+                      <a:r>
+                        <a:rPr sz="1300" b="0">
+                          <a:solidFill>
+                            <a:srgbClr val="333333"/>
+                          </a:solidFill>
+                          <a:latin typeface="メイリオ"/>
+                        </a:rPr>
+                        <a:t>あいまいな分類</a:t>
+                      </a:r>
+                    </a:p>
+                  </a:txBody>
+                  <a:tcPr anchor="ctr" marL="109728" marR="109728" marT="27432" marB="27432">
+                    <a:solidFill>
+                      <a:srgbClr val="FFFFFF"/>
+                    </a:solidFill>
+                  </a:tcPr>
+                </a:tc>
+                <a:tc>
+                  <a:txBody>
+                    <a:bodyPr/>
+                    <a:lstStyle/>
+                    <a:p>
+                      <a:pPr algn="l"/>
+                      <a:r>
+                        <a:rPr sz="1300" b="0">
+                          <a:solidFill>
+                            <a:srgbClr val="333333"/>
+                          </a:solidFill>
+                          <a:latin typeface="メイリオ"/>
+                        </a:rPr>
+                        <a:t>実データで分類</a:t>
+                      </a:r>
+                    </a:p>
+                  </a:txBody>
+                  <a:tcPr anchor="ctr" marL="109728" marR="109728" marT="27432" marB="27432">
+                    <a:solidFill>
+                      <a:srgbClr val="FFFFFF"/>
+                    </a:solidFill>
+                  </a:tcPr>
+                </a:tc>
+              </a:tr>
+              <a:tr h="292608">
+                <a:tc>
+                  <a:txBody>
+                    <a:bodyPr/>
+                    <a:lstStyle/>
+                    <a:p>
+                      <a:pPr algn="ctr"/>
+                      <a:r>
+                        <a:rPr sz="1300" b="1">
+                          <a:solidFill>
+                            <a:srgbClr val="15133D"/>
+                          </a:solidFill>
+                          <a:latin typeface="メイリオ"/>
+                        </a:rPr>
+                        <a:t>データ管理</a:t>
+                      </a:r>
+                    </a:p>
+                  </a:txBody>
+                  <a:tcPr anchor="ctr" marL="109728" marR="109728" marT="27432" marB="27432">
+                    <a:solidFill>
+                      <a:srgbClr val="EAF0FA"/>
+                    </a:solidFill>
+                  </a:tcPr>
+                </a:tc>
+                <a:tc>
+                  <a:txBody>
+                    <a:bodyPr/>
+                    <a:lstStyle/>
+                    <a:p>
+                      <a:pPr algn="l"/>
+                      <a:r>
+                        <a:rPr sz="1300" b="0">
+                          <a:solidFill>
+                            <a:srgbClr val="333333"/>
+                          </a:solidFill>
+                          <a:latin typeface="メイリオ"/>
+                        </a:rPr>
+                        <a:t>手作業</a:t>
+                      </a:r>
+                    </a:p>
+                  </a:txBody>
+                  <a:tcPr anchor="ctr" marL="109728" marR="109728" marT="27432" marB="27432">
+                    <a:solidFill>
+                      <a:srgbClr val="FFFFFF"/>
+                    </a:solidFill>
+                  </a:tcPr>
+                </a:tc>
+                <a:tc>
+                  <a:txBody>
+                    <a:bodyPr/>
+                    <a:lstStyle/>
+                    <a:p>
+                      <a:pPr algn="l"/>
+                      <a:r>
+                        <a:rPr sz="1300" b="0">
+                          <a:solidFill>
+                            <a:srgbClr val="333333"/>
+                          </a:solidFill>
+                          <a:latin typeface="メイリオ"/>
+                        </a:rPr>
+                        <a:t>自動で整理</a:t>
+                      </a:r>
+                    </a:p>
+                  </a:txBody>
+                  <a:tcPr anchor="ctr" marL="109728" marR="109728" marT="27432" marB="27432">
+                    <a:solidFill>
+                      <a:srgbClr val="FFFFFF"/>
+                    </a:solidFill>
+                  </a:tcPr>
+                </a:tc>
+              </a:tr>
+            </a:tbl>
+          </a:graphicData>
+        </a:graphic>
+      </p:graphicFrame>
+      <p:sp>
+        <p:nvSpPr>
+          <p:cNvPr id="69" name="Rounded Rectangle 67"/>
+          <p:cNvSpPr/>
+          <p:nvPr/>
+        </p:nvSpPr>
+        <p:spPr>
+          <a:xfrm>
+            <a:off x="548640" y="4671899"/>
+            <a:ext cx="8814816" cy="1600200"/>
+          </a:xfrm>
+          <a:prstGeom prst="roundRect">
+            <a:avLst>
+              <a:gd name="adj" fmla="val 6000"/>
+            </a:avLst>
+          </a:prstGeom>
+          <a:solidFill>
+            <a:srgbClr val="EAF0FA"/>
+          </a:solidFill>
+          <a:ln w="12700">
+            <a:solidFill>
+              <a:srgbClr val="3467B2"/>
+            </a:solidFill>
+          </a:ln>
+          <a:effectLst/>
+        </p:spPr>
+        <p:style>
+          <a:lnRef idx="1">
+            <a:schemeClr val="accent1"/>
+          </a:lnRef>
+          <a:fillRef idx="3">
+            <a:schemeClr val="accent1"/>
+          </a:fillRef>
+          <a:effectRef idx="2">
+            <a:schemeClr val="accent1"/>
+          </a:effectRef>
+          <a:fontRef idx="minor">
+            <a:schemeClr val="lt1"/>
+          </a:fontRef>
+        </p:style>
+        <p:txBody>
+          <a:bodyPr wrap="square" lIns="228600" rIns="182880" rtlCol="0" anchor="t"/>
+          <a:lstStyle/>
+          <a:p>
+            <a:pPr algn="l"/>
+            <a:r>
+              <a:rPr sz="1600" b="1" dirty="0" err="1">
+                <a:solidFill>
+                  <a:srgbClr val="15133D"/>
+                </a:solidFill>
+                <a:latin typeface="メイリオ"/>
+              </a:rPr>
+              <a:t>4つの機能</a:t>
+            </a:r>
+            <a:endParaRPr sz="2000" b="1" dirty="0">
+              <a:solidFill>
+                <a:srgbClr val="15133D"/>
+              </a:solidFill>
+              <a:latin typeface="メイリオ"/>
+            </a:endParaRPr>
+          </a:p>
+          <a:p>
+            <a:pPr algn="l">
+              <a:lnSpc>
+                <a:spcPct val="115000"/>
+              </a:lnSpc>
+              <a:spcBef>
+                <a:spcPts val="600"/>
+              </a:spcBef>
+            </a:pPr>
+            <a:r>
+              <a:rPr sz="1300" dirty="0" err="1">
+                <a:solidFill>
+                  <a:srgbClr val="333333"/>
+                </a:solidFill>
+                <a:latin typeface="メイリオ"/>
+              </a:rPr>
+              <a:t>・フォーム：質問への回答に応じて、自動でタグを付ける・外す</a:t>
+            </a:r>
+            <a:endParaRPr lang="en-US" sz="1400" dirty="0">
+              <a:solidFill>
+                <a:srgbClr val="333333"/>
+              </a:solidFill>
+              <a:latin typeface="メイリオ"/>
+            </a:endParaRPr>
+          </a:p>
+          <a:p>
+            <a:pPr algn="l">
+              <a:lnSpc>
+                <a:spcPct val="115000"/>
+              </a:lnSpc>
+              <a:spcBef>
+                <a:spcPts val="600"/>
+              </a:spcBef>
+            </a:pPr>
+            <a:r>
+              <a:rPr sz="1300" dirty="0" err="1">
+                <a:solidFill>
+                  <a:srgbClr val="333333"/>
+                </a:solidFill>
+                <a:latin typeface="メイリオ"/>
+              </a:rPr>
+              <a:t>・ユーザーリスト：顧客ごとのニーズ・属性・最後の行動がひと目で分かる</a:t>
+            </a:r>
+            <a:endParaRPr lang="en-US" sz="1400" dirty="0">
+              <a:solidFill>
+                <a:srgbClr val="333333"/>
+              </a:solidFill>
+              <a:latin typeface="メイリオ"/>
+            </a:endParaRPr>
+          </a:p>
+          <a:p>
+            <a:pPr algn="l">
+              <a:lnSpc>
+                <a:spcPct val="115000"/>
+              </a:lnSpc>
+              <a:spcBef>
+                <a:spcPts val="600"/>
+              </a:spcBef>
+            </a:pPr>
+            <a:r>
+              <a:rPr sz="1300" dirty="0" err="1">
+                <a:solidFill>
+                  <a:srgbClr val="333333"/>
+                </a:solidFill>
+                <a:latin typeface="メイリオ"/>
+              </a:rPr>
+              <a:t>・ユーザーリスト配信：タグ・属性で配信先を絞り込める</a:t>
+            </a:r>
+            <a:endParaRPr lang="en-US" sz="1400" dirty="0">
+              <a:solidFill>
+                <a:srgbClr val="333333"/>
+              </a:solidFill>
+              <a:latin typeface="メイリオ"/>
+            </a:endParaRPr>
+          </a:p>
+          <a:p>
+            <a:pPr algn="l">
+              <a:lnSpc>
+                <a:spcPct val="115000"/>
+              </a:lnSpc>
+              <a:spcBef>
+                <a:spcPts val="600"/>
+              </a:spcBef>
+            </a:pPr>
+            <a:r>
+              <a:rPr sz="1300" dirty="0" err="1">
+                <a:solidFill>
+                  <a:srgbClr val="333333"/>
+                </a:solidFill>
+                <a:latin typeface="メイリオ"/>
+              </a:rPr>
+              <a:t>・オートメーション：フォームの回答・タグの付与・誕生日をきっかけに自動配信</a:t>
+            </a:r>
+            <a:endParaRPr lang="en-US" sz="1400" dirty="0">
+              <a:solidFill>
+                <a:srgbClr val="333333"/>
+              </a:solidFill>
+              <a:latin typeface="メイリオ"/>
+            </a:endParaRPr>
+          </a:p>
+        </p:txBody>
+      </p:sp>
+    </p:spTree>
+  </p:cSld>
+  <p:clrMapOvr>
+    <a:masterClrMapping/>
+  </p:clrMapOvr>
+</p:sld>
+</file>
+
+<file path=ppt/slides/slide14.xml><?xml version="1.0" encoding="utf-8"?>
+<p:sld xmlns:a="http://schemas.openxmlformats.org/drawingml/2006/main" xmlns:p="http://schemas.openxmlformats.org/presentationml/2006/main" xmlns:r="http://schemas.openxmlformats.org/officeDocument/2006/relationships">
+  <p:cSld>
+    <p:spTree>
+      <p:nvGrpSpPr>
+        <p:cNvPr id="1" name=""/>
+        <p:cNvGrpSpPr/>
+        <p:nvPr/>
+      </p:nvGrpSpPr>
+      <p:grpSpPr/>
+      <p:sp>
+        <p:nvSpPr>
+          <p:cNvPr id="40" name="Google Shape;40;p3"/>
+          <p:cNvSpPr/>
+          <p:nvPr/>
+        </p:nvSpPr>
+        <p:spPr>
+          <a:xfrm>
+            <a:off x="292801" y="730955"/>
+            <a:ext cx="1296144" cy="435690"/>
+          </a:xfrm>
+          <a:prstGeom prst="rect">
+            <a:avLst/>
+          </a:prstGeom>
+          <a:solidFill>
+            <a:schemeClr val="dk2"/>
+          </a:solidFill>
+          <a:ln w="9525" cap="flat" cmpd="sng">
+            <a:solidFill>
+              <a:srgbClr val="4A7DBA"/>
+            </a:solidFill>
+            <a:prstDash val="solid"/>
+            <a:round/>
+            <a:headEnd type="none" w="sm" len="sm"/>
+            <a:tailEnd type="none" w="sm" len="sm"/>
+          </a:ln>
+        </p:spPr>
+        <p:txBody>
+          <a:bodyPr spcFirstLastPara="1" wrap="square" lIns="91425" tIns="45700" rIns="91425" bIns="45700" anchor="ctr" anchorCtr="0">
+            <a:noAutofit/>
+          </a:bodyPr>
+          <a:lstStyle/>
+          <a:p>
+            <a:pPr marL="0" marR="0" lvl="0" indent="0" algn="ctr" rtl="0">
+              <a:spcBef>
+                <a:spcPts val="0"/>
+              </a:spcBef>
+              <a:spcAft>
+                <a:spcPts val="0"/>
+              </a:spcAft>
+              <a:buNone/>
+            </a:pPr>
+            <a:r>
+              <a:rPr lang="ja-JP" sz="1800" b="0" i="0" u="none" strike="noStrike" cap="none">
+                <a:solidFill>
+                  <a:schemeClr val="lt1"/>
+                </a:solidFill>
+                <a:latin typeface="メイリオ"/>
+                <a:ea typeface="Meiryo"/>
+                <a:cs typeface="Meiryo"/>
+                <a:sym typeface="Meiryo"/>
+              </a:rPr>
+              <a:t>対象業界</a:t>
+            </a:r>
+            <a:endParaRPr/>
+          </a:p>
+        </p:txBody>
+      </p:sp>
+      <p:sp>
+        <p:nvSpPr>
+          <p:cNvPr id="41" name="Google Shape;41;p3"/>
+          <p:cNvSpPr/>
+          <p:nvPr/>
+        </p:nvSpPr>
+        <p:spPr>
+          <a:xfrm>
+            <a:off x="7560840" y="730955"/>
+            <a:ext cx="829618" cy="435690"/>
+          </a:xfrm>
+          <a:prstGeom prst="rect">
+            <a:avLst/>
+          </a:prstGeom>
+          <a:solidFill>
+            <a:schemeClr val="bg1"/>
+          </a:solidFill>
+          <a:ln w="9525" cap="flat" cmpd="sng">
+            <a:solidFill>
+              <a:srgbClr val="4F81BD"/>
+            </a:solidFill>
+            <a:prstDash val="sysDash"/>
+            <a:round/>
+            <a:headEnd type="none" w="sm" len="sm"/>
+            <a:tailEnd type="none" w="sm" len="sm"/>
+          </a:ln>
+        </p:spPr>
+        <p:txBody>
+          <a:bodyPr spcFirstLastPara="1" wrap="square" lIns="91425" tIns="45700" rIns="91425" bIns="45700" anchor="ctr" anchorCtr="0">
+            <a:noAutofit/>
+          </a:bodyPr>
+          <a:lstStyle/>
+          <a:p>
+            <a:pPr marL="0" marR="0" lvl="0" indent="0" algn="ctr" rtl="0">
+              <a:spcBef>
+                <a:spcPts val="0"/>
+              </a:spcBef>
+              <a:spcAft>
+                <a:spcPts val="0"/>
+              </a:spcAft>
+              <a:buNone/>
+            </a:pPr>
+            <a:r>
+              <a:rPr lang="ja-JP" sz="1200" b="0" i="0" u="none" strike="noStrike" cap="none">
+                <a:solidFill>
+                  <a:schemeClr val="dk1"/>
+                </a:solidFill>
+                <a:latin typeface="メイリオ"/>
+                <a:ea typeface="Meiryo"/>
+                <a:cs typeface="Meiryo"/>
+                <a:sym typeface="Meiryo"/>
+              </a:rPr>
+              <a:t>その他</a:t>
+            </a:r>
+            <a:endParaRPr sz="1200" b="0" i="0" u="none" strike="noStrike" cap="none">
+              <a:solidFill>
+                <a:schemeClr val="dk1"/>
+              </a:solidFill>
+              <a:latin typeface="Meiryo"/>
+              <a:ea typeface="Meiryo"/>
+              <a:cs typeface="Meiryo"/>
+              <a:sym typeface="Meiryo"/>
+            </a:endParaRPr>
+          </a:p>
+        </p:txBody>
+      </p:sp>
+      <p:sp>
+        <p:nvSpPr>
+          <p:cNvPr id="42" name="Google Shape;42;p3"/>
+          <p:cNvSpPr/>
+          <p:nvPr/>
+        </p:nvSpPr>
+        <p:spPr>
+          <a:xfrm>
+            <a:off x="6679050" y="730955"/>
+            <a:ext cx="829618" cy="435690"/>
+          </a:xfrm>
+          <a:prstGeom prst="rect">
+            <a:avLst/>
+          </a:prstGeom>
+          <a:solidFill>
+            <a:schemeClr val="tx2"/>
+          </a:solidFill>
+          <a:ln w="9525" cap="flat" cmpd="sng">
+            <a:solidFill>
+              <a:srgbClr val="4F81BD"/>
+            </a:solidFill>
+            <a:prstDash val="solid"/>
+            <a:round/>
+            <a:headEnd type="none" w="sm" len="sm"/>
+            <a:tailEnd type="none" w="sm" len="sm"/>
+          </a:ln>
+        </p:spPr>
+        <p:txBody>
+          <a:bodyPr spcFirstLastPara="1" wrap="square" lIns="91425" tIns="45700" rIns="91425" bIns="45700" anchor="ctr" anchorCtr="0">
+            <a:noAutofit/>
+          </a:bodyPr>
+          <a:lstStyle/>
+          <a:p>
+            <a:pPr marL="0" marR="0" lvl="0" indent="0" algn="ctr" rtl="0">
+              <a:spcBef>
+                <a:spcPts val="0"/>
+              </a:spcBef>
+              <a:spcAft>
+                <a:spcPts val="0"/>
+              </a:spcAft>
+              <a:buNone/>
+            </a:pPr>
+            <a:r>
+              <a:rPr lang="ja-JP" sz="1000" b="0" i="0" u="none" strike="noStrike" cap="none">
+                <a:solidFill>
+                  <a:schemeClr val="dk1"/>
+                </a:solidFill>
+                <a:latin typeface="メイリオ"/>
+                <a:ea typeface="Meiryo"/>
+                <a:cs typeface="Meiryo"/>
+                <a:sym typeface="Meiryo"/>
+              </a:rPr>
+              <a:t>オプション</a:t>
+            </a:r>
+            <a:endParaRPr sz="1000" b="0" i="0" u="none" strike="noStrike" cap="none">
+              <a:solidFill>
+                <a:schemeClr val="dk1"/>
+              </a:solidFill>
+              <a:latin typeface="Meiryo"/>
+              <a:ea typeface="Meiryo"/>
+              <a:cs typeface="Meiryo"/>
+              <a:sym typeface="Meiryo"/>
+            </a:endParaRPr>
+          </a:p>
+          <a:p>
+            <a:pPr marL="0" marR="0" lvl="0" indent="0" algn="ctr" rtl="0">
+              <a:spcBef>
+                <a:spcPts val="0"/>
+              </a:spcBef>
+              <a:spcAft>
+                <a:spcPts val="0"/>
+              </a:spcAft>
+              <a:buNone/>
+            </a:pPr>
+            <a:r>
+              <a:rPr lang="ja-JP" sz="1000" b="0" i="0" u="none" strike="noStrike" cap="none">
+                <a:solidFill>
+                  <a:schemeClr val="dk1"/>
+                </a:solidFill>
+                <a:latin typeface="メイリオ"/>
+                <a:ea typeface="Meiryo"/>
+                <a:cs typeface="Meiryo"/>
+                <a:sym typeface="Meiryo"/>
+              </a:rPr>
+              <a:t>商材</a:t>
+            </a:r>
+            <a:endParaRPr/>
+          </a:p>
+        </p:txBody>
+      </p:sp>
+      <p:sp>
+        <p:nvSpPr>
+          <p:cNvPr id="43" name="Google Shape;43;p3"/>
+          <p:cNvSpPr/>
+          <p:nvPr/>
+        </p:nvSpPr>
+        <p:spPr>
+          <a:xfrm>
+            <a:off x="1594068" y="730955"/>
+            <a:ext cx="2926883" cy="435690"/>
+          </a:xfrm>
+          <a:prstGeom prst="rect">
+            <a:avLst/>
+          </a:prstGeom>
+          <a:noFill/>
+          <a:ln w="9525" cap="flat" cmpd="sng">
+            <a:solidFill>
+              <a:srgbClr val="4A7DBA"/>
+            </a:solidFill>
+            <a:prstDash val="solid"/>
+            <a:round/>
+            <a:headEnd type="none" w="sm" len="sm"/>
+            <a:tailEnd type="none" w="sm" len="sm"/>
+          </a:ln>
+        </p:spPr>
+        <p:txBody>
+          <a:bodyPr spcFirstLastPara="1" wrap="square" lIns="91425" tIns="45700" rIns="91425" bIns="45700" anchor="ctr" anchorCtr="0">
+            <a:noAutofit/>
+          </a:bodyPr>
+          <a:lstStyle/>
+          <a:p>
+            <a:pPr marL="0" marR="0" lvl="0" indent="0" algn="ctr" rtl="0">
+              <a:spcBef>
+                <a:spcPts val="0"/>
+              </a:spcBef>
+              <a:spcAft>
+                <a:spcPts val="0"/>
+              </a:spcAft>
+              <a:buNone/>
+            </a:pPr>
+            <a:r>
+              <a:rPr lang="ja-JP" sz="1300" b="0" i="0" u="none" strike="noStrike" cap="none">
+                <a:solidFill>
+                  <a:schemeClr val="dk1"/>
+                </a:solidFill>
+                <a:latin typeface="メイリオ"/>
+                <a:ea typeface="Meiryo"/>
+                <a:cs typeface="Meiryo"/>
+                <a:sym typeface="Meiryo"/>
+              </a:rPr>
+              <a:t>小売・アパレル・教育・サービス業</a:t>
+            </a:r>
+            <a:endParaRPr/>
+          </a:p>
+        </p:txBody>
+      </p:sp>
+      <p:sp>
+        <p:nvSpPr>
+          <p:cNvPr id="44" name="Google Shape;44;p3"/>
+          <p:cNvSpPr txBox="1"/>
+          <p:nvPr/>
+        </p:nvSpPr>
+        <p:spPr>
+          <a:xfrm>
+            <a:off x="3296816" y="6597352"/>
+            <a:ext cx="6209091" cy="215444"/>
+          </a:xfrm>
+          <a:prstGeom prst="rect">
+            <a:avLst/>
+          </a:prstGeom>
+          <a:noFill/>
+          <a:ln>
+            <a:noFill/>
+          </a:ln>
+        </p:spPr>
+        <p:txBody>
+          <a:bodyPr spcFirstLastPara="1" wrap="square" lIns="91425" tIns="45700" rIns="91425" bIns="45700" anchor="t" anchorCtr="0">
+            <a:spAutoFit/>
+          </a:bodyPr>
+          <a:lstStyle/>
+          <a:p>
+            <a:pPr marL="0" marR="0" lvl="0" indent="0" algn="l" rtl="0">
+              <a:spcBef>
+                <a:spcPts val="0"/>
+              </a:spcBef>
+              <a:spcAft>
+                <a:spcPts val="0"/>
+              </a:spcAft>
+              <a:buNone/>
+            </a:pPr>
+            <a:r>
+              <a:rPr lang="ja-JP" sz="800" b="0" i="0" u="none" strike="noStrike" cap="none">
+                <a:solidFill>
+                  <a:schemeClr val="lt1"/>
+                </a:solidFill>
+                <a:latin typeface="メイリオ"/>
+                <a:ea typeface="Meiryo"/>
+                <a:cs typeface="Meiryo"/>
+                <a:sym typeface="Meiryo"/>
+              </a:rPr>
+              <a:t>出典：代理店情報</a:t>
+            </a:r>
+            <a:endParaRPr sz="800">
+              <a:solidFill>
+                <a:schemeClr val="lt1"/>
+              </a:solidFill>
+              <a:latin typeface="Meiryo"/>
+              <a:ea typeface="Meiryo"/>
+              <a:cs typeface="Meiryo"/>
+              <a:sym typeface="Meiryo"/>
+            </a:endParaRPr>
+          </a:p>
+        </p:txBody>
+      </p:sp>
+      <p:sp>
+        <p:nvSpPr>
+          <p:cNvPr id="45" name="Google Shape;45;p3"/>
+          <p:cNvSpPr/>
+          <p:nvPr/>
+        </p:nvSpPr>
+        <p:spPr>
+          <a:xfrm>
+            <a:off x="0" y="1234746"/>
+            <a:ext cx="9906000" cy="672259"/>
+          </a:xfrm>
+          <a:prstGeom prst="rect">
+            <a:avLst/>
+          </a:prstGeom>
+          <a:solidFill>
+            <a:srgbClr val="C5D8F1"/>
+          </a:solidFill>
+          <a:ln>
+            <a:noFill/>
+          </a:ln>
+        </p:spPr>
+        <p:txBody>
+          <a:bodyPr spcFirstLastPara="1" wrap="square" lIns="91425" tIns="45700" rIns="91425" bIns="45700" anchor="ctr" anchorCtr="0">
+            <a:noAutofit/>
+          </a:bodyPr>
+          <a:lstStyle/>
+          <a:p>
+            <a:pPr marL="0" marR="0" lvl="0" indent="0" algn="ctr" rtl="0">
+              <a:spcBef>
+                <a:spcPts val="0"/>
+              </a:spcBef>
+              <a:spcAft>
+                <a:spcPts val="0"/>
+              </a:spcAft>
+              <a:buNone/>
+            </a:pPr>
+            <a:r>
+              <a:rPr lang="ja-JP" sz="1600" b="1">
+                <a:solidFill>
+                  <a:srgbClr val="004DE6"/>
+                </a:solidFill>
+                <a:latin typeface="メイリオ"/>
+                <a:ea typeface="Meiryo"/>
+                <a:cs typeface="Meiryo"/>
+                <a:sym typeface="Meiryo"/>
+              </a:rPr>
+              <a:t>　　　　　　</a:t>
+            </a:r>
+            <a:endParaRPr sz="1800" b="1">
+              <a:solidFill>
+                <a:srgbClr val="004DE6"/>
+              </a:solidFill>
+              <a:latin typeface="Meiryo"/>
+              <a:ea typeface="Meiryo"/>
+              <a:cs typeface="Meiryo"/>
+              <a:sym typeface="Meiryo"/>
+            </a:endParaRPr>
+          </a:p>
+        </p:txBody>
+      </p:sp>
+      <p:sp>
+        <p:nvSpPr>
+          <p:cNvPr id="46" name="Google Shape;46;p3"/>
+          <p:cNvSpPr/>
+          <p:nvPr/>
+        </p:nvSpPr>
+        <p:spPr>
+          <a:xfrm>
+            <a:off x="1089832" y="1437370"/>
+            <a:ext cx="7031520" cy="338554"/>
+          </a:xfrm>
+          <a:prstGeom prst="rect">
+            <a:avLst/>
+          </a:prstGeom>
+          <a:noFill/>
+          <a:ln>
+            <a:noFill/>
+          </a:ln>
+        </p:spPr>
+        <p:txBody>
+          <a:bodyPr spcFirstLastPara="1" wrap="square" lIns="91425" tIns="45700" rIns="91425" bIns="45700" anchor="t" anchorCtr="0">
+            <a:spAutoFit/>
+          </a:bodyPr>
+          <a:lstStyle/>
+          <a:p>
+            <a:pPr marL="0" marR="0" lvl="0" indent="0" algn="l" rtl="0">
+              <a:spcBef>
+                <a:spcPts val="0"/>
+              </a:spcBef>
+              <a:spcAft>
+                <a:spcPts val="0"/>
+              </a:spcAft>
+              <a:buNone/>
+            </a:pPr>
+            <a:r>
+              <a:rPr lang="ja-JP" sz="1600" b="1">
+                <a:solidFill>
+                  <a:srgbClr val="004DE6"/>
+                </a:solidFill>
+                <a:latin typeface="メイリオ"/>
+                <a:ea typeface="Meiryo"/>
+                <a:cs typeface="Meiryo"/>
+                <a:sym typeface="Meiryo"/>
+              </a:rPr>
+              <a:t>【CRMオプション】業種別の活用例</a:t>
+            </a:r>
+            <a:endParaRPr sz="1600" b="1">
+              <a:solidFill>
+                <a:srgbClr val="004DE6"/>
+              </a:solidFill>
+              <a:latin typeface="Meiryo"/>
+              <a:ea typeface="Meiryo"/>
+              <a:cs typeface="Meiryo"/>
+              <a:sym typeface="Meiryo"/>
+            </a:endParaRPr>
+          </a:p>
+        </p:txBody>
+      </p:sp>
+      <p:sp>
+        <p:nvSpPr>
+          <p:cNvPr id="47" name="Google Shape;47;p3"/>
+          <p:cNvSpPr txBox="1"/>
+          <p:nvPr/>
+        </p:nvSpPr>
+        <p:spPr>
+          <a:xfrm>
+            <a:off x="182880" y="88175"/>
+            <a:ext cx="7512385" cy="365091"/>
+          </a:xfrm>
+          <a:prstGeom prst="rect">
+            <a:avLst/>
+          </a:prstGeom>
+          <a:noFill/>
+          <a:ln>
+            <a:noFill/>
+          </a:ln>
+        </p:spPr>
+        <p:txBody>
+          <a:bodyPr spcFirstLastPara="1" wrap="square" lIns="91425" tIns="72000" rIns="91425" bIns="45700" anchor="t" anchorCtr="0">
+            <a:spAutoFit/>
+          </a:bodyPr>
+          <a:lstStyle/>
+          <a:p>
+            <a:pPr marL="0" marR="0" lvl="0" indent="0" algn="l" rtl="0">
+              <a:spcBef>
+                <a:spcPts val="0"/>
+              </a:spcBef>
+              <a:spcAft>
+                <a:spcPts val="0"/>
+              </a:spcAft>
+              <a:buClr>
+                <a:schemeClr val="dk1"/>
+              </a:buClr>
+              <a:buSzPts val="1600"/>
+              <a:buFont typeface="Arial"/>
+              <a:buNone/>
+            </a:pPr>
+            <a:r>
+              <a:rPr lang="ja-JP" sz="1600" b="0" u="none">
+                <a:solidFill>
+                  <a:schemeClr val="dk1"/>
+                </a:solidFill>
+                <a:latin typeface="メイリオ"/>
+                <a:ea typeface="Meiryo"/>
+                <a:cs typeface="Meiryo"/>
+                <a:sym typeface="Meiryo"/>
+              </a:rPr>
+              <a:t>    今後のアップデート情報</a:t>
+            </a:r>
+            <a:endParaRPr sz="1600" b="0" u="none">
+              <a:solidFill>
+                <a:schemeClr val="dk1"/>
+              </a:solidFill>
+              <a:latin typeface="Meiryo"/>
+              <a:ea typeface="Meiryo"/>
+              <a:cs typeface="Meiryo"/>
+              <a:sym typeface="Meiryo"/>
+            </a:endParaRPr>
+          </a:p>
+        </p:txBody>
+      </p:sp>
+      <p:sp>
+        <p:nvSpPr>
+          <p:cNvPr id="48" name="Google Shape;48;p3"/>
+          <p:cNvSpPr/>
+          <p:nvPr/>
+        </p:nvSpPr>
+        <p:spPr>
+          <a:xfrm>
+            <a:off x="5797260" y="730955"/>
+            <a:ext cx="829618" cy="435690"/>
+          </a:xfrm>
+          <a:prstGeom prst="rect">
+            <a:avLst/>
+          </a:prstGeom>
+          <a:solidFill>
+            <a:schemeClr val="bg1"/>
+          </a:solidFill>
+          <a:ln w="9525" cap="flat" cmpd="sng">
+            <a:solidFill>
+              <a:srgbClr val="4F81BD"/>
+            </a:solidFill>
+            <a:prstDash val="sysDash"/>
+            <a:round/>
+            <a:headEnd type="none" w="sm" len="sm"/>
+            <a:tailEnd type="none" w="sm" len="sm"/>
+          </a:ln>
+        </p:spPr>
+        <p:txBody>
+          <a:bodyPr spcFirstLastPara="1" wrap="square" lIns="91425" tIns="45700" rIns="91425" bIns="45700" anchor="ctr" anchorCtr="0">
+            <a:noAutofit/>
+          </a:bodyPr>
+          <a:lstStyle/>
+          <a:p>
+            <a:pPr marL="0" marR="0" lvl="0" indent="0" algn="ctr" rtl="0">
+              <a:spcBef>
+                <a:spcPts val="0"/>
+              </a:spcBef>
+              <a:spcAft>
+                <a:spcPts val="0"/>
+              </a:spcAft>
+              <a:buClr>
+                <a:schemeClr val="dk1"/>
+              </a:buClr>
+              <a:buSzPts val="1000"/>
+              <a:buFont typeface="Meiryo"/>
+              <a:buNone/>
+            </a:pPr>
+            <a:r>
+              <a:rPr lang="ja-JP" sz="1000">
+                <a:solidFill>
+                  <a:schemeClr val="dk1"/>
+                </a:solidFill>
+                <a:latin typeface="メイリオ"/>
+                <a:ea typeface="Meiryo"/>
+                <a:cs typeface="Meiryo"/>
+                <a:sym typeface="Meiryo"/>
+              </a:rPr>
+              <a:t>開発</a:t>
+            </a:r>
+            <a:endParaRPr sz="1000">
+              <a:solidFill>
+                <a:schemeClr val="dk1"/>
+              </a:solidFill>
+              <a:latin typeface="Meiryo"/>
+              <a:ea typeface="Meiryo"/>
+              <a:cs typeface="Meiryo"/>
+              <a:sym typeface="Meiryo"/>
+            </a:endParaRPr>
+          </a:p>
+          <a:p>
+            <a:pPr marL="0" marR="0" lvl="0" indent="0" algn="ctr" rtl="0">
+              <a:spcBef>
+                <a:spcPts val="0"/>
+              </a:spcBef>
+              <a:spcAft>
+                <a:spcPts val="0"/>
+              </a:spcAft>
+              <a:buClr>
+                <a:schemeClr val="dk1"/>
+              </a:buClr>
+              <a:buSzPts val="1000"/>
+              <a:buFont typeface="Meiryo"/>
+              <a:buNone/>
+            </a:pPr>
+            <a:r>
+              <a:rPr lang="ja-JP" sz="1000">
+                <a:solidFill>
+                  <a:schemeClr val="dk1"/>
+                </a:solidFill>
+                <a:latin typeface="メイリオ"/>
+                <a:ea typeface="Meiryo"/>
+                <a:cs typeface="Meiryo"/>
+                <a:sym typeface="Meiryo"/>
+              </a:rPr>
+              <a:t>LINE API</a:t>
+            </a:r>
+            <a:endParaRPr sz="1000">
+              <a:solidFill>
+                <a:schemeClr val="dk1"/>
+              </a:solidFill>
+              <a:latin typeface="Meiryo"/>
+              <a:ea typeface="Meiryo"/>
+              <a:cs typeface="Meiryo"/>
+              <a:sym typeface="Meiryo"/>
+            </a:endParaRPr>
+          </a:p>
+        </p:txBody>
+      </p:sp>
+      <p:sp>
+        <p:nvSpPr>
+          <p:cNvPr id="49" name="Google Shape;49;p3"/>
+          <p:cNvSpPr/>
+          <p:nvPr/>
+        </p:nvSpPr>
+        <p:spPr>
+          <a:xfrm>
+            <a:off x="4915470" y="730955"/>
+            <a:ext cx="829618" cy="435690"/>
+          </a:xfrm>
+          <a:prstGeom prst="rect">
+            <a:avLst/>
+          </a:prstGeom>
+          <a:solidFill>
+            <a:schemeClr val="bg1"/>
+          </a:solidFill>
+          <a:ln w="9525" cap="flat" cmpd="sng">
+            <a:solidFill>
+              <a:srgbClr val="4F81BD"/>
+            </a:solidFill>
+            <a:prstDash val="sysDash"/>
+            <a:round/>
+            <a:headEnd type="none" w="sm" len="sm"/>
+            <a:tailEnd type="none" w="sm" len="sm"/>
+          </a:ln>
+        </p:spPr>
+        <p:txBody>
+          <a:bodyPr spcFirstLastPara="1" wrap="square" lIns="91425" tIns="45700" rIns="91425" bIns="45700" anchor="ctr" anchorCtr="0">
+            <a:noAutofit/>
+          </a:bodyPr>
+          <a:lstStyle/>
+          <a:p>
+            <a:pPr marL="0" marR="0" lvl="0" indent="0" algn="ctr" rtl="0">
+              <a:spcBef>
+                <a:spcPts val="0"/>
+              </a:spcBef>
+              <a:spcAft>
+                <a:spcPts val="0"/>
+              </a:spcAft>
+              <a:buNone/>
+            </a:pPr>
+            <a:r>
+              <a:rPr lang="ja-JP" sz="1000">
+                <a:solidFill>
+                  <a:schemeClr val="dk1"/>
+                </a:solidFill>
+                <a:latin typeface="メイリオ"/>
+                <a:ea typeface="Meiryo"/>
+                <a:cs typeface="Meiryo"/>
+                <a:sym typeface="Meiryo"/>
+              </a:rPr>
+              <a:t>LINE公式アカウント</a:t>
+            </a:r>
+            <a:endParaRPr sz="1000">
+              <a:solidFill>
+                <a:schemeClr val="dk1"/>
+              </a:solidFill>
+              <a:latin typeface="Meiryo"/>
+              <a:ea typeface="Meiryo"/>
+              <a:cs typeface="Meiryo"/>
+              <a:sym typeface="Meiryo"/>
+            </a:endParaRPr>
+          </a:p>
+        </p:txBody>
+      </p:sp>
+      <p:sp>
+        <p:nvSpPr>
+          <p:cNvPr id="50" name="Google Shape;50;p3"/>
+          <p:cNvSpPr/>
+          <p:nvPr/>
+        </p:nvSpPr>
+        <p:spPr>
+          <a:xfrm>
+            <a:off x="0" y="1890267"/>
+            <a:ext cx="9906000" cy="733579"/>
+          </a:xfrm>
+          <a:prstGeom prst="rect">
+            <a:avLst/>
+          </a:prstGeom>
+          <a:solidFill>
+            <a:srgbClr val="F2F2F2"/>
+          </a:solidFill>
+          <a:ln>
+            <a:noFill/>
+          </a:ln>
+        </p:spPr>
+        <p:txBody>
+          <a:bodyPr spcFirstLastPara="1" wrap="square" lIns="91425" tIns="45700" rIns="91425" bIns="45700" anchor="ctr" anchorCtr="0">
+            <a:noAutofit/>
+          </a:bodyPr>
+          <a:lstStyle/>
+          <a:p>
+            <a:pPr marL="0" marR="0" lvl="0" indent="0" algn="ctr" rtl="0">
+              <a:spcBef>
+                <a:spcPts val="0"/>
+              </a:spcBef>
+              <a:spcAft>
+                <a:spcPts val="0"/>
+              </a:spcAft>
+              <a:buNone/>
+            </a:pPr>
+            <a:endParaRPr sz="1200">
+              <a:solidFill>
+                <a:schemeClr val="dk1"/>
+              </a:solidFill>
+              <a:latin typeface="Meiryo"/>
+              <a:ea typeface="Meiryo"/>
+              <a:cs typeface="Meiryo"/>
+              <a:sym typeface="Meiryo"/>
+            </a:endParaRPr>
+          </a:p>
+        </p:txBody>
+      </p:sp>
+      <p:sp>
+        <p:nvSpPr>
+          <p:cNvPr id="51" name="Google Shape;51;p3"/>
+          <p:cNvSpPr/>
+          <p:nvPr/>
+        </p:nvSpPr>
+        <p:spPr>
+          <a:xfrm>
+            <a:off x="544108" y="1961282"/>
+            <a:ext cx="8817783" cy="646331"/>
+          </a:xfrm>
+          <a:prstGeom prst="rect">
+            <a:avLst/>
+          </a:prstGeom>
+          <a:noFill/>
+          <a:ln>
+            <a:noFill/>
+          </a:ln>
+        </p:spPr>
+        <p:txBody>
+          <a:bodyPr spcFirstLastPara="1" wrap="square" lIns="91425" tIns="45700" rIns="91425" bIns="45700" anchor="t" anchorCtr="0">
+            <a:spAutoFit/>
+          </a:bodyPr>
+          <a:lstStyle/>
+          <a:p>
+            <a:pPr marL="0" marR="0" lvl="0" indent="0" algn="ctr" rtl="0">
+              <a:spcBef>
+                <a:spcPts val="0"/>
+              </a:spcBef>
+              <a:spcAft>
+                <a:spcPts val="0"/>
+              </a:spcAft>
+              <a:buNone/>
+            </a:pPr>
+            <a:r>
+              <a:rPr lang="ja-JP" sz="1200" b="1">
+                <a:solidFill>
+                  <a:schemeClr val="dk1"/>
+                </a:solidFill>
+                <a:latin typeface="メイリオ"/>
+                <a:ea typeface="Meiryo"/>
+                <a:cs typeface="Meiryo"/>
+                <a:sym typeface="Meiryo"/>
+              </a:rPr>
+              <a:t>フォームで聞いた内容をタグにして、その後の配信に使う例が、業種別に紹介されている。</a:t>
+            </a:r>
+            <a:endParaRPr sz="1200" b="1">
+              <a:solidFill>
+                <a:schemeClr val="dk1"/>
+              </a:solidFill>
+              <a:latin typeface="Meiryo"/>
+              <a:ea typeface="Meiryo"/>
+              <a:cs typeface="Meiryo"/>
+              <a:sym typeface="Meiryo"/>
+            </a:endParaRPr>
+          </a:p>
+          <a:p>
+            <a:pPr marL="0" marR="0" lvl="0" indent="0" algn="ctr" rtl="0">
+              <a:spcBef>
+                <a:spcPts val="0"/>
+              </a:spcBef>
+              <a:spcAft>
+                <a:spcPts val="0"/>
+              </a:spcAft>
+              <a:buNone/>
+            </a:pPr>
+            <a:r>
+              <a:rPr lang="ja-JP" sz="1200" b="1">
+                <a:solidFill>
+                  <a:schemeClr val="dk1"/>
+                </a:solidFill>
+                <a:latin typeface="メイリオ"/>
+                <a:ea typeface="Meiryo"/>
+                <a:cs typeface="Meiryo"/>
+                <a:sym typeface="Meiryo"/>
+              </a:rPr>
+              <a:t>教育・習い事、ガソリンスタンド、アパレル・雑貨、スーパー・小売の4業種。</a:t>
+            </a:r>
+            <a:endParaRPr/>
+          </a:p>
+          <a:p>
+            <a:pPr marL="0" marR="0" lvl="0" indent="0" algn="ctr" rtl="0">
+              <a:spcBef>
+                <a:spcPts val="0"/>
+              </a:spcBef>
+              <a:spcAft>
+                <a:spcPts val="0"/>
+              </a:spcAft>
+              <a:buNone/>
+            </a:pPr>
+            <a:r>
+              <a:rPr lang="ja-JP" sz="1200" b="1">
+                <a:solidFill>
+                  <a:schemeClr val="dk1"/>
+                </a:solidFill>
+                <a:latin typeface="メイリオ"/>
+                <a:ea typeface="Meiryo"/>
+                <a:cs typeface="Meiryo"/>
+                <a:sym typeface="Meiryo"/>
+              </a:rPr>
+              <a:t>フォームの出し方（QRコード・メッセージ配信・あいさつメッセージ）も業種ごとに違う。</a:t>
+            </a:r>
+            <a:endParaRPr sz="1400" b="1">
+              <a:solidFill>
+                <a:schemeClr val="dk1"/>
+              </a:solidFill>
+              <a:latin typeface="Meiryo"/>
+              <a:ea typeface="Meiryo"/>
+              <a:cs typeface="Meiryo"/>
+              <a:sym typeface="Meiryo"/>
+            </a:endParaRPr>
+          </a:p>
+        </p:txBody>
+      </p:sp>
+      <p:sp>
+        <p:nvSpPr>
+          <p:cNvPr id="52" name="Google Shape;52;p3"/>
+          <p:cNvSpPr/>
+          <p:nvPr/>
+        </p:nvSpPr>
+        <p:spPr>
+          <a:xfrm>
+            <a:off x="351381" y="2714173"/>
+            <a:ext cx="5200000" cy="338554"/>
+          </a:xfrm>
+          <a:prstGeom prst="rect">
+            <a:avLst/>
+          </a:prstGeom>
+          <a:noFill/>
+          <a:ln>
+            <a:noFill/>
+          </a:ln>
+        </p:spPr>
+        <p:txBody>
+          <a:bodyPr spcFirstLastPara="1" wrap="square" lIns="91425" tIns="45700" rIns="91425" bIns="45700" anchor="t" anchorCtr="0">
+            <a:noAutofit/>
+          </a:bodyPr>
+          <a:lstStyle/>
+          <a:p>
+            <a:pPr marL="0" marR="0" lvl="0" indent="0" algn="l" rtl="0">
+              <a:spcBef>
+                <a:spcPts val="0"/>
+              </a:spcBef>
+              <a:spcAft>
+                <a:spcPts val="0"/>
+              </a:spcAft>
+              <a:buNone/>
+            </a:pPr>
+            <a:r>
+              <a:rPr lang="ja-JP" sz="1400" b="1">
+                <a:solidFill>
+                  <a:srgbClr val="15133D"/>
+                </a:solidFill>
+                <a:latin typeface="メイリオ"/>
+                <a:ea typeface="Meiryo"/>
+                <a:cs typeface="Meiryo"/>
+                <a:sym typeface="Meiryo"/>
+              </a:rPr>
+              <a:t>■ 詳細</a:t>
+            </a:r>
+            <a:endParaRPr/>
+          </a:p>
+        </p:txBody>
+      </p:sp>
+      <p:grpSp>
+        <p:nvGrpSpPr>
+          <p:cNvPr id="53" name="Google Shape;53;p3"/>
+          <p:cNvGrpSpPr/>
+          <p:nvPr/>
+        </p:nvGrpSpPr>
+        <p:grpSpPr>
+          <a:xfrm>
+            <a:off x="8473303" y="730955"/>
+            <a:ext cx="1376241" cy="1131930"/>
+            <a:chOff x="0" y="0"/>
+            <a:chExt cx="1376241" cy="1131930"/>
+          </a:xfrm>
+        </p:grpSpPr>
+        <p:sp>
+          <p:nvSpPr>
+            <p:cNvPr id="54" name="Google Shape;54;p3"/>
+            <p:cNvSpPr/>
+            <p:nvPr/>
+          </p:nvSpPr>
+          <p:spPr>
+            <a:xfrm rot="10800000">
+              <a:off x="0" y="0"/>
+              <a:ext cx="1376241" cy="282982"/>
+            </a:xfrm>
+            <a:prstGeom prst="trapezoid">
+              <a:avLst>
+                <a:gd name="adj" fmla="val 60792"/>
+              </a:avLst>
+            </a:prstGeom>
+            <a:solidFill>
+              <a:schemeClr val="lt1"/>
+            </a:solidFill>
+            <a:ln w="25400" cap="flat" cmpd="sng">
+              <a:solidFill>
+                <a:schemeClr val="dk2"/>
+              </a:solidFill>
+              <a:prstDash val="solid"/>
+              <a:round/>
+              <a:headEnd type="none" w="sm" len="sm"/>
+              <a:tailEnd type="none" w="sm" len="sm"/>
+            </a:ln>
+          </p:spPr>
+          <p:txBody>
+            <a:bodyPr spcFirstLastPara="1" wrap="square" lIns="91425" tIns="91425" rIns="91425" bIns="91425" anchor="ctr" anchorCtr="0">
+              <a:noAutofit/>
+            </a:bodyPr>
+            <a:lstStyle/>
+            <a:p>
+              <a:pPr marL="0" lvl="0" indent="0" algn="l" rtl="0">
+                <a:spcBef>
+                  <a:spcPts val="0"/>
+                </a:spcBef>
+                <a:spcAft>
+                  <a:spcPts val="0"/>
+                </a:spcAft>
+                <a:buNone/>
+              </a:pPr>
+              <a:endParaRPr/>
+            </a:p>
+          </p:txBody>
+        </p:sp>
+        <p:sp>
+          <p:nvSpPr>
+            <p:cNvPr id="55" name="Google Shape;55;p3"/>
+            <p:cNvSpPr txBox="1"/>
+            <p:nvPr/>
+          </p:nvSpPr>
+          <p:spPr>
+            <a:xfrm>
+              <a:off x="240842" y="0"/>
+              <a:ext cx="894556" cy="282982"/>
+            </a:xfrm>
+            <a:prstGeom prst="rect">
+              <a:avLst/>
+            </a:prstGeom>
+            <a:noFill/>
+            <a:ln>
+              <a:noFill/>
+            </a:ln>
+          </p:spPr>
+          <p:txBody>
+            <a:bodyPr spcFirstLastPara="1" wrap="square" lIns="10150" tIns="10150" rIns="10150" bIns="10150" anchor="ctr" anchorCtr="0">
+              <a:noAutofit/>
+            </a:bodyPr>
+            <a:lstStyle/>
+            <a:p>
+              <a:pPr marL="0" marR="0" lvl="0" indent="0" algn="ctr" rtl="0">
+                <a:lnSpc>
+                  <a:spcPct val="90000"/>
+                </a:lnSpc>
+                <a:spcBef>
+                  <a:spcPts val="0"/>
+                </a:spcBef>
+                <a:spcAft>
+                  <a:spcPts val="0"/>
+                </a:spcAft>
+                <a:buClr>
+                  <a:srgbClr val="262626"/>
+                </a:buClr>
+                <a:buSzPts val="800"/>
+                <a:buFont typeface="Arial"/>
+                <a:buNone/>
+              </a:pPr>
+              <a:r>
+                <a:rPr lang="ja-JP" sz="800" b="1">
+                  <a:solidFill>
+                    <a:srgbClr val="262626"/>
+                  </a:solidFill>
+                  <a:latin typeface="Arial"/>
+                  <a:ea typeface="Arial"/>
+                  <a:cs typeface="Arial"/>
+                  <a:sym typeface="Arial"/>
+                </a:rPr>
+                <a:t>認知</a:t>
+              </a:r>
+              <a:endParaRPr/>
+            </a:p>
+          </p:txBody>
+        </p:sp>
+        <p:sp>
+          <p:nvSpPr>
+            <p:cNvPr id="56" name="Google Shape;56;p3"/>
+            <p:cNvSpPr/>
+            <p:nvPr/>
+          </p:nvSpPr>
+          <p:spPr>
+            <a:xfrm rot="10800000">
+              <a:off x="172030" y="282982"/>
+              <a:ext cx="1032180" cy="282982"/>
+            </a:xfrm>
+            <a:prstGeom prst="trapezoid">
+              <a:avLst>
+                <a:gd name="adj" fmla="val 60792"/>
+              </a:avLst>
+            </a:prstGeom>
+            <a:solidFill>
+              <a:schemeClr val="lt1"/>
+            </a:solidFill>
+            <a:ln w="25400" cap="flat" cmpd="sng">
+              <a:solidFill>
+                <a:schemeClr val="dk2"/>
+              </a:solidFill>
+              <a:prstDash val="solid"/>
+              <a:round/>
+              <a:headEnd type="none" w="sm" len="sm"/>
+              <a:tailEnd type="none" w="sm" len="sm"/>
+            </a:ln>
+          </p:spPr>
+          <p:txBody>
+            <a:bodyPr spcFirstLastPara="1" wrap="square" lIns="91425" tIns="91425" rIns="91425" bIns="91425" anchor="ctr" anchorCtr="0">
+              <a:noAutofit/>
+            </a:bodyPr>
+            <a:lstStyle/>
+            <a:p>
+              <a:pPr marL="0" lvl="0" indent="0" algn="l" rtl="0">
+                <a:spcBef>
+                  <a:spcPts val="0"/>
+                </a:spcBef>
+                <a:spcAft>
+                  <a:spcPts val="0"/>
+                </a:spcAft>
+                <a:buNone/>
+              </a:pPr>
+              <a:endParaRPr/>
+            </a:p>
+          </p:txBody>
+        </p:sp>
+        <p:sp>
+          <p:nvSpPr>
+            <p:cNvPr id="57" name="Google Shape;57;p3"/>
+            <p:cNvSpPr txBox="1"/>
+            <p:nvPr/>
+          </p:nvSpPr>
+          <p:spPr>
+            <a:xfrm>
+              <a:off x="352661" y="282982"/>
+              <a:ext cx="670917" cy="282982"/>
+            </a:xfrm>
+            <a:prstGeom prst="rect">
+              <a:avLst/>
+            </a:prstGeom>
+            <a:noFill/>
+            <a:ln>
+              <a:noFill/>
+            </a:ln>
+          </p:spPr>
+          <p:txBody>
+            <a:bodyPr spcFirstLastPara="1" wrap="square" lIns="10150" tIns="10150" rIns="10150" bIns="10150" anchor="ctr" anchorCtr="0">
+              <a:noAutofit/>
+            </a:bodyPr>
+            <a:lstStyle/>
+            <a:p>
+              <a:pPr marL="0" marR="0" lvl="0" indent="0" algn="ctr" rtl="0">
+                <a:lnSpc>
+                  <a:spcPct val="90000"/>
+                </a:lnSpc>
+                <a:spcBef>
+                  <a:spcPts val="0"/>
+                </a:spcBef>
+                <a:spcAft>
+                  <a:spcPts val="0"/>
+                </a:spcAft>
+                <a:buClr>
+                  <a:srgbClr val="262626"/>
+                </a:buClr>
+                <a:buSzPts val="800"/>
+                <a:buFont typeface="Arial"/>
+                <a:buNone/>
+              </a:pPr>
+              <a:r>
+                <a:rPr lang="ja-JP" sz="800" b="1">
+                  <a:solidFill>
+                    <a:srgbClr val="262626"/>
+                  </a:solidFill>
+                  <a:latin typeface="Arial"/>
+                  <a:ea typeface="Arial"/>
+                  <a:cs typeface="Arial"/>
+                  <a:sym typeface="Arial"/>
+                </a:rPr>
+                <a:t>検討</a:t>
+              </a:r>
+              <a:endParaRPr/>
+            </a:p>
+          </p:txBody>
+        </p:sp>
+        <p:sp>
+          <p:nvSpPr>
+            <p:cNvPr id="58" name="Google Shape;58;p3"/>
+            <p:cNvSpPr/>
+            <p:nvPr/>
+          </p:nvSpPr>
+          <p:spPr>
+            <a:xfrm rot="10800000">
+              <a:off x="344060" y="565965"/>
+              <a:ext cx="688120" cy="282982"/>
+            </a:xfrm>
+            <a:prstGeom prst="trapezoid">
+              <a:avLst>
+                <a:gd name="adj" fmla="val 60792"/>
+              </a:avLst>
+            </a:prstGeom>
+            <a:solidFill>
+              <a:schemeClr val="lt1"/>
+            </a:solidFill>
+            <a:ln w="25400" cap="flat" cmpd="sng">
+              <a:solidFill>
+                <a:schemeClr val="dk2"/>
+              </a:solidFill>
+              <a:prstDash val="solid"/>
+              <a:round/>
+              <a:headEnd type="none" w="sm" len="sm"/>
+              <a:tailEnd type="none" w="sm" len="sm"/>
+            </a:ln>
+          </p:spPr>
+          <p:txBody>
+            <a:bodyPr spcFirstLastPara="1" wrap="square" lIns="91425" tIns="91425" rIns="91425" bIns="91425" anchor="ctr" anchorCtr="0">
+              <a:noAutofit/>
+            </a:bodyPr>
+            <a:lstStyle/>
+            <a:p>
+              <a:pPr marL="0" lvl="0" indent="0" algn="l" rtl="0">
+                <a:spcBef>
+                  <a:spcPts val="0"/>
+                </a:spcBef>
+                <a:spcAft>
+                  <a:spcPts val="0"/>
+                </a:spcAft>
+                <a:buNone/>
+              </a:pPr>
+              <a:endParaRPr/>
+            </a:p>
+          </p:txBody>
+        </p:sp>
+        <p:sp>
+          <p:nvSpPr>
+            <p:cNvPr id="59" name="Google Shape;59;p3"/>
+            <p:cNvSpPr txBox="1"/>
+            <p:nvPr/>
+          </p:nvSpPr>
+          <p:spPr>
+            <a:xfrm>
+              <a:off x="464481" y="565965"/>
+              <a:ext cx="447278" cy="282982"/>
+            </a:xfrm>
+            <a:prstGeom prst="rect">
+              <a:avLst/>
+            </a:prstGeom>
+            <a:noFill/>
+            <a:ln>
+              <a:noFill/>
+            </a:ln>
+          </p:spPr>
+          <p:txBody>
+            <a:bodyPr spcFirstLastPara="1" wrap="square" lIns="10150" tIns="10150" rIns="10150" bIns="10150" anchor="ctr" anchorCtr="0">
+              <a:noAutofit/>
+            </a:bodyPr>
+            <a:lstStyle/>
+            <a:p>
+              <a:pPr marL="0" marR="0" lvl="0" indent="0" algn="ctr" rtl="0">
+                <a:lnSpc>
+                  <a:spcPct val="90000"/>
+                </a:lnSpc>
+                <a:spcBef>
+                  <a:spcPts val="0"/>
+                </a:spcBef>
+                <a:spcAft>
+                  <a:spcPts val="0"/>
+                </a:spcAft>
+                <a:buClr>
+                  <a:srgbClr val="262626"/>
+                </a:buClr>
+                <a:buSzPts val="800"/>
+                <a:buFont typeface="Arial"/>
+                <a:buNone/>
+              </a:pPr>
+              <a:r>
+                <a:rPr lang="ja-JP" sz="800" b="1">
+                  <a:solidFill>
+                    <a:srgbClr val="262626"/>
+                  </a:solidFill>
+                  <a:latin typeface="Arial"/>
+                  <a:ea typeface="Arial"/>
+                  <a:cs typeface="Arial"/>
+                  <a:sym typeface="Arial"/>
+                </a:rPr>
+                <a:t>獲得</a:t>
+              </a:r>
+              <a:endParaRPr/>
+            </a:p>
+          </p:txBody>
+        </p:sp>
+        <p:sp>
+          <p:nvSpPr>
+            <p:cNvPr id="60" name="Google Shape;60;p3"/>
+            <p:cNvSpPr/>
+            <p:nvPr/>
+          </p:nvSpPr>
+          <p:spPr>
+            <a:xfrm rot="10800000">
+              <a:off x="516090" y="848948"/>
+              <a:ext cx="344060" cy="282982"/>
+            </a:xfrm>
+            <a:prstGeom prst="trapezoid">
+              <a:avLst>
+                <a:gd name="adj" fmla="val 60792"/>
+              </a:avLst>
+            </a:prstGeom>
+            <a:solidFill>
+              <a:schemeClr val="dk2"/>
+            </a:solidFill>
+            <a:ln w="25400" cap="flat" cmpd="sng">
+              <a:solidFill>
+                <a:schemeClr val="dk2"/>
+              </a:solidFill>
+              <a:prstDash val="solid"/>
+              <a:round/>
+              <a:headEnd type="none" w="sm" len="sm"/>
+              <a:tailEnd type="none" w="sm" len="sm"/>
+            </a:ln>
+          </p:spPr>
+          <p:txBody>
+            <a:bodyPr spcFirstLastPara="1" wrap="square" lIns="91425" tIns="91425" rIns="91425" bIns="91425" anchor="ctr" anchorCtr="0">
+              <a:noAutofit/>
+            </a:bodyPr>
+            <a:lstStyle/>
+            <a:p>
+              <a:pPr marL="0" lvl="0" indent="0" algn="l" rtl="0">
+                <a:spcBef>
+                  <a:spcPts val="0"/>
+                </a:spcBef>
+                <a:spcAft>
+                  <a:spcPts val="0"/>
+                </a:spcAft>
+                <a:buNone/>
+              </a:pPr>
+              <a:endParaRPr/>
+            </a:p>
+          </p:txBody>
+        </p:sp>
+        <p:sp>
+          <p:nvSpPr>
+            <p:cNvPr id="61" name="Google Shape;61;p3"/>
+            <p:cNvSpPr txBox="1"/>
+            <p:nvPr/>
+          </p:nvSpPr>
+          <p:spPr>
+            <a:xfrm>
+              <a:off x="516090" y="848948"/>
+              <a:ext cx="344060" cy="282982"/>
+            </a:xfrm>
+            <a:prstGeom prst="rect">
+              <a:avLst/>
+            </a:prstGeom>
+            <a:noFill/>
+            <a:ln>
+              <a:noFill/>
+            </a:ln>
+          </p:spPr>
+          <p:txBody>
+            <a:bodyPr spcFirstLastPara="1" wrap="square" lIns="10150" tIns="10150" rIns="10150" bIns="10150" anchor="ctr" anchorCtr="0">
+              <a:noAutofit/>
+            </a:bodyPr>
+            <a:lstStyle/>
+            <a:p>
+              <a:pPr marL="0" marR="0" lvl="0" indent="0" algn="ctr" rtl="0">
+                <a:lnSpc>
+                  <a:spcPct val="90000"/>
+                </a:lnSpc>
+                <a:spcBef>
+                  <a:spcPts val="0"/>
+                </a:spcBef>
+                <a:spcAft>
+                  <a:spcPts val="0"/>
+                </a:spcAft>
+                <a:buClr>
+                  <a:srgbClr val="262626"/>
+                </a:buClr>
+                <a:buSzPts val="800"/>
+                <a:buFont typeface="Arial"/>
+                <a:buNone/>
+              </a:pPr>
+              <a:r>
+                <a:rPr lang="ja-JP" sz="800" b="1">
+                  <a:solidFill>
+                    <a:srgbClr val="FFFFFF"/>
+                  </a:solidFill>
+                  <a:latin typeface="Arial"/>
+                  <a:ea typeface="Arial"/>
+                  <a:cs typeface="Arial"/>
+                  <a:sym typeface="Arial"/>
+                </a:rPr>
+                <a:t>伸長</a:t>
+              </a:r>
+              <a:endParaRPr/>
+            </a:p>
+          </p:txBody>
+        </p:sp>
+      </p:grpSp>
+      <p:pic>
+        <p:nvPicPr>
+          <p:cNvPr id="62" name="Google Shape;62;p3" descr="LINE公式アカウントのロゴの使用方法とは？種類やダウンロード方法、利用時の注意点を紹介 | Mico（ミコ）"/>
+          <p:cNvPicPr preferRelativeResize="0"/>
+          <p:nvPr/>
+        </p:nvPicPr>
+        <p:blipFill rotWithShape="1">
+          <a:blip r:embed="rId2">
+            <a:alphaModFix/>
+          </a:blip>
+          <a:srcRect/>
+          <a:stretch/>
+        </p:blipFill>
+        <p:spPr>
+          <a:xfrm>
+            <a:off x="351381" y="1234746"/>
+            <a:ext cx="656177" cy="655521"/>
+          </a:xfrm>
+          <a:prstGeom prst="rect">
+            <a:avLst/>
+          </a:prstGeom>
+          <a:noFill/>
+          <a:ln>
+            <a:noFill/>
+          </a:ln>
+        </p:spPr>
+      </p:pic>
+      <p:graphicFrame>
+        <p:nvGraphicFramePr>
+          <p:cNvPr id="63" name="Table 62"/>
+          <p:cNvGraphicFramePr>
+            <a:graphicFrameLocks noGrp="1"/>
+          </p:cNvGraphicFramePr>
+          <p:nvPr/>
+        </p:nvGraphicFramePr>
+        <p:xfrm>
+          <a:off x="548640" y="3487751"/>
+          <a:ext cx="8814816" cy="2596896"/>
+        </p:xfrm>
+        <a:graphic>
+          <a:graphicData uri="http://schemas.openxmlformats.org/drawingml/2006/table">
+            <a:tbl>
+              <a:tblPr firstRow="1" bandRow="1">
+                <a:tableStyleId>{5C22544A-7EE6-4342-B048-85BDC9FD1C3A}</a:tableStyleId>
+              </a:tblPr>
+              <a:tblGrid>
+                <a:gridCol w="1783080"/>
+                <a:gridCol w="3520440"/>
+                <a:gridCol w="3511296"/>
+              </a:tblGrid>
+              <a:tr h="329184">
+                <a:tc>
+                  <a:txBody>
+                    <a:bodyPr/>
+                    <a:lstStyle/>
+                    <a:p>
+                      <a:pPr algn="ctr"/>
+                      <a:r>
+                        <a:rPr sz="1300" b="1">
+                          <a:solidFill>
+                            <a:srgbClr val="FFFFFF"/>
+                          </a:solidFill>
+                          <a:latin typeface="メイリオ"/>
+                        </a:rPr>
+                        <a:t>業種</a:t>
+                      </a:r>
+                    </a:p>
+                  </a:txBody>
+                  <a:tcPr anchor="ctr" marL="109728" marR="109728" marT="27432" marB="27432">
+                    <a:solidFill>
+                      <a:srgbClr val="15133D"/>
+                    </a:solidFill>
+                  </a:tcPr>
+                </a:tc>
+                <a:tc>
+                  <a:txBody>
+                    <a:bodyPr/>
+                    <a:lstStyle/>
+                    <a:p>
+                      <a:pPr algn="ctr"/>
+                      <a:r>
+                        <a:rPr sz="1300" b="1">
+                          <a:solidFill>
+                            <a:srgbClr val="FFFFFF"/>
+                          </a:solidFill>
+                          <a:latin typeface="メイリオ"/>
+                        </a:rPr>
+                        <a:t>フォームで聞くこと</a:t>
+                      </a:r>
+                    </a:p>
+                  </a:txBody>
+                  <a:tcPr anchor="ctr" marL="109728" marR="109728" marT="27432" marB="27432">
+                    <a:solidFill>
+                      <a:srgbClr val="15133D"/>
+                    </a:solidFill>
+                  </a:tcPr>
+                </a:tc>
+                <a:tc>
+                  <a:txBody>
+                    <a:bodyPr/>
+                    <a:lstStyle/>
+                    <a:p>
+                      <a:pPr algn="ctr"/>
+                      <a:r>
+                        <a:rPr sz="1300" b="1">
+                          <a:solidFill>
+                            <a:srgbClr val="FFFFFF"/>
+                          </a:solidFill>
+                          <a:latin typeface="メイリオ"/>
+                        </a:rPr>
+                        <a:t>その後の配信</a:t>
+                      </a:r>
+                    </a:p>
+                  </a:txBody>
+                  <a:tcPr anchor="ctr" marL="109728" marR="109728" marT="27432" marB="27432">
+                    <a:solidFill>
+                      <a:srgbClr val="15133D"/>
+                    </a:solidFill>
+                  </a:tcPr>
+                </a:tc>
+              </a:tr>
+              <a:tr h="566928">
+                <a:tc>
+                  <a:txBody>
+                    <a:bodyPr/>
+                    <a:lstStyle/>
+                    <a:p>
+                      <a:pPr algn="ctr"/>
+                      <a:r>
+                        <a:rPr sz="1200" b="1">
+                          <a:solidFill>
+                            <a:srgbClr val="15133D"/>
+                          </a:solidFill>
+                          <a:latin typeface="メイリオ"/>
+                        </a:rPr>
+                        <a:t>教育・習い事</a:t>
+                      </a:r>
+                    </a:p>
+                  </a:txBody>
+                  <a:tcPr anchor="ctr" marL="109728" marR="109728" marT="27432" marB="27432">
+                    <a:solidFill>
+                      <a:srgbClr val="EAF0FA"/>
+                    </a:solidFill>
+                  </a:tcPr>
+                </a:tc>
+                <a:tc>
+                  <a:txBody>
+                    <a:bodyPr/>
+                    <a:lstStyle/>
+                    <a:p>
+                      <a:pPr algn="l"/>
+                      <a:r>
+                        <a:rPr sz="1200" b="0">
+                          <a:solidFill>
+                            <a:srgbClr val="333333"/>
+                          </a:solidFill>
+                          <a:latin typeface="メイリオ"/>
+                        </a:rPr>
+                        <a:t>体験授業の後に、悩み・伸ばしたい分野を聞く</a:t>
+                      </a:r>
+                    </a:p>
+                  </a:txBody>
+                  <a:tcPr anchor="ctr" marL="109728" marR="109728" marT="27432" marB="27432">
+                    <a:solidFill>
+                      <a:srgbClr val="FFFFFF"/>
+                    </a:solidFill>
+                  </a:tcPr>
+                </a:tc>
+                <a:tc>
+                  <a:txBody>
+                    <a:bodyPr/>
+                    <a:lstStyle/>
+                    <a:p>
+                      <a:pPr algn="l"/>
+                      <a:r>
+                        <a:rPr sz="1200" b="0">
+                          <a:solidFill>
+                            <a:srgbClr val="333333"/>
+                          </a:solidFill>
+                          <a:latin typeface="メイリオ"/>
+                        </a:rPr>
+                        <a:t>同じ悩みの生徒の成功事例を自動配信</a:t>
+                      </a:r>
+                    </a:p>
+                  </a:txBody>
+                  <a:tcPr anchor="ctr" marL="109728" marR="109728" marT="27432" marB="27432">
+                    <a:solidFill>
+                      <a:srgbClr val="FFFFFF"/>
+                    </a:solidFill>
+                  </a:tcPr>
+                </a:tc>
+              </a:tr>
+              <a:tr h="566928">
+                <a:tc>
+                  <a:txBody>
+                    <a:bodyPr/>
+                    <a:lstStyle/>
+                    <a:p>
+                      <a:pPr algn="ctr"/>
+                      <a:r>
+                        <a:rPr sz="1200" b="1">
+                          <a:solidFill>
+                            <a:srgbClr val="15133D"/>
+                          </a:solidFill>
+                          <a:latin typeface="メイリオ"/>
+                        </a:rPr>
+                        <a:t>ガソリンスタンド</a:t>
+                      </a:r>
+                    </a:p>
+                  </a:txBody>
+                  <a:tcPr anchor="ctr" marL="109728" marR="109728" marT="27432" marB="27432">
+                    <a:solidFill>
+                      <a:srgbClr val="EAF0FA"/>
+                    </a:solidFill>
+                  </a:tcPr>
+                </a:tc>
+                <a:tc>
+                  <a:txBody>
+                    <a:bodyPr/>
+                    <a:lstStyle/>
+                    <a:p>
+                      <a:pPr algn="l"/>
+                      <a:r>
+                        <a:rPr sz="1200" b="0">
+                          <a:solidFill>
+                            <a:srgbClr val="333333"/>
+                          </a:solidFill>
+                          <a:latin typeface="メイリオ"/>
+                        </a:rPr>
+                        <a:t>給油時にQRコードで、1か月の給油の頻度を聞く</a:t>
+                      </a:r>
+                    </a:p>
+                  </a:txBody>
+                  <a:tcPr anchor="ctr" marL="109728" marR="109728" marT="27432" marB="27432">
+                    <a:solidFill>
+                      <a:srgbClr val="FFFFFF"/>
+                    </a:solidFill>
+                  </a:tcPr>
+                </a:tc>
+                <a:tc>
+                  <a:txBody>
+                    <a:bodyPr/>
+                    <a:lstStyle/>
+                    <a:p>
+                      <a:pPr algn="l"/>
+                      <a:r>
+                        <a:rPr sz="1200" b="0">
+                          <a:solidFill>
+                            <a:srgbClr val="333333"/>
+                          </a:solidFill>
+                          <a:latin typeface="メイリオ"/>
+                        </a:rPr>
+                        <a:t>回答の翌日に、お礼のクーポンを自動配信</a:t>
+                      </a:r>
+                    </a:p>
+                  </a:txBody>
+                  <a:tcPr anchor="ctr" marL="109728" marR="109728" marT="27432" marB="27432">
+                    <a:solidFill>
+                      <a:srgbClr val="FFFFFF"/>
+                    </a:solidFill>
+                  </a:tcPr>
+                </a:tc>
+              </a:tr>
+              <a:tr h="566928">
+                <a:tc>
+                  <a:txBody>
+                    <a:bodyPr/>
+                    <a:lstStyle/>
+                    <a:p>
+                      <a:pPr algn="ctr"/>
+                      <a:r>
+                        <a:rPr sz="1200" b="1">
+                          <a:solidFill>
+                            <a:srgbClr val="15133D"/>
+                          </a:solidFill>
+                          <a:latin typeface="メイリオ"/>
+                        </a:rPr>
+                        <a:t>アパレル・雑貨</a:t>
+                      </a:r>
+                    </a:p>
+                  </a:txBody>
+                  <a:tcPr anchor="ctr" marL="109728" marR="109728" marT="27432" marB="27432">
+                    <a:solidFill>
+                      <a:srgbClr val="EAF0FA"/>
+                    </a:solidFill>
+                  </a:tcPr>
+                </a:tc>
+                <a:tc>
+                  <a:txBody>
+                    <a:bodyPr/>
+                    <a:lstStyle/>
+                    <a:p>
+                      <a:pPr algn="l"/>
+                      <a:r>
+                        <a:rPr sz="1200" b="0">
+                          <a:solidFill>
+                            <a:srgbClr val="333333"/>
+                          </a:solidFill>
+                          <a:latin typeface="メイリオ"/>
+                        </a:rPr>
+                        <a:t>来店客に、気になったアイテムを聞く</a:t>
+                      </a:r>
+                    </a:p>
+                  </a:txBody>
+                  <a:tcPr anchor="ctr" marL="109728" marR="109728" marT="27432" marB="27432">
+                    <a:solidFill>
+                      <a:srgbClr val="FFFFFF"/>
+                    </a:solidFill>
+                  </a:tcPr>
+                </a:tc>
+                <a:tc>
+                  <a:txBody>
+                    <a:bodyPr/>
+                    <a:lstStyle/>
+                    <a:p>
+                      <a:pPr algn="l"/>
+                      <a:r>
+                        <a:rPr sz="1200" b="0">
+                          <a:solidFill>
+                            <a:srgbClr val="333333"/>
+                          </a:solidFill>
+                          <a:latin typeface="メイリオ"/>
+                        </a:rPr>
+                        <a:t>回答の翌日に、商品の紹介とクーポンを自動配信</a:t>
+                      </a:r>
+                    </a:p>
+                  </a:txBody>
+                  <a:tcPr anchor="ctr" marL="109728" marR="109728" marT="27432" marB="27432">
+                    <a:solidFill>
+                      <a:srgbClr val="FFFFFF"/>
+                    </a:solidFill>
+                  </a:tcPr>
+                </a:tc>
+              </a:tr>
+              <a:tr h="566928">
+                <a:tc>
+                  <a:txBody>
+                    <a:bodyPr/>
+                    <a:lstStyle/>
+                    <a:p>
+                      <a:pPr algn="ctr"/>
+                      <a:r>
+                        <a:rPr sz="1200" b="1">
+                          <a:solidFill>
+                            <a:srgbClr val="15133D"/>
+                          </a:solidFill>
+                          <a:latin typeface="メイリオ"/>
+                        </a:rPr>
+                        <a:t>スーパー・小売</a:t>
+                      </a:r>
+                    </a:p>
+                  </a:txBody>
+                  <a:tcPr anchor="ctr" marL="109728" marR="109728" marT="27432" marB="27432">
+                    <a:solidFill>
+                      <a:srgbClr val="EAF0FA"/>
+                    </a:solidFill>
+                  </a:tcPr>
+                </a:tc>
+                <a:tc>
+                  <a:txBody>
+                    <a:bodyPr/>
+                    <a:lstStyle/>
+                    <a:p>
+                      <a:pPr algn="l"/>
+                      <a:r>
+                        <a:rPr sz="1200" b="0">
+                          <a:solidFill>
+                            <a:srgbClr val="333333"/>
+                          </a:solidFill>
+                          <a:latin typeface="メイリオ"/>
+                        </a:rPr>
+                        <a:t>あいさつメッセージで、好みのカテゴリーを聞く</a:t>
+                      </a:r>
+                    </a:p>
+                  </a:txBody>
+                  <a:tcPr anchor="ctr" marL="109728" marR="109728" marT="27432" marB="27432">
+                    <a:solidFill>
+                      <a:srgbClr val="FFFFFF"/>
+                    </a:solidFill>
+                  </a:tcPr>
+                </a:tc>
+                <a:tc>
+                  <a:txBody>
+                    <a:bodyPr/>
+                    <a:lstStyle/>
+                    <a:p>
+                      <a:pPr algn="l"/>
+                      <a:r>
+                        <a:rPr sz="1200" b="0">
+                          <a:solidFill>
+                            <a:srgbClr val="333333"/>
+                          </a:solidFill>
+                          <a:latin typeface="メイリオ"/>
+                        </a:rPr>
+                        <a:t>後日、好みに合ったお得情報を配信</a:t>
+                      </a:r>
+                    </a:p>
+                  </a:txBody>
+                  <a:tcPr anchor="ctr" marL="109728" marR="109728" marT="27432" marB="27432">
+                    <a:solidFill>
+                      <a:srgbClr val="FFFFFF"/>
+                    </a:solidFill>
+                  </a:tcPr>
+                </a:tc>
+              </a:tr>
+            </a:tbl>
+          </a:graphicData>
+        </a:graphic>
+      </p:graphicFrame>
     </p:spTree>
   </p:cSld>
   <p:clrMapOvr>
@@ -6818,7 +12271,7 @@
                 <a:cs typeface="Meiryo"/>
                 <a:sym typeface="Meiryo"/>
               </a:rPr>
-              <a:t>P.11</a:t>
+              <a:t>P.11-14</a:t>
             </a:r>
             <a:endParaRPr sz="1500" b="1" i="0" u="none" strike="noStrike" cap="none">
               <a:solidFill>

--- a/LINEOA媒体最新情報_2026年10月トレンドレポート.pptx
+++ b/LINEOA媒体最新情報_2026年10月トレンドレポート.pptx
@@ -5,7 +5,7 @@
     <p:sldMasterId id="2147483648" r:id="rId1"/>
   </p:sldMasterIdLst>
   <p:notesMasterIdLst>
-    <p:notesMasterId r:id="rId12"/>
+    <p:notesMasterId r:id="rId16"/>
   </p:notesMasterIdLst>
   <p:sldIdLst>
     <p:sldId id="256" r:id="rId2"/>
@@ -14,38 +14,38 @@
     <p:sldId id="267" r:id="rId5"/>
     <p:sldId id="268" r:id="rId6"/>
     <p:sldId id="261" r:id="rId7"/>
-    <p:sldId id="269" r:id="rId21"/>
-    <p:sldId id="263" r:id="rId8"/>
-    <p:sldId id="264" r:id="rId9"/>
-    <p:sldId id="265" r:id="rId10"/>
-    <p:sldId id="266" r:id="rId11"/>
-    <p:sldId id="270" r:id="rId27"/>
-    <p:sldId id="271" r:id="rId28"/>
-    <p:sldId id="272" r:id="rId29"/>
+    <p:sldId id="269" r:id="rId8"/>
+    <p:sldId id="263" r:id="rId9"/>
+    <p:sldId id="264" r:id="rId10"/>
+    <p:sldId id="265" r:id="rId11"/>
+    <p:sldId id="266" r:id="rId12"/>
+    <p:sldId id="270" r:id="rId13"/>
+    <p:sldId id="271" r:id="rId14"/>
+    <p:sldId id="272" r:id="rId15"/>
   </p:sldIdLst>
   <p:sldSz cx="9906000" cy="6858000" type="A4"/>
   <p:notesSz cx="6799263" cy="9929813"/>
   <p:embeddedFontLst>
     <p:embeddedFont>
       <p:font typeface="Meiryo" panose="020B0604030504040204" pitchFamily="50" charset="-128"/>
-      <p:regular r:id="rId13"/>
-      <p:bold r:id="rId14"/>
-      <p:italic r:id="rId15"/>
-      <p:boldItalic r:id="rId16"/>
-    </p:embeddedFont>
-    <p:embeddedFont>
-      <p:font typeface="Meiryo" panose="020B0604030504040204" pitchFamily="50" charset="-128"/>
-      <p:regular r:id="rId13"/>
-      <p:bold r:id="rId14"/>
-      <p:italic r:id="rId15"/>
-      <p:boldItalic r:id="rId16"/>
-    </p:embeddedFont>
-    <p:embeddedFont>
-      <p:font typeface="Century Gothic" panose="020B0502020202020204" pitchFamily="34" charset="0"/>
       <p:regular r:id="rId17"/>
       <p:bold r:id="rId18"/>
       <p:italic r:id="rId19"/>
       <p:boldItalic r:id="rId20"/>
+    </p:embeddedFont>
+    <p:embeddedFont>
+      <p:font typeface="Meiryo" panose="020B0604030504040204" pitchFamily="50" charset="-128"/>
+      <p:regular r:id="rId17"/>
+      <p:bold r:id="rId18"/>
+      <p:italic r:id="rId19"/>
+      <p:boldItalic r:id="rId20"/>
+    </p:embeddedFont>
+    <p:embeddedFont>
+      <p:font typeface="Century Gothic" panose="020B0502020202020204" pitchFamily="34" charset="0"/>
+      <p:regular r:id="rId21"/>
+      <p:bold r:id="rId22"/>
+      <p:italic r:id="rId23"/>
+      <p:boldItalic r:id="rId24"/>
     </p:embeddedFont>
   </p:embeddedFontLst>
   <p:defaultTextStyle>
@@ -282,7 +282,7 @@
       <p15:sldGuideLst xmlns:p15="http://schemas.microsoft.com/office/powerpoint/2012/main"/>
     </p:ext>
     <p:ext uri="GoogleSlidesCustomDataVersion2">
-      <go:slidesCustomData xmlns="" xmlns:mc="http://schemas.openxmlformats.org/markup-compatibility/2006" xmlns:mv="urn:schemas-microsoft-com:mac:vml" xmlns:c="http://schemas.openxmlformats.org/drawingml/2006/chart" xmlns:dgm="http://schemas.openxmlformats.org/drawingml/2006/diagram" xmlns:o="urn:schemas-microsoft-com:office:office" xmlns:v="urn:schemas-microsoft-com:vml" xmlns:pvml="urn:schemas-microsoft-com:office:powerpoint" xmlns:com="http://schemas.openxmlformats.org/drawingml/2006/compatibility" xmlns:p14="http://schemas.microsoft.com/office/powerpoint/2010/main" xmlns:p15="http://schemas.microsoft.com/office/powerpoint/2012/main" xmlns:ahyp="http://schemas.microsoft.com/office/drawing/2018/hyperlinkcolor" xmlns:go="http://customooxmlschemas.google.com/" r:id="rId22" roundtripDataSignature="AMtx7mgQCoaVnfxROPv51WSWo8GFar7+Gw=="/>
+      <go:slidesCustomData xmlns:go="http://customooxmlschemas.google.com/" xmlns:ahyp="http://schemas.microsoft.com/office/drawing/2018/hyperlinkcolor" xmlns:p15="http://schemas.microsoft.com/office/powerpoint/2012/main" xmlns:p14="http://schemas.microsoft.com/office/powerpoint/2010/main" xmlns:com="http://schemas.openxmlformats.org/drawingml/2006/compatibility" xmlns:pvml="urn:schemas-microsoft-com:office:powerpoint" xmlns:v="urn:schemas-microsoft-com:vml" xmlns:o="urn:schemas-microsoft-com:office:office" xmlns:dgm="http://schemas.openxmlformats.org/drawingml/2006/diagram" xmlns:c="http://schemas.openxmlformats.org/drawingml/2006/chart" xmlns:mv="urn:schemas-microsoft-com:mac:vml" xmlns:mc="http://schemas.openxmlformats.org/markup-compatibility/2006" xmlns="" r:id="rId25" roundtripDataSignature="AMtx7mgQCoaVnfxROPv51WSWo8GFar7+Gw=="/>
     </p:ext>
   </p:extLst>
 </p:presentation>
@@ -4661,7 +4661,7 @@
         </p:nvSpPr>
         <p:spPr>
           <a:xfrm>
-            <a:off x="2319020" y="3403931"/>
+            <a:off x="2319020" y="3143054"/>
             <a:ext cx="5267960" cy="1290828"/>
           </a:xfrm>
           <a:prstGeom prst="roundRect">
@@ -4768,7 +4768,7 @@
         </p:nvSpPr>
         <p:spPr>
           <a:xfrm>
-            <a:off x="2319020" y="4877639"/>
+            <a:off x="2319020" y="4616762"/>
             <a:ext cx="5267960" cy="1290828"/>
           </a:xfrm>
           <a:prstGeom prst="roundRect">
@@ -6261,7 +6261,7 @@
         </p:nvSpPr>
         <p:spPr>
           <a:xfrm>
-            <a:off x="548640" y="3483179"/>
+            <a:off x="544108" y="3307579"/>
             <a:ext cx="4315968" cy="2606040"/>
           </a:xfrm>
           <a:prstGeom prst="roundRect">
@@ -6421,7 +6421,7 @@
         </p:nvSpPr>
         <p:spPr>
           <a:xfrm>
-            <a:off x="5047488" y="3483179"/>
+            <a:off x="5042956" y="3307579"/>
             <a:ext cx="4315968" cy="2606040"/>
           </a:xfrm>
           <a:prstGeom prst="roundRect">
@@ -6582,7 +6582,7 @@
 </file>
 
 <file path=ppt/slides/slide12.xml><?xml version="1.0" encoding="utf-8"?>
-<p:sld xmlns:a="http://schemas.openxmlformats.org/drawingml/2006/main" xmlns:p="http://schemas.openxmlformats.org/presentationml/2006/main" xmlns:r="http://schemas.openxmlformats.org/officeDocument/2006/relationships">
+<p:sld xmlns:a="http://schemas.openxmlformats.org/drawingml/2006/main" xmlns:r="http://schemas.openxmlformats.org/officeDocument/2006/relationships" xmlns:p="http://schemas.openxmlformats.org/presentationml/2006/main">
   <p:cSld>
     <p:spTree>
       <p:nvGrpSpPr>
@@ -6590,7 +6590,14 @@
         <p:cNvGrpSpPr/>
         <p:nvPr/>
       </p:nvGrpSpPr>
-      <p:grpSpPr/>
+      <p:grpSpPr>
+        <a:xfrm>
+          <a:off x="0" y="0"/>
+          <a:ext cx="0" cy="0"/>
+          <a:chOff x="0" y="0"/>
+          <a:chExt cx="0" cy="0"/>
+        </a:xfrm>
+      </p:grpSpPr>
       <p:sp>
         <p:nvSpPr>
           <p:cNvPr id="40" name="Google Shape;40;p3"/>
@@ -7961,7 +7968,7 @@
         <p:spPr>
           <a:xfrm>
             <a:off x="548640" y="3185999"/>
-            <a:ext cx="4315968" cy="1691640"/>
+            <a:ext cx="4315968" cy="1561492"/>
           </a:xfrm>
           <a:prstGeom prst="roundRect">
             <a:avLst>
@@ -8099,7 +8106,7 @@
         <p:spPr>
           <a:xfrm>
             <a:off x="5047488" y="3185999"/>
-            <a:ext cx="4315968" cy="1691640"/>
+            <a:ext cx="4315968" cy="1561492"/>
           </a:xfrm>
           <a:prstGeom prst="roundRect">
             <a:avLst>
@@ -8261,7 +8268,7 @@
         </p:nvSpPr>
         <p:spPr>
           <a:xfrm>
-            <a:off x="548640" y="5060519"/>
+            <a:off x="547075" y="4902588"/>
             <a:ext cx="8814816" cy="1325880"/>
           </a:xfrm>
           <a:prstGeom prst="roundRect">
@@ -8400,7 +8407,7 @@
 </file>
 
 <file path=ppt/slides/slide13.xml><?xml version="1.0" encoding="utf-8"?>
-<p:sld xmlns:a="http://schemas.openxmlformats.org/drawingml/2006/main" xmlns:p="http://schemas.openxmlformats.org/presentationml/2006/main" xmlns:r="http://schemas.openxmlformats.org/officeDocument/2006/relationships">
+<p:sld xmlns:a="http://schemas.openxmlformats.org/drawingml/2006/main" xmlns:r="http://schemas.openxmlformats.org/officeDocument/2006/relationships" xmlns:p="http://schemas.openxmlformats.org/presentationml/2006/main">
   <p:cSld>
     <p:spTree>
       <p:nvGrpSpPr>
@@ -8408,7 +8415,14 @@
         <p:cNvGrpSpPr/>
         <p:nvPr/>
       </p:nvGrpSpPr>
-      <p:grpSpPr/>
+      <p:grpSpPr>
+        <a:xfrm>
+          <a:off x="0" y="0"/>
+          <a:ext cx="0" cy="0"/>
+          <a:chOff x="0" y="0"/>
+          <a:chExt cx="0" cy="0"/>
+        </a:xfrm>
+      </p:grpSpPr>
       <p:sp>
         <p:nvSpPr>
           <p:cNvPr id="40" name="Google Shape;40;p3"/>
@@ -9776,10 +9790,16 @@
           <p:cNvGraphicFramePr>
             <a:graphicFrameLocks noGrp="1"/>
           </p:cNvGraphicFramePr>
-          <p:nvPr/>
+          <p:nvPr>
+            <p:extLst>
+              <p:ext uri="{D42A27DB-BD31-4B8C-83A1-F6EECF244321}">
+                <p14:modId xmlns:p14="http://schemas.microsoft.com/office/powerpoint/2010/main" val="108291505"/>
+              </p:ext>
+            </p:extLst>
+          </p:nvPr>
         </p:nvGraphicFramePr>
         <p:xfrm>
-          <a:off x="548640" y="3300299"/>
+          <a:off x="547075" y="3155245"/>
           <a:ext cx="8814816" cy="1188720"/>
         </p:xfrm>
         <a:graphic>
@@ -9789,9 +9809,27 @@
                 <a:tableStyleId>{5C22544A-7EE6-4342-B048-85BDC9FD1C3A}</a:tableStyleId>
               </a:tblPr>
               <a:tblGrid>
-                <a:gridCol w="1737360"/>
-                <a:gridCol w="3538728"/>
-                <a:gridCol w="3538728"/>
+                <a:gridCol w="1737360">
+                  <a:extLst>
+                    <a:ext uri="{9D8B030D-6E8A-4147-A177-3AD203B41FA5}">
+                      <a16:colId xmlns:a16="http://schemas.microsoft.com/office/drawing/2014/main" val="20000"/>
+                    </a:ext>
+                  </a:extLst>
+                </a:gridCol>
+                <a:gridCol w="3538728">
+                  <a:extLst>
+                    <a:ext uri="{9D8B030D-6E8A-4147-A177-3AD203B41FA5}">
+                      <a16:colId xmlns:a16="http://schemas.microsoft.com/office/drawing/2014/main" val="20001"/>
+                    </a:ext>
+                  </a:extLst>
+                </a:gridCol>
+                <a:gridCol w="3538728">
+                  <a:extLst>
+                    <a:ext uri="{9D8B030D-6E8A-4147-A177-3AD203B41FA5}">
+                      <a16:colId xmlns:a16="http://schemas.microsoft.com/office/drawing/2014/main" val="20002"/>
+                    </a:ext>
+                  </a:extLst>
+                </a:gridCol>
               </a:tblGrid>
               <a:tr h="310896">
                 <a:tc>
@@ -9811,7 +9849,7 @@
                       </a:r>
                     </a:p>
                   </a:txBody>
-                  <a:tcPr anchor="ctr" marL="109728" marR="109728" marT="27432" marB="27432">
+                  <a:tcPr marL="109728" marR="109728" marT="27432" marB="27432" anchor="ctr">
                     <a:solidFill>
                       <a:srgbClr val="15133D"/>
                     </a:solidFill>
@@ -9834,7 +9872,7 @@
                       </a:r>
                     </a:p>
                   </a:txBody>
-                  <a:tcPr anchor="ctr" marL="109728" marR="109728" marT="27432" marB="27432">
+                  <a:tcPr marL="109728" marR="109728" marT="27432" marB="27432" anchor="ctr">
                     <a:solidFill>
                       <a:srgbClr val="15133D"/>
                     </a:solidFill>
@@ -9857,12 +9895,17 @@
                       </a:r>
                     </a:p>
                   </a:txBody>
-                  <a:tcPr anchor="ctr" marL="109728" marR="109728" marT="27432" marB="27432">
+                  <a:tcPr marL="109728" marR="109728" marT="27432" marB="27432" anchor="ctr">
                     <a:solidFill>
                       <a:srgbClr val="15133D"/>
                     </a:solidFill>
                   </a:tcPr>
                 </a:tc>
+                <a:extLst>
+                  <a:ext uri="{0D108BD9-81ED-4DB2-BD59-A6C34878D82A}">
+                    <a16:rowId xmlns:a16="http://schemas.microsoft.com/office/drawing/2014/main" val="10000"/>
+                  </a:ext>
+                </a:extLst>
               </a:tr>
               <a:tr h="292608">
                 <a:tc>
@@ -9882,7 +9925,7 @@
                       </a:r>
                     </a:p>
                   </a:txBody>
-                  <a:tcPr anchor="ctr" marL="109728" marR="109728" marT="27432" marB="27432">
+                  <a:tcPr marL="109728" marR="109728" marT="27432" marB="27432" anchor="ctr">
                     <a:solidFill>
                       <a:srgbClr val="EAF0FA"/>
                     </a:solidFill>
@@ -9905,7 +9948,7 @@
                       </a:r>
                     </a:p>
                   </a:txBody>
-                  <a:tcPr anchor="ctr" marL="109728" marR="109728" marT="27432" marB="27432">
+                  <a:tcPr marL="109728" marR="109728" marT="27432" marB="27432" anchor="ctr">
                     <a:solidFill>
                       <a:srgbClr val="FFFFFF"/>
                     </a:solidFill>
@@ -9928,12 +9971,17 @@
                       </a:r>
                     </a:p>
                   </a:txBody>
-                  <a:tcPr anchor="ctr" marL="109728" marR="109728" marT="27432" marB="27432">
+                  <a:tcPr marL="109728" marR="109728" marT="27432" marB="27432" anchor="ctr">
                     <a:solidFill>
                       <a:srgbClr val="FFFFFF"/>
                     </a:solidFill>
                   </a:tcPr>
                 </a:tc>
+                <a:extLst>
+                  <a:ext uri="{0D108BD9-81ED-4DB2-BD59-A6C34878D82A}">
+                    <a16:rowId xmlns:a16="http://schemas.microsoft.com/office/drawing/2014/main" val="10001"/>
+                  </a:ext>
+                </a:extLst>
               </a:tr>
               <a:tr h="292608">
                 <a:tc>
@@ -9953,7 +10001,7 @@
                       </a:r>
                     </a:p>
                   </a:txBody>
-                  <a:tcPr anchor="ctr" marL="109728" marR="109728" marT="27432" marB="27432">
+                  <a:tcPr marL="109728" marR="109728" marT="27432" marB="27432" anchor="ctr">
                     <a:solidFill>
                       <a:srgbClr val="EAF0FA"/>
                     </a:solidFill>
@@ -9976,7 +10024,7 @@
                       </a:r>
                     </a:p>
                   </a:txBody>
-                  <a:tcPr anchor="ctr" marL="109728" marR="109728" marT="27432" marB="27432">
+                  <a:tcPr marL="109728" marR="109728" marT="27432" marB="27432" anchor="ctr">
                     <a:solidFill>
                       <a:srgbClr val="FFFFFF"/>
                     </a:solidFill>
@@ -9999,12 +10047,17 @@
                       </a:r>
                     </a:p>
                   </a:txBody>
-                  <a:tcPr anchor="ctr" marL="109728" marR="109728" marT="27432" marB="27432">
+                  <a:tcPr marL="109728" marR="109728" marT="27432" marB="27432" anchor="ctr">
                     <a:solidFill>
                       <a:srgbClr val="FFFFFF"/>
                     </a:solidFill>
                   </a:tcPr>
                 </a:tc>
+                <a:extLst>
+                  <a:ext uri="{0D108BD9-81ED-4DB2-BD59-A6C34878D82A}">
+                    <a16:rowId xmlns:a16="http://schemas.microsoft.com/office/drawing/2014/main" val="10002"/>
+                  </a:ext>
+                </a:extLst>
               </a:tr>
               <a:tr h="292608">
                 <a:tc>
@@ -10024,7 +10077,7 @@
                       </a:r>
                     </a:p>
                   </a:txBody>
-                  <a:tcPr anchor="ctr" marL="109728" marR="109728" marT="27432" marB="27432">
+                  <a:tcPr marL="109728" marR="109728" marT="27432" marB="27432" anchor="ctr">
                     <a:solidFill>
                       <a:srgbClr val="EAF0FA"/>
                     </a:solidFill>
@@ -10047,7 +10100,7 @@
                       </a:r>
                     </a:p>
                   </a:txBody>
-                  <a:tcPr anchor="ctr" marL="109728" marR="109728" marT="27432" marB="27432">
+                  <a:tcPr marL="109728" marR="109728" marT="27432" marB="27432" anchor="ctr">
                     <a:solidFill>
                       <a:srgbClr val="FFFFFF"/>
                     </a:solidFill>
@@ -10070,12 +10123,17 @@
                       </a:r>
                     </a:p>
                   </a:txBody>
-                  <a:tcPr anchor="ctr" marL="109728" marR="109728" marT="27432" marB="27432">
+                  <a:tcPr marL="109728" marR="109728" marT="27432" marB="27432" anchor="ctr">
                     <a:solidFill>
                       <a:srgbClr val="FFFFFF"/>
                     </a:solidFill>
                   </a:tcPr>
                 </a:tc>
+                <a:extLst>
+                  <a:ext uri="{0D108BD9-81ED-4DB2-BD59-A6C34878D82A}">
+                    <a16:rowId xmlns:a16="http://schemas.microsoft.com/office/drawing/2014/main" val="10003"/>
+                  </a:ext>
+                </a:extLst>
               </a:tr>
             </a:tbl>
           </a:graphicData>
@@ -10089,7 +10147,7 @@
         </p:nvSpPr>
         <p:spPr>
           <a:xfrm>
-            <a:off x="548640" y="4671899"/>
+            <a:off x="547075" y="4526845"/>
             <a:ext cx="8814816" cy="1600200"/>
           </a:xfrm>
           <a:prstGeom prst="roundRect">
@@ -10253,7 +10311,7 @@
 </file>
 
 <file path=ppt/slides/slide14.xml><?xml version="1.0" encoding="utf-8"?>
-<p:sld xmlns:a="http://schemas.openxmlformats.org/drawingml/2006/main" xmlns:p="http://schemas.openxmlformats.org/presentationml/2006/main" xmlns:r="http://schemas.openxmlformats.org/officeDocument/2006/relationships">
+<p:sld xmlns:a="http://schemas.openxmlformats.org/drawingml/2006/main" xmlns:r="http://schemas.openxmlformats.org/officeDocument/2006/relationships" xmlns:p="http://schemas.openxmlformats.org/presentationml/2006/main">
   <p:cSld>
     <p:spTree>
       <p:nvGrpSpPr>
@@ -10261,7 +10319,14 @@
         <p:cNvGrpSpPr/>
         <p:nvPr/>
       </p:nvGrpSpPr>
-      <p:grpSpPr/>
+      <p:grpSpPr>
+        <a:xfrm>
+          <a:off x="0" y="0"/>
+          <a:ext cx="0" cy="0"/>
+          <a:chOff x="0" y="0"/>
+          <a:chExt cx="0" cy="0"/>
+        </a:xfrm>
+      </p:grpSpPr>
       <p:sp>
         <p:nvSpPr>
           <p:cNvPr id="40" name="Google Shape;40;p3"/>
@@ -11629,11 +11694,17 @@
           <p:cNvGraphicFramePr>
             <a:graphicFrameLocks noGrp="1"/>
           </p:cNvGraphicFramePr>
-          <p:nvPr/>
+          <p:nvPr>
+            <p:extLst>
+              <p:ext uri="{D42A27DB-BD31-4B8C-83A1-F6EECF244321}">
+                <p14:modId xmlns:p14="http://schemas.microsoft.com/office/powerpoint/2010/main" val="3488576235"/>
+              </p:ext>
+            </p:extLst>
+          </p:nvPr>
         </p:nvGraphicFramePr>
         <p:xfrm>
-          <a:off x="548640" y="3487751"/>
-          <a:ext cx="8814816" cy="2596896"/>
+          <a:off x="547075" y="3152534"/>
+          <a:ext cx="9061626" cy="2596896"/>
         </p:xfrm>
         <a:graphic>
           <a:graphicData uri="http://schemas.openxmlformats.org/drawingml/2006/table">
@@ -11642,9 +11713,27 @@
                 <a:tableStyleId>{5C22544A-7EE6-4342-B048-85BDC9FD1C3A}</a:tableStyleId>
               </a:tblPr>
               <a:tblGrid>
-                <a:gridCol w="1783080"/>
-                <a:gridCol w="3520440"/>
-                <a:gridCol w="3511296"/>
+                <a:gridCol w="1716401">
+                  <a:extLst>
+                    <a:ext uri="{9D8B030D-6E8A-4147-A177-3AD203B41FA5}">
+                      <a16:colId xmlns:a16="http://schemas.microsoft.com/office/drawing/2014/main" val="20000"/>
+                    </a:ext>
+                  </a:extLst>
+                </a:gridCol>
+                <a:gridCol w="3655566">
+                  <a:extLst>
+                    <a:ext uri="{9D8B030D-6E8A-4147-A177-3AD203B41FA5}">
+                      <a16:colId xmlns:a16="http://schemas.microsoft.com/office/drawing/2014/main" val="20001"/>
+                    </a:ext>
+                  </a:extLst>
+                </a:gridCol>
+                <a:gridCol w="3689659">
+                  <a:extLst>
+                    <a:ext uri="{9D8B030D-6E8A-4147-A177-3AD203B41FA5}">
+                      <a16:colId xmlns:a16="http://schemas.microsoft.com/office/drawing/2014/main" val="20002"/>
+                    </a:ext>
+                  </a:extLst>
+                </a:gridCol>
               </a:tblGrid>
               <a:tr h="329184">
                 <a:tc>
@@ -11654,7 +11743,7 @@
                     <a:p>
                       <a:pPr algn="ctr"/>
                       <a:r>
-                        <a:rPr sz="1300" b="1">
+                        <a:rPr sz="1300" b="1" dirty="0" err="1">
                           <a:solidFill>
                             <a:srgbClr val="FFFFFF"/>
                           </a:solidFill>
@@ -11662,9 +11751,15 @@
                         </a:rPr>
                         <a:t>業種</a:t>
                       </a:r>
+                      <a:endParaRPr sz="1300" b="1" dirty="0">
+                        <a:solidFill>
+                          <a:srgbClr val="FFFFFF"/>
+                        </a:solidFill>
+                        <a:latin typeface="メイリオ"/>
+                      </a:endParaRPr>
                     </a:p>
                   </a:txBody>
-                  <a:tcPr anchor="ctr" marL="109728" marR="109728" marT="27432" marB="27432">
+                  <a:tcPr marL="109728" marR="109728" marT="27432" marB="27432" anchor="ctr">
                     <a:solidFill>
                       <a:srgbClr val="15133D"/>
                     </a:solidFill>
@@ -11687,7 +11782,7 @@
                       </a:r>
                     </a:p>
                   </a:txBody>
-                  <a:tcPr anchor="ctr" marL="109728" marR="109728" marT="27432" marB="27432">
+                  <a:tcPr marL="109728" marR="109728" marT="27432" marB="27432" anchor="ctr">
                     <a:solidFill>
                       <a:srgbClr val="15133D"/>
                     </a:solidFill>
@@ -11710,12 +11805,17 @@
                       </a:r>
                     </a:p>
                   </a:txBody>
-                  <a:tcPr anchor="ctr" marL="109728" marR="109728" marT="27432" marB="27432">
+                  <a:tcPr marL="109728" marR="109728" marT="27432" marB="27432" anchor="ctr">
                     <a:solidFill>
                       <a:srgbClr val="15133D"/>
                     </a:solidFill>
                   </a:tcPr>
                 </a:tc>
+                <a:extLst>
+                  <a:ext uri="{0D108BD9-81ED-4DB2-BD59-A6C34878D82A}">
+                    <a16:rowId xmlns:a16="http://schemas.microsoft.com/office/drawing/2014/main" val="10000"/>
+                  </a:ext>
+                </a:extLst>
               </a:tr>
               <a:tr h="566928">
                 <a:tc>
@@ -11735,7 +11835,7 @@
                       </a:r>
                     </a:p>
                   </a:txBody>
-                  <a:tcPr anchor="ctr" marL="109728" marR="109728" marT="27432" marB="27432">
+                  <a:tcPr marL="109728" marR="109728" marT="27432" marB="27432" anchor="ctr">
                     <a:solidFill>
                       <a:srgbClr val="EAF0FA"/>
                     </a:solidFill>
@@ -11758,7 +11858,7 @@
                       </a:r>
                     </a:p>
                   </a:txBody>
-                  <a:tcPr anchor="ctr" marL="109728" marR="109728" marT="27432" marB="27432">
+                  <a:tcPr marL="109728" marR="109728" marT="27432" marB="27432" anchor="ctr">
                     <a:solidFill>
                       <a:srgbClr val="FFFFFF"/>
                     </a:solidFill>
@@ -11781,12 +11881,17 @@
                       </a:r>
                     </a:p>
                   </a:txBody>
-                  <a:tcPr anchor="ctr" marL="109728" marR="109728" marT="27432" marB="27432">
+                  <a:tcPr marL="109728" marR="109728" marT="27432" marB="27432" anchor="ctr">
                     <a:solidFill>
                       <a:srgbClr val="FFFFFF"/>
                     </a:solidFill>
                   </a:tcPr>
                 </a:tc>
+                <a:extLst>
+                  <a:ext uri="{0D108BD9-81ED-4DB2-BD59-A6C34878D82A}">
+                    <a16:rowId xmlns:a16="http://schemas.microsoft.com/office/drawing/2014/main" val="10001"/>
+                  </a:ext>
+                </a:extLst>
               </a:tr>
               <a:tr h="566928">
                 <a:tc>
@@ -11806,7 +11911,7 @@
                       </a:r>
                     </a:p>
                   </a:txBody>
-                  <a:tcPr anchor="ctr" marL="109728" marR="109728" marT="27432" marB="27432">
+                  <a:tcPr marL="109728" marR="109728" marT="27432" marB="27432" anchor="ctr">
                     <a:solidFill>
                       <a:srgbClr val="EAF0FA"/>
                     </a:solidFill>
@@ -11829,7 +11934,7 @@
                       </a:r>
                     </a:p>
                   </a:txBody>
-                  <a:tcPr anchor="ctr" marL="109728" marR="109728" marT="27432" marB="27432">
+                  <a:tcPr marL="109728" marR="109728" marT="27432" marB="27432" anchor="ctr">
                     <a:solidFill>
                       <a:srgbClr val="FFFFFF"/>
                     </a:solidFill>
@@ -11852,12 +11957,17 @@
                       </a:r>
                     </a:p>
                   </a:txBody>
-                  <a:tcPr anchor="ctr" marL="109728" marR="109728" marT="27432" marB="27432">
+                  <a:tcPr marL="109728" marR="109728" marT="27432" marB="27432" anchor="ctr">
                     <a:solidFill>
                       <a:srgbClr val="FFFFFF"/>
                     </a:solidFill>
                   </a:tcPr>
                 </a:tc>
+                <a:extLst>
+                  <a:ext uri="{0D108BD9-81ED-4DB2-BD59-A6C34878D82A}">
+                    <a16:rowId xmlns:a16="http://schemas.microsoft.com/office/drawing/2014/main" val="10002"/>
+                  </a:ext>
+                </a:extLst>
               </a:tr>
               <a:tr h="566928">
                 <a:tc>
@@ -11877,7 +11987,7 @@
                       </a:r>
                     </a:p>
                   </a:txBody>
-                  <a:tcPr anchor="ctr" marL="109728" marR="109728" marT="27432" marB="27432">
+                  <a:tcPr marL="109728" marR="109728" marT="27432" marB="27432" anchor="ctr">
                     <a:solidFill>
                       <a:srgbClr val="EAF0FA"/>
                     </a:solidFill>
@@ -11900,7 +12010,7 @@
                       </a:r>
                     </a:p>
                   </a:txBody>
-                  <a:tcPr anchor="ctr" marL="109728" marR="109728" marT="27432" marB="27432">
+                  <a:tcPr marL="109728" marR="109728" marT="27432" marB="27432" anchor="ctr">
                     <a:solidFill>
                       <a:srgbClr val="FFFFFF"/>
                     </a:solidFill>
@@ -11923,12 +12033,17 @@
                       </a:r>
                     </a:p>
                   </a:txBody>
-                  <a:tcPr anchor="ctr" marL="109728" marR="109728" marT="27432" marB="27432">
+                  <a:tcPr marL="109728" marR="109728" marT="27432" marB="27432" anchor="ctr">
                     <a:solidFill>
                       <a:srgbClr val="FFFFFF"/>
                     </a:solidFill>
                   </a:tcPr>
                 </a:tc>
+                <a:extLst>
+                  <a:ext uri="{0D108BD9-81ED-4DB2-BD59-A6C34878D82A}">
+                    <a16:rowId xmlns:a16="http://schemas.microsoft.com/office/drawing/2014/main" val="10003"/>
+                  </a:ext>
+                </a:extLst>
               </a:tr>
               <a:tr h="566928">
                 <a:tc>
@@ -11938,17 +12053,41 @@
                     <a:p>
                       <a:pPr algn="ctr"/>
                       <a:r>
-                        <a:rPr sz="1200" b="1">
+                        <a:rPr sz="1200" b="1" dirty="0" err="1">
                           <a:solidFill>
                             <a:srgbClr val="15133D"/>
                           </a:solidFill>
                           <a:latin typeface="メイリオ"/>
                         </a:rPr>
-                        <a:t>スーパー・小売</a:t>
+                        <a:t>スーパ</a:t>
                       </a:r>
+                      <a:r>
+                        <a:rPr sz="1200" b="1" dirty="0">
+                          <a:solidFill>
+                            <a:srgbClr val="15133D"/>
+                          </a:solidFill>
+                          <a:latin typeface="メイリオ"/>
+                        </a:rPr>
+                        <a:t>ー・</a:t>
+                      </a:r>
+                      <a:r>
+                        <a:rPr sz="1200" b="1" dirty="0" err="1">
+                          <a:solidFill>
+                            <a:srgbClr val="15133D"/>
+                          </a:solidFill>
+                          <a:latin typeface="メイリオ"/>
+                        </a:rPr>
+                        <a:t>小売</a:t>
+                      </a:r>
+                      <a:endParaRPr sz="1200" b="1" dirty="0">
+                        <a:solidFill>
+                          <a:srgbClr val="15133D"/>
+                        </a:solidFill>
+                        <a:latin typeface="メイリオ"/>
+                      </a:endParaRPr>
                     </a:p>
                   </a:txBody>
-                  <a:tcPr anchor="ctr" marL="109728" marR="109728" marT="27432" marB="27432">
+                  <a:tcPr marL="109728" marR="109728" marT="27432" marB="27432" anchor="ctr">
                     <a:solidFill>
                       <a:srgbClr val="EAF0FA"/>
                     </a:solidFill>
@@ -11971,7 +12110,7 @@
                       </a:r>
                     </a:p>
                   </a:txBody>
-                  <a:tcPr anchor="ctr" marL="109728" marR="109728" marT="27432" marB="27432">
+                  <a:tcPr marL="109728" marR="109728" marT="27432" marB="27432" anchor="ctr">
                     <a:solidFill>
                       <a:srgbClr val="FFFFFF"/>
                     </a:solidFill>
@@ -11984,7 +12123,7 @@
                     <a:p>
                       <a:pPr algn="l"/>
                       <a:r>
-                        <a:rPr sz="1200" b="0">
+                        <a:rPr sz="1200" b="0" dirty="0" err="1">
                           <a:solidFill>
                             <a:srgbClr val="333333"/>
                           </a:solidFill>
@@ -11992,14 +12131,25 @@
                         </a:rPr>
                         <a:t>後日、好みに合ったお得情報を配信</a:t>
                       </a:r>
+                      <a:endParaRPr sz="1200" b="0" dirty="0">
+                        <a:solidFill>
+                          <a:srgbClr val="333333"/>
+                        </a:solidFill>
+                        <a:latin typeface="メイリオ"/>
+                      </a:endParaRPr>
                     </a:p>
                   </a:txBody>
-                  <a:tcPr anchor="ctr" marL="109728" marR="109728" marT="27432" marB="27432">
+                  <a:tcPr marL="109728" marR="109728" marT="27432" marB="27432" anchor="ctr">
                     <a:solidFill>
                       <a:srgbClr val="FFFFFF"/>
                     </a:solidFill>
                   </a:tcPr>
                 </a:tc>
+                <a:extLst>
+                  <a:ext uri="{0D108BD9-81ED-4DB2-BD59-A6C34878D82A}">
+                    <a16:rowId xmlns:a16="http://schemas.microsoft.com/office/drawing/2014/main" val="10004"/>
+                  </a:ext>
+                </a:extLst>
               </a:tr>
             </a:tbl>
           </a:graphicData>
@@ -17444,7 +17594,7 @@
         </p:nvSpPr>
         <p:spPr>
           <a:xfrm>
-            <a:off x="656590" y="3403931"/>
+            <a:off x="656590" y="3332508"/>
             <a:ext cx="8592820" cy="1290828"/>
           </a:xfrm>
           <a:prstGeom prst="roundRect">
@@ -17588,7 +17738,7 @@
         </p:nvSpPr>
         <p:spPr>
           <a:xfrm>
-            <a:off x="656590" y="4877639"/>
+            <a:off x="656590" y="4806216"/>
             <a:ext cx="8592820" cy="1290828"/>
           </a:xfrm>
           <a:prstGeom prst="roundRect">
@@ -19090,10 +19240,16 @@
           <p:cNvGraphicFramePr>
             <a:graphicFrameLocks noGrp="1"/>
           </p:cNvGraphicFramePr>
-          <p:nvPr/>
+          <p:nvPr>
+            <p:extLst>
+              <p:ext uri="{D42A27DB-BD31-4B8C-83A1-F6EECF244321}">
+                <p14:modId xmlns:p14="http://schemas.microsoft.com/office/powerpoint/2010/main" val="3538749131"/>
+              </p:ext>
+            </p:extLst>
+          </p:nvPr>
         </p:nvGraphicFramePr>
         <p:xfrm>
-          <a:off x="548640" y="3437459"/>
+          <a:off x="547076" y="3279367"/>
           <a:ext cx="8814815" cy="2304288"/>
         </p:xfrm>
         <a:graphic>
@@ -19103,9 +19259,27 @@
                 <a:tableStyleId>{5C22544A-7EE6-4342-B048-85BDC9FD1C3A}</a:tableStyleId>
               </a:tblPr>
               <a:tblGrid>
-                <a:gridCol w="1737360"/>
-                <a:gridCol w="3291840"/>
-                <a:gridCol w="3785615"/>
+                <a:gridCol w="1737360">
+                  <a:extLst>
+                    <a:ext uri="{9D8B030D-6E8A-4147-A177-3AD203B41FA5}">
+                      <a16:colId xmlns:a16="http://schemas.microsoft.com/office/drawing/2014/main" val="20000"/>
+                    </a:ext>
+                  </a:extLst>
+                </a:gridCol>
+                <a:gridCol w="3291840">
+                  <a:extLst>
+                    <a:ext uri="{9D8B030D-6E8A-4147-A177-3AD203B41FA5}">
+                      <a16:colId xmlns:a16="http://schemas.microsoft.com/office/drawing/2014/main" val="20001"/>
+                    </a:ext>
+                  </a:extLst>
+                </a:gridCol>
+                <a:gridCol w="3785615">
+                  <a:extLst>
+                    <a:ext uri="{9D8B030D-6E8A-4147-A177-3AD203B41FA5}">
+                      <a16:colId xmlns:a16="http://schemas.microsoft.com/office/drawing/2014/main" val="20002"/>
+                    </a:ext>
+                  </a:extLst>
+                </a:gridCol>
               </a:tblGrid>
               <a:tr h="384048">
                 <a:tc>
@@ -19114,18 +19288,10 @@
                     <a:lstStyle/>
                     <a:p>
                       <a:pPr algn="ctr"/>
-                      <a:r>
-                        <a:rPr sz="1400" b="1">
-                          <a:solidFill>
-                            <a:srgbClr val="FFFFFF"/>
-                          </a:solidFill>
-                          <a:latin typeface="メイリオ"/>
-                        </a:rPr>
-                        <a:t/>
-                      </a:r>
+                      <a:endParaRPr/>
                     </a:p>
                   </a:txBody>
-                  <a:tcPr anchor="ctr" marL="109728" marR="109728">
+                  <a:tcPr marL="109728" marR="109728" anchor="ctr">
                     <a:solidFill>
                       <a:srgbClr val="15133D"/>
                     </a:solidFill>
@@ -19148,7 +19314,7 @@
                       </a:r>
                     </a:p>
                   </a:txBody>
-                  <a:tcPr anchor="ctr" marL="109728" marR="109728">
+                  <a:tcPr marL="109728" marR="109728" anchor="ctr">
                     <a:solidFill>
                       <a:srgbClr val="15133D"/>
                     </a:solidFill>
@@ -19171,12 +19337,17 @@
                       </a:r>
                     </a:p>
                   </a:txBody>
-                  <a:tcPr anchor="ctr" marL="109728" marR="109728">
+                  <a:tcPr marL="109728" marR="109728" anchor="ctr">
                     <a:solidFill>
                       <a:srgbClr val="15133D"/>
                     </a:solidFill>
                   </a:tcPr>
                 </a:tc>
+                <a:extLst>
+                  <a:ext uri="{0D108BD9-81ED-4DB2-BD59-A6C34878D82A}">
+                    <a16:rowId xmlns:a16="http://schemas.microsoft.com/office/drawing/2014/main" val="10000"/>
+                  </a:ext>
+                </a:extLst>
               </a:tr>
               <a:tr h="868680">
                 <a:tc>
@@ -19196,7 +19367,7 @@
                       </a:r>
                     </a:p>
                   </a:txBody>
-                  <a:tcPr anchor="ctr" marL="109728" marR="109728">
+                  <a:tcPr marL="109728" marR="109728" anchor="ctr">
                     <a:solidFill>
                       <a:srgbClr val="EAF0FA"/>
                     </a:solidFill>
@@ -19209,17 +19380,41 @@
                     <a:p>
                       <a:pPr algn="l"/>
                       <a:r>
-                        <a:rPr sz="1300">
+                        <a:rPr sz="1300" dirty="0" err="1">
                           <a:solidFill>
                             <a:srgbClr val="333333"/>
                           </a:solidFill>
                           <a:latin typeface="メイリオ"/>
                         </a:rPr>
-                        <a:t>広告主のLINE公式アカウント・アプリ・SNS、Web全般（LINEヤフー広告も可）、店頭POP・屋外広告</a:t>
+                        <a:t>広告主のLINE公式アカウント・アプリ・SNS、Web全般（LINEヤフー広告も可</a:t>
                       </a:r>
+                      <a:r>
+                        <a:rPr sz="1300" dirty="0">
+                          <a:solidFill>
+                            <a:srgbClr val="333333"/>
+                          </a:solidFill>
+                          <a:latin typeface="メイリオ"/>
+                        </a:rPr>
+                        <a:t>）、</a:t>
+                      </a:r>
+                      <a:r>
+                        <a:rPr sz="1300" dirty="0" err="1">
+                          <a:solidFill>
+                            <a:srgbClr val="333333"/>
+                          </a:solidFill>
+                          <a:latin typeface="メイリオ"/>
+                        </a:rPr>
+                        <a:t>店頭POP・屋外広告</a:t>
+                      </a:r>
+                      <a:endParaRPr sz="1300" dirty="0">
+                        <a:solidFill>
+                          <a:srgbClr val="333333"/>
+                        </a:solidFill>
+                        <a:latin typeface="メイリオ"/>
+                      </a:endParaRPr>
                     </a:p>
                   </a:txBody>
-                  <a:tcPr anchor="ctr" marL="109728" marR="109728">
+                  <a:tcPr marL="109728" marR="109728" anchor="ctr">
                     <a:solidFill>
                       <a:srgbClr val="FFFFFF"/>
                     </a:solidFill>
@@ -19242,12 +19437,17 @@
                       </a:r>
                     </a:p>
                   </a:txBody>
-                  <a:tcPr anchor="ctr" marL="109728" marR="109728">
+                  <a:tcPr marL="109728" marR="109728" anchor="ctr">
                     <a:solidFill>
                       <a:srgbClr val="FFFFFF"/>
                     </a:solidFill>
                   </a:tcPr>
                 </a:tc>
+                <a:extLst>
+                  <a:ext uri="{0D108BD9-81ED-4DB2-BD59-A6C34878D82A}">
+                    <a16:rowId xmlns:a16="http://schemas.microsoft.com/office/drawing/2014/main" val="10001"/>
+                  </a:ext>
+                </a:extLst>
               </a:tr>
               <a:tr h="1051560">
                 <a:tc>
@@ -19267,7 +19467,7 @@
                       </a:r>
                     </a:p>
                   </a:txBody>
-                  <a:tcPr anchor="ctr" marL="109728" marR="109728">
+                  <a:tcPr marL="109728" marR="109728" anchor="ctr">
                     <a:solidFill>
                       <a:srgbClr val="EAF0FA"/>
                     </a:solidFill>
@@ -19290,7 +19490,7 @@
                       </a:r>
                     </a:p>
                   </a:txBody>
-                  <a:tcPr anchor="ctr" marL="109728" marR="109728">
+                  <a:tcPr marL="109728" marR="109728" anchor="ctr">
                     <a:solidFill>
                       <a:srgbClr val="FFFFFF"/>
                     </a:solidFill>
@@ -19303,22 +19503,69 @@
                     <a:p>
                       <a:pPr algn="l"/>
                       <a:r>
-                        <a:rPr sz="1300">
+                        <a:rPr sz="1300" dirty="0" err="1">
                           <a:solidFill>
                             <a:srgbClr val="333333"/>
                           </a:solidFill>
                           <a:latin typeface="メイリオ"/>
                         </a:rPr>
-                        <a:t>LINEアプリ内の行動（友だち追加・アンケート回答、ミニアプリ内の行動）、広告主アプリ内の行動（会員登録など）、アプリのダウンロードが必須のもの</a:t>
+                        <a:t>LINEアプリ内の行動（友だち追加・アンケート回答、ミニアプリ内の行動</a:t>
                       </a:r>
+                      <a:r>
+                        <a:rPr sz="1300" dirty="0">
+                          <a:solidFill>
+                            <a:srgbClr val="333333"/>
+                          </a:solidFill>
+                          <a:latin typeface="メイリオ"/>
+                        </a:rPr>
+                        <a:t>）、</a:t>
+                      </a:r>
+                      <a:r>
+                        <a:rPr sz="1300" dirty="0" err="1">
+                          <a:solidFill>
+                            <a:srgbClr val="333333"/>
+                          </a:solidFill>
+                          <a:latin typeface="メイリオ"/>
+                        </a:rPr>
+                        <a:t>広告主アプリ内の行動（会員登録など</a:t>
+                      </a:r>
+                      <a:r>
+                        <a:rPr sz="1300" dirty="0">
+                          <a:solidFill>
+                            <a:srgbClr val="333333"/>
+                          </a:solidFill>
+                          <a:latin typeface="メイリオ"/>
+                        </a:rPr>
+                        <a:t>）、</a:t>
+                      </a:r>
+                      <a:r>
+                        <a:rPr sz="1300" dirty="0" err="1">
+                          <a:solidFill>
+                            <a:srgbClr val="333333"/>
+                          </a:solidFill>
+                          <a:latin typeface="メイリオ"/>
+                        </a:rPr>
+                        <a:t>アプリのダウンロードが必須のもの</a:t>
+                      </a:r>
+                      <a:endParaRPr sz="1300" dirty="0">
+                        <a:solidFill>
+                          <a:srgbClr val="333333"/>
+                        </a:solidFill>
+                        <a:latin typeface="メイリオ"/>
+                      </a:endParaRPr>
                     </a:p>
                   </a:txBody>
-                  <a:tcPr anchor="ctr" marL="109728" marR="109728">
+                  <a:tcPr marL="109728" marR="109728" anchor="ctr">
                     <a:solidFill>
                       <a:srgbClr val="FFFFFF"/>
                     </a:solidFill>
                   </a:tcPr>
                 </a:tc>
+                <a:extLst>
+                  <a:ext uri="{0D108BD9-81ED-4DB2-BD59-A6C34878D82A}">
+                    <a16:rowId xmlns:a16="http://schemas.microsoft.com/office/drawing/2014/main" val="10002"/>
+                  </a:ext>
+                </a:extLst>
               </a:tr>
             </a:tbl>
           </a:graphicData>
@@ -19367,7 +19614,7 @@
 </file>
 
 <file path=ppt/slides/slide7.xml><?xml version="1.0" encoding="utf-8"?>
-<p:sld xmlns:a="http://schemas.openxmlformats.org/drawingml/2006/main" xmlns:p="http://schemas.openxmlformats.org/presentationml/2006/main" xmlns:r="http://schemas.openxmlformats.org/officeDocument/2006/relationships">
+<p:sld xmlns:a="http://schemas.openxmlformats.org/drawingml/2006/main" xmlns:r="http://schemas.openxmlformats.org/officeDocument/2006/relationships" xmlns:p="http://schemas.openxmlformats.org/presentationml/2006/main">
   <p:cSld>
     <p:spTree>
       <p:nvGrpSpPr>
@@ -19375,7 +19622,14 @@
         <p:cNvGrpSpPr/>
         <p:nvPr/>
       </p:nvGrpSpPr>
-      <p:grpSpPr/>
+      <p:grpSpPr>
+        <a:xfrm>
+          <a:off x="0" y="0"/>
+          <a:ext cx="0" cy="0"/>
+          <a:chOff x="0" y="0"/>
+          <a:chExt cx="0" cy="0"/>
+        </a:xfrm>
+      </p:grpSpPr>
       <p:sp>
         <p:nvSpPr>
           <p:cNvPr id="40" name="Google Shape;40;p3"/>
@@ -22405,7 +22659,7 @@
         </p:nvSpPr>
         <p:spPr>
           <a:xfrm>
-            <a:off x="709930" y="3403931"/>
+            <a:off x="709930" y="3158975"/>
             <a:ext cx="8486139" cy="1290828"/>
           </a:xfrm>
           <a:prstGeom prst="roundRect">
@@ -22512,7 +22766,7 @@
         </p:nvSpPr>
         <p:spPr>
           <a:xfrm>
-            <a:off x="709930" y="4877639"/>
+            <a:off x="709930" y="4632683"/>
             <a:ext cx="8486139" cy="1290828"/>
           </a:xfrm>
           <a:prstGeom prst="roundRect">
@@ -24028,7 +24282,7 @@
         </p:nvSpPr>
         <p:spPr>
           <a:xfrm>
-            <a:off x="548640" y="3254579"/>
+            <a:off x="547075" y="3069035"/>
             <a:ext cx="2816352" cy="822960"/>
           </a:xfrm>
           <a:prstGeom prst="roundRect">
@@ -24117,7 +24371,7 @@
         </p:nvSpPr>
         <p:spPr>
           <a:xfrm>
-            <a:off x="3547872" y="3254579"/>
+            <a:off x="3546307" y="3069035"/>
             <a:ext cx="2816352" cy="822960"/>
           </a:xfrm>
           <a:prstGeom prst="roundRect">
@@ -24206,7 +24460,7 @@
         </p:nvSpPr>
         <p:spPr>
           <a:xfrm>
-            <a:off x="6547104" y="3254579"/>
+            <a:off x="6545539" y="3069035"/>
             <a:ext cx="2816352" cy="822960"/>
           </a:xfrm>
           <a:prstGeom prst="roundRect">
@@ -24293,10 +24547,16 @@
           <p:cNvGraphicFramePr>
             <a:graphicFrameLocks noGrp="1"/>
           </p:cNvGraphicFramePr>
-          <p:nvPr/>
+          <p:nvPr>
+            <p:extLst>
+              <p:ext uri="{D42A27DB-BD31-4B8C-83A1-F6EECF244321}">
+                <p14:modId xmlns:p14="http://schemas.microsoft.com/office/powerpoint/2010/main" val="2837699988"/>
+              </p:ext>
+            </p:extLst>
+          </p:nvPr>
         </p:nvGraphicFramePr>
         <p:xfrm>
-          <a:off x="548640" y="4214699"/>
+          <a:off x="547075" y="4029155"/>
           <a:ext cx="8814816" cy="2221992"/>
         </p:xfrm>
         <a:graphic>
@@ -24306,8 +24566,20 @@
                 <a:tableStyleId>{5C22544A-7EE6-4342-B048-85BDC9FD1C3A}</a:tableStyleId>
               </a:tblPr>
               <a:tblGrid>
-                <a:gridCol w="1600200"/>
-                <a:gridCol w="7214616"/>
+                <a:gridCol w="1600200">
+                  <a:extLst>
+                    <a:ext uri="{9D8B030D-6E8A-4147-A177-3AD203B41FA5}">
+                      <a16:colId xmlns:a16="http://schemas.microsoft.com/office/drawing/2014/main" val="20000"/>
+                    </a:ext>
+                  </a:extLst>
+                </a:gridCol>
+                <a:gridCol w="7214616">
+                  <a:extLst>
+                    <a:ext uri="{9D8B030D-6E8A-4147-A177-3AD203B41FA5}">
+                      <a16:colId xmlns:a16="http://schemas.microsoft.com/office/drawing/2014/main" val="20001"/>
+                    </a:ext>
+                  </a:extLst>
+                </a:gridCol>
               </a:tblGrid>
               <a:tr h="283464">
                 <a:tc>
@@ -24327,7 +24599,7 @@
                       </a:r>
                     </a:p>
                   </a:txBody>
-                  <a:tcPr anchor="ctr" marL="109728" marR="109728" marT="18288" marB="18288">
+                  <a:tcPr marL="109728" marR="109728" marT="18288" marB="18288" anchor="ctr">
                     <a:solidFill>
                       <a:srgbClr val="EAF0FA"/>
                     </a:solidFill>
@@ -24350,12 +24622,17 @@
                       </a:r>
                     </a:p>
                   </a:txBody>
-                  <a:tcPr anchor="ctr" marL="109728" marR="109728" marT="18288" marB="18288">
+                  <a:tcPr marL="109728" marR="109728" marT="18288" marB="18288" anchor="ctr">
                     <a:solidFill>
                       <a:srgbClr val="FFFFFF"/>
                     </a:solidFill>
                   </a:tcPr>
                 </a:tc>
+                <a:extLst>
+                  <a:ext uri="{0D108BD9-81ED-4DB2-BD59-A6C34878D82A}">
+                    <a16:rowId xmlns:a16="http://schemas.microsoft.com/office/drawing/2014/main" val="10000"/>
+                  </a:ext>
+                </a:extLst>
               </a:tr>
               <a:tr h="283464">
                 <a:tc>
@@ -24375,7 +24652,7 @@
                       </a:r>
                     </a:p>
                   </a:txBody>
-                  <a:tcPr anchor="ctr" marL="109728" marR="109728" marT="18288" marB="18288">
+                  <a:tcPr marL="109728" marR="109728" marT="18288" marB="18288" anchor="ctr">
                     <a:solidFill>
                       <a:srgbClr val="EAF0FA"/>
                     </a:solidFill>
@@ -24398,12 +24675,17 @@
                       </a:r>
                     </a:p>
                   </a:txBody>
-                  <a:tcPr anchor="ctr" marL="109728" marR="109728" marT="18288" marB="18288">
+                  <a:tcPr marL="109728" marR="109728" marT="18288" marB="18288" anchor="ctr">
                     <a:solidFill>
                       <a:srgbClr val="FFFFFF"/>
                     </a:solidFill>
                   </a:tcPr>
                 </a:tc>
+                <a:extLst>
+                  <a:ext uri="{0D108BD9-81ED-4DB2-BD59-A6C34878D82A}">
+                    <a16:rowId xmlns:a16="http://schemas.microsoft.com/office/drawing/2014/main" val="10001"/>
+                  </a:ext>
+                </a:extLst>
               </a:tr>
               <a:tr h="283464">
                 <a:tc>
@@ -24423,7 +24705,7 @@
                       </a:r>
                     </a:p>
                   </a:txBody>
-                  <a:tcPr anchor="ctr" marL="109728" marR="109728" marT="18288" marB="18288">
+                  <a:tcPr marL="109728" marR="109728" marT="18288" marB="18288" anchor="ctr">
                     <a:solidFill>
                       <a:srgbClr val="EAF0FA"/>
                     </a:solidFill>
@@ -24446,12 +24728,17 @@
                       </a:r>
                     </a:p>
                   </a:txBody>
-                  <a:tcPr anchor="ctr" marL="109728" marR="109728" marT="18288" marB="18288">
+                  <a:tcPr marL="109728" marR="109728" marT="18288" marB="18288" anchor="ctr">
                     <a:solidFill>
                       <a:srgbClr val="FFFFFF"/>
                     </a:solidFill>
                   </a:tcPr>
                 </a:tc>
+                <a:extLst>
+                  <a:ext uri="{0D108BD9-81ED-4DB2-BD59-A6C34878D82A}">
+                    <a16:rowId xmlns:a16="http://schemas.microsoft.com/office/drawing/2014/main" val="10002"/>
+                  </a:ext>
+                </a:extLst>
               </a:tr>
               <a:tr h="283464">
                 <a:tc>
@@ -24471,7 +24758,7 @@
                       </a:r>
                     </a:p>
                   </a:txBody>
-                  <a:tcPr anchor="ctr" marL="109728" marR="109728" marT="18288" marB="18288">
+                  <a:tcPr marL="109728" marR="109728" marT="18288" marB="18288" anchor="ctr">
                     <a:solidFill>
                       <a:srgbClr val="EAF0FA"/>
                     </a:solidFill>
@@ -24494,12 +24781,17 @@
                       </a:r>
                     </a:p>
                   </a:txBody>
-                  <a:tcPr anchor="ctr" marL="109728" marR="109728" marT="18288" marB="18288">
+                  <a:tcPr marL="109728" marR="109728" marT="18288" marB="18288" anchor="ctr">
                     <a:solidFill>
                       <a:srgbClr val="FFFFFF"/>
                     </a:solidFill>
                   </a:tcPr>
                 </a:tc>
+                <a:extLst>
+                  <a:ext uri="{0D108BD9-81ED-4DB2-BD59-A6C34878D82A}">
+                    <a16:rowId xmlns:a16="http://schemas.microsoft.com/office/drawing/2014/main" val="10003"/>
+                  </a:ext>
+                </a:extLst>
               </a:tr>
               <a:tr h="283464">
                 <a:tc>
@@ -24519,7 +24811,7 @@
                       </a:r>
                     </a:p>
                   </a:txBody>
-                  <a:tcPr anchor="ctr" marL="109728" marR="109728" marT="18288" marB="18288">
+                  <a:tcPr marL="109728" marR="109728" marT="18288" marB="18288" anchor="ctr">
                     <a:solidFill>
                       <a:srgbClr val="EAF0FA"/>
                     </a:solidFill>
@@ -24542,12 +24834,17 @@
                       </a:r>
                     </a:p>
                   </a:txBody>
-                  <a:tcPr anchor="ctr" marL="109728" marR="109728" marT="18288" marB="18288">
+                  <a:tcPr marL="109728" marR="109728" marT="18288" marB="18288" anchor="ctr">
                     <a:solidFill>
                       <a:srgbClr val="FFFFFF"/>
                     </a:solidFill>
                   </a:tcPr>
                 </a:tc>
+                <a:extLst>
+                  <a:ext uri="{0D108BD9-81ED-4DB2-BD59-A6C34878D82A}">
+                    <a16:rowId xmlns:a16="http://schemas.microsoft.com/office/drawing/2014/main" val="10004"/>
+                  </a:ext>
+                </a:extLst>
               </a:tr>
               <a:tr h="804672">
                 <a:tc>
@@ -24567,7 +24864,7 @@
                       </a:r>
                     </a:p>
                   </a:txBody>
-                  <a:tcPr anchor="ctr" marL="109728" marR="109728" marT="18288" marB="18288">
+                  <a:tcPr marL="109728" marR="109728" marT="18288" marB="18288" anchor="ctr">
                     <a:solidFill>
                       <a:srgbClr val="EAF0FA"/>
                     </a:solidFill>
@@ -24626,12 +24923,17 @@
                       </a:r>
                     </a:p>
                   </a:txBody>
-                  <a:tcPr anchor="ctr" marL="109728" marR="109728" marT="18288" marB="18288">
+                  <a:tcPr marL="109728" marR="109728" marT="18288" marB="18288" anchor="ctr">
                     <a:solidFill>
                       <a:srgbClr val="FFFFFF"/>
                     </a:solidFill>
                   </a:tcPr>
                 </a:tc>
+                <a:extLst>
+                  <a:ext uri="{0D108BD9-81ED-4DB2-BD59-A6C34878D82A}">
+                    <a16:rowId xmlns:a16="http://schemas.microsoft.com/office/drawing/2014/main" val="10005"/>
+                  </a:ext>
+                </a:extLst>
               </a:tr>
             </a:tbl>
           </a:graphicData>

--- a/LINEOA媒体最新情報_2026年10月トレンドレポート.pptx
+++ b/LINEOA媒体最新情報_2026年10月トレンドレポート.pptx
@@ -4661,8 +4661,8 @@
         </p:nvSpPr>
         <p:spPr>
           <a:xfrm>
-            <a:off x="2319020" y="3143054"/>
-            <a:ext cx="5267960" cy="1290828"/>
+            <a:off x="656590" y="3332508"/>
+            <a:ext cx="8592820" cy="1290828"/>
           </a:xfrm>
           <a:prstGeom prst="roundRect">
             <a:avLst>
@@ -4768,8 +4768,8 @@
         </p:nvSpPr>
         <p:spPr>
           <a:xfrm>
-            <a:off x="2319020" y="4616762"/>
-            <a:ext cx="5267960" cy="1290828"/>
+            <a:off x="656590" y="4806216"/>
+            <a:ext cx="8592820" cy="1290828"/>
           </a:xfrm>
           <a:prstGeom prst="roundRect">
             <a:avLst>
@@ -6261,8 +6261,8 @@
         </p:nvSpPr>
         <p:spPr>
           <a:xfrm>
-            <a:off x="544108" y="3307579"/>
-            <a:ext cx="4315968" cy="2606040"/>
+            <a:off x="656590" y="3332508"/>
+            <a:ext cx="4207272" cy="2606040"/>
           </a:xfrm>
           <a:prstGeom prst="roundRect">
             <a:avLst>
@@ -6299,7 +6299,7 @@
           <a:p>
             <a:pPr algn="l"/>
             <a:r>
-              <a:rPr sz="1500" b="1" dirty="0" err="1">
+              <a:rPr sz="1400" b="1" dirty="0" err="1">
                 <a:solidFill>
                   <a:srgbClr val="15133D"/>
                 </a:solidFill>
@@ -6421,8 +6421,8 @@
         </p:nvSpPr>
         <p:spPr>
           <a:xfrm>
-            <a:off x="5042956" y="3307579"/>
-            <a:ext cx="4315968" cy="2606040"/>
+            <a:off x="5042137" y="3332508"/>
+            <a:ext cx="4207272" cy="2606040"/>
           </a:xfrm>
           <a:prstGeom prst="roundRect">
             <a:avLst>
@@ -6459,7 +6459,7 @@
           <a:p>
             <a:pPr algn="l"/>
             <a:r>
-              <a:rPr sz="1500" b="1" dirty="0" err="1">
+              <a:rPr sz="1400" b="1" dirty="0" err="1">
                 <a:solidFill>
                   <a:srgbClr val="15133D"/>
                 </a:solidFill>
@@ -7967,8 +7967,8 @@
         </p:nvSpPr>
         <p:spPr>
           <a:xfrm>
-            <a:off x="548640" y="3185999"/>
-            <a:ext cx="4315968" cy="1561492"/>
+            <a:off x="658115" y="3332508"/>
+            <a:ext cx="4206526" cy="1561492"/>
           </a:xfrm>
           <a:prstGeom prst="roundRect">
             <a:avLst>
@@ -8105,8 +8105,8 @@
         </p:nvSpPr>
         <p:spPr>
           <a:xfrm>
-            <a:off x="5047488" y="3185999"/>
-            <a:ext cx="4315968" cy="1561492"/>
+            <a:off x="5042883" y="3332508"/>
+            <a:ext cx="4206526" cy="1561492"/>
           </a:xfrm>
           <a:prstGeom prst="roundRect">
             <a:avLst>
@@ -8268,8 +8268,8 @@
         </p:nvSpPr>
         <p:spPr>
           <a:xfrm>
-            <a:off x="547075" y="4902588"/>
-            <a:ext cx="8814816" cy="1325880"/>
+            <a:off x="656590" y="5049097"/>
+            <a:ext cx="8591294" cy="1325880"/>
           </a:xfrm>
           <a:prstGeom prst="roundRect">
             <a:avLst>
@@ -9799,8 +9799,8 @@
           </p:nvPr>
         </p:nvGraphicFramePr>
         <p:xfrm>
-          <a:off x="547075" y="3155245"/>
-          <a:ext cx="8814816" cy="1188720"/>
+          <a:off x="656590" y="3332508"/>
+          <a:ext cx="8592820" cy="1188720"/>
         </p:xfrm>
         <a:graphic>
           <a:graphicData uri="http://schemas.openxmlformats.org/drawingml/2006/table">
@@ -9809,21 +9809,21 @@
                 <a:tableStyleId>{5C22544A-7EE6-4342-B048-85BDC9FD1C3A}</a:tableStyleId>
               </a:tblPr>
               <a:tblGrid>
-                <a:gridCol w="1737360">
+                <a:gridCol w="1693605">
                   <a:extLst>
                     <a:ext uri="{9D8B030D-6E8A-4147-A177-3AD203B41FA5}">
                       <a16:colId xmlns:a16="http://schemas.microsoft.com/office/drawing/2014/main" val="20000"/>
                     </a:ext>
                   </a:extLst>
                 </a:gridCol>
-                <a:gridCol w="3538728">
+                <a:gridCol w="3449607">
                   <a:extLst>
                     <a:ext uri="{9D8B030D-6E8A-4147-A177-3AD203B41FA5}">
                       <a16:colId xmlns:a16="http://schemas.microsoft.com/office/drawing/2014/main" val="20001"/>
                     </a:ext>
                   </a:extLst>
                 </a:gridCol>
-                <a:gridCol w="3538728">
+                <a:gridCol w="3449608">
                   <a:extLst>
                     <a:ext uri="{9D8B030D-6E8A-4147-A177-3AD203B41FA5}">
                       <a16:colId xmlns:a16="http://schemas.microsoft.com/office/drawing/2014/main" val="20002"/>
@@ -10147,8 +10147,8 @@
         </p:nvSpPr>
         <p:spPr>
           <a:xfrm>
-            <a:off x="547075" y="4526845"/>
-            <a:ext cx="8814816" cy="1600200"/>
+            <a:off x="656590" y="4704108"/>
+            <a:ext cx="8592820" cy="1600200"/>
           </a:xfrm>
           <a:prstGeom prst="roundRect">
             <a:avLst>
@@ -14173,8 +14173,8 @@
         </p:nvSpPr>
         <p:spPr>
           <a:xfrm>
-            <a:off x="967740" y="3313126"/>
-            <a:ext cx="7970520" cy="1548638"/>
+            <a:off x="656590" y="3332508"/>
+            <a:ext cx="8592820" cy="1548638"/>
           </a:xfrm>
           <a:prstGeom prst="roundRect">
             <a:avLst>
@@ -14324,8 +14324,8 @@
         </p:nvSpPr>
         <p:spPr>
           <a:xfrm>
-            <a:off x="967740" y="5044644"/>
-            <a:ext cx="7970520" cy="1214628"/>
+            <a:off x="656590" y="5064026"/>
+            <a:ext cx="8592820" cy="1214628"/>
           </a:xfrm>
           <a:prstGeom prst="roundRect">
             <a:avLst>
@@ -15851,8 +15851,8 @@
         </p:nvSpPr>
         <p:spPr>
           <a:xfrm>
-            <a:off x="545592" y="3199715"/>
-            <a:ext cx="8814816" cy="3172968"/>
+            <a:off x="656590" y="3332508"/>
+            <a:ext cx="8592820" cy="3172968"/>
           </a:xfrm>
           <a:prstGeom prst="roundRect">
             <a:avLst>
@@ -19249,8 +19249,8 @@
           </p:nvPr>
         </p:nvGraphicFramePr>
         <p:xfrm>
-          <a:off x="547076" y="3279367"/>
-          <a:ext cx="8814815" cy="2304288"/>
+          <a:off x="656590" y="3332508"/>
+          <a:ext cx="8591294" cy="2304288"/>
         </p:xfrm>
         <a:graphic>
           <a:graphicData uri="http://schemas.openxmlformats.org/drawingml/2006/table">
@@ -19259,21 +19259,21 @@
                 <a:tableStyleId>{5C22544A-7EE6-4342-B048-85BDC9FD1C3A}</a:tableStyleId>
               </a:tblPr>
               <a:tblGrid>
-                <a:gridCol w="1737360">
+                <a:gridCol w="1693305">
                   <a:extLst>
                     <a:ext uri="{9D8B030D-6E8A-4147-A177-3AD203B41FA5}">
                       <a16:colId xmlns:a16="http://schemas.microsoft.com/office/drawing/2014/main" val="20000"/>
                     </a:ext>
                   </a:extLst>
                 </a:gridCol>
-                <a:gridCol w="3291840">
+                <a:gridCol w="3208367">
                   <a:extLst>
                     <a:ext uri="{9D8B030D-6E8A-4147-A177-3AD203B41FA5}">
                       <a16:colId xmlns:a16="http://schemas.microsoft.com/office/drawing/2014/main" val="20001"/>
                     </a:ext>
                   </a:extLst>
                 </a:gridCol>
-                <a:gridCol w="3785615">
+                <a:gridCol w="3689622">
                   <a:extLst>
                     <a:ext uri="{9D8B030D-6E8A-4147-A177-3AD203B41FA5}">
                       <a16:colId xmlns:a16="http://schemas.microsoft.com/office/drawing/2014/main" val="20002"/>
@@ -19579,8 +19579,8 @@
         </p:nvSpPr>
         <p:spPr>
           <a:xfrm>
-            <a:off x="548640" y="5814899"/>
-            <a:ext cx="8814816" cy="320040"/>
+            <a:off x="658114" y="5868040"/>
+            <a:ext cx="8591295" cy="320040"/>
           </a:xfrm>
           <a:prstGeom prst="rect">
             <a:avLst/>
@@ -21022,8 +21022,8 @@
         </p:nvSpPr>
         <p:spPr>
           <a:xfrm>
-            <a:off x="570865" y="3217876"/>
-            <a:ext cx="8764270" cy="1476883"/>
+            <a:off x="656590" y="3332508"/>
+            <a:ext cx="8592820" cy="1476883"/>
           </a:xfrm>
           <a:prstGeom prst="roundRect">
             <a:avLst>
@@ -21136,8 +21136,8 @@
         </p:nvSpPr>
         <p:spPr>
           <a:xfrm>
-            <a:off x="570865" y="4877639"/>
-            <a:ext cx="8764270" cy="1476883"/>
+            <a:off x="656590" y="4992271"/>
+            <a:ext cx="8592820" cy="1476883"/>
           </a:xfrm>
           <a:prstGeom prst="roundRect">
             <a:avLst>
@@ -22659,8 +22659,8 @@
         </p:nvSpPr>
         <p:spPr>
           <a:xfrm>
-            <a:off x="709930" y="3158975"/>
-            <a:ext cx="8486139" cy="1290828"/>
+            <a:off x="656590" y="3332508"/>
+            <a:ext cx="8592820" cy="1290828"/>
           </a:xfrm>
           <a:prstGeom prst="roundRect">
             <a:avLst>
@@ -22766,8 +22766,8 @@
         </p:nvSpPr>
         <p:spPr>
           <a:xfrm>
-            <a:off x="709930" y="4632683"/>
-            <a:ext cx="8486139" cy="1290828"/>
+            <a:off x="656590" y="4806216"/>
+            <a:ext cx="8592820" cy="1290828"/>
           </a:xfrm>
           <a:prstGeom prst="roundRect">
             <a:avLst>
@@ -24282,8 +24282,8 @@
         </p:nvSpPr>
         <p:spPr>
           <a:xfrm>
-            <a:off x="547075" y="3069035"/>
-            <a:ext cx="2816352" cy="822960"/>
+            <a:off x="656590" y="3332508"/>
+            <a:ext cx="2745423" cy="804672"/>
           </a:xfrm>
           <a:prstGeom prst="roundRect">
             <a:avLst>
@@ -24371,8 +24371,8 @@
         </p:nvSpPr>
         <p:spPr>
           <a:xfrm>
-            <a:off x="3546307" y="3069035"/>
-            <a:ext cx="2816352" cy="822960"/>
+            <a:off x="3580288" y="3332508"/>
+            <a:ext cx="2745423" cy="804672"/>
           </a:xfrm>
           <a:prstGeom prst="roundRect">
             <a:avLst>
@@ -24460,8 +24460,8 @@
         </p:nvSpPr>
         <p:spPr>
           <a:xfrm>
-            <a:off x="6545539" y="3069035"/>
-            <a:ext cx="2816352" cy="822960"/>
+            <a:off x="6503986" y="3332508"/>
+            <a:ext cx="2745423" cy="804672"/>
           </a:xfrm>
           <a:prstGeom prst="roundRect">
             <a:avLst>
@@ -24556,8 +24556,8 @@
           </p:nvPr>
         </p:nvGraphicFramePr>
         <p:xfrm>
-          <a:off x="547075" y="4029155"/>
-          <a:ext cx="8814816" cy="2221992"/>
+          <a:off x="656590" y="4210332"/>
+          <a:ext cx="8592820" cy="2221992"/>
         </p:xfrm>
         <a:graphic>
           <a:graphicData uri="http://schemas.openxmlformats.org/drawingml/2006/table">
@@ -24566,14 +24566,14 @@
                 <a:tableStyleId>{5C22544A-7EE6-4342-B048-85BDC9FD1C3A}</a:tableStyleId>
               </a:tblPr>
               <a:tblGrid>
-                <a:gridCol w="1600200">
+                <a:gridCol w="1559899">
                   <a:extLst>
                     <a:ext uri="{9D8B030D-6E8A-4147-A177-3AD203B41FA5}">
                       <a16:colId xmlns:a16="http://schemas.microsoft.com/office/drawing/2014/main" val="20000"/>
                     </a:ext>
                   </a:extLst>
                 </a:gridCol>
-                <a:gridCol w="7214616">
+                <a:gridCol w="7032921">
                   <a:extLst>
                     <a:ext uri="{9D8B030D-6E8A-4147-A177-3AD203B41FA5}">
                       <a16:colId xmlns:a16="http://schemas.microsoft.com/office/drawing/2014/main" val="20001"/>

--- a/LINEOA媒体最新情報_2026年10月トレンドレポート.pptx
+++ b/LINEOA媒体最新情報_2026年10月トレンドレポート.pptx
@@ -11703,7 +11703,7 @@
           </p:nvPr>
         </p:nvGraphicFramePr>
         <p:xfrm>
-          <a:off x="547075" y="3152534"/>
+          <a:off x="547075" y="3332508"/>
           <a:ext cx="9061626" cy="2596896"/>
         </p:xfrm>
         <a:graphic>
